--- a/重點檔案/01_成果簡報.pptx
+++ b/重點檔案/01_成果簡報.pptx
@@ -2,42 +2,42 @@
 <file path=ppt/presentation.xml><?xml version="1.0" encoding="utf-8"?>
 <p:presentation xmlns:p="http://schemas.openxmlformats.org/presentationml/2006/main" embedTrueTypeFonts="1" saveSubsetFonts="0">
   <p:sldMasterIdLst>
-    <p:sldMasterId xmlns:r="http://schemas.openxmlformats.org/officeDocument/2006/relationships" id="2147483648" r:id="Rdba46d4b3ed047ab"/>
+    <p:sldMasterId xmlns:r="http://schemas.openxmlformats.org/officeDocument/2006/relationships" id="2147483648" r:id="Rc5ff56e2548749a9"/>
   </p:sldMasterIdLst>
   <p:notesMasterIdLst>
-    <p:notesMasterId xmlns:r="http://schemas.openxmlformats.org/officeDocument/2006/relationships" r:id="Rabf4b0b04b004af9"/>
+    <p:notesMasterId xmlns:r="http://schemas.openxmlformats.org/officeDocument/2006/relationships" r:id="Rdac4bdf4fd6447a5"/>
   </p:notesMasterIdLst>
   <p:sldIdLst>
-    <p:sldId xmlns:r="http://schemas.openxmlformats.org/officeDocument/2006/relationships" id="256" r:id="Rf5d1919a9ba44041"/>
-    <p:sldId xmlns:r="http://schemas.openxmlformats.org/officeDocument/2006/relationships" id="257" r:id="Rfea7b41c9cd4459d"/>
-    <p:sldId xmlns:r="http://schemas.openxmlformats.org/officeDocument/2006/relationships" id="258" r:id="Rd5e4ebd850e940fe"/>
-    <p:sldId xmlns:r="http://schemas.openxmlformats.org/officeDocument/2006/relationships" id="259" r:id="Rd169645203444213"/>
-    <p:sldId xmlns:r="http://schemas.openxmlformats.org/officeDocument/2006/relationships" id="260" r:id="R1d57912c16f748c2"/>
-    <p:sldId xmlns:r="http://schemas.openxmlformats.org/officeDocument/2006/relationships" id="261" r:id="R098a1964080f4974"/>
-    <p:sldId xmlns:r="http://schemas.openxmlformats.org/officeDocument/2006/relationships" id="262" r:id="R042db45652fb4e7f"/>
-    <p:sldId xmlns:r="http://schemas.openxmlformats.org/officeDocument/2006/relationships" id="263" r:id="R5480f656598544e2"/>
-    <p:sldId xmlns:r="http://schemas.openxmlformats.org/officeDocument/2006/relationships" id="264" r:id="Rcf3b0581d3e74ef0"/>
-    <p:sldId xmlns:r="http://schemas.openxmlformats.org/officeDocument/2006/relationships" id="265" r:id="Rd3af1605251d4ce7"/>
-    <p:sldId xmlns:r="http://schemas.openxmlformats.org/officeDocument/2006/relationships" id="266" r:id="R21d2769cfec7495c"/>
-    <p:sldId xmlns:r="http://schemas.openxmlformats.org/officeDocument/2006/relationships" id="267" r:id="R5ceb8ad62c544579"/>
-    <p:sldId xmlns:r="http://schemas.openxmlformats.org/officeDocument/2006/relationships" id="268" r:id="R34098c5975a04b20"/>
-    <p:sldId xmlns:r="http://schemas.openxmlformats.org/officeDocument/2006/relationships" id="269" r:id="Rd7e5b8fc60534c05"/>
-    <p:sldId xmlns:r="http://schemas.openxmlformats.org/officeDocument/2006/relationships" id="270" r:id="R4972ebe157664b85"/>
+    <p:sldId xmlns:r="http://schemas.openxmlformats.org/officeDocument/2006/relationships" id="256" r:id="R34f657044ace4089"/>
+    <p:sldId xmlns:r="http://schemas.openxmlformats.org/officeDocument/2006/relationships" id="257" r:id="Rd62c1186822e4835"/>
+    <p:sldId xmlns:r="http://schemas.openxmlformats.org/officeDocument/2006/relationships" id="258" r:id="Ra53f402798ab49da"/>
+    <p:sldId xmlns:r="http://schemas.openxmlformats.org/officeDocument/2006/relationships" id="259" r:id="R5e882451d3e94246"/>
+    <p:sldId xmlns:r="http://schemas.openxmlformats.org/officeDocument/2006/relationships" id="260" r:id="Re01c34958f024240"/>
+    <p:sldId xmlns:r="http://schemas.openxmlformats.org/officeDocument/2006/relationships" id="261" r:id="R580c203cd30f4abb"/>
+    <p:sldId xmlns:r="http://schemas.openxmlformats.org/officeDocument/2006/relationships" id="262" r:id="R8647766a24c4448e"/>
+    <p:sldId xmlns:r="http://schemas.openxmlformats.org/officeDocument/2006/relationships" id="263" r:id="R4df342e9c39f4e0a"/>
+    <p:sldId xmlns:r="http://schemas.openxmlformats.org/officeDocument/2006/relationships" id="264" r:id="Re4daa26ad20f4496"/>
+    <p:sldId xmlns:r="http://schemas.openxmlformats.org/officeDocument/2006/relationships" id="265" r:id="R17a24d670b9444b8"/>
+    <p:sldId xmlns:r="http://schemas.openxmlformats.org/officeDocument/2006/relationships" id="266" r:id="R94e3547a877f4b28"/>
+    <p:sldId xmlns:r="http://schemas.openxmlformats.org/officeDocument/2006/relationships" id="267" r:id="R29b5cbdc22644fb6"/>
+    <p:sldId xmlns:r="http://schemas.openxmlformats.org/officeDocument/2006/relationships" id="268" r:id="R0d9a3297c0e04e28"/>
+    <p:sldId xmlns:r="http://schemas.openxmlformats.org/officeDocument/2006/relationships" id="269" r:id="R5f851fcd979c4253"/>
+    <p:sldId xmlns:r="http://schemas.openxmlformats.org/officeDocument/2006/relationships" id="270" r:id="R25c3e5c7290f425a"/>
   </p:sldIdLst>
   <p:sldSz cx="18288000" cy="10287000"/>
   <p:notesSz cx="6858000" cy="9144000"/>
   <p:embeddedFontLst>
     <p:embeddedFont>
       <p:font typeface="Garet Bold"/>
-      <p:regular xmlns:r="http://schemas.openxmlformats.org/officeDocument/2006/relationships" r:id="R580264a023fe4da3"/>
+      <p:regular xmlns:r="http://schemas.openxmlformats.org/officeDocument/2006/relationships" r:id="Ra23660db6ca847ce"/>
     </p:embeddedFont>
     <p:embeddedFont>
       <p:font typeface="Garet"/>
-      <p:regular xmlns:r="http://schemas.openxmlformats.org/officeDocument/2006/relationships" r:id="R2c09cfcc514b47be"/>
+      <p:regular xmlns:r="http://schemas.openxmlformats.org/officeDocument/2006/relationships" r:id="R202921978b1d456b"/>
     </p:embeddedFont>
     <p:embeddedFont>
       <p:font typeface="Poppins"/>
-      <p:regular xmlns:r="http://schemas.openxmlformats.org/officeDocument/2006/relationships" r:id="Rf21e6f59d52d4516"/>
+      <p:regular xmlns:r="http://schemas.openxmlformats.org/officeDocument/2006/relationships" r:id="Rf4103ac6c948433a"/>
     </p:embeddedFont>
   </p:embeddedFontLst>
   <p:defaultTextStyle>
@@ -679,7 +679,7 @@
           <a:lstStyle xmlns:a="http://schemas.openxmlformats.org/drawingml/2006/main"/>
           <a:p xmlns:a="http://schemas.openxmlformats.org/drawingml/2006/main">
             <a:r>
-              <a:t>QA單人40秒的名目能力90件/h，小於含故障清洗的期望115.2箱/h。原提示將瓶頸全歸清洗，與這組物理輸入不完全一致；第二台清洗不能消除QA負荷，P4的實際到站支援是重要因素。圖表可編輯，附原始數據及CI。</a:t>
+              <a:t>S1、各30次。P4 8m平均外包110.8箱，12m84.7箱，現有DOE不是支援/外包的獨立消融。P4 8m阻塞0.951% [0.783,1.118]；12m0.711% [0.565,0.856]。QA單人40秒能力90/h，低於清洗期望115.2/h，單加第二台清洗P1仍阻塞3.944%。</a:t>
             </a:r>
           </a:p>
           <a:p xmlns:a="http://schemas.openxmlformats.org/drawingml/2006/main">
@@ -999,7 +999,7 @@
           <a:lstStyle xmlns:a="http://schemas.openxmlformats.org/drawingml/2006/main"/>
           <a:p xmlns:a="http://schemas.openxmlformats.org/drawingml/2006/main">
             <a:r>
-              <a:t>0:00全景與配對；0:40 Before；1:40 After與支援抵達；3:00 Dashboard、守恆及原始表；4:00 8m/12m與ROI答辯。熱力圖同種子、同時刻116100s；紅色為起始至截點加工≥90%或Blocked≥1%，不是所有物件的即時狀態。Dashboard為原生generateHTML匯出畫面，多行控制欄僅做HTML換行相容修正，並非全桌面錄影。</a:t>
+              <a:t>本頁左側為可編輯數值熱圖，原生狀態時間讀回，非連續空間熱力圖。兩種指標採不同色階，不可跨尺度以顏色比較；加工和Blocked也不相加視為全部狀態。原3D紅色來自加工≥90%或阻塞≥1%的累計門檻，非當下狀態。Dashboard仍為40文字卡加兩圖，本次沒有改寫原生GUI。影片330.752秒為3600張原生3D影格，非全桌面錄影。</a:t>
             </a:r>
           </a:p>
           <a:p xmlns:a="http://schemas.openxmlformats.org/drawingml/2006/main">
@@ -1559,7 +1559,7 @@
           <a:lstStyle xmlns:a="http://schemas.openxmlformats.org/drawingml/2006/main"/>
           <a:p xmlns:a="http://schemas.openxmlformats.org/drawingml/2006/main">
             <a:r>
-              <a:t>係數0.495為課程給定，不宣稱當年度官方電力排碳係數；本案不是完整生命週期盤查。嚴格版僅扣清洗電力，完整版再扣輸送與外包。</a:t>
+              <a:t>S1/P0無外包，按每次能耗/退貨量計算再取平均，0.184875145kWh/件。1−E×0.495/0.35=73.853%。同口徑若剛好42%，E約0.410101kWh/件；差異來自給定係數、能耗與基準。P4 12m的完整減碳CI[73.966,74.023]%，下界亦大於42%；包含平均84.7箱外包及相應排放，不能只套電力公式。0.35與0.495為課程係數，未涵蓋完整箱製造與逆物流LCA。</a:t>
             </a:r>
           </a:p>
           <a:p xmlns:a="http://schemas.openxmlformats.org/drawingml/2006/main">
@@ -1776,7 +1776,7 @@
           <p:cNvPr id="2" name="Title 1">
             <a:extLst xmlns:a="http://schemas.openxmlformats.org/drawingml/2006/main">
               <a:ext uri="{FF2B5EF4-FFF2-40B4-BE49-F238E27FC236}">
-                <a16:creationId xmlns:a16="http://schemas.microsoft.com/office/drawing/2014/main" id="{E05141B3-3260-4719-A09A-1783AC23B499}"/>
+                <a16:creationId xmlns:a16="http://schemas.microsoft.com/office/drawing/2014/main" id="{51280DC0-AFF4-42B3-8F1A-07018AFDF02B}"/>
               </a:ext>
             </a:extLst>
           </p:cNvPr>
@@ -1809,7 +1809,7 @@
           <p:cNvPr id="3" name="Subtitle 2">
             <a:extLst xmlns:a="http://schemas.openxmlformats.org/drawingml/2006/main">
               <a:ext uri="{FF2B5EF4-FFF2-40B4-BE49-F238E27FC236}">
-                <a16:creationId xmlns:a16="http://schemas.microsoft.com/office/drawing/2014/main" id="{39B40C22-B2E7-4072-B172-72C3999C9B16}"/>
+                <a16:creationId xmlns:a16="http://schemas.microsoft.com/office/drawing/2014/main" id="{F28298CD-266E-46C8-8D02-68B64FA17E3A}"/>
               </a:ext>
             </a:extLst>
           </p:cNvPr>
@@ -1933,7 +1933,7 @@
           <p:cNvPr id="4" name="Date Placeholder 3">
             <a:extLst xmlns:a="http://schemas.openxmlformats.org/drawingml/2006/main">
               <a:ext uri="{FF2B5EF4-FFF2-40B4-BE49-F238E27FC236}">
-                <a16:creationId xmlns:a16="http://schemas.microsoft.com/office/drawing/2014/main" id="{8787C631-A7EF-4D2C-844C-B95C4E712EE8}"/>
+                <a16:creationId xmlns:a16="http://schemas.microsoft.com/office/drawing/2014/main" id="{93DAB6B2-DD2D-4DE5-BA91-4E2C037C6A33}"/>
               </a:ext>
             </a:extLst>
           </p:cNvPr>
@@ -1961,7 +1961,7 @@
           <p:cNvPr id="5" name="Footer Placeholder 4">
             <a:extLst xmlns:a="http://schemas.openxmlformats.org/drawingml/2006/main">
               <a:ext uri="{FF2B5EF4-FFF2-40B4-BE49-F238E27FC236}">
-                <a16:creationId xmlns:a16="http://schemas.microsoft.com/office/drawing/2014/main" id="{C7EDC9A1-82E8-45E5-9AAD-617B9939B251}"/>
+                <a16:creationId xmlns:a16="http://schemas.microsoft.com/office/drawing/2014/main" id="{FADB8065-F64C-450F-AB81-02E36032CEBA}"/>
               </a:ext>
             </a:extLst>
           </p:cNvPr>
@@ -1986,7 +1986,7 @@
           <p:cNvPr id="6" name="Slide Number Placeholder 5">
             <a:extLst xmlns:a="http://schemas.openxmlformats.org/drawingml/2006/main">
               <a:ext uri="{FF2B5EF4-FFF2-40B4-BE49-F238E27FC236}">
-                <a16:creationId xmlns:a16="http://schemas.microsoft.com/office/drawing/2014/main" id="{C18BFF2F-7F52-4D37-BDCC-89B457C18DEC}"/>
+                <a16:creationId xmlns:a16="http://schemas.microsoft.com/office/drawing/2014/main" id="{3856836E-15BF-4114-B155-7761001C5433}"/>
               </a:ext>
             </a:extLst>
           </p:cNvPr>
@@ -2031,7 +2031,7 @@
           <p:cNvPr id="2" name="Title 1">
             <a:extLst xmlns:a="http://schemas.openxmlformats.org/drawingml/2006/main">
               <a:ext uri="{FF2B5EF4-FFF2-40B4-BE49-F238E27FC236}">
-                <a16:creationId xmlns:a16="http://schemas.microsoft.com/office/drawing/2014/main" id="{1E2C0C23-C1DC-400B-B835-F4AF50594875}"/>
+                <a16:creationId xmlns:a16="http://schemas.microsoft.com/office/drawing/2014/main" id="{308EFA77-47F6-4276-B898-2EF3969508AD}"/>
               </a:ext>
             </a:extLst>
           </p:cNvPr>
@@ -2059,7 +2059,7 @@
           <p:cNvPr id="3" name="Vertical Text Placeholder 2">
             <a:extLst xmlns:a="http://schemas.openxmlformats.org/drawingml/2006/main">
               <a:ext uri="{FF2B5EF4-FFF2-40B4-BE49-F238E27FC236}">
-                <a16:creationId xmlns:a16="http://schemas.microsoft.com/office/drawing/2014/main" id="{586B800B-5C85-4820-9B63-72275D5E72E1}"/>
+                <a16:creationId xmlns:a16="http://schemas.microsoft.com/office/drawing/2014/main" id="{DC37069E-4999-4DDE-846B-760BA3B99D90}"/>
               </a:ext>
             </a:extLst>
           </p:cNvPr>
@@ -2122,7 +2122,7 @@
           <p:cNvPr id="4" name="Date Placeholder 3">
             <a:extLst xmlns:a="http://schemas.openxmlformats.org/drawingml/2006/main">
               <a:ext uri="{FF2B5EF4-FFF2-40B4-BE49-F238E27FC236}">
-                <a16:creationId xmlns:a16="http://schemas.microsoft.com/office/drawing/2014/main" id="{EE415A31-6B6A-4563-9408-C2139FDF3EBC}"/>
+                <a16:creationId xmlns:a16="http://schemas.microsoft.com/office/drawing/2014/main" id="{14B40B0F-F760-42A5-9343-4BB8A34B10F0}"/>
               </a:ext>
             </a:extLst>
           </p:cNvPr>
@@ -2150,7 +2150,7 @@
           <p:cNvPr id="5" name="Footer Placeholder 4">
             <a:extLst xmlns:a="http://schemas.openxmlformats.org/drawingml/2006/main">
               <a:ext uri="{FF2B5EF4-FFF2-40B4-BE49-F238E27FC236}">
-                <a16:creationId xmlns:a16="http://schemas.microsoft.com/office/drawing/2014/main" id="{330D106B-A759-4501-8683-E9814BB42EE8}"/>
+                <a16:creationId xmlns:a16="http://schemas.microsoft.com/office/drawing/2014/main" id="{77025BC5-1B42-4CFC-BAC0-D67D3FC68E1B}"/>
               </a:ext>
             </a:extLst>
           </p:cNvPr>
@@ -2175,7 +2175,7 @@
           <p:cNvPr id="6" name="Slide Number Placeholder 5">
             <a:extLst xmlns:a="http://schemas.openxmlformats.org/drawingml/2006/main">
               <a:ext uri="{FF2B5EF4-FFF2-40B4-BE49-F238E27FC236}">
-                <a16:creationId xmlns:a16="http://schemas.microsoft.com/office/drawing/2014/main" id="{A2B79755-87C4-4BC4-8ECE-1B78EDC659FD}"/>
+                <a16:creationId xmlns:a16="http://schemas.microsoft.com/office/drawing/2014/main" id="{C214D0FA-FA07-4169-A058-58C705FF0076}"/>
               </a:ext>
             </a:extLst>
           </p:cNvPr>
@@ -2220,7 +2220,7 @@
           <p:cNvPr id="2" name="Vertical Title 1">
             <a:extLst xmlns:a="http://schemas.openxmlformats.org/drawingml/2006/main">
               <a:ext uri="{FF2B5EF4-FFF2-40B4-BE49-F238E27FC236}">
-                <a16:creationId xmlns:a16="http://schemas.microsoft.com/office/drawing/2014/main" id="{4C4C0273-A807-4282-AFA3-D9E5CB18A9BA}"/>
+                <a16:creationId xmlns:a16="http://schemas.microsoft.com/office/drawing/2014/main" id="{2AA166EF-2FFA-401C-B9C8-7400A674B65B}"/>
               </a:ext>
             </a:extLst>
           </p:cNvPr>
@@ -2253,7 +2253,7 @@
           <p:cNvPr id="3" name="Vertical Text Placeholder 2">
             <a:extLst xmlns:a="http://schemas.openxmlformats.org/drawingml/2006/main">
               <a:ext uri="{FF2B5EF4-FFF2-40B4-BE49-F238E27FC236}">
-                <a16:creationId xmlns:a16="http://schemas.microsoft.com/office/drawing/2014/main" id="{BBD667F9-4264-4D14-9911-820BF9AD6AB1}"/>
+                <a16:creationId xmlns:a16="http://schemas.microsoft.com/office/drawing/2014/main" id="{B68747A5-8C99-41B4-BB22-365F8B4DD3A3}"/>
               </a:ext>
             </a:extLst>
           </p:cNvPr>
@@ -2321,7 +2321,7 @@
           <p:cNvPr id="4" name="Date Placeholder 3">
             <a:extLst xmlns:a="http://schemas.openxmlformats.org/drawingml/2006/main">
               <a:ext uri="{FF2B5EF4-FFF2-40B4-BE49-F238E27FC236}">
-                <a16:creationId xmlns:a16="http://schemas.microsoft.com/office/drawing/2014/main" id="{08AD4121-F4CE-4E49-9E78-3E722BE0BA86}"/>
+                <a16:creationId xmlns:a16="http://schemas.microsoft.com/office/drawing/2014/main" id="{402B9939-91C6-4F81-B14D-B7F5C0BF940D}"/>
               </a:ext>
             </a:extLst>
           </p:cNvPr>
@@ -2349,7 +2349,7 @@
           <p:cNvPr id="5" name="Footer Placeholder 4">
             <a:extLst xmlns:a="http://schemas.openxmlformats.org/drawingml/2006/main">
               <a:ext uri="{FF2B5EF4-FFF2-40B4-BE49-F238E27FC236}">
-                <a16:creationId xmlns:a16="http://schemas.microsoft.com/office/drawing/2014/main" id="{40E8A743-B288-4B4B-8A4A-6EC04366AF67}"/>
+                <a16:creationId xmlns:a16="http://schemas.microsoft.com/office/drawing/2014/main" id="{963F5F1A-7DB5-4354-87C4-1B6449A5AF3E}"/>
               </a:ext>
             </a:extLst>
           </p:cNvPr>
@@ -2374,7 +2374,7 @@
           <p:cNvPr id="6" name="Slide Number Placeholder 5">
             <a:extLst xmlns:a="http://schemas.openxmlformats.org/drawingml/2006/main">
               <a:ext uri="{FF2B5EF4-FFF2-40B4-BE49-F238E27FC236}">
-                <a16:creationId xmlns:a16="http://schemas.microsoft.com/office/drawing/2014/main" id="{1D30593F-B8D3-4559-BAD0-D3C36B51B636}"/>
+                <a16:creationId xmlns:a16="http://schemas.microsoft.com/office/drawing/2014/main" id="{523C5749-7FFA-4079-A21D-120E34D42AE1}"/>
               </a:ext>
             </a:extLst>
           </p:cNvPr>
@@ -2419,7 +2419,7 @@
           <p:cNvPr id="2" name="Title 1">
             <a:extLst xmlns:a="http://schemas.openxmlformats.org/drawingml/2006/main">
               <a:ext uri="{FF2B5EF4-FFF2-40B4-BE49-F238E27FC236}">
-                <a16:creationId xmlns:a16="http://schemas.microsoft.com/office/drawing/2014/main" id="{4FF745D4-AB85-4B8B-B7B1-D4452FA3A764}"/>
+                <a16:creationId xmlns:a16="http://schemas.microsoft.com/office/drawing/2014/main" id="{1DEBE770-D05E-4B6B-8037-3BBB1104828D}"/>
               </a:ext>
             </a:extLst>
           </p:cNvPr>
@@ -2447,7 +2447,7 @@
           <p:cNvPr id="3" name="Content Placeholder 2">
             <a:extLst xmlns:a="http://schemas.openxmlformats.org/drawingml/2006/main">
               <a:ext uri="{FF2B5EF4-FFF2-40B4-BE49-F238E27FC236}">
-                <a16:creationId xmlns:a16="http://schemas.microsoft.com/office/drawing/2014/main" id="{53D2C33C-FE95-4B33-B9CE-1D5B81C6E7AE}"/>
+                <a16:creationId xmlns:a16="http://schemas.microsoft.com/office/drawing/2014/main" id="{170883BE-229A-4582-818B-23D9E92BE92E}"/>
               </a:ext>
             </a:extLst>
           </p:cNvPr>
@@ -2510,7 +2510,7 @@
           <p:cNvPr id="4" name="Date Placeholder 3">
             <a:extLst xmlns:a="http://schemas.openxmlformats.org/drawingml/2006/main">
               <a:ext uri="{FF2B5EF4-FFF2-40B4-BE49-F238E27FC236}">
-                <a16:creationId xmlns:a16="http://schemas.microsoft.com/office/drawing/2014/main" id="{BE173BB6-AC79-4012-94F3-737AAB5D7E09}"/>
+                <a16:creationId xmlns:a16="http://schemas.microsoft.com/office/drawing/2014/main" id="{7D2AEE92-A242-4281-AC11-5221609B6C20}"/>
               </a:ext>
             </a:extLst>
           </p:cNvPr>
@@ -2538,7 +2538,7 @@
           <p:cNvPr id="5" name="Footer Placeholder 4">
             <a:extLst xmlns:a="http://schemas.openxmlformats.org/drawingml/2006/main">
               <a:ext uri="{FF2B5EF4-FFF2-40B4-BE49-F238E27FC236}">
-                <a16:creationId xmlns:a16="http://schemas.microsoft.com/office/drawing/2014/main" id="{98510C42-3B2B-4599-8650-C7827F912120}"/>
+                <a16:creationId xmlns:a16="http://schemas.microsoft.com/office/drawing/2014/main" id="{536E1245-FD6D-4FC2-A48D-0530122ACE53}"/>
               </a:ext>
             </a:extLst>
           </p:cNvPr>
@@ -2563,7 +2563,7 @@
           <p:cNvPr id="6" name="Slide Number Placeholder 5">
             <a:extLst xmlns:a="http://schemas.openxmlformats.org/drawingml/2006/main">
               <a:ext uri="{FF2B5EF4-FFF2-40B4-BE49-F238E27FC236}">
-                <a16:creationId xmlns:a16="http://schemas.microsoft.com/office/drawing/2014/main" id="{698DCECC-FA9C-42D7-B49C-8AFDD987394D}"/>
+                <a16:creationId xmlns:a16="http://schemas.microsoft.com/office/drawing/2014/main" id="{C4D66596-6B3C-4D5B-B314-16A338213BC1}"/>
               </a:ext>
             </a:extLst>
           </p:cNvPr>
@@ -2608,7 +2608,7 @@
           <p:cNvPr id="2" name="Title 1">
             <a:extLst xmlns:a="http://schemas.openxmlformats.org/drawingml/2006/main">
               <a:ext uri="{FF2B5EF4-FFF2-40B4-BE49-F238E27FC236}">
-                <a16:creationId xmlns:a16="http://schemas.microsoft.com/office/drawing/2014/main" id="{246E102C-8230-4EFC-A58C-215D05C63360}"/>
+                <a16:creationId xmlns:a16="http://schemas.microsoft.com/office/drawing/2014/main" id="{56F95C92-ACF8-49D1-8872-4758FD76994D}"/>
               </a:ext>
             </a:extLst>
           </p:cNvPr>
@@ -2646,7 +2646,7 @@
           <p:cNvPr id="3" name="Text Placeholder 2">
             <a:extLst xmlns:a="http://schemas.openxmlformats.org/drawingml/2006/main">
               <a:ext uri="{FF2B5EF4-FFF2-40B4-BE49-F238E27FC236}">
-                <a16:creationId xmlns:a16="http://schemas.microsoft.com/office/drawing/2014/main" id="{2F74D022-1278-47E7-B6E5-721DE4B9EC8F}"/>
+                <a16:creationId xmlns:a16="http://schemas.microsoft.com/office/drawing/2014/main" id="{EE926CC3-0931-42CA-9EB4-D02828B4BCA6}"/>
               </a:ext>
             </a:extLst>
           </p:cNvPr>
@@ -2772,7 +2772,7 @@
           <p:cNvPr id="4" name="Date Placeholder 3">
             <a:extLst xmlns:a="http://schemas.openxmlformats.org/drawingml/2006/main">
               <a:ext uri="{FF2B5EF4-FFF2-40B4-BE49-F238E27FC236}">
-                <a16:creationId xmlns:a16="http://schemas.microsoft.com/office/drawing/2014/main" id="{796A27A0-9005-4896-91E1-982427F42877}"/>
+                <a16:creationId xmlns:a16="http://schemas.microsoft.com/office/drawing/2014/main" id="{366713EE-DF2E-4834-BA3C-E6EAD1A54A55}"/>
               </a:ext>
             </a:extLst>
           </p:cNvPr>
@@ -2800,7 +2800,7 @@
           <p:cNvPr id="5" name="Footer Placeholder 4">
             <a:extLst xmlns:a="http://schemas.openxmlformats.org/drawingml/2006/main">
               <a:ext uri="{FF2B5EF4-FFF2-40B4-BE49-F238E27FC236}">
-                <a16:creationId xmlns:a16="http://schemas.microsoft.com/office/drawing/2014/main" id="{B95223C6-D7A9-42AA-AA85-13CB519320E5}"/>
+                <a16:creationId xmlns:a16="http://schemas.microsoft.com/office/drawing/2014/main" id="{F38D5336-2732-4575-ABFE-9413FB929721}"/>
               </a:ext>
             </a:extLst>
           </p:cNvPr>
@@ -2825,7 +2825,7 @@
           <p:cNvPr id="6" name="Slide Number Placeholder 5">
             <a:extLst xmlns:a="http://schemas.openxmlformats.org/drawingml/2006/main">
               <a:ext uri="{FF2B5EF4-FFF2-40B4-BE49-F238E27FC236}">
-                <a16:creationId xmlns:a16="http://schemas.microsoft.com/office/drawing/2014/main" id="{33D983BC-BD34-45B9-ADC8-4018FB2E93AD}"/>
+                <a16:creationId xmlns:a16="http://schemas.microsoft.com/office/drawing/2014/main" id="{90751AFF-5F00-49C4-BB35-995BA82AAFDC}"/>
               </a:ext>
             </a:extLst>
           </p:cNvPr>
@@ -2870,7 +2870,7 @@
           <p:cNvPr id="2" name="Title 1">
             <a:extLst xmlns:a="http://schemas.openxmlformats.org/drawingml/2006/main">
               <a:ext uri="{FF2B5EF4-FFF2-40B4-BE49-F238E27FC236}">
-                <a16:creationId xmlns:a16="http://schemas.microsoft.com/office/drawing/2014/main" id="{454FF513-E126-4D17-9F29-B70C64AAD1A9}"/>
+                <a16:creationId xmlns:a16="http://schemas.microsoft.com/office/drawing/2014/main" id="{67CDF2A8-6B58-40FB-B9E9-1B330337B8AE}"/>
               </a:ext>
             </a:extLst>
           </p:cNvPr>
@@ -2898,7 +2898,7 @@
           <p:cNvPr id="3" name="Content Placeholder 2">
             <a:extLst xmlns:a="http://schemas.openxmlformats.org/drawingml/2006/main">
               <a:ext uri="{FF2B5EF4-FFF2-40B4-BE49-F238E27FC236}">
-                <a16:creationId xmlns:a16="http://schemas.microsoft.com/office/drawing/2014/main" id="{13F9A7B2-764A-4283-8238-C5CCF737AF93}"/>
+                <a16:creationId xmlns:a16="http://schemas.microsoft.com/office/drawing/2014/main" id="{44F34392-269B-478F-8F8C-C9D0500EC8C5}"/>
               </a:ext>
             </a:extLst>
           </p:cNvPr>
@@ -3003,7 +3003,7 @@
           <p:cNvPr id="4" name="Content Placeholder 3">
             <a:extLst xmlns:a="http://schemas.openxmlformats.org/drawingml/2006/main">
               <a:ext uri="{FF2B5EF4-FFF2-40B4-BE49-F238E27FC236}">
-                <a16:creationId xmlns:a16="http://schemas.microsoft.com/office/drawing/2014/main" id="{B3B420D5-3CDF-4675-BB26-D0F72AC5C33F}"/>
+                <a16:creationId xmlns:a16="http://schemas.microsoft.com/office/drawing/2014/main" id="{E479FE84-0808-45F4-9EB7-C22F148F8C45}"/>
               </a:ext>
             </a:extLst>
           </p:cNvPr>
@@ -3108,7 +3108,7 @@
           <p:cNvPr id="5" name="Date Placeholder 4">
             <a:extLst xmlns:a="http://schemas.openxmlformats.org/drawingml/2006/main">
               <a:ext uri="{FF2B5EF4-FFF2-40B4-BE49-F238E27FC236}">
-                <a16:creationId xmlns:a16="http://schemas.microsoft.com/office/drawing/2014/main" id="{8D7D4B00-58BE-4F3A-9622-B4F16D479F05}"/>
+                <a16:creationId xmlns:a16="http://schemas.microsoft.com/office/drawing/2014/main" id="{D513CB9B-FCDA-41FA-AE57-9D6E78A223F0}"/>
               </a:ext>
             </a:extLst>
           </p:cNvPr>
@@ -3136,7 +3136,7 @@
           <p:cNvPr id="6" name="Footer Placeholder 5">
             <a:extLst xmlns:a="http://schemas.openxmlformats.org/drawingml/2006/main">
               <a:ext uri="{FF2B5EF4-FFF2-40B4-BE49-F238E27FC236}">
-                <a16:creationId xmlns:a16="http://schemas.microsoft.com/office/drawing/2014/main" id="{8C842A96-35AC-44C3-8599-6D26E943B7D7}"/>
+                <a16:creationId xmlns:a16="http://schemas.microsoft.com/office/drawing/2014/main" id="{EB706E91-B06C-499F-9885-27D7A5C4BC1E}"/>
               </a:ext>
             </a:extLst>
           </p:cNvPr>
@@ -3161,7 +3161,7 @@
           <p:cNvPr id="7" name="Slide Number Placeholder 6">
             <a:extLst xmlns:a="http://schemas.openxmlformats.org/drawingml/2006/main">
               <a:ext uri="{FF2B5EF4-FFF2-40B4-BE49-F238E27FC236}">
-                <a16:creationId xmlns:a16="http://schemas.microsoft.com/office/drawing/2014/main" id="{C49CD35A-6C36-4946-B289-696EA0BB5467}"/>
+                <a16:creationId xmlns:a16="http://schemas.microsoft.com/office/drawing/2014/main" id="{6EF2E8AF-357B-443F-9349-802530C7241A}"/>
               </a:ext>
             </a:extLst>
           </p:cNvPr>
@@ -3206,7 +3206,7 @@
           <p:cNvPr id="2" name="Title 1">
             <a:extLst xmlns:a="http://schemas.openxmlformats.org/drawingml/2006/main">
               <a:ext uri="{FF2B5EF4-FFF2-40B4-BE49-F238E27FC236}">
-                <a16:creationId xmlns:a16="http://schemas.microsoft.com/office/drawing/2014/main" id="{3BBF050B-E7EF-4658-B906-CB0F2F6E9339}"/>
+                <a16:creationId xmlns:a16="http://schemas.microsoft.com/office/drawing/2014/main" id="{38F49D87-743D-474B-88DB-207A436E8669}"/>
               </a:ext>
             </a:extLst>
           </p:cNvPr>
@@ -3239,7 +3239,7 @@
           <p:cNvPr id="3" name="Text Placeholder 2">
             <a:extLst xmlns:a="http://schemas.openxmlformats.org/drawingml/2006/main">
               <a:ext uri="{FF2B5EF4-FFF2-40B4-BE49-F238E27FC236}">
-                <a16:creationId xmlns:a16="http://schemas.microsoft.com/office/drawing/2014/main" id="{E1AE7452-33C5-43E5-92FA-7801F89F9A7A}"/>
+                <a16:creationId xmlns:a16="http://schemas.microsoft.com/office/drawing/2014/main" id="{ECCAEB0E-9F60-414C-B432-93216F072324}"/>
               </a:ext>
             </a:extLst>
           </p:cNvPr>
@@ -3311,7 +3311,7 @@
           <p:cNvPr id="4" name="Content Placeholder 3">
             <a:extLst xmlns:a="http://schemas.openxmlformats.org/drawingml/2006/main">
               <a:ext uri="{FF2B5EF4-FFF2-40B4-BE49-F238E27FC236}">
-                <a16:creationId xmlns:a16="http://schemas.microsoft.com/office/drawing/2014/main" id="{779AFC89-198D-48FF-8A2E-CDDE256792A0}"/>
+                <a16:creationId xmlns:a16="http://schemas.microsoft.com/office/drawing/2014/main" id="{EC8DEAC9-6096-4A1B-9E89-3666C39E39EE}"/>
               </a:ext>
             </a:extLst>
           </p:cNvPr>
@@ -3416,7 +3416,7 @@
           <p:cNvPr id="5" name="Text Placeholder 4">
             <a:extLst xmlns:a="http://schemas.openxmlformats.org/drawingml/2006/main">
               <a:ext uri="{FF2B5EF4-FFF2-40B4-BE49-F238E27FC236}">
-                <a16:creationId xmlns:a16="http://schemas.microsoft.com/office/drawing/2014/main" id="{B60D2181-04B4-4971-A031-59BA6C88C87A}"/>
+                <a16:creationId xmlns:a16="http://schemas.microsoft.com/office/drawing/2014/main" id="{518273F0-7268-4CEB-B6A2-B0D306C6AD2C}"/>
               </a:ext>
             </a:extLst>
           </p:cNvPr>
@@ -3488,7 +3488,7 @@
           <p:cNvPr id="6" name="Content Placeholder 5">
             <a:extLst xmlns:a="http://schemas.openxmlformats.org/drawingml/2006/main">
               <a:ext uri="{FF2B5EF4-FFF2-40B4-BE49-F238E27FC236}">
-                <a16:creationId xmlns:a16="http://schemas.microsoft.com/office/drawing/2014/main" id="{892BC3A6-E0FA-4D6E-B26B-F267591C6AA4}"/>
+                <a16:creationId xmlns:a16="http://schemas.microsoft.com/office/drawing/2014/main" id="{3CAB2E80-EB51-4977-A728-306E8FD06B18}"/>
               </a:ext>
             </a:extLst>
           </p:cNvPr>
@@ -3593,7 +3593,7 @@
           <p:cNvPr id="7" name="Date Placeholder 6">
             <a:extLst xmlns:a="http://schemas.openxmlformats.org/drawingml/2006/main">
               <a:ext uri="{FF2B5EF4-FFF2-40B4-BE49-F238E27FC236}">
-                <a16:creationId xmlns:a16="http://schemas.microsoft.com/office/drawing/2014/main" id="{D0CEB64F-0784-47B4-808A-942EC98CD2E5}"/>
+                <a16:creationId xmlns:a16="http://schemas.microsoft.com/office/drawing/2014/main" id="{735C09E6-C5DA-457C-B59F-A1E0DB90C581}"/>
               </a:ext>
             </a:extLst>
           </p:cNvPr>
@@ -3621,7 +3621,7 @@
           <p:cNvPr id="8" name="Footer Placeholder 7">
             <a:extLst xmlns:a="http://schemas.openxmlformats.org/drawingml/2006/main">
               <a:ext uri="{FF2B5EF4-FFF2-40B4-BE49-F238E27FC236}">
-                <a16:creationId xmlns:a16="http://schemas.microsoft.com/office/drawing/2014/main" id="{FADE8138-F2A6-456F-9C79-3C1FB9D6BCB0}"/>
+                <a16:creationId xmlns:a16="http://schemas.microsoft.com/office/drawing/2014/main" id="{628528F7-E91E-49C0-BD6E-47F4407C90A2}"/>
               </a:ext>
             </a:extLst>
           </p:cNvPr>
@@ -3646,7 +3646,7 @@
           <p:cNvPr id="9" name="Slide Number Placeholder 8">
             <a:extLst xmlns:a="http://schemas.openxmlformats.org/drawingml/2006/main">
               <a:ext uri="{FF2B5EF4-FFF2-40B4-BE49-F238E27FC236}">
-                <a16:creationId xmlns:a16="http://schemas.microsoft.com/office/drawing/2014/main" id="{6783811E-436E-4DD2-B6DA-3742A043E44E}"/>
+                <a16:creationId xmlns:a16="http://schemas.microsoft.com/office/drawing/2014/main" id="{9C4FD547-0439-4E22-853F-577F867EA393}"/>
               </a:ext>
             </a:extLst>
           </p:cNvPr>
@@ -3691,7 +3691,7 @@
           <p:cNvPr id="2" name="Title 1">
             <a:extLst xmlns:a="http://schemas.openxmlformats.org/drawingml/2006/main">
               <a:ext uri="{FF2B5EF4-FFF2-40B4-BE49-F238E27FC236}">
-                <a16:creationId xmlns:a16="http://schemas.microsoft.com/office/drawing/2014/main" id="{EE524585-B2F1-4935-B1D4-E2344D89CF4A}"/>
+                <a16:creationId xmlns:a16="http://schemas.microsoft.com/office/drawing/2014/main" id="{81FB37C1-FBDD-434B-B37E-171DEB1C2C52}"/>
               </a:ext>
             </a:extLst>
           </p:cNvPr>
@@ -3719,7 +3719,7 @@
           <p:cNvPr id="3" name="Date Placeholder 2">
             <a:extLst xmlns:a="http://schemas.openxmlformats.org/drawingml/2006/main">
               <a:ext uri="{FF2B5EF4-FFF2-40B4-BE49-F238E27FC236}">
-                <a16:creationId xmlns:a16="http://schemas.microsoft.com/office/drawing/2014/main" id="{2D919022-C4B8-49E3-94E9-56F2193836A6}"/>
+                <a16:creationId xmlns:a16="http://schemas.microsoft.com/office/drawing/2014/main" id="{2C9FE200-FBF0-49D5-98F1-B3E58887D4F9}"/>
               </a:ext>
             </a:extLst>
           </p:cNvPr>
@@ -3747,7 +3747,7 @@
           <p:cNvPr id="4" name="Footer Placeholder 3">
             <a:extLst xmlns:a="http://schemas.openxmlformats.org/drawingml/2006/main">
               <a:ext uri="{FF2B5EF4-FFF2-40B4-BE49-F238E27FC236}">
-                <a16:creationId xmlns:a16="http://schemas.microsoft.com/office/drawing/2014/main" id="{410936E9-89C0-4B50-A244-0F1D41C9CC47}"/>
+                <a16:creationId xmlns:a16="http://schemas.microsoft.com/office/drawing/2014/main" id="{81726844-5B64-4C77-835C-35DE6A826139}"/>
               </a:ext>
             </a:extLst>
           </p:cNvPr>
@@ -3772,7 +3772,7 @@
           <p:cNvPr id="5" name="Slide Number Placeholder 4">
             <a:extLst xmlns:a="http://schemas.openxmlformats.org/drawingml/2006/main">
               <a:ext uri="{FF2B5EF4-FFF2-40B4-BE49-F238E27FC236}">
-                <a16:creationId xmlns:a16="http://schemas.microsoft.com/office/drawing/2014/main" id="{07F03035-8E46-4275-B7FA-25752FA05239}"/>
+                <a16:creationId xmlns:a16="http://schemas.microsoft.com/office/drawing/2014/main" id="{DF0559E3-E556-41DD-9D63-5EC254612213}"/>
               </a:ext>
             </a:extLst>
           </p:cNvPr>
@@ -3817,7 +3817,7 @@
           <p:cNvPr id="2" name="Date Placeholder 1">
             <a:extLst xmlns:a="http://schemas.openxmlformats.org/drawingml/2006/main">
               <a:ext uri="{FF2B5EF4-FFF2-40B4-BE49-F238E27FC236}">
-                <a16:creationId xmlns:a16="http://schemas.microsoft.com/office/drawing/2014/main" id="{F107EDB5-EEAD-4537-9757-B8A8DE965B96}"/>
+                <a16:creationId xmlns:a16="http://schemas.microsoft.com/office/drawing/2014/main" id="{8C3F72BE-01CA-46FD-9B10-3771BD48790E}"/>
               </a:ext>
             </a:extLst>
           </p:cNvPr>
@@ -3845,7 +3845,7 @@
           <p:cNvPr id="3" name="Footer Placeholder 2">
             <a:extLst xmlns:a="http://schemas.openxmlformats.org/drawingml/2006/main">
               <a:ext uri="{FF2B5EF4-FFF2-40B4-BE49-F238E27FC236}">
-                <a16:creationId xmlns:a16="http://schemas.microsoft.com/office/drawing/2014/main" id="{D9362279-A494-47C5-BAE3-C5F87DBF5085}"/>
+                <a16:creationId xmlns:a16="http://schemas.microsoft.com/office/drawing/2014/main" id="{7918C470-8903-4B4B-ABE9-660F5113CE13}"/>
               </a:ext>
             </a:extLst>
           </p:cNvPr>
@@ -3870,7 +3870,7 @@
           <p:cNvPr id="4" name="Slide Number Placeholder 3">
             <a:extLst xmlns:a="http://schemas.openxmlformats.org/drawingml/2006/main">
               <a:ext uri="{FF2B5EF4-FFF2-40B4-BE49-F238E27FC236}">
-                <a16:creationId xmlns:a16="http://schemas.microsoft.com/office/drawing/2014/main" id="{D48EFB40-77F6-4984-B6C9-2C8E9D686187}"/>
+                <a16:creationId xmlns:a16="http://schemas.microsoft.com/office/drawing/2014/main" id="{94BC10A5-D910-40EF-AE47-8F0C45244125}"/>
               </a:ext>
             </a:extLst>
           </p:cNvPr>
@@ -3915,7 +3915,7 @@
           <p:cNvPr id="2" name="Title 1">
             <a:extLst xmlns:a="http://schemas.openxmlformats.org/drawingml/2006/main">
               <a:ext uri="{FF2B5EF4-FFF2-40B4-BE49-F238E27FC236}">
-                <a16:creationId xmlns:a16="http://schemas.microsoft.com/office/drawing/2014/main" id="{C5534373-40A6-416D-AD1E-AAD16152BB0D}"/>
+                <a16:creationId xmlns:a16="http://schemas.microsoft.com/office/drawing/2014/main" id="{92C67350-D22B-4737-AD21-497DAF82BE01}"/>
               </a:ext>
             </a:extLst>
           </p:cNvPr>
@@ -3953,7 +3953,7 @@
           <p:cNvPr id="3" name="Content Placeholder 2">
             <a:extLst xmlns:a="http://schemas.openxmlformats.org/drawingml/2006/main">
               <a:ext uri="{FF2B5EF4-FFF2-40B4-BE49-F238E27FC236}">
-                <a16:creationId xmlns:a16="http://schemas.microsoft.com/office/drawing/2014/main" id="{AD0D05DC-57E9-4898-AA30-8BC0EF61EE54}"/>
+                <a16:creationId xmlns:a16="http://schemas.microsoft.com/office/drawing/2014/main" id="{2A1A18BA-5CC8-4881-AA56-509493DDD1EF}"/>
               </a:ext>
             </a:extLst>
           </p:cNvPr>
@@ -4058,7 +4058,7 @@
           <p:cNvPr id="4" name="Text Placeholder 3">
             <a:extLst xmlns:a="http://schemas.openxmlformats.org/drawingml/2006/main">
               <a:ext uri="{FF2B5EF4-FFF2-40B4-BE49-F238E27FC236}">
-                <a16:creationId xmlns:a16="http://schemas.microsoft.com/office/drawing/2014/main" id="{C12A380D-C8C2-4172-8A1F-728AEA2EB554}"/>
+                <a16:creationId xmlns:a16="http://schemas.microsoft.com/office/drawing/2014/main" id="{16ED9BB5-A475-4FF7-B045-99A44551EA35}"/>
               </a:ext>
             </a:extLst>
           </p:cNvPr>
@@ -4130,7 +4130,7 @@
           <p:cNvPr id="5" name="Date Placeholder 4">
             <a:extLst xmlns:a="http://schemas.openxmlformats.org/drawingml/2006/main">
               <a:ext uri="{FF2B5EF4-FFF2-40B4-BE49-F238E27FC236}">
-                <a16:creationId xmlns:a16="http://schemas.microsoft.com/office/drawing/2014/main" id="{DF579A4E-F159-4BCB-BB58-FE9FBAF957A0}"/>
+                <a16:creationId xmlns:a16="http://schemas.microsoft.com/office/drawing/2014/main" id="{4734482D-6D95-4BEF-8B07-79B0E5062CE0}"/>
               </a:ext>
             </a:extLst>
           </p:cNvPr>
@@ -4158,7 +4158,7 @@
           <p:cNvPr id="6" name="Footer Placeholder 5">
             <a:extLst xmlns:a="http://schemas.openxmlformats.org/drawingml/2006/main">
               <a:ext uri="{FF2B5EF4-FFF2-40B4-BE49-F238E27FC236}">
-                <a16:creationId xmlns:a16="http://schemas.microsoft.com/office/drawing/2014/main" id="{4065C996-2002-4EB5-96C1-463198A73303}"/>
+                <a16:creationId xmlns:a16="http://schemas.microsoft.com/office/drawing/2014/main" id="{C54646D7-A2F6-4F5A-B19B-144623428DEA}"/>
               </a:ext>
             </a:extLst>
           </p:cNvPr>
@@ -4183,7 +4183,7 @@
           <p:cNvPr id="7" name="Slide Number Placeholder 6">
             <a:extLst xmlns:a="http://schemas.openxmlformats.org/drawingml/2006/main">
               <a:ext uri="{FF2B5EF4-FFF2-40B4-BE49-F238E27FC236}">
-                <a16:creationId xmlns:a16="http://schemas.microsoft.com/office/drawing/2014/main" id="{8EE38F25-8FFD-4BA1-B336-93773C221B4A}"/>
+                <a16:creationId xmlns:a16="http://schemas.microsoft.com/office/drawing/2014/main" id="{9ACD4F91-8754-4E57-88C5-E9A7E6213BBE}"/>
               </a:ext>
             </a:extLst>
           </p:cNvPr>
@@ -4228,7 +4228,7 @@
           <p:cNvPr id="2" name="Title 1">
             <a:extLst xmlns:a="http://schemas.openxmlformats.org/drawingml/2006/main">
               <a:ext uri="{FF2B5EF4-FFF2-40B4-BE49-F238E27FC236}">
-                <a16:creationId xmlns:a16="http://schemas.microsoft.com/office/drawing/2014/main" id="{248B5400-AB08-40DF-A096-D7BDD0DB30BE}"/>
+                <a16:creationId xmlns:a16="http://schemas.microsoft.com/office/drawing/2014/main" id="{22B59A79-AABA-4A9A-9265-757C83B21848}"/>
               </a:ext>
             </a:extLst>
           </p:cNvPr>
@@ -4266,7 +4266,7 @@
           <p:cNvPr id="3" name="Picture Placeholder 2">
             <a:extLst xmlns:a="http://schemas.openxmlformats.org/drawingml/2006/main">
               <a:ext uri="{FF2B5EF4-FFF2-40B4-BE49-F238E27FC236}">
-                <a16:creationId xmlns:a16="http://schemas.microsoft.com/office/drawing/2014/main" id="{BCB2B34F-C94E-451B-B22A-B87092A8A4F4}"/>
+                <a16:creationId xmlns:a16="http://schemas.microsoft.com/office/drawing/2014/main" id="{0D49A52F-41A4-41A5-8EA0-7A7E73F35F21}"/>
               </a:ext>
             </a:extLst>
           </p:cNvPr>
@@ -4333,7 +4333,7 @@
           <p:cNvPr id="4" name="Text Placeholder 3">
             <a:extLst xmlns:a="http://schemas.openxmlformats.org/drawingml/2006/main">
               <a:ext uri="{FF2B5EF4-FFF2-40B4-BE49-F238E27FC236}">
-                <a16:creationId xmlns:a16="http://schemas.microsoft.com/office/drawing/2014/main" id="{088DE08C-B4AB-40BC-8874-9C4B3A6D9078}"/>
+                <a16:creationId xmlns:a16="http://schemas.microsoft.com/office/drawing/2014/main" id="{A7FE513F-3EDF-4308-BF92-02E1821724BE}"/>
               </a:ext>
             </a:extLst>
           </p:cNvPr>
@@ -4405,7 +4405,7 @@
           <p:cNvPr id="5" name="Date Placeholder 4">
             <a:extLst xmlns:a="http://schemas.openxmlformats.org/drawingml/2006/main">
               <a:ext uri="{FF2B5EF4-FFF2-40B4-BE49-F238E27FC236}">
-                <a16:creationId xmlns:a16="http://schemas.microsoft.com/office/drawing/2014/main" id="{E530CAF4-0058-48F6-8F51-AD4CA4DCF054}"/>
+                <a16:creationId xmlns:a16="http://schemas.microsoft.com/office/drawing/2014/main" id="{8317F796-C774-44D6-AF8E-13AAD48FBFA2}"/>
               </a:ext>
             </a:extLst>
           </p:cNvPr>
@@ -4433,7 +4433,7 @@
           <p:cNvPr id="6" name="Footer Placeholder 5">
             <a:extLst xmlns:a="http://schemas.openxmlformats.org/drawingml/2006/main">
               <a:ext uri="{FF2B5EF4-FFF2-40B4-BE49-F238E27FC236}">
-                <a16:creationId xmlns:a16="http://schemas.microsoft.com/office/drawing/2014/main" id="{46E57B2A-F4D4-4272-B364-15D5D2515F07}"/>
+                <a16:creationId xmlns:a16="http://schemas.microsoft.com/office/drawing/2014/main" id="{49F5483B-C2F9-4504-AFEE-3575939E2CD1}"/>
               </a:ext>
             </a:extLst>
           </p:cNvPr>
@@ -4458,7 +4458,7 @@
           <p:cNvPr id="7" name="Slide Number Placeholder 6">
             <a:extLst xmlns:a="http://schemas.openxmlformats.org/drawingml/2006/main">
               <a:ext uri="{FF2B5EF4-FFF2-40B4-BE49-F238E27FC236}">
-                <a16:creationId xmlns:a16="http://schemas.microsoft.com/office/drawing/2014/main" id="{ACDD7F86-59F8-4D5E-AED2-0C42AEF29F8A}"/>
+                <a16:creationId xmlns:a16="http://schemas.microsoft.com/office/drawing/2014/main" id="{9EA8812D-F8BE-4E08-A0E9-C28AF3271BFE}"/>
               </a:ext>
             </a:extLst>
           </p:cNvPr>
@@ -4508,7 +4508,7 @@
           <p:cNvPr id="2" name="Title Placeholder 1">
             <a:extLst xmlns:a="http://schemas.openxmlformats.org/drawingml/2006/main">
               <a:ext uri="{FF2B5EF4-FFF2-40B4-BE49-F238E27FC236}">
-                <a16:creationId xmlns:a16="http://schemas.microsoft.com/office/drawing/2014/main" id="{EF301DAE-F468-4400-AACA-3C5500AD76F9}"/>
+                <a16:creationId xmlns:a16="http://schemas.microsoft.com/office/drawing/2014/main" id="{98027123-9D9B-49C4-BA08-719D7746B65C}"/>
               </a:ext>
             </a:extLst>
           </p:cNvPr>
@@ -4546,7 +4546,7 @@
           <p:cNvPr id="3" name="Text Placeholder 2">
             <a:extLst xmlns:a="http://schemas.openxmlformats.org/drawingml/2006/main">
               <a:ext uri="{FF2B5EF4-FFF2-40B4-BE49-F238E27FC236}">
-                <a16:creationId xmlns:a16="http://schemas.microsoft.com/office/drawing/2014/main" id="{FAE9145D-A655-4CA1-BB5B-DF0867B5B226}"/>
+                <a16:creationId xmlns:a16="http://schemas.microsoft.com/office/drawing/2014/main" id="{08ED705A-CF23-4326-915A-996D8D4F26DB}"/>
               </a:ext>
             </a:extLst>
           </p:cNvPr>
@@ -4619,7 +4619,7 @@
           <p:cNvPr id="4" name="Date Placeholder 3">
             <a:extLst xmlns:a="http://schemas.openxmlformats.org/drawingml/2006/main">
               <a:ext uri="{FF2B5EF4-FFF2-40B4-BE49-F238E27FC236}">
-                <a16:creationId xmlns:a16="http://schemas.microsoft.com/office/drawing/2014/main" id="{DDC1F427-C772-405F-8C28-A2FAE3A1E8C0}"/>
+                <a16:creationId xmlns:a16="http://schemas.microsoft.com/office/drawing/2014/main" id="{D02A025C-6327-4E30-8100-BF34B03CC6E0}"/>
               </a:ext>
             </a:extLst>
           </p:cNvPr>
@@ -4666,7 +4666,7 @@
           <p:cNvPr id="5" name="Footer Placeholder 4">
             <a:extLst xmlns:a="http://schemas.openxmlformats.org/drawingml/2006/main">
               <a:ext uri="{FF2B5EF4-FFF2-40B4-BE49-F238E27FC236}">
-                <a16:creationId xmlns:a16="http://schemas.microsoft.com/office/drawing/2014/main" id="{26886D92-1889-4B9B-A814-5CE8AE7F8C89}"/>
+                <a16:creationId xmlns:a16="http://schemas.microsoft.com/office/drawing/2014/main" id="{DD9A9B48-5060-4CA4-B9D0-80C4BA085F07}"/>
               </a:ext>
             </a:extLst>
           </p:cNvPr>
@@ -4710,7 +4710,7 @@
           <p:cNvPr id="6" name="Slide Number Placeholder 5">
             <a:extLst xmlns:a="http://schemas.openxmlformats.org/drawingml/2006/main">
               <a:ext uri="{FF2B5EF4-FFF2-40B4-BE49-F238E27FC236}">
-                <a16:creationId xmlns:a16="http://schemas.microsoft.com/office/drawing/2014/main" id="{E419C482-69EC-4D7A-AB57-00B43F51A5F0}"/>
+                <a16:creationId xmlns:a16="http://schemas.microsoft.com/office/drawing/2014/main" id="{6BBF14CB-8339-4147-9A76-9BF518740687}"/>
               </a:ext>
             </a:extLst>
           </p:cNvPr>
@@ -4756,17 +4756,17 @@
   </p:cSld>
   <p:clrMap bg1="lt1" tx1="dk1" bg2="lt2" tx2="dk2" accent1="accent1" accent2="accent2" accent3="accent3" accent4="accent4" accent5="accent5" accent6="accent6" hlink="hlink" folHlink="folHlink"/>
   <p:sldLayoutIdLst>
-    <p:sldLayoutId xmlns:r="http://schemas.openxmlformats.org/officeDocument/2006/relationships" id="2147483649" r:id="R43f14abd13444e41"/>
-    <p:sldLayoutId xmlns:r="http://schemas.openxmlformats.org/officeDocument/2006/relationships" id="2147483650" r:id="R9899f282b15f47ba"/>
-    <p:sldLayoutId xmlns:r="http://schemas.openxmlformats.org/officeDocument/2006/relationships" id="2147483651" r:id="R42abd428897e494f"/>
-    <p:sldLayoutId xmlns:r="http://schemas.openxmlformats.org/officeDocument/2006/relationships" id="2147483652" r:id="Rb52c8280f03d42af"/>
-    <p:sldLayoutId xmlns:r="http://schemas.openxmlformats.org/officeDocument/2006/relationships" id="2147483653" r:id="R51a6fd189d8e4106"/>
-    <p:sldLayoutId xmlns:r="http://schemas.openxmlformats.org/officeDocument/2006/relationships" id="2147483654" r:id="Rdf111e1380064471"/>
-    <p:sldLayoutId xmlns:r="http://schemas.openxmlformats.org/officeDocument/2006/relationships" id="2147483655" r:id="R122035f754f146a0"/>
-    <p:sldLayoutId xmlns:r="http://schemas.openxmlformats.org/officeDocument/2006/relationships" id="2147483656" r:id="R3d74b07b29ee421c"/>
-    <p:sldLayoutId xmlns:r="http://schemas.openxmlformats.org/officeDocument/2006/relationships" id="2147483657" r:id="R8923a5a6e76b4994"/>
-    <p:sldLayoutId xmlns:r="http://schemas.openxmlformats.org/officeDocument/2006/relationships" id="2147483658" r:id="R590377a070b74eec"/>
-    <p:sldLayoutId xmlns:r="http://schemas.openxmlformats.org/officeDocument/2006/relationships" id="2147483659" r:id="R287d579b88414546"/>
+    <p:sldLayoutId xmlns:r="http://schemas.openxmlformats.org/officeDocument/2006/relationships" id="2147483649" r:id="R86277e0dcf4643d8"/>
+    <p:sldLayoutId xmlns:r="http://schemas.openxmlformats.org/officeDocument/2006/relationships" id="2147483650" r:id="Rb6e4ea18270e4912"/>
+    <p:sldLayoutId xmlns:r="http://schemas.openxmlformats.org/officeDocument/2006/relationships" id="2147483651" r:id="R70012afc37fe46b8"/>
+    <p:sldLayoutId xmlns:r="http://schemas.openxmlformats.org/officeDocument/2006/relationships" id="2147483652" r:id="Rde41c496956e48ca"/>
+    <p:sldLayoutId xmlns:r="http://schemas.openxmlformats.org/officeDocument/2006/relationships" id="2147483653" r:id="R80a48f07e79447e6"/>
+    <p:sldLayoutId xmlns:r="http://schemas.openxmlformats.org/officeDocument/2006/relationships" id="2147483654" r:id="R9b3572fca82f4ef6"/>
+    <p:sldLayoutId xmlns:r="http://schemas.openxmlformats.org/officeDocument/2006/relationships" id="2147483655" r:id="R88880eed935941f3"/>
+    <p:sldLayoutId xmlns:r="http://schemas.openxmlformats.org/officeDocument/2006/relationships" id="2147483656" r:id="R40dbbf75352142a8"/>
+    <p:sldLayoutId xmlns:r="http://schemas.openxmlformats.org/officeDocument/2006/relationships" id="2147483657" r:id="R46d52a3f9b5c48a8"/>
+    <p:sldLayoutId xmlns:r="http://schemas.openxmlformats.org/officeDocument/2006/relationships" id="2147483658" r:id="R45c4e69d7a614d85"/>
+    <p:sldLayoutId xmlns:r="http://schemas.openxmlformats.org/officeDocument/2006/relationships" id="2147483659" r:id="R7d86cbf7efbe4b58"/>
   </p:sldLayoutIdLst>
   <p:txStyles>
     <p:titleStyle>
@@ -5320,16 +5320,19 @@
           <c:invertIfNegative val="0"/>
           <c:cat>
             <c:strRef>
-              <c:f>'Chart Data'!$A$2:$A$4</c:f>
+              <c:f>'Chart Data'!$A$2:$A$5</c:f>
               <c:strCache>
-                <c:ptCount val="3"/>
+                <c:ptCount val="4"/>
                 <c:pt idx="0">
-                  <c:v>P0 原配置</c:v>
+                  <c:v>P0</c:v>
                 </c:pt>
                 <c:pt idx="1">
-                  <c:v>P1 第二台清洗</c:v>
+                  <c:v>P2 8m</c:v>
                 </c:pt>
                 <c:pt idx="2">
+                  <c:v>P4 8m</c:v>
+                </c:pt>
+                <c:pt idx="3">
                   <c:v>P4 12m</c:v>
                 </c:pt>
               </c:strCache>
@@ -5337,17 +5340,20 @@
           </c:cat>
           <c:val>
             <c:numRef>
-              <c:f>'Chart Data'!$B$2:$B$4</c:f>
+              <c:f>'Chart Data'!$B$2:$B$5</c:f>
               <c:numCache>
                 <c:formatCode>0.0</c:formatCode>
-                <c:ptCount val="3"/>
+                <c:ptCount val="4"/>
                 <c:pt idx="0">
                   <c:v>12.220632</c:v>
                 </c:pt>
                 <c:pt idx="1">
-                  <c:v>3.94372</c:v>
+                  <c:v>7.60904</c:v>
                 </c:pt>
                 <c:pt idx="2">
+                  <c:v>0.950505</c:v>
+                </c:pt>
+                <c:pt idx="3">
                   <c:v>0.710506</c:v>
                 </c:pt>
               </c:numCache>
@@ -5549,16 +5555,19 @@
           <c:invertIfNegative val="0"/>
           <c:cat>
             <c:strRef>
-              <c:f>'Chart Data'!$A$2:$A$4</c:f>
+              <c:f>'Chart Data'!$A$2:$A$5</c:f>
               <c:strCache>
-                <c:ptCount val="3"/>
+                <c:ptCount val="4"/>
                 <c:pt idx="0">
-                  <c:v>P0 原配置</c:v>
+                  <c:v>P0</c:v>
                 </c:pt>
                 <c:pt idx="1">
-                  <c:v>P1 第二台清洗</c:v>
+                  <c:v>P2 8m</c:v>
                 </c:pt>
                 <c:pt idx="2">
+                  <c:v>P4 8m</c:v>
+                </c:pt>
+                <c:pt idx="3">
                   <c:v>P4 12m</c:v>
                 </c:pt>
               </c:strCache>
@@ -5566,17 +5575,20 @@
           </c:cat>
           <c:val>
             <c:numRef>
-              <c:f>'Chart Data'!$B$2:$B$4</c:f>
+              <c:f>'Chart Data'!$B$2:$B$5</c:f>
               <c:numCache>
                 <c:formatCode>0.0</c:formatCode>
-                <c:ptCount val="3"/>
+                <c:ptCount val="4"/>
                 <c:pt idx="0">
                   <c:v>19.71403</c:v>
                 </c:pt>
                 <c:pt idx="1">
-                  <c:v>19.828331</c:v>
+                  <c:v>18.184648</c:v>
                 </c:pt>
                 <c:pt idx="2">
+                  <c:v>5.515898</c:v>
+                </c:pt>
+                <c:pt idx="3">
                   <c:v>5.013653</c:v>
                 </c:pt>
               </c:numCache>
@@ -6115,7 +6127,7 @@
           <p:cNvPr id="2" name="Freeform 2">
             <a:extLst xmlns:a="http://schemas.openxmlformats.org/drawingml/2006/main">
               <a:ext uri="{FF2B5EF4-FFF2-40B4-BE49-F238E27FC236}">
-                <a16:creationId xmlns:a16="http://schemas.microsoft.com/office/drawing/2014/main" id="{2AB0FB60-51DC-4511-B063-3117396E8CA5}"/>
+                <a16:creationId xmlns:a16="http://schemas.microsoft.com/office/drawing/2014/main" id="{091A7D91-F9A3-49B7-ADB0-4537D3544FFC}"/>
               </a:ext>
             </a:extLst>
           </p:cNvPr>
@@ -6153,7 +6165,7 @@
             </a:pathLst>
           </a:custGeom>
           <a:blipFill xmlns:a="http://schemas.openxmlformats.org/drawingml/2006/main">
-            <a:blip xmlns:r="http://schemas.openxmlformats.org/officeDocument/2006/relationships" r:embed="R3a913059f7204928"/>
+            <a:blip xmlns:r="http://schemas.openxmlformats.org/officeDocument/2006/relationships" r:embed="Rc0b4347e11b645d5"/>
             <a:stretch>
               <a:fillRect l="-4156" t="0" r="-2479" b="-18484"/>
             </a:stretch>
@@ -6165,7 +6177,7 @@
           <p:cNvPr id="3" name="Freeform 3">
             <a:extLst xmlns:a="http://schemas.openxmlformats.org/drawingml/2006/main">
               <a:ext uri="{FF2B5EF4-FFF2-40B4-BE49-F238E27FC236}">
-                <a16:creationId xmlns:a16="http://schemas.microsoft.com/office/drawing/2014/main" id="{3E18A648-ADF0-4ECA-BBFE-6E3B14FA65AB}"/>
+                <a16:creationId xmlns:a16="http://schemas.microsoft.com/office/drawing/2014/main" id="{09A1750B-6921-44B7-A70B-7AF630FDE21F}"/>
               </a:ext>
             </a:extLst>
           </p:cNvPr>
@@ -6213,7 +6225,7 @@
           <p:cNvPr id="5" name="Freeform 5">
             <a:extLst xmlns:a="http://schemas.openxmlformats.org/drawingml/2006/main">
               <a:ext uri="{FF2B5EF4-FFF2-40B4-BE49-F238E27FC236}">
-                <a16:creationId xmlns:a16="http://schemas.microsoft.com/office/drawing/2014/main" id="{876FAD00-7F09-4141-A826-4B0127B51DF4}"/>
+                <a16:creationId xmlns:a16="http://schemas.microsoft.com/office/drawing/2014/main" id="{64EC17F7-D47D-47FF-A545-F2745EE3BFB6}"/>
               </a:ext>
             </a:extLst>
           </p:cNvPr>
@@ -6287,7 +6299,7 @@
           <p:cNvPr id="6" name="TextBox 6">
             <a:extLst xmlns:a="http://schemas.openxmlformats.org/drawingml/2006/main">
               <a:ext uri="{FF2B5EF4-FFF2-40B4-BE49-F238E27FC236}">
-                <a16:creationId xmlns:a16="http://schemas.microsoft.com/office/drawing/2014/main" id="{CC16FCE0-5641-4354-844D-FDD8516FD57D}"/>
+                <a16:creationId xmlns:a16="http://schemas.microsoft.com/office/drawing/2014/main" id="{C27D869A-E813-436B-8C10-F90C310340ED}"/>
               </a:ext>
             </a:extLst>
           </p:cNvPr>
@@ -6323,7 +6335,7 @@
           <p:cNvPr id="7" name="Freeform 7">
             <a:extLst xmlns:a="http://schemas.openxmlformats.org/drawingml/2006/main">
               <a:ext uri="{FF2B5EF4-FFF2-40B4-BE49-F238E27FC236}">
-                <a16:creationId xmlns:a16="http://schemas.microsoft.com/office/drawing/2014/main" id="{D5E0B07C-54B7-423D-9B73-C6B7006CE8CE}"/>
+                <a16:creationId xmlns:a16="http://schemas.microsoft.com/office/drawing/2014/main" id="{08599822-78FE-4FFC-B44C-7CA5EA6544F2}"/>
               </a:ext>
             </a:extLst>
           </p:cNvPr>
@@ -6361,10 +6373,10 @@
             </a:pathLst>
           </a:custGeom>
           <a:blipFill xmlns:a="http://schemas.openxmlformats.org/drawingml/2006/main">
-            <a:blip xmlns:r="http://schemas.openxmlformats.org/officeDocument/2006/relationships" r:embed="R0a1b1c76c8944951">
+            <a:blip xmlns:r="http://schemas.openxmlformats.org/officeDocument/2006/relationships" r:embed="Rcf8e86e66d844c1f">
               <a:extLst>
                 <a:ext uri="{96DAC541-7B7A-43D3-8B79-37D633B846F1}">
-                  <asvg:svgBlip xmlns:asvg="http://schemas.microsoft.com/office/drawing/2016/SVG/main" r:embed="Rbd746298b4de4419"/>
+                  <asvg:svgBlip xmlns:asvg="http://schemas.microsoft.com/office/drawing/2016/SVG/main" r:embed="R0a17a32c0f35451a"/>
                 </a:ext>
               </a:extLst>
             </a:blip>
@@ -6379,7 +6391,7 @@
           <p:cNvPr id="8" name="Freeform 8">
             <a:extLst xmlns:a="http://schemas.openxmlformats.org/drawingml/2006/main">
               <a:ext uri="{FF2B5EF4-FFF2-40B4-BE49-F238E27FC236}">
-                <a16:creationId xmlns:a16="http://schemas.microsoft.com/office/drawing/2014/main" id="{6FCEE349-80BC-4FA4-AE53-B5AD4E1349C4}"/>
+                <a16:creationId xmlns:a16="http://schemas.microsoft.com/office/drawing/2014/main" id="{626B828B-94F8-45DA-BEBD-8358D95E7FAB}"/>
               </a:ext>
             </a:extLst>
           </p:cNvPr>
@@ -6417,10 +6429,10 @@
             </a:pathLst>
           </a:custGeom>
           <a:blipFill xmlns:a="http://schemas.openxmlformats.org/drawingml/2006/main">
-            <a:blip xmlns:r="http://schemas.openxmlformats.org/officeDocument/2006/relationships" r:embed="R0a1b1c76c8944951">
+            <a:blip xmlns:r="http://schemas.openxmlformats.org/officeDocument/2006/relationships" r:embed="Rcf8e86e66d844c1f">
               <a:extLst>
                 <a:ext uri="{96DAC541-7B7A-43D3-8B79-37D633B846F1}">
-                  <asvg:svgBlip xmlns:asvg="http://schemas.microsoft.com/office/drawing/2016/SVG/main" r:embed="Rbd746298b4de4419"/>
+                  <asvg:svgBlip xmlns:asvg="http://schemas.microsoft.com/office/drawing/2016/SVG/main" r:embed="R0a17a32c0f35451a"/>
                 </a:ext>
               </a:extLst>
             </a:blip>
@@ -6435,7 +6447,7 @@
           <p:cNvPr id="9" name="TextBox 9">
             <a:extLst xmlns:a="http://schemas.openxmlformats.org/drawingml/2006/main">
               <a:ext uri="{FF2B5EF4-FFF2-40B4-BE49-F238E27FC236}">
-                <a16:creationId xmlns:a16="http://schemas.microsoft.com/office/drawing/2014/main" id="{74B841B2-6793-4304-9249-0664FEC3679A}"/>
+                <a16:creationId xmlns:a16="http://schemas.microsoft.com/office/drawing/2014/main" id="{4DEBABE3-CF34-456B-A012-BF7AE0579CD2}"/>
               </a:ext>
             </a:extLst>
           </p:cNvPr>
@@ -6487,7 +6499,7 @@
           <p:cNvPr id="10" name="TextBox 10">
             <a:extLst xmlns:a="http://schemas.openxmlformats.org/drawingml/2006/main">
               <a:ext uri="{FF2B5EF4-FFF2-40B4-BE49-F238E27FC236}">
-                <a16:creationId xmlns:a16="http://schemas.microsoft.com/office/drawing/2014/main" id="{B3BD1E2E-12BE-41A5-9EEE-0F97980E76A0}"/>
+                <a16:creationId xmlns:a16="http://schemas.microsoft.com/office/drawing/2014/main" id="{FA689153-4591-42F5-9440-481096D189E4}"/>
               </a:ext>
             </a:extLst>
           </p:cNvPr>
@@ -6539,7 +6551,7 @@
           <p:cNvPr id="11" name="TextBox 11">
             <a:extLst xmlns:a="http://schemas.openxmlformats.org/drawingml/2006/main">
               <a:ext uri="{FF2B5EF4-FFF2-40B4-BE49-F238E27FC236}">
-                <a16:creationId xmlns:a16="http://schemas.microsoft.com/office/drawing/2014/main" id="{ED72F72A-E74F-44FB-A67C-242EE577D1AF}"/>
+                <a16:creationId xmlns:a16="http://schemas.microsoft.com/office/drawing/2014/main" id="{A74F5CCB-8137-408B-81A6-A8A948B5522C}"/>
               </a:ext>
             </a:extLst>
           </p:cNvPr>
@@ -6700,7 +6712,7 @@
           <p:cNvPr id="12" name="TextBox 12">
             <a:extLst xmlns:a="http://schemas.openxmlformats.org/drawingml/2006/main">
               <a:ext uri="{FF2B5EF4-FFF2-40B4-BE49-F238E27FC236}">
-                <a16:creationId xmlns:a16="http://schemas.microsoft.com/office/drawing/2014/main" id="{9262F884-89D6-439D-A23D-43C07016EA12}"/>
+                <a16:creationId xmlns:a16="http://schemas.microsoft.com/office/drawing/2014/main" id="{EFE37ED8-13D4-4771-9EBA-7B826D05969F}"/>
               </a:ext>
             </a:extLst>
           </p:cNvPr>
@@ -6752,7 +6764,7 @@
           <p:cNvPr id="13" name="Freeform 13">
             <a:extLst xmlns:a="http://schemas.openxmlformats.org/drawingml/2006/main">
               <a:ext uri="{FF2B5EF4-FFF2-40B4-BE49-F238E27FC236}">
-                <a16:creationId xmlns:a16="http://schemas.microsoft.com/office/drawing/2014/main" id="{81A6CE0A-AAB0-4B4C-AD52-B45A39592F92}"/>
+                <a16:creationId xmlns:a16="http://schemas.microsoft.com/office/drawing/2014/main" id="{A90FD416-762F-4A94-86C8-2BACEA4E8242}"/>
               </a:ext>
             </a:extLst>
           </p:cNvPr>
@@ -6800,7 +6812,7 @@
           <p:cNvPr id="14" name="TextBox 14">
             <a:extLst xmlns:a="http://schemas.openxmlformats.org/drawingml/2006/main">
               <a:ext uri="{FF2B5EF4-FFF2-40B4-BE49-F238E27FC236}">
-                <a16:creationId xmlns:a16="http://schemas.microsoft.com/office/drawing/2014/main" id="{DAFB13CC-3FC1-4001-A341-734A77977D44}"/>
+                <a16:creationId xmlns:a16="http://schemas.microsoft.com/office/drawing/2014/main" id="{848DCE91-12FA-444D-AE02-31EAB5B12F00}"/>
               </a:ext>
             </a:extLst>
           </p:cNvPr>
@@ -6854,7 +6866,7 @@
           <p:cNvPr id="15" name="">
             <a:extLst xmlns:a="http://schemas.openxmlformats.org/drawingml/2006/main">
               <a:ext uri="{FF2B5EF4-FFF2-40B4-BE49-F238E27FC236}">
-                <a16:creationId xmlns:a16="http://schemas.microsoft.com/office/drawing/2014/main" id="{532F5921-E68B-4597-BAE1-441C8621DE01}"/>
+                <a16:creationId xmlns:a16="http://schemas.microsoft.com/office/drawing/2014/main" id="{A9AF234E-28C2-448F-8439-11A877911149}"/>
               </a:ext>
             </a:extLst>
           </p:cNvPr>
@@ -6864,7 +6876,7 @@
           <p:nvPr/>
         </p:nvPicPr>
         <p:blipFill>
-          <a:blip xmlns:r="http://schemas.openxmlformats.org/officeDocument/2006/relationships" xmlns:a="http://schemas.openxmlformats.org/drawingml/2006/main" r:embed="R81483370b6d74590"/>
+          <a:blip xmlns:r="http://schemas.openxmlformats.org/officeDocument/2006/relationships" xmlns:a="http://schemas.openxmlformats.org/drawingml/2006/main" r:embed="R058eb70313754106"/>
           <a:srcRect xmlns:a="http://schemas.openxmlformats.org/drawingml/2006/main" l="0" t="15880" r="23187" b="0"/>
           <a:stretch xmlns:a="http://schemas.openxmlformats.org/drawingml/2006/main"/>
         </p:blipFill>
@@ -6883,7 +6895,7 @@
           <p:cNvPr id="16" name="">
             <a:extLst xmlns:a="http://schemas.openxmlformats.org/drawingml/2006/main">
               <a:ext uri="{FF2B5EF4-FFF2-40B4-BE49-F238E27FC236}">
-                <a16:creationId xmlns:a16="http://schemas.microsoft.com/office/drawing/2014/main" id="{FD9EB644-B87C-486C-8F78-E99915295A8D}"/>
+                <a16:creationId xmlns:a16="http://schemas.microsoft.com/office/drawing/2014/main" id="{454E073D-3AC2-4633-9F20-AA44E2E3EDA1}"/>
               </a:ext>
             </a:extLst>
           </p:cNvPr>
@@ -6893,7 +6905,7 @@
           <p:nvPr/>
         </p:nvPicPr>
         <p:blipFill>
-          <a:blip xmlns:r="http://schemas.openxmlformats.org/officeDocument/2006/relationships" xmlns:a="http://schemas.openxmlformats.org/drawingml/2006/main" r:embed="R727f4b4cfdfe4635"/>
+          <a:blip xmlns:r="http://schemas.openxmlformats.org/officeDocument/2006/relationships" xmlns:a="http://schemas.openxmlformats.org/drawingml/2006/main" r:embed="R91f1f9afa7164289"/>
           <a:srcRect xmlns:a="http://schemas.openxmlformats.org/drawingml/2006/main" l="13490" t="35208" r="0" b="0"/>
           <a:stretch xmlns:a="http://schemas.openxmlformats.org/drawingml/2006/main"/>
         </p:blipFill>
@@ -6912,7 +6924,7 @@
           <p:cNvPr id="17" name="內容_1_循環箱逆向物流">
             <a:extLst xmlns:a="http://schemas.openxmlformats.org/drawingml/2006/main">
               <a:ext uri="{FF2B5EF4-FFF2-40B4-BE49-F238E27FC236}">
-                <a16:creationId xmlns:a16="http://schemas.microsoft.com/office/drawing/2014/main" id="{EC2EF814-2DE5-4826-B3B0-0713916728AC}"/>
+                <a16:creationId xmlns:a16="http://schemas.microsoft.com/office/drawing/2014/main" id="{886518F4-6132-4CC9-AE23-9260E7BA7496}"/>
               </a:ext>
             </a:extLst>
           </p:cNvPr>
@@ -7070,7 +7082,7 @@
           <p:cNvPr id="18" name="內容_1_原生數位分身與處方實測">
             <a:extLst xmlns:a="http://schemas.openxmlformats.org/drawingml/2006/main">
               <a:ext uri="{FF2B5EF4-FFF2-40B4-BE49-F238E27FC236}">
-                <a16:creationId xmlns:a16="http://schemas.microsoft.com/office/drawing/2014/main" id="{4ED9A97B-CB8D-43DA-AE02-161EB4FC2B57}"/>
+                <a16:creationId xmlns:a16="http://schemas.microsoft.com/office/drawing/2014/main" id="{CC224338-6023-4DD3-BBC9-E12FBE9848D5}"/>
               </a:ext>
             </a:extLst>
           </p:cNvPr>
@@ -7228,7 +7240,7 @@
           <p:cNvPr id="19" name="內容_1_雙層輸送網・五人作業・500">
             <a:extLst xmlns:a="http://schemas.openxmlformats.org/drawingml/2006/main">
               <a:ext uri="{FF2B5EF4-FFF2-40B4-BE49-F238E27FC236}">
-                <a16:creationId xmlns:a16="http://schemas.microsoft.com/office/drawing/2014/main" id="{F9E211E6-9B1D-449C-957F-3B025BCB3CAE}"/>
+                <a16:creationId xmlns:a16="http://schemas.microsoft.com/office/drawing/2014/main" id="{D762B3AE-8073-4553-92AB-D23585FB65C9}"/>
               </a:ext>
             </a:extLst>
           </p:cNvPr>
@@ -7386,7 +7398,7 @@
           <p:cNvPr id="20" name="內容_1_2026.10.29　循環物">
             <a:extLst xmlns:a="http://schemas.openxmlformats.org/drawingml/2006/main">
               <a:ext uri="{FF2B5EF4-FFF2-40B4-BE49-F238E27FC236}">
-                <a16:creationId xmlns:a16="http://schemas.microsoft.com/office/drawing/2014/main" id="{4263C9CB-4E52-488D-9894-450C3AA0F313}"/>
+                <a16:creationId xmlns:a16="http://schemas.microsoft.com/office/drawing/2014/main" id="{558FAA85-5985-4245-9007-EB46D8CFA628}"/>
               </a:ext>
             </a:extLst>
           </p:cNvPr>
@@ -7542,7 +7554,7 @@
     </p:spTree>
     <p:extLst>
       <p:ext uri="{BB962C8B-B14F-4D97-AF65-F5344CB8AC3E}">
-        <p14:creationId xmlns:p14="http://schemas.microsoft.com/office/powerpoint/2010/main" val="993987008"/>
+        <p14:creationId xmlns:p14="http://schemas.microsoft.com/office/powerpoint/2010/main" val="1325445223"/>
       </p:ext>
     </p:extLst>
   </p:cSld>
@@ -7566,7 +7578,7 @@
           <p:cNvPr id="2" name="Freeform 2">
             <a:extLst xmlns:a="http://schemas.openxmlformats.org/drawingml/2006/main">
               <a:ext uri="{FF2B5EF4-FFF2-40B4-BE49-F238E27FC236}">
-                <a16:creationId xmlns:a16="http://schemas.microsoft.com/office/drawing/2014/main" id="{39E3FE14-E906-43E5-B03D-78CBF069D1CC}"/>
+                <a16:creationId xmlns:a16="http://schemas.microsoft.com/office/drawing/2014/main" id="{2E548190-A4CC-475F-94E2-E8EDE0DCB059}"/>
               </a:ext>
             </a:extLst>
           </p:cNvPr>
@@ -7604,7 +7616,7 @@
             </a:pathLst>
           </a:custGeom>
           <a:blipFill xmlns:a="http://schemas.openxmlformats.org/drawingml/2006/main">
-            <a:blip xmlns:r="http://schemas.openxmlformats.org/officeDocument/2006/relationships" r:embed="Rbd22db9576b14724"/>
+            <a:blip xmlns:r="http://schemas.openxmlformats.org/officeDocument/2006/relationships" r:embed="R742070d22aae4e05"/>
             <a:stretch>
               <a:fillRect l="-35258" t="-5555" r="-24931" b="-72434"/>
             </a:stretch>
@@ -7616,7 +7628,7 @@
           <p:cNvPr id="4" name="Freeform 4">
             <a:extLst xmlns:a="http://schemas.openxmlformats.org/drawingml/2006/main">
               <a:ext uri="{FF2B5EF4-FFF2-40B4-BE49-F238E27FC236}">
-                <a16:creationId xmlns:a16="http://schemas.microsoft.com/office/drawing/2014/main" id="{CF40901E-219C-47F5-97D8-6F5111DF7261}"/>
+                <a16:creationId xmlns:a16="http://schemas.microsoft.com/office/drawing/2014/main" id="{11EBE327-3539-4576-B727-009071D6F600}"/>
               </a:ext>
             </a:extLst>
           </p:cNvPr>
@@ -7690,7 +7702,7 @@
           <p:cNvPr id="5" name="TextBox 5">
             <a:extLst xmlns:a="http://schemas.openxmlformats.org/drawingml/2006/main">
               <a:ext uri="{FF2B5EF4-FFF2-40B4-BE49-F238E27FC236}">
-                <a16:creationId xmlns:a16="http://schemas.microsoft.com/office/drawing/2014/main" id="{2DE09B49-A9F6-40ED-8979-95BA0D13DA65}"/>
+                <a16:creationId xmlns:a16="http://schemas.microsoft.com/office/drawing/2014/main" id="{B3F91BB2-A689-4178-8AB4-DC1EAC325819}"/>
               </a:ext>
             </a:extLst>
           </p:cNvPr>
@@ -7726,7 +7738,7 @@
           <p:cNvPr id="6" name="Freeform 6">
             <a:extLst xmlns:a="http://schemas.openxmlformats.org/drawingml/2006/main">
               <a:ext uri="{FF2B5EF4-FFF2-40B4-BE49-F238E27FC236}">
-                <a16:creationId xmlns:a16="http://schemas.microsoft.com/office/drawing/2014/main" id="{C0B38389-E974-46B7-9F10-63B402CB926D}"/>
+                <a16:creationId xmlns:a16="http://schemas.microsoft.com/office/drawing/2014/main" id="{22EF5F4C-E975-4877-B333-7A6D65B3E105}"/>
               </a:ext>
             </a:extLst>
           </p:cNvPr>
@@ -7764,7 +7776,7 @@
             </a:pathLst>
           </a:custGeom>
           <a:blipFill xmlns:a="http://schemas.openxmlformats.org/drawingml/2006/main">
-            <a:blip xmlns:r="http://schemas.openxmlformats.org/officeDocument/2006/relationships" r:embed="Rcf2fa21da6204906"/>
+            <a:blip xmlns:r="http://schemas.openxmlformats.org/officeDocument/2006/relationships" r:embed="R92b408475d954fe7"/>
             <a:stretch>
               <a:fillRect l="0" t="0" r="0" b="0"/>
             </a:stretch>
@@ -7776,7 +7788,7 @@
           <p:cNvPr id="7" name="Freeform 7">
             <a:extLst xmlns:a="http://schemas.openxmlformats.org/drawingml/2006/main">
               <a:ext uri="{FF2B5EF4-FFF2-40B4-BE49-F238E27FC236}">
-                <a16:creationId xmlns:a16="http://schemas.microsoft.com/office/drawing/2014/main" id="{6C1B3FC4-8222-4AD2-B365-AA469C78B3BA}"/>
+                <a16:creationId xmlns:a16="http://schemas.microsoft.com/office/drawing/2014/main" id="{12941773-E1E9-4F8F-BF14-D2D453608F25}"/>
               </a:ext>
             </a:extLst>
           </p:cNvPr>
@@ -7814,10 +7826,10 @@
             </a:pathLst>
           </a:custGeom>
           <a:blipFill xmlns:a="http://schemas.openxmlformats.org/drawingml/2006/main">
-            <a:blip xmlns:r="http://schemas.openxmlformats.org/officeDocument/2006/relationships" r:embed="Re0236b92f54d47af">
+            <a:blip xmlns:r="http://schemas.openxmlformats.org/officeDocument/2006/relationships" r:embed="R695938e4efe4472c">
               <a:extLst>
                 <a:ext uri="{96DAC541-7B7A-43D3-8B79-37D633B846F1}">
-                  <asvg:svgBlip xmlns:asvg="http://schemas.microsoft.com/office/drawing/2016/SVG/main" r:embed="R63a462fea6884963"/>
+                  <asvg:svgBlip xmlns:asvg="http://schemas.microsoft.com/office/drawing/2016/SVG/main" r:embed="Ra2acb43b0845469b"/>
                 </a:ext>
               </a:extLst>
             </a:blip>
@@ -7832,7 +7844,7 @@
           <p:cNvPr id="8" name="Freeform 8">
             <a:extLst xmlns:a="http://schemas.openxmlformats.org/drawingml/2006/main">
               <a:ext uri="{FF2B5EF4-FFF2-40B4-BE49-F238E27FC236}">
-                <a16:creationId xmlns:a16="http://schemas.microsoft.com/office/drawing/2014/main" id="{6FBA18CB-344B-41A4-8C04-6B3AAAB42A91}"/>
+                <a16:creationId xmlns:a16="http://schemas.microsoft.com/office/drawing/2014/main" id="{61A25261-4845-430E-B7AE-CDE75126C656}"/>
               </a:ext>
             </a:extLst>
           </p:cNvPr>
@@ -7870,10 +7882,10 @@
             </a:pathLst>
           </a:custGeom>
           <a:blipFill xmlns:a="http://schemas.openxmlformats.org/drawingml/2006/main">
-            <a:blip xmlns:r="http://schemas.openxmlformats.org/officeDocument/2006/relationships" r:embed="Re0236b92f54d47af">
+            <a:blip xmlns:r="http://schemas.openxmlformats.org/officeDocument/2006/relationships" r:embed="R695938e4efe4472c">
               <a:extLst>
                 <a:ext uri="{96DAC541-7B7A-43D3-8B79-37D633B846F1}">
-                  <asvg:svgBlip xmlns:asvg="http://schemas.microsoft.com/office/drawing/2016/SVG/main" r:embed="R63a462fea6884963"/>
+                  <asvg:svgBlip xmlns:asvg="http://schemas.microsoft.com/office/drawing/2016/SVG/main" r:embed="Ra2acb43b0845469b"/>
                 </a:ext>
               </a:extLst>
             </a:blip>
@@ -7888,7 +7900,7 @@
           <p:cNvPr id="9" name="Freeform 9">
             <a:extLst xmlns:a="http://schemas.openxmlformats.org/drawingml/2006/main">
               <a:ext uri="{FF2B5EF4-FFF2-40B4-BE49-F238E27FC236}">
-                <a16:creationId xmlns:a16="http://schemas.microsoft.com/office/drawing/2014/main" id="{626DB452-C62A-4717-8108-9CAA086BB81F}"/>
+                <a16:creationId xmlns:a16="http://schemas.microsoft.com/office/drawing/2014/main" id="{4F651E45-F03E-489A-9581-D85FC8585198}"/>
               </a:ext>
             </a:extLst>
           </p:cNvPr>
@@ -7936,7 +7948,7 @@
           <p:cNvPr id="10" name="TextBox 10">
             <a:extLst xmlns:a="http://schemas.openxmlformats.org/drawingml/2006/main">
               <a:ext uri="{FF2B5EF4-FFF2-40B4-BE49-F238E27FC236}">
-                <a16:creationId xmlns:a16="http://schemas.microsoft.com/office/drawing/2014/main" id="{1A045B00-6425-4DA7-8B58-E7A0FC2974A7}"/>
+                <a16:creationId xmlns:a16="http://schemas.microsoft.com/office/drawing/2014/main" id="{7F96A93A-CA43-42DE-B5F9-E5C8AB49E82D}"/>
               </a:ext>
             </a:extLst>
           </p:cNvPr>
@@ -7988,7 +8000,7 @@
           <p:cNvPr id="11" name="TextBox 11">
             <a:extLst xmlns:a="http://schemas.openxmlformats.org/drawingml/2006/main">
               <a:ext uri="{FF2B5EF4-FFF2-40B4-BE49-F238E27FC236}">
-                <a16:creationId xmlns:a16="http://schemas.microsoft.com/office/drawing/2014/main" id="{903225C4-3E6F-4942-A638-81AD98C0C995}"/>
+                <a16:creationId xmlns:a16="http://schemas.microsoft.com/office/drawing/2014/main" id="{726EA0AB-A7FE-4A69-898E-9B2FEAA58A1D}"/>
               </a:ext>
             </a:extLst>
           </p:cNvPr>
@@ -8040,7 +8052,7 @@
           <p:cNvPr id="12" name="TextBox 12">
             <a:extLst xmlns:a="http://schemas.openxmlformats.org/drawingml/2006/main">
               <a:ext uri="{FF2B5EF4-FFF2-40B4-BE49-F238E27FC236}">
-                <a16:creationId xmlns:a16="http://schemas.microsoft.com/office/drawing/2014/main" id="{DDBE0A0C-1FC5-4957-9107-9F9F39268891}"/>
+                <a16:creationId xmlns:a16="http://schemas.microsoft.com/office/drawing/2014/main" id="{3537F47F-7F5C-463A-A7DF-5502116B809B}"/>
               </a:ext>
             </a:extLst>
           </p:cNvPr>
@@ -8201,7 +8213,7 @@
           <p:cNvPr id="13" name="TextBox 13">
             <a:extLst xmlns:a="http://schemas.openxmlformats.org/drawingml/2006/main">
               <a:ext uri="{FF2B5EF4-FFF2-40B4-BE49-F238E27FC236}">
-                <a16:creationId xmlns:a16="http://schemas.microsoft.com/office/drawing/2014/main" id="{ED874C90-DE5A-4D09-B397-7C9B6C1297BE}"/>
+                <a16:creationId xmlns:a16="http://schemas.microsoft.com/office/drawing/2014/main" id="{36CF4A92-9395-4F23-BD4C-2679E11284E2}"/>
               </a:ext>
             </a:extLst>
           </p:cNvPr>
@@ -8252,7 +8264,7 @@
           <p:cNvPr id="14" name="TextBox 14">
             <a:extLst xmlns:a="http://schemas.openxmlformats.org/drawingml/2006/main">
               <a:ext uri="{FF2B5EF4-FFF2-40B4-BE49-F238E27FC236}">
-                <a16:creationId xmlns:a16="http://schemas.microsoft.com/office/drawing/2014/main" id="{27002A41-02B9-4B4D-9493-5EC87966BA80}"/>
+                <a16:creationId xmlns:a16="http://schemas.microsoft.com/office/drawing/2014/main" id="{ACC585F7-C1FB-4635-A1F5-EC2A24439416}"/>
               </a:ext>
             </a:extLst>
           </p:cNvPr>
@@ -8304,7 +8316,7 @@
           <p:cNvPr id="16" name="Freeform 16">
             <a:extLst xmlns:a="http://schemas.openxmlformats.org/drawingml/2006/main">
               <a:ext uri="{FF2B5EF4-FFF2-40B4-BE49-F238E27FC236}">
-                <a16:creationId xmlns:a16="http://schemas.microsoft.com/office/drawing/2014/main" id="{5D9C5747-DE5E-4F9D-AFD3-B413AA4C7EC7}"/>
+                <a16:creationId xmlns:a16="http://schemas.microsoft.com/office/drawing/2014/main" id="{6D043251-52B5-4559-8AE5-EB72816EB164}"/>
               </a:ext>
             </a:extLst>
           </p:cNvPr>
@@ -8346,10 +8358,10 @@
       </p:sp>
       <p:sp>
         <p:nvSpPr>
-          <p:cNvPr id="17" name="內容_10_Before：辨識雙重瓶頸">
-            <a:extLst xmlns:a="http://schemas.openxmlformats.org/drawingml/2006/main">
-              <a:ext uri="{FF2B5EF4-FFF2-40B4-BE49-F238E27FC236}">
-                <a16:creationId xmlns:a16="http://schemas.microsoft.com/office/drawing/2014/main" id="{21FE4012-AF4B-4821-A686-4143812CC5F5}"/>
+          <p:cNvPr id="17" name="內容_10_關鍵發現">
+            <a:extLst xmlns:a="http://schemas.openxmlformats.org/drawingml/2006/main">
+              <a:ext uri="{FF2B5EF4-FFF2-40B4-BE49-F238E27FC236}">
+                <a16:creationId xmlns:a16="http://schemas.microsoft.com/office/drawing/2014/main" id="{E378A364-25AA-4678-B482-685A096A2360}"/>
               </a:ext>
             </a:extLst>
           </p:cNvPr>
@@ -8497,17 +8509,17 @@
                 <a:ea typeface="Microsoft JhengHei"/>
                 <a:cs typeface="Microsoft JhengHei"/>
               </a:rPr>
-              <a:t>Before：辨識雙重瓶頸</a:t>
+              <a:t>關鍵發現</a:t>
             </a:r>
           </a:p>
         </p:txBody>
       </p:sp>
       <p:sp>
         <p:nvSpPr>
-          <p:cNvPr id="18" name="內容_10_只添清洗機，QA仍會排隊">
-            <a:extLst xmlns:a="http://schemas.openxmlformats.org/drawingml/2006/main">
-              <a:ext uri="{FF2B5EF4-FFF2-40B4-BE49-F238E27FC236}">
-                <a16:creationId xmlns:a16="http://schemas.microsoft.com/office/drawing/2014/main" id="{3945B69F-1E1A-498C-8F58-15DDBDB7C0DF}"/>
+          <p:cNvPr id="18" name="內容_10_只加8m不夠，聯合控制才有效">
+            <a:extLst xmlns:a="http://schemas.openxmlformats.org/drawingml/2006/main">
+              <a:ext uri="{FF2B5EF4-FFF2-40B4-BE49-F238E27FC236}">
+                <a16:creationId xmlns:a16="http://schemas.microsoft.com/office/drawing/2014/main" id="{286D884B-B5EA-4092-ADDC-E4EE09F54E2B}"/>
               </a:ext>
             </a:extLst>
           </p:cNvPr>
@@ -8655,7 +8667,7 @@
                 <a:ea typeface="Microsoft JhengHei"/>
                 <a:cs typeface="Microsoft JhengHei"/>
               </a:rPr>
-              <a:t>只添清洗機，QA仍會排隊</a:t>
+              <a:t>只加8m不夠，聯合控制才有效</a:t>
             </a:r>
           </a:p>
         </p:txBody>
@@ -8665,7 +8677,7 @@
           <p:cNvPr id="19" name="Chart">
             <a:extLst xmlns:a="http://schemas.openxmlformats.org/drawingml/2006/main">
               <a:ext uri="{FF2B5EF4-FFF2-40B4-BE49-F238E27FC236}">
-                <a16:creationId xmlns:a16="http://schemas.microsoft.com/office/drawing/2014/main" id="{39CDB96D-D490-4C93-B2FD-0A23E843401B}"/>
+                <a16:creationId xmlns:a16="http://schemas.microsoft.com/office/drawing/2014/main" id="{1005B3A0-D0F6-4E05-96F2-FAB296093E35}"/>
               </a:ext>
             </a:extLst>
           </p:cNvPr>
@@ -8678,7 +8690,7 @@
         </p:xfrm>
         <a:graphic xmlns:a="http://schemas.openxmlformats.org/drawingml/2006/main">
           <a:graphicData uri="http://schemas.openxmlformats.org/drawingml/2006/chart">
-            <c:chart xmlns:r="http://schemas.openxmlformats.org/officeDocument/2006/relationships" xmlns:c="http://schemas.openxmlformats.org/drawingml/2006/chart" r:id="R3d95de5f8b234b66"/>
+            <c:chart xmlns:r="http://schemas.openxmlformats.org/officeDocument/2006/relationships" xmlns:c="http://schemas.openxmlformats.org/drawingml/2006/chart" r:id="R3c803ca83d094453"/>
           </a:graphicData>
         </a:graphic>
       </p:graphicFrame>
@@ -8687,7 +8699,7 @@
           <p:cNvPr id="20" name="Chart">
             <a:extLst xmlns:a="http://schemas.openxmlformats.org/drawingml/2006/main">
               <a:ext uri="{FF2B5EF4-FFF2-40B4-BE49-F238E27FC236}">
-                <a16:creationId xmlns:a16="http://schemas.microsoft.com/office/drawing/2014/main" id="{0B06CF43-7B7B-46BD-90E3-A37466514B87}"/>
+                <a16:creationId xmlns:a16="http://schemas.microsoft.com/office/drawing/2014/main" id="{08E88F02-2FCC-4CC4-8B80-D55DA6E75B8E}"/>
               </a:ext>
             </a:extLst>
           </p:cNvPr>
@@ -8700,16 +8712,16 @@
         </p:xfrm>
         <a:graphic xmlns:a="http://schemas.openxmlformats.org/drawingml/2006/main">
           <a:graphicData uri="http://schemas.openxmlformats.org/drawingml/2006/chart">
-            <c:chart xmlns:r="http://schemas.openxmlformats.org/officeDocument/2006/relationships" xmlns:c="http://schemas.openxmlformats.org/drawingml/2006/chart" r:id="R8d02b401df26461a"/>
+            <c:chart xmlns:r="http://schemas.openxmlformats.org/officeDocument/2006/relationships" xmlns:c="http://schemas.openxmlformats.org/drawingml/2006/chart" r:id="R3830b0c8757249a9"/>
           </a:graphicData>
         </a:graphic>
       </p:graphicFrame>
       <p:sp>
         <p:nvSpPr>
-          <p:cNvPr id="21" name="內容_10_S1、30次平均；P4 12">
-            <a:extLst xmlns:a="http://schemas.openxmlformats.org/drawingml/2006/main">
-              <a:ext uri="{FF2B5EF4-FFF2-40B4-BE49-F238E27FC236}">
-                <a16:creationId xmlns:a16="http://schemas.microsoft.com/office/drawing/2014/main" id="{43FEFEBF-5823-4D24-827C-E3B93B4D935E}"/>
+          <p:cNvPr id="21" name="內容_10_P2 8m阻塞7.609% ">
+            <a:extLst xmlns:a="http://schemas.openxmlformats.org/drawingml/2006/main">
+              <a:ext uri="{FF2B5EF4-FFF2-40B4-BE49-F238E27FC236}">
+                <a16:creationId xmlns:a16="http://schemas.microsoft.com/office/drawing/2014/main" id="{E1BFDC62-DD2A-4971-AFB2-11A09BDAF791}"/>
               </a:ext>
             </a:extLst>
           </p:cNvPr>
@@ -8857,7 +8869,7 @@
                 <a:ea typeface="Microsoft JhengHei"/>
                 <a:cs typeface="Microsoft JhengHei"/>
               </a:rPr>
-              <a:t>S1、30次平均；P4 12m阻塞 0.71 [0.57, 0.86]%，平均Q-Time 5.01分鐘。</a:t>
+              <a:t>P2 8m阻塞7.609% [6.917,8.301]，未達1%。P4有支援與外包，不能把聯合效果都歸因於人力。</a:t>
             </a:r>
           </a:p>
         </p:txBody>
@@ -8865,7 +8877,7 @@
     </p:spTree>
     <p:extLst>
       <p:ext uri="{BB962C8B-B14F-4D97-AF65-F5344CB8AC3E}">
-        <p14:creationId xmlns:p14="http://schemas.microsoft.com/office/powerpoint/2010/main" val="1145353945"/>
+        <p14:creationId xmlns:p14="http://schemas.microsoft.com/office/powerpoint/2010/main" val="512247256"/>
       </p:ext>
     </p:extLst>
   </p:cSld>
@@ -8889,7 +8901,7 @@
           <p:cNvPr id="2" name="Freeform 2">
             <a:extLst xmlns:a="http://schemas.openxmlformats.org/drawingml/2006/main">
               <a:ext uri="{FF2B5EF4-FFF2-40B4-BE49-F238E27FC236}">
-                <a16:creationId xmlns:a16="http://schemas.microsoft.com/office/drawing/2014/main" id="{D309DAC8-8ADB-4426-8FA1-2313D17A3E98}"/>
+                <a16:creationId xmlns:a16="http://schemas.microsoft.com/office/drawing/2014/main" id="{BD42B81D-5B7A-4A5A-AED6-DEAA2C6EA595}"/>
               </a:ext>
             </a:extLst>
           </p:cNvPr>
@@ -8927,7 +8939,7 @@
             </a:pathLst>
           </a:custGeom>
           <a:blipFill xmlns:a="http://schemas.openxmlformats.org/drawingml/2006/main">
-            <a:blip xmlns:r="http://schemas.openxmlformats.org/officeDocument/2006/relationships" r:embed="R2baba12ef225424a"/>
+            <a:blip xmlns:r="http://schemas.openxmlformats.org/officeDocument/2006/relationships" r:embed="Rfa0a9fef49334536"/>
             <a:stretch>
               <a:fillRect l="-35258" t="-5555" r="-24931" b="-72434"/>
             </a:stretch>
@@ -8939,7 +8951,7 @@
           <p:cNvPr id="4" name="Freeform 4">
             <a:extLst xmlns:a="http://schemas.openxmlformats.org/drawingml/2006/main">
               <a:ext uri="{FF2B5EF4-FFF2-40B4-BE49-F238E27FC236}">
-                <a16:creationId xmlns:a16="http://schemas.microsoft.com/office/drawing/2014/main" id="{D2A607DC-7C2C-43B4-BC86-037111C37ACA}"/>
+                <a16:creationId xmlns:a16="http://schemas.microsoft.com/office/drawing/2014/main" id="{B90F0129-2287-4A73-A397-125AACE6BBF9}"/>
               </a:ext>
             </a:extLst>
           </p:cNvPr>
@@ -9013,7 +9025,7 @@
           <p:cNvPr id="5" name="TextBox 5">
             <a:extLst xmlns:a="http://schemas.openxmlformats.org/drawingml/2006/main">
               <a:ext uri="{FF2B5EF4-FFF2-40B4-BE49-F238E27FC236}">
-                <a16:creationId xmlns:a16="http://schemas.microsoft.com/office/drawing/2014/main" id="{29762F45-41DE-49CA-9782-83DBFF57FB1C}"/>
+                <a16:creationId xmlns:a16="http://schemas.microsoft.com/office/drawing/2014/main" id="{4C27E058-5B79-4B3B-A9B0-DA902F12177F}"/>
               </a:ext>
             </a:extLst>
           </p:cNvPr>
@@ -9049,7 +9061,7 @@
           <p:cNvPr id="6" name="Freeform 6">
             <a:extLst xmlns:a="http://schemas.openxmlformats.org/drawingml/2006/main">
               <a:ext uri="{FF2B5EF4-FFF2-40B4-BE49-F238E27FC236}">
-                <a16:creationId xmlns:a16="http://schemas.microsoft.com/office/drawing/2014/main" id="{3278E86D-0FED-4DC2-8363-D9B6352097D9}"/>
+                <a16:creationId xmlns:a16="http://schemas.microsoft.com/office/drawing/2014/main" id="{2C83FA23-9378-4442-AABE-5684F009F30C}"/>
               </a:ext>
             </a:extLst>
           </p:cNvPr>
@@ -9087,7 +9099,7 @@
             </a:pathLst>
           </a:custGeom>
           <a:blipFill xmlns:a="http://schemas.openxmlformats.org/drawingml/2006/main">
-            <a:blip xmlns:r="http://schemas.openxmlformats.org/officeDocument/2006/relationships" r:embed="R8a5a3186d3cb464c"/>
+            <a:blip xmlns:r="http://schemas.openxmlformats.org/officeDocument/2006/relationships" r:embed="R4d0c56c66b2d46b1"/>
             <a:stretch>
               <a:fillRect l="0" t="0" r="0" b="0"/>
             </a:stretch>
@@ -9099,7 +9111,7 @@
           <p:cNvPr id="7" name="Freeform 7">
             <a:extLst xmlns:a="http://schemas.openxmlformats.org/drawingml/2006/main">
               <a:ext uri="{FF2B5EF4-FFF2-40B4-BE49-F238E27FC236}">
-                <a16:creationId xmlns:a16="http://schemas.microsoft.com/office/drawing/2014/main" id="{220B4CCE-81B7-4EBA-B8D5-A1C8E85D3C79}"/>
+                <a16:creationId xmlns:a16="http://schemas.microsoft.com/office/drawing/2014/main" id="{1CB41A9C-C286-45D0-B95E-46D13185AED5}"/>
               </a:ext>
             </a:extLst>
           </p:cNvPr>
@@ -9137,10 +9149,10 @@
             </a:pathLst>
           </a:custGeom>
           <a:blipFill xmlns:a="http://schemas.openxmlformats.org/drawingml/2006/main">
-            <a:blip xmlns:r="http://schemas.openxmlformats.org/officeDocument/2006/relationships" r:embed="R7fb33f5789f24f53">
+            <a:blip xmlns:r="http://schemas.openxmlformats.org/officeDocument/2006/relationships" r:embed="R684172871d3e4d5c">
               <a:extLst>
                 <a:ext uri="{96DAC541-7B7A-43D3-8B79-37D633B846F1}">
-                  <asvg:svgBlip xmlns:asvg="http://schemas.microsoft.com/office/drawing/2016/SVG/main" r:embed="R909075d8445d4648"/>
+                  <asvg:svgBlip xmlns:asvg="http://schemas.microsoft.com/office/drawing/2016/SVG/main" r:embed="R48fbcb075b4c4228"/>
                 </a:ext>
               </a:extLst>
             </a:blip>
@@ -9155,7 +9167,7 @@
           <p:cNvPr id="8" name="Freeform 8">
             <a:extLst xmlns:a="http://schemas.openxmlformats.org/drawingml/2006/main">
               <a:ext uri="{FF2B5EF4-FFF2-40B4-BE49-F238E27FC236}">
-                <a16:creationId xmlns:a16="http://schemas.microsoft.com/office/drawing/2014/main" id="{565B298E-82B3-4993-B977-05C6150CB107}"/>
+                <a16:creationId xmlns:a16="http://schemas.microsoft.com/office/drawing/2014/main" id="{1CAD7C3E-CBC8-4AD1-98E6-B8788E95DEC9}"/>
               </a:ext>
             </a:extLst>
           </p:cNvPr>
@@ -9193,10 +9205,10 @@
             </a:pathLst>
           </a:custGeom>
           <a:blipFill xmlns:a="http://schemas.openxmlformats.org/drawingml/2006/main">
-            <a:blip xmlns:r="http://schemas.openxmlformats.org/officeDocument/2006/relationships" r:embed="R7fb33f5789f24f53">
+            <a:blip xmlns:r="http://schemas.openxmlformats.org/officeDocument/2006/relationships" r:embed="R684172871d3e4d5c">
               <a:extLst>
                 <a:ext uri="{96DAC541-7B7A-43D3-8B79-37D633B846F1}">
-                  <asvg:svgBlip xmlns:asvg="http://schemas.microsoft.com/office/drawing/2016/SVG/main" r:embed="R909075d8445d4648"/>
+                  <asvg:svgBlip xmlns:asvg="http://schemas.microsoft.com/office/drawing/2016/SVG/main" r:embed="R48fbcb075b4c4228"/>
                 </a:ext>
               </a:extLst>
             </a:blip>
@@ -9211,7 +9223,7 @@
           <p:cNvPr id="10" name="Freeform 10">
             <a:extLst xmlns:a="http://schemas.openxmlformats.org/drawingml/2006/main">
               <a:ext uri="{FF2B5EF4-FFF2-40B4-BE49-F238E27FC236}">
-                <a16:creationId xmlns:a16="http://schemas.microsoft.com/office/drawing/2014/main" id="{AF1E8E33-DE82-413E-A831-B6AFEDB6A2E0}"/>
+                <a16:creationId xmlns:a16="http://schemas.microsoft.com/office/drawing/2014/main" id="{9828D3F4-24ED-4EF7-B1CA-BA455E2C7648}"/>
               </a:ext>
             </a:extLst>
           </p:cNvPr>
@@ -9277,7 +9289,7 @@
           <p:cNvPr id="11" name="Freeform 11">
             <a:extLst xmlns:a="http://schemas.openxmlformats.org/drawingml/2006/main">
               <a:ext uri="{FF2B5EF4-FFF2-40B4-BE49-F238E27FC236}">
-                <a16:creationId xmlns:a16="http://schemas.microsoft.com/office/drawing/2014/main" id="{61DD53DD-4132-4EBF-BA29-FBE961D0C2EC}"/>
+                <a16:creationId xmlns:a16="http://schemas.microsoft.com/office/drawing/2014/main" id="{CAA90FF9-0828-46CE-BB2D-98B6B7BB4F5A}"/>
               </a:ext>
             </a:extLst>
           </p:cNvPr>
@@ -9343,7 +9355,7 @@
           <p:cNvPr id="12" name="Freeform 12">
             <a:extLst xmlns:a="http://schemas.openxmlformats.org/drawingml/2006/main">
               <a:ext uri="{FF2B5EF4-FFF2-40B4-BE49-F238E27FC236}">
-                <a16:creationId xmlns:a16="http://schemas.microsoft.com/office/drawing/2014/main" id="{DCC59520-576E-4869-95F3-3F9A71920C98}"/>
+                <a16:creationId xmlns:a16="http://schemas.microsoft.com/office/drawing/2014/main" id="{95376EB6-717D-45CE-8B0D-42158219E5B6}"/>
               </a:ext>
             </a:extLst>
           </p:cNvPr>
@@ -9409,7 +9421,7 @@
           <p:cNvPr id="14" name="Freeform 14">
             <a:extLst xmlns:a="http://schemas.openxmlformats.org/drawingml/2006/main">
               <a:ext uri="{FF2B5EF4-FFF2-40B4-BE49-F238E27FC236}">
-                <a16:creationId xmlns:a16="http://schemas.microsoft.com/office/drawing/2014/main" id="{6F110BED-1A62-49FC-90D5-B25BAB3B1A9A}"/>
+                <a16:creationId xmlns:a16="http://schemas.microsoft.com/office/drawing/2014/main" id="{9452A874-B366-4FE7-AD23-2D1E8962EE20}"/>
               </a:ext>
             </a:extLst>
           </p:cNvPr>
@@ -9475,7 +9487,7 @@
           <p:cNvPr id="15" name="Freeform 15">
             <a:extLst xmlns:a="http://schemas.openxmlformats.org/drawingml/2006/main">
               <a:ext uri="{FF2B5EF4-FFF2-40B4-BE49-F238E27FC236}">
-                <a16:creationId xmlns:a16="http://schemas.microsoft.com/office/drawing/2014/main" id="{F5AC5DA3-FB9A-4225-A5B5-FD66F9A3B02B}"/>
+                <a16:creationId xmlns:a16="http://schemas.microsoft.com/office/drawing/2014/main" id="{0D50F66F-4FDE-4D38-A3EE-4742587C9849}"/>
               </a:ext>
             </a:extLst>
           </p:cNvPr>
@@ -9541,7 +9553,7 @@
           <p:cNvPr id="16" name="Freeform 16">
             <a:extLst xmlns:a="http://schemas.openxmlformats.org/drawingml/2006/main">
               <a:ext uri="{FF2B5EF4-FFF2-40B4-BE49-F238E27FC236}">
-                <a16:creationId xmlns:a16="http://schemas.microsoft.com/office/drawing/2014/main" id="{E823BD7A-3E3F-4289-9AB6-5D49DFC25327}"/>
+                <a16:creationId xmlns:a16="http://schemas.microsoft.com/office/drawing/2014/main" id="{DC9634BA-6799-4595-B588-725A6015AE0E}"/>
               </a:ext>
             </a:extLst>
           </p:cNvPr>
@@ -9607,7 +9619,7 @@
           <p:cNvPr id="18" name="Freeform 18">
             <a:extLst xmlns:a="http://schemas.openxmlformats.org/drawingml/2006/main">
               <a:ext uri="{FF2B5EF4-FFF2-40B4-BE49-F238E27FC236}">
-                <a16:creationId xmlns:a16="http://schemas.microsoft.com/office/drawing/2014/main" id="{43887D56-684F-4083-922D-95124C123AC1}"/>
+                <a16:creationId xmlns:a16="http://schemas.microsoft.com/office/drawing/2014/main" id="{81B26996-6B38-48D6-B800-8C8DD742FA13}"/>
               </a:ext>
             </a:extLst>
           </p:cNvPr>
@@ -9652,7 +9664,7 @@
           <p:cNvPr id="19" name="TextBox 19">
             <a:extLst xmlns:a="http://schemas.openxmlformats.org/drawingml/2006/main">
               <a:ext uri="{FF2B5EF4-FFF2-40B4-BE49-F238E27FC236}">
-                <a16:creationId xmlns:a16="http://schemas.microsoft.com/office/drawing/2014/main" id="{B73DFF56-6874-41D6-A7E9-DB56ADE6B60B}"/>
+                <a16:creationId xmlns:a16="http://schemas.microsoft.com/office/drawing/2014/main" id="{51DECCA2-5EEE-4BC9-9A49-8A9533DEE68B}"/>
               </a:ext>
             </a:extLst>
           </p:cNvPr>
@@ -9692,7 +9704,7 @@
           <p:cNvPr id="20" name="TextBox 20">
             <a:extLst xmlns:a="http://schemas.openxmlformats.org/drawingml/2006/main">
               <a:ext uri="{FF2B5EF4-FFF2-40B4-BE49-F238E27FC236}">
-                <a16:creationId xmlns:a16="http://schemas.microsoft.com/office/drawing/2014/main" id="{C0E586F6-CD25-46DF-9D11-DEB1413B3262}"/>
+                <a16:creationId xmlns:a16="http://schemas.microsoft.com/office/drawing/2014/main" id="{A2F5E5A2-AF48-4DEB-A76E-A116EBCBEB20}"/>
               </a:ext>
             </a:extLst>
           </p:cNvPr>
@@ -9853,7 +9865,7 @@
           <p:cNvPr id="21" name="TextBox 21">
             <a:extLst xmlns:a="http://schemas.openxmlformats.org/drawingml/2006/main">
               <a:ext uri="{FF2B5EF4-FFF2-40B4-BE49-F238E27FC236}">
-                <a16:creationId xmlns:a16="http://schemas.microsoft.com/office/drawing/2014/main" id="{F85B3AB4-8A0C-4FF7-B930-EBBA7943ADF0}"/>
+                <a16:creationId xmlns:a16="http://schemas.microsoft.com/office/drawing/2014/main" id="{A2970A48-E311-46D6-A71C-06BD2DC86B82}"/>
               </a:ext>
             </a:extLst>
           </p:cNvPr>
@@ -9907,7 +9919,7 @@
           <p:cNvPr id="22" name="TextBox 22">
             <a:extLst xmlns:a="http://schemas.openxmlformats.org/drawingml/2006/main">
               <a:ext uri="{FF2B5EF4-FFF2-40B4-BE49-F238E27FC236}">
-                <a16:creationId xmlns:a16="http://schemas.microsoft.com/office/drawing/2014/main" id="{928B3ECF-C990-4285-8057-9537BD5A1F70}"/>
+                <a16:creationId xmlns:a16="http://schemas.microsoft.com/office/drawing/2014/main" id="{57C4F580-DC9E-4272-B70F-813F9BC1A455}"/>
               </a:ext>
             </a:extLst>
           </p:cNvPr>
@@ -9959,7 +9971,7 @@
           <p:cNvPr id="23" name="TextBox 23">
             <a:extLst xmlns:a="http://schemas.openxmlformats.org/drawingml/2006/main">
               <a:ext uri="{FF2B5EF4-FFF2-40B4-BE49-F238E27FC236}">
-                <a16:creationId xmlns:a16="http://schemas.microsoft.com/office/drawing/2014/main" id="{76AFF135-0C4E-42EF-926E-6ACA2F601635}"/>
+                <a16:creationId xmlns:a16="http://schemas.microsoft.com/office/drawing/2014/main" id="{68466173-938B-4DE2-A192-09591F9D9795}"/>
               </a:ext>
             </a:extLst>
           </p:cNvPr>
@@ -10011,7 +10023,7 @@
           <p:cNvPr id="24" name="TextBox 24">
             <a:extLst xmlns:a="http://schemas.openxmlformats.org/drawingml/2006/main">
               <a:ext uri="{FF2B5EF4-FFF2-40B4-BE49-F238E27FC236}">
-                <a16:creationId xmlns:a16="http://schemas.microsoft.com/office/drawing/2014/main" id="{9A549BF8-D180-4561-A67E-1720D3288E96}"/>
+                <a16:creationId xmlns:a16="http://schemas.microsoft.com/office/drawing/2014/main" id="{8CEDE8DC-2B7E-4728-9E50-4A71A3C66A5E}"/>
               </a:ext>
             </a:extLst>
           </p:cNvPr>
@@ -10060,7 +10072,7 @@
           <p:cNvPr id="25" name="TextBox 25">
             <a:extLst xmlns:a="http://schemas.openxmlformats.org/drawingml/2006/main">
               <a:ext uri="{FF2B5EF4-FFF2-40B4-BE49-F238E27FC236}">
-                <a16:creationId xmlns:a16="http://schemas.microsoft.com/office/drawing/2014/main" id="{C097AFE8-11EA-4ADD-9DAE-3A7D7A2DF87E}"/>
+                <a16:creationId xmlns:a16="http://schemas.microsoft.com/office/drawing/2014/main" id="{47E2B2AB-5504-49F5-9E9B-293103C1B89B}"/>
               </a:ext>
             </a:extLst>
           </p:cNvPr>
@@ -10112,7 +10124,7 @@
           <p:cNvPr id="27" name="Freeform 27">
             <a:extLst xmlns:a="http://schemas.openxmlformats.org/drawingml/2006/main">
               <a:ext uri="{FF2B5EF4-FFF2-40B4-BE49-F238E27FC236}">
-                <a16:creationId xmlns:a16="http://schemas.microsoft.com/office/drawing/2014/main" id="{3250DF1A-8D0B-4DE3-8D1D-E26B3224F6C5}"/>
+                <a16:creationId xmlns:a16="http://schemas.microsoft.com/office/drawing/2014/main" id="{1649277F-5EA9-4178-AAE1-AE18DD800AE7}"/>
               </a:ext>
             </a:extLst>
           </p:cNvPr>
@@ -10157,7 +10169,7 @@
           <p:cNvPr id="28" name="TextBox 28">
             <a:extLst xmlns:a="http://schemas.openxmlformats.org/drawingml/2006/main">
               <a:ext uri="{FF2B5EF4-FFF2-40B4-BE49-F238E27FC236}">
-                <a16:creationId xmlns:a16="http://schemas.microsoft.com/office/drawing/2014/main" id="{6E914FBE-B86F-4650-83A5-D85E3B1EBB5C}"/>
+                <a16:creationId xmlns:a16="http://schemas.microsoft.com/office/drawing/2014/main" id="{794F0E2D-1E58-4B5A-A82B-F405BD3D862B}"/>
               </a:ext>
             </a:extLst>
           </p:cNvPr>
@@ -10197,7 +10209,7 @@
           <p:cNvPr id="29" name="TextBox 29">
             <a:extLst xmlns:a="http://schemas.openxmlformats.org/drawingml/2006/main">
               <a:ext uri="{FF2B5EF4-FFF2-40B4-BE49-F238E27FC236}">
-                <a16:creationId xmlns:a16="http://schemas.microsoft.com/office/drawing/2014/main" id="{30474377-21E8-4086-A391-345625F8EF69}"/>
+                <a16:creationId xmlns:a16="http://schemas.microsoft.com/office/drawing/2014/main" id="{4D4D0136-16C9-4705-885F-0E816174D759}"/>
               </a:ext>
             </a:extLst>
           </p:cNvPr>
@@ -10246,7 +10258,7 @@
           <p:cNvPr id="30" name="TextBox 30">
             <a:extLst xmlns:a="http://schemas.openxmlformats.org/drawingml/2006/main">
               <a:ext uri="{FF2B5EF4-FFF2-40B4-BE49-F238E27FC236}">
-                <a16:creationId xmlns:a16="http://schemas.microsoft.com/office/drawing/2014/main" id="{0E311228-B5BA-48AA-A93C-A95758AA2331}"/>
+                <a16:creationId xmlns:a16="http://schemas.microsoft.com/office/drawing/2014/main" id="{75F3A0E4-58FD-471F-AFE8-A27F2931F076}"/>
               </a:ext>
             </a:extLst>
           </p:cNvPr>
@@ -10298,7 +10310,7 @@
           <p:cNvPr id="31" name="內容_11_處方 DOE">
             <a:extLst xmlns:a="http://schemas.openxmlformats.org/drawingml/2006/main">
               <a:ext uri="{FF2B5EF4-FFF2-40B4-BE49-F238E27FC236}">
-                <a16:creationId xmlns:a16="http://schemas.microsoft.com/office/drawing/2014/main" id="{1FD76535-FE71-43A1-B84B-2AFC651464B2}"/>
+                <a16:creationId xmlns:a16="http://schemas.microsoft.com/office/drawing/2014/main" id="{10CEB891-7164-470E-8CBF-A970B8CE3C13}"/>
               </a:ext>
             </a:extLst>
           </p:cNvPr>
@@ -10456,7 +10468,7 @@
           <p:cNvPr id="32" name="內容_11_緩衝與調派必須一起評估">
             <a:extLst xmlns:a="http://schemas.openxmlformats.org/drawingml/2006/main">
               <a:ext uri="{FF2B5EF4-FFF2-40B4-BE49-F238E27FC236}">
-                <a16:creationId xmlns:a16="http://schemas.microsoft.com/office/drawing/2014/main" id="{24A79952-6A61-41D2-BFFD-3863128FACA1}"/>
+                <a16:creationId xmlns:a16="http://schemas.microsoft.com/office/drawing/2014/main" id="{7176B777-02D5-437B-86E9-3D15A5FDA47A}"/>
               </a:ext>
             </a:extLst>
           </p:cNvPr>
@@ -10614,7 +10626,7 @@
           <p:cNvPr id="33" name="Chart">
             <a:extLst xmlns:a="http://schemas.openxmlformats.org/drawingml/2006/main">
               <a:ext uri="{FF2B5EF4-FFF2-40B4-BE49-F238E27FC236}">
-                <a16:creationId xmlns:a16="http://schemas.microsoft.com/office/drawing/2014/main" id="{994F6903-72E2-4BAD-A3D3-5A8C967B4F71}"/>
+                <a16:creationId xmlns:a16="http://schemas.microsoft.com/office/drawing/2014/main" id="{13122677-26FA-4659-93B7-13203AF931CC}"/>
               </a:ext>
             </a:extLst>
           </p:cNvPr>
@@ -10627,7 +10639,7 @@
         </p:xfrm>
         <a:graphic xmlns:a="http://schemas.openxmlformats.org/drawingml/2006/main">
           <a:graphicData uri="http://schemas.openxmlformats.org/drawingml/2006/chart">
-            <c:chart xmlns:r="http://schemas.openxmlformats.org/officeDocument/2006/relationships" xmlns:c="http://schemas.openxmlformats.org/drawingml/2006/chart" r:id="Rd20f3e25192d48d7"/>
+            <c:chart xmlns:r="http://schemas.openxmlformats.org/officeDocument/2006/relationships" xmlns:c="http://schemas.openxmlformats.org/drawingml/2006/chart" r:id="R54e1429518d74837"/>
           </a:graphicData>
         </a:graphic>
       </p:graphicFrame>
@@ -10636,7 +10648,7 @@
           <p:cNvPr id="34" name="內容_11_3種情境 × 15種處方／長">
             <a:extLst xmlns:a="http://schemas.openxmlformats.org/drawingml/2006/main">
               <a:ext uri="{FF2B5EF4-FFF2-40B4-BE49-F238E27FC236}">
-                <a16:creationId xmlns:a16="http://schemas.microsoft.com/office/drawing/2014/main" id="{22752CB4-E2F1-4242-85A4-7969037CC36D}"/>
+                <a16:creationId xmlns:a16="http://schemas.microsoft.com/office/drawing/2014/main" id="{C0C3DB1B-26F1-420D-B67C-68B18C66B630}"/>
               </a:ext>
             </a:extLst>
           </p:cNvPr>
@@ -10792,7 +10804,7 @@
     </p:spTree>
     <p:extLst>
       <p:ext uri="{BB962C8B-B14F-4D97-AF65-F5344CB8AC3E}">
-        <p14:creationId xmlns:p14="http://schemas.microsoft.com/office/powerpoint/2010/main" val="1212169822"/>
+        <p14:creationId xmlns:p14="http://schemas.microsoft.com/office/powerpoint/2010/main" val="116706678"/>
       </p:ext>
     </p:extLst>
   </p:cSld>
@@ -10816,7 +10828,7 @@
           <p:cNvPr id="2" name="Freeform 2">
             <a:extLst xmlns:a="http://schemas.openxmlformats.org/drawingml/2006/main">
               <a:ext uri="{FF2B5EF4-FFF2-40B4-BE49-F238E27FC236}">
-                <a16:creationId xmlns:a16="http://schemas.microsoft.com/office/drawing/2014/main" id="{8FF6D074-0330-4AD4-B6DA-85D11AEE6F25}"/>
+                <a16:creationId xmlns:a16="http://schemas.microsoft.com/office/drawing/2014/main" id="{E6BA5682-B3B5-4574-956C-87E3862B631F}"/>
               </a:ext>
             </a:extLst>
           </p:cNvPr>
@@ -10854,7 +10866,7 @@
             </a:pathLst>
           </a:custGeom>
           <a:blipFill xmlns:a="http://schemas.openxmlformats.org/drawingml/2006/main">
-            <a:blip xmlns:r="http://schemas.openxmlformats.org/officeDocument/2006/relationships" r:embed="R433f05b859434b0f"/>
+            <a:blip xmlns:r="http://schemas.openxmlformats.org/officeDocument/2006/relationships" r:embed="Re16fb6c3fe054ef3"/>
             <a:stretch>
               <a:fillRect l="-35258" t="-5555" r="-24931" b="-72434"/>
             </a:stretch>
@@ -10866,7 +10878,7 @@
           <p:cNvPr id="4" name="Freeform 4">
             <a:extLst xmlns:a="http://schemas.openxmlformats.org/drawingml/2006/main">
               <a:ext uri="{FF2B5EF4-FFF2-40B4-BE49-F238E27FC236}">
-                <a16:creationId xmlns:a16="http://schemas.microsoft.com/office/drawing/2014/main" id="{1C5498AB-A052-4A30-92DB-7BF76B9C33DB}"/>
+                <a16:creationId xmlns:a16="http://schemas.microsoft.com/office/drawing/2014/main" id="{81366FBC-49CE-4C6D-B383-61319C373861}"/>
               </a:ext>
             </a:extLst>
           </p:cNvPr>
@@ -10940,7 +10952,7 @@
           <p:cNvPr id="5" name="TextBox 5">
             <a:extLst xmlns:a="http://schemas.openxmlformats.org/drawingml/2006/main">
               <a:ext uri="{FF2B5EF4-FFF2-40B4-BE49-F238E27FC236}">
-                <a16:creationId xmlns:a16="http://schemas.microsoft.com/office/drawing/2014/main" id="{18E935B1-AAFB-4DCE-A228-FC5274FA0445}"/>
+                <a16:creationId xmlns:a16="http://schemas.microsoft.com/office/drawing/2014/main" id="{95A5BFCE-C166-4119-9AF0-A0B6906304E4}"/>
               </a:ext>
             </a:extLst>
           </p:cNvPr>
@@ -10976,7 +10988,7 @@
           <p:cNvPr id="6" name="Freeform 6">
             <a:extLst xmlns:a="http://schemas.openxmlformats.org/drawingml/2006/main">
               <a:ext uri="{FF2B5EF4-FFF2-40B4-BE49-F238E27FC236}">
-                <a16:creationId xmlns:a16="http://schemas.microsoft.com/office/drawing/2014/main" id="{4E81D909-FF63-44E6-BBE8-DEB089986F69}"/>
+                <a16:creationId xmlns:a16="http://schemas.microsoft.com/office/drawing/2014/main" id="{8D7BBDC2-5661-4B75-9CC5-ED9D80796F83}"/>
               </a:ext>
             </a:extLst>
           </p:cNvPr>
@@ -11014,7 +11026,7 @@
             </a:pathLst>
           </a:custGeom>
           <a:blipFill xmlns:a="http://schemas.openxmlformats.org/drawingml/2006/main">
-            <a:blip xmlns:r="http://schemas.openxmlformats.org/officeDocument/2006/relationships" r:embed="R394eabbf1aa34d48"/>
+            <a:blip xmlns:r="http://schemas.openxmlformats.org/officeDocument/2006/relationships" r:embed="R6827dc6de8744abf"/>
             <a:stretch>
               <a:fillRect l="0" t="0" r="0" b="0"/>
             </a:stretch>
@@ -11026,7 +11038,7 @@
           <p:cNvPr id="8" name="Freeform 8">
             <a:extLst xmlns:a="http://schemas.openxmlformats.org/drawingml/2006/main">
               <a:ext uri="{FF2B5EF4-FFF2-40B4-BE49-F238E27FC236}">
-                <a16:creationId xmlns:a16="http://schemas.microsoft.com/office/drawing/2014/main" id="{1D08E2D3-9376-4AAB-96FD-A304C3CA141F}"/>
+                <a16:creationId xmlns:a16="http://schemas.microsoft.com/office/drawing/2014/main" id="{A3C111F5-2240-432F-96EB-4E899D326CB8}"/>
               </a:ext>
             </a:extLst>
           </p:cNvPr>
@@ -11085,7 +11097,7 @@
           <p:cNvPr id="9" name="TextBox 9">
             <a:extLst xmlns:a="http://schemas.openxmlformats.org/drawingml/2006/main">
               <a:ext uri="{FF2B5EF4-FFF2-40B4-BE49-F238E27FC236}">
-                <a16:creationId xmlns:a16="http://schemas.microsoft.com/office/drawing/2014/main" id="{95F6824A-811E-437F-BA77-4516527A059C}"/>
+                <a16:creationId xmlns:a16="http://schemas.microsoft.com/office/drawing/2014/main" id="{C3D9C67E-E284-441A-A6E1-797B8FE7FA0F}"/>
               </a:ext>
             </a:extLst>
           </p:cNvPr>
@@ -11125,7 +11137,7 @@
           <p:cNvPr id="10" name="Freeform 10">
             <a:extLst xmlns:a="http://schemas.openxmlformats.org/drawingml/2006/main">
               <a:ext uri="{FF2B5EF4-FFF2-40B4-BE49-F238E27FC236}">
-                <a16:creationId xmlns:a16="http://schemas.microsoft.com/office/drawing/2014/main" id="{482C68DD-2AB8-4AA9-9E21-487CE17DF31F}"/>
+                <a16:creationId xmlns:a16="http://schemas.microsoft.com/office/drawing/2014/main" id="{BF11C8A8-3BD6-4C9B-ACD3-F1F8847FD0A3}"/>
               </a:ext>
             </a:extLst>
           </p:cNvPr>
@@ -11173,7 +11185,7 @@
           <p:cNvPr id="12" name="Freeform 12">
             <a:extLst xmlns:a="http://schemas.openxmlformats.org/drawingml/2006/main">
               <a:ext uri="{FF2B5EF4-FFF2-40B4-BE49-F238E27FC236}">
-                <a16:creationId xmlns:a16="http://schemas.microsoft.com/office/drawing/2014/main" id="{A1A3C43E-AAE9-4926-B7FF-54397FAD9740}"/>
+                <a16:creationId xmlns:a16="http://schemas.microsoft.com/office/drawing/2014/main" id="{CE1B6B78-6121-4F37-AA6C-8064B8763060}"/>
               </a:ext>
             </a:extLst>
           </p:cNvPr>
@@ -11232,7 +11244,7 @@
           <p:cNvPr id="13" name="TextBox 13">
             <a:extLst xmlns:a="http://schemas.openxmlformats.org/drawingml/2006/main">
               <a:ext uri="{FF2B5EF4-FFF2-40B4-BE49-F238E27FC236}">
-                <a16:creationId xmlns:a16="http://schemas.microsoft.com/office/drawing/2014/main" id="{277AC806-53CD-4A71-8B2D-86BCDD877C52}"/>
+                <a16:creationId xmlns:a16="http://schemas.microsoft.com/office/drawing/2014/main" id="{23485020-6AE8-4D12-B995-5B8AD2282285}"/>
               </a:ext>
             </a:extLst>
           </p:cNvPr>
@@ -11272,7 +11284,7 @@
           <p:cNvPr id="14" name="Freeform 14">
             <a:extLst xmlns:a="http://schemas.openxmlformats.org/drawingml/2006/main">
               <a:ext uri="{FF2B5EF4-FFF2-40B4-BE49-F238E27FC236}">
-                <a16:creationId xmlns:a16="http://schemas.microsoft.com/office/drawing/2014/main" id="{213BBF3E-2B8F-42FD-ABD3-C92D48F170A4}"/>
+                <a16:creationId xmlns:a16="http://schemas.microsoft.com/office/drawing/2014/main" id="{414F3F4D-E60C-4D10-9168-1F1AD7C99313}"/>
               </a:ext>
             </a:extLst>
           </p:cNvPr>
@@ -11320,7 +11332,7 @@
           <p:cNvPr id="15" name="Freeform 15">
             <a:extLst xmlns:a="http://schemas.openxmlformats.org/drawingml/2006/main">
               <a:ext uri="{FF2B5EF4-FFF2-40B4-BE49-F238E27FC236}">
-                <a16:creationId xmlns:a16="http://schemas.microsoft.com/office/drawing/2014/main" id="{2147C28A-FE43-4D0A-968B-D6D8766A2694}"/>
+                <a16:creationId xmlns:a16="http://schemas.microsoft.com/office/drawing/2014/main" id="{38C40535-D858-4459-9CDB-C78AA122C11C}"/>
               </a:ext>
             </a:extLst>
           </p:cNvPr>
@@ -11368,7 +11380,7 @@
           <p:cNvPr id="16" name="TextBox 16">
             <a:extLst xmlns:a="http://schemas.openxmlformats.org/drawingml/2006/main">
               <a:ext uri="{FF2B5EF4-FFF2-40B4-BE49-F238E27FC236}">
-                <a16:creationId xmlns:a16="http://schemas.microsoft.com/office/drawing/2014/main" id="{97CE5357-7231-4464-BA50-C2B61F46F545}"/>
+                <a16:creationId xmlns:a16="http://schemas.microsoft.com/office/drawing/2014/main" id="{C12B9F52-0038-47BD-B28B-6B39C54B0E9F}"/>
               </a:ext>
             </a:extLst>
           </p:cNvPr>
@@ -11420,7 +11432,7 @@
           <p:cNvPr id="17" name="TextBox 17">
             <a:extLst xmlns:a="http://schemas.openxmlformats.org/drawingml/2006/main">
               <a:ext uri="{FF2B5EF4-FFF2-40B4-BE49-F238E27FC236}">
-                <a16:creationId xmlns:a16="http://schemas.microsoft.com/office/drawing/2014/main" id="{91F4ADD6-DA5F-47A2-A2CD-AFD102F67340}"/>
+                <a16:creationId xmlns:a16="http://schemas.microsoft.com/office/drawing/2014/main" id="{C4D22DAE-987E-4458-9412-8A67512657C0}"/>
               </a:ext>
             </a:extLst>
           </p:cNvPr>
@@ -11581,7 +11593,7 @@
           <p:cNvPr id="18" name="TextBox 18">
             <a:extLst xmlns:a="http://schemas.openxmlformats.org/drawingml/2006/main">
               <a:ext uri="{FF2B5EF4-FFF2-40B4-BE49-F238E27FC236}">
-                <a16:creationId xmlns:a16="http://schemas.microsoft.com/office/drawing/2014/main" id="{1AF89B18-8B1E-4353-8B1D-31244D4BBC8A}"/>
+                <a16:creationId xmlns:a16="http://schemas.microsoft.com/office/drawing/2014/main" id="{2C78AF1B-BFE0-45B5-9D38-1BD8C13528F3}"/>
               </a:ext>
             </a:extLst>
           </p:cNvPr>
@@ -11635,7 +11647,7 @@
           <p:cNvPr id="19" name="TextBox 19">
             <a:extLst xmlns:a="http://schemas.openxmlformats.org/drawingml/2006/main">
               <a:ext uri="{FF2B5EF4-FFF2-40B4-BE49-F238E27FC236}">
-                <a16:creationId xmlns:a16="http://schemas.microsoft.com/office/drawing/2014/main" id="{6E7BCB67-5539-4126-8D02-9FE08E242AA7}"/>
+                <a16:creationId xmlns:a16="http://schemas.microsoft.com/office/drawing/2014/main" id="{0C0A2B8C-0208-4D48-8BB1-11151E5B38CA}"/>
               </a:ext>
             </a:extLst>
           </p:cNvPr>
@@ -11687,7 +11699,7 @@
           <p:cNvPr id="20" name="TextBox 20">
             <a:extLst xmlns:a="http://schemas.openxmlformats.org/drawingml/2006/main">
               <a:ext uri="{FF2B5EF4-FFF2-40B4-BE49-F238E27FC236}">
-                <a16:creationId xmlns:a16="http://schemas.microsoft.com/office/drawing/2014/main" id="{ECD9DA3C-C452-4AE0-8772-E4F94C312407}"/>
+                <a16:creationId xmlns:a16="http://schemas.microsoft.com/office/drawing/2014/main" id="{251768C7-C981-45E1-8EF0-094FCE271773}"/>
               </a:ext>
             </a:extLst>
           </p:cNvPr>
@@ -11739,7 +11751,7 @@
           <p:cNvPr id="21" name="TextBox 21">
             <a:extLst xmlns:a="http://schemas.openxmlformats.org/drawingml/2006/main">
               <a:ext uri="{FF2B5EF4-FFF2-40B4-BE49-F238E27FC236}">
-                <a16:creationId xmlns:a16="http://schemas.microsoft.com/office/drawing/2014/main" id="{8EE09EDA-AB4E-4D75-B879-1CCD8D99376C}"/>
+                <a16:creationId xmlns:a16="http://schemas.microsoft.com/office/drawing/2014/main" id="{EEFC35F5-EDEC-43A6-8502-46928F5B1B34}"/>
               </a:ext>
             </a:extLst>
           </p:cNvPr>
@@ -11791,7 +11803,7 @@
           <p:cNvPr id="22" name="TextBox 22">
             <a:extLst xmlns:a="http://schemas.openxmlformats.org/drawingml/2006/main">
               <a:ext uri="{FF2B5EF4-FFF2-40B4-BE49-F238E27FC236}">
-                <a16:creationId xmlns:a16="http://schemas.microsoft.com/office/drawing/2014/main" id="{3BF22034-E07F-4209-9FCA-F78D51CE17D6}"/>
+                <a16:creationId xmlns:a16="http://schemas.microsoft.com/office/drawing/2014/main" id="{5B3A9EB4-5434-4669-A6B8-4C1B2390F220}"/>
               </a:ext>
             </a:extLst>
           </p:cNvPr>
@@ -11843,7 +11855,7 @@
           <p:cNvPr id="23" name="TextBox 23">
             <a:extLst xmlns:a="http://schemas.openxmlformats.org/drawingml/2006/main">
               <a:ext uri="{FF2B5EF4-FFF2-40B4-BE49-F238E27FC236}">
-                <a16:creationId xmlns:a16="http://schemas.microsoft.com/office/drawing/2014/main" id="{1920C8D3-61C6-4709-B585-9882E095E831}"/>
+                <a16:creationId xmlns:a16="http://schemas.microsoft.com/office/drawing/2014/main" id="{700897D2-1134-4C12-B009-445F7E1791E5}"/>
               </a:ext>
             </a:extLst>
           </p:cNvPr>
@@ -11892,10 +11904,10 @@
       </p:sp>
       <p:sp>
         <p:nvSpPr>
-          <p:cNvPr id="24" name="內容_12_After：兩種風險門檻">
-            <a:extLst xmlns:a="http://schemas.openxmlformats.org/drawingml/2006/main">
-              <a:ext uri="{FF2B5EF4-FFF2-40B4-BE49-F238E27FC236}">
-                <a16:creationId xmlns:a16="http://schemas.microsoft.com/office/drawing/2014/main" id="{C648686D-24AE-4FCA-A15D-C38B00312E8B}"/>
+          <p:cNvPr id="24" name="內容_12_主推方案：P4 12m">
+            <a:extLst xmlns:a="http://schemas.openxmlformats.org/drawingml/2006/main">
+              <a:ext uri="{FF2B5EF4-FFF2-40B4-BE49-F238E27FC236}">
+                <a16:creationId xmlns:a16="http://schemas.microsoft.com/office/drawing/2014/main" id="{4F574373-7AC5-4615-97B8-4F9F4134AD29}"/>
               </a:ext>
             </a:extLst>
           </p:cNvPr>
@@ -12043,17 +12055,17 @@
                 <a:ea typeface="Microsoft JhengHei"/>
                 <a:cs typeface="Microsoft JhengHei"/>
               </a:rPr>
-              <a:t>After：兩種風險門檻</a:t>
+              <a:t>主推方案：P4 12m</a:t>
             </a:r>
           </a:p>
         </p:txBody>
       </p:sp>
       <p:sp>
         <p:nvSpPr>
-          <p:cNvPr id="25" name="內容_12_8m看均值，12m看信賴上界">
-            <a:extLst xmlns:a="http://schemas.openxmlformats.org/drawingml/2006/main">
-              <a:ext uri="{FF2B5EF4-FFF2-40B4-BE49-F238E27FC236}">
-                <a16:creationId xmlns:a16="http://schemas.microsoft.com/office/drawing/2014/main" id="{E6454D0A-4EE0-42A9-AE53-711AAE1E9032}"/>
+          <p:cNvPr id="25" name="內容_12_服務要求下選12m，8m為備">
+            <a:extLst xmlns:a="http://schemas.openxmlformats.org/drawingml/2006/main">
+              <a:ext uri="{FF2B5EF4-FFF2-40B4-BE49-F238E27FC236}">
+                <a16:creationId xmlns:a16="http://schemas.microsoft.com/office/drawing/2014/main" id="{3A96B36E-E9C5-46D9-B329-0E6F5EA3F09E}"/>
               </a:ext>
             </a:extLst>
           </p:cNvPr>
@@ -12201,7 +12213,7 @@
                 <a:ea typeface="Microsoft JhengHei"/>
                 <a:cs typeface="Microsoft JhengHei"/>
               </a:rPr>
-              <a:t>8m看均值，12m看信賴上界</a:t>
+              <a:t>服務要求下選12m，8m為備選</a:t>
             </a:r>
           </a:p>
         </p:txBody>
@@ -12211,7 +12223,7 @@
           <p:cNvPr id="26" name="">
             <a:extLst xmlns:a="http://schemas.openxmlformats.org/drawingml/2006/main">
               <a:ext uri="{FF2B5EF4-FFF2-40B4-BE49-F238E27FC236}">
-                <a16:creationId xmlns:a16="http://schemas.microsoft.com/office/drawing/2014/main" id="{87356ED5-85B3-407B-903A-0F62E78E8AE7}"/>
+                <a16:creationId xmlns:a16="http://schemas.microsoft.com/office/drawing/2014/main" id="{6B72D342-A266-4DD5-B908-2AB47F51FF70}"/>
               </a:ext>
             </a:extLst>
           </p:cNvPr>
@@ -12337,7 +12349,7 @@
                           <a:ea typeface="Microsoft JhengHei"/>
                           <a:cs typeface="Microsoft JhengHei"/>
                         </a:rPr>
-                        <a:t>均值最低：P4 8m</a:t>
+                        <a:t>低預算備選：8m</a:t>
                       </a:r>
                     </a:p>
                   </a:txBody>
@@ -12379,7 +12391,7 @@
                           <a:ea typeface="Microsoft JhengHei"/>
                           <a:cs typeface="Microsoft JhengHei"/>
                         </a:rPr>
-                        <a:t>穩健候選：P4 12m</a:t>
+                        <a:t>主推：P4 12m</a:t>
                       </a:r>
                     </a:p>
                   </a:txBody>
@@ -13022,10 +13034,10 @@
       </p:graphicFrame>
       <p:sp>
         <p:nvSpPr>
-          <p:cNvPr id="27" name="內容_12_方括號為95% CI。課程均">
-            <a:extLst xmlns:a="http://schemas.openxmlformats.org/drawingml/2006/main">
-              <a:ext uri="{FF2B5EF4-FFF2-40B4-BE49-F238E27FC236}">
-                <a16:creationId xmlns:a16="http://schemas.microsoft.com/office/drawing/2014/main" id="{16974E7E-5B75-4269-8D46-46CD16549F29}"/>
+          <p:cNvPr id="27" name="內容_12_主推12m採額外CI上界&lt;1">
+            <a:extLst xmlns:a="http://schemas.openxmlformats.org/drawingml/2006/main">
+              <a:ext uri="{FF2B5EF4-FFF2-40B4-BE49-F238E27FC236}">
+                <a16:creationId xmlns:a16="http://schemas.microsoft.com/office/drawing/2014/main" id="{17A95301-D130-44F5-BD9C-156E46427D34}"/>
               </a:ext>
             </a:extLst>
           </p:cNvPr>
@@ -13173,7 +13185,7 @@
                 <a:ea typeface="Microsoft JhengHei"/>
                 <a:cs typeface="Microsoft JhengHei"/>
               </a:rPr>
-              <a:t>方括號為95% CI。課程均值規則選8m；增加「Blocked CI上界&lt;1%」的風險約束後，最低為12m。</a:t>
+              <a:t>主推12m採額外CI上界&lt;1%的服務風險限制；8m僅符合原均值規則。兩者直接ROI均為負。</a:t>
             </a:r>
           </a:p>
         </p:txBody>
@@ -13181,7 +13193,7 @@
     </p:spTree>
     <p:extLst>
       <p:ext uri="{BB962C8B-B14F-4D97-AF65-F5344CB8AC3E}">
-        <p14:creationId xmlns:p14="http://schemas.microsoft.com/office/powerpoint/2010/main" val="641516884"/>
+        <p14:creationId xmlns:p14="http://schemas.microsoft.com/office/powerpoint/2010/main" val="250250541"/>
       </p:ext>
     </p:extLst>
   </p:cSld>
@@ -13205,7 +13217,7 @@
           <p:cNvPr id="2" name="Freeform 2">
             <a:extLst xmlns:a="http://schemas.openxmlformats.org/drawingml/2006/main">
               <a:ext uri="{FF2B5EF4-FFF2-40B4-BE49-F238E27FC236}">
-                <a16:creationId xmlns:a16="http://schemas.microsoft.com/office/drawing/2014/main" id="{C13FA97E-56EE-4744-94E0-FCA46EAAD215}"/>
+                <a16:creationId xmlns:a16="http://schemas.microsoft.com/office/drawing/2014/main" id="{68CDBF9B-8365-462A-A4AB-B4696DE0E0F1}"/>
               </a:ext>
             </a:extLst>
           </p:cNvPr>
@@ -13243,7 +13255,7 @@
             </a:pathLst>
           </a:custGeom>
           <a:blipFill xmlns:a="http://schemas.openxmlformats.org/drawingml/2006/main">
-            <a:blip xmlns:r="http://schemas.openxmlformats.org/officeDocument/2006/relationships" r:embed="R214b83c2b7904c3e"/>
+            <a:blip xmlns:r="http://schemas.openxmlformats.org/officeDocument/2006/relationships" r:embed="Rffd85babd155431c"/>
             <a:stretch>
               <a:fillRect l="-35258" t="-5555" r="-24931" b="-72434"/>
             </a:stretch>
@@ -13255,7 +13267,7 @@
           <p:cNvPr id="4" name="Freeform 4">
             <a:extLst xmlns:a="http://schemas.openxmlformats.org/drawingml/2006/main">
               <a:ext uri="{FF2B5EF4-FFF2-40B4-BE49-F238E27FC236}">
-                <a16:creationId xmlns:a16="http://schemas.microsoft.com/office/drawing/2014/main" id="{E611ABFB-2E8E-4342-8B26-C3095CEC3F17}"/>
+                <a16:creationId xmlns:a16="http://schemas.microsoft.com/office/drawing/2014/main" id="{DF1B8A36-75AB-41B3-90FE-B1397233C60D}"/>
               </a:ext>
             </a:extLst>
           </p:cNvPr>
@@ -13329,7 +13341,7 @@
           <p:cNvPr id="5" name="TextBox 5">
             <a:extLst xmlns:a="http://schemas.openxmlformats.org/drawingml/2006/main">
               <a:ext uri="{FF2B5EF4-FFF2-40B4-BE49-F238E27FC236}">
-                <a16:creationId xmlns:a16="http://schemas.microsoft.com/office/drawing/2014/main" id="{29D061F6-853E-4E00-84F1-807654B2C8F2}"/>
+                <a16:creationId xmlns:a16="http://schemas.microsoft.com/office/drawing/2014/main" id="{2DA29F13-603A-4AA7-8A71-9B8E70DC9C7F}"/>
               </a:ext>
             </a:extLst>
           </p:cNvPr>
@@ -13365,7 +13377,7 @@
           <p:cNvPr id="6" name="Freeform 6">
             <a:extLst xmlns:a="http://schemas.openxmlformats.org/drawingml/2006/main">
               <a:ext uri="{FF2B5EF4-FFF2-40B4-BE49-F238E27FC236}">
-                <a16:creationId xmlns:a16="http://schemas.microsoft.com/office/drawing/2014/main" id="{17D4A7C3-D5CC-40B2-A2BD-6F78DADCFF8E}"/>
+                <a16:creationId xmlns:a16="http://schemas.microsoft.com/office/drawing/2014/main" id="{C605EDCD-E6BE-4CE4-8992-591442DD2EAF}"/>
               </a:ext>
             </a:extLst>
           </p:cNvPr>
@@ -13403,7 +13415,7 @@
             </a:pathLst>
           </a:custGeom>
           <a:blipFill xmlns:a="http://schemas.openxmlformats.org/drawingml/2006/main">
-            <a:blip xmlns:r="http://schemas.openxmlformats.org/officeDocument/2006/relationships" r:embed="R4932cdfd01494f77"/>
+            <a:blip xmlns:r="http://schemas.openxmlformats.org/officeDocument/2006/relationships" r:embed="R4952a0b851534a24"/>
             <a:stretch>
               <a:fillRect l="0" t="0" r="0" b="0"/>
             </a:stretch>
@@ -13415,7 +13427,7 @@
           <p:cNvPr id="7" name="TextBox 7">
             <a:extLst xmlns:a="http://schemas.openxmlformats.org/drawingml/2006/main">
               <a:ext uri="{FF2B5EF4-FFF2-40B4-BE49-F238E27FC236}">
-                <a16:creationId xmlns:a16="http://schemas.microsoft.com/office/drawing/2014/main" id="{C807E1A7-2FBD-4A97-9382-9484D7FAB501}"/>
+                <a16:creationId xmlns:a16="http://schemas.microsoft.com/office/drawing/2014/main" id="{64E2F695-0595-438C-8F35-C3711186DF86}"/>
               </a:ext>
             </a:extLst>
           </p:cNvPr>
@@ -13576,7 +13588,7 @@
           <p:cNvPr id="8" name="TextBox 8">
             <a:extLst xmlns:a="http://schemas.openxmlformats.org/drawingml/2006/main">
               <a:ext uri="{FF2B5EF4-FFF2-40B4-BE49-F238E27FC236}">
-                <a16:creationId xmlns:a16="http://schemas.microsoft.com/office/drawing/2014/main" id="{5B0F8326-EC15-4833-A6E6-0F459F750CEC}"/>
+                <a16:creationId xmlns:a16="http://schemas.microsoft.com/office/drawing/2014/main" id="{8A698D05-7585-454F-84E7-2A89F88E9A1B}"/>
               </a:ext>
             </a:extLst>
           </p:cNvPr>
@@ -13630,7 +13642,7 @@
           <p:cNvPr id="9" name="TextBox 9">
             <a:extLst xmlns:a="http://schemas.openxmlformats.org/drawingml/2006/main">
               <a:ext uri="{FF2B5EF4-FFF2-40B4-BE49-F238E27FC236}">
-                <a16:creationId xmlns:a16="http://schemas.microsoft.com/office/drawing/2014/main" id="{5E8F1203-65DC-4328-BDF6-7618584C29B8}"/>
+                <a16:creationId xmlns:a16="http://schemas.microsoft.com/office/drawing/2014/main" id="{5F41F07C-C3CD-48DA-ABDD-9693F29C315B}"/>
               </a:ext>
             </a:extLst>
           </p:cNvPr>
@@ -13682,7 +13694,7 @@
           <p:cNvPr id="10" name="TextBox 10">
             <a:extLst xmlns:a="http://schemas.openxmlformats.org/drawingml/2006/main">
               <a:ext uri="{FF2B5EF4-FFF2-40B4-BE49-F238E27FC236}">
-                <a16:creationId xmlns:a16="http://schemas.microsoft.com/office/drawing/2014/main" id="{109C1112-830F-44A0-AF19-2DB53F1F07A5}"/>
+                <a16:creationId xmlns:a16="http://schemas.microsoft.com/office/drawing/2014/main" id="{044F83B2-ED29-4ECB-8541-07F4A1BFB724}"/>
               </a:ext>
             </a:extLst>
           </p:cNvPr>
@@ -13734,7 +13746,7 @@
           <p:cNvPr id="11" name="TextBox 11">
             <a:extLst xmlns:a="http://schemas.openxmlformats.org/drawingml/2006/main">
               <a:ext uri="{FF2B5EF4-FFF2-40B4-BE49-F238E27FC236}">
-                <a16:creationId xmlns:a16="http://schemas.microsoft.com/office/drawing/2014/main" id="{ACBF9BFC-AF15-4F48-9CD3-D0DBF4C62B23}"/>
+                <a16:creationId xmlns:a16="http://schemas.microsoft.com/office/drawing/2014/main" id="{6C578F5E-D87B-4299-A268-95427D4456A0}"/>
               </a:ext>
             </a:extLst>
           </p:cNvPr>
@@ -13786,7 +13798,7 @@
           <p:cNvPr id="12" name="Freeform 12">
             <a:extLst xmlns:a="http://schemas.openxmlformats.org/drawingml/2006/main">
               <a:ext uri="{FF2B5EF4-FFF2-40B4-BE49-F238E27FC236}">
-                <a16:creationId xmlns:a16="http://schemas.microsoft.com/office/drawing/2014/main" id="{D9D59DCF-FF12-4C8F-AA41-FC5DD60A7F45}"/>
+                <a16:creationId xmlns:a16="http://schemas.microsoft.com/office/drawing/2014/main" id="{9C73CABA-17DF-4BDF-B69E-921A386377A8}"/>
               </a:ext>
             </a:extLst>
           </p:cNvPr>
@@ -13834,7 +13846,7 @@
           <p:cNvPr id="14" name="Freeform 14">
             <a:extLst xmlns:a="http://schemas.openxmlformats.org/drawingml/2006/main">
               <a:ext uri="{FF2B5EF4-FFF2-40B4-BE49-F238E27FC236}">
-                <a16:creationId xmlns:a16="http://schemas.microsoft.com/office/drawing/2014/main" id="{BB30DE1E-975E-4CFA-92AC-E9CBBFCF1E9A}"/>
+                <a16:creationId xmlns:a16="http://schemas.microsoft.com/office/drawing/2014/main" id="{736FE7F3-AC23-45E5-A3A3-C02C3BC973B8}"/>
               </a:ext>
             </a:extLst>
           </p:cNvPr>
@@ -13879,7 +13891,7 @@
           <p:cNvPr id="15" name="Freeform 15">
             <a:extLst xmlns:a="http://schemas.openxmlformats.org/drawingml/2006/main">
               <a:ext uri="{FF2B5EF4-FFF2-40B4-BE49-F238E27FC236}">
-                <a16:creationId xmlns:a16="http://schemas.microsoft.com/office/drawing/2014/main" id="{EC82A741-0B48-4855-895D-CC37AEFFE280}"/>
+                <a16:creationId xmlns:a16="http://schemas.microsoft.com/office/drawing/2014/main" id="{0B2D9B28-89D1-41CB-8E70-070701F76767}"/>
               </a:ext>
             </a:extLst>
           </p:cNvPr>
@@ -13927,7 +13939,7 @@
           <p:cNvPr id="17" name="Freeform 17">
             <a:extLst xmlns:a="http://schemas.openxmlformats.org/drawingml/2006/main">
               <a:ext uri="{FF2B5EF4-FFF2-40B4-BE49-F238E27FC236}">
-                <a16:creationId xmlns:a16="http://schemas.microsoft.com/office/drawing/2014/main" id="{B1783444-BAF5-460E-9B34-96D20BB25E98}"/>
+                <a16:creationId xmlns:a16="http://schemas.microsoft.com/office/drawing/2014/main" id="{13C3E550-0764-4D81-AA97-E99D5F701555}"/>
               </a:ext>
             </a:extLst>
           </p:cNvPr>
@@ -13972,7 +13984,7 @@
           <p:cNvPr id="18" name="內容_13_財務：投資與營運分開">
             <a:extLst xmlns:a="http://schemas.openxmlformats.org/drawingml/2006/main">
               <a:ext uri="{FF2B5EF4-FFF2-40B4-BE49-F238E27FC236}">
-                <a16:creationId xmlns:a16="http://schemas.microsoft.com/office/drawing/2014/main" id="{298F1847-486B-432E-BC17-A4519EC8BA44}"/>
+                <a16:creationId xmlns:a16="http://schemas.microsoft.com/office/drawing/2014/main" id="{41174807-2412-4ABC-ABE3-4611415109D7}"/>
               </a:ext>
             </a:extLst>
           </p:cNvPr>
@@ -14130,7 +14142,7 @@
           <p:cNvPr id="19" name="內容_13_服務改善，仍無正向回收期">
             <a:extLst xmlns:a="http://schemas.openxmlformats.org/drawingml/2006/main">
               <a:ext uri="{FF2B5EF4-FFF2-40B4-BE49-F238E27FC236}">
-                <a16:creationId xmlns:a16="http://schemas.microsoft.com/office/drawing/2014/main" id="{34477242-4D17-4AC4-95BF-7F430D3CB090}"/>
+                <a16:creationId xmlns:a16="http://schemas.microsoft.com/office/drawing/2014/main" id="{0A0DC26B-6233-46F4-BF33-9897A7AA228D}"/>
               </a:ext>
             </a:extLst>
           </p:cNvPr>
@@ -14288,7 +14300,7 @@
           <p:cNvPr id="20" name="">
             <a:extLst xmlns:a="http://schemas.openxmlformats.org/drawingml/2006/main">
               <a:ext uri="{FF2B5EF4-FFF2-40B4-BE49-F238E27FC236}">
-                <a16:creationId xmlns:a16="http://schemas.microsoft.com/office/drawing/2014/main" id="{694379D6-C871-4302-B076-06C62DCA77D9}"/>
+                <a16:creationId xmlns:a16="http://schemas.microsoft.com/office/drawing/2014/main" id="{57B78F5E-B1EB-4110-A043-1EC03A8E00D6}"/>
               </a:ext>
             </a:extLst>
           </p:cNvPr>
@@ -14912,10 +14924,10 @@
       </p:graphicFrame>
       <p:sp>
         <p:nvSpPr>
-          <p:cNvPr id="21" name="內容_13_12m包材節約 39.17%">
-            <a:extLst xmlns:a="http://schemas.openxmlformats.org/drawingml/2006/main">
-              <a:ext uri="{FF2B5EF4-FFF2-40B4-BE49-F238E27FC236}">
-                <a16:creationId xmlns:a16="http://schemas.microsoft.com/office/drawing/2014/main" id="{D1B4F08F-5B65-4596-BDCB-DB87AD09CA58}"/>
+          <p:cNvPr id="21" name="內容_13_主DOE 1350次的24h">
+            <a:extLst xmlns:a="http://schemas.openxmlformats.org/drawingml/2006/main">
+              <a:ext uri="{FF2B5EF4-FFF2-40B4-BE49-F238E27FC236}">
+                <a16:creationId xmlns:a16="http://schemas.microsoft.com/office/drawing/2014/main" id="{DFABB30D-A389-4583-AF15-06F70A07C1BA}"/>
               </a:ext>
             </a:extLst>
           </p:cNvPr>
@@ -15063,7 +15075,7 @@
                 <a:ea typeface="Microsoft JhengHei"/>
                 <a:cs typeface="Microsoft JhengHei"/>
               </a:rPr>
-              <a:t>12m包材節約 39.17% 未達65%；理想穩態上限約47.89%，關鍵是每次2%報廢。</a:t>
+              <a:t>主DOE 1350次的24h損失全為0，沒有這項可省收益；12m包材節約39.17%仍未達65%。</a:t>
             </a:r>
           </a:p>
         </p:txBody>
@@ -15071,7 +15083,7 @@
     </p:spTree>
     <p:extLst>
       <p:ext uri="{BB962C8B-B14F-4D97-AF65-F5344CB8AC3E}">
-        <p14:creationId xmlns:p14="http://schemas.microsoft.com/office/powerpoint/2010/main" val="1295489093"/>
+        <p14:creationId xmlns:p14="http://schemas.microsoft.com/office/powerpoint/2010/main" val="2106599658"/>
       </p:ext>
     </p:extLst>
   </p:cSld>
@@ -15095,7 +15107,7 @@
           <p:cNvPr id="2" name="Freeform 2">
             <a:extLst xmlns:a="http://schemas.openxmlformats.org/drawingml/2006/main">
               <a:ext uri="{FF2B5EF4-FFF2-40B4-BE49-F238E27FC236}">
-                <a16:creationId xmlns:a16="http://schemas.microsoft.com/office/drawing/2014/main" id="{63FEF413-DC03-4593-9BED-981FE352011F}"/>
+                <a16:creationId xmlns:a16="http://schemas.microsoft.com/office/drawing/2014/main" id="{0A020D21-AD75-4EDE-80E4-FB3BB1729CE1}"/>
               </a:ext>
             </a:extLst>
           </p:cNvPr>
@@ -15133,7 +15145,7 @@
             </a:pathLst>
           </a:custGeom>
           <a:blipFill xmlns:a="http://schemas.openxmlformats.org/drawingml/2006/main">
-            <a:blip xmlns:r="http://schemas.openxmlformats.org/officeDocument/2006/relationships" r:embed="R4bc49ba1bbeb4c7a"/>
+            <a:blip xmlns:r="http://schemas.openxmlformats.org/officeDocument/2006/relationships" r:embed="R23b8073343dc4d4e"/>
             <a:stretch>
               <a:fillRect l="-35258" t="-5555" r="-24931" b="-72434"/>
             </a:stretch>
@@ -15145,7 +15157,7 @@
           <p:cNvPr id="4" name="Freeform 4">
             <a:extLst xmlns:a="http://schemas.openxmlformats.org/drawingml/2006/main">
               <a:ext uri="{FF2B5EF4-FFF2-40B4-BE49-F238E27FC236}">
-                <a16:creationId xmlns:a16="http://schemas.microsoft.com/office/drawing/2014/main" id="{0D6032ED-D4AF-4C1F-B935-074279392CCE}"/>
+                <a16:creationId xmlns:a16="http://schemas.microsoft.com/office/drawing/2014/main" id="{9D6FE33E-1638-46AC-8698-CCFB95CF7E05}"/>
               </a:ext>
             </a:extLst>
           </p:cNvPr>
@@ -15219,7 +15231,7 @@
           <p:cNvPr id="5" name="TextBox 5">
             <a:extLst xmlns:a="http://schemas.openxmlformats.org/drawingml/2006/main">
               <a:ext uri="{FF2B5EF4-FFF2-40B4-BE49-F238E27FC236}">
-                <a16:creationId xmlns:a16="http://schemas.microsoft.com/office/drawing/2014/main" id="{A0BAF6EF-0877-4ACC-8A7D-5669AA267F6D}"/>
+                <a16:creationId xmlns:a16="http://schemas.microsoft.com/office/drawing/2014/main" id="{3BBED81B-CA89-4D29-AD0B-9493BA929BE6}"/>
               </a:ext>
             </a:extLst>
           </p:cNvPr>
@@ -15255,7 +15267,7 @@
           <p:cNvPr id="6" name="Freeform 6">
             <a:extLst xmlns:a="http://schemas.openxmlformats.org/drawingml/2006/main">
               <a:ext uri="{FF2B5EF4-FFF2-40B4-BE49-F238E27FC236}">
-                <a16:creationId xmlns:a16="http://schemas.microsoft.com/office/drawing/2014/main" id="{C7BBEBAD-D33B-4324-9835-C64E1932CEFA}"/>
+                <a16:creationId xmlns:a16="http://schemas.microsoft.com/office/drawing/2014/main" id="{BCD2E62B-4AD3-4E0B-85F7-7874AA9B6298}"/>
               </a:ext>
             </a:extLst>
           </p:cNvPr>
@@ -15293,7 +15305,7 @@
             </a:pathLst>
           </a:custGeom>
           <a:blipFill xmlns:a="http://schemas.openxmlformats.org/drawingml/2006/main">
-            <a:blip xmlns:r="http://schemas.openxmlformats.org/officeDocument/2006/relationships" r:embed="R815f0be9e2ce43ee"/>
+            <a:blip xmlns:r="http://schemas.openxmlformats.org/officeDocument/2006/relationships" r:embed="Rc54888d5909542ed"/>
             <a:stretch>
               <a:fillRect l="0" t="0" r="0" b="0"/>
             </a:stretch>
@@ -15305,7 +15317,7 @@
           <p:cNvPr id="7" name="Freeform 7">
             <a:extLst xmlns:a="http://schemas.openxmlformats.org/drawingml/2006/main">
               <a:ext uri="{FF2B5EF4-FFF2-40B4-BE49-F238E27FC236}">
-                <a16:creationId xmlns:a16="http://schemas.microsoft.com/office/drawing/2014/main" id="{DFF859DF-7C46-4D2A-99D7-A60900EDA50C}"/>
+                <a16:creationId xmlns:a16="http://schemas.microsoft.com/office/drawing/2014/main" id="{4C67DA7B-F5A3-4790-9CD7-53F02C3BB363}"/>
               </a:ext>
             </a:extLst>
           </p:cNvPr>
@@ -15353,7 +15365,7 @@
           <p:cNvPr id="8" name="TextBox 8">
             <a:extLst xmlns:a="http://schemas.openxmlformats.org/drawingml/2006/main">
               <a:ext uri="{FF2B5EF4-FFF2-40B4-BE49-F238E27FC236}">
-                <a16:creationId xmlns:a16="http://schemas.microsoft.com/office/drawing/2014/main" id="{10786C7E-D214-4753-8E26-1F231EFDF77E}"/>
+                <a16:creationId xmlns:a16="http://schemas.microsoft.com/office/drawing/2014/main" id="{5568C830-6EB4-4C19-886A-D871E39E2C26}"/>
               </a:ext>
             </a:extLst>
           </p:cNvPr>
@@ -15514,7 +15526,7 @@
           <p:cNvPr id="9" name="TextBox 9">
             <a:extLst xmlns:a="http://schemas.openxmlformats.org/drawingml/2006/main">
               <a:ext uri="{FF2B5EF4-FFF2-40B4-BE49-F238E27FC236}">
-                <a16:creationId xmlns:a16="http://schemas.microsoft.com/office/drawing/2014/main" id="{207D6EA3-D9B6-4AD7-91F7-71132BE6DA16}"/>
+                <a16:creationId xmlns:a16="http://schemas.microsoft.com/office/drawing/2014/main" id="{1B611BE2-2B38-4E11-B569-6D9D3D0B7441}"/>
               </a:ext>
             </a:extLst>
           </p:cNvPr>
@@ -15568,7 +15580,7 @@
           <p:cNvPr id="10" name="TextBox 10">
             <a:extLst xmlns:a="http://schemas.openxmlformats.org/drawingml/2006/main">
               <a:ext uri="{FF2B5EF4-FFF2-40B4-BE49-F238E27FC236}">
-                <a16:creationId xmlns:a16="http://schemas.microsoft.com/office/drawing/2014/main" id="{681D311D-0DF0-4331-B4D0-3BBD8AD1B842}"/>
+                <a16:creationId xmlns:a16="http://schemas.microsoft.com/office/drawing/2014/main" id="{C089F927-8849-43EE-9F58-9CBC63723FEE}"/>
               </a:ext>
             </a:extLst>
           </p:cNvPr>
@@ -15620,7 +15632,7 @@
           <p:cNvPr id="11" name="TextBox 11">
             <a:extLst xmlns:a="http://schemas.openxmlformats.org/drawingml/2006/main">
               <a:ext uri="{FF2B5EF4-FFF2-40B4-BE49-F238E27FC236}">
-                <a16:creationId xmlns:a16="http://schemas.microsoft.com/office/drawing/2014/main" id="{9C801BB0-558B-42EA-8655-972946BFF39E}"/>
+                <a16:creationId xmlns:a16="http://schemas.microsoft.com/office/drawing/2014/main" id="{00C27C7B-56AD-4939-A5EC-EDBB2FAA9E9A}"/>
               </a:ext>
             </a:extLst>
           </p:cNvPr>
@@ -15672,7 +15684,7 @@
           <p:cNvPr id="12" name="TextBox 12">
             <a:extLst xmlns:a="http://schemas.openxmlformats.org/drawingml/2006/main">
               <a:ext uri="{FF2B5EF4-FFF2-40B4-BE49-F238E27FC236}">
-                <a16:creationId xmlns:a16="http://schemas.microsoft.com/office/drawing/2014/main" id="{0996611E-DDB1-4602-BDC6-2A6F37388B86}"/>
+                <a16:creationId xmlns:a16="http://schemas.microsoft.com/office/drawing/2014/main" id="{02D0888C-89A3-4E05-9142-CF788B360A29}"/>
               </a:ext>
             </a:extLst>
           </p:cNvPr>
@@ -15724,7 +15736,7 @@
           <p:cNvPr id="13" name="Freeform 13">
             <a:extLst xmlns:a="http://schemas.openxmlformats.org/drawingml/2006/main">
               <a:ext uri="{FF2B5EF4-FFF2-40B4-BE49-F238E27FC236}">
-                <a16:creationId xmlns:a16="http://schemas.microsoft.com/office/drawing/2014/main" id="{809E96F8-D76E-4865-B7EA-32D303DDD341}"/>
+                <a16:creationId xmlns:a16="http://schemas.microsoft.com/office/drawing/2014/main" id="{E32E8112-0768-41C7-8EDB-2E893AE31449}"/>
               </a:ext>
             </a:extLst>
           </p:cNvPr>
@@ -15769,10 +15781,10 @@
       </p:sp>
       <p:sp>
         <p:nvSpPr>
-          <p:cNvPr id="14" name="內容_14_現場 Demo">
-            <a:extLst xmlns:a="http://schemas.openxmlformats.org/drawingml/2006/main">
-              <a:ext uri="{FF2B5EF4-FFF2-40B4-BE49-F238E27FC236}">
-                <a16:creationId xmlns:a16="http://schemas.microsoft.com/office/drawing/2014/main" id="{D6DB8FF5-9356-4C54-82B7-188E00E8F205}"/>
+          <p:cNvPr id="14" name="內容_14_展示：指標要可比較">
+            <a:extLst xmlns:a="http://schemas.openxmlformats.org/drawingml/2006/main">
+              <a:ext uri="{FF2B5EF4-FFF2-40B4-BE49-F238E27FC236}">
+                <a16:creationId xmlns:a16="http://schemas.microsoft.com/office/drawing/2014/main" id="{063E9AFE-D049-473C-8CAE-A22AFC9EA1F4}"/>
               </a:ext>
             </a:extLst>
           </p:cNvPr>
@@ -15920,17 +15932,17 @@
                 <a:ea typeface="Microsoft JhengHei"/>
                 <a:cs typeface="Microsoft JhengHei"/>
               </a:rPr>
-              <a:t>現場 Demo</a:t>
+              <a:t>展示：指標要可比較</a:t>
             </a:r>
           </a:p>
         </p:txBody>
       </p:sp>
       <p:sp>
         <p:nvSpPr>
-          <p:cNvPr id="15" name="內容_14_實際3D、儀表與原始計數">
-            <a:extLst xmlns:a="http://schemas.openxmlformats.org/drawingml/2006/main">
-              <a:ext uri="{FF2B5EF4-FFF2-40B4-BE49-F238E27FC236}">
-                <a16:creationId xmlns:a16="http://schemas.microsoft.com/office/drawing/2014/main" id="{39C87B26-ED23-48AC-B0F6-63D73B88387F}"/>
+          <p:cNvPr id="15" name="內容_14_設備占比熱圖，取代含糊著色">
+            <a:extLst xmlns:a="http://schemas.openxmlformats.org/drawingml/2006/main">
+              <a:ext uri="{FF2B5EF4-FFF2-40B4-BE49-F238E27FC236}">
+                <a16:creationId xmlns:a16="http://schemas.microsoft.com/office/drawing/2014/main" id="{C8937D6A-B940-46BA-84C1-C22DA7411429}"/>
               </a:ext>
             </a:extLst>
           </p:cNvPr>
@@ -16078,17 +16090,1579 @@
                 <a:ea typeface="Microsoft JhengHei"/>
                 <a:cs typeface="Microsoft JhengHei"/>
               </a:rPr>
-              <a:t>實際3D、儀表與原始計數</a:t>
+              <a:t>設備占比熱圖，取代含糊著色</a:t>
             </a:r>
           </a:p>
         </p:txBody>
       </p:sp>
-      <p:sp>
-        <p:nvSpPr>
-          <p:cNvPr id="16" name="內容_14_Before P0">
-            <a:extLst xmlns:a="http://schemas.openxmlformats.org/drawingml/2006/main">
-              <a:ext uri="{FF2B5EF4-FFF2-40B4-BE49-F238E27FC236}">
-                <a16:creationId xmlns:a16="http://schemas.microsoft.com/office/drawing/2014/main" id="{1419ACEA-E854-432D-AF3B-FE541C5B58D1}"/>
+      <p:graphicFrame>
+        <p:nvGraphicFramePr>
+          <p:cNvPr id="16" name="">
+            <a:extLst xmlns:a="http://schemas.openxmlformats.org/drawingml/2006/main">
+              <a:ext uri="{FF2B5EF4-FFF2-40B4-BE49-F238E27FC236}">
+                <a16:creationId xmlns:a16="http://schemas.microsoft.com/office/drawing/2014/main" id="{AFC84ED5-8F4E-40DA-833B-72283423DDE7}"/>
+              </a:ext>
+            </a:extLst>
+          </p:cNvPr>
+          <p:cNvGraphicFramePr/>
+          <p:nvPr/>
+        </p:nvGraphicFramePr>
+        <p:xfrm>
+          <a:off xmlns:a="http://schemas.openxmlformats.org/drawingml/2006/main" x="1581150" y="4381500"/>
+          <a:ext xmlns:a="http://schemas.openxmlformats.org/drawingml/2006/main" cx="9334500" cy="3048000"/>
+        </p:xfrm>
+        <a:graphic xmlns:a="http://schemas.openxmlformats.org/drawingml/2006/main">
+          <a:graphicData uri="http://schemas.openxmlformats.org/drawingml/2006/table">
+            <a:tbl>
+              <a:tblPr/>
+              <a:tblGrid>
+                <a:gridCol w="1166813"/>
+                <a:gridCol w="1166813"/>
+                <a:gridCol w="1166813"/>
+                <a:gridCol w="1166813"/>
+                <a:gridCol w="1166813"/>
+                <a:gridCol w="1166813"/>
+                <a:gridCol w="1166813"/>
+                <a:gridCol w="1166813"/>
+              </a:tblGrid>
+              <a:tr h="609600">
+                <a:tc>
+                  <a:txBody>
+                    <a:bodyPr wrap="square" lIns="152400" tIns="85725" rIns="114300" bIns="76200"/>
+                    <a:lstStyle/>
+                    <a:p>
+                      <a:r>
+                        <a:rPr sz="1575" b="1">
+                          <a:solidFill>
+                            <a:srgbClr val="DF96DA"/>
+                          </a:solidFill>
+                          <a:latin typeface="Microsoft JhengHei"/>
+                          <a:ea typeface="Microsoft JhengHei"/>
+                          <a:cs typeface="Microsoft JhengHei"/>
+                        </a:rPr>
+                        <a:t>指標</a:t>
+                      </a:r>
+                    </a:p>
+                  </a:txBody>
+                  <a:tcPr marL="91440" marR="91440" marT="45720" marB="45720">
+                    <a:lnL w="6668">
+                      <a:solidFill>
+                        <a:srgbClr val="654A79"/>
+                      </a:solidFill>
+                      <a:prstDash val="solid"/>
+                    </a:lnL>
+                    <a:lnR w="6668">
+                      <a:solidFill>
+                        <a:srgbClr val="654A79"/>
+                      </a:solidFill>
+                      <a:prstDash val="solid"/>
+                    </a:lnR>
+                    <a:lnT w="6668">
+                      <a:solidFill>
+                        <a:srgbClr val="654A79"/>
+                      </a:solidFill>
+                      <a:prstDash val="solid"/>
+                    </a:lnT>
+                    <a:lnB w="6668">
+                      <a:solidFill>
+                        <a:srgbClr val="654A79"/>
+                      </a:solidFill>
+                      <a:prstDash val="solid"/>
+                    </a:lnB>
+                    <a:solidFill>
+                      <a:srgbClr val="352547"/>
+                    </a:solidFill>
+                  </a:tcPr>
+                </a:tc>
+                <a:tc>
+                  <a:txBody>
+                    <a:bodyPr wrap="square" lIns="152400" tIns="85725" rIns="114300" bIns="76200"/>
+                    <a:lstStyle/>
+                    <a:p>
+                      <a:r>
+                        <a:rPr sz="1575" b="1">
+                          <a:solidFill>
+                            <a:srgbClr val="DF96DA"/>
+                          </a:solidFill>
+                          <a:latin typeface="Microsoft JhengHei"/>
+                          <a:ea typeface="Microsoft JhengHei"/>
+                          <a:cs typeface="Microsoft JhengHei"/>
+                        </a:rPr>
+                        <a:t>清洗</a:t>
+                      </a:r>
+                    </a:p>
+                  </a:txBody>
+                  <a:tcPr marL="91440" marR="91440" marT="45720" marB="45720">
+                    <a:lnR w="6668">
+                      <a:solidFill>
+                        <a:srgbClr val="654A79"/>
+                      </a:solidFill>
+                      <a:prstDash val="solid"/>
+                    </a:lnR>
+                    <a:lnT w="6668">
+                      <a:solidFill>
+                        <a:srgbClr val="654A79"/>
+                      </a:solidFill>
+                      <a:prstDash val="solid"/>
+                    </a:lnT>
+                    <a:lnB w="6668">
+                      <a:solidFill>
+                        <a:srgbClr val="654A79"/>
+                      </a:solidFill>
+                      <a:prstDash val="solid"/>
+                    </a:lnB>
+                    <a:solidFill>
+                      <a:srgbClr val="352547"/>
+                    </a:solidFill>
+                  </a:tcPr>
+                </a:tc>
+                <a:tc>
+                  <a:txBody>
+                    <a:bodyPr wrap="square" lIns="152400" tIns="85725" rIns="114300" bIns="76200"/>
+                    <a:lstStyle/>
+                    <a:p>
+                      <a:r>
+                        <a:rPr sz="1575" b="1">
+                          <a:solidFill>
+                            <a:srgbClr val="DF96DA"/>
+                          </a:solidFill>
+                          <a:latin typeface="Microsoft JhengHei"/>
+                          <a:ea typeface="Microsoft JhengHei"/>
+                          <a:cs typeface="Microsoft JhengHei"/>
+                        </a:rPr>
+                        <a:t>拆包</a:t>
+                      </a:r>
+                    </a:p>
+                  </a:txBody>
+                  <a:tcPr marL="91440" marR="91440" marT="45720" marB="45720">
+                    <a:lnR w="6668">
+                      <a:solidFill>
+                        <a:srgbClr val="654A79"/>
+                      </a:solidFill>
+                      <a:prstDash val="solid"/>
+                    </a:lnR>
+                    <a:lnT w="6668">
+                      <a:solidFill>
+                        <a:srgbClr val="654A79"/>
+                      </a:solidFill>
+                      <a:prstDash val="solid"/>
+                    </a:lnT>
+                    <a:lnB w="6668">
+                      <a:solidFill>
+                        <a:srgbClr val="654A79"/>
+                      </a:solidFill>
+                      <a:prstDash val="solid"/>
+                    </a:lnB>
+                    <a:solidFill>
+                      <a:srgbClr val="352547"/>
+                    </a:solidFill>
+                  </a:tcPr>
+                </a:tc>
+                <a:tc>
+                  <a:txBody>
+                    <a:bodyPr wrap="square" lIns="152400" tIns="85725" rIns="114300" bIns="76200"/>
+                    <a:lstStyle/>
+                    <a:p>
+                      <a:r>
+                        <a:rPr sz="1575" b="1">
+                          <a:solidFill>
+                            <a:srgbClr val="DF96DA"/>
+                          </a:solidFill>
+                          <a:latin typeface="Microsoft JhengHei"/>
+                          <a:ea typeface="Microsoft JhengHei"/>
+                          <a:cs typeface="Microsoft JhengHei"/>
+                        </a:rPr>
+                        <a:t>QA</a:t>
+                      </a:r>
+                    </a:p>
+                  </a:txBody>
+                  <a:tcPr marL="91440" marR="91440" marT="45720" marB="45720">
+                    <a:lnR w="6668">
+                      <a:solidFill>
+                        <a:srgbClr val="654A79"/>
+                      </a:solidFill>
+                      <a:prstDash val="solid"/>
+                    </a:lnR>
+                    <a:lnT w="6668">
+                      <a:solidFill>
+                        <a:srgbClr val="654A79"/>
+                      </a:solidFill>
+                      <a:prstDash val="solid"/>
+                    </a:lnT>
+                    <a:lnB w="6668">
+                      <a:solidFill>
+                        <a:srgbClr val="654A79"/>
+                      </a:solidFill>
+                      <a:prstDash val="solid"/>
+                    </a:lnB>
+                    <a:solidFill>
+                      <a:srgbClr val="352547"/>
+                    </a:solidFill>
+                  </a:tcPr>
+                </a:tc>
+                <a:tc>
+                  <a:txBody>
+                    <a:bodyPr wrap="square" lIns="152400" tIns="85725" rIns="114300" bIns="76200"/>
+                    <a:lstStyle/>
+                    <a:p>
+                      <a:r>
+                        <a:rPr sz="1575" b="1">
+                          <a:solidFill>
+                            <a:srgbClr val="DF96DA"/>
+                          </a:solidFill>
+                          <a:latin typeface="Microsoft JhengHei"/>
+                          <a:ea typeface="Microsoft JhengHei"/>
+                          <a:cs typeface="Microsoft JhengHei"/>
+                        </a:rPr>
+                        <a:t>B1</a:t>
+                      </a:r>
+                    </a:p>
+                  </a:txBody>
+                  <a:tcPr marL="91440" marR="91440" marT="45720" marB="45720">
+                    <a:lnR w="6668">
+                      <a:solidFill>
+                        <a:srgbClr val="654A79"/>
+                      </a:solidFill>
+                      <a:prstDash val="solid"/>
+                    </a:lnR>
+                    <a:lnT w="6668">
+                      <a:solidFill>
+                        <a:srgbClr val="654A79"/>
+                      </a:solidFill>
+                      <a:prstDash val="solid"/>
+                    </a:lnT>
+                    <a:lnB w="6668">
+                      <a:solidFill>
+                        <a:srgbClr val="654A79"/>
+                      </a:solidFill>
+                      <a:prstDash val="solid"/>
+                    </a:lnB>
+                    <a:solidFill>
+                      <a:srgbClr val="352547"/>
+                    </a:solidFill>
+                  </a:tcPr>
+                </a:tc>
+                <a:tc>
+                  <a:txBody>
+                    <a:bodyPr wrap="square" lIns="152400" tIns="85725" rIns="114300" bIns="76200"/>
+                    <a:lstStyle/>
+                    <a:p>
+                      <a:r>
+                        <a:rPr sz="1575" b="1">
+                          <a:solidFill>
+                            <a:srgbClr val="DF96DA"/>
+                          </a:solidFill>
+                          <a:latin typeface="Microsoft JhengHei"/>
+                          <a:ea typeface="Microsoft JhengHei"/>
+                          <a:cs typeface="Microsoft JhengHei"/>
+                        </a:rPr>
+                        <a:t>B2</a:t>
+                      </a:r>
+                    </a:p>
+                  </a:txBody>
+                  <a:tcPr marL="91440" marR="91440" marT="45720" marB="45720">
+                    <a:lnR w="6668">
+                      <a:solidFill>
+                        <a:srgbClr val="654A79"/>
+                      </a:solidFill>
+                      <a:prstDash val="solid"/>
+                    </a:lnR>
+                    <a:lnT w="6668">
+                      <a:solidFill>
+                        <a:srgbClr val="654A79"/>
+                      </a:solidFill>
+                      <a:prstDash val="solid"/>
+                    </a:lnT>
+                    <a:lnB w="6668">
+                      <a:solidFill>
+                        <a:srgbClr val="654A79"/>
+                      </a:solidFill>
+                      <a:prstDash val="solid"/>
+                    </a:lnB>
+                    <a:solidFill>
+                      <a:srgbClr val="352547"/>
+                    </a:solidFill>
+                  </a:tcPr>
+                </a:tc>
+                <a:tc>
+                  <a:txBody>
+                    <a:bodyPr wrap="square" lIns="152400" tIns="85725" rIns="114300" bIns="76200"/>
+                    <a:lstStyle/>
+                    <a:p>
+                      <a:r>
+                        <a:rPr sz="1575" b="1">
+                          <a:solidFill>
+                            <a:srgbClr val="DF96DA"/>
+                          </a:solidFill>
+                          <a:latin typeface="Microsoft JhengHei"/>
+                          <a:ea typeface="Microsoft JhengHei"/>
+                          <a:cs typeface="Microsoft JhengHei"/>
+                        </a:rPr>
+                        <a:t>A</a:t>
+                      </a:r>
+                    </a:p>
+                  </a:txBody>
+                  <a:tcPr marL="91440" marR="91440" marT="45720" marB="45720">
+                    <a:lnR w="6668">
+                      <a:solidFill>
+                        <a:srgbClr val="654A79"/>
+                      </a:solidFill>
+                      <a:prstDash val="solid"/>
+                    </a:lnR>
+                    <a:lnT w="6668">
+                      <a:solidFill>
+                        <a:srgbClr val="654A79"/>
+                      </a:solidFill>
+                      <a:prstDash val="solid"/>
+                    </a:lnT>
+                    <a:lnB w="6668">
+                      <a:solidFill>
+                        <a:srgbClr val="654A79"/>
+                      </a:solidFill>
+                      <a:prstDash val="solid"/>
+                    </a:lnB>
+                    <a:solidFill>
+                      <a:srgbClr val="352547"/>
+                    </a:solidFill>
+                  </a:tcPr>
+                </a:tc>
+                <a:tc>
+                  <a:txBody>
+                    <a:bodyPr wrap="square" lIns="152400" tIns="85725" rIns="114300" bIns="76200"/>
+                    <a:lstStyle/>
+                    <a:p>
+                      <a:r>
+                        <a:rPr sz="1575" b="1">
+                          <a:solidFill>
+                            <a:srgbClr val="DF96DA"/>
+                          </a:solidFill>
+                          <a:latin typeface="Microsoft JhengHei"/>
+                          <a:ea typeface="Microsoft JhengHei"/>
+                          <a:cs typeface="Microsoft JhengHei"/>
+                        </a:rPr>
+                        <a:t>C</a:t>
+                      </a:r>
+                    </a:p>
+                  </a:txBody>
+                  <a:tcPr marL="91440" marR="91440" marT="45720" marB="45720">
+                    <a:lnR w="6668">
+                      <a:solidFill>
+                        <a:srgbClr val="654A79"/>
+                      </a:solidFill>
+                      <a:prstDash val="solid"/>
+                    </a:lnR>
+                    <a:lnT w="6668">
+                      <a:solidFill>
+                        <a:srgbClr val="654A79"/>
+                      </a:solidFill>
+                      <a:prstDash val="solid"/>
+                    </a:lnT>
+                    <a:lnB w="6668">
+                      <a:solidFill>
+                        <a:srgbClr val="654A79"/>
+                      </a:solidFill>
+                      <a:prstDash val="solid"/>
+                    </a:lnB>
+                    <a:solidFill>
+                      <a:srgbClr val="352547"/>
+                    </a:solidFill>
+                  </a:tcPr>
+                </a:tc>
+              </a:tr>
+              <a:tr h="609600">
+                <a:tc>
+                  <a:txBody>
+                    <a:bodyPr wrap="square" lIns="152400" tIns="85725" rIns="114300" bIns="76200"/>
+                    <a:lstStyle/>
+                    <a:p>
+                      <a:r>
+                        <a:rPr sz="1575" b="0">
+                          <a:solidFill>
+                            <a:srgbClr val="F6E0F5"/>
+                          </a:solidFill>
+                          <a:latin typeface="Microsoft JhengHei"/>
+                          <a:ea typeface="Microsoft JhengHei"/>
+                          <a:cs typeface="Microsoft JhengHei"/>
+                        </a:rPr>
+                        <a:t>前加工%</a:t>
+                      </a:r>
+                    </a:p>
+                  </a:txBody>
+                  <a:tcPr marL="91440" marR="91440" marT="45720" marB="45720">
+                    <a:lnL w="6668">
+                      <a:solidFill>
+                        <a:srgbClr val="654A79"/>
+                      </a:solidFill>
+                      <a:prstDash val="solid"/>
+                    </a:lnL>
+                    <a:lnR w="6668">
+                      <a:solidFill>
+                        <a:srgbClr val="654A79"/>
+                      </a:solidFill>
+                      <a:prstDash val="solid"/>
+                    </a:lnR>
+                    <a:lnB w="6668">
+                      <a:solidFill>
+                        <a:srgbClr val="654A79"/>
+                      </a:solidFill>
+                      <a:prstDash val="solid"/>
+                    </a:lnB>
+                    <a:solidFill>
+                      <a:srgbClr val="0D0912"/>
+                    </a:solidFill>
+                  </a:tcPr>
+                </a:tc>
+                <a:tc>
+                  <a:txBody>
+                    <a:bodyPr wrap="square" lIns="152400" tIns="85725" rIns="114300" bIns="76200"/>
+                    <a:lstStyle/>
+                    <a:p>
+                      <a:r>
+                        <a:rPr sz="1575" b="0">
+                          <a:solidFill>
+                            <a:srgbClr val="F6E0F5"/>
+                          </a:solidFill>
+                          <a:latin typeface="Microsoft JhengHei"/>
+                          <a:ea typeface="Microsoft JhengHei"/>
+                          <a:cs typeface="Microsoft JhengHei"/>
+                        </a:rPr>
+                        <a:t>68.57</a:t>
+                      </a:r>
+                    </a:p>
+                  </a:txBody>
+                  <a:tcPr marL="91440" marR="91440" marT="45720" marB="45720">
+                    <a:lnR w="6668">
+                      <a:solidFill>
+                        <a:srgbClr val="654A79"/>
+                      </a:solidFill>
+                      <a:prstDash val="solid"/>
+                    </a:lnR>
+                    <a:lnB w="6668">
+                      <a:solidFill>
+                        <a:srgbClr val="654A79"/>
+                      </a:solidFill>
+                      <a:prstDash val="solid"/>
+                    </a:lnB>
+                    <a:solidFill>
+                      <a:srgbClr val="722468"/>
+                    </a:solidFill>
+                  </a:tcPr>
+                </a:tc>
+                <a:tc>
+                  <a:txBody>
+                    <a:bodyPr wrap="square" lIns="152400" tIns="85725" rIns="114300" bIns="76200"/>
+                    <a:lstStyle/>
+                    <a:p>
+                      <a:r>
+                        <a:rPr sz="1575" b="0">
+                          <a:solidFill>
+                            <a:srgbClr val="F6E0F5"/>
+                          </a:solidFill>
+                          <a:latin typeface="Microsoft JhengHei"/>
+                          <a:ea typeface="Microsoft JhengHei"/>
+                          <a:cs typeface="Microsoft JhengHei"/>
+                        </a:rPr>
+                        <a:t>18.38</a:t>
+                      </a:r>
+                    </a:p>
+                  </a:txBody>
+                  <a:tcPr marL="91440" marR="91440" marT="45720" marB="45720">
+                    <a:lnR w="6668">
+                      <a:solidFill>
+                        <a:srgbClr val="654A79"/>
+                      </a:solidFill>
+                      <a:prstDash val="solid"/>
+                    </a:lnR>
+                    <a:lnB w="6668">
+                      <a:solidFill>
+                        <a:srgbClr val="654A79"/>
+                      </a:solidFill>
+                      <a:prstDash val="solid"/>
+                    </a:lnB>
+                    <a:solidFill>
+                      <a:srgbClr val="311538"/>
+                    </a:solidFill>
+                  </a:tcPr>
+                </a:tc>
+                <a:tc>
+                  <a:txBody>
+                    <a:bodyPr wrap="square" lIns="152400" tIns="85725" rIns="114300" bIns="76200"/>
+                    <a:lstStyle/>
+                    <a:p>
+                      <a:r>
+                        <a:rPr sz="1575" b="0">
+                          <a:solidFill>
+                            <a:srgbClr val="F6E0F5"/>
+                          </a:solidFill>
+                          <a:latin typeface="Microsoft JhengHei"/>
+                          <a:ea typeface="Microsoft JhengHei"/>
+                          <a:cs typeface="Microsoft JhengHei"/>
+                        </a:rPr>
+                        <a:t>91.10</a:t>
+                      </a:r>
+                    </a:p>
+                  </a:txBody>
+                  <a:tcPr marL="91440" marR="91440" marT="45720" marB="45720">
+                    <a:lnR w="6668">
+                      <a:solidFill>
+                        <a:srgbClr val="654A79"/>
+                      </a:solidFill>
+                      <a:prstDash val="solid"/>
+                    </a:lnR>
+                    <a:lnB w="6668">
+                      <a:solidFill>
+                        <a:srgbClr val="654A79"/>
+                      </a:solidFill>
+                      <a:prstDash val="solid"/>
+                    </a:lnB>
+                    <a:solidFill>
+                      <a:srgbClr val="8F2A7D"/>
+                    </a:solidFill>
+                  </a:tcPr>
+                </a:tc>
+                <a:tc>
+                  <a:txBody>
+                    <a:bodyPr wrap="square" lIns="152400" tIns="85725" rIns="114300" bIns="76200"/>
+                    <a:lstStyle/>
+                    <a:p>
+                      <a:r>
+                        <a:rPr sz="1575" b="0">
+                          <a:solidFill>
+                            <a:srgbClr val="F6E0F5"/>
+                          </a:solidFill>
+                          <a:latin typeface="Microsoft JhengHei"/>
+                          <a:ea typeface="Microsoft JhengHei"/>
+                          <a:cs typeface="Microsoft JhengHei"/>
+                        </a:rPr>
+                        <a:t>48.90</a:t>
+                      </a:r>
+                    </a:p>
+                  </a:txBody>
+                  <a:tcPr marL="91440" marR="91440" marT="45720" marB="45720">
+                    <a:lnR w="6668">
+                      <a:solidFill>
+                        <a:srgbClr val="654A79"/>
+                      </a:solidFill>
+                      <a:prstDash val="solid"/>
+                    </a:lnR>
+                    <a:lnB w="6668">
+                      <a:solidFill>
+                        <a:srgbClr val="654A79"/>
+                      </a:solidFill>
+                      <a:prstDash val="solid"/>
+                    </a:lnB>
+                    <a:solidFill>
+                      <a:srgbClr val="591E55"/>
+                    </a:solidFill>
+                  </a:tcPr>
+                </a:tc>
+                <a:tc>
+                  <a:txBody>
+                    <a:bodyPr wrap="square" lIns="152400" tIns="85725" rIns="114300" bIns="76200"/>
+                    <a:lstStyle/>
+                    <a:p>
+                      <a:r>
+                        <a:rPr sz="1575" b="0">
+                          <a:solidFill>
+                            <a:srgbClr val="F6E0F5"/>
+                          </a:solidFill>
+                          <a:latin typeface="Microsoft JhengHei"/>
+                          <a:ea typeface="Microsoft JhengHei"/>
+                          <a:cs typeface="Microsoft JhengHei"/>
+                        </a:rPr>
+                        <a:t>28.01</a:t>
+                      </a:r>
+                    </a:p>
+                  </a:txBody>
+                  <a:tcPr marL="91440" marR="91440" marT="45720" marB="45720">
+                    <a:lnR w="6668">
+                      <a:solidFill>
+                        <a:srgbClr val="654A79"/>
+                      </a:solidFill>
+                      <a:prstDash val="solid"/>
+                    </a:lnR>
+                    <a:lnB w="6668">
+                      <a:solidFill>
+                        <a:srgbClr val="654A79"/>
+                      </a:solidFill>
+                      <a:prstDash val="solid"/>
+                    </a:lnB>
+                    <a:solidFill>
+                      <a:srgbClr val="3D1841"/>
+                    </a:solidFill>
+                  </a:tcPr>
+                </a:tc>
+                <a:tc>
+                  <a:txBody>
+                    <a:bodyPr wrap="square" lIns="152400" tIns="85725" rIns="114300" bIns="76200"/>
+                    <a:lstStyle/>
+                    <a:p>
+                      <a:r>
+                        <a:rPr sz="1575" b="0">
+                          <a:solidFill>
+                            <a:srgbClr val="F6E0F5"/>
+                          </a:solidFill>
+                          <a:latin typeface="Microsoft JhengHei"/>
+                          <a:ea typeface="Microsoft JhengHei"/>
+                          <a:cs typeface="Microsoft JhengHei"/>
+                        </a:rPr>
+                        <a:t>20.87</a:t>
+                      </a:r>
+                    </a:p>
+                  </a:txBody>
+                  <a:tcPr marL="91440" marR="91440" marT="45720" marB="45720">
+                    <a:lnR w="6668">
+                      <a:solidFill>
+                        <a:srgbClr val="654A79"/>
+                      </a:solidFill>
+                      <a:prstDash val="solid"/>
+                    </a:lnR>
+                    <a:lnB w="6668">
+                      <a:solidFill>
+                        <a:srgbClr val="654A79"/>
+                      </a:solidFill>
+                      <a:prstDash val="solid"/>
+                    </a:lnB>
+                    <a:solidFill>
+                      <a:srgbClr val="34163A"/>
+                    </a:solidFill>
+                  </a:tcPr>
+                </a:tc>
+                <a:tc>
+                  <a:txBody>
+                    <a:bodyPr wrap="square" lIns="152400" tIns="85725" rIns="114300" bIns="76200"/>
+                    <a:lstStyle/>
+                    <a:p>
+                      <a:r>
+                        <a:rPr sz="1575" b="0">
+                          <a:solidFill>
+                            <a:srgbClr val="F6E0F5"/>
+                          </a:solidFill>
+                          <a:latin typeface="Microsoft JhengHei"/>
+                          <a:ea typeface="Microsoft JhengHei"/>
+                          <a:cs typeface="Microsoft JhengHei"/>
+                        </a:rPr>
+                        <a:t>14.67</a:t>
+                      </a:r>
+                    </a:p>
+                  </a:txBody>
+                  <a:tcPr marL="91440" marR="91440" marT="45720" marB="45720">
+                    <a:lnR w="6668">
+                      <a:solidFill>
+                        <a:srgbClr val="654A79"/>
+                      </a:solidFill>
+                      <a:prstDash val="solid"/>
+                    </a:lnR>
+                    <a:lnB w="6668">
+                      <a:solidFill>
+                        <a:srgbClr val="654A79"/>
+                      </a:solidFill>
+                      <a:prstDash val="solid"/>
+                    </a:lnB>
+                    <a:solidFill>
+                      <a:srgbClr val="2C1434"/>
+                    </a:solidFill>
+                  </a:tcPr>
+                </a:tc>
+              </a:tr>
+              <a:tr h="609600">
+                <a:tc>
+                  <a:txBody>
+                    <a:bodyPr wrap="square" lIns="152400" tIns="85725" rIns="114300" bIns="76200"/>
+                    <a:lstStyle/>
+                    <a:p>
+                      <a:r>
+                        <a:rPr sz="1575" b="0">
+                          <a:solidFill>
+                            <a:srgbClr val="F6E0F5"/>
+                          </a:solidFill>
+                          <a:latin typeface="Microsoft JhengHei"/>
+                          <a:ea typeface="Microsoft JhengHei"/>
+                          <a:cs typeface="Microsoft JhengHei"/>
+                        </a:rPr>
+                        <a:t>後加工%</a:t>
+                      </a:r>
+                    </a:p>
+                  </a:txBody>
+                  <a:tcPr marL="91440" marR="91440" marT="45720" marB="45720">
+                    <a:lnL w="6668">
+                      <a:solidFill>
+                        <a:srgbClr val="654A79"/>
+                      </a:solidFill>
+                      <a:prstDash val="solid"/>
+                    </a:lnL>
+                    <a:lnR w="6668">
+                      <a:solidFill>
+                        <a:srgbClr val="654A79"/>
+                      </a:solidFill>
+                      <a:prstDash val="solid"/>
+                    </a:lnR>
+                    <a:lnB w="6668">
+                      <a:solidFill>
+                        <a:srgbClr val="654A79"/>
+                      </a:solidFill>
+                      <a:prstDash val="solid"/>
+                    </a:lnB>
+                    <a:solidFill>
+                      <a:srgbClr val="0D0912"/>
+                    </a:solidFill>
+                  </a:tcPr>
+                </a:tc>
+                <a:tc>
+                  <a:txBody>
+                    <a:bodyPr wrap="square" lIns="152400" tIns="85725" rIns="114300" bIns="76200"/>
+                    <a:lstStyle/>
+                    <a:p>
+                      <a:r>
+                        <a:rPr sz="1575" b="0">
+                          <a:solidFill>
+                            <a:srgbClr val="F6E0F5"/>
+                          </a:solidFill>
+                          <a:latin typeface="Microsoft JhengHei"/>
+                          <a:ea typeface="Microsoft JhengHei"/>
+                          <a:cs typeface="Microsoft JhengHei"/>
+                        </a:rPr>
+                        <a:t>68.55</a:t>
+                      </a:r>
+                    </a:p>
+                  </a:txBody>
+                  <a:tcPr marL="91440" marR="91440" marT="45720" marB="45720">
+                    <a:lnR w="6668">
+                      <a:solidFill>
+                        <a:srgbClr val="654A79"/>
+                      </a:solidFill>
+                      <a:prstDash val="solid"/>
+                    </a:lnR>
+                    <a:lnB w="6668">
+                      <a:solidFill>
+                        <a:srgbClr val="654A79"/>
+                      </a:solidFill>
+                      <a:prstDash val="solid"/>
+                    </a:lnB>
+                    <a:solidFill>
+                      <a:srgbClr val="722468"/>
+                    </a:solidFill>
+                  </a:tcPr>
+                </a:tc>
+                <a:tc>
+                  <a:txBody>
+                    <a:bodyPr wrap="square" lIns="152400" tIns="85725" rIns="114300" bIns="76200"/>
+                    <a:lstStyle/>
+                    <a:p>
+                      <a:r>
+                        <a:rPr sz="1575" b="0">
+                          <a:solidFill>
+                            <a:srgbClr val="F6E0F5"/>
+                          </a:solidFill>
+                          <a:latin typeface="Microsoft JhengHei"/>
+                          <a:ea typeface="Microsoft JhengHei"/>
+                          <a:cs typeface="Microsoft JhengHei"/>
+                        </a:rPr>
+                        <a:t>20.91</a:t>
+                      </a:r>
+                    </a:p>
+                  </a:txBody>
+                  <a:tcPr marL="91440" marR="91440" marT="45720" marB="45720">
+                    <a:lnR w="6668">
+                      <a:solidFill>
+                        <a:srgbClr val="654A79"/>
+                      </a:solidFill>
+                      <a:prstDash val="solid"/>
+                    </a:lnR>
+                    <a:lnB w="6668">
+                      <a:solidFill>
+                        <a:srgbClr val="654A79"/>
+                      </a:solidFill>
+                      <a:prstDash val="solid"/>
+                    </a:lnB>
+                    <a:solidFill>
+                      <a:srgbClr val="34163A"/>
+                    </a:solidFill>
+                  </a:tcPr>
+                </a:tc>
+                <a:tc>
+                  <a:txBody>
+                    <a:bodyPr wrap="square" lIns="152400" tIns="85725" rIns="114300" bIns="76200"/>
+                    <a:lstStyle/>
+                    <a:p>
+                      <a:r>
+                        <a:rPr sz="1575" b="0">
+                          <a:solidFill>
+                            <a:srgbClr val="F6E0F5"/>
+                          </a:solidFill>
+                          <a:latin typeface="Microsoft JhengHei"/>
+                          <a:ea typeface="Microsoft JhengHei"/>
+                          <a:cs typeface="Microsoft JhengHei"/>
+                        </a:rPr>
+                        <a:t>87.28</a:t>
+                      </a:r>
+                    </a:p>
+                  </a:txBody>
+                  <a:tcPr marL="91440" marR="91440" marT="45720" marB="45720">
+                    <a:lnR w="6668">
+                      <a:solidFill>
+                        <a:srgbClr val="654A79"/>
+                      </a:solidFill>
+                      <a:prstDash val="solid"/>
+                    </a:lnR>
+                    <a:lnB w="6668">
+                      <a:solidFill>
+                        <a:srgbClr val="654A79"/>
+                      </a:solidFill>
+                      <a:prstDash val="solid"/>
+                    </a:lnB>
+                    <a:solidFill>
+                      <a:srgbClr val="8A297A"/>
+                    </a:solidFill>
+                  </a:tcPr>
+                </a:tc>
+                <a:tc>
+                  <a:txBody>
+                    <a:bodyPr wrap="square" lIns="152400" tIns="85725" rIns="114300" bIns="76200"/>
+                    <a:lstStyle/>
+                    <a:p>
+                      <a:r>
+                        <a:rPr sz="1575" b="0">
+                          <a:solidFill>
+                            <a:srgbClr val="F6E0F5"/>
+                          </a:solidFill>
+                          <a:latin typeface="Microsoft JhengHei"/>
+                          <a:ea typeface="Microsoft JhengHei"/>
+                          <a:cs typeface="Microsoft JhengHei"/>
+                        </a:rPr>
+                        <a:t>50.71</a:t>
+                      </a:r>
+                    </a:p>
+                  </a:txBody>
+                  <a:tcPr marL="91440" marR="91440" marT="45720" marB="45720">
+                    <a:lnR w="6668">
+                      <a:solidFill>
+                        <a:srgbClr val="654A79"/>
+                      </a:solidFill>
+                      <a:prstDash val="solid"/>
+                    </a:lnR>
+                    <a:lnB w="6668">
+                      <a:solidFill>
+                        <a:srgbClr val="654A79"/>
+                      </a:solidFill>
+                      <a:prstDash val="solid"/>
+                    </a:lnB>
+                    <a:solidFill>
+                      <a:srgbClr val="5B1F57"/>
+                    </a:solidFill>
+                  </a:tcPr>
+                </a:tc>
+                <a:tc>
+                  <a:txBody>
+                    <a:bodyPr wrap="square" lIns="152400" tIns="85725" rIns="114300" bIns="76200"/>
+                    <a:lstStyle/>
+                    <a:p>
+                      <a:r>
+                        <a:rPr sz="1575" b="0">
+                          <a:solidFill>
+                            <a:srgbClr val="F6E0F5"/>
+                          </a:solidFill>
+                          <a:latin typeface="Microsoft JhengHei"/>
+                          <a:ea typeface="Microsoft JhengHei"/>
+                          <a:cs typeface="Microsoft JhengHei"/>
+                        </a:rPr>
+                        <a:t>26.25</a:t>
+                      </a:r>
+                    </a:p>
+                  </a:txBody>
+                  <a:tcPr marL="91440" marR="91440" marT="45720" marB="45720">
+                    <a:lnR w="6668">
+                      <a:solidFill>
+                        <a:srgbClr val="654A79"/>
+                      </a:solidFill>
+                      <a:prstDash val="solid"/>
+                    </a:lnR>
+                    <a:lnB w="6668">
+                      <a:solidFill>
+                        <a:srgbClr val="654A79"/>
+                      </a:solidFill>
+                      <a:prstDash val="solid"/>
+                    </a:lnB>
+                    <a:solidFill>
+                      <a:srgbClr val="3B183F"/>
+                    </a:solidFill>
+                  </a:tcPr>
+                </a:tc>
+                <a:tc>
+                  <a:txBody>
+                    <a:bodyPr wrap="square" lIns="152400" tIns="85725" rIns="114300" bIns="76200"/>
+                    <a:lstStyle/>
+                    <a:p>
+                      <a:r>
+                        <a:rPr sz="1575" b="0">
+                          <a:solidFill>
+                            <a:srgbClr val="F6E0F5"/>
+                          </a:solidFill>
+                          <a:latin typeface="Microsoft JhengHei"/>
+                          <a:ea typeface="Microsoft JhengHei"/>
+                          <a:cs typeface="Microsoft JhengHei"/>
+                        </a:rPr>
+                        <a:t>20.97</a:t>
+                      </a:r>
+                    </a:p>
+                  </a:txBody>
+                  <a:tcPr marL="91440" marR="91440" marT="45720" marB="45720">
+                    <a:lnR w="6668">
+                      <a:solidFill>
+                        <a:srgbClr val="654A79"/>
+                      </a:solidFill>
+                      <a:prstDash val="solid"/>
+                    </a:lnR>
+                    <a:lnB w="6668">
+                      <a:solidFill>
+                        <a:srgbClr val="654A79"/>
+                      </a:solidFill>
+                      <a:prstDash val="solid"/>
+                    </a:lnB>
+                    <a:solidFill>
+                      <a:srgbClr val="34163A"/>
+                    </a:solidFill>
+                  </a:tcPr>
+                </a:tc>
+                <a:tc>
+                  <a:txBody>
+                    <a:bodyPr wrap="square" lIns="152400" tIns="85725" rIns="114300" bIns="76200"/>
+                    <a:lstStyle/>
+                    <a:p>
+                      <a:r>
+                        <a:rPr sz="1575" b="0">
+                          <a:solidFill>
+                            <a:srgbClr val="F6E0F5"/>
+                          </a:solidFill>
+                          <a:latin typeface="Microsoft JhengHei"/>
+                          <a:ea typeface="Microsoft JhengHei"/>
+                          <a:cs typeface="Microsoft JhengHei"/>
+                        </a:rPr>
+                        <a:t>14.68</a:t>
+                      </a:r>
+                    </a:p>
+                  </a:txBody>
+                  <a:tcPr marL="91440" marR="91440" marT="45720" marB="45720">
+                    <a:lnR w="6668">
+                      <a:solidFill>
+                        <a:srgbClr val="654A79"/>
+                      </a:solidFill>
+                      <a:prstDash val="solid"/>
+                    </a:lnR>
+                    <a:lnB w="6668">
+                      <a:solidFill>
+                        <a:srgbClr val="654A79"/>
+                      </a:solidFill>
+                      <a:prstDash val="solid"/>
+                    </a:lnB>
+                    <a:solidFill>
+                      <a:srgbClr val="2C1434"/>
+                    </a:solidFill>
+                  </a:tcPr>
+                </a:tc>
+              </a:tr>
+              <a:tr h="609600">
+                <a:tc>
+                  <a:txBody>
+                    <a:bodyPr wrap="square" lIns="152400" tIns="85725" rIns="114300" bIns="76200"/>
+                    <a:lstStyle/>
+                    <a:p>
+                      <a:r>
+                        <a:rPr sz="1575" b="0">
+                          <a:solidFill>
+                            <a:srgbClr val="F6E0F5"/>
+                          </a:solidFill>
+                          <a:latin typeface="Microsoft JhengHei"/>
+                          <a:ea typeface="Microsoft JhengHei"/>
+                          <a:cs typeface="Microsoft JhengHei"/>
+                        </a:rPr>
+                        <a:t>前阻塞%</a:t>
+                      </a:r>
+                    </a:p>
+                  </a:txBody>
+                  <a:tcPr marL="91440" marR="91440" marT="45720" marB="45720">
+                    <a:lnL w="6668">
+                      <a:solidFill>
+                        <a:srgbClr val="654A79"/>
+                      </a:solidFill>
+                      <a:prstDash val="solid"/>
+                    </a:lnL>
+                    <a:lnR w="6668">
+                      <a:solidFill>
+                        <a:srgbClr val="654A79"/>
+                      </a:solidFill>
+                      <a:prstDash val="solid"/>
+                    </a:lnR>
+                    <a:lnB w="6668">
+                      <a:solidFill>
+                        <a:srgbClr val="654A79"/>
+                      </a:solidFill>
+                      <a:prstDash val="solid"/>
+                    </a:lnB>
+                    <a:solidFill>
+                      <a:srgbClr val="0D0912"/>
+                    </a:solidFill>
+                  </a:tcPr>
+                </a:tc>
+                <a:tc>
+                  <a:txBody>
+                    <a:bodyPr wrap="square" lIns="152400" tIns="85725" rIns="114300" bIns="76200"/>
+                    <a:lstStyle/>
+                    <a:p>
+                      <a:r>
+                        <a:rPr sz="1575" b="0">
+                          <a:solidFill>
+                            <a:srgbClr val="F6E0F5"/>
+                          </a:solidFill>
+                          <a:latin typeface="Microsoft JhengHei"/>
+                          <a:ea typeface="Microsoft JhengHei"/>
+                          <a:cs typeface="Microsoft JhengHei"/>
+                        </a:rPr>
+                        <a:t>0.00</a:t>
+                      </a:r>
+                    </a:p>
+                  </a:txBody>
+                  <a:tcPr marL="91440" marR="91440" marT="45720" marB="45720">
+                    <a:lnR w="6668">
+                      <a:solidFill>
+                        <a:srgbClr val="654A79"/>
+                      </a:solidFill>
+                      <a:prstDash val="solid"/>
+                    </a:lnR>
+                    <a:lnB w="6668">
+                      <a:solidFill>
+                        <a:srgbClr val="654A79"/>
+                      </a:solidFill>
+                      <a:prstDash val="solid"/>
+                    </a:lnB>
+                    <a:solidFill>
+                      <a:srgbClr val="191026"/>
+                    </a:solidFill>
+                  </a:tcPr>
+                </a:tc>
+                <a:tc>
+                  <a:txBody>
+                    <a:bodyPr wrap="square" lIns="152400" tIns="85725" rIns="114300" bIns="76200"/>
+                    <a:lstStyle/>
+                    <a:p>
+                      <a:r>
+                        <a:rPr sz="1575" b="0">
+                          <a:solidFill>
+                            <a:srgbClr val="F6E0F5"/>
+                          </a:solidFill>
+                          <a:latin typeface="Microsoft JhengHei"/>
+                          <a:ea typeface="Microsoft JhengHei"/>
+                          <a:cs typeface="Microsoft JhengHei"/>
+                        </a:rPr>
+                        <a:t>3.00</a:t>
+                      </a:r>
+                    </a:p>
+                  </a:txBody>
+                  <a:tcPr marL="91440" marR="91440" marT="45720" marB="45720">
+                    <a:lnR w="6668">
+                      <a:solidFill>
+                        <a:srgbClr val="654A79"/>
+                      </a:solidFill>
+                      <a:prstDash val="solid"/>
+                    </a:lnR>
+                    <a:lnB w="6668">
+                      <a:solidFill>
+                        <a:srgbClr val="654A79"/>
+                      </a:solidFill>
+                      <a:prstDash val="solid"/>
+                    </a:lnB>
+                    <a:solidFill>
+                      <a:srgbClr val="882978"/>
+                    </a:solidFill>
+                  </a:tcPr>
+                </a:tc>
+                <a:tc>
+                  <a:txBody>
+                    <a:bodyPr wrap="square" lIns="152400" tIns="85725" rIns="114300" bIns="76200"/>
+                    <a:lstStyle/>
+                    <a:p>
+                      <a:r>
+                        <a:rPr sz="1575" b="0">
+                          <a:solidFill>
+                            <a:srgbClr val="F6E0F5"/>
+                          </a:solidFill>
+                          <a:latin typeface="Microsoft JhengHei"/>
+                          <a:ea typeface="Microsoft JhengHei"/>
+                          <a:cs typeface="Microsoft JhengHei"/>
+                        </a:rPr>
+                        <a:t>0.37</a:t>
+                      </a:r>
+                    </a:p>
+                  </a:txBody>
+                  <a:tcPr marL="91440" marR="91440" marT="45720" marB="45720">
+                    <a:lnR w="6668">
+                      <a:solidFill>
+                        <a:srgbClr val="654A79"/>
+                      </a:solidFill>
+                      <a:prstDash val="solid"/>
+                    </a:lnR>
+                    <a:lnB w="6668">
+                      <a:solidFill>
+                        <a:srgbClr val="654A79"/>
+                      </a:solidFill>
+                      <a:prstDash val="solid"/>
+                    </a:lnB>
+                    <a:solidFill>
+                      <a:srgbClr val="271330"/>
+                    </a:solidFill>
+                  </a:tcPr>
+                </a:tc>
+                <a:tc>
+                  <a:txBody>
+                    <a:bodyPr wrap="square" lIns="152400" tIns="85725" rIns="114300" bIns="76200"/>
+                    <a:lstStyle/>
+                    <a:p>
+                      <a:r>
+                        <a:rPr sz="1575" b="0">
+                          <a:solidFill>
+                            <a:srgbClr val="F6E0F5"/>
+                          </a:solidFill>
+                          <a:latin typeface="Microsoft JhengHei"/>
+                          <a:ea typeface="Microsoft JhengHei"/>
+                          <a:cs typeface="Microsoft JhengHei"/>
+                        </a:rPr>
+                        <a:t>0.00</a:t>
+                      </a:r>
+                    </a:p>
+                  </a:txBody>
+                  <a:tcPr marL="91440" marR="91440" marT="45720" marB="45720">
+                    <a:lnR w="6668">
+                      <a:solidFill>
+                        <a:srgbClr val="654A79"/>
+                      </a:solidFill>
+                      <a:prstDash val="solid"/>
+                    </a:lnR>
+                    <a:lnB w="6668">
+                      <a:solidFill>
+                        <a:srgbClr val="654A79"/>
+                      </a:solidFill>
+                      <a:prstDash val="solid"/>
+                    </a:lnB>
+                    <a:solidFill>
+                      <a:srgbClr val="191026"/>
+                    </a:solidFill>
+                  </a:tcPr>
+                </a:tc>
+                <a:tc>
+                  <a:txBody>
+                    <a:bodyPr wrap="square" lIns="152400" tIns="85725" rIns="114300" bIns="76200"/>
+                    <a:lstStyle/>
+                    <a:p>
+                      <a:r>
+                        <a:rPr sz="1575" b="0">
+                          <a:solidFill>
+                            <a:srgbClr val="F6E0F5"/>
+                          </a:solidFill>
+                          <a:latin typeface="Microsoft JhengHei"/>
+                          <a:ea typeface="Microsoft JhengHei"/>
+                          <a:cs typeface="Microsoft JhengHei"/>
+                        </a:rPr>
+                        <a:t>0.00</a:t>
+                      </a:r>
+                    </a:p>
+                  </a:txBody>
+                  <a:tcPr marL="91440" marR="91440" marT="45720" marB="45720">
+                    <a:lnR w="6668">
+                      <a:solidFill>
+                        <a:srgbClr val="654A79"/>
+                      </a:solidFill>
+                      <a:prstDash val="solid"/>
+                    </a:lnR>
+                    <a:lnB w="6668">
+                      <a:solidFill>
+                        <a:srgbClr val="654A79"/>
+                      </a:solidFill>
+                      <a:prstDash val="solid"/>
+                    </a:lnB>
+                    <a:solidFill>
+                      <a:srgbClr val="191026"/>
+                    </a:solidFill>
+                  </a:tcPr>
+                </a:tc>
+                <a:tc>
+                  <a:txBody>
+                    <a:bodyPr wrap="square" lIns="152400" tIns="85725" rIns="114300" bIns="76200"/>
+                    <a:lstStyle/>
+                    <a:p>
+                      <a:r>
+                        <a:rPr sz="1575" b="0">
+                          <a:solidFill>
+                            <a:srgbClr val="F6E0F5"/>
+                          </a:solidFill>
+                          <a:latin typeface="Microsoft JhengHei"/>
+                          <a:ea typeface="Microsoft JhengHei"/>
+                          <a:cs typeface="Microsoft JhengHei"/>
+                        </a:rPr>
+                        <a:t>0.00</a:t>
+                      </a:r>
+                    </a:p>
+                  </a:txBody>
+                  <a:tcPr marL="91440" marR="91440" marT="45720" marB="45720">
+                    <a:lnR w="6668">
+                      <a:solidFill>
+                        <a:srgbClr val="654A79"/>
+                      </a:solidFill>
+                      <a:prstDash val="solid"/>
+                    </a:lnR>
+                    <a:lnB w="6668">
+                      <a:solidFill>
+                        <a:srgbClr val="654A79"/>
+                      </a:solidFill>
+                      <a:prstDash val="solid"/>
+                    </a:lnB>
+                    <a:solidFill>
+                      <a:srgbClr val="191026"/>
+                    </a:solidFill>
+                  </a:tcPr>
+                </a:tc>
+                <a:tc>
+                  <a:txBody>
+                    <a:bodyPr wrap="square" lIns="152400" tIns="85725" rIns="114300" bIns="76200"/>
+                    <a:lstStyle/>
+                    <a:p>
+                      <a:r>
+                        <a:rPr sz="1575" b="0">
+                          <a:solidFill>
+                            <a:srgbClr val="F6E0F5"/>
+                          </a:solidFill>
+                          <a:latin typeface="Microsoft JhengHei"/>
+                          <a:ea typeface="Microsoft JhengHei"/>
+                          <a:cs typeface="Microsoft JhengHei"/>
+                        </a:rPr>
+                        <a:t>0.00</a:t>
+                      </a:r>
+                    </a:p>
+                  </a:txBody>
+                  <a:tcPr marL="91440" marR="91440" marT="45720" marB="45720">
+                    <a:lnR w="6668">
+                      <a:solidFill>
+                        <a:srgbClr val="654A79"/>
+                      </a:solidFill>
+                      <a:prstDash val="solid"/>
+                    </a:lnR>
+                    <a:lnB w="6668">
+                      <a:solidFill>
+                        <a:srgbClr val="654A79"/>
+                      </a:solidFill>
+                      <a:prstDash val="solid"/>
+                    </a:lnB>
+                    <a:solidFill>
+                      <a:srgbClr val="191026"/>
+                    </a:solidFill>
+                  </a:tcPr>
+                </a:tc>
+              </a:tr>
+              <a:tr h="609600">
+                <a:tc>
+                  <a:txBody>
+                    <a:bodyPr wrap="square" lIns="152400" tIns="85725" rIns="114300" bIns="76200"/>
+                    <a:lstStyle/>
+                    <a:p>
+                      <a:r>
+                        <a:rPr sz="1575" b="0">
+                          <a:solidFill>
+                            <a:srgbClr val="F6E0F5"/>
+                          </a:solidFill>
+                          <a:latin typeface="Microsoft JhengHei"/>
+                          <a:ea typeface="Microsoft JhengHei"/>
+                          <a:cs typeface="Microsoft JhengHei"/>
+                        </a:rPr>
+                        <a:t>後阻塞%</a:t>
+                      </a:r>
+                    </a:p>
+                  </a:txBody>
+                  <a:tcPr marL="91440" marR="91440" marT="45720" marB="45720">
+                    <a:lnL w="6668">
+                      <a:solidFill>
+                        <a:srgbClr val="654A79"/>
+                      </a:solidFill>
+                      <a:prstDash val="solid"/>
+                    </a:lnL>
+                    <a:lnR w="6668">
+                      <a:solidFill>
+                        <a:srgbClr val="654A79"/>
+                      </a:solidFill>
+                      <a:prstDash val="solid"/>
+                    </a:lnR>
+                    <a:lnB w="6668">
+                      <a:solidFill>
+                        <a:srgbClr val="654A79"/>
+                      </a:solidFill>
+                      <a:prstDash val="solid"/>
+                    </a:lnB>
+                    <a:solidFill>
+                      <a:srgbClr val="0D0912"/>
+                    </a:solidFill>
+                  </a:tcPr>
+                </a:tc>
+                <a:tc>
+                  <a:txBody>
+                    <a:bodyPr wrap="square" lIns="152400" tIns="85725" rIns="114300" bIns="76200"/>
+                    <a:lstStyle/>
+                    <a:p>
+                      <a:r>
+                        <a:rPr sz="1575" b="0">
+                          <a:solidFill>
+                            <a:srgbClr val="F6E0F5"/>
+                          </a:solidFill>
+                          <a:latin typeface="Microsoft JhengHei"/>
+                          <a:ea typeface="Microsoft JhengHei"/>
+                          <a:cs typeface="Microsoft JhengHei"/>
+                        </a:rPr>
+                        <a:t>0.00</a:t>
+                      </a:r>
+                    </a:p>
+                  </a:txBody>
+                  <a:tcPr marL="91440" marR="91440" marT="45720" marB="45720">
+                    <a:lnR w="6668">
+                      <a:solidFill>
+                        <a:srgbClr val="654A79"/>
+                      </a:solidFill>
+                      <a:prstDash val="solid"/>
+                    </a:lnR>
+                    <a:lnB w="6668">
+                      <a:solidFill>
+                        <a:srgbClr val="654A79"/>
+                      </a:solidFill>
+                      <a:prstDash val="solid"/>
+                    </a:lnB>
+                    <a:solidFill>
+                      <a:srgbClr val="191026"/>
+                    </a:solidFill>
+                  </a:tcPr>
+                </a:tc>
+                <a:tc>
+                  <a:txBody>
+                    <a:bodyPr wrap="square" lIns="152400" tIns="85725" rIns="114300" bIns="76200"/>
+                    <a:lstStyle/>
+                    <a:p>
+                      <a:r>
+                        <a:rPr sz="1575" b="0">
+                          <a:solidFill>
+                            <a:srgbClr val="F6E0F5"/>
+                          </a:solidFill>
+                          <a:latin typeface="Microsoft JhengHei"/>
+                          <a:ea typeface="Microsoft JhengHei"/>
+                          <a:cs typeface="Microsoft JhengHei"/>
+                        </a:rPr>
+                        <a:t>0.00</a:t>
+                      </a:r>
+                    </a:p>
+                  </a:txBody>
+                  <a:tcPr marL="91440" marR="91440" marT="45720" marB="45720">
+                    <a:lnR w="6668">
+                      <a:solidFill>
+                        <a:srgbClr val="654A79"/>
+                      </a:solidFill>
+                      <a:prstDash val="solid"/>
+                    </a:lnR>
+                    <a:lnB w="6668">
+                      <a:solidFill>
+                        <a:srgbClr val="654A79"/>
+                      </a:solidFill>
+                      <a:prstDash val="solid"/>
+                    </a:lnB>
+                    <a:solidFill>
+                      <a:srgbClr val="191026"/>
+                    </a:solidFill>
+                  </a:tcPr>
+                </a:tc>
+                <a:tc>
+                  <a:txBody>
+                    <a:bodyPr wrap="square" lIns="152400" tIns="85725" rIns="114300" bIns="76200"/>
+                    <a:lstStyle/>
+                    <a:p>
+                      <a:r>
+                        <a:rPr sz="1575" b="0">
+                          <a:solidFill>
+                            <a:srgbClr val="F6E0F5"/>
+                          </a:solidFill>
+                          <a:latin typeface="Microsoft JhengHei"/>
+                          <a:ea typeface="Microsoft JhengHei"/>
+                          <a:cs typeface="Microsoft JhengHei"/>
+                        </a:rPr>
+                        <a:t>0.51</a:t>
+                      </a:r>
+                    </a:p>
+                  </a:txBody>
+                  <a:tcPr marL="91440" marR="91440" marT="45720" marB="45720">
+                    <a:lnR w="6668">
+                      <a:solidFill>
+                        <a:srgbClr val="654A79"/>
+                      </a:solidFill>
+                      <a:prstDash val="solid"/>
+                    </a:lnR>
+                    <a:lnB w="6668">
+                      <a:solidFill>
+                        <a:srgbClr val="654A79"/>
+                      </a:solidFill>
+                      <a:prstDash val="solid"/>
+                    </a:lnB>
+                    <a:solidFill>
+                      <a:srgbClr val="2C1434"/>
+                    </a:solidFill>
+                  </a:tcPr>
+                </a:tc>
+                <a:tc>
+                  <a:txBody>
+                    <a:bodyPr wrap="square" lIns="152400" tIns="85725" rIns="114300" bIns="76200"/>
+                    <a:lstStyle/>
+                    <a:p>
+                      <a:r>
+                        <a:rPr sz="1575" b="0">
+                          <a:solidFill>
+                            <a:srgbClr val="F6E0F5"/>
+                          </a:solidFill>
+                          <a:latin typeface="Microsoft JhengHei"/>
+                          <a:ea typeface="Microsoft JhengHei"/>
+                          <a:cs typeface="Microsoft JhengHei"/>
+                        </a:rPr>
+                        <a:t>0.00</a:t>
+                      </a:r>
+                    </a:p>
+                  </a:txBody>
+                  <a:tcPr marL="91440" marR="91440" marT="45720" marB="45720">
+                    <a:lnR w="6668">
+                      <a:solidFill>
+                        <a:srgbClr val="654A79"/>
+                      </a:solidFill>
+                      <a:prstDash val="solid"/>
+                    </a:lnR>
+                    <a:lnB w="6668">
+                      <a:solidFill>
+                        <a:srgbClr val="654A79"/>
+                      </a:solidFill>
+                      <a:prstDash val="solid"/>
+                    </a:lnB>
+                    <a:solidFill>
+                      <a:srgbClr val="191026"/>
+                    </a:solidFill>
+                  </a:tcPr>
+                </a:tc>
+                <a:tc>
+                  <a:txBody>
+                    <a:bodyPr wrap="square" lIns="152400" tIns="85725" rIns="114300" bIns="76200"/>
+                    <a:lstStyle/>
+                    <a:p>
+                      <a:r>
+                        <a:rPr sz="1575" b="0">
+                          <a:solidFill>
+                            <a:srgbClr val="F6E0F5"/>
+                          </a:solidFill>
+                          <a:latin typeface="Microsoft JhengHei"/>
+                          <a:ea typeface="Microsoft JhengHei"/>
+                          <a:cs typeface="Microsoft JhengHei"/>
+                        </a:rPr>
+                        <a:t>0.00</a:t>
+                      </a:r>
+                    </a:p>
+                  </a:txBody>
+                  <a:tcPr marL="91440" marR="91440" marT="45720" marB="45720">
+                    <a:lnR w="6668">
+                      <a:solidFill>
+                        <a:srgbClr val="654A79"/>
+                      </a:solidFill>
+                      <a:prstDash val="solid"/>
+                    </a:lnR>
+                    <a:lnB w="6668">
+                      <a:solidFill>
+                        <a:srgbClr val="654A79"/>
+                      </a:solidFill>
+                      <a:prstDash val="solid"/>
+                    </a:lnB>
+                    <a:solidFill>
+                      <a:srgbClr val="191026"/>
+                    </a:solidFill>
+                  </a:tcPr>
+                </a:tc>
+                <a:tc>
+                  <a:txBody>
+                    <a:bodyPr wrap="square" lIns="152400" tIns="85725" rIns="114300" bIns="76200"/>
+                    <a:lstStyle/>
+                    <a:p>
+                      <a:r>
+                        <a:rPr sz="1575" b="0">
+                          <a:solidFill>
+                            <a:srgbClr val="F6E0F5"/>
+                          </a:solidFill>
+                          <a:latin typeface="Microsoft JhengHei"/>
+                          <a:ea typeface="Microsoft JhengHei"/>
+                          <a:cs typeface="Microsoft JhengHei"/>
+                        </a:rPr>
+                        <a:t>0.00</a:t>
+                      </a:r>
+                    </a:p>
+                  </a:txBody>
+                  <a:tcPr marL="91440" marR="91440" marT="45720" marB="45720">
+                    <a:lnR w="6668">
+                      <a:solidFill>
+                        <a:srgbClr val="654A79"/>
+                      </a:solidFill>
+                      <a:prstDash val="solid"/>
+                    </a:lnR>
+                    <a:lnB w="6668">
+                      <a:solidFill>
+                        <a:srgbClr val="654A79"/>
+                      </a:solidFill>
+                      <a:prstDash val="solid"/>
+                    </a:lnB>
+                    <a:solidFill>
+                      <a:srgbClr val="191026"/>
+                    </a:solidFill>
+                  </a:tcPr>
+                </a:tc>
+                <a:tc>
+                  <a:txBody>
+                    <a:bodyPr wrap="square" lIns="152400" tIns="85725" rIns="114300" bIns="76200"/>
+                    <a:lstStyle/>
+                    <a:p>
+                      <a:r>
+                        <a:rPr sz="1575" b="0">
+                          <a:solidFill>
+                            <a:srgbClr val="F6E0F5"/>
+                          </a:solidFill>
+                          <a:latin typeface="Microsoft JhengHei"/>
+                          <a:ea typeface="Microsoft JhengHei"/>
+                          <a:cs typeface="Microsoft JhengHei"/>
+                        </a:rPr>
+                        <a:t>0.00</a:t>
+                      </a:r>
+                    </a:p>
+                  </a:txBody>
+                  <a:tcPr marL="91440" marR="91440" marT="45720" marB="45720">
+                    <a:lnR w="6668">
+                      <a:solidFill>
+                        <a:srgbClr val="654A79"/>
+                      </a:solidFill>
+                      <a:prstDash val="solid"/>
+                    </a:lnR>
+                    <a:lnB w="6668">
+                      <a:solidFill>
+                        <a:srgbClr val="654A79"/>
+                      </a:solidFill>
+                      <a:prstDash val="solid"/>
+                    </a:lnB>
+                    <a:solidFill>
+                      <a:srgbClr val="191026"/>
+                    </a:solidFill>
+                  </a:tcPr>
+                </a:tc>
+              </a:tr>
+            </a:tbl>
+          </a:graphicData>
+        </a:graphic>
+      </p:graphicFrame>
+      <p:sp>
+        <p:nvSpPr>
+          <p:cNvPr id="17" name="內容_14_加工色階0–100%；阻塞色">
+            <a:extLst xmlns:a="http://schemas.openxmlformats.org/drawingml/2006/main">
+              <a:ext uri="{FF2B5EF4-FFF2-40B4-BE49-F238E27FC236}">
+                <a16:creationId xmlns:a16="http://schemas.microsoft.com/office/drawing/2014/main" id="{95111E9A-9291-40D0-B10C-1D84A3BAD014}"/>
               </a:ext>
             </a:extLst>
           </p:cNvPr>
@@ -16099,8 +17673,189 @@
         </p:nvSpPr>
         <p:spPr>
           <a:xfrm xmlns:a="http://schemas.openxmlformats.org/drawingml/2006/main">
-            <a:off x="1581150" y="4048125"/>
-            <a:ext cx="4762500" cy="381000"/>
+            <a:off x="1581150" y="7524750"/>
+            <a:ext cx="9525000" cy="666750"/>
+          </a:xfrm>
+          <a:prstGeom xmlns:a="http://schemas.openxmlformats.org/drawingml/2006/main" prst="rect">
+            <a:avLst/>
+          </a:prstGeom>
+          <a:noFill xmlns:a="http://schemas.openxmlformats.org/drawingml/2006/main"/>
+          <a:ln xmlns:a="http://schemas.openxmlformats.org/drawingml/2006/main" w="0">
+            <a:noFill/>
+          </a:ln>
+        </p:spPr>
+        <p:txBody>
+          <a:bodyPr xmlns:a="http://schemas.openxmlformats.org/drawingml/2006/main" wrap="square" lIns="0" tIns="0" rIns="0" bIns="0">
+            <a:noAutofit/>
+          </a:bodyPr>
+          <a:lstStyle xmlns:a="http://schemas.openxmlformats.org/drawingml/2006/main">
+            <a:defPPr>
+              <a:defRPr sz="1800" b="0">
+                <a:solidFill>
+                  <a:srgbClr val="92A6DD"/>
+                </a:solidFill>
+                <a:latin typeface="Microsoft JhengHei"/>
+                <a:ea typeface="Microsoft JhengHei"/>
+                <a:cs typeface="Microsoft JhengHei"/>
+              </a:defRPr>
+            </a:defPPr>
+            <a:lvl1pPr>
+              <a:defRPr sz="1800" b="0">
+                <a:solidFill>
+                  <a:srgbClr val="92A6DD"/>
+                </a:solidFill>
+                <a:latin typeface="Microsoft JhengHei"/>
+                <a:ea typeface="Microsoft JhengHei"/>
+                <a:cs typeface="Microsoft JhengHei"/>
+              </a:defRPr>
+            </a:lvl1pPr>
+            <a:lvl2pPr>
+              <a:defRPr sz="1800" b="0">
+                <a:solidFill>
+                  <a:srgbClr val="92A6DD"/>
+                </a:solidFill>
+                <a:latin typeface="Microsoft JhengHei"/>
+                <a:ea typeface="Microsoft JhengHei"/>
+                <a:cs typeface="Microsoft JhengHei"/>
+              </a:defRPr>
+            </a:lvl2pPr>
+            <a:lvl3pPr>
+              <a:defRPr sz="1800" b="0">
+                <a:solidFill>
+                  <a:srgbClr val="92A6DD"/>
+                </a:solidFill>
+                <a:latin typeface="Microsoft JhengHei"/>
+                <a:ea typeface="Microsoft JhengHei"/>
+                <a:cs typeface="Microsoft JhengHei"/>
+              </a:defRPr>
+            </a:lvl3pPr>
+            <a:lvl4pPr>
+              <a:defRPr sz="1800" b="0">
+                <a:solidFill>
+                  <a:srgbClr val="92A6DD"/>
+                </a:solidFill>
+                <a:latin typeface="Microsoft JhengHei"/>
+                <a:ea typeface="Microsoft JhengHei"/>
+                <a:cs typeface="Microsoft JhengHei"/>
+              </a:defRPr>
+            </a:lvl4pPr>
+            <a:lvl5pPr>
+              <a:defRPr sz="1800" b="0">
+                <a:solidFill>
+                  <a:srgbClr val="92A6DD"/>
+                </a:solidFill>
+                <a:latin typeface="Microsoft JhengHei"/>
+                <a:ea typeface="Microsoft JhengHei"/>
+                <a:cs typeface="Microsoft JhengHei"/>
+              </a:defRPr>
+            </a:lvl5pPr>
+            <a:lvl6pPr>
+              <a:defRPr sz="1800" b="0">
+                <a:solidFill>
+                  <a:srgbClr val="92A6DD"/>
+                </a:solidFill>
+                <a:latin typeface="Microsoft JhengHei"/>
+                <a:ea typeface="Microsoft JhengHei"/>
+                <a:cs typeface="Microsoft JhengHei"/>
+              </a:defRPr>
+            </a:lvl6pPr>
+            <a:lvl7pPr>
+              <a:defRPr sz="1800" b="0">
+                <a:solidFill>
+                  <a:srgbClr val="92A6DD"/>
+                </a:solidFill>
+                <a:latin typeface="Microsoft JhengHei"/>
+                <a:ea typeface="Microsoft JhengHei"/>
+                <a:cs typeface="Microsoft JhengHei"/>
+              </a:defRPr>
+            </a:lvl7pPr>
+            <a:lvl8pPr>
+              <a:defRPr sz="1800" b="0">
+                <a:solidFill>
+                  <a:srgbClr val="92A6DD"/>
+                </a:solidFill>
+                <a:latin typeface="Microsoft JhengHei"/>
+                <a:ea typeface="Microsoft JhengHei"/>
+                <a:cs typeface="Microsoft JhengHei"/>
+              </a:defRPr>
+            </a:lvl8pPr>
+            <a:lvl9pPr>
+              <a:defRPr sz="1800" b="0">
+                <a:solidFill>
+                  <a:srgbClr val="92A6DD"/>
+                </a:solidFill>
+                <a:latin typeface="Microsoft JhengHei"/>
+                <a:ea typeface="Microsoft JhengHei"/>
+                <a:cs typeface="Microsoft JhengHei"/>
+              </a:defRPr>
+            </a:lvl9pPr>
+          </a:lstStyle>
+          <a:p xmlns:a="http://schemas.openxmlformats.org/drawingml/2006/main">
+            <a:pPr>
+              <a:defRPr sz="1800" b="0">
+                <a:solidFill>
+                  <a:srgbClr val="92A6DD"/>
+                </a:solidFill>
+                <a:latin typeface="Microsoft JhengHei"/>
+                <a:ea typeface="Microsoft JhengHei"/>
+                <a:cs typeface="Microsoft JhengHei"/>
+              </a:defRPr>
+            </a:pPr>
+            <a:r>
+              <a:rPr sz="1800" b="0">
+                <a:solidFill>
+                  <a:srgbClr val="92A6DD"/>
+                </a:solidFill>
+                <a:latin typeface="Microsoft JhengHei"/>
+                <a:ea typeface="Microsoft JhengHei"/>
+                <a:cs typeface="Microsoft JhengHei"/>
+              </a:rPr>
+              <a:t>加工色階0–100%；阻塞色階0–3.5%。</a:t>
+            </a:r>
+          </a:p>
+          <a:p xmlns:a="http://schemas.openxmlformats.org/drawingml/2006/main">
+            <a:pPr>
+              <a:defRPr sz="1800" b="0">
+                <a:solidFill>
+                  <a:srgbClr val="92A6DD"/>
+                </a:solidFill>
+                <a:latin typeface="Microsoft JhengHei"/>
+                <a:ea typeface="Microsoft JhengHei"/>
+                <a:cs typeface="Microsoft JhengHei"/>
+              </a:defRPr>
+            </a:pPr>
+            <a:r>
+              <a:rPr sz="1800" b="0">
+                <a:solidFill>
+                  <a:srgbClr val="92A6DD"/>
+                </a:solidFill>
+                <a:latin typeface="Microsoft JhengHei"/>
+                <a:ea typeface="Microsoft JhengHei"/>
+                <a:cs typeface="Microsoft JhengHei"/>
+              </a:rPr>
+              <a:t>同seed101、同116100秒的累計占比。</a:t>
+            </a:r>
+          </a:p>
+        </p:txBody>
+      </p:sp>
+      <p:sp>
+        <p:nvSpPr>
+          <p:cNvPr id="18" name="內容_14_原生WIP／清洗狀態">
+            <a:extLst xmlns:a="http://schemas.openxmlformats.org/drawingml/2006/main">
+              <a:ext uri="{FF2B5EF4-FFF2-40B4-BE49-F238E27FC236}">
+                <a16:creationId xmlns:a16="http://schemas.microsoft.com/office/drawing/2014/main" id="{F88768E1-2B6F-436F-B331-142CD8E98C8C}"/>
+              </a:ext>
+            </a:extLst>
+          </p:cNvPr>
+          <p:cNvSpPr>
+            <a:spLocks xmlns:a="http://schemas.openxmlformats.org/drawingml/2006/main" noGrp="1"/>
+          </p:cNvSpPr>
+          <p:nvPr/>
+        </p:nvSpPr>
+        <p:spPr>
+          <a:xfrm xmlns:a="http://schemas.openxmlformats.org/drawingml/2006/main">
+            <a:off x="11430000" y="4095750"/>
+            <a:ext cx="4762500" cy="428625"/>
           </a:xfrm>
           <a:prstGeom xmlns:a="http://schemas.openxmlformats.org/drawingml/2006/main" prst="rect">
             <a:avLst/>
@@ -16236,175 +17991,17 @@
                 <a:ea typeface="Microsoft JhengHei"/>
                 <a:cs typeface="Microsoft JhengHei"/>
               </a:rPr>
-              <a:t>Before P0</a:t>
+              <a:t>原生WIP／清洗狀態</a:t>
             </a:r>
           </a:p>
         </p:txBody>
       </p:sp>
-      <p:sp>
-        <p:nvSpPr>
-          <p:cNvPr id="17" name="內容_14_After P4 12m">
-            <a:extLst xmlns:a="http://schemas.openxmlformats.org/drawingml/2006/main">
-              <a:ext uri="{FF2B5EF4-FFF2-40B4-BE49-F238E27FC236}">
-                <a16:creationId xmlns:a16="http://schemas.microsoft.com/office/drawing/2014/main" id="{BABED8DA-C406-48D7-96EF-5712B2D4DA9D}"/>
-              </a:ext>
-            </a:extLst>
-          </p:cNvPr>
-          <p:cNvSpPr>
-            <a:spLocks xmlns:a="http://schemas.openxmlformats.org/drawingml/2006/main" noGrp="1"/>
-          </p:cNvSpPr>
-          <p:nvPr/>
-        </p:nvSpPr>
-        <p:spPr>
-          <a:xfrm xmlns:a="http://schemas.openxmlformats.org/drawingml/2006/main">
-            <a:off x="1581150" y="5905500"/>
-            <a:ext cx="4762500" cy="381000"/>
-          </a:xfrm>
-          <a:prstGeom xmlns:a="http://schemas.openxmlformats.org/drawingml/2006/main" prst="rect">
-            <a:avLst/>
-          </a:prstGeom>
-          <a:noFill xmlns:a="http://schemas.openxmlformats.org/drawingml/2006/main"/>
-          <a:ln xmlns:a="http://schemas.openxmlformats.org/drawingml/2006/main" w="0">
-            <a:noFill/>
-          </a:ln>
-        </p:spPr>
-        <p:txBody>
-          <a:bodyPr xmlns:a="http://schemas.openxmlformats.org/drawingml/2006/main" wrap="square" lIns="0" tIns="0" rIns="0" bIns="0">
-            <a:noAutofit/>
-          </a:bodyPr>
-          <a:lstStyle xmlns:a="http://schemas.openxmlformats.org/drawingml/2006/main">
-            <a:defPPr>
-              <a:defRPr sz="1875" b="0">
-                <a:solidFill>
-                  <a:srgbClr val="A280EC"/>
-                </a:solidFill>
-                <a:latin typeface="Microsoft JhengHei"/>
-                <a:ea typeface="Microsoft JhengHei"/>
-                <a:cs typeface="Microsoft JhengHei"/>
-              </a:defRPr>
-            </a:defPPr>
-            <a:lvl1pPr>
-              <a:defRPr sz="1875" b="0">
-                <a:solidFill>
-                  <a:srgbClr val="A280EC"/>
-                </a:solidFill>
-                <a:latin typeface="Microsoft JhengHei"/>
-                <a:ea typeface="Microsoft JhengHei"/>
-                <a:cs typeface="Microsoft JhengHei"/>
-              </a:defRPr>
-            </a:lvl1pPr>
-            <a:lvl2pPr>
-              <a:defRPr sz="1875" b="0">
-                <a:solidFill>
-                  <a:srgbClr val="A280EC"/>
-                </a:solidFill>
-                <a:latin typeface="Microsoft JhengHei"/>
-                <a:ea typeface="Microsoft JhengHei"/>
-                <a:cs typeface="Microsoft JhengHei"/>
-              </a:defRPr>
-            </a:lvl2pPr>
-            <a:lvl3pPr>
-              <a:defRPr sz="1875" b="0">
-                <a:solidFill>
-                  <a:srgbClr val="A280EC"/>
-                </a:solidFill>
-                <a:latin typeface="Microsoft JhengHei"/>
-                <a:ea typeface="Microsoft JhengHei"/>
-                <a:cs typeface="Microsoft JhengHei"/>
-              </a:defRPr>
-            </a:lvl3pPr>
-            <a:lvl4pPr>
-              <a:defRPr sz="1875" b="0">
-                <a:solidFill>
-                  <a:srgbClr val="A280EC"/>
-                </a:solidFill>
-                <a:latin typeface="Microsoft JhengHei"/>
-                <a:ea typeface="Microsoft JhengHei"/>
-                <a:cs typeface="Microsoft JhengHei"/>
-              </a:defRPr>
-            </a:lvl4pPr>
-            <a:lvl5pPr>
-              <a:defRPr sz="1875" b="0">
-                <a:solidFill>
-                  <a:srgbClr val="A280EC"/>
-                </a:solidFill>
-                <a:latin typeface="Microsoft JhengHei"/>
-                <a:ea typeface="Microsoft JhengHei"/>
-                <a:cs typeface="Microsoft JhengHei"/>
-              </a:defRPr>
-            </a:lvl5pPr>
-            <a:lvl6pPr>
-              <a:defRPr sz="1875" b="0">
-                <a:solidFill>
-                  <a:srgbClr val="A280EC"/>
-                </a:solidFill>
-                <a:latin typeface="Microsoft JhengHei"/>
-                <a:ea typeface="Microsoft JhengHei"/>
-                <a:cs typeface="Microsoft JhengHei"/>
-              </a:defRPr>
-            </a:lvl6pPr>
-            <a:lvl7pPr>
-              <a:defRPr sz="1875" b="0">
-                <a:solidFill>
-                  <a:srgbClr val="A280EC"/>
-                </a:solidFill>
-                <a:latin typeface="Microsoft JhengHei"/>
-                <a:ea typeface="Microsoft JhengHei"/>
-                <a:cs typeface="Microsoft JhengHei"/>
-              </a:defRPr>
-            </a:lvl7pPr>
-            <a:lvl8pPr>
-              <a:defRPr sz="1875" b="0">
-                <a:solidFill>
-                  <a:srgbClr val="A280EC"/>
-                </a:solidFill>
-                <a:latin typeface="Microsoft JhengHei"/>
-                <a:ea typeface="Microsoft JhengHei"/>
-                <a:cs typeface="Microsoft JhengHei"/>
-              </a:defRPr>
-            </a:lvl8pPr>
-            <a:lvl9pPr>
-              <a:defRPr sz="1875" b="0">
-                <a:solidFill>
-                  <a:srgbClr val="A280EC"/>
-                </a:solidFill>
-                <a:latin typeface="Microsoft JhengHei"/>
-                <a:ea typeface="Microsoft JhengHei"/>
-                <a:cs typeface="Microsoft JhengHei"/>
-              </a:defRPr>
-            </a:lvl9pPr>
-          </a:lstStyle>
-          <a:p xmlns:a="http://schemas.openxmlformats.org/drawingml/2006/main">
-            <a:pPr>
-              <a:defRPr sz="1875" b="0">
-                <a:solidFill>
-                  <a:srgbClr val="A280EC"/>
-                </a:solidFill>
-                <a:latin typeface="Microsoft JhengHei"/>
-                <a:ea typeface="Microsoft JhengHei"/>
-                <a:cs typeface="Microsoft JhengHei"/>
-              </a:defRPr>
-            </a:pPr>
-            <a:r>
-              <a:rPr sz="1875" b="0">
-                <a:solidFill>
-                  <a:srgbClr val="A280EC"/>
-                </a:solidFill>
-                <a:latin typeface="Microsoft JhengHei"/>
-                <a:ea typeface="Microsoft JhengHei"/>
-                <a:cs typeface="Microsoft JhengHei"/>
-              </a:rPr>
-              <a:t>After P4 12m</a:t>
-            </a:r>
-          </a:p>
-        </p:txBody>
-      </p:sp>
       <p:pic>
         <p:nvPicPr>
-          <p:cNvPr id="18" name="">
-            <a:extLst xmlns:a="http://schemas.openxmlformats.org/drawingml/2006/main">
-              <a:ext uri="{FF2B5EF4-FFF2-40B4-BE49-F238E27FC236}">
-                <a16:creationId xmlns:a16="http://schemas.microsoft.com/office/drawing/2014/main" id="{022425BE-72EC-4CD3-984A-9CFE5CDE083A}"/>
+          <p:cNvPr id="19" name="">
+            <a:extLst xmlns:a="http://schemas.openxmlformats.org/drawingml/2006/main">
+              <a:ext uri="{FF2B5EF4-FFF2-40B4-BE49-F238E27FC236}">
+                <a16:creationId xmlns:a16="http://schemas.microsoft.com/office/drawing/2014/main" id="{240A6412-B0A0-48F9-A9D2-39E67B04A910}"/>
               </a:ext>
             </a:extLst>
           </p:cNvPr>
@@ -16414,242 +18011,26 @@
           <p:nvPr/>
         </p:nvPicPr>
         <p:blipFill>
-          <a:blip xmlns:r="http://schemas.openxmlformats.org/officeDocument/2006/relationships" xmlns:a="http://schemas.openxmlformats.org/drawingml/2006/main" r:embed="Rb2dfb4405a274189"/>
-          <a:srcRect xmlns:a="http://schemas.openxmlformats.org/drawingml/2006/main" l="0" t="20000" r="0" b="15000"/>
+          <a:blip xmlns:r="http://schemas.openxmlformats.org/officeDocument/2006/relationships" xmlns:a="http://schemas.openxmlformats.org/drawingml/2006/main" r:embed="Rb8c34b6ed9154941"/>
+          <a:srcRect xmlns:a="http://schemas.openxmlformats.org/drawingml/2006/main" l="0" t="53500" r="10000" b="7000"/>
           <a:stretch xmlns:a="http://schemas.openxmlformats.org/drawingml/2006/main"/>
         </p:blipFill>
         <p:spPr>
           <a:xfrm xmlns:a="http://schemas.openxmlformats.org/drawingml/2006/main">
-            <a:off x="1581150" y="4381500"/>
-            <a:ext cx="4857750" cy="1476375"/>
+            <a:off x="11430000" y="4572000"/>
+            <a:ext cx="4762500" cy="2857500"/>
           </a:xfrm>
           <a:prstGeom xmlns:a="http://schemas.openxmlformats.org/drawingml/2006/main" prst="rect">
             <a:avLst/>
           </a:prstGeom>
         </p:spPr>
       </p:pic>
-      <p:pic>
-        <p:nvPicPr>
-          <p:cNvPr id="19" name="">
-            <a:extLst xmlns:a="http://schemas.openxmlformats.org/drawingml/2006/main">
-              <a:ext uri="{FF2B5EF4-FFF2-40B4-BE49-F238E27FC236}">
-                <a16:creationId xmlns:a16="http://schemas.microsoft.com/office/drawing/2014/main" id="{435C449C-2D83-4830-9F2E-109EB8CE40CC}"/>
-              </a:ext>
-            </a:extLst>
-          </p:cNvPr>
-          <p:cNvPicPr>
-            <a:picLocks xmlns:a="http://schemas.openxmlformats.org/drawingml/2006/main" noChangeAspect="1"/>
-          </p:cNvPicPr>
-          <p:nvPr/>
-        </p:nvPicPr>
-        <p:blipFill>
-          <a:blip xmlns:r="http://schemas.openxmlformats.org/officeDocument/2006/relationships" xmlns:a="http://schemas.openxmlformats.org/drawingml/2006/main" r:embed="R0584c1a2855a486b"/>
-          <a:srcRect xmlns:a="http://schemas.openxmlformats.org/drawingml/2006/main" l="0" t="20000" r="0" b="15000"/>
-          <a:stretch xmlns:a="http://schemas.openxmlformats.org/drawingml/2006/main"/>
-        </p:blipFill>
-        <p:spPr>
-          <a:xfrm xmlns:a="http://schemas.openxmlformats.org/drawingml/2006/main">
-            <a:off x="1581150" y="6286500"/>
-            <a:ext cx="4857750" cy="1333500"/>
-          </a:xfrm>
-          <a:prstGeom xmlns:a="http://schemas.openxmlformats.org/drawingml/2006/main" prst="rect">
-            <a:avLst/>
-          </a:prstGeom>
-        </p:spPr>
-      </p:pic>
-      <p:sp>
-        <p:nvSpPr>
-          <p:cNvPr id="20" name="內容_14_原生Dashboard：WI">
-            <a:extLst xmlns:a="http://schemas.openxmlformats.org/drawingml/2006/main">
-              <a:ext uri="{FF2B5EF4-FFF2-40B4-BE49-F238E27FC236}">
-                <a16:creationId xmlns:a16="http://schemas.microsoft.com/office/drawing/2014/main" id="{DE848E93-5B15-458E-ACE3-4D11CF0310A3}"/>
-              </a:ext>
-            </a:extLst>
-          </p:cNvPr>
-          <p:cNvSpPr>
-            <a:spLocks xmlns:a="http://schemas.openxmlformats.org/drawingml/2006/main" noGrp="1"/>
-          </p:cNvSpPr>
-          <p:nvPr/>
-        </p:nvSpPr>
-        <p:spPr>
-          <a:xfrm xmlns:a="http://schemas.openxmlformats.org/drawingml/2006/main">
-            <a:off x="6953250" y="4048125"/>
-            <a:ext cx="9048750" cy="381000"/>
-          </a:xfrm>
-          <a:prstGeom xmlns:a="http://schemas.openxmlformats.org/drawingml/2006/main" prst="rect">
-            <a:avLst/>
-          </a:prstGeom>
-          <a:noFill xmlns:a="http://schemas.openxmlformats.org/drawingml/2006/main"/>
-          <a:ln xmlns:a="http://schemas.openxmlformats.org/drawingml/2006/main" w="0">
-            <a:noFill/>
-          </a:ln>
-        </p:spPr>
-        <p:txBody>
-          <a:bodyPr xmlns:a="http://schemas.openxmlformats.org/drawingml/2006/main" wrap="square" lIns="0" tIns="0" rIns="0" bIns="0">
-            <a:noAutofit/>
-          </a:bodyPr>
-          <a:lstStyle xmlns:a="http://schemas.openxmlformats.org/drawingml/2006/main">
-            <a:defPPr>
-              <a:defRPr sz="2025" b="0">
-                <a:solidFill>
-                  <a:srgbClr val="DF96DA"/>
-                </a:solidFill>
-                <a:latin typeface="Microsoft JhengHei"/>
-                <a:ea typeface="Microsoft JhengHei"/>
-                <a:cs typeface="Microsoft JhengHei"/>
-              </a:defRPr>
-            </a:defPPr>
-            <a:lvl1pPr>
-              <a:defRPr sz="2025" b="0">
-                <a:solidFill>
-                  <a:srgbClr val="DF96DA"/>
-                </a:solidFill>
-                <a:latin typeface="Microsoft JhengHei"/>
-                <a:ea typeface="Microsoft JhengHei"/>
-                <a:cs typeface="Microsoft JhengHei"/>
-              </a:defRPr>
-            </a:lvl1pPr>
-            <a:lvl2pPr>
-              <a:defRPr sz="2025" b="0">
-                <a:solidFill>
-                  <a:srgbClr val="DF96DA"/>
-                </a:solidFill>
-                <a:latin typeface="Microsoft JhengHei"/>
-                <a:ea typeface="Microsoft JhengHei"/>
-                <a:cs typeface="Microsoft JhengHei"/>
-              </a:defRPr>
-            </a:lvl2pPr>
-            <a:lvl3pPr>
-              <a:defRPr sz="2025" b="0">
-                <a:solidFill>
-                  <a:srgbClr val="DF96DA"/>
-                </a:solidFill>
-                <a:latin typeface="Microsoft JhengHei"/>
-                <a:ea typeface="Microsoft JhengHei"/>
-                <a:cs typeface="Microsoft JhengHei"/>
-              </a:defRPr>
-            </a:lvl3pPr>
-            <a:lvl4pPr>
-              <a:defRPr sz="2025" b="0">
-                <a:solidFill>
-                  <a:srgbClr val="DF96DA"/>
-                </a:solidFill>
-                <a:latin typeface="Microsoft JhengHei"/>
-                <a:ea typeface="Microsoft JhengHei"/>
-                <a:cs typeface="Microsoft JhengHei"/>
-              </a:defRPr>
-            </a:lvl4pPr>
-            <a:lvl5pPr>
-              <a:defRPr sz="2025" b="0">
-                <a:solidFill>
-                  <a:srgbClr val="DF96DA"/>
-                </a:solidFill>
-                <a:latin typeface="Microsoft JhengHei"/>
-                <a:ea typeface="Microsoft JhengHei"/>
-                <a:cs typeface="Microsoft JhengHei"/>
-              </a:defRPr>
-            </a:lvl5pPr>
-            <a:lvl6pPr>
-              <a:defRPr sz="2025" b="0">
-                <a:solidFill>
-                  <a:srgbClr val="DF96DA"/>
-                </a:solidFill>
-                <a:latin typeface="Microsoft JhengHei"/>
-                <a:ea typeface="Microsoft JhengHei"/>
-                <a:cs typeface="Microsoft JhengHei"/>
-              </a:defRPr>
-            </a:lvl6pPr>
-            <a:lvl7pPr>
-              <a:defRPr sz="2025" b="0">
-                <a:solidFill>
-                  <a:srgbClr val="DF96DA"/>
-                </a:solidFill>
-                <a:latin typeface="Microsoft JhengHei"/>
-                <a:ea typeface="Microsoft JhengHei"/>
-                <a:cs typeface="Microsoft JhengHei"/>
-              </a:defRPr>
-            </a:lvl7pPr>
-            <a:lvl8pPr>
-              <a:defRPr sz="2025" b="0">
-                <a:solidFill>
-                  <a:srgbClr val="DF96DA"/>
-                </a:solidFill>
-                <a:latin typeface="Microsoft JhengHei"/>
-                <a:ea typeface="Microsoft JhengHei"/>
-                <a:cs typeface="Microsoft JhengHei"/>
-              </a:defRPr>
-            </a:lvl8pPr>
-            <a:lvl9pPr>
-              <a:defRPr sz="2025" b="0">
-                <a:solidFill>
-                  <a:srgbClr val="DF96DA"/>
-                </a:solidFill>
-                <a:latin typeface="Microsoft JhengHei"/>
-                <a:ea typeface="Microsoft JhengHei"/>
-                <a:cs typeface="Microsoft JhengHei"/>
-              </a:defRPr>
-            </a:lvl9pPr>
-          </a:lstStyle>
-          <a:p xmlns:a="http://schemas.openxmlformats.org/drawingml/2006/main">
-            <a:pPr>
-              <a:defRPr sz="2025" b="0">
-                <a:solidFill>
-                  <a:srgbClr val="DF96DA"/>
-                </a:solidFill>
-                <a:latin typeface="Microsoft JhengHei"/>
-                <a:ea typeface="Microsoft JhengHei"/>
-                <a:cs typeface="Microsoft JhengHei"/>
-              </a:defRPr>
-            </a:pPr>
-            <a:r>
-              <a:rPr sz="2025" b="0">
-                <a:solidFill>
-                  <a:srgbClr val="DF96DA"/>
-                </a:solidFill>
-                <a:latin typeface="Microsoft JhengHei"/>
-                <a:ea typeface="Microsoft JhengHei"/>
-                <a:cs typeface="Microsoft JhengHei"/>
-              </a:rPr>
-              <a:t>原生Dashboard：WIP趨勢與清洗狀態</a:t>
-            </a:r>
-          </a:p>
-        </p:txBody>
-      </p:sp>
-      <p:pic>
-        <p:nvPicPr>
-          <p:cNvPr id="21" name="">
-            <a:extLst xmlns:a="http://schemas.openxmlformats.org/drawingml/2006/main">
-              <a:ext uri="{FF2B5EF4-FFF2-40B4-BE49-F238E27FC236}">
-                <a16:creationId xmlns:a16="http://schemas.microsoft.com/office/drawing/2014/main" id="{C39F84BC-3656-420D-9335-02ADE419CB8E}"/>
-              </a:ext>
-            </a:extLst>
-          </p:cNvPr>
-          <p:cNvPicPr>
-            <a:picLocks xmlns:a="http://schemas.openxmlformats.org/drawingml/2006/main" noChangeAspect="1"/>
-          </p:cNvPicPr>
-          <p:nvPr/>
-        </p:nvPicPr>
-        <p:blipFill>
-          <a:blip xmlns:r="http://schemas.openxmlformats.org/officeDocument/2006/relationships" xmlns:a="http://schemas.openxmlformats.org/drawingml/2006/main" r:embed="Rdde9f0a4a885487c"/>
-          <a:srcRect xmlns:a="http://schemas.openxmlformats.org/drawingml/2006/main" l="0" t="53500" r="10000" b="7000"/>
-          <a:stretch xmlns:a="http://schemas.openxmlformats.org/drawingml/2006/main"/>
-        </p:blipFill>
-        <p:spPr>
-          <a:xfrm xmlns:a="http://schemas.openxmlformats.org/drawingml/2006/main">
-            <a:off x="6953250" y="4476750"/>
-            <a:ext cx="9048750" cy="3143250"/>
-          </a:xfrm>
-          <a:prstGeom xmlns:a="http://schemas.openxmlformats.org/drawingml/2006/main" prst="rect">
-            <a:avLst/>
-          </a:prstGeom>
-        </p:spPr>
-      </p:pic>
-      <p:sp>
-        <p:nvSpPr>
-          <p:cNvPr id="22" name="內容_14_40欄儀表、兩張原生統計圖、">
-            <a:extLst xmlns:a="http://schemas.openxmlformats.org/drawingml/2006/main">
-              <a:ext uri="{FF2B5EF4-FFF2-40B4-BE49-F238E27FC236}">
-                <a16:creationId xmlns:a16="http://schemas.microsoft.com/office/drawing/2014/main" id="{E44358F9-340A-4B2C-8BF9-4290313A2419}"/>
+      <p:sp>
+        <p:nvSpPr>
+          <p:cNvPr id="20" name="內容_14_3D圖改稱設備績效著色截圖。">
+            <a:extLst xmlns:a="http://schemas.openxmlformats.org/drawingml/2006/main">
+              <a:ext uri="{FF2B5EF4-FFF2-40B4-BE49-F238E27FC236}">
+                <a16:creationId xmlns:a16="http://schemas.microsoft.com/office/drawing/2014/main" id="{156E2E9F-59DE-4083-9C64-A6CFCE2937DC}"/>
               </a:ext>
             </a:extLst>
           </p:cNvPr>
@@ -16797,7 +18178,7 @@
                 <a:ea typeface="Microsoft JhengHei"/>
                 <a:cs typeface="Microsoft JhengHei"/>
               </a:rPr>
-              <a:t>40欄儀表、兩張原生統計圖、ABC比例；備援影片330.75秒，3600張實際3D影格均附時間。</a:t>
+              <a:t>3D圖改稱設備績效著色截圖。「循環箱出庫占比100%」由模型結構保證，不列為改善成果。</a:t>
             </a:r>
           </a:p>
         </p:txBody>
@@ -16805,7 +18186,7 @@
     </p:spTree>
     <p:extLst>
       <p:ext uri="{BB962C8B-B14F-4D97-AF65-F5344CB8AC3E}">
-        <p14:creationId xmlns:p14="http://schemas.microsoft.com/office/powerpoint/2010/main" val="1929487663"/>
+        <p14:creationId xmlns:p14="http://schemas.microsoft.com/office/powerpoint/2010/main" val="1280494973"/>
       </p:ext>
     </p:extLst>
   </p:cSld>
@@ -16829,7 +18210,7 @@
           <p:cNvPr id="2" name="Freeform 2">
             <a:extLst xmlns:a="http://schemas.openxmlformats.org/drawingml/2006/main">
               <a:ext uri="{FF2B5EF4-FFF2-40B4-BE49-F238E27FC236}">
-                <a16:creationId xmlns:a16="http://schemas.microsoft.com/office/drawing/2014/main" id="{B7CE8B02-AE33-4389-B9F9-BDE20FD57522}"/>
+                <a16:creationId xmlns:a16="http://schemas.microsoft.com/office/drawing/2014/main" id="{0A844A29-D955-40AD-B71F-FE7C2F8F216A}"/>
               </a:ext>
             </a:extLst>
           </p:cNvPr>
@@ -16867,7 +18248,7 @@
             </a:pathLst>
           </a:custGeom>
           <a:blipFill xmlns:a="http://schemas.openxmlformats.org/drawingml/2006/main">
-            <a:blip xmlns:r="http://schemas.openxmlformats.org/officeDocument/2006/relationships" r:embed="Rf2e8be4ba9034f42"/>
+            <a:blip xmlns:r="http://schemas.openxmlformats.org/officeDocument/2006/relationships" r:embed="R22a8eff4e05b4003"/>
             <a:stretch>
               <a:fillRect l="-4156" t="0" r="-2479" b="-18484"/>
             </a:stretch>
@@ -16879,7 +18260,7 @@
           <p:cNvPr id="3" name="Freeform 3">
             <a:extLst xmlns:a="http://schemas.openxmlformats.org/drawingml/2006/main">
               <a:ext uri="{FF2B5EF4-FFF2-40B4-BE49-F238E27FC236}">
-                <a16:creationId xmlns:a16="http://schemas.microsoft.com/office/drawing/2014/main" id="{FA456827-91CC-4E46-AEF9-76C7BFC24E6A}"/>
+                <a16:creationId xmlns:a16="http://schemas.microsoft.com/office/drawing/2014/main" id="{F63A7370-06C3-46D7-84F3-3A2C370EC309}"/>
               </a:ext>
             </a:extLst>
           </p:cNvPr>
@@ -16917,7 +18298,7 @@
             </a:pathLst>
           </a:custGeom>
           <a:blipFill xmlns:a="http://schemas.openxmlformats.org/drawingml/2006/main">
-            <a:blip xmlns:r="http://schemas.openxmlformats.org/officeDocument/2006/relationships" r:embed="Rb0b5860fa0294ce9"/>
+            <a:blip xmlns:r="http://schemas.openxmlformats.org/officeDocument/2006/relationships" r:embed="Re2c8dcafdd244e8a"/>
             <a:stretch>
               <a:fillRect l="0" t="0" r="0" b="0"/>
             </a:stretch>
@@ -16929,7 +18310,7 @@
           <p:cNvPr id="5" name="Freeform 5">
             <a:extLst xmlns:a="http://schemas.openxmlformats.org/drawingml/2006/main">
               <a:ext uri="{FF2B5EF4-FFF2-40B4-BE49-F238E27FC236}">
-                <a16:creationId xmlns:a16="http://schemas.microsoft.com/office/drawing/2014/main" id="{7672A64E-2E98-4E57-BDC1-BC188CDEB0C8}"/>
+                <a16:creationId xmlns:a16="http://schemas.microsoft.com/office/drawing/2014/main" id="{B0512939-0966-4AB4-A0A4-ACB6A06BEEAC}"/>
               </a:ext>
             </a:extLst>
           </p:cNvPr>
@@ -17003,7 +18384,7 @@
           <p:cNvPr id="6" name="TextBox 6">
             <a:extLst xmlns:a="http://schemas.openxmlformats.org/drawingml/2006/main">
               <a:ext uri="{FF2B5EF4-FFF2-40B4-BE49-F238E27FC236}">
-                <a16:creationId xmlns:a16="http://schemas.microsoft.com/office/drawing/2014/main" id="{50B9BCFE-D981-40D4-9135-034DDB46BE37}"/>
+                <a16:creationId xmlns:a16="http://schemas.microsoft.com/office/drawing/2014/main" id="{A76C60C3-9CE9-4ADE-B523-556D5B437538}"/>
               </a:ext>
             </a:extLst>
           </p:cNvPr>
@@ -17039,7 +18420,7 @@
           <p:cNvPr id="7" name="Freeform 7">
             <a:extLst xmlns:a="http://schemas.openxmlformats.org/drawingml/2006/main">
               <a:ext uri="{FF2B5EF4-FFF2-40B4-BE49-F238E27FC236}">
-                <a16:creationId xmlns:a16="http://schemas.microsoft.com/office/drawing/2014/main" id="{D164EC8A-F968-4A17-B89F-23E2A7F417C3}"/>
+                <a16:creationId xmlns:a16="http://schemas.microsoft.com/office/drawing/2014/main" id="{F9357378-30BA-42F2-9E80-85B9DB3F7921}"/>
               </a:ext>
             </a:extLst>
           </p:cNvPr>
@@ -17087,7 +18468,7 @@
           <p:cNvPr id="8" name="TextBox 8">
             <a:extLst xmlns:a="http://schemas.openxmlformats.org/drawingml/2006/main">
               <a:ext uri="{FF2B5EF4-FFF2-40B4-BE49-F238E27FC236}">
-                <a16:creationId xmlns:a16="http://schemas.microsoft.com/office/drawing/2014/main" id="{3FCD65FC-D881-4534-A17E-EB6024C290F2}"/>
+                <a16:creationId xmlns:a16="http://schemas.microsoft.com/office/drawing/2014/main" id="{C036746B-AFD6-4AE3-B95A-91108428821F}"/>
               </a:ext>
             </a:extLst>
           </p:cNvPr>
@@ -17141,7 +18522,7 @@
           <p:cNvPr id="9" name="TextBox 9">
             <a:extLst xmlns:a="http://schemas.openxmlformats.org/drawingml/2006/main">
               <a:ext uri="{FF2B5EF4-FFF2-40B4-BE49-F238E27FC236}">
-                <a16:creationId xmlns:a16="http://schemas.microsoft.com/office/drawing/2014/main" id="{7BE250ED-A01E-4448-8D8F-D494D086464A}"/>
+                <a16:creationId xmlns:a16="http://schemas.microsoft.com/office/drawing/2014/main" id="{FDAA9227-9D69-4ABB-B98D-A93B8281A714}"/>
               </a:ext>
             </a:extLst>
           </p:cNvPr>
@@ -17193,7 +18574,7 @@
           <p:cNvPr id="10" name="TextBox 10">
             <a:extLst xmlns:a="http://schemas.openxmlformats.org/drawingml/2006/main">
               <a:ext uri="{FF2B5EF4-FFF2-40B4-BE49-F238E27FC236}">
-                <a16:creationId xmlns:a16="http://schemas.microsoft.com/office/drawing/2014/main" id="{150636B9-C948-4F9B-9FBF-A380640C7190}"/>
+                <a16:creationId xmlns:a16="http://schemas.microsoft.com/office/drawing/2014/main" id="{65621708-ADB0-490A-90A6-AAD8E84A2C4C}"/>
               </a:ext>
             </a:extLst>
           </p:cNvPr>
@@ -17354,7 +18735,7 @@
           <p:cNvPr id="11" name="TextBox 11">
             <a:extLst xmlns:a="http://schemas.openxmlformats.org/drawingml/2006/main">
               <a:ext uri="{FF2B5EF4-FFF2-40B4-BE49-F238E27FC236}">
-                <a16:creationId xmlns:a16="http://schemas.microsoft.com/office/drawing/2014/main" id="{71B8FF3F-7782-4C43-9A90-B9C9169C6104}"/>
+                <a16:creationId xmlns:a16="http://schemas.microsoft.com/office/drawing/2014/main" id="{95BEBFF7-684C-4322-867D-43EC92D03A09}"/>
               </a:ext>
             </a:extLst>
           </p:cNvPr>
@@ -17406,7 +18787,7 @@
           <p:cNvPr id="12" name="Freeform 12">
             <a:extLst xmlns:a="http://schemas.openxmlformats.org/drawingml/2006/main">
               <a:ext uri="{FF2B5EF4-FFF2-40B4-BE49-F238E27FC236}">
-                <a16:creationId xmlns:a16="http://schemas.microsoft.com/office/drawing/2014/main" id="{1625AD43-BA7A-40FA-9565-34C72747B771}"/>
+                <a16:creationId xmlns:a16="http://schemas.microsoft.com/office/drawing/2014/main" id="{BCFD8879-E331-4C79-BFA3-9A18C94C8366}"/>
               </a:ext>
             </a:extLst>
           </p:cNvPr>
@@ -17454,7 +18835,7 @@
           <p:cNvPr id="13" name="">
             <a:extLst xmlns:a="http://schemas.openxmlformats.org/drawingml/2006/main">
               <a:ext uri="{FF2B5EF4-FFF2-40B4-BE49-F238E27FC236}">
-                <a16:creationId xmlns:a16="http://schemas.microsoft.com/office/drawing/2014/main" id="{CDC0697F-292F-475F-AAEC-24681ED437F6}"/>
+                <a16:creationId xmlns:a16="http://schemas.microsoft.com/office/drawing/2014/main" id="{1F816827-B8B5-4BF1-893F-9FE94B2D4B39}"/>
               </a:ext>
             </a:extLst>
           </p:cNvPr>
@@ -17464,7 +18845,7 @@
           <p:nvPr/>
         </p:nvPicPr>
         <p:blipFill>
-          <a:blip xmlns:r="http://schemas.openxmlformats.org/officeDocument/2006/relationships" xmlns:a="http://schemas.openxmlformats.org/drawingml/2006/main" r:embed="R2956cd858dce4483"/>
+          <a:blip xmlns:r="http://schemas.openxmlformats.org/officeDocument/2006/relationships" xmlns:a="http://schemas.openxmlformats.org/drawingml/2006/main" r:embed="R2fab50d5cb2d4f85"/>
           <a:srcRect xmlns:a="http://schemas.openxmlformats.org/drawingml/2006/main" l="21025" t="21025" r="0" b="0"/>
           <a:stretch xmlns:a="http://schemas.openxmlformats.org/drawingml/2006/main"/>
         </p:blipFill>
@@ -17480,10 +18861,10 @@
       </p:pic>
       <p:sp>
         <p:nvSpPr>
-          <p:cNvPr id="14" name="內容_15_以服務門檻選處方">
-            <a:extLst xmlns:a="http://schemas.openxmlformats.org/drawingml/2006/main">
-              <a:ext uri="{FF2B5EF4-FFF2-40B4-BE49-F238E27FC236}">
-                <a16:creationId xmlns:a16="http://schemas.microsoft.com/office/drawing/2014/main" id="{3DD0E5F3-F290-4A53-9385-4134CD5C16BD}"/>
+          <p:cNvPr id="14" name="內容_15_主推P4 12m聯合控制">
+            <a:extLst xmlns:a="http://schemas.openxmlformats.org/drawingml/2006/main">
+              <a:ext uri="{FF2B5EF4-FFF2-40B4-BE49-F238E27FC236}">
+                <a16:creationId xmlns:a16="http://schemas.microsoft.com/office/drawing/2014/main" id="{4B72766E-8679-4B77-9398-222D4F40C3D8}"/>
               </a:ext>
             </a:extLst>
           </p:cNvPr>
@@ -17631,17 +19012,17 @@
                 <a:ea typeface="Microsoft JhengHei"/>
                 <a:cs typeface="Microsoft JhengHei"/>
               </a:rPr>
-              <a:t>以服務門檻選處方</a:t>
+              <a:t>主推P4 12m聯合控制</a:t>
             </a:r>
           </a:p>
         </p:txBody>
       </p:sp>
       <p:sp>
         <p:nvSpPr>
-          <p:cNvPr id="15" name="內容_15_12m降低阻塞；直接成本不足">
-            <a:extLst xmlns:a="http://schemas.openxmlformats.org/drawingml/2006/main">
-              <a:ext uri="{FF2B5EF4-FFF2-40B4-BE49-F238E27FC236}">
-                <a16:creationId xmlns:a16="http://schemas.microsoft.com/office/drawing/2014/main" id="{877B7A15-4135-4A92-A181-2C35CF2D411C}"/>
+          <p:cNvPr id="15" name="內容_15_S1有強制服務要求才採用；直">
+            <a:extLst xmlns:a="http://schemas.openxmlformats.org/drawingml/2006/main">
+              <a:ext uri="{FF2B5EF4-FFF2-40B4-BE49-F238E27FC236}">
+                <a16:creationId xmlns:a16="http://schemas.microsoft.com/office/drawing/2014/main" id="{BB2CF7CB-5E62-43CC-B35A-F94A5AA9C9D6}"/>
               </a:ext>
             </a:extLst>
           </p:cNvPr>
@@ -17789,17 +19170,17 @@
                 <a:ea typeface="Microsoft JhengHei"/>
                 <a:cs typeface="Microsoft JhengHei"/>
               </a:rPr>
-              <a:t>12m降低阻塞；直接成本不足以支持回收</a:t>
+              <a:t>S1有強制服務要求才採用；直接ROI仍為負</a:t>
             </a:r>
           </a:p>
         </p:txBody>
       </p:sp>
       <p:sp>
         <p:nvSpPr>
-          <p:cNvPr id="16" name="內容_15_保留失敗結果、追加精度驗證，">
-            <a:extLst xmlns:a="http://schemas.openxmlformats.org/drawingml/2006/main">
-              <a:ext uri="{FF2B5EF4-FFF2-40B4-BE49-F238E27FC236}">
-                <a16:creationId xmlns:a16="http://schemas.microsoft.com/office/drawing/2014/main" id="{E2326479-3E4B-4122-AA0F-DF8CE54C46A9}"/>
+          <p:cNvPr id="16" name="內容_15_P2單獨8m不足；原均值最低">
+            <a:extLst xmlns:a="http://schemas.openxmlformats.org/drawingml/2006/main">
+              <a:ext uri="{FF2B5EF4-FFF2-40B4-BE49-F238E27FC236}">
+                <a16:creationId xmlns:a16="http://schemas.microsoft.com/office/drawing/2014/main" id="{B977135F-2521-43DF-9214-75EB62DEB7DA}"/>
               </a:ext>
             </a:extLst>
           </p:cNvPr>
@@ -17947,7 +19328,7 @@
                 <a:ea typeface="Microsoft JhengHei"/>
                 <a:cs typeface="Microsoft JhengHei"/>
               </a:rPr>
-              <a:t>保留失敗結果、追加精度驗證，讓每項結論能追溯</a:t>
+              <a:t>P2單獨8m不足；原均值最低8m留作低預算備選</a:t>
             </a:r>
           </a:p>
         </p:txBody>
@@ -17957,7 +19338,7 @@
           <p:cNvPr id="17" name="內容_15_Q&amp;A　原生模型、資料庫、逐">
             <a:extLst xmlns:a="http://schemas.openxmlformats.org/drawingml/2006/main">
               <a:ext uri="{FF2B5EF4-FFF2-40B4-BE49-F238E27FC236}">
-                <a16:creationId xmlns:a16="http://schemas.microsoft.com/office/drawing/2014/main" id="{07873BD9-BB9D-4EB9-A7D7-45408C1E9366}"/>
+                <a16:creationId xmlns:a16="http://schemas.microsoft.com/office/drawing/2014/main" id="{5B25850E-18DB-47C6-AEFC-4DAEEA07FD4E}"/>
               </a:ext>
             </a:extLst>
           </p:cNvPr>
@@ -18113,7 +19494,7 @@
     </p:spTree>
     <p:extLst>
       <p:ext uri="{BB962C8B-B14F-4D97-AF65-F5344CB8AC3E}">
-        <p14:creationId xmlns:p14="http://schemas.microsoft.com/office/powerpoint/2010/main" val="416535373"/>
+        <p14:creationId xmlns:p14="http://schemas.microsoft.com/office/powerpoint/2010/main" val="1653096613"/>
       </p:ext>
     </p:extLst>
   </p:cSld>
@@ -18137,7 +19518,7 @@
           <p:cNvPr id="2" name="Freeform 2">
             <a:extLst xmlns:a="http://schemas.openxmlformats.org/drawingml/2006/main">
               <a:ext uri="{FF2B5EF4-FFF2-40B4-BE49-F238E27FC236}">
-                <a16:creationId xmlns:a16="http://schemas.microsoft.com/office/drawing/2014/main" id="{B768F0B2-9F10-49CD-847E-FDF94ED53903}"/>
+                <a16:creationId xmlns:a16="http://schemas.microsoft.com/office/drawing/2014/main" id="{390BCA13-AC99-45A2-8E2E-6790225BDA4F}"/>
               </a:ext>
             </a:extLst>
           </p:cNvPr>
@@ -18175,7 +19556,7 @@
             </a:pathLst>
           </a:custGeom>
           <a:blipFill xmlns:a="http://schemas.openxmlformats.org/drawingml/2006/main">
-            <a:blip xmlns:r="http://schemas.openxmlformats.org/officeDocument/2006/relationships" r:embed="R26079a75cd8b43f8"/>
+            <a:blip xmlns:r="http://schemas.openxmlformats.org/officeDocument/2006/relationships" r:embed="R6d58577e4d8145c7"/>
             <a:stretch>
               <a:fillRect l="-35258" t="-5555" r="-24931" b="-72434"/>
             </a:stretch>
@@ -18187,7 +19568,7 @@
           <p:cNvPr id="4" name="Freeform 4">
             <a:extLst xmlns:a="http://schemas.openxmlformats.org/drawingml/2006/main">
               <a:ext uri="{FF2B5EF4-FFF2-40B4-BE49-F238E27FC236}">
-                <a16:creationId xmlns:a16="http://schemas.microsoft.com/office/drawing/2014/main" id="{F8CBD460-8F39-4B3B-89AA-B7E9273CAB49}"/>
+                <a16:creationId xmlns:a16="http://schemas.microsoft.com/office/drawing/2014/main" id="{BEBC794A-20A8-40C9-9821-BE3E204148CC}"/>
               </a:ext>
             </a:extLst>
           </p:cNvPr>
@@ -18261,7 +19642,7 @@
           <p:cNvPr id="5" name="TextBox 5">
             <a:extLst xmlns:a="http://schemas.openxmlformats.org/drawingml/2006/main">
               <a:ext uri="{FF2B5EF4-FFF2-40B4-BE49-F238E27FC236}">
-                <a16:creationId xmlns:a16="http://schemas.microsoft.com/office/drawing/2014/main" id="{573B87AB-7D9E-469A-AF73-AC83D36B4BFE}"/>
+                <a16:creationId xmlns:a16="http://schemas.microsoft.com/office/drawing/2014/main" id="{E1E45F60-35C8-4DA9-8280-7AE045E7F377}"/>
               </a:ext>
             </a:extLst>
           </p:cNvPr>
@@ -18297,7 +19678,7 @@
           <p:cNvPr id="6" name="Freeform 6">
             <a:extLst xmlns:a="http://schemas.openxmlformats.org/drawingml/2006/main">
               <a:ext uri="{FF2B5EF4-FFF2-40B4-BE49-F238E27FC236}">
-                <a16:creationId xmlns:a16="http://schemas.microsoft.com/office/drawing/2014/main" id="{3EF8B70F-10AF-4C31-AE1E-3ADADED49199}"/>
+                <a16:creationId xmlns:a16="http://schemas.microsoft.com/office/drawing/2014/main" id="{3C05442A-11FF-4F3C-929D-58EC111BB488}"/>
               </a:ext>
             </a:extLst>
           </p:cNvPr>
@@ -18345,7 +19726,7 @@
           <p:cNvPr id="7" name="Freeform 7">
             <a:extLst xmlns:a="http://schemas.openxmlformats.org/drawingml/2006/main">
               <a:ext uri="{FF2B5EF4-FFF2-40B4-BE49-F238E27FC236}">
-                <a16:creationId xmlns:a16="http://schemas.microsoft.com/office/drawing/2014/main" id="{B0EF2219-AEC9-4109-8DF7-C0AD10E4913E}"/>
+                <a16:creationId xmlns:a16="http://schemas.microsoft.com/office/drawing/2014/main" id="{B04FFC3F-EA66-4EF1-9B1F-1FA59B6AF0DF}"/>
               </a:ext>
             </a:extLst>
           </p:cNvPr>
@@ -18383,10 +19764,10 @@
             </a:pathLst>
           </a:custGeom>
           <a:blipFill xmlns:a="http://schemas.openxmlformats.org/drawingml/2006/main">
-            <a:blip xmlns:r="http://schemas.openxmlformats.org/officeDocument/2006/relationships" r:embed="R40619c62bf6542d8">
+            <a:blip xmlns:r="http://schemas.openxmlformats.org/officeDocument/2006/relationships" r:embed="Rf4c4938bd930482e">
               <a:extLst>
                 <a:ext uri="{96DAC541-7B7A-43D3-8B79-37D633B846F1}">
-                  <asvg:svgBlip xmlns:asvg="http://schemas.microsoft.com/office/drawing/2016/SVG/main" r:embed="Rb39102d3535c43d8"/>
+                  <asvg:svgBlip xmlns:asvg="http://schemas.microsoft.com/office/drawing/2016/SVG/main" r:embed="Rd950ea4e346d49b3"/>
                 </a:ext>
               </a:extLst>
             </a:blip>
@@ -18401,7 +19782,7 @@
           <p:cNvPr id="8" name="Freeform 8">
             <a:extLst xmlns:a="http://schemas.openxmlformats.org/drawingml/2006/main">
               <a:ext uri="{FF2B5EF4-FFF2-40B4-BE49-F238E27FC236}">
-                <a16:creationId xmlns:a16="http://schemas.microsoft.com/office/drawing/2014/main" id="{086B57BA-A473-4A8F-B878-C3723E44ACAE}"/>
+                <a16:creationId xmlns:a16="http://schemas.microsoft.com/office/drawing/2014/main" id="{7B42A5E4-0788-4531-BC98-5ADF1B084785}"/>
               </a:ext>
             </a:extLst>
           </p:cNvPr>
@@ -18439,10 +19820,10 @@
             </a:pathLst>
           </a:custGeom>
           <a:blipFill xmlns:a="http://schemas.openxmlformats.org/drawingml/2006/main">
-            <a:blip xmlns:r="http://schemas.openxmlformats.org/officeDocument/2006/relationships" r:embed="R40619c62bf6542d8">
+            <a:blip xmlns:r="http://schemas.openxmlformats.org/officeDocument/2006/relationships" r:embed="Rf4c4938bd930482e">
               <a:extLst>
                 <a:ext uri="{96DAC541-7B7A-43D3-8B79-37D633B846F1}">
-                  <asvg:svgBlip xmlns:asvg="http://schemas.microsoft.com/office/drawing/2016/SVG/main" r:embed="Rb39102d3535c43d8"/>
+                  <asvg:svgBlip xmlns:asvg="http://schemas.microsoft.com/office/drawing/2016/SVG/main" r:embed="Rd950ea4e346d49b3"/>
                 </a:ext>
               </a:extLst>
             </a:blip>
@@ -18457,7 +19838,7 @@
           <p:cNvPr id="9" name="Freeform 9">
             <a:extLst xmlns:a="http://schemas.openxmlformats.org/drawingml/2006/main">
               <a:ext uri="{FF2B5EF4-FFF2-40B4-BE49-F238E27FC236}">
-                <a16:creationId xmlns:a16="http://schemas.microsoft.com/office/drawing/2014/main" id="{2222AA98-1495-42C3-8F01-B41C6BBA87C3}"/>
+                <a16:creationId xmlns:a16="http://schemas.microsoft.com/office/drawing/2014/main" id="{506EAC32-E610-4E15-862E-9D893EC6FDB5}"/>
               </a:ext>
             </a:extLst>
           </p:cNvPr>
@@ -18505,7 +19886,7 @@
           <p:cNvPr id="10" name="Freeform 10">
             <a:extLst xmlns:a="http://schemas.openxmlformats.org/drawingml/2006/main">
               <a:ext uri="{FF2B5EF4-FFF2-40B4-BE49-F238E27FC236}">
-                <a16:creationId xmlns:a16="http://schemas.microsoft.com/office/drawing/2014/main" id="{531A13EA-35F3-4832-9F77-86891B741D17}"/>
+                <a16:creationId xmlns:a16="http://schemas.microsoft.com/office/drawing/2014/main" id="{9F27882F-7488-48B8-B679-BAED14E14C6B}"/>
               </a:ext>
             </a:extLst>
           </p:cNvPr>
@@ -18543,7 +19924,7 @@
             </a:pathLst>
           </a:custGeom>
           <a:blipFill xmlns:a="http://schemas.openxmlformats.org/drawingml/2006/main">
-            <a:blip xmlns:r="http://schemas.openxmlformats.org/officeDocument/2006/relationships" r:embed="R2da29c1f09e94dfe"/>
+            <a:blip xmlns:r="http://schemas.openxmlformats.org/officeDocument/2006/relationships" r:embed="Ra3c1474046f743e3"/>
             <a:stretch>
               <a:fillRect l="0" t="0" r="0" b="0"/>
             </a:stretch>
@@ -18555,7 +19936,7 @@
           <p:cNvPr id="11" name="TextBox 11">
             <a:extLst xmlns:a="http://schemas.openxmlformats.org/drawingml/2006/main">
               <a:ext uri="{FF2B5EF4-FFF2-40B4-BE49-F238E27FC236}">
-                <a16:creationId xmlns:a16="http://schemas.microsoft.com/office/drawing/2014/main" id="{75A67D2B-5487-412D-9C31-7B12F5A03AE8}"/>
+                <a16:creationId xmlns:a16="http://schemas.microsoft.com/office/drawing/2014/main" id="{132DF2EF-051C-4D41-8A8E-ECAC6B6D0213}"/>
               </a:ext>
             </a:extLst>
           </p:cNvPr>
@@ -18716,7 +20097,7 @@
           <p:cNvPr id="12" name="TextBox 12">
             <a:extLst xmlns:a="http://schemas.openxmlformats.org/drawingml/2006/main">
               <a:ext uri="{FF2B5EF4-FFF2-40B4-BE49-F238E27FC236}">
-                <a16:creationId xmlns:a16="http://schemas.microsoft.com/office/drawing/2014/main" id="{72A63377-BFF7-43BB-8A44-2C3645EED977}"/>
+                <a16:creationId xmlns:a16="http://schemas.microsoft.com/office/drawing/2014/main" id="{2A855F12-9D87-449D-8D13-607D9FD0B0D2}"/>
               </a:ext>
             </a:extLst>
           </p:cNvPr>
@@ -18768,7 +20149,7 @@
           <p:cNvPr id="13" name="TextBox 13">
             <a:extLst xmlns:a="http://schemas.openxmlformats.org/drawingml/2006/main">
               <a:ext uri="{FF2B5EF4-FFF2-40B4-BE49-F238E27FC236}">
-                <a16:creationId xmlns:a16="http://schemas.microsoft.com/office/drawing/2014/main" id="{03FB8699-AFAC-4273-9969-2196AEBC4196}"/>
+                <a16:creationId xmlns:a16="http://schemas.microsoft.com/office/drawing/2014/main" id="{22BABCE9-85F3-4676-BA9E-4EBFF68CB794}"/>
               </a:ext>
             </a:extLst>
           </p:cNvPr>
@@ -18820,7 +20201,7 @@
           <p:cNvPr id="14" name="TextBox 14">
             <a:extLst xmlns:a="http://schemas.openxmlformats.org/drawingml/2006/main">
               <a:ext uri="{FF2B5EF4-FFF2-40B4-BE49-F238E27FC236}">
-                <a16:creationId xmlns:a16="http://schemas.microsoft.com/office/drawing/2014/main" id="{AEA35812-8E40-48F8-8577-DB2E657BEEDC}"/>
+                <a16:creationId xmlns:a16="http://schemas.microsoft.com/office/drawing/2014/main" id="{C236E033-2069-411E-8792-4B8FE6E916F0}"/>
               </a:ext>
             </a:extLst>
           </p:cNvPr>
@@ -18874,7 +20255,7 @@
           <p:cNvPr id="15" name="內容_2_商業洞察">
             <a:extLst xmlns:a="http://schemas.openxmlformats.org/drawingml/2006/main">
               <a:ext uri="{FF2B5EF4-FFF2-40B4-BE49-F238E27FC236}">
-                <a16:creationId xmlns:a16="http://schemas.microsoft.com/office/drawing/2014/main" id="{D0FCA70F-1AD9-40FA-881C-31E13D796A07}"/>
+                <a16:creationId xmlns:a16="http://schemas.microsoft.com/office/drawing/2014/main" id="{60886C27-E957-45B2-AD9F-F605809895F2}"/>
               </a:ext>
             </a:extLst>
           </p:cNvPr>
@@ -19032,7 +20413,7 @@
           <p:cNvPr id="16" name="內容_2_退貨商品與空箱互相牽制">
             <a:extLst xmlns:a="http://schemas.openxmlformats.org/drawingml/2006/main">
               <a:ext uri="{FF2B5EF4-FFF2-40B4-BE49-F238E27FC236}">
-                <a16:creationId xmlns:a16="http://schemas.microsoft.com/office/drawing/2014/main" id="{035D9D0F-A0CB-4523-9D7B-32BF2910482D}"/>
+                <a16:creationId xmlns:a16="http://schemas.microsoft.com/office/drawing/2014/main" id="{67EBBE65-6116-4B8C-BD92-D20C8A6E0335}"/>
               </a:ext>
             </a:extLst>
           </p:cNvPr>
@@ -19190,7 +20571,7 @@
           <p:cNvPr id="17" name="內容_2_30%–40%">
             <a:extLst xmlns:a="http://schemas.openxmlformats.org/drawingml/2006/main">
               <a:ext uri="{FF2B5EF4-FFF2-40B4-BE49-F238E27FC236}">
-                <a16:creationId xmlns:a16="http://schemas.microsoft.com/office/drawing/2014/main" id="{A0E3DDD1-D727-4751-97E2-B93D4633A3AD}"/>
+                <a16:creationId xmlns:a16="http://schemas.microsoft.com/office/drawing/2014/main" id="{43F0ECCA-F7A7-4E34-841E-F0E4822F4961}"/>
               </a:ext>
             </a:extLst>
           </p:cNvPr>
@@ -19348,7 +20729,7 @@
           <p:cNvPr id="18" name="內容_2_課程設定的退貨率">
             <a:extLst xmlns:a="http://schemas.openxmlformats.org/drawingml/2006/main">
               <a:ext uri="{FF2B5EF4-FFF2-40B4-BE49-F238E27FC236}">
-                <a16:creationId xmlns:a16="http://schemas.microsoft.com/office/drawing/2014/main" id="{B200D02F-A92E-49AA-96C6-C09885DB5FF5}"/>
+                <a16:creationId xmlns:a16="http://schemas.microsoft.com/office/drawing/2014/main" id="{41B3B411-B06D-4A03-9417-F52B8772A178}"/>
               </a:ext>
             </a:extLst>
           </p:cNvPr>
@@ -19503,10 +20884,10 @@
       </p:sp>
       <p:sp>
         <p:nvSpPr>
-          <p:cNvPr id="19" name="內容_2_清洗停機或尖峰到達，&#10;空箱回">
-            <a:extLst xmlns:a="http://schemas.openxmlformats.org/drawingml/2006/main">
-              <a:ext uri="{FF2B5EF4-FFF2-40B4-BE49-F238E27FC236}">
-                <a16:creationId xmlns:a16="http://schemas.microsoft.com/office/drawing/2014/main" id="{FFA26417-2C66-4060-80AC-DE10B3F1EE05}"/>
+          <p:cNvPr id="19" name="內容_2_短波尖峰：3波 × 20分鐘">
+            <a:extLst xmlns:a="http://schemas.openxmlformats.org/drawingml/2006/main">
+              <a:ext uri="{FF2B5EF4-FFF2-40B4-BE49-F238E27FC236}">
+                <a16:creationId xmlns:a16="http://schemas.microsoft.com/office/drawing/2014/main" id="{4574CF85-266D-47B4-8075-5EE708E97825}"/>
               </a:ext>
             </a:extLst>
           </p:cNvPr>
@@ -19654,7 +21035,7 @@
                 <a:ea typeface="Microsoft JhengHei"/>
                 <a:cs typeface="Microsoft JhengHei"/>
               </a:rPr>
-              <a:t>清洗停機或尖峰到達，</a:t>
+              <a:t>短波尖峰：3波 × 20分鐘。</a:t>
             </a:r>
           </a:p>
           <a:p xmlns:a="http://schemas.openxmlformats.org/drawingml/2006/main">
@@ -19677,7 +21058,7 @@
                 <a:ea typeface="Microsoft JhengHei"/>
                 <a:cs typeface="Microsoft JhengHei"/>
               </a:rPr>
-              <a:t>空箱回堵到拆包端，商品等待QA。</a:t>
+              <a:t>210/h是60/h的3.5倍，增加250%。</a:t>
             </a:r>
           </a:p>
           <a:p xmlns:a="http://schemas.openxmlformats.org/drawingml/2006/main">
@@ -19700,17 +21081,17 @@
                 <a:ea typeface="Microsoft JhengHei"/>
                 <a:cs typeface="Microsoft JhengHei"/>
               </a:rPr>
-              <a:t>Q-Time從外部到達起算，涵蓋節流等待。</a:t>
+              <a:t>六日總量約1.43倍，不是全日超載。</a:t>
             </a:r>
           </a:p>
         </p:txBody>
       </p:sp>
       <p:sp>
         <p:nvSpPr>
-          <p:cNvPr id="20" name="內容_2_商業目的：降低履約延誤，同時">
-            <a:extLst xmlns:a="http://schemas.openxmlformats.org/drawingml/2006/main">
-              <a:ext uri="{FF2B5EF4-FFF2-40B4-BE49-F238E27FC236}">
-                <a16:creationId xmlns:a16="http://schemas.microsoft.com/office/drawing/2014/main" id="{ECEF2DD7-52DE-4F26-8FEB-D70FEEC0FCAD}"/>
+          <p:cNvPr id="20" name="內容_2_主DOE超24h及貶值損失皆">
+            <a:extLst xmlns:a="http://schemas.openxmlformats.org/drawingml/2006/main">
+              <a:ext uri="{FF2B5EF4-FFF2-40B4-BE49-F238E27FC236}">
+                <a16:creationId xmlns:a16="http://schemas.microsoft.com/office/drawing/2014/main" id="{01B5CE09-A94E-41BA-A685-245ABFAAE9F9}"/>
               </a:ext>
             </a:extLst>
           </p:cNvPr>
@@ -19858,7 +21239,7 @@
                 <a:ea typeface="Microsoft JhengHei"/>
                 <a:cs typeface="Microsoft JhengHei"/>
               </a:rPr>
-              <a:t>商業目的：降低履約延誤，同時檢查減碳、包材全成本與投資回收。</a:t>
+              <a:t>主DOE超24h及貶值損失皆0；持續300/h七日另有11925件超24h，不混入主DOE收益。</a:t>
             </a:r>
           </a:p>
         </p:txBody>
@@ -19866,7 +21247,7 @@
     </p:spTree>
     <p:extLst>
       <p:ext uri="{BB962C8B-B14F-4D97-AF65-F5344CB8AC3E}">
-        <p14:creationId xmlns:p14="http://schemas.microsoft.com/office/powerpoint/2010/main" val="111057369"/>
+        <p14:creationId xmlns:p14="http://schemas.microsoft.com/office/powerpoint/2010/main" val="1386835514"/>
       </p:ext>
     </p:extLst>
   </p:cSld>
@@ -19890,7 +21271,7 @@
           <p:cNvPr id="2" name="Freeform 2">
             <a:extLst xmlns:a="http://schemas.openxmlformats.org/drawingml/2006/main">
               <a:ext uri="{FF2B5EF4-FFF2-40B4-BE49-F238E27FC236}">
-                <a16:creationId xmlns:a16="http://schemas.microsoft.com/office/drawing/2014/main" id="{C6B80FCB-5967-4DD7-BAE7-94A67A3534EA}"/>
+                <a16:creationId xmlns:a16="http://schemas.microsoft.com/office/drawing/2014/main" id="{AF5F12B7-5CA2-4312-8617-779950F3C551}"/>
               </a:ext>
             </a:extLst>
           </p:cNvPr>
@@ -19928,7 +21309,7 @@
             </a:pathLst>
           </a:custGeom>
           <a:blipFill xmlns:a="http://schemas.openxmlformats.org/drawingml/2006/main">
-            <a:blip xmlns:r="http://schemas.openxmlformats.org/officeDocument/2006/relationships" r:embed="Redc8227730fd472f"/>
+            <a:blip xmlns:r="http://schemas.openxmlformats.org/officeDocument/2006/relationships" r:embed="Rad6290ca0a55487d"/>
             <a:stretch>
               <a:fillRect l="-35258" t="-5555" r="-24931" b="-72434"/>
             </a:stretch>
@@ -19940,7 +21321,7 @@
           <p:cNvPr id="4" name="Freeform 4">
             <a:extLst xmlns:a="http://schemas.openxmlformats.org/drawingml/2006/main">
               <a:ext uri="{FF2B5EF4-FFF2-40B4-BE49-F238E27FC236}">
-                <a16:creationId xmlns:a16="http://schemas.microsoft.com/office/drawing/2014/main" id="{75BF958D-065D-497C-9C86-89E68CD5F2EE}"/>
+                <a16:creationId xmlns:a16="http://schemas.microsoft.com/office/drawing/2014/main" id="{F0E53848-7DAE-40A8-BC07-8C7418A31F37}"/>
               </a:ext>
             </a:extLst>
           </p:cNvPr>
@@ -20014,7 +21395,7 @@
           <p:cNvPr id="5" name="TextBox 5">
             <a:extLst xmlns:a="http://schemas.openxmlformats.org/drawingml/2006/main">
               <a:ext uri="{FF2B5EF4-FFF2-40B4-BE49-F238E27FC236}">
-                <a16:creationId xmlns:a16="http://schemas.microsoft.com/office/drawing/2014/main" id="{BF63B4A6-A6B3-479B-A101-1B3E2C9DAE5F}"/>
+                <a16:creationId xmlns:a16="http://schemas.microsoft.com/office/drawing/2014/main" id="{152BF0CA-C725-4E0A-AFD1-C33755640203}"/>
               </a:ext>
             </a:extLst>
           </p:cNvPr>
@@ -20050,7 +21431,7 @@
           <p:cNvPr id="6" name="Freeform 6">
             <a:extLst xmlns:a="http://schemas.openxmlformats.org/drawingml/2006/main">
               <a:ext uri="{FF2B5EF4-FFF2-40B4-BE49-F238E27FC236}">
-                <a16:creationId xmlns:a16="http://schemas.microsoft.com/office/drawing/2014/main" id="{EEA763E9-12F0-40DF-9509-BEF0B571F230}"/>
+                <a16:creationId xmlns:a16="http://schemas.microsoft.com/office/drawing/2014/main" id="{C3660F00-9704-46AF-AE62-C1CDFEC40709}"/>
               </a:ext>
             </a:extLst>
           </p:cNvPr>
@@ -20098,7 +21479,7 @@
           <p:cNvPr id="7" name="Freeform 7">
             <a:extLst xmlns:a="http://schemas.openxmlformats.org/drawingml/2006/main">
               <a:ext uri="{FF2B5EF4-FFF2-40B4-BE49-F238E27FC236}">
-                <a16:creationId xmlns:a16="http://schemas.microsoft.com/office/drawing/2014/main" id="{C3C4A094-E970-48CE-A852-8CD84A82BC1B}"/>
+                <a16:creationId xmlns:a16="http://schemas.microsoft.com/office/drawing/2014/main" id="{E950E8C4-D71A-4A38-886B-61CEE3A65FBE}"/>
               </a:ext>
             </a:extLst>
           </p:cNvPr>
@@ -20136,10 +21517,10 @@
             </a:pathLst>
           </a:custGeom>
           <a:blipFill xmlns:a="http://schemas.openxmlformats.org/drawingml/2006/main">
-            <a:blip xmlns:r="http://schemas.openxmlformats.org/officeDocument/2006/relationships" r:embed="R3f287057ba204378">
+            <a:blip xmlns:r="http://schemas.openxmlformats.org/officeDocument/2006/relationships" r:embed="Ra32740683c1a4ed1">
               <a:extLst>
                 <a:ext uri="{96DAC541-7B7A-43D3-8B79-37D633B846F1}">
-                  <asvg:svgBlip xmlns:asvg="http://schemas.microsoft.com/office/drawing/2016/SVG/main" r:embed="R43de1af42f75473a"/>
+                  <asvg:svgBlip xmlns:asvg="http://schemas.microsoft.com/office/drawing/2016/SVG/main" r:embed="Rc1bb5b7a8b734f65"/>
                 </a:ext>
               </a:extLst>
             </a:blip>
@@ -20154,7 +21535,7 @@
           <p:cNvPr id="8" name="Freeform 8">
             <a:extLst xmlns:a="http://schemas.openxmlformats.org/drawingml/2006/main">
               <a:ext uri="{FF2B5EF4-FFF2-40B4-BE49-F238E27FC236}">
-                <a16:creationId xmlns:a16="http://schemas.microsoft.com/office/drawing/2014/main" id="{9CBC2C10-305D-48E9-9236-EE34937C1DD9}"/>
+                <a16:creationId xmlns:a16="http://schemas.microsoft.com/office/drawing/2014/main" id="{50CA9B1B-C715-426E-BCB1-45BEA99790DC}"/>
               </a:ext>
             </a:extLst>
           </p:cNvPr>
@@ -20192,10 +21573,10 @@
             </a:pathLst>
           </a:custGeom>
           <a:blipFill xmlns:a="http://schemas.openxmlformats.org/drawingml/2006/main">
-            <a:blip xmlns:r="http://schemas.openxmlformats.org/officeDocument/2006/relationships" r:embed="R3f287057ba204378">
+            <a:blip xmlns:r="http://schemas.openxmlformats.org/officeDocument/2006/relationships" r:embed="Ra32740683c1a4ed1">
               <a:extLst>
                 <a:ext uri="{96DAC541-7B7A-43D3-8B79-37D633B846F1}">
-                  <asvg:svgBlip xmlns:asvg="http://schemas.microsoft.com/office/drawing/2016/SVG/main" r:embed="R43de1af42f75473a"/>
+                  <asvg:svgBlip xmlns:asvg="http://schemas.microsoft.com/office/drawing/2016/SVG/main" r:embed="Rc1bb5b7a8b734f65"/>
                 </a:ext>
               </a:extLst>
             </a:blip>
@@ -20210,7 +21591,7 @@
           <p:cNvPr id="9" name="TextBox 9">
             <a:extLst xmlns:a="http://schemas.openxmlformats.org/drawingml/2006/main">
               <a:ext uri="{FF2B5EF4-FFF2-40B4-BE49-F238E27FC236}">
-                <a16:creationId xmlns:a16="http://schemas.microsoft.com/office/drawing/2014/main" id="{F7308B09-F384-48DC-BFA8-EFAB619D2FCF}"/>
+                <a16:creationId xmlns:a16="http://schemas.microsoft.com/office/drawing/2014/main" id="{445650FF-48DA-4E1B-893C-42BCAC9B160B}"/>
               </a:ext>
             </a:extLst>
           </p:cNvPr>
@@ -20371,7 +21752,7 @@
           <p:cNvPr id="10" name="TextBox 10">
             <a:extLst xmlns:a="http://schemas.openxmlformats.org/drawingml/2006/main">
               <a:ext uri="{FF2B5EF4-FFF2-40B4-BE49-F238E27FC236}">
-                <a16:creationId xmlns:a16="http://schemas.microsoft.com/office/drawing/2014/main" id="{70676BD2-1DC6-443B-AD3E-97740DBD048E}"/>
+                <a16:creationId xmlns:a16="http://schemas.microsoft.com/office/drawing/2014/main" id="{7C27D11C-61E8-4F0E-AA00-A56A54796A3D}"/>
               </a:ext>
             </a:extLst>
           </p:cNvPr>
@@ -20423,7 +21804,7 @@
           <p:cNvPr id="11" name="TextBox 11">
             <a:extLst xmlns:a="http://schemas.openxmlformats.org/drawingml/2006/main">
               <a:ext uri="{FF2B5EF4-FFF2-40B4-BE49-F238E27FC236}">
-                <a16:creationId xmlns:a16="http://schemas.microsoft.com/office/drawing/2014/main" id="{181888C5-5E29-4B03-AD64-6970AFBEA5C3}"/>
+                <a16:creationId xmlns:a16="http://schemas.microsoft.com/office/drawing/2014/main" id="{BC64DD17-84A3-4E29-8FE0-74E5BCD9335D}"/>
               </a:ext>
             </a:extLst>
           </p:cNvPr>
@@ -20475,7 +21856,7 @@
           <p:cNvPr id="12" name="TextBox 12">
             <a:extLst xmlns:a="http://schemas.openxmlformats.org/drawingml/2006/main">
               <a:ext uri="{FF2B5EF4-FFF2-40B4-BE49-F238E27FC236}">
-                <a16:creationId xmlns:a16="http://schemas.microsoft.com/office/drawing/2014/main" id="{E2F53345-89DE-4201-81E2-9DF7E01C5178}"/>
+                <a16:creationId xmlns:a16="http://schemas.microsoft.com/office/drawing/2014/main" id="{9FEB0A02-3229-4417-85DF-24C6D2D9355A}"/>
               </a:ext>
             </a:extLst>
           </p:cNvPr>
@@ -20527,7 +21908,7 @@
           <p:cNvPr id="13" name="Freeform 13">
             <a:extLst xmlns:a="http://schemas.openxmlformats.org/drawingml/2006/main">
               <a:ext uri="{FF2B5EF4-FFF2-40B4-BE49-F238E27FC236}">
-                <a16:creationId xmlns:a16="http://schemas.microsoft.com/office/drawing/2014/main" id="{08CEBC89-4CC4-4000-9C39-2E9016D3C05A}"/>
+                <a16:creationId xmlns:a16="http://schemas.microsoft.com/office/drawing/2014/main" id="{DE84B3A4-8419-4AD3-B565-F75FD78F666E}"/>
               </a:ext>
             </a:extLst>
           </p:cNvPr>
@@ -20565,7 +21946,7 @@
             </a:pathLst>
           </a:custGeom>
           <a:blipFill xmlns:a="http://schemas.openxmlformats.org/drawingml/2006/main">
-            <a:blip xmlns:r="http://schemas.openxmlformats.org/officeDocument/2006/relationships" r:embed="R1831f5c31c094cee"/>
+            <a:blip xmlns:r="http://schemas.openxmlformats.org/officeDocument/2006/relationships" r:embed="R027e70e057f64ac5"/>
             <a:stretch>
               <a:fillRect l="0" t="0" r="0" b="0"/>
             </a:stretch>
@@ -20577,7 +21958,7 @@
           <p:cNvPr id="14" name="TextBox 14">
             <a:extLst xmlns:a="http://schemas.openxmlformats.org/drawingml/2006/main">
               <a:ext uri="{FF2B5EF4-FFF2-40B4-BE49-F238E27FC236}">
-                <a16:creationId xmlns:a16="http://schemas.microsoft.com/office/drawing/2014/main" id="{B255A049-7F43-4352-8492-9302C2E37432}"/>
+                <a16:creationId xmlns:a16="http://schemas.microsoft.com/office/drawing/2014/main" id="{94921289-DF3E-43DE-B633-DD79A4E5409B}"/>
               </a:ext>
             </a:extLst>
           </p:cNvPr>
@@ -20631,7 +22012,7 @@
           <p:cNvPr id="15" name="內容_3_目標 KPI">
             <a:extLst xmlns:a="http://schemas.openxmlformats.org/drawingml/2006/main">
               <a:ext uri="{FF2B5EF4-FFF2-40B4-BE49-F238E27FC236}">
-                <a16:creationId xmlns:a16="http://schemas.microsoft.com/office/drawing/2014/main" id="{7CC990A5-0BBD-4F82-86BB-DD213A774AF3}"/>
+                <a16:creationId xmlns:a16="http://schemas.microsoft.com/office/drawing/2014/main" id="{C366B6E6-AF7E-4C38-8F49-DC2F909B7E83}"/>
               </a:ext>
             </a:extLst>
           </p:cNvPr>
@@ -20789,7 +22170,7 @@
           <p:cNvPr id="16" name="內容_3_課程目標逐項驗證">
             <a:extLst xmlns:a="http://schemas.openxmlformats.org/drawingml/2006/main">
               <a:ext uri="{FF2B5EF4-FFF2-40B4-BE49-F238E27FC236}">
-                <a16:creationId xmlns:a16="http://schemas.microsoft.com/office/drawing/2014/main" id="{5CBD33A6-19CD-4668-9970-8575DA5DDC5A}"/>
+                <a16:creationId xmlns:a16="http://schemas.microsoft.com/office/drawing/2014/main" id="{6F99BF63-A16C-45A4-A999-6F25CA322328}"/>
               </a:ext>
             </a:extLst>
           </p:cNvPr>
@@ -20947,7 +22328,7 @@
           <p:cNvPr id="17" name="">
             <a:extLst xmlns:a="http://schemas.openxmlformats.org/drawingml/2006/main">
               <a:ext uri="{FF2B5EF4-FFF2-40B4-BE49-F238E27FC236}">
-                <a16:creationId xmlns:a16="http://schemas.microsoft.com/office/drawing/2014/main" id="{69279A01-F69E-4BC5-B720-BC2C9F5DA1F5}"/>
+                <a16:creationId xmlns:a16="http://schemas.microsoft.com/office/drawing/2014/main" id="{6ACA3793-A8B7-4571-8499-0488882AAD68}"/>
               </a:ext>
             </a:extLst>
           </p:cNvPr>
@@ -21506,7 +22887,7 @@
                           <a:ea typeface="Microsoft JhengHei"/>
                           <a:cs typeface="Microsoft JhengHei"/>
                         </a:rPr>
-                        <a:t>42%／65%</a:t>
+                        <a:t>42%達標／65%未達</a:t>
                       </a:r>
                     </a:p>
                   </a:txBody>
@@ -21542,7 +22923,7 @@
                           <a:ea typeface="Microsoft JhengHei"/>
                           <a:cs typeface="Microsoft JhengHei"/>
                         </a:rPr>
-                        <a:t>能耗實算；含循環箱報廢剩餘價值</a:t>
+                        <a:t>12m：73.995%／39.173%</a:t>
                       </a:r>
                     </a:p>
                   </a:txBody>
@@ -21574,7 +22955,7 @@
           <p:cNvPr id="18" name="內容_3_原課程通過率混入商品、箱與外">
             <a:extLst xmlns:a="http://schemas.openxmlformats.org/drawingml/2006/main">
               <a:ext uri="{FF2B5EF4-FFF2-40B4-BE49-F238E27FC236}">
-                <a16:creationId xmlns:a16="http://schemas.microsoft.com/office/drawing/2014/main" id="{CA5FCCEA-00A4-43BD-986E-7B0401B92F90}"/>
+                <a16:creationId xmlns:a16="http://schemas.microsoft.com/office/drawing/2014/main" id="{8D87AA8E-3A50-46AF-91CD-80FCF8B33405}"/>
               </a:ext>
             </a:extLst>
           </p:cNvPr>
@@ -21730,7 +23111,7 @@
     </p:spTree>
     <p:extLst>
       <p:ext uri="{BB962C8B-B14F-4D97-AF65-F5344CB8AC3E}">
-        <p14:creationId xmlns:p14="http://schemas.microsoft.com/office/powerpoint/2010/main" val="1338634724"/>
+        <p14:creationId xmlns:p14="http://schemas.microsoft.com/office/powerpoint/2010/main" val="1958617041"/>
       </p:ext>
     </p:extLst>
   </p:cSld>
@@ -21754,7 +23135,7 @@
           <p:cNvPr id="2" name="Freeform 2">
             <a:extLst xmlns:a="http://schemas.openxmlformats.org/drawingml/2006/main">
               <a:ext uri="{FF2B5EF4-FFF2-40B4-BE49-F238E27FC236}">
-                <a16:creationId xmlns:a16="http://schemas.microsoft.com/office/drawing/2014/main" id="{4E9C1312-4FDD-4E31-B61A-739991B9D99F}"/>
+                <a16:creationId xmlns:a16="http://schemas.microsoft.com/office/drawing/2014/main" id="{D5043220-AA85-4102-8F13-78CC21377678}"/>
               </a:ext>
             </a:extLst>
           </p:cNvPr>
@@ -21792,7 +23173,7 @@
             </a:pathLst>
           </a:custGeom>
           <a:blipFill xmlns:a="http://schemas.openxmlformats.org/drawingml/2006/main">
-            <a:blip xmlns:r="http://schemas.openxmlformats.org/officeDocument/2006/relationships" r:embed="Re80f76f243ce48d7"/>
+            <a:blip xmlns:r="http://schemas.openxmlformats.org/officeDocument/2006/relationships" r:embed="R1ea07762f22a4e94"/>
             <a:stretch>
               <a:fillRect l="-35258" t="-5555" r="-24931" b="-72434"/>
             </a:stretch>
@@ -21804,7 +23185,7 @@
           <p:cNvPr id="4" name="Freeform 4">
             <a:extLst xmlns:a="http://schemas.openxmlformats.org/drawingml/2006/main">
               <a:ext uri="{FF2B5EF4-FFF2-40B4-BE49-F238E27FC236}">
-                <a16:creationId xmlns:a16="http://schemas.microsoft.com/office/drawing/2014/main" id="{33E71BAF-8B75-4F6B-ACB4-AFB91039D544}"/>
+                <a16:creationId xmlns:a16="http://schemas.microsoft.com/office/drawing/2014/main" id="{BE5D1DF5-C410-439D-8915-1763F763B615}"/>
               </a:ext>
             </a:extLst>
           </p:cNvPr>
@@ -21878,7 +23259,7 @@
           <p:cNvPr id="5" name="TextBox 5">
             <a:extLst xmlns:a="http://schemas.openxmlformats.org/drawingml/2006/main">
               <a:ext uri="{FF2B5EF4-FFF2-40B4-BE49-F238E27FC236}">
-                <a16:creationId xmlns:a16="http://schemas.microsoft.com/office/drawing/2014/main" id="{0B6FFD25-00E7-49B6-9D98-B56B55BA00A2}"/>
+                <a16:creationId xmlns:a16="http://schemas.microsoft.com/office/drawing/2014/main" id="{7D930D7E-2BC1-4BBC-9C67-99A69FAD5E75}"/>
               </a:ext>
             </a:extLst>
           </p:cNvPr>
@@ -21914,7 +23295,7 @@
           <p:cNvPr id="6" name="Freeform 6">
             <a:extLst xmlns:a="http://schemas.openxmlformats.org/drawingml/2006/main">
               <a:ext uri="{FF2B5EF4-FFF2-40B4-BE49-F238E27FC236}">
-                <a16:creationId xmlns:a16="http://schemas.microsoft.com/office/drawing/2014/main" id="{3405CE03-3568-4473-9489-1262DA229812}"/>
+                <a16:creationId xmlns:a16="http://schemas.microsoft.com/office/drawing/2014/main" id="{5E39D010-BB85-4E90-B056-F5CD5780559D}"/>
               </a:ext>
             </a:extLst>
           </p:cNvPr>
@@ -21952,7 +23333,7 @@
             </a:pathLst>
           </a:custGeom>
           <a:blipFill xmlns:a="http://schemas.openxmlformats.org/drawingml/2006/main">
-            <a:blip xmlns:r="http://schemas.openxmlformats.org/officeDocument/2006/relationships" r:embed="Rfde9e951150a4048"/>
+            <a:blip xmlns:r="http://schemas.openxmlformats.org/officeDocument/2006/relationships" r:embed="R59e9d7a92be84e0e"/>
             <a:stretch>
               <a:fillRect l="0" t="0" r="0" b="0"/>
             </a:stretch>
@@ -21964,7 +23345,7 @@
           <p:cNvPr id="7" name="Freeform 7">
             <a:extLst xmlns:a="http://schemas.openxmlformats.org/drawingml/2006/main">
               <a:ext uri="{FF2B5EF4-FFF2-40B4-BE49-F238E27FC236}">
-                <a16:creationId xmlns:a16="http://schemas.microsoft.com/office/drawing/2014/main" id="{348FEE13-A320-4032-A090-FD5E954D2C4F}"/>
+                <a16:creationId xmlns:a16="http://schemas.microsoft.com/office/drawing/2014/main" id="{3DE4EA0C-06EF-4FBC-91F7-FD93F0B5597E}"/>
               </a:ext>
             </a:extLst>
           </p:cNvPr>
@@ -22002,10 +23383,10 @@
             </a:pathLst>
           </a:custGeom>
           <a:blipFill xmlns:a="http://schemas.openxmlformats.org/drawingml/2006/main">
-            <a:blip xmlns:r="http://schemas.openxmlformats.org/officeDocument/2006/relationships" r:embed="R68b43225ee5b4724">
+            <a:blip xmlns:r="http://schemas.openxmlformats.org/officeDocument/2006/relationships" r:embed="R17799136dd164fc2">
               <a:extLst>
                 <a:ext uri="{96DAC541-7B7A-43D3-8B79-37D633B846F1}">
-                  <asvg:svgBlip xmlns:asvg="http://schemas.microsoft.com/office/drawing/2016/SVG/main" r:embed="R2a16af7fdb8845ec"/>
+                  <asvg:svgBlip xmlns:asvg="http://schemas.microsoft.com/office/drawing/2016/SVG/main" r:embed="Rca0f15becab249ff"/>
                 </a:ext>
               </a:extLst>
             </a:blip>
@@ -22020,7 +23401,7 @@
           <p:cNvPr id="8" name="Freeform 8">
             <a:extLst xmlns:a="http://schemas.openxmlformats.org/drawingml/2006/main">
               <a:ext uri="{FF2B5EF4-FFF2-40B4-BE49-F238E27FC236}">
-                <a16:creationId xmlns:a16="http://schemas.microsoft.com/office/drawing/2014/main" id="{9F860895-218C-49F5-9A4D-37D78ECA0D06}"/>
+                <a16:creationId xmlns:a16="http://schemas.microsoft.com/office/drawing/2014/main" id="{AF2B09F7-50C7-4A3E-9F16-543B16BE340D}"/>
               </a:ext>
             </a:extLst>
           </p:cNvPr>
@@ -22058,10 +23439,10 @@
             </a:pathLst>
           </a:custGeom>
           <a:blipFill xmlns:a="http://schemas.openxmlformats.org/drawingml/2006/main">
-            <a:blip xmlns:r="http://schemas.openxmlformats.org/officeDocument/2006/relationships" r:embed="R68b43225ee5b4724">
+            <a:blip xmlns:r="http://schemas.openxmlformats.org/officeDocument/2006/relationships" r:embed="R17799136dd164fc2">
               <a:extLst>
                 <a:ext uri="{96DAC541-7B7A-43D3-8B79-37D633B846F1}">
-                  <asvg:svgBlip xmlns:asvg="http://schemas.microsoft.com/office/drawing/2016/SVG/main" r:embed="R2a16af7fdb8845ec"/>
+                  <asvg:svgBlip xmlns:asvg="http://schemas.microsoft.com/office/drawing/2016/SVG/main" r:embed="Rca0f15becab249ff"/>
                 </a:ext>
               </a:extLst>
             </a:blip>
@@ -22076,7 +23457,7 @@
           <p:cNvPr id="9" name="Freeform 9">
             <a:extLst xmlns:a="http://schemas.openxmlformats.org/drawingml/2006/main">
               <a:ext uri="{FF2B5EF4-FFF2-40B4-BE49-F238E27FC236}">
-                <a16:creationId xmlns:a16="http://schemas.microsoft.com/office/drawing/2014/main" id="{19A69EAC-68CA-4F6E-AF5E-14128B810819}"/>
+                <a16:creationId xmlns:a16="http://schemas.microsoft.com/office/drawing/2014/main" id="{78AD2BA0-D057-4EFD-A584-E7E78D5522EF}"/>
               </a:ext>
             </a:extLst>
           </p:cNvPr>
@@ -22124,7 +23505,7 @@
           <p:cNvPr id="10" name="Freeform 10">
             <a:extLst xmlns:a="http://schemas.openxmlformats.org/drawingml/2006/main">
               <a:ext uri="{FF2B5EF4-FFF2-40B4-BE49-F238E27FC236}">
-                <a16:creationId xmlns:a16="http://schemas.microsoft.com/office/drawing/2014/main" id="{430797E4-E25A-4016-B891-809DE8849B05}"/>
+                <a16:creationId xmlns:a16="http://schemas.microsoft.com/office/drawing/2014/main" id="{516B355F-E4D8-454D-A738-98E7B0DCFA44}"/>
               </a:ext>
             </a:extLst>
           </p:cNvPr>
@@ -22172,7 +23553,7 @@
           <p:cNvPr id="11" name="TextBox 11">
             <a:extLst xmlns:a="http://schemas.openxmlformats.org/drawingml/2006/main">
               <a:ext uri="{FF2B5EF4-FFF2-40B4-BE49-F238E27FC236}">
-                <a16:creationId xmlns:a16="http://schemas.microsoft.com/office/drawing/2014/main" id="{757B7C7A-24E2-48DD-9DC1-122AD197D585}"/>
+                <a16:creationId xmlns:a16="http://schemas.microsoft.com/office/drawing/2014/main" id="{13B6EF13-47C8-4D8B-A7C4-0F5BD5F72E15}"/>
               </a:ext>
             </a:extLst>
           </p:cNvPr>
@@ -22333,7 +23714,7 @@
           <p:cNvPr id="12" name="TextBox 12">
             <a:extLst xmlns:a="http://schemas.openxmlformats.org/drawingml/2006/main">
               <a:ext uri="{FF2B5EF4-FFF2-40B4-BE49-F238E27FC236}">
-                <a16:creationId xmlns:a16="http://schemas.microsoft.com/office/drawing/2014/main" id="{57DF806C-6108-4080-B2AC-E8343F6732BB}"/>
+                <a16:creationId xmlns:a16="http://schemas.microsoft.com/office/drawing/2014/main" id="{0E61205E-5458-4263-804F-7FD7780DE6B8}"/>
               </a:ext>
             </a:extLst>
           </p:cNvPr>
@@ -22387,7 +23768,7 @@
           <p:cNvPr id="13" name="TextBox 13">
             <a:extLst xmlns:a="http://schemas.openxmlformats.org/drawingml/2006/main">
               <a:ext uri="{FF2B5EF4-FFF2-40B4-BE49-F238E27FC236}">
-                <a16:creationId xmlns:a16="http://schemas.microsoft.com/office/drawing/2014/main" id="{AC5BBECE-3329-4823-8777-98DDA2953526}"/>
+                <a16:creationId xmlns:a16="http://schemas.microsoft.com/office/drawing/2014/main" id="{A153A7A3-6D87-45A2-AC58-F9FADF9CE1C1}"/>
               </a:ext>
             </a:extLst>
           </p:cNvPr>
@@ -22439,7 +23820,7 @@
           <p:cNvPr id="14" name="TextBox 14">
             <a:extLst xmlns:a="http://schemas.openxmlformats.org/drawingml/2006/main">
               <a:ext uri="{FF2B5EF4-FFF2-40B4-BE49-F238E27FC236}">
-                <a16:creationId xmlns:a16="http://schemas.microsoft.com/office/drawing/2014/main" id="{87F742EA-D8B4-4068-AC22-2C87C2E54A2C}"/>
+                <a16:creationId xmlns:a16="http://schemas.microsoft.com/office/drawing/2014/main" id="{1D6DDB64-F42E-4AA3-AF6F-A11A0C2FC4F4}"/>
               </a:ext>
             </a:extLst>
           </p:cNvPr>
@@ -22491,7 +23872,7 @@
           <p:cNvPr id="16" name="Freeform 16">
             <a:extLst xmlns:a="http://schemas.openxmlformats.org/drawingml/2006/main">
               <a:ext uri="{FF2B5EF4-FFF2-40B4-BE49-F238E27FC236}">
-                <a16:creationId xmlns:a16="http://schemas.microsoft.com/office/drawing/2014/main" id="{4FEF20BD-C1E9-456B-BF42-A7E359CD4BBD}"/>
+                <a16:creationId xmlns:a16="http://schemas.microsoft.com/office/drawing/2014/main" id="{7E7635F2-A703-4D93-97FE-A577BECF35DD}"/>
               </a:ext>
             </a:extLst>
           </p:cNvPr>
@@ -22550,7 +23931,7 @@
           <p:cNvPr id="17" name="TextBox 17">
             <a:extLst xmlns:a="http://schemas.openxmlformats.org/drawingml/2006/main">
               <a:ext uri="{FF2B5EF4-FFF2-40B4-BE49-F238E27FC236}">
-                <a16:creationId xmlns:a16="http://schemas.microsoft.com/office/drawing/2014/main" id="{B7A2ABC0-3032-49BB-9A23-81799C6728C3}"/>
+                <a16:creationId xmlns:a16="http://schemas.microsoft.com/office/drawing/2014/main" id="{0363177D-C5C4-4274-B206-2D54F3710136}"/>
               </a:ext>
             </a:extLst>
           </p:cNvPr>
@@ -22590,7 +23971,7 @@
           <p:cNvPr id="18" name="TextBox 18">
             <a:extLst xmlns:a="http://schemas.openxmlformats.org/drawingml/2006/main">
               <a:ext uri="{FF2B5EF4-FFF2-40B4-BE49-F238E27FC236}">
-                <a16:creationId xmlns:a16="http://schemas.microsoft.com/office/drawing/2014/main" id="{3F9DBEDF-4748-49C8-9AA9-E252FFCCEB2C}"/>
+                <a16:creationId xmlns:a16="http://schemas.microsoft.com/office/drawing/2014/main" id="{9160FCEA-1073-41CB-8F28-50E464E0958A}"/>
               </a:ext>
             </a:extLst>
           </p:cNvPr>
@@ -22642,7 +24023,7 @@
           <p:cNvPr id="19" name="TextBox 19">
             <a:extLst xmlns:a="http://schemas.openxmlformats.org/drawingml/2006/main">
               <a:ext uri="{FF2B5EF4-FFF2-40B4-BE49-F238E27FC236}">
-                <a16:creationId xmlns:a16="http://schemas.microsoft.com/office/drawing/2014/main" id="{68D22713-D8DE-42BC-A7DB-73EADB5B1CB3}"/>
+                <a16:creationId xmlns:a16="http://schemas.microsoft.com/office/drawing/2014/main" id="{08C0B020-4CFC-44DC-ACD3-3826333802F0}"/>
               </a:ext>
             </a:extLst>
           </p:cNvPr>
@@ -22694,7 +24075,7 @@
           <p:cNvPr id="21" name="Freeform 21">
             <a:extLst xmlns:a="http://schemas.openxmlformats.org/drawingml/2006/main">
               <a:ext uri="{FF2B5EF4-FFF2-40B4-BE49-F238E27FC236}">
-                <a16:creationId xmlns:a16="http://schemas.microsoft.com/office/drawing/2014/main" id="{365B4CDF-8E53-47AB-BE27-93CD299DEE69}"/>
+                <a16:creationId xmlns:a16="http://schemas.microsoft.com/office/drawing/2014/main" id="{C5728493-F66C-460C-BF2D-31734DC52FAC}"/>
               </a:ext>
             </a:extLst>
           </p:cNvPr>
@@ -22753,7 +24134,7 @@
           <p:cNvPr id="22" name="TextBox 22">
             <a:extLst xmlns:a="http://schemas.openxmlformats.org/drawingml/2006/main">
               <a:ext uri="{FF2B5EF4-FFF2-40B4-BE49-F238E27FC236}">
-                <a16:creationId xmlns:a16="http://schemas.microsoft.com/office/drawing/2014/main" id="{36DDE20E-17E4-47C5-85C6-D0DC68D8BB8A}"/>
+                <a16:creationId xmlns:a16="http://schemas.microsoft.com/office/drawing/2014/main" id="{B81E86D1-05CD-4234-A8E6-F57911A3166F}"/>
               </a:ext>
             </a:extLst>
           </p:cNvPr>
@@ -22793,7 +24174,7 @@
           <p:cNvPr id="23" name="TextBox 23">
             <a:extLst xmlns:a="http://schemas.openxmlformats.org/drawingml/2006/main">
               <a:ext uri="{FF2B5EF4-FFF2-40B4-BE49-F238E27FC236}">
-                <a16:creationId xmlns:a16="http://schemas.microsoft.com/office/drawing/2014/main" id="{BB14F45C-E5D9-4D73-A4CB-4A6E51FBD334}"/>
+                <a16:creationId xmlns:a16="http://schemas.microsoft.com/office/drawing/2014/main" id="{C4534D92-394B-49E9-AD88-207A041C3E28}"/>
               </a:ext>
             </a:extLst>
           </p:cNvPr>
@@ -22845,7 +24226,7 @@
           <p:cNvPr id="24" name="TextBox 24">
             <a:extLst xmlns:a="http://schemas.openxmlformats.org/drawingml/2006/main">
               <a:ext uri="{FF2B5EF4-FFF2-40B4-BE49-F238E27FC236}">
-                <a16:creationId xmlns:a16="http://schemas.microsoft.com/office/drawing/2014/main" id="{0064DB07-97F9-405E-A4D8-827C5E06AD9C}"/>
+                <a16:creationId xmlns:a16="http://schemas.microsoft.com/office/drawing/2014/main" id="{94E9F036-76F3-4360-A021-853A960AD04F}"/>
               </a:ext>
             </a:extLst>
           </p:cNvPr>
@@ -22897,7 +24278,7 @@
           <p:cNvPr id="25" name="">
             <a:extLst xmlns:a="http://schemas.openxmlformats.org/drawingml/2006/main">
               <a:ext uri="{FF2B5EF4-FFF2-40B4-BE49-F238E27FC236}">
-                <a16:creationId xmlns:a16="http://schemas.microsoft.com/office/drawing/2014/main" id="{6FBE06D7-FD84-4009-ADF8-0B2E5C8C9373}"/>
+                <a16:creationId xmlns:a16="http://schemas.microsoft.com/office/drawing/2014/main" id="{EB009157-9817-4B7E-8E07-497C2333C351}"/>
               </a:ext>
             </a:extLst>
           </p:cNvPr>
@@ -22907,7 +24288,7 @@
           <p:nvPr/>
         </p:nvPicPr>
         <p:blipFill>
-          <a:blip xmlns:r="http://schemas.openxmlformats.org/officeDocument/2006/relationships" xmlns:a="http://schemas.openxmlformats.org/drawingml/2006/main" r:embed="R4ffeb8412fc24dd9"/>
+          <a:blip xmlns:r="http://schemas.openxmlformats.org/officeDocument/2006/relationships" xmlns:a="http://schemas.openxmlformats.org/drawingml/2006/main" r:embed="R073362be0de94284"/>
           <a:srcRect xmlns:a="http://schemas.openxmlformats.org/drawingml/2006/main" l="45370" t="10500" r="0" b="0"/>
           <a:stretch xmlns:a="http://schemas.openxmlformats.org/drawingml/2006/main"/>
         </p:blipFill>
@@ -22926,7 +24307,7 @@
           <p:cNvPr id="26" name="內容_4_雙閉環架構">
             <a:extLst xmlns:a="http://schemas.openxmlformats.org/drawingml/2006/main">
               <a:ext uri="{FF2B5EF4-FFF2-40B4-BE49-F238E27FC236}">
-                <a16:creationId xmlns:a16="http://schemas.microsoft.com/office/drawing/2014/main" id="{34350619-3061-45B0-AFB5-CA225E3155A4}"/>
+                <a16:creationId xmlns:a16="http://schemas.microsoft.com/office/drawing/2014/main" id="{977C447E-8544-4706-AE14-604C0C683CC2}"/>
               </a:ext>
             </a:extLst>
           </p:cNvPr>
@@ -23084,7 +24465,7 @@
           <p:cNvPr id="27" name="內容_4_商品與循環箱分離後再配對">
             <a:extLst xmlns:a="http://schemas.openxmlformats.org/drawingml/2006/main">
               <a:ext uri="{FF2B5EF4-FFF2-40B4-BE49-F238E27FC236}">
-                <a16:creationId xmlns:a16="http://schemas.microsoft.com/office/drawing/2014/main" id="{FDA849D2-D377-4A47-B4C6-A42AB9C3F569}"/>
+                <a16:creationId xmlns:a16="http://schemas.microsoft.com/office/drawing/2014/main" id="{9F033498-8B46-4B85-8556-B89005441D66}"/>
               </a:ext>
             </a:extLst>
           </p:cNvPr>
@@ -23242,7 +24623,7 @@
           <p:cNvPr id="28" name="">
             <a:extLst xmlns:a="http://schemas.openxmlformats.org/drawingml/2006/main">
               <a:ext uri="{FF2B5EF4-FFF2-40B4-BE49-F238E27FC236}">
-                <a16:creationId xmlns:a16="http://schemas.microsoft.com/office/drawing/2014/main" id="{E3003C69-5676-41D7-9458-9A5C2FAC8C26}"/>
+                <a16:creationId xmlns:a16="http://schemas.microsoft.com/office/drawing/2014/main" id="{4100BA9E-AA4F-406C-9E43-BC2111ECF349}"/>
               </a:ext>
             </a:extLst>
           </p:cNvPr>
@@ -23427,7 +24808,7 @@
           <p:cNvPr id="29" name="">
             <a:extLst xmlns:a="http://schemas.openxmlformats.org/drawingml/2006/main">
               <a:ext uri="{FF2B5EF4-FFF2-40B4-BE49-F238E27FC236}">
-                <a16:creationId xmlns:a16="http://schemas.microsoft.com/office/drawing/2014/main" id="{2BD4C286-7219-4C6F-A2BD-5B2D65F54C4E}"/>
+                <a16:creationId xmlns:a16="http://schemas.microsoft.com/office/drawing/2014/main" id="{722FFA5B-44EF-4AA0-A3C3-13FC8A8B12C7}"/>
               </a:ext>
             </a:extLst>
           </p:cNvPr>
@@ -23612,7 +24993,7 @@
           <p:cNvPr id="30" name="">
             <a:extLst xmlns:a="http://schemas.openxmlformats.org/drawingml/2006/main">
               <a:ext uri="{FF2B5EF4-FFF2-40B4-BE49-F238E27FC236}">
-                <a16:creationId xmlns:a16="http://schemas.microsoft.com/office/drawing/2014/main" id="{6C1FEA02-AEA6-4F6C-9176-C7924AB4609F}"/>
+                <a16:creationId xmlns:a16="http://schemas.microsoft.com/office/drawing/2014/main" id="{82444CED-29AA-4FFC-9E3B-3F27B097883A}"/>
               </a:ext>
             </a:extLst>
           </p:cNvPr>
@@ -23797,7 +25178,7 @@
           <p:cNvPr id="31" name="">
             <a:extLst xmlns:a="http://schemas.openxmlformats.org/drawingml/2006/main">
               <a:ext uri="{FF2B5EF4-FFF2-40B4-BE49-F238E27FC236}">
-                <a16:creationId xmlns:a16="http://schemas.microsoft.com/office/drawing/2014/main" id="{EC0F9EDE-B01F-4B76-8EC5-FF926743569E}"/>
+                <a16:creationId xmlns:a16="http://schemas.microsoft.com/office/drawing/2014/main" id="{2883D454-A8BE-4A26-A008-6FF98AF75312}"/>
               </a:ext>
             </a:extLst>
           </p:cNvPr>
@@ -23982,7 +25363,7 @@
           <p:cNvPr id="32" name="">
             <a:extLst xmlns:a="http://schemas.openxmlformats.org/drawingml/2006/main">
               <a:ext uri="{FF2B5EF4-FFF2-40B4-BE49-F238E27FC236}">
-                <a16:creationId xmlns:a16="http://schemas.microsoft.com/office/drawing/2014/main" id="{3C4A7B88-1CA6-43FD-BD01-83586C61C869}"/>
+                <a16:creationId xmlns:a16="http://schemas.microsoft.com/office/drawing/2014/main" id="{A182E8A8-FE85-400E-81B9-8172AC292B0F}"/>
               </a:ext>
             </a:extLst>
           </p:cNvPr>
@@ -24167,7 +25548,7 @@
           <p:cNvPr id="33" name="">
             <a:extLst xmlns:a="http://schemas.openxmlformats.org/drawingml/2006/main">
               <a:ext uri="{FF2B5EF4-FFF2-40B4-BE49-F238E27FC236}">
-                <a16:creationId xmlns:a16="http://schemas.microsoft.com/office/drawing/2014/main" id="{C7341731-DE96-42D9-9708-85A425DA5C8E}"/>
+                <a16:creationId xmlns:a16="http://schemas.microsoft.com/office/drawing/2014/main" id="{33E7C3B8-07C7-45DC-8AEE-213B0E09E75B}"/>
               </a:ext>
             </a:extLst>
           </p:cNvPr>
@@ -24352,7 +25733,7 @@
           <p:cNvPr id="34" name="">
             <a:extLst xmlns:a="http://schemas.openxmlformats.org/drawingml/2006/main">
               <a:ext uri="{FF2B5EF4-FFF2-40B4-BE49-F238E27FC236}">
-                <a16:creationId xmlns:a16="http://schemas.microsoft.com/office/drawing/2014/main" id="{B58CB67F-F82B-49BA-95AA-F65BDE501026}"/>
+                <a16:creationId xmlns:a16="http://schemas.microsoft.com/office/drawing/2014/main" id="{0D490712-EF26-4DD0-ADA9-1A455EA18C35}"/>
               </a:ext>
             </a:extLst>
           </p:cNvPr>
@@ -24537,7 +25918,7 @@
           <p:cNvPr id="35" name="內容_4_↗">
             <a:extLst xmlns:a="http://schemas.openxmlformats.org/drawingml/2006/main">
               <a:ext uri="{FF2B5EF4-FFF2-40B4-BE49-F238E27FC236}">
-                <a16:creationId xmlns:a16="http://schemas.microsoft.com/office/drawing/2014/main" id="{D4527646-6D1B-43F5-A164-FB79C775F06E}"/>
+                <a16:creationId xmlns:a16="http://schemas.microsoft.com/office/drawing/2014/main" id="{01CA77D6-D1C0-447C-8574-F586FBDD8341}"/>
               </a:ext>
             </a:extLst>
           </p:cNvPr>
@@ -24695,7 +26076,7 @@
           <p:cNvPr id="36" name="內容_4_→">
             <a:extLst xmlns:a="http://schemas.openxmlformats.org/drawingml/2006/main">
               <a:ext uri="{FF2B5EF4-FFF2-40B4-BE49-F238E27FC236}">
-                <a16:creationId xmlns:a16="http://schemas.microsoft.com/office/drawing/2014/main" id="{73693387-93EB-42A6-876B-EECD5DEE8D79}"/>
+                <a16:creationId xmlns:a16="http://schemas.microsoft.com/office/drawing/2014/main" id="{7C8F160C-FCB9-45CA-95EF-BB7E3BF57E86}"/>
               </a:ext>
             </a:extLst>
           </p:cNvPr>
@@ -24853,7 +26234,7 @@
           <p:cNvPr id="37" name="內容_4_↘">
             <a:extLst xmlns:a="http://schemas.openxmlformats.org/drawingml/2006/main">
               <a:ext uri="{FF2B5EF4-FFF2-40B4-BE49-F238E27FC236}">
-                <a16:creationId xmlns:a16="http://schemas.microsoft.com/office/drawing/2014/main" id="{D4F42D80-0EFF-43D6-9C83-552C60C0F86E}"/>
+                <a16:creationId xmlns:a16="http://schemas.microsoft.com/office/drawing/2014/main" id="{18D819DA-D295-4F4F-AECA-25368B50009F}"/>
               </a:ext>
             </a:extLst>
           </p:cNvPr>
@@ -25011,7 +26392,7 @@
           <p:cNvPr id="38" name="內容_4_↘">
             <a:extLst xmlns:a="http://schemas.openxmlformats.org/drawingml/2006/main">
               <a:ext uri="{FF2B5EF4-FFF2-40B4-BE49-F238E27FC236}">
-                <a16:creationId xmlns:a16="http://schemas.microsoft.com/office/drawing/2014/main" id="{5FE730D9-1642-48E9-9D75-40DDCD4E097D}"/>
+                <a16:creationId xmlns:a16="http://schemas.microsoft.com/office/drawing/2014/main" id="{A37F5345-8EDE-4161-A8E6-D743D92DC9D4}"/>
               </a:ext>
             </a:extLst>
           </p:cNvPr>
@@ -25169,7 +26550,7 @@
           <p:cNvPr id="39" name="內容_4_→">
             <a:extLst xmlns:a="http://schemas.openxmlformats.org/drawingml/2006/main">
               <a:ext uri="{FF2B5EF4-FFF2-40B4-BE49-F238E27FC236}">
-                <a16:creationId xmlns:a16="http://schemas.microsoft.com/office/drawing/2014/main" id="{7892B1C5-E5C2-4640-839B-B08EFA17D206}"/>
+                <a16:creationId xmlns:a16="http://schemas.microsoft.com/office/drawing/2014/main" id="{E33F0C06-84B2-42AD-9774-809B24E23869}"/>
               </a:ext>
             </a:extLst>
           </p:cNvPr>
@@ -25327,7 +26708,7 @@
           <p:cNvPr id="40" name="內容_4_↗">
             <a:extLst xmlns:a="http://schemas.openxmlformats.org/drawingml/2006/main">
               <a:ext uri="{FF2B5EF4-FFF2-40B4-BE49-F238E27FC236}">
-                <a16:creationId xmlns:a16="http://schemas.microsoft.com/office/drawing/2014/main" id="{3D97FC69-B4F4-47E8-A9AF-98F2E1C854CB}"/>
+                <a16:creationId xmlns:a16="http://schemas.microsoft.com/office/drawing/2014/main" id="{2A08BE44-6F9A-4243-8160-10136C568164}"/>
               </a:ext>
             </a:extLst>
           </p:cNvPr>
@@ -25485,7 +26866,7 @@
           <p:cNvPr id="41" name="內容_4_→">
             <a:extLst xmlns:a="http://schemas.openxmlformats.org/drawingml/2006/main">
               <a:ext uri="{FF2B5EF4-FFF2-40B4-BE49-F238E27FC236}">
-                <a16:creationId xmlns:a16="http://schemas.microsoft.com/office/drawing/2014/main" id="{C57A0F3B-7476-4E68-8A77-042C458ABDC8}"/>
+                <a16:creationId xmlns:a16="http://schemas.microsoft.com/office/drawing/2014/main" id="{F39E5DC0-8F06-443B-9549-C9A22C8BB2EC}"/>
               </a:ext>
             </a:extLst>
           </p:cNvPr>
@@ -25643,7 +27024,7 @@
           <p:cNvPr id="42" name="內容_4_有限500箱資產池，每箱15">
             <a:extLst xmlns:a="http://schemas.openxmlformats.org/drawingml/2006/main">
               <a:ext uri="{FF2B5EF4-FFF2-40B4-BE49-F238E27FC236}">
-                <a16:creationId xmlns:a16="http://schemas.microsoft.com/office/drawing/2014/main" id="{D3720AD1-5C01-4611-B1BF-6AC9B87A5917}"/>
+                <a16:creationId xmlns:a16="http://schemas.microsoft.com/office/drawing/2014/main" id="{95FCE544-CFBF-470A-B724-AEE2C180E01E}"/>
               </a:ext>
             </a:extLst>
           </p:cNvPr>
@@ -25801,7 +27182,7 @@
           <p:cNvPr id="43" name="內容_4_0m緩衝採原生真旁路。商品／">
             <a:extLst xmlns:a="http://schemas.openxmlformats.org/drawingml/2006/main">
               <a:ext uri="{FF2B5EF4-FFF2-40B4-BE49-F238E27FC236}">
-                <a16:creationId xmlns:a16="http://schemas.microsoft.com/office/drawing/2014/main" id="{E8CD86B9-9446-422F-B7B6-44A1CE962917}"/>
+                <a16:creationId xmlns:a16="http://schemas.microsoft.com/office/drawing/2014/main" id="{647FDEAC-4C85-42C2-A52E-C56E92734A64}"/>
               </a:ext>
             </a:extLst>
           </p:cNvPr>
@@ -25957,7 +27338,7 @@
     </p:spTree>
     <p:extLst>
       <p:ext uri="{BB962C8B-B14F-4D97-AF65-F5344CB8AC3E}">
-        <p14:creationId xmlns:p14="http://schemas.microsoft.com/office/powerpoint/2010/main" val="1645469013"/>
+        <p14:creationId xmlns:p14="http://schemas.microsoft.com/office/powerpoint/2010/main" val="1056178993"/>
       </p:ext>
     </p:extLst>
   </p:cSld>
@@ -25981,7 +27362,7 @@
           <p:cNvPr id="2" name="Freeform 2">
             <a:extLst xmlns:a="http://schemas.openxmlformats.org/drawingml/2006/main">
               <a:ext uri="{FF2B5EF4-FFF2-40B4-BE49-F238E27FC236}">
-                <a16:creationId xmlns:a16="http://schemas.microsoft.com/office/drawing/2014/main" id="{E5BBCF98-FA04-4286-96FD-41E95B587A1A}"/>
+                <a16:creationId xmlns:a16="http://schemas.microsoft.com/office/drawing/2014/main" id="{9376683A-B6EF-4716-B753-3512415EE25A}"/>
               </a:ext>
             </a:extLst>
           </p:cNvPr>
@@ -26019,7 +27400,7 @@
             </a:pathLst>
           </a:custGeom>
           <a:blipFill xmlns:a="http://schemas.openxmlformats.org/drawingml/2006/main">
-            <a:blip xmlns:r="http://schemas.openxmlformats.org/officeDocument/2006/relationships" r:embed="R3860624033c84755"/>
+            <a:blip xmlns:r="http://schemas.openxmlformats.org/officeDocument/2006/relationships" r:embed="R1bacf616a9b248cd"/>
             <a:stretch>
               <a:fillRect l="-35258" t="-5555" r="-24931" b="-72434"/>
             </a:stretch>
@@ -26031,7 +27412,7 @@
           <p:cNvPr id="4" name="Freeform 4">
             <a:extLst xmlns:a="http://schemas.openxmlformats.org/drawingml/2006/main">
               <a:ext uri="{FF2B5EF4-FFF2-40B4-BE49-F238E27FC236}">
-                <a16:creationId xmlns:a16="http://schemas.microsoft.com/office/drawing/2014/main" id="{B7252006-C467-4ACD-BCD8-747DF7F002AF}"/>
+                <a16:creationId xmlns:a16="http://schemas.microsoft.com/office/drawing/2014/main" id="{78B8AB74-4599-4748-A05D-FEEEE638DC1D}"/>
               </a:ext>
             </a:extLst>
           </p:cNvPr>
@@ -26105,7 +27486,7 @@
           <p:cNvPr id="5" name="TextBox 5">
             <a:extLst xmlns:a="http://schemas.openxmlformats.org/drawingml/2006/main">
               <a:ext uri="{FF2B5EF4-FFF2-40B4-BE49-F238E27FC236}">
-                <a16:creationId xmlns:a16="http://schemas.microsoft.com/office/drawing/2014/main" id="{4524FE7E-DDF3-4FF9-965B-FEC0B89C2123}"/>
+                <a16:creationId xmlns:a16="http://schemas.microsoft.com/office/drawing/2014/main" id="{3904EC0B-214F-4188-8079-6A23A2E94EEC}"/>
               </a:ext>
             </a:extLst>
           </p:cNvPr>
@@ -26141,7 +27522,7 @@
           <p:cNvPr id="6" name="Freeform 6">
             <a:extLst xmlns:a="http://schemas.openxmlformats.org/drawingml/2006/main">
               <a:ext uri="{FF2B5EF4-FFF2-40B4-BE49-F238E27FC236}">
-                <a16:creationId xmlns:a16="http://schemas.microsoft.com/office/drawing/2014/main" id="{C4FDF081-854A-473A-90A4-5DF7F4D5CA65}"/>
+                <a16:creationId xmlns:a16="http://schemas.microsoft.com/office/drawing/2014/main" id="{1E8AC249-517D-422E-B4F5-05BB4AA91720}"/>
               </a:ext>
             </a:extLst>
           </p:cNvPr>
@@ -26179,7 +27560,7 @@
             </a:pathLst>
           </a:custGeom>
           <a:blipFill xmlns:a="http://schemas.openxmlformats.org/drawingml/2006/main">
-            <a:blip xmlns:r="http://schemas.openxmlformats.org/officeDocument/2006/relationships" r:embed="R34a2ccaf03794b91"/>
+            <a:blip xmlns:r="http://schemas.openxmlformats.org/officeDocument/2006/relationships" r:embed="R49d6967c24f94eb1"/>
             <a:stretch>
               <a:fillRect l="0" t="0" r="0" b="0"/>
             </a:stretch>
@@ -26191,7 +27572,7 @@
           <p:cNvPr id="7" name="Freeform 7">
             <a:extLst xmlns:a="http://schemas.openxmlformats.org/drawingml/2006/main">
               <a:ext uri="{FF2B5EF4-FFF2-40B4-BE49-F238E27FC236}">
-                <a16:creationId xmlns:a16="http://schemas.microsoft.com/office/drawing/2014/main" id="{2369439A-CC36-47B7-9A4C-2A97DE0B3234}"/>
+                <a16:creationId xmlns:a16="http://schemas.microsoft.com/office/drawing/2014/main" id="{3FD622C8-D150-4F46-99EE-F98563612B2D}"/>
               </a:ext>
             </a:extLst>
           </p:cNvPr>
@@ -26229,10 +27610,10 @@
             </a:pathLst>
           </a:custGeom>
           <a:blipFill xmlns:a="http://schemas.openxmlformats.org/drawingml/2006/main">
-            <a:blip xmlns:r="http://schemas.openxmlformats.org/officeDocument/2006/relationships" r:embed="Rd19179fe96e54266">
+            <a:blip xmlns:r="http://schemas.openxmlformats.org/officeDocument/2006/relationships" r:embed="R78c683d8201d4e3d">
               <a:extLst>
                 <a:ext uri="{96DAC541-7B7A-43D3-8B79-37D633B846F1}">
-                  <asvg:svgBlip xmlns:asvg="http://schemas.microsoft.com/office/drawing/2016/SVG/main" r:embed="Rc447e5ed224b40b1"/>
+                  <asvg:svgBlip xmlns:asvg="http://schemas.microsoft.com/office/drawing/2016/SVG/main" r:embed="R185b070b6e584900"/>
                 </a:ext>
               </a:extLst>
             </a:blip>
@@ -26247,7 +27628,7 @@
           <p:cNvPr id="8" name="Freeform 8">
             <a:extLst xmlns:a="http://schemas.openxmlformats.org/drawingml/2006/main">
               <a:ext uri="{FF2B5EF4-FFF2-40B4-BE49-F238E27FC236}">
-                <a16:creationId xmlns:a16="http://schemas.microsoft.com/office/drawing/2014/main" id="{8BC80393-E9F9-4E0A-BBEA-8EAFF397A326}"/>
+                <a16:creationId xmlns:a16="http://schemas.microsoft.com/office/drawing/2014/main" id="{ADE74D45-2596-43D1-AAE9-5E4929454B19}"/>
               </a:ext>
             </a:extLst>
           </p:cNvPr>
@@ -26285,10 +27666,10 @@
             </a:pathLst>
           </a:custGeom>
           <a:blipFill xmlns:a="http://schemas.openxmlformats.org/drawingml/2006/main">
-            <a:blip xmlns:r="http://schemas.openxmlformats.org/officeDocument/2006/relationships" r:embed="Rd19179fe96e54266">
+            <a:blip xmlns:r="http://schemas.openxmlformats.org/officeDocument/2006/relationships" r:embed="R78c683d8201d4e3d">
               <a:extLst>
                 <a:ext uri="{96DAC541-7B7A-43D3-8B79-37D633B846F1}">
-                  <asvg:svgBlip xmlns:asvg="http://schemas.microsoft.com/office/drawing/2016/SVG/main" r:embed="Rc447e5ed224b40b1"/>
+                  <asvg:svgBlip xmlns:asvg="http://schemas.microsoft.com/office/drawing/2016/SVG/main" r:embed="R185b070b6e584900"/>
                 </a:ext>
               </a:extLst>
             </a:blip>
@@ -26303,7 +27684,7 @@
           <p:cNvPr id="9" name="Freeform 9">
             <a:extLst xmlns:a="http://schemas.openxmlformats.org/drawingml/2006/main">
               <a:ext uri="{FF2B5EF4-FFF2-40B4-BE49-F238E27FC236}">
-                <a16:creationId xmlns:a16="http://schemas.microsoft.com/office/drawing/2014/main" id="{D2272730-3B2B-4013-A107-07C15B12DBB5}"/>
+                <a16:creationId xmlns:a16="http://schemas.microsoft.com/office/drawing/2014/main" id="{8775B44C-C3C6-4CF2-826C-246E19C3D15A}"/>
               </a:ext>
             </a:extLst>
           </p:cNvPr>
@@ -26351,7 +27732,7 @@
           <p:cNvPr id="10" name="TextBox 10">
             <a:extLst xmlns:a="http://schemas.openxmlformats.org/drawingml/2006/main">
               <a:ext uri="{FF2B5EF4-FFF2-40B4-BE49-F238E27FC236}">
-                <a16:creationId xmlns:a16="http://schemas.microsoft.com/office/drawing/2014/main" id="{79DDA1D0-FAA9-42E7-B2C5-6CD3A63782DC}"/>
+                <a16:creationId xmlns:a16="http://schemas.microsoft.com/office/drawing/2014/main" id="{8523EA46-919F-4D11-8213-748C4F01956A}"/>
               </a:ext>
             </a:extLst>
           </p:cNvPr>
@@ -26512,7 +27893,7 @@
           <p:cNvPr id="11" name="TextBox 11">
             <a:extLst xmlns:a="http://schemas.openxmlformats.org/drawingml/2006/main">
               <a:ext uri="{FF2B5EF4-FFF2-40B4-BE49-F238E27FC236}">
-                <a16:creationId xmlns:a16="http://schemas.microsoft.com/office/drawing/2014/main" id="{2FAE4505-3A6E-44C6-9CA1-825A237F0A89}"/>
+                <a16:creationId xmlns:a16="http://schemas.microsoft.com/office/drawing/2014/main" id="{9A6034A9-E873-4120-96F6-DF01C732FF36}"/>
               </a:ext>
             </a:extLst>
           </p:cNvPr>
@@ -26566,7 +27947,7 @@
           <p:cNvPr id="12" name="TextBox 12">
             <a:extLst xmlns:a="http://schemas.openxmlformats.org/drawingml/2006/main">
               <a:ext uri="{FF2B5EF4-FFF2-40B4-BE49-F238E27FC236}">
-                <a16:creationId xmlns:a16="http://schemas.microsoft.com/office/drawing/2014/main" id="{132F494E-F3F5-4660-8D59-E3A49D75711A}"/>
+                <a16:creationId xmlns:a16="http://schemas.microsoft.com/office/drawing/2014/main" id="{171B05E9-AFF2-449D-98D7-B100F4C7FF91}"/>
               </a:ext>
             </a:extLst>
           </p:cNvPr>
@@ -26618,7 +27999,7 @@
           <p:cNvPr id="13" name="TextBox 13">
             <a:extLst xmlns:a="http://schemas.openxmlformats.org/drawingml/2006/main">
               <a:ext uri="{FF2B5EF4-FFF2-40B4-BE49-F238E27FC236}">
-                <a16:creationId xmlns:a16="http://schemas.microsoft.com/office/drawing/2014/main" id="{967FAA73-1BE3-43FA-A84C-648161050AB5}"/>
+                <a16:creationId xmlns:a16="http://schemas.microsoft.com/office/drawing/2014/main" id="{96C80008-4E5E-4B7B-A445-25F3D1548FB8}"/>
               </a:ext>
             </a:extLst>
           </p:cNvPr>
@@ -26670,7 +28051,7 @@
           <p:cNvPr id="14" name="Freeform 14">
             <a:extLst xmlns:a="http://schemas.openxmlformats.org/drawingml/2006/main">
               <a:ext uri="{FF2B5EF4-FFF2-40B4-BE49-F238E27FC236}">
-                <a16:creationId xmlns:a16="http://schemas.microsoft.com/office/drawing/2014/main" id="{BCD62257-3BB5-4F43-8700-871A578D0B24}"/>
+                <a16:creationId xmlns:a16="http://schemas.microsoft.com/office/drawing/2014/main" id="{BD5D4BC9-18B1-44CE-B871-06BFDD451F8F}"/>
               </a:ext>
             </a:extLst>
           </p:cNvPr>
@@ -26718,7 +28099,7 @@
           <p:cNvPr id="15" name="Freeform 15">
             <a:extLst xmlns:a="http://schemas.openxmlformats.org/drawingml/2006/main">
               <a:ext uri="{FF2B5EF4-FFF2-40B4-BE49-F238E27FC236}">
-                <a16:creationId xmlns:a16="http://schemas.microsoft.com/office/drawing/2014/main" id="{D4D183B7-9EDC-4F4E-A99B-825C8C56C6C4}"/>
+                <a16:creationId xmlns:a16="http://schemas.microsoft.com/office/drawing/2014/main" id="{66625144-AF51-4801-A354-FD86B5A8391E}"/>
               </a:ext>
             </a:extLst>
           </p:cNvPr>
@@ -26766,7 +28147,7 @@
           <p:cNvPr id="16" name="TextBox 16">
             <a:extLst xmlns:a="http://schemas.openxmlformats.org/drawingml/2006/main">
               <a:ext uri="{FF2B5EF4-FFF2-40B4-BE49-F238E27FC236}">
-                <a16:creationId xmlns:a16="http://schemas.microsoft.com/office/drawing/2014/main" id="{41ECCC13-4E72-41D9-8BD3-3CA71176E7DA}"/>
+                <a16:creationId xmlns:a16="http://schemas.microsoft.com/office/drawing/2014/main" id="{AD40E350-8C90-4FCB-9262-8744B1C788FE}"/>
               </a:ext>
             </a:extLst>
           </p:cNvPr>
@@ -26815,7 +28196,7 @@
           <p:cNvPr id="17" name="TextBox 17">
             <a:extLst xmlns:a="http://schemas.openxmlformats.org/drawingml/2006/main">
               <a:ext uri="{FF2B5EF4-FFF2-40B4-BE49-F238E27FC236}">
-                <a16:creationId xmlns:a16="http://schemas.microsoft.com/office/drawing/2014/main" id="{F6834DBC-7A58-44E4-B030-F40F90F6FEF2}"/>
+                <a16:creationId xmlns:a16="http://schemas.microsoft.com/office/drawing/2014/main" id="{F3A3CADB-3E3F-409C-ADB9-2AD3C6494C8D}"/>
               </a:ext>
             </a:extLst>
           </p:cNvPr>
@@ -26864,7 +28245,7 @@
           <p:cNvPr id="18" name="TextBox 18">
             <a:extLst xmlns:a="http://schemas.openxmlformats.org/drawingml/2006/main">
               <a:ext uri="{FF2B5EF4-FFF2-40B4-BE49-F238E27FC236}">
-                <a16:creationId xmlns:a16="http://schemas.microsoft.com/office/drawing/2014/main" id="{7A2E6FBA-0C59-46B8-9B97-843FD45C216D}"/>
+                <a16:creationId xmlns:a16="http://schemas.microsoft.com/office/drawing/2014/main" id="{9A7434BC-6522-4BF2-87C0-C268C094E690}"/>
               </a:ext>
             </a:extLst>
           </p:cNvPr>
@@ -26913,7 +28294,7 @@
           <p:cNvPr id="19" name="TextBox 19">
             <a:extLst xmlns:a="http://schemas.openxmlformats.org/drawingml/2006/main">
               <a:ext uri="{FF2B5EF4-FFF2-40B4-BE49-F238E27FC236}">
-                <a16:creationId xmlns:a16="http://schemas.microsoft.com/office/drawing/2014/main" id="{823714A9-F35D-460B-939D-79A206DE482B}"/>
+                <a16:creationId xmlns:a16="http://schemas.microsoft.com/office/drawing/2014/main" id="{A7F1691A-D06E-441A-8084-DFCAE7D03B05}"/>
               </a:ext>
             </a:extLst>
           </p:cNvPr>
@@ -26965,7 +28346,7 @@
           <p:cNvPr id="20" name="TextBox 20">
             <a:extLst xmlns:a="http://schemas.openxmlformats.org/drawingml/2006/main">
               <a:ext uri="{FF2B5EF4-FFF2-40B4-BE49-F238E27FC236}">
-                <a16:creationId xmlns:a16="http://schemas.microsoft.com/office/drawing/2014/main" id="{18276DC8-F408-422C-9435-99CD77CAD46C}"/>
+                <a16:creationId xmlns:a16="http://schemas.microsoft.com/office/drawing/2014/main" id="{76435E91-4F9C-420F-B294-F2A5E3D95E91}"/>
               </a:ext>
             </a:extLst>
           </p:cNvPr>
@@ -27017,7 +28398,7 @@
           <p:cNvPr id="21" name="TextBox 21">
             <a:extLst xmlns:a="http://schemas.openxmlformats.org/drawingml/2006/main">
               <a:ext uri="{FF2B5EF4-FFF2-40B4-BE49-F238E27FC236}">
-                <a16:creationId xmlns:a16="http://schemas.microsoft.com/office/drawing/2014/main" id="{5C529FF9-28A7-4BE2-B58D-331CA20B7BA7}"/>
+                <a16:creationId xmlns:a16="http://schemas.microsoft.com/office/drawing/2014/main" id="{9D49E462-5765-4E04-9BF6-EDC822A5400E}"/>
               </a:ext>
             </a:extLst>
           </p:cNvPr>
@@ -27069,7 +28450,7 @@
           <p:cNvPr id="22" name="內容_5_3D 佈局">
             <a:extLst xmlns:a="http://schemas.openxmlformats.org/drawingml/2006/main">
               <a:ext uri="{FF2B5EF4-FFF2-40B4-BE49-F238E27FC236}">
-                <a16:creationId xmlns:a16="http://schemas.microsoft.com/office/drawing/2014/main" id="{25B75F7F-28F0-43A5-B491-16E0EF974DB6}"/>
+                <a16:creationId xmlns:a16="http://schemas.microsoft.com/office/drawing/2014/main" id="{EB0199B0-2E76-4708-9498-6DC2CE80C605}"/>
               </a:ext>
             </a:extLst>
           </p:cNvPr>
@@ -27227,7 +28608,7 @@
           <p:cNvPr id="23" name="內容_5_雙層輸送網的原生運行畫面">
             <a:extLst xmlns:a="http://schemas.openxmlformats.org/drawingml/2006/main">
               <a:ext uri="{FF2B5EF4-FFF2-40B4-BE49-F238E27FC236}">
-                <a16:creationId xmlns:a16="http://schemas.microsoft.com/office/drawing/2014/main" id="{4E89E19A-ECC2-49D5-87CE-B58295B1B669}"/>
+                <a16:creationId xmlns:a16="http://schemas.microsoft.com/office/drawing/2014/main" id="{6C6A4C97-3D46-4CEA-A0E0-F110085A154B}"/>
               </a:ext>
             </a:extLst>
           </p:cNvPr>
@@ -27385,7 +28766,7 @@
           <p:cNvPr id="24" name="">
             <a:extLst xmlns:a="http://schemas.openxmlformats.org/drawingml/2006/main">
               <a:ext uri="{FF2B5EF4-FFF2-40B4-BE49-F238E27FC236}">
-                <a16:creationId xmlns:a16="http://schemas.microsoft.com/office/drawing/2014/main" id="{20BE5BF4-3286-49CE-848F-AADD3F86C130}"/>
+                <a16:creationId xmlns:a16="http://schemas.microsoft.com/office/drawing/2014/main" id="{1E389275-7A6B-4EB0-86AA-B2391ACC87FA}"/>
               </a:ext>
             </a:extLst>
           </p:cNvPr>
@@ -27395,7 +28776,7 @@
           <p:nvPr/>
         </p:nvPicPr>
         <p:blipFill>
-          <a:blip xmlns:r="http://schemas.openxmlformats.org/officeDocument/2006/relationships" xmlns:a="http://schemas.openxmlformats.org/drawingml/2006/main" r:embed="R0374d07daacd40b4"/>
+          <a:blip xmlns:r="http://schemas.openxmlformats.org/officeDocument/2006/relationships" xmlns:a="http://schemas.openxmlformats.org/drawingml/2006/main" r:embed="R7ad7265d7b5141d9"/>
           <a:srcRect xmlns:a="http://schemas.openxmlformats.org/drawingml/2006/main" l="0" t="20000" r="0" b="15000"/>
           <a:stretch xmlns:a="http://schemas.openxmlformats.org/drawingml/2006/main"/>
         </p:blipFill>
@@ -27414,7 +28795,7 @@
           <p:cNvPr id="25" name="內容_5_S1、P4、12m、seed">
             <a:extLst xmlns:a="http://schemas.openxmlformats.org/drawingml/2006/main">
               <a:ext uri="{FF2B5EF4-FFF2-40B4-BE49-F238E27FC236}">
-                <a16:creationId xmlns:a16="http://schemas.microsoft.com/office/drawing/2014/main" id="{38307EAB-FD91-4389-9184-6798969C8563}"/>
+                <a16:creationId xmlns:a16="http://schemas.microsoft.com/office/drawing/2014/main" id="{F5D5D33A-ADEC-4983-96DD-6E4DB0B6B313}"/>
               </a:ext>
             </a:extLst>
           </p:cNvPr>
@@ -27570,7 +28951,7 @@
     </p:spTree>
     <p:extLst>
       <p:ext uri="{BB962C8B-B14F-4D97-AF65-F5344CB8AC3E}">
-        <p14:creationId xmlns:p14="http://schemas.microsoft.com/office/powerpoint/2010/main" val="1547615971"/>
+        <p14:creationId xmlns:p14="http://schemas.microsoft.com/office/powerpoint/2010/main" val="1954555260"/>
       </p:ext>
     </p:extLst>
   </p:cSld>
@@ -27594,7 +28975,7 @@
           <p:cNvPr id="2" name="Freeform 2">
             <a:extLst xmlns:a="http://schemas.openxmlformats.org/drawingml/2006/main">
               <a:ext uri="{FF2B5EF4-FFF2-40B4-BE49-F238E27FC236}">
-                <a16:creationId xmlns:a16="http://schemas.microsoft.com/office/drawing/2014/main" id="{9CBE07EE-6B7B-4344-90E7-D5B8DE9BB9FC}"/>
+                <a16:creationId xmlns:a16="http://schemas.microsoft.com/office/drawing/2014/main" id="{6BC6F2CA-121A-4889-85F0-7C569674A226}"/>
               </a:ext>
             </a:extLst>
           </p:cNvPr>
@@ -27632,7 +29013,7 @@
             </a:pathLst>
           </a:custGeom>
           <a:blipFill xmlns:a="http://schemas.openxmlformats.org/drawingml/2006/main">
-            <a:blip xmlns:r="http://schemas.openxmlformats.org/officeDocument/2006/relationships" r:embed="R91d381267bd74439"/>
+            <a:blip xmlns:r="http://schemas.openxmlformats.org/officeDocument/2006/relationships" r:embed="R805aec13e537454f"/>
             <a:stretch>
               <a:fillRect l="-35258" t="-5555" r="-24931" b="-72434"/>
             </a:stretch>
@@ -27644,7 +29025,7 @@
           <p:cNvPr id="4" name="Freeform 4">
             <a:extLst xmlns:a="http://schemas.openxmlformats.org/drawingml/2006/main">
               <a:ext uri="{FF2B5EF4-FFF2-40B4-BE49-F238E27FC236}">
-                <a16:creationId xmlns:a16="http://schemas.microsoft.com/office/drawing/2014/main" id="{6381901F-7529-40F5-8D3D-7FFFDB265693}"/>
+                <a16:creationId xmlns:a16="http://schemas.microsoft.com/office/drawing/2014/main" id="{77F85F8D-EA9F-4077-9FDB-B3F15006E111}"/>
               </a:ext>
             </a:extLst>
           </p:cNvPr>
@@ -27718,7 +29099,7 @@
           <p:cNvPr id="5" name="TextBox 5">
             <a:extLst xmlns:a="http://schemas.openxmlformats.org/drawingml/2006/main">
               <a:ext uri="{FF2B5EF4-FFF2-40B4-BE49-F238E27FC236}">
-                <a16:creationId xmlns:a16="http://schemas.microsoft.com/office/drawing/2014/main" id="{4D487B22-64B7-4B21-932E-D2D0F5606040}"/>
+                <a16:creationId xmlns:a16="http://schemas.microsoft.com/office/drawing/2014/main" id="{DBC8767C-7F45-4E0C-95D4-266A4B6B4153}"/>
               </a:ext>
             </a:extLst>
           </p:cNvPr>
@@ -27754,7 +29135,7 @@
           <p:cNvPr id="6" name="Freeform 6">
             <a:extLst xmlns:a="http://schemas.openxmlformats.org/drawingml/2006/main">
               <a:ext uri="{FF2B5EF4-FFF2-40B4-BE49-F238E27FC236}">
-                <a16:creationId xmlns:a16="http://schemas.microsoft.com/office/drawing/2014/main" id="{61251C5A-9B4A-48EF-9A6D-AED91B76C80F}"/>
+                <a16:creationId xmlns:a16="http://schemas.microsoft.com/office/drawing/2014/main" id="{4FF9E9B2-2F95-4449-9CA1-D51F72731772}"/>
               </a:ext>
             </a:extLst>
           </p:cNvPr>
@@ -27792,7 +29173,7 @@
             </a:pathLst>
           </a:custGeom>
           <a:blipFill xmlns:a="http://schemas.openxmlformats.org/drawingml/2006/main">
-            <a:blip xmlns:r="http://schemas.openxmlformats.org/officeDocument/2006/relationships" r:embed="R6153557b153e4593"/>
+            <a:blip xmlns:r="http://schemas.openxmlformats.org/officeDocument/2006/relationships" r:embed="R88d8c1804b004787"/>
             <a:stretch>
               <a:fillRect l="0" t="0" r="0" b="0"/>
             </a:stretch>
@@ -27804,7 +29185,7 @@
           <p:cNvPr id="7" name="Freeform 7">
             <a:extLst xmlns:a="http://schemas.openxmlformats.org/drawingml/2006/main">
               <a:ext uri="{FF2B5EF4-FFF2-40B4-BE49-F238E27FC236}">
-                <a16:creationId xmlns:a16="http://schemas.microsoft.com/office/drawing/2014/main" id="{F149BAF2-2630-48C5-9C77-BCBE9D507E8A}"/>
+                <a16:creationId xmlns:a16="http://schemas.microsoft.com/office/drawing/2014/main" id="{538EF938-CD38-4B56-95DE-3C4082D0072E}"/>
               </a:ext>
             </a:extLst>
           </p:cNvPr>
@@ -27842,10 +29223,10 @@
             </a:pathLst>
           </a:custGeom>
           <a:blipFill xmlns:a="http://schemas.openxmlformats.org/drawingml/2006/main">
-            <a:blip xmlns:r="http://schemas.openxmlformats.org/officeDocument/2006/relationships" r:embed="R2ecd076fb61f4831">
+            <a:blip xmlns:r="http://schemas.openxmlformats.org/officeDocument/2006/relationships" r:embed="Ree65a4b95c1a4df3">
               <a:extLst>
                 <a:ext uri="{96DAC541-7B7A-43D3-8B79-37D633B846F1}">
-                  <asvg:svgBlip xmlns:asvg="http://schemas.microsoft.com/office/drawing/2016/SVG/main" r:embed="R563f32994f5b4723"/>
+                  <asvg:svgBlip xmlns:asvg="http://schemas.microsoft.com/office/drawing/2016/SVG/main" r:embed="Rcce568ef5e7a47a4"/>
                 </a:ext>
               </a:extLst>
             </a:blip>
@@ -27860,7 +29241,7 @@
           <p:cNvPr id="8" name="Freeform 8">
             <a:extLst xmlns:a="http://schemas.openxmlformats.org/drawingml/2006/main">
               <a:ext uri="{FF2B5EF4-FFF2-40B4-BE49-F238E27FC236}">
-                <a16:creationId xmlns:a16="http://schemas.microsoft.com/office/drawing/2014/main" id="{75683AB5-4001-4D00-B276-BEC0F08B361F}"/>
+                <a16:creationId xmlns:a16="http://schemas.microsoft.com/office/drawing/2014/main" id="{22CAC96E-3321-426D-ACBA-FA000CF87E3A}"/>
               </a:ext>
             </a:extLst>
           </p:cNvPr>
@@ -27898,10 +29279,10 @@
             </a:pathLst>
           </a:custGeom>
           <a:blipFill xmlns:a="http://schemas.openxmlformats.org/drawingml/2006/main">
-            <a:blip xmlns:r="http://schemas.openxmlformats.org/officeDocument/2006/relationships" r:embed="R2ecd076fb61f4831">
+            <a:blip xmlns:r="http://schemas.openxmlformats.org/officeDocument/2006/relationships" r:embed="Ree65a4b95c1a4df3">
               <a:extLst>
                 <a:ext uri="{96DAC541-7B7A-43D3-8B79-37D633B846F1}">
-                  <asvg:svgBlip xmlns:asvg="http://schemas.microsoft.com/office/drawing/2016/SVG/main" r:embed="R563f32994f5b4723"/>
+                  <asvg:svgBlip xmlns:asvg="http://schemas.microsoft.com/office/drawing/2016/SVG/main" r:embed="Rcce568ef5e7a47a4"/>
                 </a:ext>
               </a:extLst>
             </a:blip>
@@ -27916,7 +29297,7 @@
           <p:cNvPr id="9" name="TextBox 9">
             <a:extLst xmlns:a="http://schemas.openxmlformats.org/drawingml/2006/main">
               <a:ext uri="{FF2B5EF4-FFF2-40B4-BE49-F238E27FC236}">
-                <a16:creationId xmlns:a16="http://schemas.microsoft.com/office/drawing/2014/main" id="{64B9C994-8D44-4521-9F7E-26C9DECFABEA}"/>
+                <a16:creationId xmlns:a16="http://schemas.microsoft.com/office/drawing/2014/main" id="{0F445D1A-B459-4401-A4ED-D8F490E2511F}"/>
               </a:ext>
             </a:extLst>
           </p:cNvPr>
@@ -27968,7 +29349,7 @@
           <p:cNvPr id="10" name="Freeform 10">
             <a:extLst xmlns:a="http://schemas.openxmlformats.org/drawingml/2006/main">
               <a:ext uri="{FF2B5EF4-FFF2-40B4-BE49-F238E27FC236}">
-                <a16:creationId xmlns:a16="http://schemas.microsoft.com/office/drawing/2014/main" id="{12F0DD1E-1197-452B-A76B-7CD5866030B4}"/>
+                <a16:creationId xmlns:a16="http://schemas.microsoft.com/office/drawing/2014/main" id="{9F3B1313-8D63-4563-8155-CAD679774B9F}"/>
               </a:ext>
             </a:extLst>
           </p:cNvPr>
@@ -28016,7 +29397,7 @@
           <p:cNvPr id="12" name="Freeform 12">
             <a:extLst xmlns:a="http://schemas.openxmlformats.org/drawingml/2006/main">
               <a:ext uri="{FF2B5EF4-FFF2-40B4-BE49-F238E27FC236}">
-                <a16:creationId xmlns:a16="http://schemas.microsoft.com/office/drawing/2014/main" id="{185218E6-7F15-4882-89F9-AB8D3D917C42}"/>
+                <a16:creationId xmlns:a16="http://schemas.microsoft.com/office/drawing/2014/main" id="{3C110CD1-4179-448C-B4D7-E59B2AA28402}"/>
               </a:ext>
             </a:extLst>
           </p:cNvPr>
@@ -28061,7 +29442,7 @@
           <p:cNvPr id="13" name="TextBox 13">
             <a:extLst xmlns:a="http://schemas.openxmlformats.org/drawingml/2006/main">
               <a:ext uri="{FF2B5EF4-FFF2-40B4-BE49-F238E27FC236}">
-                <a16:creationId xmlns:a16="http://schemas.microsoft.com/office/drawing/2014/main" id="{DC03AA6A-E896-46D6-A973-B17F906D8CAE}"/>
+                <a16:creationId xmlns:a16="http://schemas.microsoft.com/office/drawing/2014/main" id="{9BDC54C0-422F-47B4-8766-3A0213B0231C}"/>
               </a:ext>
             </a:extLst>
           </p:cNvPr>
@@ -28222,7 +29603,7 @@
           <p:cNvPr id="14" name="TextBox 14">
             <a:extLst xmlns:a="http://schemas.openxmlformats.org/drawingml/2006/main">
               <a:ext uri="{FF2B5EF4-FFF2-40B4-BE49-F238E27FC236}">
-                <a16:creationId xmlns:a16="http://schemas.microsoft.com/office/drawing/2014/main" id="{8D38A0FB-25E2-442E-BA79-D177E7DCAD2D}"/>
+                <a16:creationId xmlns:a16="http://schemas.microsoft.com/office/drawing/2014/main" id="{57026770-AD0C-4A2A-AEAD-E4245791FDA3}"/>
               </a:ext>
             </a:extLst>
           </p:cNvPr>
@@ -28276,7 +29657,7 @@
           <p:cNvPr id="15" name="TextBox 15">
             <a:extLst xmlns:a="http://schemas.openxmlformats.org/drawingml/2006/main">
               <a:ext uri="{FF2B5EF4-FFF2-40B4-BE49-F238E27FC236}">
-                <a16:creationId xmlns:a16="http://schemas.microsoft.com/office/drawing/2014/main" id="{07C7E953-C9DE-47B0-92AC-86BFB2BA8546}"/>
+                <a16:creationId xmlns:a16="http://schemas.microsoft.com/office/drawing/2014/main" id="{C3857FEA-C71B-4E20-AA06-0F33906F9412}"/>
               </a:ext>
             </a:extLst>
           </p:cNvPr>
@@ -28328,7 +29709,7 @@
           <p:cNvPr id="16" name="TextBox 16">
             <a:extLst xmlns:a="http://schemas.openxmlformats.org/drawingml/2006/main">
               <a:ext uri="{FF2B5EF4-FFF2-40B4-BE49-F238E27FC236}">
-                <a16:creationId xmlns:a16="http://schemas.microsoft.com/office/drawing/2014/main" id="{2A26C467-9BE6-4D1F-B8EB-96FE3C75D490}"/>
+                <a16:creationId xmlns:a16="http://schemas.microsoft.com/office/drawing/2014/main" id="{B36AC534-0FBD-4035-88FD-37E533B569AD}"/>
               </a:ext>
             </a:extLst>
           </p:cNvPr>
@@ -28380,7 +29761,7 @@
           <p:cNvPr id="17" name="內容_6_多能工與防呆">
             <a:extLst xmlns:a="http://schemas.openxmlformats.org/drawingml/2006/main">
               <a:ext uri="{FF2B5EF4-FFF2-40B4-BE49-F238E27FC236}">
-                <a16:creationId xmlns:a16="http://schemas.microsoft.com/office/drawing/2014/main" id="{9EBE3897-5D00-49AE-B7B4-B449E617DF50}"/>
+                <a16:creationId xmlns:a16="http://schemas.microsoft.com/office/drawing/2014/main" id="{270E48F8-E8AD-4807-869E-F8FFB8AB7E87}"/>
               </a:ext>
             </a:extLst>
           </p:cNvPr>
@@ -28538,7 +29919,7 @@
           <p:cNvPr id="18" name="內容_6_五人資源池與 A* 導航">
             <a:extLst xmlns:a="http://schemas.openxmlformats.org/drawingml/2006/main">
               <a:ext uri="{FF2B5EF4-FFF2-40B4-BE49-F238E27FC236}">
-                <a16:creationId xmlns:a16="http://schemas.microsoft.com/office/drawing/2014/main" id="{87C5299F-92BF-4ADD-B062-9A338AA9B4EA}"/>
+                <a16:creationId xmlns:a16="http://schemas.microsoft.com/office/drawing/2014/main" id="{F189CF11-51CF-448B-A8B5-73060BB40640}"/>
               </a:ext>
             </a:extLst>
           </p:cNvPr>
@@ -28696,7 +30077,7 @@
           <p:cNvPr id="19" name="內容_6_QA 隊列 &gt;15 件">
             <a:extLst xmlns:a="http://schemas.openxmlformats.org/drawingml/2006/main">
               <a:ext uri="{FF2B5EF4-FFF2-40B4-BE49-F238E27FC236}">
-                <a16:creationId xmlns:a16="http://schemas.microsoft.com/office/drawing/2014/main" id="{1FEF9631-7855-465F-9B03-B20184D115BB}"/>
+                <a16:creationId xmlns:a16="http://schemas.microsoft.com/office/drawing/2014/main" id="{216D4537-44F7-49CE-984B-CA30D5BD78EE}"/>
               </a:ext>
             </a:extLst>
           </p:cNvPr>
@@ -28854,7 +30235,7 @@
           <p:cNvPr id="20" name="內容_6_鎖定支援員，等現有整新任務完">
             <a:extLst xmlns:a="http://schemas.openxmlformats.org/drawingml/2006/main">
               <a:ext uri="{FF2B5EF4-FFF2-40B4-BE49-F238E27FC236}">
-                <a16:creationId xmlns:a16="http://schemas.microsoft.com/office/drawing/2014/main" id="{121D6502-F0A1-422B-B0E8-E904A13E1008}"/>
+                <a16:creationId xmlns:a16="http://schemas.microsoft.com/office/drawing/2014/main" id="{D8B7CAF4-1D63-4336-BA3F-1FADC5B2134C}"/>
               </a:ext>
             </a:extLst>
           </p:cNvPr>
@@ -29081,7 +30462,7 @@
           <p:cNvPr id="21" name="內容_6_5 人">
             <a:extLst xmlns:a="http://schemas.openxmlformats.org/drawingml/2006/main">
               <a:ext uri="{FF2B5EF4-FFF2-40B4-BE49-F238E27FC236}">
-                <a16:creationId xmlns:a16="http://schemas.microsoft.com/office/drawing/2014/main" id="{86FABA88-35E4-4357-B625-BA247E0DF85C}"/>
+                <a16:creationId xmlns:a16="http://schemas.microsoft.com/office/drawing/2014/main" id="{298B84A3-200A-4149-B218-4240550A22A0}"/>
               </a:ext>
             </a:extLst>
           </p:cNvPr>
@@ -29239,7 +30620,7 @@
           <p:cNvPr id="22" name="內容_6_固定人數&#10;1.4 m/s 步">
             <a:extLst xmlns:a="http://schemas.openxmlformats.org/drawingml/2006/main">
               <a:ext uri="{FF2B5EF4-FFF2-40B4-BE49-F238E27FC236}">
-                <a16:creationId xmlns:a16="http://schemas.microsoft.com/office/drawing/2014/main" id="{D5C23AF7-BBE8-466B-9301-2E20B52D512B}"/>
+                <a16:creationId xmlns:a16="http://schemas.microsoft.com/office/drawing/2014/main" id="{46A49203-FB15-4AB3-95B8-460D5AE29B1D}"/>
               </a:ext>
             </a:extLst>
           </p:cNvPr>
@@ -29443,7 +30824,7 @@
           <p:cNvPr id="23" name="內容_6_5人×40段往返；86,79">
             <a:extLst xmlns:a="http://schemas.openxmlformats.org/drawingml/2006/main">
               <a:ext uri="{FF2B5EF4-FFF2-40B4-BE49-F238E27FC236}">
-                <a16:creationId xmlns:a16="http://schemas.microsoft.com/office/drawing/2014/main" id="{501B9B25-A990-4474-B4EB-2FC5D04E951B}"/>
+                <a16:creationId xmlns:a16="http://schemas.microsoft.com/office/drawing/2014/main" id="{F7C4F44D-2378-4124-80DB-B14A209D4039}"/>
               </a:ext>
             </a:extLst>
           </p:cNvPr>
@@ -29599,7 +30980,7 @@
     </p:spTree>
     <p:extLst>
       <p:ext uri="{BB962C8B-B14F-4D97-AF65-F5344CB8AC3E}">
-        <p14:creationId xmlns:p14="http://schemas.microsoft.com/office/powerpoint/2010/main" val="800969506"/>
+        <p14:creationId xmlns:p14="http://schemas.microsoft.com/office/powerpoint/2010/main" val="2070929505"/>
       </p:ext>
     </p:extLst>
   </p:cSld>
@@ -29623,7 +31004,7 @@
           <p:cNvPr id="2" name="Freeform 2">
             <a:extLst xmlns:a="http://schemas.openxmlformats.org/drawingml/2006/main">
               <a:ext uri="{FF2B5EF4-FFF2-40B4-BE49-F238E27FC236}">
-                <a16:creationId xmlns:a16="http://schemas.microsoft.com/office/drawing/2014/main" id="{AAAC2B95-A1FF-4C4C-B94F-FDB07EA9E37E}"/>
+                <a16:creationId xmlns:a16="http://schemas.microsoft.com/office/drawing/2014/main" id="{0B07C207-1208-4B18-B811-74729D5BD07F}"/>
               </a:ext>
             </a:extLst>
           </p:cNvPr>
@@ -29661,7 +31042,7 @@
             </a:pathLst>
           </a:custGeom>
           <a:blipFill xmlns:a="http://schemas.openxmlformats.org/drawingml/2006/main">
-            <a:blip xmlns:r="http://schemas.openxmlformats.org/officeDocument/2006/relationships" r:embed="R20dd9074d27a480b"/>
+            <a:blip xmlns:r="http://schemas.openxmlformats.org/officeDocument/2006/relationships" r:embed="Rb6aa8e2430194a7f"/>
             <a:stretch>
               <a:fillRect l="-35258" t="-5555" r="-24931" b="-72434"/>
             </a:stretch>
@@ -29673,7 +31054,7 @@
           <p:cNvPr id="3" name="TextBox 3">
             <a:extLst xmlns:a="http://schemas.openxmlformats.org/drawingml/2006/main">
               <a:ext uri="{FF2B5EF4-FFF2-40B4-BE49-F238E27FC236}">
-                <a16:creationId xmlns:a16="http://schemas.microsoft.com/office/drawing/2014/main" id="{C0967866-A3B7-4E14-9AE3-F908A753B4CD}"/>
+                <a16:creationId xmlns:a16="http://schemas.microsoft.com/office/drawing/2014/main" id="{9ED61450-491F-4F22-9AE5-F952FB016D87}"/>
               </a:ext>
             </a:extLst>
           </p:cNvPr>
@@ -29725,7 +31106,7 @@
           <p:cNvPr id="4" name="TextBox 4">
             <a:extLst xmlns:a="http://schemas.openxmlformats.org/drawingml/2006/main">
               <a:ext uri="{FF2B5EF4-FFF2-40B4-BE49-F238E27FC236}">
-                <a16:creationId xmlns:a16="http://schemas.microsoft.com/office/drawing/2014/main" id="{F4701109-105B-483F-B777-E5358DF4D207}"/>
+                <a16:creationId xmlns:a16="http://schemas.microsoft.com/office/drawing/2014/main" id="{2D08625D-0AB8-4097-9F01-6D959FB9725C}"/>
               </a:ext>
             </a:extLst>
           </p:cNvPr>
@@ -29777,7 +31158,7 @@
           <p:cNvPr id="6" name="Freeform 6">
             <a:extLst xmlns:a="http://schemas.openxmlformats.org/drawingml/2006/main">
               <a:ext uri="{FF2B5EF4-FFF2-40B4-BE49-F238E27FC236}">
-                <a16:creationId xmlns:a16="http://schemas.microsoft.com/office/drawing/2014/main" id="{F032AB1C-4E8F-4D39-9487-AD69EBD65597}"/>
+                <a16:creationId xmlns:a16="http://schemas.microsoft.com/office/drawing/2014/main" id="{EC7C895A-B724-46F3-BD86-D4A530F2BF2D}"/>
               </a:ext>
             </a:extLst>
           </p:cNvPr>
@@ -29851,7 +31232,7 @@
           <p:cNvPr id="7" name="TextBox 7">
             <a:extLst xmlns:a="http://schemas.openxmlformats.org/drawingml/2006/main">
               <a:ext uri="{FF2B5EF4-FFF2-40B4-BE49-F238E27FC236}">
-                <a16:creationId xmlns:a16="http://schemas.microsoft.com/office/drawing/2014/main" id="{A52B4781-AF6F-46ED-808E-CAAE2534E600}"/>
+                <a16:creationId xmlns:a16="http://schemas.microsoft.com/office/drawing/2014/main" id="{43A99C24-7FE0-4998-81FE-3CEE4A1C1EAB}"/>
               </a:ext>
             </a:extLst>
           </p:cNvPr>
@@ -29887,7 +31268,7 @@
           <p:cNvPr id="8" name="TextBox 8">
             <a:extLst xmlns:a="http://schemas.openxmlformats.org/drawingml/2006/main">
               <a:ext uri="{FF2B5EF4-FFF2-40B4-BE49-F238E27FC236}">
-                <a16:creationId xmlns:a16="http://schemas.microsoft.com/office/drawing/2014/main" id="{95C75BB6-27E5-44DB-890D-4054DC75C153}"/>
+                <a16:creationId xmlns:a16="http://schemas.microsoft.com/office/drawing/2014/main" id="{86D99507-2340-47F5-8799-041BACA30256}"/>
               </a:ext>
             </a:extLst>
           </p:cNvPr>
@@ -30048,7 +31429,7 @@
           <p:cNvPr id="9" name="Freeform 9">
             <a:extLst xmlns:a="http://schemas.openxmlformats.org/drawingml/2006/main">
               <a:ext uri="{FF2B5EF4-FFF2-40B4-BE49-F238E27FC236}">
-                <a16:creationId xmlns:a16="http://schemas.microsoft.com/office/drawing/2014/main" id="{697E8B38-FE39-4617-9337-12ECA9D72510}"/>
+                <a16:creationId xmlns:a16="http://schemas.microsoft.com/office/drawing/2014/main" id="{E94308F8-8F86-4AEC-B782-4F7DC4244749}"/>
               </a:ext>
             </a:extLst>
           </p:cNvPr>
@@ -30086,7 +31467,7 @@
             </a:pathLst>
           </a:custGeom>
           <a:blipFill xmlns:a="http://schemas.openxmlformats.org/drawingml/2006/main">
-            <a:blip xmlns:r="http://schemas.openxmlformats.org/officeDocument/2006/relationships" r:embed="Rd1192055522c4e66"/>
+            <a:blip xmlns:r="http://schemas.openxmlformats.org/officeDocument/2006/relationships" r:embed="Rc2e0ee1c7f144ba9"/>
             <a:stretch>
               <a:fillRect l="0" t="0" r="0" b="0"/>
             </a:stretch>
@@ -30098,7 +31479,7 @@
           <p:cNvPr id="10" name="Freeform 10">
             <a:extLst xmlns:a="http://schemas.openxmlformats.org/drawingml/2006/main">
               <a:ext uri="{FF2B5EF4-FFF2-40B4-BE49-F238E27FC236}">
-                <a16:creationId xmlns:a16="http://schemas.microsoft.com/office/drawing/2014/main" id="{67BF5FFB-8A68-4A37-B5F3-697864EB084F}"/>
+                <a16:creationId xmlns:a16="http://schemas.microsoft.com/office/drawing/2014/main" id="{FDF7363E-B486-4654-9BE1-F6E48990C763}"/>
               </a:ext>
             </a:extLst>
           </p:cNvPr>
@@ -30136,10 +31517,10 @@
             </a:pathLst>
           </a:custGeom>
           <a:blipFill xmlns:a="http://schemas.openxmlformats.org/drawingml/2006/main">
-            <a:blip xmlns:r="http://schemas.openxmlformats.org/officeDocument/2006/relationships" r:embed="Rc8eae467cbf749b3">
+            <a:blip xmlns:r="http://schemas.openxmlformats.org/officeDocument/2006/relationships" r:embed="R1d6205247c95467c">
               <a:extLst>
                 <a:ext uri="{96DAC541-7B7A-43D3-8B79-37D633B846F1}">
-                  <asvg:svgBlip xmlns:asvg="http://schemas.microsoft.com/office/drawing/2016/SVG/main" r:embed="R92d4e6105cc34da6"/>
+                  <asvg:svgBlip xmlns:asvg="http://schemas.microsoft.com/office/drawing/2016/SVG/main" r:embed="R6aa3a05f9ff84b4e"/>
                 </a:ext>
               </a:extLst>
             </a:blip>
@@ -30154,7 +31535,7 @@
           <p:cNvPr id="11" name="Freeform 11">
             <a:extLst xmlns:a="http://schemas.openxmlformats.org/drawingml/2006/main">
               <a:ext uri="{FF2B5EF4-FFF2-40B4-BE49-F238E27FC236}">
-                <a16:creationId xmlns:a16="http://schemas.microsoft.com/office/drawing/2014/main" id="{FF5A77F3-8E52-4748-B363-D08718FB5EF4}"/>
+                <a16:creationId xmlns:a16="http://schemas.microsoft.com/office/drawing/2014/main" id="{508CE153-4B20-4D8E-8246-2B5F1CF80165}"/>
               </a:ext>
             </a:extLst>
           </p:cNvPr>
@@ -30192,10 +31573,10 @@
             </a:pathLst>
           </a:custGeom>
           <a:blipFill xmlns:a="http://schemas.openxmlformats.org/drawingml/2006/main">
-            <a:blip xmlns:r="http://schemas.openxmlformats.org/officeDocument/2006/relationships" r:embed="Rc8eae467cbf749b3">
+            <a:blip xmlns:r="http://schemas.openxmlformats.org/officeDocument/2006/relationships" r:embed="R1d6205247c95467c">
               <a:extLst>
                 <a:ext uri="{96DAC541-7B7A-43D3-8B79-37D633B846F1}">
-                  <asvg:svgBlip xmlns:asvg="http://schemas.microsoft.com/office/drawing/2016/SVG/main" r:embed="R92d4e6105cc34da6"/>
+                  <asvg:svgBlip xmlns:asvg="http://schemas.microsoft.com/office/drawing/2016/SVG/main" r:embed="R6aa3a05f9ff84b4e"/>
                 </a:ext>
               </a:extLst>
             </a:blip>
@@ -30210,7 +31591,7 @@
           <p:cNvPr id="12" name="TextBox 12">
             <a:extLst xmlns:a="http://schemas.openxmlformats.org/drawingml/2006/main">
               <a:ext uri="{FF2B5EF4-FFF2-40B4-BE49-F238E27FC236}">
-                <a16:creationId xmlns:a16="http://schemas.microsoft.com/office/drawing/2014/main" id="{912E61ED-5477-44A7-BA0C-396ACBE4413C}"/>
+                <a16:creationId xmlns:a16="http://schemas.microsoft.com/office/drawing/2014/main" id="{41E16733-AD0F-41C2-BCFA-AA4840DCEC27}"/>
               </a:ext>
             </a:extLst>
           </p:cNvPr>
@@ -30264,7 +31645,7 @@
           <p:cNvPr id="14" name="Freeform 14">
             <a:extLst xmlns:a="http://schemas.openxmlformats.org/drawingml/2006/main">
               <a:ext uri="{FF2B5EF4-FFF2-40B4-BE49-F238E27FC236}">
-                <a16:creationId xmlns:a16="http://schemas.microsoft.com/office/drawing/2014/main" id="{F260B61A-88D3-434F-B701-3E09E41BB4B9}"/>
+                <a16:creationId xmlns:a16="http://schemas.microsoft.com/office/drawing/2014/main" id="{5EF71CD0-A4D5-4169-9DE4-674BF1194EAC}"/>
               </a:ext>
             </a:extLst>
           </p:cNvPr>
@@ -30323,7 +31704,7 @@
           <p:cNvPr id="15" name="TextBox 15">
             <a:extLst xmlns:a="http://schemas.openxmlformats.org/drawingml/2006/main">
               <a:ext uri="{FF2B5EF4-FFF2-40B4-BE49-F238E27FC236}">
-                <a16:creationId xmlns:a16="http://schemas.microsoft.com/office/drawing/2014/main" id="{9B901C7A-36E0-419B-8859-22263F96AA87}"/>
+                <a16:creationId xmlns:a16="http://schemas.microsoft.com/office/drawing/2014/main" id="{73A8118B-5E9E-4A42-99A2-78588FC7432B}"/>
               </a:ext>
             </a:extLst>
           </p:cNvPr>
@@ -30363,7 +31744,7 @@
           <p:cNvPr id="16" name="TextBox 16">
             <a:extLst xmlns:a="http://schemas.openxmlformats.org/drawingml/2006/main">
               <a:ext uri="{FF2B5EF4-FFF2-40B4-BE49-F238E27FC236}">
-                <a16:creationId xmlns:a16="http://schemas.microsoft.com/office/drawing/2014/main" id="{6A7B9754-8E16-4B2A-873E-D2457E71A602}"/>
+                <a16:creationId xmlns:a16="http://schemas.microsoft.com/office/drawing/2014/main" id="{57D1B828-8128-4D9D-8426-EE401F506D79}"/>
               </a:ext>
             </a:extLst>
           </p:cNvPr>
@@ -30412,7 +31793,7 @@
           <p:cNvPr id="17" name="TextBox 17">
             <a:extLst xmlns:a="http://schemas.openxmlformats.org/drawingml/2006/main">
               <a:ext uri="{FF2B5EF4-FFF2-40B4-BE49-F238E27FC236}">
-                <a16:creationId xmlns:a16="http://schemas.microsoft.com/office/drawing/2014/main" id="{69B1AAB7-4216-4004-9C87-B9875891E14C}"/>
+                <a16:creationId xmlns:a16="http://schemas.microsoft.com/office/drawing/2014/main" id="{B5318541-C3CC-472C-86E9-2C5FA82F46EA}"/>
               </a:ext>
             </a:extLst>
           </p:cNvPr>
@@ -30464,7 +31845,7 @@
           <p:cNvPr id="19" name="Freeform 19">
             <a:extLst xmlns:a="http://schemas.openxmlformats.org/drawingml/2006/main">
               <a:ext uri="{FF2B5EF4-FFF2-40B4-BE49-F238E27FC236}">
-                <a16:creationId xmlns:a16="http://schemas.microsoft.com/office/drawing/2014/main" id="{1C24267A-1BA4-4E08-89C7-9C3794BEBAF4}"/>
+                <a16:creationId xmlns:a16="http://schemas.microsoft.com/office/drawing/2014/main" id="{740841FA-270D-42B4-98EA-CC02F77FB9F0}"/>
               </a:ext>
             </a:extLst>
           </p:cNvPr>
@@ -30523,7 +31904,7 @@
           <p:cNvPr id="20" name="TextBox 20">
             <a:extLst xmlns:a="http://schemas.openxmlformats.org/drawingml/2006/main">
               <a:ext uri="{FF2B5EF4-FFF2-40B4-BE49-F238E27FC236}">
-                <a16:creationId xmlns:a16="http://schemas.microsoft.com/office/drawing/2014/main" id="{14D1CCB6-C94E-4DEC-8AC2-7013C9D918C9}"/>
+                <a16:creationId xmlns:a16="http://schemas.microsoft.com/office/drawing/2014/main" id="{BFDDF85E-4465-49FC-9B08-6DC21AE71517}"/>
               </a:ext>
             </a:extLst>
           </p:cNvPr>
@@ -30563,7 +31944,7 @@
           <p:cNvPr id="21" name="TextBox 21">
             <a:extLst xmlns:a="http://schemas.openxmlformats.org/drawingml/2006/main">
               <a:ext uri="{FF2B5EF4-FFF2-40B4-BE49-F238E27FC236}">
-                <a16:creationId xmlns:a16="http://schemas.microsoft.com/office/drawing/2014/main" id="{4DD6A6F0-3454-4C1F-B85C-975BB8CE74AA}"/>
+                <a16:creationId xmlns:a16="http://schemas.microsoft.com/office/drawing/2014/main" id="{0030A50A-B38B-4FE3-9BFE-09E92091E633}"/>
               </a:ext>
             </a:extLst>
           </p:cNvPr>
@@ -30612,7 +31993,7 @@
           <p:cNvPr id="22" name="TextBox 22">
             <a:extLst xmlns:a="http://schemas.openxmlformats.org/drawingml/2006/main">
               <a:ext uri="{FF2B5EF4-FFF2-40B4-BE49-F238E27FC236}">
-                <a16:creationId xmlns:a16="http://schemas.microsoft.com/office/drawing/2014/main" id="{55B73C90-263A-4EAE-8A1E-42A68EB5D336}"/>
+                <a16:creationId xmlns:a16="http://schemas.microsoft.com/office/drawing/2014/main" id="{D39C73B8-35EA-40B2-90C9-DBCE7EB8A2C3}"/>
               </a:ext>
             </a:extLst>
           </p:cNvPr>
@@ -30664,7 +32045,7 @@
           <p:cNvPr id="23" name="AutoShape 23">
             <a:extLst xmlns:a="http://schemas.openxmlformats.org/drawingml/2006/main">
               <a:ext uri="{FF2B5EF4-FFF2-40B4-BE49-F238E27FC236}">
-                <a16:creationId xmlns:a16="http://schemas.microsoft.com/office/drawing/2014/main" id="{A77DB788-FF99-4038-9FA7-78D9C181F02C}"/>
+                <a16:creationId xmlns:a16="http://schemas.microsoft.com/office/drawing/2014/main" id="{27E1CF09-E747-40EB-8D36-E228D70CF036}"/>
               </a:ext>
             </a:extLst>
           </p:cNvPr>
@@ -30691,10 +32072,10 @@
       </p:sp>
       <p:sp>
         <p:nvSpPr>
-          <p:cNvPr id="24" name="內容_7_ESG 計算">
-            <a:extLst xmlns:a="http://schemas.openxmlformats.org/drawingml/2006/main">
-              <a:ext uri="{FF2B5EF4-FFF2-40B4-BE49-F238E27FC236}">
-                <a16:creationId xmlns:a16="http://schemas.microsoft.com/office/drawing/2014/main" id="{CF452CD3-955E-4E25-A4DE-7D2C084FE313}"/>
+          <p:cNvPr id="24" name="內容_7_ESG：門檻與增量">
+            <a:extLst xmlns:a="http://schemas.openxmlformats.org/drawingml/2006/main">
+              <a:ext uri="{FF2B5EF4-FFF2-40B4-BE49-F238E27FC236}">
+                <a16:creationId xmlns:a16="http://schemas.microsoft.com/office/drawing/2014/main" id="{CFCE8D60-42AA-4CFF-86AA-22F26E507D12}"/>
               </a:ext>
             </a:extLst>
           </p:cNvPr>
@@ -30842,17 +32223,17 @@
                 <a:ea typeface="Microsoft JhengHei"/>
                 <a:cs typeface="Microsoft JhengHei"/>
               </a:rPr>
-              <a:t>ESG 計算</a:t>
+              <a:t>ESG：門檻與增量</a:t>
             </a:r>
           </a:p>
         </p:txBody>
       </p:sp>
       <p:sp>
         <p:nvSpPr>
-          <p:cNvPr id="25" name="內容_7_用設備狀態累積能耗">
-            <a:extLst xmlns:a="http://schemas.openxmlformats.org/drawingml/2006/main">
-              <a:ext uri="{FF2B5EF4-FFF2-40B4-BE49-F238E27FC236}">
-                <a16:creationId xmlns:a16="http://schemas.microsoft.com/office/drawing/2014/main" id="{3C60D0B2-2C2E-43E9-9D5E-9A49EA9464EA}"/>
+          <p:cNvPr id="25" name="內容_7_74%達標，不等於P4再省7">
+            <a:extLst xmlns:a="http://schemas.openxmlformats.org/drawingml/2006/main">
+              <a:ext uri="{FF2B5EF4-FFF2-40B4-BE49-F238E27FC236}">
+                <a16:creationId xmlns:a16="http://schemas.microsoft.com/office/drawing/2014/main" id="{3C7DDB05-2768-4D60-8030-93418C4C5E83}"/>
               </a:ext>
             </a:extLst>
           </p:cNvPr>
@@ -31000,17 +32381,17 @@
                 <a:ea typeface="Microsoft JhengHei"/>
                 <a:cs typeface="Microsoft JhengHei"/>
               </a:rPr>
-              <a:t>用設備狀態累積能耗</a:t>
+              <a:t>74%達標，不等於P4再省74%</a:t>
             </a:r>
           </a:p>
         </p:txBody>
       </p:sp>
       <p:sp>
         <p:nvSpPr>
-          <p:cNvPr id="26" name="內容_7_清洗機">
-            <a:extLst xmlns:a="http://schemas.openxmlformats.org/drawingml/2006/main">
-              <a:ext uri="{FF2B5EF4-FFF2-40B4-BE49-F238E27FC236}">
-                <a16:creationId xmlns:a16="http://schemas.microsoft.com/office/drawing/2014/main" id="{E2FD325F-9ADD-4B22-AA6E-891CE0E6CFED}"/>
+          <p:cNvPr id="26" name="內容_7_Before 73.853%">
+            <a:extLst xmlns:a="http://schemas.openxmlformats.org/drawingml/2006/main">
+              <a:ext uri="{FF2B5EF4-FFF2-40B4-BE49-F238E27FC236}">
+                <a16:creationId xmlns:a16="http://schemas.microsoft.com/office/drawing/2014/main" id="{EF9A03EB-0271-4122-A4B7-518EAA21FD4C}"/>
               </a:ext>
             </a:extLst>
           </p:cNvPr>
@@ -31021,8 +32402,8 @@
         </p:nvSpPr>
         <p:spPr>
           <a:xfrm xmlns:a="http://schemas.openxmlformats.org/drawingml/2006/main">
-            <a:off x="2095500" y="4381500"/>
-            <a:ext cx="6191250" cy="628650"/>
+            <a:off x="1581150" y="4333875"/>
+            <a:ext cx="7429500" cy="857250"/>
           </a:xfrm>
           <a:prstGeom xmlns:a="http://schemas.openxmlformats.org/drawingml/2006/main" prst="rect">
             <a:avLst/>
@@ -31038,7 +32419,7 @@
           </a:bodyPr>
           <a:lstStyle xmlns:a="http://schemas.openxmlformats.org/drawingml/2006/main">
             <a:defPPr>
-              <a:defRPr sz="3750" b="1">
+              <a:defRPr sz="4350" b="1">
                 <a:solidFill>
                   <a:srgbClr val="DF96DA"/>
                 </a:solidFill>
@@ -31048,7 +32429,7 @@
               </a:defRPr>
             </a:defPPr>
             <a:lvl1pPr>
-              <a:defRPr sz="3750" b="1">
+              <a:defRPr sz="4350" b="1">
                 <a:solidFill>
                   <a:srgbClr val="DF96DA"/>
                 </a:solidFill>
@@ -31058,7 +32439,7 @@
               </a:defRPr>
             </a:lvl1pPr>
             <a:lvl2pPr>
-              <a:defRPr sz="3750" b="1">
+              <a:defRPr sz="4350" b="1">
                 <a:solidFill>
                   <a:srgbClr val="DF96DA"/>
                 </a:solidFill>
@@ -31068,7 +32449,7 @@
               </a:defRPr>
             </a:lvl2pPr>
             <a:lvl3pPr>
-              <a:defRPr sz="3750" b="1">
+              <a:defRPr sz="4350" b="1">
                 <a:solidFill>
                   <a:srgbClr val="DF96DA"/>
                 </a:solidFill>
@@ -31078,7 +32459,7 @@
               </a:defRPr>
             </a:lvl3pPr>
             <a:lvl4pPr>
-              <a:defRPr sz="3750" b="1">
+              <a:defRPr sz="4350" b="1">
                 <a:solidFill>
                   <a:srgbClr val="DF96DA"/>
                 </a:solidFill>
@@ -31088,7 +32469,7 @@
               </a:defRPr>
             </a:lvl4pPr>
             <a:lvl5pPr>
-              <a:defRPr sz="3750" b="1">
+              <a:defRPr sz="4350" b="1">
                 <a:solidFill>
                   <a:srgbClr val="DF96DA"/>
                 </a:solidFill>
@@ -31098,7 +32479,7 @@
               </a:defRPr>
             </a:lvl5pPr>
             <a:lvl6pPr>
-              <a:defRPr sz="3750" b="1">
+              <a:defRPr sz="4350" b="1">
                 <a:solidFill>
                   <a:srgbClr val="DF96DA"/>
                 </a:solidFill>
@@ -31108,7 +32489,7 @@
               </a:defRPr>
             </a:lvl6pPr>
             <a:lvl7pPr>
-              <a:defRPr sz="3750" b="1">
+              <a:defRPr sz="4350" b="1">
                 <a:solidFill>
                   <a:srgbClr val="DF96DA"/>
                 </a:solidFill>
@@ -31118,7 +32499,7 @@
               </a:defRPr>
             </a:lvl7pPr>
             <a:lvl8pPr>
-              <a:defRPr sz="3750" b="1">
+              <a:defRPr sz="4350" b="1">
                 <a:solidFill>
                   <a:srgbClr val="DF96DA"/>
                 </a:solidFill>
@@ -31128,7 +32509,7 @@
               </a:defRPr>
             </a:lvl8pPr>
             <a:lvl9pPr>
-              <a:defRPr sz="3750" b="1">
+              <a:defRPr sz="4350" b="1">
                 <a:solidFill>
                   <a:srgbClr val="DF96DA"/>
                 </a:solidFill>
@@ -31140,7 +32521,7 @@
           </a:lstStyle>
           <a:p xmlns:a="http://schemas.openxmlformats.org/drawingml/2006/main">
             <a:pPr>
-              <a:defRPr sz="3750" b="1">
+              <a:defRPr sz="4350" b="1">
                 <a:solidFill>
                   <a:srgbClr val="DF96DA"/>
                 </a:solidFill>
@@ -31150,7 +32531,7 @@
               </a:defRPr>
             </a:pPr>
             <a:r>
-              <a:rPr sz="3750" b="1">
+              <a:rPr sz="4350" b="1">
                 <a:solidFill>
                   <a:srgbClr val="DF96DA"/>
                 </a:solidFill>
@@ -31158,17 +32539,17 @@
                 <a:ea typeface="Microsoft JhengHei"/>
                 <a:cs typeface="Microsoft JhengHei"/>
               </a:rPr>
-              <a:t>清洗機</a:t>
+              <a:t>Before 73.853%</a:t>
             </a:r>
           </a:p>
         </p:txBody>
       </p:sp>
       <p:sp>
         <p:nvSpPr>
-          <p:cNvPr id="27" name="內容_7_加工18kW；待機3kW&#10;加">
-            <a:extLst xmlns:a="http://schemas.openxmlformats.org/drawingml/2006/main">
-              <a:ext uri="{FF2B5EF4-FFF2-40B4-BE49-F238E27FC236}">
-                <a16:creationId xmlns:a16="http://schemas.microsoft.com/office/drawing/2014/main" id="{C9F1572A-E4DC-47E1-8BF6-D0C508BDE681}"/>
+          <p:cNvPr id="27" name="內容_7_每件0.184875 kWh">
+            <a:extLst xmlns:a="http://schemas.openxmlformats.org/drawingml/2006/main">
+              <a:ext uri="{FF2B5EF4-FFF2-40B4-BE49-F238E27FC236}">
+                <a16:creationId xmlns:a16="http://schemas.microsoft.com/office/drawing/2014/main" id="{1D9E0E98-095A-4AA2-8E0C-A8596AB95D70}"/>
               </a:ext>
             </a:extLst>
           </p:cNvPr>
@@ -31179,8 +32560,8 @@
         </p:nvSpPr>
         <p:spPr>
           <a:xfrm xmlns:a="http://schemas.openxmlformats.org/drawingml/2006/main">
-            <a:off x="2095500" y="5286375"/>
-            <a:ext cx="6191250" cy="2095500"/>
+            <a:off x="1581150" y="5476875"/>
+            <a:ext cx="7715250" cy="1905000"/>
           </a:xfrm>
           <a:prstGeom xmlns:a="http://schemas.openxmlformats.org/drawingml/2006/main" prst="rect">
             <a:avLst/>
@@ -31196,7 +32577,7 @@
           </a:bodyPr>
           <a:lstStyle xmlns:a="http://schemas.openxmlformats.org/drawingml/2006/main">
             <a:defPPr>
-              <a:defRPr sz="2700" b="0">
+              <a:defRPr sz="2550" b="0">
                 <a:solidFill>
                   <a:srgbClr val="F6E0F5"/>
                 </a:solidFill>
@@ -31206,7 +32587,7 @@
               </a:defRPr>
             </a:defPPr>
             <a:lvl1pPr>
-              <a:defRPr sz="2700" b="0">
+              <a:defRPr sz="2550" b="0">
                 <a:solidFill>
                   <a:srgbClr val="F6E0F5"/>
                 </a:solidFill>
@@ -31216,7 +32597,7 @@
               </a:defRPr>
             </a:lvl1pPr>
             <a:lvl2pPr>
-              <a:defRPr sz="2700" b="0">
+              <a:defRPr sz="2550" b="0">
                 <a:solidFill>
                   <a:srgbClr val="F6E0F5"/>
                 </a:solidFill>
@@ -31226,7 +32607,7 @@
               </a:defRPr>
             </a:lvl2pPr>
             <a:lvl3pPr>
-              <a:defRPr sz="2700" b="0">
+              <a:defRPr sz="2550" b="0">
                 <a:solidFill>
                   <a:srgbClr val="F6E0F5"/>
                 </a:solidFill>
@@ -31236,7 +32617,7 @@
               </a:defRPr>
             </a:lvl3pPr>
             <a:lvl4pPr>
-              <a:defRPr sz="2700" b="0">
+              <a:defRPr sz="2550" b="0">
                 <a:solidFill>
                   <a:srgbClr val="F6E0F5"/>
                 </a:solidFill>
@@ -31246,7 +32627,7 @@
               </a:defRPr>
             </a:lvl4pPr>
             <a:lvl5pPr>
-              <a:defRPr sz="2700" b="0">
+              <a:defRPr sz="2550" b="0">
                 <a:solidFill>
                   <a:srgbClr val="F6E0F5"/>
                 </a:solidFill>
@@ -31256,7 +32637,7 @@
               </a:defRPr>
             </a:lvl5pPr>
             <a:lvl6pPr>
-              <a:defRPr sz="2700" b="0">
+              <a:defRPr sz="2550" b="0">
                 <a:solidFill>
                   <a:srgbClr val="F6E0F5"/>
                 </a:solidFill>
@@ -31266,7 +32647,7 @@
               </a:defRPr>
             </a:lvl6pPr>
             <a:lvl7pPr>
-              <a:defRPr sz="2700" b="0">
+              <a:defRPr sz="2550" b="0">
                 <a:solidFill>
                   <a:srgbClr val="F6E0F5"/>
                 </a:solidFill>
@@ -31276,7 +32657,7 @@
               </a:defRPr>
             </a:lvl7pPr>
             <a:lvl8pPr>
-              <a:defRPr sz="2700" b="0">
+              <a:defRPr sz="2550" b="0">
                 <a:solidFill>
                   <a:srgbClr val="F6E0F5"/>
                 </a:solidFill>
@@ -31286,7 +32667,7 @@
               </a:defRPr>
             </a:lvl8pPr>
             <a:lvl9pPr>
-              <a:defRPr sz="2700" b="0">
+              <a:defRPr sz="2550" b="0">
                 <a:solidFill>
                   <a:srgbClr val="F6E0F5"/>
                 </a:solidFill>
@@ -31298,7 +32679,7 @@
           </a:lstStyle>
           <a:p xmlns:a="http://schemas.openxmlformats.org/drawingml/2006/main">
             <a:pPr>
-              <a:defRPr sz="2700" b="0">
+              <a:defRPr sz="2550" b="0">
                 <a:solidFill>
                   <a:srgbClr val="F6E0F5"/>
                 </a:solidFill>
@@ -31308,7 +32689,7 @@
               </a:defRPr>
             </a:pPr>
             <a:r>
-              <a:rPr sz="2700" b="0">
+              <a:rPr sz="2550" b="0">
                 <a:solidFill>
                   <a:srgbClr val="F6E0F5"/>
                 </a:solidFill>
@@ -31316,12 +32697,12 @@
                 <a:ea typeface="Microsoft JhengHei"/>
                 <a:cs typeface="Microsoft JhengHei"/>
               </a:rPr>
-              <a:t>加工18kW；待機3kW</a:t>
+              <a:t>每件0.184875 kWh</a:t>
             </a:r>
           </a:p>
           <a:p xmlns:a="http://schemas.openxmlformats.org/drawingml/2006/main">
             <a:pPr>
-              <a:defRPr sz="2700" b="0">
+              <a:defRPr sz="2550" b="0">
                 <a:solidFill>
                   <a:srgbClr val="F6E0F5"/>
                 </a:solidFill>
@@ -31331,7 +32712,7 @@
               </a:defRPr>
             </a:pPr>
             <a:r>
-              <a:rPr sz="2700" b="0">
+              <a:rPr sz="2550" b="0">
                 <a:solidFill>
                   <a:srgbClr val="F6E0F5"/>
                 </a:solidFill>
@@ -31339,12 +32720,12 @@
                 <a:ea typeface="Microsoft JhengHei"/>
                 <a:cs typeface="Microsoft JhengHei"/>
               </a:rPr>
-              <a:t>加工、待機、停機時間分開統計</a:t>
+              <a:t>1 − 0.184875 × 0.495 ÷ 0.35</a:t>
             </a:r>
           </a:p>
           <a:p xmlns:a="http://schemas.openxmlformats.org/drawingml/2006/main">
             <a:pPr>
-              <a:defRPr sz="2700" b="0">
+              <a:defRPr sz="2550" b="0">
                 <a:solidFill>
                   <a:srgbClr val="F6E0F5"/>
                 </a:solidFill>
@@ -31354,7 +32735,7 @@
               </a:defRPr>
             </a:pPr>
             <a:r>
-              <a:rPr sz="2700" b="0">
+              <a:rPr sz="2550" b="0">
                 <a:solidFill>
                   <a:srgbClr val="F6E0F5"/>
                 </a:solidFill>
@@ -31362,17 +32743,17 @@
                 <a:ea typeface="Microsoft JhengHei"/>
                 <a:cs typeface="Microsoft JhengHei"/>
               </a:rPr>
-              <a:t>第二台清洗機另計能耗</a:t>
+              <a:t>＝ 73.853%：Before已超過42%</a:t>
             </a:r>
           </a:p>
         </p:txBody>
       </p:sp>
       <p:sp>
         <p:nvSpPr>
-          <p:cNvPr id="28" name="內容_7_完整淨減碳">
-            <a:extLst xmlns:a="http://schemas.openxmlformats.org/drawingml/2006/main">
-              <a:ext uri="{FF2B5EF4-FFF2-40B4-BE49-F238E27FC236}">
-                <a16:creationId xmlns:a16="http://schemas.microsoft.com/office/drawing/2014/main" id="{04CF1724-D1A1-49B7-89D8-58046F9067BA}"/>
+          <p:cNvPr id="28" name="內容_7_主推12m 73.995%">
+            <a:extLst xmlns:a="http://schemas.openxmlformats.org/drawingml/2006/main">
+              <a:ext uri="{FF2B5EF4-FFF2-40B4-BE49-F238E27FC236}">
+                <a16:creationId xmlns:a16="http://schemas.microsoft.com/office/drawing/2014/main" id="{1F892377-6412-4428-8463-F4C68EE0348D}"/>
               </a:ext>
             </a:extLst>
           </p:cNvPr>
@@ -31383,8 +32764,8 @@
         </p:nvSpPr>
         <p:spPr>
           <a:xfrm xmlns:a="http://schemas.openxmlformats.org/drawingml/2006/main">
-            <a:off x="9429750" y="4381500"/>
-            <a:ext cx="6191250" cy="628650"/>
+            <a:off x="9620250" y="4333875"/>
+            <a:ext cx="6953250" cy="857250"/>
           </a:xfrm>
           <a:prstGeom xmlns:a="http://schemas.openxmlformats.org/drawingml/2006/main" prst="rect">
             <a:avLst/>
@@ -31400,7 +32781,7 @@
           </a:bodyPr>
           <a:lstStyle xmlns:a="http://schemas.openxmlformats.org/drawingml/2006/main">
             <a:defPPr>
-              <a:defRPr sz="3750" b="1">
+              <a:defRPr sz="3900" b="1">
                 <a:solidFill>
                   <a:srgbClr val="A280EC"/>
                 </a:solidFill>
@@ -31410,7 +32791,7 @@
               </a:defRPr>
             </a:defPPr>
             <a:lvl1pPr>
-              <a:defRPr sz="3750" b="1">
+              <a:defRPr sz="3900" b="1">
                 <a:solidFill>
                   <a:srgbClr val="A280EC"/>
                 </a:solidFill>
@@ -31420,7 +32801,7 @@
               </a:defRPr>
             </a:lvl1pPr>
             <a:lvl2pPr>
-              <a:defRPr sz="3750" b="1">
+              <a:defRPr sz="3900" b="1">
                 <a:solidFill>
                   <a:srgbClr val="A280EC"/>
                 </a:solidFill>
@@ -31430,7 +32811,7 @@
               </a:defRPr>
             </a:lvl2pPr>
             <a:lvl3pPr>
-              <a:defRPr sz="3750" b="1">
+              <a:defRPr sz="3900" b="1">
                 <a:solidFill>
                   <a:srgbClr val="A280EC"/>
                 </a:solidFill>
@@ -31440,7 +32821,7 @@
               </a:defRPr>
             </a:lvl3pPr>
             <a:lvl4pPr>
-              <a:defRPr sz="3750" b="1">
+              <a:defRPr sz="3900" b="1">
                 <a:solidFill>
                   <a:srgbClr val="A280EC"/>
                 </a:solidFill>
@@ -31450,7 +32831,7 @@
               </a:defRPr>
             </a:lvl4pPr>
             <a:lvl5pPr>
-              <a:defRPr sz="3750" b="1">
+              <a:defRPr sz="3900" b="1">
                 <a:solidFill>
                   <a:srgbClr val="A280EC"/>
                 </a:solidFill>
@@ -31460,7 +32841,7 @@
               </a:defRPr>
             </a:lvl5pPr>
             <a:lvl6pPr>
-              <a:defRPr sz="3750" b="1">
+              <a:defRPr sz="3900" b="1">
                 <a:solidFill>
                   <a:srgbClr val="A280EC"/>
                 </a:solidFill>
@@ -31470,7 +32851,7 @@
               </a:defRPr>
             </a:lvl6pPr>
             <a:lvl7pPr>
-              <a:defRPr sz="3750" b="1">
+              <a:defRPr sz="3900" b="1">
                 <a:solidFill>
                   <a:srgbClr val="A280EC"/>
                 </a:solidFill>
@@ -31480,7 +32861,7 @@
               </a:defRPr>
             </a:lvl7pPr>
             <a:lvl8pPr>
-              <a:defRPr sz="3750" b="1">
+              <a:defRPr sz="3900" b="1">
                 <a:solidFill>
                   <a:srgbClr val="A280EC"/>
                 </a:solidFill>
@@ -31490,7 +32871,7 @@
               </a:defRPr>
             </a:lvl8pPr>
             <a:lvl9pPr>
-              <a:defRPr sz="3750" b="1">
+              <a:defRPr sz="3900" b="1">
                 <a:solidFill>
                   <a:srgbClr val="A280EC"/>
                 </a:solidFill>
@@ -31502,7 +32883,7 @@
           </a:lstStyle>
           <a:p xmlns:a="http://schemas.openxmlformats.org/drawingml/2006/main">
             <a:pPr>
-              <a:defRPr sz="3750" b="1">
+              <a:defRPr sz="3900" b="1">
                 <a:solidFill>
                   <a:srgbClr val="A280EC"/>
                 </a:solidFill>
@@ -31512,7 +32893,7 @@
               </a:defRPr>
             </a:pPr>
             <a:r>
-              <a:rPr sz="3750" b="1">
+              <a:rPr sz="3900" b="1">
                 <a:solidFill>
                   <a:srgbClr val="A280EC"/>
                 </a:solidFill>
@@ -31520,17 +32901,17 @@
                 <a:ea typeface="Microsoft JhengHei"/>
                 <a:cs typeface="Microsoft JhengHei"/>
               </a:rPr>
-              <a:t>完整淨減碳</a:t>
+              <a:t>主推12m 73.995%</a:t>
             </a:r>
           </a:p>
         </p:txBody>
       </p:sp>
       <p:sp>
         <p:nvSpPr>
-          <p:cNvPr id="29" name="內容_7_退貨量 × 0.35&#10;扣除清">
-            <a:extLst xmlns:a="http://schemas.openxmlformats.org/drawingml/2006/main">
-              <a:ext uri="{FF2B5EF4-FFF2-40B4-BE49-F238E27FC236}">
-                <a16:creationId xmlns:a16="http://schemas.microsoft.com/office/drawing/2014/main" id="{6B4C1C77-CCE6-47F7-B4E9-8CF17E8E7FE9}"/>
+          <p:cNvPr id="29" name="內容_7_相較Before僅 +0.1">
+            <a:extLst xmlns:a="http://schemas.openxmlformats.org/drawingml/2006/main">
+              <a:ext uri="{FF2B5EF4-FFF2-40B4-BE49-F238E27FC236}">
+                <a16:creationId xmlns:a16="http://schemas.microsoft.com/office/drawing/2014/main" id="{D57C8F0F-9AB9-4FFB-9432-A52FC1C042C8}"/>
               </a:ext>
             </a:extLst>
           </p:cNvPr>
@@ -31541,8 +32922,8 @@
         </p:nvSpPr>
         <p:spPr>
           <a:xfrm xmlns:a="http://schemas.openxmlformats.org/drawingml/2006/main">
-            <a:off x="9429750" y="5286375"/>
-            <a:ext cx="6191250" cy="2095500"/>
+            <a:off x="9620250" y="5476875"/>
+            <a:ext cx="7048500" cy="1905000"/>
           </a:xfrm>
           <a:prstGeom xmlns:a="http://schemas.openxmlformats.org/drawingml/2006/main" prst="rect">
             <a:avLst/>
@@ -31558,7 +32939,7 @@
           </a:bodyPr>
           <a:lstStyle xmlns:a="http://schemas.openxmlformats.org/drawingml/2006/main">
             <a:defPPr>
-              <a:defRPr sz="2700" b="0">
+              <a:defRPr sz="2475" b="0">
                 <a:solidFill>
                   <a:srgbClr val="F6E0F5"/>
                 </a:solidFill>
@@ -31568,7 +32949,7 @@
               </a:defRPr>
             </a:defPPr>
             <a:lvl1pPr>
-              <a:defRPr sz="2700" b="0">
+              <a:defRPr sz="2475" b="0">
                 <a:solidFill>
                   <a:srgbClr val="F6E0F5"/>
                 </a:solidFill>
@@ -31578,7 +32959,7 @@
               </a:defRPr>
             </a:lvl1pPr>
             <a:lvl2pPr>
-              <a:defRPr sz="2700" b="0">
+              <a:defRPr sz="2475" b="0">
                 <a:solidFill>
                   <a:srgbClr val="F6E0F5"/>
                 </a:solidFill>
@@ -31588,7 +32969,7 @@
               </a:defRPr>
             </a:lvl2pPr>
             <a:lvl3pPr>
-              <a:defRPr sz="2700" b="0">
+              <a:defRPr sz="2475" b="0">
                 <a:solidFill>
                   <a:srgbClr val="F6E0F5"/>
                 </a:solidFill>
@@ -31598,7 +32979,7 @@
               </a:defRPr>
             </a:lvl3pPr>
             <a:lvl4pPr>
-              <a:defRPr sz="2700" b="0">
+              <a:defRPr sz="2475" b="0">
                 <a:solidFill>
                   <a:srgbClr val="F6E0F5"/>
                 </a:solidFill>
@@ -31608,7 +32989,7 @@
               </a:defRPr>
             </a:lvl4pPr>
             <a:lvl5pPr>
-              <a:defRPr sz="2700" b="0">
+              <a:defRPr sz="2475" b="0">
                 <a:solidFill>
                   <a:srgbClr val="F6E0F5"/>
                 </a:solidFill>
@@ -31618,7 +32999,7 @@
               </a:defRPr>
             </a:lvl5pPr>
             <a:lvl6pPr>
-              <a:defRPr sz="2700" b="0">
+              <a:defRPr sz="2475" b="0">
                 <a:solidFill>
                   <a:srgbClr val="F6E0F5"/>
                 </a:solidFill>
@@ -31628,7 +33009,7 @@
               </a:defRPr>
             </a:lvl6pPr>
             <a:lvl7pPr>
-              <a:defRPr sz="2700" b="0">
+              <a:defRPr sz="2475" b="0">
                 <a:solidFill>
                   <a:srgbClr val="F6E0F5"/>
                 </a:solidFill>
@@ -31638,7 +33019,7 @@
               </a:defRPr>
             </a:lvl7pPr>
             <a:lvl8pPr>
-              <a:defRPr sz="2700" b="0">
+              <a:defRPr sz="2475" b="0">
                 <a:solidFill>
                   <a:srgbClr val="F6E0F5"/>
                 </a:solidFill>
@@ -31648,7 +33029,7 @@
               </a:defRPr>
             </a:lvl8pPr>
             <a:lvl9pPr>
-              <a:defRPr sz="2700" b="0">
+              <a:defRPr sz="2475" b="0">
                 <a:solidFill>
                   <a:srgbClr val="F6E0F5"/>
                 </a:solidFill>
@@ -31660,7 +33041,7 @@
           </a:lstStyle>
           <a:p xmlns:a="http://schemas.openxmlformats.org/drawingml/2006/main">
             <a:pPr>
-              <a:defRPr sz="2700" b="0">
+              <a:defRPr sz="2475" b="0">
                 <a:solidFill>
                   <a:srgbClr val="F6E0F5"/>
                 </a:solidFill>
@@ -31670,7 +33051,7 @@
               </a:defRPr>
             </a:pPr>
             <a:r>
-              <a:rPr sz="2700" b="0">
+              <a:rPr sz="2475" b="0">
                 <a:solidFill>
                   <a:srgbClr val="F6E0F5"/>
                 </a:solidFill>
@@ -31678,12 +33059,12 @@
                 <a:ea typeface="Microsoft JhengHei"/>
                 <a:cs typeface="Microsoft JhengHei"/>
               </a:rPr>
-              <a:t>退貨量 × 0.35</a:t>
+              <a:t>相較Before僅 +0.141百分點</a:t>
             </a:r>
           </a:p>
           <a:p xmlns:a="http://schemas.openxmlformats.org/drawingml/2006/main">
             <a:pPr>
-              <a:defRPr sz="2700" b="0">
+              <a:defRPr sz="2475" b="0">
                 <a:solidFill>
                   <a:srgbClr val="F6E0F5"/>
                 </a:solidFill>
@@ -31693,7 +33074,7 @@
               </a:defRPr>
             </a:pPr>
             <a:r>
-              <a:rPr sz="2700" b="0">
+              <a:rPr sz="2475" b="0">
                 <a:solidFill>
                   <a:srgbClr val="F6E0F5"/>
                 </a:solidFill>
@@ -31701,12 +33082,12 @@
                 <a:ea typeface="Microsoft JhengHei"/>
                 <a:cs typeface="Microsoft JhengHei"/>
               </a:rPr>
-              <a:t>扣除清洗與輸送電力 × 0.495</a:t>
+              <a:t>P4須再扣外包排放</a:t>
             </a:r>
           </a:p>
           <a:p xmlns:a="http://schemas.openxmlformats.org/drawingml/2006/main">
             <a:pPr>
-              <a:defRPr sz="2700" b="0">
+              <a:defRPr sz="2475" b="0">
                 <a:solidFill>
                   <a:srgbClr val="F6E0F5"/>
                 </a:solidFill>
@@ -31716,7 +33097,7 @@
               </a:defRPr>
             </a:pPr>
             <a:r>
-              <a:rPr sz="2700" b="0">
+              <a:rPr sz="2475" b="0">
                 <a:solidFill>
                   <a:srgbClr val="F6E0F5"/>
                 </a:solidFill>
@@ -31724,17 +33105,17 @@
                 <a:ea typeface="Microsoft JhengHei"/>
                 <a:cs typeface="Microsoft JhengHei"/>
               </a:rPr>
-              <a:t>再扣外包箱數 × 0.05 kgCO₂e</a:t>
+              <a:t>課程口徑；不是完整生命週期盤查</a:t>
             </a:r>
           </a:p>
         </p:txBody>
       </p:sp>
       <p:sp>
         <p:nvSpPr>
-          <p:cNvPr id="30" name="內容_7_40欄原生Dashboard">
-            <a:extLst xmlns:a="http://schemas.openxmlformats.org/drawingml/2006/main">
-              <a:ext uri="{FF2B5EF4-FFF2-40B4-BE49-F238E27FC236}">
-                <a16:creationId xmlns:a16="http://schemas.microsoft.com/office/drawing/2014/main" id="{3FF1B564-9D5B-43EA-95D5-A78D0A72A419}"/>
+          <p:cNvPr id="30" name="內容_7_42%是目標門檻；原始來源未">
+            <a:extLst xmlns:a="http://schemas.openxmlformats.org/drawingml/2006/main">
+              <a:ext uri="{FF2B5EF4-FFF2-40B4-BE49-F238E27FC236}">
+                <a16:creationId xmlns:a16="http://schemas.microsoft.com/office/drawing/2014/main" id="{4247497F-0E96-4A20-8679-1A797C3FAD5B}"/>
               </a:ext>
             </a:extLst>
           </p:cNvPr>
@@ -31882,7 +33263,7 @@
                 <a:ea typeface="Microsoft JhengHei"/>
                 <a:cs typeface="Microsoft JhengHei"/>
               </a:rPr>
-              <a:t>40欄原生Dashboard每0.5秒讀值；ESG_KPI每600秒實算，40欄含作業／設備／人力／ESG，另附原生WIP與清洗狀態圖。</a:t>
+              <a:t>42%是目標門檻；原始來源未提供相同輸入下42%的推導條件。不能為貼近目標反調參數。</a:t>
             </a:r>
           </a:p>
         </p:txBody>
@@ -31890,7 +33271,7 @@
     </p:spTree>
     <p:extLst>
       <p:ext uri="{BB962C8B-B14F-4D97-AF65-F5344CB8AC3E}">
-        <p14:creationId xmlns:p14="http://schemas.microsoft.com/office/powerpoint/2010/main" val="145745910"/>
+        <p14:creationId xmlns:p14="http://schemas.microsoft.com/office/powerpoint/2010/main" val="2137234656"/>
       </p:ext>
     </p:extLst>
   </p:cSld>
@@ -31914,7 +33295,7 @@
           <p:cNvPr id="2" name="Freeform 2">
             <a:extLst xmlns:a="http://schemas.openxmlformats.org/drawingml/2006/main">
               <a:ext uri="{FF2B5EF4-FFF2-40B4-BE49-F238E27FC236}">
-                <a16:creationId xmlns:a16="http://schemas.microsoft.com/office/drawing/2014/main" id="{151726F3-7D3B-488D-8A2C-3336BF8E2632}"/>
+                <a16:creationId xmlns:a16="http://schemas.microsoft.com/office/drawing/2014/main" id="{379718BF-A37E-43E7-B92D-A3993E882159}"/>
               </a:ext>
             </a:extLst>
           </p:cNvPr>
@@ -31952,7 +33333,7 @@
             </a:pathLst>
           </a:custGeom>
           <a:blipFill xmlns:a="http://schemas.openxmlformats.org/drawingml/2006/main">
-            <a:blip xmlns:r="http://schemas.openxmlformats.org/officeDocument/2006/relationships" r:embed="R18364f660aae41c4"/>
+            <a:blip xmlns:r="http://schemas.openxmlformats.org/officeDocument/2006/relationships" r:embed="Re73b7a446f6e404b"/>
             <a:stretch>
               <a:fillRect l="-35258" t="-5555" r="-24931" b="-72434"/>
             </a:stretch>
@@ -31964,7 +33345,7 @@
           <p:cNvPr id="4" name="Freeform 4">
             <a:extLst xmlns:a="http://schemas.openxmlformats.org/drawingml/2006/main">
               <a:ext uri="{FF2B5EF4-FFF2-40B4-BE49-F238E27FC236}">
-                <a16:creationId xmlns:a16="http://schemas.microsoft.com/office/drawing/2014/main" id="{1E582901-FFE4-4002-A318-7C1F82E42E2F}"/>
+                <a16:creationId xmlns:a16="http://schemas.microsoft.com/office/drawing/2014/main" id="{F9B99AF6-E167-4E1B-B64A-7FD9502AAB47}"/>
               </a:ext>
             </a:extLst>
           </p:cNvPr>
@@ -32038,7 +33419,7 @@
           <p:cNvPr id="5" name="TextBox 5">
             <a:extLst xmlns:a="http://schemas.openxmlformats.org/drawingml/2006/main">
               <a:ext uri="{FF2B5EF4-FFF2-40B4-BE49-F238E27FC236}">
-                <a16:creationId xmlns:a16="http://schemas.microsoft.com/office/drawing/2014/main" id="{37C6B242-8547-4AC9-AA46-5A42BFEC8841}"/>
+                <a16:creationId xmlns:a16="http://schemas.microsoft.com/office/drawing/2014/main" id="{28F0F8B2-4004-405F-ADF9-126C0E9239A3}"/>
               </a:ext>
             </a:extLst>
           </p:cNvPr>
@@ -32074,7 +33455,7 @@
           <p:cNvPr id="6" name="Freeform 6">
             <a:extLst xmlns:a="http://schemas.openxmlformats.org/drawingml/2006/main">
               <a:ext uri="{FF2B5EF4-FFF2-40B4-BE49-F238E27FC236}">
-                <a16:creationId xmlns:a16="http://schemas.microsoft.com/office/drawing/2014/main" id="{D5FB8986-2999-4EC0-996B-050ECE1E9D1B}"/>
+                <a16:creationId xmlns:a16="http://schemas.microsoft.com/office/drawing/2014/main" id="{864E7DEC-F7CB-46A6-8055-E07E08E0C532}"/>
               </a:ext>
             </a:extLst>
           </p:cNvPr>
@@ -32112,7 +33493,7 @@
             </a:pathLst>
           </a:custGeom>
           <a:blipFill xmlns:a="http://schemas.openxmlformats.org/drawingml/2006/main">
-            <a:blip xmlns:r="http://schemas.openxmlformats.org/officeDocument/2006/relationships" r:embed="Rb196cf511d464a73"/>
+            <a:blip xmlns:r="http://schemas.openxmlformats.org/officeDocument/2006/relationships" r:embed="Rc42575de15e846ea"/>
             <a:stretch>
               <a:fillRect l="0" t="0" r="0" b="0"/>
             </a:stretch>
@@ -32124,7 +33505,7 @@
           <p:cNvPr id="7" name="Freeform 7">
             <a:extLst xmlns:a="http://schemas.openxmlformats.org/drawingml/2006/main">
               <a:ext uri="{FF2B5EF4-FFF2-40B4-BE49-F238E27FC236}">
-                <a16:creationId xmlns:a16="http://schemas.microsoft.com/office/drawing/2014/main" id="{6861F9B1-36BF-4915-B7E6-98B687E1EBBF}"/>
+                <a16:creationId xmlns:a16="http://schemas.microsoft.com/office/drawing/2014/main" id="{4E26ED79-AB36-4F0D-9F19-32A97E76F1F7}"/>
               </a:ext>
             </a:extLst>
           </p:cNvPr>
@@ -32162,10 +33543,10 @@
             </a:pathLst>
           </a:custGeom>
           <a:blipFill xmlns:a="http://schemas.openxmlformats.org/drawingml/2006/main">
-            <a:blip xmlns:r="http://schemas.openxmlformats.org/officeDocument/2006/relationships" r:embed="Rb281da728f4f4900">
+            <a:blip xmlns:r="http://schemas.openxmlformats.org/officeDocument/2006/relationships" r:embed="Rdb17e9de10a74e32">
               <a:extLst>
                 <a:ext uri="{96DAC541-7B7A-43D3-8B79-37D633B846F1}">
-                  <asvg:svgBlip xmlns:asvg="http://schemas.microsoft.com/office/drawing/2016/SVG/main" r:embed="R25822218eb484a31"/>
+                  <asvg:svgBlip xmlns:asvg="http://schemas.microsoft.com/office/drawing/2016/SVG/main" r:embed="R7be81371430f413a"/>
                 </a:ext>
               </a:extLst>
             </a:blip>
@@ -32180,7 +33561,7 @@
           <p:cNvPr id="8" name="Freeform 8">
             <a:extLst xmlns:a="http://schemas.openxmlformats.org/drawingml/2006/main">
               <a:ext uri="{FF2B5EF4-FFF2-40B4-BE49-F238E27FC236}">
-                <a16:creationId xmlns:a16="http://schemas.microsoft.com/office/drawing/2014/main" id="{E4453898-4D4A-4FF9-8C03-ABE74D525042}"/>
+                <a16:creationId xmlns:a16="http://schemas.microsoft.com/office/drawing/2014/main" id="{CC863E45-B80F-4000-B28E-3E8C42FD001B}"/>
               </a:ext>
             </a:extLst>
           </p:cNvPr>
@@ -32218,10 +33599,10 @@
             </a:pathLst>
           </a:custGeom>
           <a:blipFill xmlns:a="http://schemas.openxmlformats.org/drawingml/2006/main">
-            <a:blip xmlns:r="http://schemas.openxmlformats.org/officeDocument/2006/relationships" r:embed="Rb281da728f4f4900">
+            <a:blip xmlns:r="http://schemas.openxmlformats.org/officeDocument/2006/relationships" r:embed="Rdb17e9de10a74e32">
               <a:extLst>
                 <a:ext uri="{96DAC541-7B7A-43D3-8B79-37D633B846F1}">
-                  <asvg:svgBlip xmlns:asvg="http://schemas.microsoft.com/office/drawing/2016/SVG/main" r:embed="R25822218eb484a31"/>
+                  <asvg:svgBlip xmlns:asvg="http://schemas.microsoft.com/office/drawing/2016/SVG/main" r:embed="R7be81371430f413a"/>
                 </a:ext>
               </a:extLst>
             </a:blip>
@@ -32236,7 +33617,7 @@
           <p:cNvPr id="9" name="Freeform 9">
             <a:extLst xmlns:a="http://schemas.openxmlformats.org/drawingml/2006/main">
               <a:ext uri="{FF2B5EF4-FFF2-40B4-BE49-F238E27FC236}">
-                <a16:creationId xmlns:a16="http://schemas.microsoft.com/office/drawing/2014/main" id="{E61BD6C0-A8C2-4DB1-9B00-192FAF0DC65C}"/>
+                <a16:creationId xmlns:a16="http://schemas.microsoft.com/office/drawing/2014/main" id="{3AEDBC64-8D6A-4F61-9D8A-7DDA9F1B866F}"/>
               </a:ext>
             </a:extLst>
           </p:cNvPr>
@@ -32284,7 +33665,7 @@
           <p:cNvPr id="10" name="TextBox 10">
             <a:extLst xmlns:a="http://schemas.openxmlformats.org/drawingml/2006/main">
               <a:ext uri="{FF2B5EF4-FFF2-40B4-BE49-F238E27FC236}">
-                <a16:creationId xmlns:a16="http://schemas.microsoft.com/office/drawing/2014/main" id="{CC52D9E7-86AE-4944-9CF5-4A2A0AD739D2}"/>
+                <a16:creationId xmlns:a16="http://schemas.microsoft.com/office/drawing/2014/main" id="{CEAAF661-24F2-4D84-9406-5B533E3C33C6}"/>
               </a:ext>
             </a:extLst>
           </p:cNvPr>
@@ -32445,7 +33826,7 @@
           <p:cNvPr id="11" name="TextBox 11">
             <a:extLst xmlns:a="http://schemas.openxmlformats.org/drawingml/2006/main">
               <a:ext uri="{FF2B5EF4-FFF2-40B4-BE49-F238E27FC236}">
-                <a16:creationId xmlns:a16="http://schemas.microsoft.com/office/drawing/2014/main" id="{72CE0F36-707C-4BEA-B28E-A0CA5AF3D738}"/>
+                <a16:creationId xmlns:a16="http://schemas.microsoft.com/office/drawing/2014/main" id="{2D577272-4D85-4747-AF5A-6195B6E2004F}"/>
               </a:ext>
             </a:extLst>
           </p:cNvPr>
@@ -32499,7 +33880,7 @@
           <p:cNvPr id="12" name="TextBox 12">
             <a:extLst xmlns:a="http://schemas.openxmlformats.org/drawingml/2006/main">
               <a:ext uri="{FF2B5EF4-FFF2-40B4-BE49-F238E27FC236}">
-                <a16:creationId xmlns:a16="http://schemas.microsoft.com/office/drawing/2014/main" id="{6F0FBDD7-EEF3-4C12-96EB-B85CEFF66315}"/>
+                <a16:creationId xmlns:a16="http://schemas.microsoft.com/office/drawing/2014/main" id="{1340D6C4-1173-4BC0-A4F9-D0281EF2CFA8}"/>
               </a:ext>
             </a:extLst>
           </p:cNvPr>
@@ -32551,7 +33932,7 @@
           <p:cNvPr id="13" name="TextBox 13">
             <a:extLst xmlns:a="http://schemas.openxmlformats.org/drawingml/2006/main">
               <a:ext uri="{FF2B5EF4-FFF2-40B4-BE49-F238E27FC236}">
-                <a16:creationId xmlns:a16="http://schemas.microsoft.com/office/drawing/2014/main" id="{BBF7E1E3-B141-495B-93EA-0D2D67280339}"/>
+                <a16:creationId xmlns:a16="http://schemas.microsoft.com/office/drawing/2014/main" id="{5A0A221D-AC66-464C-BBCB-9B6B0432820B}"/>
               </a:ext>
             </a:extLst>
           </p:cNvPr>
@@ -32603,7 +33984,7 @@
           <p:cNvPr id="14" name="TextBox 14">
             <a:extLst xmlns:a="http://schemas.openxmlformats.org/drawingml/2006/main">
               <a:ext uri="{FF2B5EF4-FFF2-40B4-BE49-F238E27FC236}">
-                <a16:creationId xmlns:a16="http://schemas.microsoft.com/office/drawing/2014/main" id="{6F6B0176-03E6-4426-B738-B424D90015A2}"/>
+                <a16:creationId xmlns:a16="http://schemas.microsoft.com/office/drawing/2014/main" id="{254E945B-D52B-4B93-804E-F224FE2D05F3}"/>
               </a:ext>
             </a:extLst>
           </p:cNvPr>
@@ -32655,7 +34036,7 @@
           <p:cNvPr id="15" name="Freeform 15">
             <a:extLst xmlns:a="http://schemas.openxmlformats.org/drawingml/2006/main">
               <a:ext uri="{FF2B5EF4-FFF2-40B4-BE49-F238E27FC236}">
-                <a16:creationId xmlns:a16="http://schemas.microsoft.com/office/drawing/2014/main" id="{BE0E2B93-D833-497E-9268-F16D5105F084}"/>
+                <a16:creationId xmlns:a16="http://schemas.microsoft.com/office/drawing/2014/main" id="{7550B3AD-7018-4A4C-A466-1E27A2D51B72}"/>
               </a:ext>
             </a:extLst>
           </p:cNvPr>
@@ -32703,7 +34084,7 @@
           <p:cNvPr id="16" name="內容_8_信度檢定 V1–V6">
             <a:extLst xmlns:a="http://schemas.openxmlformats.org/drawingml/2006/main">
               <a:ext uri="{FF2B5EF4-FFF2-40B4-BE49-F238E27FC236}">
-                <a16:creationId xmlns:a16="http://schemas.microsoft.com/office/drawing/2014/main" id="{06C014C0-3024-4BBC-A8CD-D4094EF82F43}"/>
+                <a16:creationId xmlns:a16="http://schemas.microsoft.com/office/drawing/2014/main" id="{7AD408F8-50F4-4691-A439-8739BA6FE59D}"/>
               </a:ext>
             </a:extLst>
           </p:cNvPr>
@@ -32861,7 +34242,7 @@
           <p:cNvPr id="17" name="內容_8_驗證必須能攔下錯誤">
             <a:extLst xmlns:a="http://schemas.openxmlformats.org/drawingml/2006/main">
               <a:ext uri="{FF2B5EF4-FFF2-40B4-BE49-F238E27FC236}">
-                <a16:creationId xmlns:a16="http://schemas.microsoft.com/office/drawing/2014/main" id="{76A669BE-E4AC-4775-9E52-48A17117A28E}"/>
+                <a16:creationId xmlns:a16="http://schemas.microsoft.com/office/drawing/2014/main" id="{EDA03AA2-3290-4546-8B2B-5CBE3B121CB1}"/>
               </a:ext>
             </a:extLst>
           </p:cNvPr>
@@ -33019,7 +34400,7 @@
           <p:cNvPr id="18" name="">
             <a:extLst xmlns:a="http://schemas.openxmlformats.org/drawingml/2006/main">
               <a:ext uri="{FF2B5EF4-FFF2-40B4-BE49-F238E27FC236}">
-                <a16:creationId xmlns:a16="http://schemas.microsoft.com/office/drawing/2014/main" id="{925796AC-67C0-43C3-B0C7-FE2C8711E677}"/>
+                <a16:creationId xmlns:a16="http://schemas.microsoft.com/office/drawing/2014/main" id="{154453C1-2639-428A-9125-32D9369A5CC6}"/>
               </a:ext>
             </a:extLst>
           </p:cNvPr>
@@ -33762,7 +35143,7 @@
           <p:cNvPr id="19" name="內容_8_600個基準樣本＝主實驗30">
             <a:extLst xmlns:a="http://schemas.openxmlformats.org/drawingml/2006/main">
               <a:ext uri="{FF2B5EF4-FFF2-40B4-BE49-F238E27FC236}">
-                <a16:creationId xmlns:a16="http://schemas.microsoft.com/office/drawing/2014/main" id="{DA3048FA-6EA1-4719-92F0-6DB961212787}"/>
+                <a16:creationId xmlns:a16="http://schemas.microsoft.com/office/drawing/2014/main" id="{930B02AF-5797-47BD-8B3F-802C4CF5A79B}"/>
               </a:ext>
             </a:extLst>
           </p:cNvPr>
@@ -33918,7 +35299,7 @@
     </p:spTree>
     <p:extLst>
       <p:ext uri="{BB962C8B-B14F-4D97-AF65-F5344CB8AC3E}">
-        <p14:creationId xmlns:p14="http://schemas.microsoft.com/office/powerpoint/2010/main" val="180891739"/>
+        <p14:creationId xmlns:p14="http://schemas.microsoft.com/office/powerpoint/2010/main" val="1359034025"/>
       </p:ext>
     </p:extLst>
   </p:cSld>
@@ -33942,7 +35323,7 @@
           <p:cNvPr id="2" name="Freeform 2">
             <a:extLst xmlns:a="http://schemas.openxmlformats.org/drawingml/2006/main">
               <a:ext uri="{FF2B5EF4-FFF2-40B4-BE49-F238E27FC236}">
-                <a16:creationId xmlns:a16="http://schemas.microsoft.com/office/drawing/2014/main" id="{DF3627D8-E6D4-453D-A918-8F6CE0DDB13E}"/>
+                <a16:creationId xmlns:a16="http://schemas.microsoft.com/office/drawing/2014/main" id="{662934E3-8205-4274-8A56-BCDC665BEC7C}"/>
               </a:ext>
             </a:extLst>
           </p:cNvPr>
@@ -33980,7 +35361,7 @@
             </a:pathLst>
           </a:custGeom>
           <a:blipFill xmlns:a="http://schemas.openxmlformats.org/drawingml/2006/main">
-            <a:blip xmlns:r="http://schemas.openxmlformats.org/officeDocument/2006/relationships" r:embed="Rf2e4663f901a4bda"/>
+            <a:blip xmlns:r="http://schemas.openxmlformats.org/officeDocument/2006/relationships" r:embed="Re28a50d447ad484e"/>
             <a:stretch>
               <a:fillRect l="-35258" t="-5555" r="-24931" b="-72434"/>
             </a:stretch>
@@ -33992,7 +35373,7 @@
           <p:cNvPr id="4" name="Freeform 4">
             <a:extLst xmlns:a="http://schemas.openxmlformats.org/drawingml/2006/main">
               <a:ext uri="{FF2B5EF4-FFF2-40B4-BE49-F238E27FC236}">
-                <a16:creationId xmlns:a16="http://schemas.microsoft.com/office/drawing/2014/main" id="{25255020-5011-4F8D-8F43-A8A6EA1674F6}"/>
+                <a16:creationId xmlns:a16="http://schemas.microsoft.com/office/drawing/2014/main" id="{315923F0-D36D-4796-93F4-E8E0AEE61DE7}"/>
               </a:ext>
             </a:extLst>
           </p:cNvPr>
@@ -34066,7 +35447,7 @@
           <p:cNvPr id="5" name="TextBox 5">
             <a:extLst xmlns:a="http://schemas.openxmlformats.org/drawingml/2006/main">
               <a:ext uri="{FF2B5EF4-FFF2-40B4-BE49-F238E27FC236}">
-                <a16:creationId xmlns:a16="http://schemas.microsoft.com/office/drawing/2014/main" id="{F9D1C949-B5A8-49B6-AD67-BA04448619D3}"/>
+                <a16:creationId xmlns:a16="http://schemas.microsoft.com/office/drawing/2014/main" id="{ACAE7D12-046C-456C-9DB2-13D501FF20AC}"/>
               </a:ext>
             </a:extLst>
           </p:cNvPr>
@@ -34102,7 +35483,7 @@
           <p:cNvPr id="6" name="Freeform 6">
             <a:extLst xmlns:a="http://schemas.openxmlformats.org/drawingml/2006/main">
               <a:ext uri="{FF2B5EF4-FFF2-40B4-BE49-F238E27FC236}">
-                <a16:creationId xmlns:a16="http://schemas.microsoft.com/office/drawing/2014/main" id="{ED4ED150-EBCE-4C90-BBAC-04E0B202EE10}"/>
+                <a16:creationId xmlns:a16="http://schemas.microsoft.com/office/drawing/2014/main" id="{9CDA5A5D-B84C-430A-8AC5-095C2C5B9015}"/>
               </a:ext>
             </a:extLst>
           </p:cNvPr>
@@ -34140,7 +35521,7 @@
             </a:pathLst>
           </a:custGeom>
           <a:blipFill xmlns:a="http://schemas.openxmlformats.org/drawingml/2006/main">
-            <a:blip xmlns:r="http://schemas.openxmlformats.org/officeDocument/2006/relationships" r:embed="Rcbe49c7ef73f45ce"/>
+            <a:blip xmlns:r="http://schemas.openxmlformats.org/officeDocument/2006/relationships" r:embed="R8078f65072d845da"/>
             <a:stretch>
               <a:fillRect l="0" t="0" r="0" b="0"/>
             </a:stretch>
@@ -34152,7 +35533,7 @@
           <p:cNvPr id="7" name="Freeform 7">
             <a:extLst xmlns:a="http://schemas.openxmlformats.org/drawingml/2006/main">
               <a:ext uri="{FF2B5EF4-FFF2-40B4-BE49-F238E27FC236}">
-                <a16:creationId xmlns:a16="http://schemas.microsoft.com/office/drawing/2014/main" id="{5A3C31AC-FC33-4FA9-A6E6-3FBC57E0B868}"/>
+                <a16:creationId xmlns:a16="http://schemas.microsoft.com/office/drawing/2014/main" id="{3BD826D2-0D29-498A-97DC-9183698DF95E}"/>
               </a:ext>
             </a:extLst>
           </p:cNvPr>
@@ -34190,10 +35571,10 @@
             </a:pathLst>
           </a:custGeom>
           <a:blipFill xmlns:a="http://schemas.openxmlformats.org/drawingml/2006/main">
-            <a:blip xmlns:r="http://schemas.openxmlformats.org/officeDocument/2006/relationships" r:embed="R5e0b0ace60ee4e5e">
+            <a:blip xmlns:r="http://schemas.openxmlformats.org/officeDocument/2006/relationships" r:embed="R7720f264be9f4405">
               <a:extLst>
                 <a:ext uri="{96DAC541-7B7A-43D3-8B79-37D633B846F1}">
-                  <asvg:svgBlip xmlns:asvg="http://schemas.microsoft.com/office/drawing/2016/SVG/main" r:embed="Rbe7dd6ba6dd7445c"/>
+                  <asvg:svgBlip xmlns:asvg="http://schemas.microsoft.com/office/drawing/2016/SVG/main" r:embed="Rde916d1cd0d246b0"/>
                 </a:ext>
               </a:extLst>
             </a:blip>
@@ -34208,7 +35589,7 @@
           <p:cNvPr id="8" name="Freeform 8">
             <a:extLst xmlns:a="http://schemas.openxmlformats.org/drawingml/2006/main">
               <a:ext uri="{FF2B5EF4-FFF2-40B4-BE49-F238E27FC236}">
-                <a16:creationId xmlns:a16="http://schemas.microsoft.com/office/drawing/2014/main" id="{71C6BC04-A74D-4A16-B627-D058DEA63222}"/>
+                <a16:creationId xmlns:a16="http://schemas.microsoft.com/office/drawing/2014/main" id="{48D61A06-36C1-4738-AC7E-FFD8706F8A91}"/>
               </a:ext>
             </a:extLst>
           </p:cNvPr>
@@ -34246,10 +35627,10 @@
             </a:pathLst>
           </a:custGeom>
           <a:blipFill xmlns:a="http://schemas.openxmlformats.org/drawingml/2006/main">
-            <a:blip xmlns:r="http://schemas.openxmlformats.org/officeDocument/2006/relationships" r:embed="R5e0b0ace60ee4e5e">
+            <a:blip xmlns:r="http://schemas.openxmlformats.org/officeDocument/2006/relationships" r:embed="R7720f264be9f4405">
               <a:extLst>
                 <a:ext uri="{96DAC541-7B7A-43D3-8B79-37D633B846F1}">
-                  <asvg:svgBlip xmlns:asvg="http://schemas.microsoft.com/office/drawing/2016/SVG/main" r:embed="Rbe7dd6ba6dd7445c"/>
+                  <asvg:svgBlip xmlns:asvg="http://schemas.microsoft.com/office/drawing/2016/SVG/main" r:embed="Rde916d1cd0d246b0"/>
                 </a:ext>
               </a:extLst>
             </a:blip>
@@ -34264,7 +35645,7 @@
           <p:cNvPr id="10" name="Freeform 10">
             <a:extLst xmlns:a="http://schemas.openxmlformats.org/drawingml/2006/main">
               <a:ext uri="{FF2B5EF4-FFF2-40B4-BE49-F238E27FC236}">
-                <a16:creationId xmlns:a16="http://schemas.microsoft.com/office/drawing/2014/main" id="{E60BA975-0D01-4E85-89F7-2552C86937AC}"/>
+                <a16:creationId xmlns:a16="http://schemas.microsoft.com/office/drawing/2014/main" id="{CE1A0519-21E7-47E4-AE37-942CD92BF43B}"/>
               </a:ext>
             </a:extLst>
           </p:cNvPr>
@@ -34323,7 +35704,7 @@
           <p:cNvPr id="11" name="TextBox 11">
             <a:extLst xmlns:a="http://schemas.openxmlformats.org/drawingml/2006/main">
               <a:ext uri="{FF2B5EF4-FFF2-40B4-BE49-F238E27FC236}">
-                <a16:creationId xmlns:a16="http://schemas.microsoft.com/office/drawing/2014/main" id="{F1AE11E2-9033-462F-B45F-1089A999D9CA}"/>
+                <a16:creationId xmlns:a16="http://schemas.microsoft.com/office/drawing/2014/main" id="{1E50F7E6-3ADE-4961-9A69-D0BF90E6508A}"/>
               </a:ext>
             </a:extLst>
           </p:cNvPr>
@@ -34363,7 +35744,7 @@
           <p:cNvPr id="12" name="Freeform 12">
             <a:extLst xmlns:a="http://schemas.openxmlformats.org/drawingml/2006/main">
               <a:ext uri="{FF2B5EF4-FFF2-40B4-BE49-F238E27FC236}">
-                <a16:creationId xmlns:a16="http://schemas.microsoft.com/office/drawing/2014/main" id="{945F779A-26D3-4138-869A-6388DF3001B9}"/>
+                <a16:creationId xmlns:a16="http://schemas.microsoft.com/office/drawing/2014/main" id="{0A768E52-77DF-47F2-A99B-AA158A1B605E}"/>
               </a:ext>
             </a:extLst>
           </p:cNvPr>
@@ -34411,7 +35792,7 @@
           <p:cNvPr id="13" name="TextBox 13">
             <a:extLst xmlns:a="http://schemas.openxmlformats.org/drawingml/2006/main">
               <a:ext uri="{FF2B5EF4-FFF2-40B4-BE49-F238E27FC236}">
-                <a16:creationId xmlns:a16="http://schemas.microsoft.com/office/drawing/2014/main" id="{8D724F68-74E0-4619-BF45-123C7E08DBC4}"/>
+                <a16:creationId xmlns:a16="http://schemas.microsoft.com/office/drawing/2014/main" id="{579489E3-7FCF-4184-9226-EC7C2BDF1D98}"/>
               </a:ext>
             </a:extLst>
           </p:cNvPr>
@@ -34463,7 +35844,7 @@
           <p:cNvPr id="14" name="TextBox 14">
             <a:extLst xmlns:a="http://schemas.openxmlformats.org/drawingml/2006/main">
               <a:ext uri="{FF2B5EF4-FFF2-40B4-BE49-F238E27FC236}">
-                <a16:creationId xmlns:a16="http://schemas.microsoft.com/office/drawing/2014/main" id="{92EBDB77-D3CB-4DDE-A3EB-A3FA03811338}"/>
+                <a16:creationId xmlns:a16="http://schemas.microsoft.com/office/drawing/2014/main" id="{5B0A0474-7DC1-4419-80D1-C16D911F3901}"/>
               </a:ext>
             </a:extLst>
           </p:cNvPr>
@@ -34515,7 +35896,7 @@
           <p:cNvPr id="15" name="TextBox 15">
             <a:extLst xmlns:a="http://schemas.openxmlformats.org/drawingml/2006/main">
               <a:ext uri="{FF2B5EF4-FFF2-40B4-BE49-F238E27FC236}">
-                <a16:creationId xmlns:a16="http://schemas.microsoft.com/office/drawing/2014/main" id="{73E85567-6703-4481-8E4F-402BC11F4FF7}"/>
+                <a16:creationId xmlns:a16="http://schemas.microsoft.com/office/drawing/2014/main" id="{F4A93BA7-57BC-4116-8224-4D8208DF6ED3}"/>
               </a:ext>
             </a:extLst>
           </p:cNvPr>
@@ -34676,7 +36057,7 @@
           <p:cNvPr id="16" name="TextBox 16">
             <a:extLst xmlns:a="http://schemas.openxmlformats.org/drawingml/2006/main">
               <a:ext uri="{FF2B5EF4-FFF2-40B4-BE49-F238E27FC236}">
-                <a16:creationId xmlns:a16="http://schemas.microsoft.com/office/drawing/2014/main" id="{C8E012F6-6EE8-4B44-934F-7197EF336EC8}"/>
+                <a16:creationId xmlns:a16="http://schemas.microsoft.com/office/drawing/2014/main" id="{FECBCD47-690D-4ED5-BEDD-14E1EA1DEC0A}"/>
               </a:ext>
             </a:extLst>
           </p:cNvPr>
@@ -34730,7 +36111,7 @@
           <p:cNvPr id="17" name="TextBox 17">
             <a:extLst xmlns:a="http://schemas.openxmlformats.org/drawingml/2006/main">
               <a:ext uri="{FF2B5EF4-FFF2-40B4-BE49-F238E27FC236}">
-                <a16:creationId xmlns:a16="http://schemas.microsoft.com/office/drawing/2014/main" id="{9F1EF63B-884B-4223-9868-14137BA054BB}"/>
+                <a16:creationId xmlns:a16="http://schemas.microsoft.com/office/drawing/2014/main" id="{6BDBB9EF-EB62-4760-B586-BFDE04481723}"/>
               </a:ext>
             </a:extLst>
           </p:cNvPr>
@@ -34782,7 +36163,7 @@
           <p:cNvPr id="18" name="TextBox 18">
             <a:extLst xmlns:a="http://schemas.openxmlformats.org/drawingml/2006/main">
               <a:ext uri="{FF2B5EF4-FFF2-40B4-BE49-F238E27FC236}">
-                <a16:creationId xmlns:a16="http://schemas.microsoft.com/office/drawing/2014/main" id="{8FBE4D57-E1DC-431A-837E-75BB9F650003}"/>
+                <a16:creationId xmlns:a16="http://schemas.microsoft.com/office/drawing/2014/main" id="{E8DB9BFA-8350-403C-BC97-50C6B2E211F1}"/>
               </a:ext>
             </a:extLst>
           </p:cNvPr>
@@ -34834,7 +36215,7 @@
           <p:cNvPr id="20" name="Freeform 20">
             <a:extLst xmlns:a="http://schemas.openxmlformats.org/drawingml/2006/main">
               <a:ext uri="{FF2B5EF4-FFF2-40B4-BE49-F238E27FC236}">
-                <a16:creationId xmlns:a16="http://schemas.microsoft.com/office/drawing/2014/main" id="{847A7AA8-90A0-4A3B-8630-30994D387C1D}"/>
+                <a16:creationId xmlns:a16="http://schemas.microsoft.com/office/drawing/2014/main" id="{2F81123C-B654-4CE0-9B3B-54DED1FF1646}"/>
               </a:ext>
             </a:extLst>
           </p:cNvPr>
@@ -34893,7 +36274,7 @@
           <p:cNvPr id="21" name="TextBox 21">
             <a:extLst xmlns:a="http://schemas.openxmlformats.org/drawingml/2006/main">
               <a:ext uri="{FF2B5EF4-FFF2-40B4-BE49-F238E27FC236}">
-                <a16:creationId xmlns:a16="http://schemas.microsoft.com/office/drawing/2014/main" id="{511305E4-D5F1-4393-9F51-62C5A6E84E07}"/>
+                <a16:creationId xmlns:a16="http://schemas.microsoft.com/office/drawing/2014/main" id="{B99737CD-4D82-4A6F-B7B6-E9F4CC57CC26}"/>
               </a:ext>
             </a:extLst>
           </p:cNvPr>
@@ -34933,7 +36314,7 @@
           <p:cNvPr id="22" name="Freeform 22">
             <a:extLst xmlns:a="http://schemas.openxmlformats.org/drawingml/2006/main">
               <a:ext uri="{FF2B5EF4-FFF2-40B4-BE49-F238E27FC236}">
-                <a16:creationId xmlns:a16="http://schemas.microsoft.com/office/drawing/2014/main" id="{C993C38C-7E1F-4CF2-9398-089C5AA4626D}"/>
+                <a16:creationId xmlns:a16="http://schemas.microsoft.com/office/drawing/2014/main" id="{FA795DEA-7A83-45A9-AD2A-3AC5466E94A9}"/>
               </a:ext>
             </a:extLst>
           </p:cNvPr>
@@ -34981,7 +36362,7 @@
           <p:cNvPr id="23" name="TextBox 23">
             <a:extLst xmlns:a="http://schemas.openxmlformats.org/drawingml/2006/main">
               <a:ext uri="{FF2B5EF4-FFF2-40B4-BE49-F238E27FC236}">
-                <a16:creationId xmlns:a16="http://schemas.microsoft.com/office/drawing/2014/main" id="{49CC0AEF-928C-46AC-987C-6CCAFA9B292E}"/>
+                <a16:creationId xmlns:a16="http://schemas.microsoft.com/office/drawing/2014/main" id="{A62DE703-107C-482A-8E85-6F92F05505CB}"/>
               </a:ext>
             </a:extLst>
           </p:cNvPr>
@@ -35033,7 +36414,7 @@
           <p:cNvPr id="24" name="TextBox 24">
             <a:extLst xmlns:a="http://schemas.openxmlformats.org/drawingml/2006/main">
               <a:ext uri="{FF2B5EF4-FFF2-40B4-BE49-F238E27FC236}">
-                <a16:creationId xmlns:a16="http://schemas.microsoft.com/office/drawing/2014/main" id="{7A983DA2-C63C-46E2-AC91-331EF8F5588C}"/>
+                <a16:creationId xmlns:a16="http://schemas.microsoft.com/office/drawing/2014/main" id="{085F8959-6E40-40D9-937F-F39FA610CAA5}"/>
               </a:ext>
             </a:extLst>
           </p:cNvPr>
@@ -35085,7 +36466,7 @@
           <p:cNvPr id="25" name="Freeform 25">
             <a:extLst xmlns:a="http://schemas.openxmlformats.org/drawingml/2006/main">
               <a:ext uri="{FF2B5EF4-FFF2-40B4-BE49-F238E27FC236}">
-                <a16:creationId xmlns:a16="http://schemas.microsoft.com/office/drawing/2014/main" id="{EC098FD8-D3C0-4855-821C-C18E25304DB4}"/>
+                <a16:creationId xmlns:a16="http://schemas.microsoft.com/office/drawing/2014/main" id="{A93B1EEA-7C09-42E0-A8E5-F9637A4CCBEA}"/>
               </a:ext>
             </a:extLst>
           </p:cNvPr>
@@ -35133,7 +36514,7 @@
           <p:cNvPr id="26" name="Freeform 26">
             <a:extLst xmlns:a="http://schemas.openxmlformats.org/drawingml/2006/main">
               <a:ext uri="{FF2B5EF4-FFF2-40B4-BE49-F238E27FC236}">
-                <a16:creationId xmlns:a16="http://schemas.microsoft.com/office/drawing/2014/main" id="{A01DF939-F7E4-4983-BE68-2A29DA7799CA}"/>
+                <a16:creationId xmlns:a16="http://schemas.microsoft.com/office/drawing/2014/main" id="{1646FE64-ACC7-46A7-A824-4F1CCD9FDDE9}"/>
               </a:ext>
             </a:extLst>
           </p:cNvPr>
@@ -35181,7 +36562,7 @@
           <p:cNvPr id="27" name="內容_9_效度檢定 V7–V11">
             <a:extLst xmlns:a="http://schemas.openxmlformats.org/drawingml/2006/main">
               <a:ext uri="{FF2B5EF4-FFF2-40B4-BE49-F238E27FC236}">
-                <a16:creationId xmlns:a16="http://schemas.microsoft.com/office/drawing/2014/main" id="{62A987CA-7B4A-4F59-A337-1666A01FEFDD}"/>
+                <a16:creationId xmlns:a16="http://schemas.microsoft.com/office/drawing/2014/main" id="{0397F75F-7BC0-4758-AD40-9C639BC9FADB}"/>
               </a:ext>
             </a:extLst>
           </p:cNvPr>
@@ -35339,7 +36720,7 @@
           <p:cNvPr id="28" name="內容_9_將模型對回物理與排隊">
             <a:extLst xmlns:a="http://schemas.openxmlformats.org/drawingml/2006/main">
               <a:ext uri="{FF2B5EF4-FFF2-40B4-BE49-F238E27FC236}">
-                <a16:creationId xmlns:a16="http://schemas.microsoft.com/office/drawing/2014/main" id="{0BA45CA7-7BFF-43C4-B186-10C4EF98B0BC}"/>
+                <a16:creationId xmlns:a16="http://schemas.microsoft.com/office/drawing/2014/main" id="{097CC093-E365-4BAF-B144-BA6C73EA69F8}"/>
               </a:ext>
             </a:extLst>
           </p:cNvPr>
@@ -35497,7 +36878,7 @@
           <p:cNvPr id="29" name="">
             <a:extLst xmlns:a="http://schemas.openxmlformats.org/drawingml/2006/main">
               <a:ext uri="{FF2B5EF4-FFF2-40B4-BE49-F238E27FC236}">
-                <a16:creationId xmlns:a16="http://schemas.microsoft.com/office/drawing/2014/main" id="{4A9BB515-43AA-4252-B669-3FC8DBB5834A}"/>
+                <a16:creationId xmlns:a16="http://schemas.microsoft.com/office/drawing/2014/main" id="{A6EB6363-4ED0-47F6-BE4B-26E9E08BBC11}"/>
               </a:ext>
             </a:extLst>
           </p:cNvPr>
@@ -36240,7 +37621,7 @@
           <p:cNvPr id="30" name="內容_9_1920次不重複原生運行；1">
             <a:extLst xmlns:a="http://schemas.openxmlformats.org/drawingml/2006/main">
               <a:ext uri="{FF2B5EF4-FFF2-40B4-BE49-F238E27FC236}">
-                <a16:creationId xmlns:a16="http://schemas.microsoft.com/office/drawing/2014/main" id="{221AB716-74B3-4E06-83C6-5D29310D7A05}"/>
+                <a16:creationId xmlns:a16="http://schemas.microsoft.com/office/drawing/2014/main" id="{D30967CE-660B-43E9-A686-5BD125018F7D}"/>
               </a:ext>
             </a:extLst>
           </p:cNvPr>
@@ -36396,7 +37777,7 @@
     </p:spTree>
     <p:extLst>
       <p:ext uri="{BB962C8B-B14F-4D97-AF65-F5344CB8AC3E}">
-        <p14:creationId xmlns:p14="http://schemas.microsoft.com/office/powerpoint/2010/main" val="596112195"/>
+        <p14:creationId xmlns:p14="http://schemas.microsoft.com/office/powerpoint/2010/main" val="603878938"/>
       </p:ext>
     </p:extLst>
   </p:cSld>

--- a/重點檔案/01_成果簡報.pptx
+++ b/重點檔案/01_成果簡報.pptx
@@ -2,42 +2,42 @@
 <file path=ppt/presentation.xml><?xml version="1.0" encoding="utf-8"?>
 <p:presentation xmlns:p="http://schemas.openxmlformats.org/presentationml/2006/main" embedTrueTypeFonts="1" saveSubsetFonts="0">
   <p:sldMasterIdLst>
-    <p:sldMasterId xmlns:r="http://schemas.openxmlformats.org/officeDocument/2006/relationships" id="2147483648" r:id="Rc5ff56e2548749a9"/>
+    <p:sldMasterId xmlns:r="http://schemas.openxmlformats.org/officeDocument/2006/relationships" id="2147483648" r:id="R18579d5630a74d69"/>
   </p:sldMasterIdLst>
   <p:notesMasterIdLst>
-    <p:notesMasterId xmlns:r="http://schemas.openxmlformats.org/officeDocument/2006/relationships" r:id="Rdac4bdf4fd6447a5"/>
+    <p:notesMasterId xmlns:r="http://schemas.openxmlformats.org/officeDocument/2006/relationships" r:id="Rf475f33c754447c2"/>
   </p:notesMasterIdLst>
   <p:sldIdLst>
-    <p:sldId xmlns:r="http://schemas.openxmlformats.org/officeDocument/2006/relationships" id="256" r:id="R34f657044ace4089"/>
-    <p:sldId xmlns:r="http://schemas.openxmlformats.org/officeDocument/2006/relationships" id="257" r:id="Rd62c1186822e4835"/>
-    <p:sldId xmlns:r="http://schemas.openxmlformats.org/officeDocument/2006/relationships" id="258" r:id="Ra53f402798ab49da"/>
-    <p:sldId xmlns:r="http://schemas.openxmlformats.org/officeDocument/2006/relationships" id="259" r:id="R5e882451d3e94246"/>
-    <p:sldId xmlns:r="http://schemas.openxmlformats.org/officeDocument/2006/relationships" id="260" r:id="Re01c34958f024240"/>
-    <p:sldId xmlns:r="http://schemas.openxmlformats.org/officeDocument/2006/relationships" id="261" r:id="R580c203cd30f4abb"/>
-    <p:sldId xmlns:r="http://schemas.openxmlformats.org/officeDocument/2006/relationships" id="262" r:id="R8647766a24c4448e"/>
-    <p:sldId xmlns:r="http://schemas.openxmlformats.org/officeDocument/2006/relationships" id="263" r:id="R4df342e9c39f4e0a"/>
-    <p:sldId xmlns:r="http://schemas.openxmlformats.org/officeDocument/2006/relationships" id="264" r:id="Re4daa26ad20f4496"/>
-    <p:sldId xmlns:r="http://schemas.openxmlformats.org/officeDocument/2006/relationships" id="265" r:id="R17a24d670b9444b8"/>
-    <p:sldId xmlns:r="http://schemas.openxmlformats.org/officeDocument/2006/relationships" id="266" r:id="R94e3547a877f4b28"/>
-    <p:sldId xmlns:r="http://schemas.openxmlformats.org/officeDocument/2006/relationships" id="267" r:id="R29b5cbdc22644fb6"/>
-    <p:sldId xmlns:r="http://schemas.openxmlformats.org/officeDocument/2006/relationships" id="268" r:id="R0d9a3297c0e04e28"/>
-    <p:sldId xmlns:r="http://schemas.openxmlformats.org/officeDocument/2006/relationships" id="269" r:id="R5f851fcd979c4253"/>
-    <p:sldId xmlns:r="http://schemas.openxmlformats.org/officeDocument/2006/relationships" id="270" r:id="R25c3e5c7290f425a"/>
+    <p:sldId xmlns:r="http://schemas.openxmlformats.org/officeDocument/2006/relationships" id="256" r:id="Rc7f94b4e688d4f7c"/>
+    <p:sldId xmlns:r="http://schemas.openxmlformats.org/officeDocument/2006/relationships" id="257" r:id="R219732119e634ab6"/>
+    <p:sldId xmlns:r="http://schemas.openxmlformats.org/officeDocument/2006/relationships" id="258" r:id="R1af259136fd6480b"/>
+    <p:sldId xmlns:r="http://schemas.openxmlformats.org/officeDocument/2006/relationships" id="259" r:id="R453aed756d4b42a4"/>
+    <p:sldId xmlns:r="http://schemas.openxmlformats.org/officeDocument/2006/relationships" id="260" r:id="Ra1cb325cf01748b7"/>
+    <p:sldId xmlns:r="http://schemas.openxmlformats.org/officeDocument/2006/relationships" id="261" r:id="Rbcb00b8689c54e23"/>
+    <p:sldId xmlns:r="http://schemas.openxmlformats.org/officeDocument/2006/relationships" id="262" r:id="R0ba58f01f54043c4"/>
+    <p:sldId xmlns:r="http://schemas.openxmlformats.org/officeDocument/2006/relationships" id="263" r:id="Rd86cdc9744274e11"/>
+    <p:sldId xmlns:r="http://schemas.openxmlformats.org/officeDocument/2006/relationships" id="264" r:id="R1651043e0b74485d"/>
+    <p:sldId xmlns:r="http://schemas.openxmlformats.org/officeDocument/2006/relationships" id="265" r:id="Ra1be592f4ff04f2f"/>
+    <p:sldId xmlns:r="http://schemas.openxmlformats.org/officeDocument/2006/relationships" id="266" r:id="R80310bc39b4d4afa"/>
+    <p:sldId xmlns:r="http://schemas.openxmlformats.org/officeDocument/2006/relationships" id="267" r:id="R974da358a60d4aa2"/>
+    <p:sldId xmlns:r="http://schemas.openxmlformats.org/officeDocument/2006/relationships" id="268" r:id="R0875ab855c594c37"/>
+    <p:sldId xmlns:r="http://schemas.openxmlformats.org/officeDocument/2006/relationships" id="269" r:id="Rf6f539424202482c"/>
+    <p:sldId xmlns:r="http://schemas.openxmlformats.org/officeDocument/2006/relationships" id="270" r:id="Rd9c234f7c8ad4e07"/>
   </p:sldIdLst>
   <p:sldSz cx="18288000" cy="10287000"/>
   <p:notesSz cx="6858000" cy="9144000"/>
   <p:embeddedFontLst>
     <p:embeddedFont>
       <p:font typeface="Garet Bold"/>
-      <p:regular xmlns:r="http://schemas.openxmlformats.org/officeDocument/2006/relationships" r:id="Ra23660db6ca847ce"/>
+      <p:regular xmlns:r="http://schemas.openxmlformats.org/officeDocument/2006/relationships" r:id="R533b04373fe9473e"/>
     </p:embeddedFont>
     <p:embeddedFont>
       <p:font typeface="Garet"/>
-      <p:regular xmlns:r="http://schemas.openxmlformats.org/officeDocument/2006/relationships" r:id="R202921978b1d456b"/>
+      <p:regular xmlns:r="http://schemas.openxmlformats.org/officeDocument/2006/relationships" r:id="R39b39ebb40e44600"/>
     </p:embeddedFont>
     <p:embeddedFont>
       <p:font typeface="Poppins"/>
-      <p:regular xmlns:r="http://schemas.openxmlformats.org/officeDocument/2006/relationships" r:id="Rf4103ac6c948433a"/>
+      <p:regular xmlns:r="http://schemas.openxmlformats.org/officeDocument/2006/relationships" r:id="R40a9e10f629a4f3c"/>
     </p:embeddedFont>
   </p:embeddedFontLst>
   <p:defaultTextStyle>
@@ -609,7 +609,7 @@
           </a:p>
           <a:p xmlns:a="http://schemas.openxmlformats.org/drawingml/2006/main">
             <a:r>
-              <a:t>統計：30 個共同種子，暖機 86,400 秒，觀察 518,400 秒；95% CI 使用 t(29)=2.04523。</a:t>
+              <a:t>統計：30 個共同種子，暖機 86,400 秒，觀察 518,400 秒；95%信賴區間使用t分布（29個自由度），臨界值2.04523。S為需求情境，P為改善方案；m是公尺，min是分鐘。</a:t>
             </a:r>
           </a:p>
         </p:txBody>
@@ -679,7 +679,7 @@
           <a:lstStyle xmlns:a="http://schemas.openxmlformats.org/drawingml/2006/main"/>
           <a:p xmlns:a="http://schemas.openxmlformats.org/drawingml/2006/main">
             <a:r>
-              <a:t>S1、各30次。P4 8m平均外包110.8箱，12m84.7箱，現有DOE不是支援/外包的獨立消融。P4 8m阻塞0.951% [0.783,1.118]；12m0.711% [0.565,0.856]。QA單人40秒能力90/h，低於清洗期望115.2/h，單加第二台清洗P1仍阻塞3.944%。</a:t>
+              <a:t>S1、各30次。P4 8公尺平均外包110.8箱，12m84.7箱，現有實驗不是支援/外包的獨立消融。P4 8公尺阻塞0.951% [0.783,1.118]；12m0.711% [0.565,0.856]。品質檢查單人40秒能力90/h，低於清洗期望115.2/h，單加第二台清洗P1仍阻塞3.944%。</a:t>
             </a:r>
           </a:p>
           <a:p xmlns:a="http://schemas.openxmlformats.org/drawingml/2006/main">
@@ -689,7 +689,7 @@
           </a:p>
           <a:p xmlns:a="http://schemas.openxmlformats.org/drawingml/2006/main">
             <a:r>
-              <a:t>統計：30 個共同種子，暖機 86,400 秒，觀察 518,400 秒；95% CI 使用 t(29)=2.04523。</a:t>
+              <a:t>統計：30 個共同種子，暖機 86,400 秒，觀察 518,400 秒；95%信賴區間使用t分布（29個自由度），臨界值2.04523。S為需求情境，P為改善方案；m是公尺，min是分鐘。</a:t>
             </a:r>
           </a:p>
         </p:txBody>
@@ -769,7 +769,7 @@
           </a:p>
           <a:p xmlns:a="http://schemas.openxmlformats.org/drawingml/2006/main">
             <a:r>
-              <a:t>統計：30 個共同種子，暖機 86,400 秒，觀察 518,400 秒；95% CI 使用 t(29)=2.04523。</a:t>
+              <a:t>統計：30 個共同種子，暖機 86,400 秒，觀察 518,400 秒；95%信賴區間使用t分布（29個自由度），臨界值2.04523。S為需求情境，P為改善方案；m是公尺，min是分鐘。</a:t>
             </a:r>
           </a:p>
         </p:txBody>
@@ -839,7 +839,7 @@
           <a:lstStyle xmlns:a="http://schemas.openxmlformats.org/drawingml/2006/main"/>
           <a:p xmlns:a="http://schemas.openxmlformats.org/drawingml/2006/main">
             <a:r>
-              <a:t>兩種選法明確區分，沒有暗中修改課程門檻。兩者超24h均為0；12m在270件/h尖峰敏感度亦檢查。結案下界把期末退貨商品WIP全部視為觀察期未完成，不能解讀成100%精確履約。</a:t>
+              <a:t>兩種選法明確區分，沒有暗中修改課程門檻。兩者超24小時均為0；12公尺在270件／小時尖峰敏感度亦檢查。結案下界把期末退貨商品在製量全部視為觀察期未完成，不能解讀成100%精確履約。</a:t>
             </a:r>
           </a:p>
           <a:p xmlns:a="http://schemas.openxmlformats.org/drawingml/2006/main">
@@ -849,7 +849,7 @@
           </a:p>
           <a:p xmlns:a="http://schemas.openxmlformats.org/drawingml/2006/main">
             <a:r>
-              <a:t>統計：30 個共同種子，暖機 86,400 秒，觀察 518,400 秒；95% CI 使用 t(29)=2.04523。</a:t>
+              <a:t>統計：30 個共同種子，暖機 86,400 秒，觀察 518,400 秒；95%信賴區間使用t分布（29個自由度），臨界值2.04523。S為需求情境，P為改善方案；m是公尺，min是分鐘。</a:t>
             </a:r>
           </a:p>
         </p:txBody>
@@ -919,7 +919,7 @@
           <a:lstStyle xmlns:a="http://schemas.openxmlformats.org/drawingml/2006/main"/>
           <a:p xmlns:a="http://schemas.openxmlformats.org/drawingml/2006/main">
             <a:r>
-              <a:t>成本含箱攤提、剩餘帳面價值沖銷、清洗耗材、電力、外包與Q-Time損失。365日年化以6日觀察推估，另列250日敏感度；不是實際年度帳務。12m五年8%NPV為-323,376元。若必須改善SLA，P4比P1少投資且營運成本較低，但與維持P0相比，直接財務效益不足以支持回收。</a:t>
+              <a:t>成本含箱攤提、剩餘帳面價值沖銷、清洗耗材、電力、外包與檢查前等待損失。365日年化以6日觀察推估，另列250日敏感度；不是實際年度帳務。12公尺五年8%NPV為-323,376元。若必須改善SLA，P4比P1少投資且營運成本較低，但與維持P0相比，直接財務效益不足以支持回收。</a:t>
             </a:r>
           </a:p>
           <a:p xmlns:a="http://schemas.openxmlformats.org/drawingml/2006/main">
@@ -929,7 +929,7 @@
           </a:p>
           <a:p xmlns:a="http://schemas.openxmlformats.org/drawingml/2006/main">
             <a:r>
-              <a:t>統計：30 個共同種子，暖機 86,400 秒，觀察 518,400 秒；95% CI 使用 t(29)=2.04523。</a:t>
+              <a:t>統計：30 個共同種子，暖機 86,400 秒，觀察 518,400 秒；95%信賴區間使用t分布（29個自由度），臨界值2.04523。S為需求情境，P為改善方案；m是公尺，min是分鐘。</a:t>
             </a:r>
           </a:p>
         </p:txBody>
@@ -999,7 +999,7 @@
           <a:lstStyle xmlns:a="http://schemas.openxmlformats.org/drawingml/2006/main"/>
           <a:p xmlns:a="http://schemas.openxmlformats.org/drawingml/2006/main">
             <a:r>
-              <a:t>本頁左側為可編輯數值熱圖，原生狀態時間讀回，非連續空間熱力圖。兩種指標採不同色階，不可跨尺度以顏色比較；加工和Blocked也不相加視為全部狀態。原3D紅色來自加工≥90%或阻塞≥1%的累計門檻，非當下狀態。Dashboard仍為40文字卡加兩圖，本次沒有改寫原生GUI。影片330.752秒為3600張原生3D影格，非全桌面錄影。</a:t>
+              <a:t>本頁左側為可編輯數值熱圖，原生狀態時間讀回，非連續空間熱力圖。兩種指標採不同色階，不可跨尺度以顏色比較；加工和阻塞也不相加視為全部狀態。原3D紅色來自加工≥90%或阻塞≥1%的累計門檻，非當下狀態。Dashboard仍為40文字卡加兩圖，本次沒有改寫原生視窗介面。影片330.752秒為3600張原生3D影格，非全桌面錄影。</a:t>
             </a:r>
           </a:p>
           <a:p xmlns:a="http://schemas.openxmlformats.org/drawingml/2006/main">
@@ -1009,7 +1009,7 @@
           </a:p>
           <a:p xmlns:a="http://schemas.openxmlformats.org/drawingml/2006/main">
             <a:r>
-              <a:t>統計：30 個共同種子，暖機 86,400 秒，觀察 518,400 秒；95% CI 使用 t(29)=2.04523。</a:t>
+              <a:t>統計：30 個共同種子，暖機 86,400 秒，觀察 518,400 秒；95%信賴區間使用t分布（29個自由度），臨界值2.04523。S為需求情境，P為改善方案；m是公尺，min是分鐘。</a:t>
             </a:r>
           </a:p>
         </p:txBody>
@@ -1089,7 +1089,7 @@
           </a:p>
           <a:p xmlns:a="http://schemas.openxmlformats.org/drawingml/2006/main">
             <a:r>
-              <a:t>統計：30 個共同種子，暖機 86,400 秒，觀察 518,400 秒；95% CI 使用 t(29)=2.04523。</a:t>
+              <a:t>統計：30 個共同種子，暖機 86,400 秒，觀察 518,400 秒；95%信賴區間使用t分布（29個自由度），臨界值2.04523。S為需求情境，P為改善方案；m是公尺，min是分鐘。</a:t>
             </a:r>
           </a:p>
         </p:txBody>
@@ -1159,7 +1159,7 @@
           <a:lstStyle xmlns:a="http://schemas.openxmlformats.org/drawingml/2006/main"/>
           <a:p xmlns:a="http://schemas.openxmlformats.org/drawingml/2006/main">
             <a:r>
-              <a:t>退貨率取自指定課程資料，非外部市場統計。S0 60 件/h；S1 波外80、三波210件/h，各20分鐘；敏感度尖峰270件/h。</a:t>
+              <a:t>所有方案使用同一模型的原生實驗比較。P4的效果不可全部歸因於人員支援，因為它也包含外包。三波各20分鐘，六日觀察需求量約為平日1.43倍；不是整週3.5倍。</a:t>
             </a:r>
           </a:p>
           <a:p xmlns:a="http://schemas.openxmlformats.org/drawingml/2006/main">
@@ -1169,7 +1169,7 @@
           </a:p>
           <a:p xmlns:a="http://schemas.openxmlformats.org/drawingml/2006/main">
             <a:r>
-              <a:t>統計：30 個共同種子，暖機 86,400 秒，觀察 518,400 秒；95% CI 使用 t(29)=2.04523。</a:t>
+              <a:t>統計：30 個共同種子，暖機 86,400 秒，觀察 518,400 秒；95%信賴區間使用t分布（29個自由度），臨界值2.04523。S為需求情境，P為改善方案；m是公尺，min是分鐘。</a:t>
             </a:r>
           </a:p>
         </p:txBody>
@@ -1239,7 +1239,7 @@
           <a:lstStyle xmlns:a="http://schemas.openxmlformats.org/drawingml/2006/main"/>
           <a:p xmlns:a="http://schemas.openxmlformats.org/drawingml/2006/main">
             <a:r>
-              <a:t>原始混合單位通過率保留於 course_pass_ratio_mixed_units。returned_goods_resolution_ratio 可能因跨期WIP略高於100%，不能視為到達批次已全部完成。</a:t>
+              <a:t>例如0.711 [0.565,0.856] %：平均阻塞占比0.711%，平均估計的95%信賴區間是0.565%到0.856%，不是所有單次運行必在區間內。主推方案另要求信賴上界低於1%；8公尺方案只有平均值符合。</a:t>
             </a:r>
           </a:p>
           <a:p xmlns:a="http://schemas.openxmlformats.org/drawingml/2006/main">
@@ -1249,7 +1249,7 @@
           </a:p>
           <a:p xmlns:a="http://schemas.openxmlformats.org/drawingml/2006/main">
             <a:r>
-              <a:t>統計：30 個共同種子，暖機 86,400 秒，觀察 518,400 秒；95% CI 使用 t(29)=2.04523。</a:t>
+              <a:t>統計：30 個共同種子，暖機 86,400 秒，觀察 518,400 秒；95%信賴區間使用t分布（29個自由度），臨界值2.04523。S為需求情境，P為改善方案；m是公尺，min是分鐘。</a:t>
             </a:r>
           </a:p>
         </p:txBody>
@@ -1319,7 +1319,7 @@
           <a:lstStyle xmlns:a="http://schemas.openxmlformats.org/drawingml/2006/main"/>
           <a:p xmlns:a="http://schemas.openxmlformats.org/drawingml/2006/main">
             <a:r>
-              <a:t>流程圖為可編輯架構。原生Process Flow CustomCode已實際接收並完成ESG更新及QA支援事件Token。完整DFD見01_SA；外部未入庫需求與倉內500箱資產分帳，實體箱池由入庫閘控限制。B級雙站各120秒，兩站各需作業員。</a:t>
+              <a:t>流程圖為可編輯架構。原生Process Flow CustomCode已實際接收並完成ESG更新及品質檢查支援事件Token。完整DFD見01_SA；外部未入庫需求與倉內500箱資產分帳，實體箱池由入庫閘控限制。B級雙站各120秒，兩站各需作業員。</a:t>
             </a:r>
           </a:p>
           <a:p xmlns:a="http://schemas.openxmlformats.org/drawingml/2006/main">
@@ -1329,7 +1329,7 @@
           </a:p>
           <a:p xmlns:a="http://schemas.openxmlformats.org/drawingml/2006/main">
             <a:r>
-              <a:t>統計：30 個共同種子，暖機 86,400 秒，觀察 518,400 秒；95% CI 使用 t(29)=2.04523。</a:t>
+              <a:t>統計：30 個共同種子，暖機 86,400 秒，觀察 518,400 秒；95%信賴區間使用t分布（29個自由度），臨界值2.04523。S為需求情境，P為改善方案；m是公尺，min是分鐘。</a:t>
             </a:r>
           </a:p>
         </p:txBody>
@@ -1399,7 +1399,7 @@
           <a:lstStyle xmlns:a="http://schemas.openxmlformats.org/drawingml/2006/main"/>
           <a:p xmlns:a="http://schemas.openxmlformats.org/drawingml/2006/main">
             <a:r>
-              <a:t>畫面為v8真實幾何模型。3,600張原生影格、逐格時間紀錄及五分鐘WebM備援另附。模型包含即時埠轉移，各長度轉接點已同步；清洗及檢驗設備外形採明示的2m×2m假設。這是課程輸入下的原生模型，尚無實倉CAD與現地運輸校準。</a:t>
+              <a:t>畫面為v8真實幾何模型。3,600張原生影格、逐格時間紀錄及五分鐘WebM備援另附。模型包含即時埠轉移，各長度轉接點已同步；清洗及檢驗設備外形採明示的2公尺×2公尺假設。這是課程輸入下的原生模型，尚無實倉CAD與現地運輸校準。</a:t>
             </a:r>
           </a:p>
           <a:p xmlns:a="http://schemas.openxmlformats.org/drawingml/2006/main">
@@ -1409,7 +1409,7 @@
           </a:p>
           <a:p xmlns:a="http://schemas.openxmlformats.org/drawingml/2006/main">
             <a:r>
-              <a:t>統計：30 個共同種子，暖機 86,400 秒，觀察 518,400 秒；95% CI 使用 t(29)=2.04523。</a:t>
+              <a:t>統計：30 個共同種子，暖機 86,400 秒，觀察 518,400 秒；95%信賴區間使用t分布（29個自由度），臨界值2.04523。S為需求情境，P為改善方案；m是公尺，min是分鐘。</a:t>
             </a:r>
           </a:p>
         </p:txBody>
@@ -1479,7 +1479,7 @@
           <a:lstStyle xmlns:a="http://schemas.openxmlformats.org/drawingml/2006/main"/>
           <a:p xmlns:a="http://schemas.openxmlformats.org/drawingml/2006/main">
             <a:r>
-              <a:t>證據：DispatchLog、AStarNavigator members與Operator移動。單行以原生TravelPatterns限制方向；200段往返到站距離為工作站邊緣0.5m。待命人員採官方讓位假設，互斥檢查針對活動行走者。</a:t>
+              <a:t>證據：DispatchLog、AStarNavigator members與Operator移動。單行以原生TravelPatterns限制方向；200段往返到站距離為工作站邊緣0.5公尺。待命人員採官方讓位假設，互斥檢查針對活動行走者。</a:t>
             </a:r>
           </a:p>
           <a:p xmlns:a="http://schemas.openxmlformats.org/drawingml/2006/main">
@@ -1489,7 +1489,7 @@
           </a:p>
           <a:p xmlns:a="http://schemas.openxmlformats.org/drawingml/2006/main">
             <a:r>
-              <a:t>統計：30 個共同種子，暖機 86,400 秒，觀察 518,400 秒；95% CI 使用 t(29)=2.04523。</a:t>
+              <a:t>統計：30 個共同種子，暖機 86,400 秒，觀察 518,400 秒；95%信賴區間使用t分布（29個自由度），臨界值2.04523。S為需求情境，P為改善方案；m是公尺，min是分鐘。</a:t>
             </a:r>
           </a:p>
         </p:txBody>
@@ -1559,7 +1559,7 @@
           <a:lstStyle xmlns:a="http://schemas.openxmlformats.org/drawingml/2006/main"/>
           <a:p xmlns:a="http://schemas.openxmlformats.org/drawingml/2006/main">
             <a:r>
-              <a:t>S1/P0無外包，按每次能耗/退貨量計算再取平均，0.184875145kWh/件。1−E×0.495/0.35=73.853%。同口徑若剛好42%，E約0.410101kWh/件；差異來自給定係數、能耗與基準。P4 12m的完整減碳CI[73.966,74.023]%，下界亦大於42%；包含平均84.7箱外包及相應排放，不能只套電力公式。0.35與0.495為課程係數，未涵蓋完整箱製造與逆物流LCA。</a:t>
+              <a:t>S1/P0無外包，按每次能耗/退貨量計算再取平均，0.184875145度電/件。1−E×0.495/0.35=73.853%。同口徑若剛好42%，E約0.410101度電/件；差異來自給定係數、能耗與基準。P4 12公尺的完整減碳信賴區間[73.966,74.023]%，下界亦大於42%；包含平均84.7箱外包及相應排放，不能只套電力公式。0.35與0.495為課程係數，未涵蓋完整箱製造與逆物流LCA。</a:t>
             </a:r>
           </a:p>
           <a:p xmlns:a="http://schemas.openxmlformats.org/drawingml/2006/main">
@@ -1569,7 +1569,7 @@
           </a:p>
           <a:p xmlns:a="http://schemas.openxmlformats.org/drawingml/2006/main">
             <a:r>
-              <a:t>統計：30 個共同種子，暖機 86,400 秒，觀察 518,400 秒；95% CI 使用 t(29)=2.04523。</a:t>
+              <a:t>統計：30 個共同種子，暖機 86,400 秒，觀察 518,400 秒；95%信賴區間使用t分布（29個自由度），臨界值2.04523。S為需求情境，P為改善方案；m是公尺，min是分鐘。</a:t>
             </a:r>
           </a:p>
         </p:txBody>
@@ -1639,7 +1639,7 @@
           <a:lstStyle xmlns:a="http://schemas.openxmlformats.org/drawingml/2006/main"/>
           <a:p xmlns:a="http://schemas.openxmlformats.org/drawingml/2006/main">
             <a:r>
-              <a:t>V3依批次前固定計畫，使用30次平均WIP時間剖面的迴歸，並完整保留個別重複的絕對漂移。S0 pooled漂移−0.20755%，S1 Before為9.84335%，P4 12m為1.86592%。V5包含12項主要作業與財務KPI；原始30次的精度不足仍是正式發現。</a:t>
+              <a:t>V3依批次前固定計畫，使用30次平均在製量時間剖面的迴歸，並完整保留個別重複的絕對漂移。S0 pooled漂移−0.20755%，S1 改善前為9.84335%，P4 12公尺為1.86592%。V5包含12項主要作業與財務績效指標；原始30次的精度不足仍是正式發現。</a:t>
             </a:r>
           </a:p>
           <a:p xmlns:a="http://schemas.openxmlformats.org/drawingml/2006/main">
@@ -1649,7 +1649,7 @@
           </a:p>
           <a:p xmlns:a="http://schemas.openxmlformats.org/drawingml/2006/main">
             <a:r>
-              <a:t>統計：30 個共同種子，暖機 86,400 秒，觀察 518,400 秒；95% CI 使用 t(29)=2.04523。</a:t>
+              <a:t>統計：30 個共同種子，暖機 86,400 秒，觀察 518,400 秒；95%信賴區間使用t分布（29個自由度），臨界值2.04523。S為需求情境，P為改善方案；m是公尺，min是分鐘。</a:t>
             </a:r>
           </a:p>
         </p:txBody>
@@ -1719,7 +1719,7 @@
           <a:lstStyle xmlns:a="http://schemas.openxmlformats.org/drawingml/2006/main"/>
           <a:p xmlns:a="http://schemas.openxmlformats.org/drawingml/2006/main">
             <a:r>
-              <a:t>獨立飽和測試：無故障119.994箱/h；故障均值115.156箱/h，CI涵蓋115.2。主模型V7另以每次實現停機時間對標，不能把每次可用率固定成96%。V8個別重複最大偏差2.46pp，未隱藏。五倍測試7日期末外部待入庫需求34185，實體箱資產最大71，未超過500；縮小5箱池的停機恢復測試則實際觸發了硬上限。</a:t>
+              <a:t>獨立飽和測試：無故障119.994箱／小時；故障均值115.156箱／小時，信賴區間涵蓋115.2。主模型V7另以每次實現停機時間對標，不能把每次可用率固定成96%。V8個別重複最大偏差2.46百分點，未隱藏。五倍測試7日期末外部待入庫需求34185，實體箱資產最大71，未超過500；縮小5箱池的停機恢復測試則實際觸發了硬上限。</a:t>
             </a:r>
           </a:p>
           <a:p xmlns:a="http://schemas.openxmlformats.org/drawingml/2006/main">
@@ -1729,7 +1729,7 @@
           </a:p>
           <a:p xmlns:a="http://schemas.openxmlformats.org/drawingml/2006/main">
             <a:r>
-              <a:t>統計：30 個共同種子，暖機 86,400 秒，觀察 518,400 秒；95% CI 使用 t(29)=2.04523。</a:t>
+              <a:t>統計：30 個共同種子，暖機 86,400 秒，觀察 518,400 秒；95%信賴區間使用t分布（29個自由度），臨界值2.04523。S為需求情境，P為改善方案；m是公尺，min是分鐘。</a:t>
             </a:r>
           </a:p>
         </p:txBody>
@@ -1776,7 +1776,7 @@
           <p:cNvPr id="2" name="Title 1">
             <a:extLst xmlns:a="http://schemas.openxmlformats.org/drawingml/2006/main">
               <a:ext uri="{FF2B5EF4-FFF2-40B4-BE49-F238E27FC236}">
-                <a16:creationId xmlns:a16="http://schemas.microsoft.com/office/drawing/2014/main" id="{51280DC0-AFF4-42B3-8F1A-07018AFDF02B}"/>
+                <a16:creationId xmlns:a16="http://schemas.microsoft.com/office/drawing/2014/main" id="{60AAF07D-6364-4DBB-849C-D3D6E7FB2AEE}"/>
               </a:ext>
             </a:extLst>
           </p:cNvPr>
@@ -1809,7 +1809,7 @@
           <p:cNvPr id="3" name="Subtitle 2">
             <a:extLst xmlns:a="http://schemas.openxmlformats.org/drawingml/2006/main">
               <a:ext uri="{FF2B5EF4-FFF2-40B4-BE49-F238E27FC236}">
-                <a16:creationId xmlns:a16="http://schemas.microsoft.com/office/drawing/2014/main" id="{F28298CD-266E-46C8-8D02-68B64FA17E3A}"/>
+                <a16:creationId xmlns:a16="http://schemas.microsoft.com/office/drawing/2014/main" id="{BB96BAB8-8DF6-4363-B7EB-6357AC0755AE}"/>
               </a:ext>
             </a:extLst>
           </p:cNvPr>
@@ -1933,7 +1933,7 @@
           <p:cNvPr id="4" name="Date Placeholder 3">
             <a:extLst xmlns:a="http://schemas.openxmlformats.org/drawingml/2006/main">
               <a:ext uri="{FF2B5EF4-FFF2-40B4-BE49-F238E27FC236}">
-                <a16:creationId xmlns:a16="http://schemas.microsoft.com/office/drawing/2014/main" id="{93DAB6B2-DD2D-4DE5-BA91-4E2C037C6A33}"/>
+                <a16:creationId xmlns:a16="http://schemas.microsoft.com/office/drawing/2014/main" id="{ED1DFAB8-B381-4365-8BA9-AADDB5BCAC69}"/>
               </a:ext>
             </a:extLst>
           </p:cNvPr>
@@ -1961,7 +1961,7 @@
           <p:cNvPr id="5" name="Footer Placeholder 4">
             <a:extLst xmlns:a="http://schemas.openxmlformats.org/drawingml/2006/main">
               <a:ext uri="{FF2B5EF4-FFF2-40B4-BE49-F238E27FC236}">
-                <a16:creationId xmlns:a16="http://schemas.microsoft.com/office/drawing/2014/main" id="{FADB8065-F64C-450F-AB81-02E36032CEBA}"/>
+                <a16:creationId xmlns:a16="http://schemas.microsoft.com/office/drawing/2014/main" id="{EDCFE6B8-D071-42C0-B3DA-51E3AB0D2F0B}"/>
               </a:ext>
             </a:extLst>
           </p:cNvPr>
@@ -1986,7 +1986,7 @@
           <p:cNvPr id="6" name="Slide Number Placeholder 5">
             <a:extLst xmlns:a="http://schemas.openxmlformats.org/drawingml/2006/main">
               <a:ext uri="{FF2B5EF4-FFF2-40B4-BE49-F238E27FC236}">
-                <a16:creationId xmlns:a16="http://schemas.microsoft.com/office/drawing/2014/main" id="{3856836E-15BF-4114-B155-7761001C5433}"/>
+                <a16:creationId xmlns:a16="http://schemas.microsoft.com/office/drawing/2014/main" id="{7AEE314B-925E-46C3-BFFE-5D17713F49C6}"/>
               </a:ext>
             </a:extLst>
           </p:cNvPr>
@@ -2031,7 +2031,7 @@
           <p:cNvPr id="2" name="Title 1">
             <a:extLst xmlns:a="http://schemas.openxmlformats.org/drawingml/2006/main">
               <a:ext uri="{FF2B5EF4-FFF2-40B4-BE49-F238E27FC236}">
-                <a16:creationId xmlns:a16="http://schemas.microsoft.com/office/drawing/2014/main" id="{308EFA77-47F6-4276-B898-2EF3969508AD}"/>
+                <a16:creationId xmlns:a16="http://schemas.microsoft.com/office/drawing/2014/main" id="{32AEE945-C4F4-429A-BB77-8E9F444CCCC7}"/>
               </a:ext>
             </a:extLst>
           </p:cNvPr>
@@ -2059,7 +2059,7 @@
           <p:cNvPr id="3" name="Vertical Text Placeholder 2">
             <a:extLst xmlns:a="http://schemas.openxmlformats.org/drawingml/2006/main">
               <a:ext uri="{FF2B5EF4-FFF2-40B4-BE49-F238E27FC236}">
-                <a16:creationId xmlns:a16="http://schemas.microsoft.com/office/drawing/2014/main" id="{DC37069E-4999-4DDE-846B-760BA3B99D90}"/>
+                <a16:creationId xmlns:a16="http://schemas.microsoft.com/office/drawing/2014/main" id="{8B9FB5EF-2779-449A-92A6-C26F06A61F54}"/>
               </a:ext>
             </a:extLst>
           </p:cNvPr>
@@ -2122,7 +2122,7 @@
           <p:cNvPr id="4" name="Date Placeholder 3">
             <a:extLst xmlns:a="http://schemas.openxmlformats.org/drawingml/2006/main">
               <a:ext uri="{FF2B5EF4-FFF2-40B4-BE49-F238E27FC236}">
-                <a16:creationId xmlns:a16="http://schemas.microsoft.com/office/drawing/2014/main" id="{14B40B0F-F760-42A5-9343-4BB8A34B10F0}"/>
+                <a16:creationId xmlns:a16="http://schemas.microsoft.com/office/drawing/2014/main" id="{0D26E671-CDE6-4284-B2AD-4C4A45A0BF58}"/>
               </a:ext>
             </a:extLst>
           </p:cNvPr>
@@ -2150,7 +2150,7 @@
           <p:cNvPr id="5" name="Footer Placeholder 4">
             <a:extLst xmlns:a="http://schemas.openxmlformats.org/drawingml/2006/main">
               <a:ext uri="{FF2B5EF4-FFF2-40B4-BE49-F238E27FC236}">
-                <a16:creationId xmlns:a16="http://schemas.microsoft.com/office/drawing/2014/main" id="{77025BC5-1B42-4CFC-BAC0-D67D3FC68E1B}"/>
+                <a16:creationId xmlns:a16="http://schemas.microsoft.com/office/drawing/2014/main" id="{F9FA5C33-375F-406F-B194-93D4A5125279}"/>
               </a:ext>
             </a:extLst>
           </p:cNvPr>
@@ -2175,7 +2175,7 @@
           <p:cNvPr id="6" name="Slide Number Placeholder 5">
             <a:extLst xmlns:a="http://schemas.openxmlformats.org/drawingml/2006/main">
               <a:ext uri="{FF2B5EF4-FFF2-40B4-BE49-F238E27FC236}">
-                <a16:creationId xmlns:a16="http://schemas.microsoft.com/office/drawing/2014/main" id="{C214D0FA-FA07-4169-A058-58C705FF0076}"/>
+                <a16:creationId xmlns:a16="http://schemas.microsoft.com/office/drawing/2014/main" id="{D729844A-CB12-436B-ABF2-945E28186938}"/>
               </a:ext>
             </a:extLst>
           </p:cNvPr>
@@ -2220,7 +2220,7 @@
           <p:cNvPr id="2" name="Vertical Title 1">
             <a:extLst xmlns:a="http://schemas.openxmlformats.org/drawingml/2006/main">
               <a:ext uri="{FF2B5EF4-FFF2-40B4-BE49-F238E27FC236}">
-                <a16:creationId xmlns:a16="http://schemas.microsoft.com/office/drawing/2014/main" id="{2AA166EF-2FFA-401C-B9C8-7400A674B65B}"/>
+                <a16:creationId xmlns:a16="http://schemas.microsoft.com/office/drawing/2014/main" id="{5DED8826-D2D4-4561-85CD-8DB8E16E9444}"/>
               </a:ext>
             </a:extLst>
           </p:cNvPr>
@@ -2253,7 +2253,7 @@
           <p:cNvPr id="3" name="Vertical Text Placeholder 2">
             <a:extLst xmlns:a="http://schemas.openxmlformats.org/drawingml/2006/main">
               <a:ext uri="{FF2B5EF4-FFF2-40B4-BE49-F238E27FC236}">
-                <a16:creationId xmlns:a16="http://schemas.microsoft.com/office/drawing/2014/main" id="{B68747A5-8C99-41B4-BB22-365F8B4DD3A3}"/>
+                <a16:creationId xmlns:a16="http://schemas.microsoft.com/office/drawing/2014/main" id="{A097CD4E-49FC-47DD-8AFD-84FD08565A3C}"/>
               </a:ext>
             </a:extLst>
           </p:cNvPr>
@@ -2321,7 +2321,7 @@
           <p:cNvPr id="4" name="Date Placeholder 3">
             <a:extLst xmlns:a="http://schemas.openxmlformats.org/drawingml/2006/main">
               <a:ext uri="{FF2B5EF4-FFF2-40B4-BE49-F238E27FC236}">
-                <a16:creationId xmlns:a16="http://schemas.microsoft.com/office/drawing/2014/main" id="{402B9939-91C6-4F81-B14D-B7F5C0BF940D}"/>
+                <a16:creationId xmlns:a16="http://schemas.microsoft.com/office/drawing/2014/main" id="{707040ED-AD0F-4299-8F57-2F45AF0AC390}"/>
               </a:ext>
             </a:extLst>
           </p:cNvPr>
@@ -2349,7 +2349,7 @@
           <p:cNvPr id="5" name="Footer Placeholder 4">
             <a:extLst xmlns:a="http://schemas.openxmlformats.org/drawingml/2006/main">
               <a:ext uri="{FF2B5EF4-FFF2-40B4-BE49-F238E27FC236}">
-                <a16:creationId xmlns:a16="http://schemas.microsoft.com/office/drawing/2014/main" id="{963F5F1A-7DB5-4354-87C4-1B6449A5AF3E}"/>
+                <a16:creationId xmlns:a16="http://schemas.microsoft.com/office/drawing/2014/main" id="{3BBBB6DE-D8BD-4029-B1C9-AA6128C1D938}"/>
               </a:ext>
             </a:extLst>
           </p:cNvPr>
@@ -2374,7 +2374,7 @@
           <p:cNvPr id="6" name="Slide Number Placeholder 5">
             <a:extLst xmlns:a="http://schemas.openxmlformats.org/drawingml/2006/main">
               <a:ext uri="{FF2B5EF4-FFF2-40B4-BE49-F238E27FC236}">
-                <a16:creationId xmlns:a16="http://schemas.microsoft.com/office/drawing/2014/main" id="{523C5749-7FFA-4079-A21D-120E34D42AE1}"/>
+                <a16:creationId xmlns:a16="http://schemas.microsoft.com/office/drawing/2014/main" id="{9834859B-E781-41B0-8498-7B1306E3784D}"/>
               </a:ext>
             </a:extLst>
           </p:cNvPr>
@@ -2419,7 +2419,7 @@
           <p:cNvPr id="2" name="Title 1">
             <a:extLst xmlns:a="http://schemas.openxmlformats.org/drawingml/2006/main">
               <a:ext uri="{FF2B5EF4-FFF2-40B4-BE49-F238E27FC236}">
-                <a16:creationId xmlns:a16="http://schemas.microsoft.com/office/drawing/2014/main" id="{1DEBE770-D05E-4B6B-8037-3BBB1104828D}"/>
+                <a16:creationId xmlns:a16="http://schemas.microsoft.com/office/drawing/2014/main" id="{D828A8B1-B652-43B3-AA1D-A0621EB9F5F4}"/>
               </a:ext>
             </a:extLst>
           </p:cNvPr>
@@ -2447,7 +2447,7 @@
           <p:cNvPr id="3" name="Content Placeholder 2">
             <a:extLst xmlns:a="http://schemas.openxmlformats.org/drawingml/2006/main">
               <a:ext uri="{FF2B5EF4-FFF2-40B4-BE49-F238E27FC236}">
-                <a16:creationId xmlns:a16="http://schemas.microsoft.com/office/drawing/2014/main" id="{170883BE-229A-4582-818B-23D9E92BE92E}"/>
+                <a16:creationId xmlns:a16="http://schemas.microsoft.com/office/drawing/2014/main" id="{9356AFC3-E8D0-4603-AD83-3FE3EFE7639E}"/>
               </a:ext>
             </a:extLst>
           </p:cNvPr>
@@ -2510,7 +2510,7 @@
           <p:cNvPr id="4" name="Date Placeholder 3">
             <a:extLst xmlns:a="http://schemas.openxmlformats.org/drawingml/2006/main">
               <a:ext uri="{FF2B5EF4-FFF2-40B4-BE49-F238E27FC236}">
-                <a16:creationId xmlns:a16="http://schemas.microsoft.com/office/drawing/2014/main" id="{7D2AEE92-A242-4281-AC11-5221609B6C20}"/>
+                <a16:creationId xmlns:a16="http://schemas.microsoft.com/office/drawing/2014/main" id="{4DB1F090-2363-4E5B-8CC8-1988C718928F}"/>
               </a:ext>
             </a:extLst>
           </p:cNvPr>
@@ -2538,7 +2538,7 @@
           <p:cNvPr id="5" name="Footer Placeholder 4">
             <a:extLst xmlns:a="http://schemas.openxmlformats.org/drawingml/2006/main">
               <a:ext uri="{FF2B5EF4-FFF2-40B4-BE49-F238E27FC236}">
-                <a16:creationId xmlns:a16="http://schemas.microsoft.com/office/drawing/2014/main" id="{536E1245-FD6D-4FC2-A48D-0530122ACE53}"/>
+                <a16:creationId xmlns:a16="http://schemas.microsoft.com/office/drawing/2014/main" id="{A618B71B-A2BB-41C6-828C-CD44E0424B9B}"/>
               </a:ext>
             </a:extLst>
           </p:cNvPr>
@@ -2563,7 +2563,7 @@
           <p:cNvPr id="6" name="Slide Number Placeholder 5">
             <a:extLst xmlns:a="http://schemas.openxmlformats.org/drawingml/2006/main">
               <a:ext uri="{FF2B5EF4-FFF2-40B4-BE49-F238E27FC236}">
-                <a16:creationId xmlns:a16="http://schemas.microsoft.com/office/drawing/2014/main" id="{C4D66596-6B3C-4D5B-B314-16A338213BC1}"/>
+                <a16:creationId xmlns:a16="http://schemas.microsoft.com/office/drawing/2014/main" id="{4D229217-2BE8-4969-83DF-91BDA058BA0B}"/>
               </a:ext>
             </a:extLst>
           </p:cNvPr>
@@ -2608,7 +2608,7 @@
           <p:cNvPr id="2" name="Title 1">
             <a:extLst xmlns:a="http://schemas.openxmlformats.org/drawingml/2006/main">
               <a:ext uri="{FF2B5EF4-FFF2-40B4-BE49-F238E27FC236}">
-                <a16:creationId xmlns:a16="http://schemas.microsoft.com/office/drawing/2014/main" id="{56F95C92-ACF8-49D1-8872-4758FD76994D}"/>
+                <a16:creationId xmlns:a16="http://schemas.microsoft.com/office/drawing/2014/main" id="{B301247E-6265-46EB-B042-D7DF871124FB}"/>
               </a:ext>
             </a:extLst>
           </p:cNvPr>
@@ -2646,7 +2646,7 @@
           <p:cNvPr id="3" name="Text Placeholder 2">
             <a:extLst xmlns:a="http://schemas.openxmlformats.org/drawingml/2006/main">
               <a:ext uri="{FF2B5EF4-FFF2-40B4-BE49-F238E27FC236}">
-                <a16:creationId xmlns:a16="http://schemas.microsoft.com/office/drawing/2014/main" id="{EE926CC3-0931-42CA-9EB4-D02828B4BCA6}"/>
+                <a16:creationId xmlns:a16="http://schemas.microsoft.com/office/drawing/2014/main" id="{82B9AEF6-9C03-40C5-A2EE-4197EEB4FCAB}"/>
               </a:ext>
             </a:extLst>
           </p:cNvPr>
@@ -2772,7 +2772,7 @@
           <p:cNvPr id="4" name="Date Placeholder 3">
             <a:extLst xmlns:a="http://schemas.openxmlformats.org/drawingml/2006/main">
               <a:ext uri="{FF2B5EF4-FFF2-40B4-BE49-F238E27FC236}">
-                <a16:creationId xmlns:a16="http://schemas.microsoft.com/office/drawing/2014/main" id="{366713EE-DF2E-4834-BA3C-E6EAD1A54A55}"/>
+                <a16:creationId xmlns:a16="http://schemas.microsoft.com/office/drawing/2014/main" id="{00D16052-FC48-4A04-8568-57416ECBC64A}"/>
               </a:ext>
             </a:extLst>
           </p:cNvPr>
@@ -2800,7 +2800,7 @@
           <p:cNvPr id="5" name="Footer Placeholder 4">
             <a:extLst xmlns:a="http://schemas.openxmlformats.org/drawingml/2006/main">
               <a:ext uri="{FF2B5EF4-FFF2-40B4-BE49-F238E27FC236}">
-                <a16:creationId xmlns:a16="http://schemas.microsoft.com/office/drawing/2014/main" id="{F38D5336-2732-4575-ABFE-9413FB929721}"/>
+                <a16:creationId xmlns:a16="http://schemas.microsoft.com/office/drawing/2014/main" id="{D9435F90-D516-4918-8DA1-456727A4C60C}"/>
               </a:ext>
             </a:extLst>
           </p:cNvPr>
@@ -2825,7 +2825,7 @@
           <p:cNvPr id="6" name="Slide Number Placeholder 5">
             <a:extLst xmlns:a="http://schemas.openxmlformats.org/drawingml/2006/main">
               <a:ext uri="{FF2B5EF4-FFF2-40B4-BE49-F238E27FC236}">
-                <a16:creationId xmlns:a16="http://schemas.microsoft.com/office/drawing/2014/main" id="{90751AFF-5F00-49C4-BB35-995BA82AAFDC}"/>
+                <a16:creationId xmlns:a16="http://schemas.microsoft.com/office/drawing/2014/main" id="{4C6E7816-B282-450F-AD26-2C74920E189F}"/>
               </a:ext>
             </a:extLst>
           </p:cNvPr>
@@ -2870,7 +2870,7 @@
           <p:cNvPr id="2" name="Title 1">
             <a:extLst xmlns:a="http://schemas.openxmlformats.org/drawingml/2006/main">
               <a:ext uri="{FF2B5EF4-FFF2-40B4-BE49-F238E27FC236}">
-                <a16:creationId xmlns:a16="http://schemas.microsoft.com/office/drawing/2014/main" id="{67CDF2A8-6B58-40FB-B9E9-1B330337B8AE}"/>
+                <a16:creationId xmlns:a16="http://schemas.microsoft.com/office/drawing/2014/main" id="{AE626077-D5E5-410C-8707-A82256304791}"/>
               </a:ext>
             </a:extLst>
           </p:cNvPr>
@@ -2898,7 +2898,7 @@
           <p:cNvPr id="3" name="Content Placeholder 2">
             <a:extLst xmlns:a="http://schemas.openxmlformats.org/drawingml/2006/main">
               <a:ext uri="{FF2B5EF4-FFF2-40B4-BE49-F238E27FC236}">
-                <a16:creationId xmlns:a16="http://schemas.microsoft.com/office/drawing/2014/main" id="{44F34392-269B-478F-8F8C-C9D0500EC8C5}"/>
+                <a16:creationId xmlns:a16="http://schemas.microsoft.com/office/drawing/2014/main" id="{E9A06E95-659D-4C50-A044-5617BBCEA644}"/>
               </a:ext>
             </a:extLst>
           </p:cNvPr>
@@ -3003,7 +3003,7 @@
           <p:cNvPr id="4" name="Content Placeholder 3">
             <a:extLst xmlns:a="http://schemas.openxmlformats.org/drawingml/2006/main">
               <a:ext uri="{FF2B5EF4-FFF2-40B4-BE49-F238E27FC236}">
-                <a16:creationId xmlns:a16="http://schemas.microsoft.com/office/drawing/2014/main" id="{E479FE84-0808-45F4-9EB7-C22F148F8C45}"/>
+                <a16:creationId xmlns:a16="http://schemas.microsoft.com/office/drawing/2014/main" id="{171639AA-00D3-49DA-BB35-D47DF77BBF9A}"/>
               </a:ext>
             </a:extLst>
           </p:cNvPr>
@@ -3108,7 +3108,7 @@
           <p:cNvPr id="5" name="Date Placeholder 4">
             <a:extLst xmlns:a="http://schemas.openxmlformats.org/drawingml/2006/main">
               <a:ext uri="{FF2B5EF4-FFF2-40B4-BE49-F238E27FC236}">
-                <a16:creationId xmlns:a16="http://schemas.microsoft.com/office/drawing/2014/main" id="{D513CB9B-FCDA-41FA-AE57-9D6E78A223F0}"/>
+                <a16:creationId xmlns:a16="http://schemas.microsoft.com/office/drawing/2014/main" id="{F8DFB4E3-D13A-44F5-997C-31AE3785E0ED}"/>
               </a:ext>
             </a:extLst>
           </p:cNvPr>
@@ -3136,7 +3136,7 @@
           <p:cNvPr id="6" name="Footer Placeholder 5">
             <a:extLst xmlns:a="http://schemas.openxmlformats.org/drawingml/2006/main">
               <a:ext uri="{FF2B5EF4-FFF2-40B4-BE49-F238E27FC236}">
-                <a16:creationId xmlns:a16="http://schemas.microsoft.com/office/drawing/2014/main" id="{EB706E91-B06C-499F-9885-27D7A5C4BC1E}"/>
+                <a16:creationId xmlns:a16="http://schemas.microsoft.com/office/drawing/2014/main" id="{54A70DE5-AF91-4859-981B-98C7641BE966}"/>
               </a:ext>
             </a:extLst>
           </p:cNvPr>
@@ -3161,7 +3161,7 @@
           <p:cNvPr id="7" name="Slide Number Placeholder 6">
             <a:extLst xmlns:a="http://schemas.openxmlformats.org/drawingml/2006/main">
               <a:ext uri="{FF2B5EF4-FFF2-40B4-BE49-F238E27FC236}">
-                <a16:creationId xmlns:a16="http://schemas.microsoft.com/office/drawing/2014/main" id="{6EF2E8AF-357B-443F-9349-802530C7241A}"/>
+                <a16:creationId xmlns:a16="http://schemas.microsoft.com/office/drawing/2014/main" id="{F1EA5517-7091-4147-A924-8D7722E2B203}"/>
               </a:ext>
             </a:extLst>
           </p:cNvPr>
@@ -3206,7 +3206,7 @@
           <p:cNvPr id="2" name="Title 1">
             <a:extLst xmlns:a="http://schemas.openxmlformats.org/drawingml/2006/main">
               <a:ext uri="{FF2B5EF4-FFF2-40B4-BE49-F238E27FC236}">
-                <a16:creationId xmlns:a16="http://schemas.microsoft.com/office/drawing/2014/main" id="{38F49D87-743D-474B-88DB-207A436E8669}"/>
+                <a16:creationId xmlns:a16="http://schemas.microsoft.com/office/drawing/2014/main" id="{C1E42FEF-8782-407E-A41E-DE7F66A67025}"/>
               </a:ext>
             </a:extLst>
           </p:cNvPr>
@@ -3239,7 +3239,7 @@
           <p:cNvPr id="3" name="Text Placeholder 2">
             <a:extLst xmlns:a="http://schemas.openxmlformats.org/drawingml/2006/main">
               <a:ext uri="{FF2B5EF4-FFF2-40B4-BE49-F238E27FC236}">
-                <a16:creationId xmlns:a16="http://schemas.microsoft.com/office/drawing/2014/main" id="{ECCAEB0E-9F60-414C-B432-93216F072324}"/>
+                <a16:creationId xmlns:a16="http://schemas.microsoft.com/office/drawing/2014/main" id="{F59AA7F3-E402-44AC-A604-D63C4E1AF92B}"/>
               </a:ext>
             </a:extLst>
           </p:cNvPr>
@@ -3311,7 +3311,7 @@
           <p:cNvPr id="4" name="Content Placeholder 3">
             <a:extLst xmlns:a="http://schemas.openxmlformats.org/drawingml/2006/main">
               <a:ext uri="{FF2B5EF4-FFF2-40B4-BE49-F238E27FC236}">
-                <a16:creationId xmlns:a16="http://schemas.microsoft.com/office/drawing/2014/main" id="{EC8DEAC9-6096-4A1B-9E89-3666C39E39EE}"/>
+                <a16:creationId xmlns:a16="http://schemas.microsoft.com/office/drawing/2014/main" id="{EDEFD273-B834-42E3-894E-5AB626C693F5}"/>
               </a:ext>
             </a:extLst>
           </p:cNvPr>
@@ -3416,7 +3416,7 @@
           <p:cNvPr id="5" name="Text Placeholder 4">
             <a:extLst xmlns:a="http://schemas.openxmlformats.org/drawingml/2006/main">
               <a:ext uri="{FF2B5EF4-FFF2-40B4-BE49-F238E27FC236}">
-                <a16:creationId xmlns:a16="http://schemas.microsoft.com/office/drawing/2014/main" id="{518273F0-7268-4CEB-B6A2-B0D306C6AD2C}"/>
+                <a16:creationId xmlns:a16="http://schemas.microsoft.com/office/drawing/2014/main" id="{E64744B3-EDE8-4677-9194-01ABA99F207A}"/>
               </a:ext>
             </a:extLst>
           </p:cNvPr>
@@ -3488,7 +3488,7 @@
           <p:cNvPr id="6" name="Content Placeholder 5">
             <a:extLst xmlns:a="http://schemas.openxmlformats.org/drawingml/2006/main">
               <a:ext uri="{FF2B5EF4-FFF2-40B4-BE49-F238E27FC236}">
-                <a16:creationId xmlns:a16="http://schemas.microsoft.com/office/drawing/2014/main" id="{3CAB2E80-EB51-4977-A728-306E8FD06B18}"/>
+                <a16:creationId xmlns:a16="http://schemas.microsoft.com/office/drawing/2014/main" id="{77A14389-6008-44CC-ADFA-77E7C8B950C6}"/>
               </a:ext>
             </a:extLst>
           </p:cNvPr>
@@ -3593,7 +3593,7 @@
           <p:cNvPr id="7" name="Date Placeholder 6">
             <a:extLst xmlns:a="http://schemas.openxmlformats.org/drawingml/2006/main">
               <a:ext uri="{FF2B5EF4-FFF2-40B4-BE49-F238E27FC236}">
-                <a16:creationId xmlns:a16="http://schemas.microsoft.com/office/drawing/2014/main" id="{735C09E6-C5DA-457C-B59F-A1E0DB90C581}"/>
+                <a16:creationId xmlns:a16="http://schemas.microsoft.com/office/drawing/2014/main" id="{1BFCDD00-E976-4CA3-BFE2-C6D534FF030E}"/>
               </a:ext>
             </a:extLst>
           </p:cNvPr>
@@ -3621,7 +3621,7 @@
           <p:cNvPr id="8" name="Footer Placeholder 7">
             <a:extLst xmlns:a="http://schemas.openxmlformats.org/drawingml/2006/main">
               <a:ext uri="{FF2B5EF4-FFF2-40B4-BE49-F238E27FC236}">
-                <a16:creationId xmlns:a16="http://schemas.microsoft.com/office/drawing/2014/main" id="{628528F7-E91E-49C0-BD6E-47F4407C90A2}"/>
+                <a16:creationId xmlns:a16="http://schemas.microsoft.com/office/drawing/2014/main" id="{E6B1B905-033A-498A-AB50-19C7B99A2CBD}"/>
               </a:ext>
             </a:extLst>
           </p:cNvPr>
@@ -3646,7 +3646,7 @@
           <p:cNvPr id="9" name="Slide Number Placeholder 8">
             <a:extLst xmlns:a="http://schemas.openxmlformats.org/drawingml/2006/main">
               <a:ext uri="{FF2B5EF4-FFF2-40B4-BE49-F238E27FC236}">
-                <a16:creationId xmlns:a16="http://schemas.microsoft.com/office/drawing/2014/main" id="{9C4FD547-0439-4E22-853F-577F867EA393}"/>
+                <a16:creationId xmlns:a16="http://schemas.microsoft.com/office/drawing/2014/main" id="{1918A968-4724-42BB-B78A-EAA98F669780}"/>
               </a:ext>
             </a:extLst>
           </p:cNvPr>
@@ -3691,7 +3691,7 @@
           <p:cNvPr id="2" name="Title 1">
             <a:extLst xmlns:a="http://schemas.openxmlformats.org/drawingml/2006/main">
               <a:ext uri="{FF2B5EF4-FFF2-40B4-BE49-F238E27FC236}">
-                <a16:creationId xmlns:a16="http://schemas.microsoft.com/office/drawing/2014/main" id="{81FB37C1-FBDD-434B-B37E-171DEB1C2C52}"/>
+                <a16:creationId xmlns:a16="http://schemas.microsoft.com/office/drawing/2014/main" id="{4E382995-18B2-4930-A43E-E48DBDF6461F}"/>
               </a:ext>
             </a:extLst>
           </p:cNvPr>
@@ -3719,7 +3719,7 @@
           <p:cNvPr id="3" name="Date Placeholder 2">
             <a:extLst xmlns:a="http://schemas.openxmlformats.org/drawingml/2006/main">
               <a:ext uri="{FF2B5EF4-FFF2-40B4-BE49-F238E27FC236}">
-                <a16:creationId xmlns:a16="http://schemas.microsoft.com/office/drawing/2014/main" id="{2C9FE200-FBF0-49D5-98F1-B3E58887D4F9}"/>
+                <a16:creationId xmlns:a16="http://schemas.microsoft.com/office/drawing/2014/main" id="{CED2F28E-2D96-44BE-AF71-892C45C91BC8}"/>
               </a:ext>
             </a:extLst>
           </p:cNvPr>
@@ -3747,7 +3747,7 @@
           <p:cNvPr id="4" name="Footer Placeholder 3">
             <a:extLst xmlns:a="http://schemas.openxmlformats.org/drawingml/2006/main">
               <a:ext uri="{FF2B5EF4-FFF2-40B4-BE49-F238E27FC236}">
-                <a16:creationId xmlns:a16="http://schemas.microsoft.com/office/drawing/2014/main" id="{81726844-5B64-4C77-835C-35DE6A826139}"/>
+                <a16:creationId xmlns:a16="http://schemas.microsoft.com/office/drawing/2014/main" id="{47A273F3-350F-4CA7-9802-A4B0AC1342F3}"/>
               </a:ext>
             </a:extLst>
           </p:cNvPr>
@@ -3772,7 +3772,7 @@
           <p:cNvPr id="5" name="Slide Number Placeholder 4">
             <a:extLst xmlns:a="http://schemas.openxmlformats.org/drawingml/2006/main">
               <a:ext uri="{FF2B5EF4-FFF2-40B4-BE49-F238E27FC236}">
-                <a16:creationId xmlns:a16="http://schemas.microsoft.com/office/drawing/2014/main" id="{DF0559E3-E556-41DD-9D63-5EC254612213}"/>
+                <a16:creationId xmlns:a16="http://schemas.microsoft.com/office/drawing/2014/main" id="{FFF307C5-96D7-4D26-8815-F0F8FDD0C425}"/>
               </a:ext>
             </a:extLst>
           </p:cNvPr>
@@ -3817,7 +3817,7 @@
           <p:cNvPr id="2" name="Date Placeholder 1">
             <a:extLst xmlns:a="http://schemas.openxmlformats.org/drawingml/2006/main">
               <a:ext uri="{FF2B5EF4-FFF2-40B4-BE49-F238E27FC236}">
-                <a16:creationId xmlns:a16="http://schemas.microsoft.com/office/drawing/2014/main" id="{8C3F72BE-01CA-46FD-9B10-3771BD48790E}"/>
+                <a16:creationId xmlns:a16="http://schemas.microsoft.com/office/drawing/2014/main" id="{B499E12C-9480-4A90-8A35-FD88ED29E9D9}"/>
               </a:ext>
             </a:extLst>
           </p:cNvPr>
@@ -3845,7 +3845,7 @@
           <p:cNvPr id="3" name="Footer Placeholder 2">
             <a:extLst xmlns:a="http://schemas.openxmlformats.org/drawingml/2006/main">
               <a:ext uri="{FF2B5EF4-FFF2-40B4-BE49-F238E27FC236}">
-                <a16:creationId xmlns:a16="http://schemas.microsoft.com/office/drawing/2014/main" id="{7918C470-8903-4B4B-ABE9-660F5113CE13}"/>
+                <a16:creationId xmlns:a16="http://schemas.microsoft.com/office/drawing/2014/main" id="{641E59A9-02D9-49C5-A850-BF5DE06459E7}"/>
               </a:ext>
             </a:extLst>
           </p:cNvPr>
@@ -3870,7 +3870,7 @@
           <p:cNvPr id="4" name="Slide Number Placeholder 3">
             <a:extLst xmlns:a="http://schemas.openxmlformats.org/drawingml/2006/main">
               <a:ext uri="{FF2B5EF4-FFF2-40B4-BE49-F238E27FC236}">
-                <a16:creationId xmlns:a16="http://schemas.microsoft.com/office/drawing/2014/main" id="{94BC10A5-D910-40EF-AE47-8F0C45244125}"/>
+                <a16:creationId xmlns:a16="http://schemas.microsoft.com/office/drawing/2014/main" id="{B76A17DF-7A42-460F-ACB4-60813DA8E5BA}"/>
               </a:ext>
             </a:extLst>
           </p:cNvPr>
@@ -3915,7 +3915,7 @@
           <p:cNvPr id="2" name="Title 1">
             <a:extLst xmlns:a="http://schemas.openxmlformats.org/drawingml/2006/main">
               <a:ext uri="{FF2B5EF4-FFF2-40B4-BE49-F238E27FC236}">
-                <a16:creationId xmlns:a16="http://schemas.microsoft.com/office/drawing/2014/main" id="{92C67350-D22B-4737-AD21-497DAF82BE01}"/>
+                <a16:creationId xmlns:a16="http://schemas.microsoft.com/office/drawing/2014/main" id="{3C0DFFD5-5685-43C7-A397-4B82920847E5}"/>
               </a:ext>
             </a:extLst>
           </p:cNvPr>
@@ -3953,7 +3953,7 @@
           <p:cNvPr id="3" name="Content Placeholder 2">
             <a:extLst xmlns:a="http://schemas.openxmlformats.org/drawingml/2006/main">
               <a:ext uri="{FF2B5EF4-FFF2-40B4-BE49-F238E27FC236}">
-                <a16:creationId xmlns:a16="http://schemas.microsoft.com/office/drawing/2014/main" id="{2A1A18BA-5CC8-4881-AA56-509493DDD1EF}"/>
+                <a16:creationId xmlns:a16="http://schemas.microsoft.com/office/drawing/2014/main" id="{B0896747-69B8-490F-AE06-568E978B8601}"/>
               </a:ext>
             </a:extLst>
           </p:cNvPr>
@@ -4058,7 +4058,7 @@
           <p:cNvPr id="4" name="Text Placeholder 3">
             <a:extLst xmlns:a="http://schemas.openxmlformats.org/drawingml/2006/main">
               <a:ext uri="{FF2B5EF4-FFF2-40B4-BE49-F238E27FC236}">
-                <a16:creationId xmlns:a16="http://schemas.microsoft.com/office/drawing/2014/main" id="{16ED9BB5-A475-4FF7-B045-99A44551EA35}"/>
+                <a16:creationId xmlns:a16="http://schemas.microsoft.com/office/drawing/2014/main" id="{4E35F372-2BFC-4007-9C66-DC142A3784F7}"/>
               </a:ext>
             </a:extLst>
           </p:cNvPr>
@@ -4130,7 +4130,7 @@
           <p:cNvPr id="5" name="Date Placeholder 4">
             <a:extLst xmlns:a="http://schemas.openxmlformats.org/drawingml/2006/main">
               <a:ext uri="{FF2B5EF4-FFF2-40B4-BE49-F238E27FC236}">
-                <a16:creationId xmlns:a16="http://schemas.microsoft.com/office/drawing/2014/main" id="{4734482D-6D95-4BEF-8B07-79B0E5062CE0}"/>
+                <a16:creationId xmlns:a16="http://schemas.microsoft.com/office/drawing/2014/main" id="{05B080BD-7DD9-43A7-81C0-D8FF6DAFE8A9}"/>
               </a:ext>
             </a:extLst>
           </p:cNvPr>
@@ -4158,7 +4158,7 @@
           <p:cNvPr id="6" name="Footer Placeholder 5">
             <a:extLst xmlns:a="http://schemas.openxmlformats.org/drawingml/2006/main">
               <a:ext uri="{FF2B5EF4-FFF2-40B4-BE49-F238E27FC236}">
-                <a16:creationId xmlns:a16="http://schemas.microsoft.com/office/drawing/2014/main" id="{C54646D7-A2F6-4F5A-B19B-144623428DEA}"/>
+                <a16:creationId xmlns:a16="http://schemas.microsoft.com/office/drawing/2014/main" id="{09052CD8-E69C-462E-9426-43E5906E917D}"/>
               </a:ext>
             </a:extLst>
           </p:cNvPr>
@@ -4183,7 +4183,7 @@
           <p:cNvPr id="7" name="Slide Number Placeholder 6">
             <a:extLst xmlns:a="http://schemas.openxmlformats.org/drawingml/2006/main">
               <a:ext uri="{FF2B5EF4-FFF2-40B4-BE49-F238E27FC236}">
-                <a16:creationId xmlns:a16="http://schemas.microsoft.com/office/drawing/2014/main" id="{9ACD4F91-8754-4E57-88C5-E9A7E6213BBE}"/>
+                <a16:creationId xmlns:a16="http://schemas.microsoft.com/office/drawing/2014/main" id="{6DAC0015-F48F-4708-8960-7D36EC74514C}"/>
               </a:ext>
             </a:extLst>
           </p:cNvPr>
@@ -4228,7 +4228,7 @@
           <p:cNvPr id="2" name="Title 1">
             <a:extLst xmlns:a="http://schemas.openxmlformats.org/drawingml/2006/main">
               <a:ext uri="{FF2B5EF4-FFF2-40B4-BE49-F238E27FC236}">
-                <a16:creationId xmlns:a16="http://schemas.microsoft.com/office/drawing/2014/main" id="{22B59A79-AABA-4A9A-9265-757C83B21848}"/>
+                <a16:creationId xmlns:a16="http://schemas.microsoft.com/office/drawing/2014/main" id="{7B5CF778-DE2E-40E4-8FCE-4BA5554DC450}"/>
               </a:ext>
             </a:extLst>
           </p:cNvPr>
@@ -4266,7 +4266,7 @@
           <p:cNvPr id="3" name="Picture Placeholder 2">
             <a:extLst xmlns:a="http://schemas.openxmlformats.org/drawingml/2006/main">
               <a:ext uri="{FF2B5EF4-FFF2-40B4-BE49-F238E27FC236}">
-                <a16:creationId xmlns:a16="http://schemas.microsoft.com/office/drawing/2014/main" id="{0D49A52F-41A4-41A5-8EA0-7A7E73F35F21}"/>
+                <a16:creationId xmlns:a16="http://schemas.microsoft.com/office/drawing/2014/main" id="{3716F194-B4CD-40FA-B689-53AC6A6C358D}"/>
               </a:ext>
             </a:extLst>
           </p:cNvPr>
@@ -4333,7 +4333,7 @@
           <p:cNvPr id="4" name="Text Placeholder 3">
             <a:extLst xmlns:a="http://schemas.openxmlformats.org/drawingml/2006/main">
               <a:ext uri="{FF2B5EF4-FFF2-40B4-BE49-F238E27FC236}">
-                <a16:creationId xmlns:a16="http://schemas.microsoft.com/office/drawing/2014/main" id="{A7FE513F-3EDF-4308-BF92-02E1821724BE}"/>
+                <a16:creationId xmlns:a16="http://schemas.microsoft.com/office/drawing/2014/main" id="{BD425812-31AD-4815-A3F0-1205F69DEE1B}"/>
               </a:ext>
             </a:extLst>
           </p:cNvPr>
@@ -4405,7 +4405,7 @@
           <p:cNvPr id="5" name="Date Placeholder 4">
             <a:extLst xmlns:a="http://schemas.openxmlformats.org/drawingml/2006/main">
               <a:ext uri="{FF2B5EF4-FFF2-40B4-BE49-F238E27FC236}">
-                <a16:creationId xmlns:a16="http://schemas.microsoft.com/office/drawing/2014/main" id="{8317F796-C774-44D6-AF8E-13AAD48FBFA2}"/>
+                <a16:creationId xmlns:a16="http://schemas.microsoft.com/office/drawing/2014/main" id="{58D318DA-A50C-4E60-9249-13C0848DB623}"/>
               </a:ext>
             </a:extLst>
           </p:cNvPr>
@@ -4433,7 +4433,7 @@
           <p:cNvPr id="6" name="Footer Placeholder 5">
             <a:extLst xmlns:a="http://schemas.openxmlformats.org/drawingml/2006/main">
               <a:ext uri="{FF2B5EF4-FFF2-40B4-BE49-F238E27FC236}">
-                <a16:creationId xmlns:a16="http://schemas.microsoft.com/office/drawing/2014/main" id="{49F5483B-C2F9-4504-AFEE-3575939E2CD1}"/>
+                <a16:creationId xmlns:a16="http://schemas.microsoft.com/office/drawing/2014/main" id="{F3D2EB50-363D-467D-9ACB-F168CD038366}"/>
               </a:ext>
             </a:extLst>
           </p:cNvPr>
@@ -4458,7 +4458,7 @@
           <p:cNvPr id="7" name="Slide Number Placeholder 6">
             <a:extLst xmlns:a="http://schemas.openxmlformats.org/drawingml/2006/main">
               <a:ext uri="{FF2B5EF4-FFF2-40B4-BE49-F238E27FC236}">
-                <a16:creationId xmlns:a16="http://schemas.microsoft.com/office/drawing/2014/main" id="{9EA8812D-F8BE-4E08-A0E9-C28AF3271BFE}"/>
+                <a16:creationId xmlns:a16="http://schemas.microsoft.com/office/drawing/2014/main" id="{73BE029D-B684-4013-8721-2043B0CE28B9}"/>
               </a:ext>
             </a:extLst>
           </p:cNvPr>
@@ -4508,7 +4508,7 @@
           <p:cNvPr id="2" name="Title Placeholder 1">
             <a:extLst xmlns:a="http://schemas.openxmlformats.org/drawingml/2006/main">
               <a:ext uri="{FF2B5EF4-FFF2-40B4-BE49-F238E27FC236}">
-                <a16:creationId xmlns:a16="http://schemas.microsoft.com/office/drawing/2014/main" id="{98027123-9D9B-49C4-BA08-719D7746B65C}"/>
+                <a16:creationId xmlns:a16="http://schemas.microsoft.com/office/drawing/2014/main" id="{E0EEEC88-DBAE-449B-9002-4B4C91875C30}"/>
               </a:ext>
             </a:extLst>
           </p:cNvPr>
@@ -4546,7 +4546,7 @@
           <p:cNvPr id="3" name="Text Placeholder 2">
             <a:extLst xmlns:a="http://schemas.openxmlformats.org/drawingml/2006/main">
               <a:ext uri="{FF2B5EF4-FFF2-40B4-BE49-F238E27FC236}">
-                <a16:creationId xmlns:a16="http://schemas.microsoft.com/office/drawing/2014/main" id="{08ED705A-CF23-4326-915A-996D8D4F26DB}"/>
+                <a16:creationId xmlns:a16="http://schemas.microsoft.com/office/drawing/2014/main" id="{A8F47AD5-4482-4BD2-A519-DC1075F317E5}"/>
               </a:ext>
             </a:extLst>
           </p:cNvPr>
@@ -4619,7 +4619,7 @@
           <p:cNvPr id="4" name="Date Placeholder 3">
             <a:extLst xmlns:a="http://schemas.openxmlformats.org/drawingml/2006/main">
               <a:ext uri="{FF2B5EF4-FFF2-40B4-BE49-F238E27FC236}">
-                <a16:creationId xmlns:a16="http://schemas.microsoft.com/office/drawing/2014/main" id="{D02A025C-6327-4E30-8100-BF34B03CC6E0}"/>
+                <a16:creationId xmlns:a16="http://schemas.microsoft.com/office/drawing/2014/main" id="{50C5D670-763E-4153-8469-01D9A4D6E91A}"/>
               </a:ext>
             </a:extLst>
           </p:cNvPr>
@@ -4666,7 +4666,7 @@
           <p:cNvPr id="5" name="Footer Placeholder 4">
             <a:extLst xmlns:a="http://schemas.openxmlformats.org/drawingml/2006/main">
               <a:ext uri="{FF2B5EF4-FFF2-40B4-BE49-F238E27FC236}">
-                <a16:creationId xmlns:a16="http://schemas.microsoft.com/office/drawing/2014/main" id="{DD9A9B48-5060-4CA4-B9D0-80C4BA085F07}"/>
+                <a16:creationId xmlns:a16="http://schemas.microsoft.com/office/drawing/2014/main" id="{B04C9047-3EE5-49A4-A542-D07CCC356427}"/>
               </a:ext>
             </a:extLst>
           </p:cNvPr>
@@ -4710,7 +4710,7 @@
           <p:cNvPr id="6" name="Slide Number Placeholder 5">
             <a:extLst xmlns:a="http://schemas.openxmlformats.org/drawingml/2006/main">
               <a:ext uri="{FF2B5EF4-FFF2-40B4-BE49-F238E27FC236}">
-                <a16:creationId xmlns:a16="http://schemas.microsoft.com/office/drawing/2014/main" id="{6BBF14CB-8339-4147-9A76-9BF518740687}"/>
+                <a16:creationId xmlns:a16="http://schemas.microsoft.com/office/drawing/2014/main" id="{AA21E6D0-0FC2-4B20-ABD5-07AD60CEFCAD}"/>
               </a:ext>
             </a:extLst>
           </p:cNvPr>
@@ -4756,17 +4756,17 @@
   </p:cSld>
   <p:clrMap bg1="lt1" tx1="dk1" bg2="lt2" tx2="dk2" accent1="accent1" accent2="accent2" accent3="accent3" accent4="accent4" accent5="accent5" accent6="accent6" hlink="hlink" folHlink="folHlink"/>
   <p:sldLayoutIdLst>
-    <p:sldLayoutId xmlns:r="http://schemas.openxmlformats.org/officeDocument/2006/relationships" id="2147483649" r:id="R86277e0dcf4643d8"/>
-    <p:sldLayoutId xmlns:r="http://schemas.openxmlformats.org/officeDocument/2006/relationships" id="2147483650" r:id="Rb6e4ea18270e4912"/>
-    <p:sldLayoutId xmlns:r="http://schemas.openxmlformats.org/officeDocument/2006/relationships" id="2147483651" r:id="R70012afc37fe46b8"/>
-    <p:sldLayoutId xmlns:r="http://schemas.openxmlformats.org/officeDocument/2006/relationships" id="2147483652" r:id="Rde41c496956e48ca"/>
-    <p:sldLayoutId xmlns:r="http://schemas.openxmlformats.org/officeDocument/2006/relationships" id="2147483653" r:id="R80a48f07e79447e6"/>
-    <p:sldLayoutId xmlns:r="http://schemas.openxmlformats.org/officeDocument/2006/relationships" id="2147483654" r:id="R9b3572fca82f4ef6"/>
-    <p:sldLayoutId xmlns:r="http://schemas.openxmlformats.org/officeDocument/2006/relationships" id="2147483655" r:id="R88880eed935941f3"/>
-    <p:sldLayoutId xmlns:r="http://schemas.openxmlformats.org/officeDocument/2006/relationships" id="2147483656" r:id="R40dbbf75352142a8"/>
-    <p:sldLayoutId xmlns:r="http://schemas.openxmlformats.org/officeDocument/2006/relationships" id="2147483657" r:id="R46d52a3f9b5c48a8"/>
-    <p:sldLayoutId xmlns:r="http://schemas.openxmlformats.org/officeDocument/2006/relationships" id="2147483658" r:id="R45c4e69d7a614d85"/>
-    <p:sldLayoutId xmlns:r="http://schemas.openxmlformats.org/officeDocument/2006/relationships" id="2147483659" r:id="R7d86cbf7efbe4b58"/>
+    <p:sldLayoutId xmlns:r="http://schemas.openxmlformats.org/officeDocument/2006/relationships" id="2147483649" r:id="R0f228906f2274515"/>
+    <p:sldLayoutId xmlns:r="http://schemas.openxmlformats.org/officeDocument/2006/relationships" id="2147483650" r:id="R81d44deb74d94a16"/>
+    <p:sldLayoutId xmlns:r="http://schemas.openxmlformats.org/officeDocument/2006/relationships" id="2147483651" r:id="R693338acdb9d432c"/>
+    <p:sldLayoutId xmlns:r="http://schemas.openxmlformats.org/officeDocument/2006/relationships" id="2147483652" r:id="R011bd35c68f444e8"/>
+    <p:sldLayoutId xmlns:r="http://schemas.openxmlformats.org/officeDocument/2006/relationships" id="2147483653" r:id="R17defdd7eed1420b"/>
+    <p:sldLayoutId xmlns:r="http://schemas.openxmlformats.org/officeDocument/2006/relationships" id="2147483654" r:id="R7328ba6ebebb49a1"/>
+    <p:sldLayoutId xmlns:r="http://schemas.openxmlformats.org/officeDocument/2006/relationships" id="2147483655" r:id="Re5463081fb97497d"/>
+    <p:sldLayoutId xmlns:r="http://schemas.openxmlformats.org/officeDocument/2006/relationships" id="2147483656" r:id="Rebe586ffc6914a4e"/>
+    <p:sldLayoutId xmlns:r="http://schemas.openxmlformats.org/officeDocument/2006/relationships" id="2147483657" r:id="Rc7018df7736c4e7c"/>
+    <p:sldLayoutId xmlns:r="http://schemas.openxmlformats.org/officeDocument/2006/relationships" id="2147483658" r:id="R76395670f4af437f"/>
+    <p:sldLayoutId xmlns:r="http://schemas.openxmlformats.org/officeDocument/2006/relationships" id="2147483659" r:id="R9d4259d793824e1d"/>
   </p:sldLayoutIdLst>
   <p:txStyles>
     <p:titleStyle>
@@ -5310,7 +5310,7 @@
           <c:idx val="0"/>
           <c:order val="0"/>
           <c:tx>
-            <c:v>Blocked %</c:v>
+            <c:v>阻塞占比（%）</c:v>
           </c:tx>
           <c:spPr>
             <a:solidFill xmlns:a="http://schemas.openxmlformats.org/drawingml/2006/main">
@@ -5324,16 +5324,16 @@
               <c:strCache>
                 <c:ptCount val="4"/>
                 <c:pt idx="0">
-                  <c:v>P0</c:v>
+                  <c:v>現況</c:v>
                 </c:pt>
                 <c:pt idx="1">
-                  <c:v>P2 8m</c:v>
+                  <c:v>緩衝8公尺</c:v>
                 </c:pt>
                 <c:pt idx="2">
-                  <c:v>P4 8m</c:v>
+                  <c:v>聯合8公尺</c:v>
                 </c:pt>
                 <c:pt idx="3">
-                  <c:v>P4 12m</c:v>
+                  <c:v>聯合12公尺</c:v>
                 </c:pt>
               </c:strCache>
             </c:strRef>
@@ -5413,7 +5413,7 @@
           <a:lstStyle xmlns:a="http://schemas.openxmlformats.org/drawingml/2006/main"/>
           <a:p xmlns:a="http://schemas.openxmlformats.org/drawingml/2006/main">
             <a:pPr>
-              <a:defRPr sz="2100">
+              <a:defRPr sz="1650">
                 <a:solidFill>
                   <a:srgbClr val="F6E0F5"/>
                 </a:solidFill>
@@ -5458,7 +5458,7 @@
                     <a:ea typeface="Microsoft JhengHei"/>
                     <a:cs typeface="Microsoft JhengHei"/>
                   </a:rPr>
-                  <a:t>Blocked %</a:t>
+                  <a:t>阻塞占比（%）</a:t>
                 </a:r>
               </a:p>
             </c:rich>
@@ -5545,7 +5545,7 @@
           <c:idx val="0"/>
           <c:order val="0"/>
           <c:tx>
-            <c:v>Q-Time min</c:v>
+            <c:v>檢查前等待（分鐘）</c:v>
           </c:tx>
           <c:spPr>
             <a:solidFill xmlns:a="http://schemas.openxmlformats.org/drawingml/2006/main">
@@ -5559,16 +5559,16 @@
               <c:strCache>
                 <c:ptCount val="4"/>
                 <c:pt idx="0">
-                  <c:v>P0</c:v>
+                  <c:v>現況</c:v>
                 </c:pt>
                 <c:pt idx="1">
-                  <c:v>P2 8m</c:v>
+                  <c:v>緩衝8公尺</c:v>
                 </c:pt>
                 <c:pt idx="2">
-                  <c:v>P4 8m</c:v>
+                  <c:v>聯合8公尺</c:v>
                 </c:pt>
                 <c:pt idx="3">
-                  <c:v>P4 12m</c:v>
+                  <c:v>聯合12公尺</c:v>
                 </c:pt>
               </c:strCache>
             </c:strRef>
@@ -5648,7 +5648,7 @@
           <a:lstStyle xmlns:a="http://schemas.openxmlformats.org/drawingml/2006/main"/>
           <a:p xmlns:a="http://schemas.openxmlformats.org/drawingml/2006/main">
             <a:pPr>
-              <a:defRPr sz="2100">
+              <a:defRPr sz="1650">
                 <a:solidFill>
                   <a:srgbClr val="F6E0F5"/>
                 </a:solidFill>
@@ -5693,7 +5693,7 @@
                     <a:ea typeface="Microsoft JhengHei"/>
                     <a:cs typeface="Microsoft JhengHei"/>
                   </a:rPr>
-                  <a:t>Q-Time min</a:t>
+                  <a:t>檢查前等待（分鐘）</a:t>
                 </a:r>
               </a:p>
             </c:rich>
@@ -5779,7 +5779,7 @@
           <c:idx val="0"/>
           <c:order val="0"/>
           <c:tx>
-            <c:v>P2 只加緩衝</c:v>
+            <c:v>僅加緩衝（方案P2）</c:v>
           </c:tx>
           <c:spPr>
             <a:ln xmlns:a="http://schemas.openxmlformats.org/drawingml/2006/main" w="38100">
@@ -5798,22 +5798,22 @@
               <c:strCache>
                 <c:ptCount val="6"/>
                 <c:pt idx="0">
-                  <c:v>0m</c:v>
+                  <c:v>0公尺</c:v>
                 </c:pt>
                 <c:pt idx="1">
-                  <c:v>4m</c:v>
+                  <c:v>4公尺</c:v>
                 </c:pt>
                 <c:pt idx="2">
-                  <c:v>8m</c:v>
+                  <c:v>8公尺</c:v>
                 </c:pt>
                 <c:pt idx="3">
-                  <c:v>12m</c:v>
+                  <c:v>12公尺</c:v>
                 </c:pt>
                 <c:pt idx="4">
-                  <c:v>16m</c:v>
+                  <c:v>16公尺</c:v>
                 </c:pt>
                 <c:pt idx="5">
-                  <c:v>24m</c:v>
+                  <c:v>24公尺</c:v>
                 </c:pt>
               </c:strCache>
             </c:strRef>
@@ -5851,7 +5851,7 @@
           <c:idx val="1"/>
           <c:order val="1"/>
           <c:tx>
-            <c:v>P4 智慧緩衝＋調派</c:v>
+            <c:v>聯合改善（方案P4）</c:v>
           </c:tx>
           <c:spPr>
             <a:ln xmlns:a="http://schemas.openxmlformats.org/drawingml/2006/main" w="38100">
@@ -5870,22 +5870,22 @@
               <c:strCache>
                 <c:ptCount val="6"/>
                 <c:pt idx="0">
-                  <c:v>0m</c:v>
+                  <c:v>0公尺</c:v>
                 </c:pt>
                 <c:pt idx="1">
-                  <c:v>4m</c:v>
+                  <c:v>4公尺</c:v>
                 </c:pt>
                 <c:pt idx="2">
-                  <c:v>8m</c:v>
+                  <c:v>8公尺</c:v>
                 </c:pt>
                 <c:pt idx="3">
-                  <c:v>12m</c:v>
+                  <c:v>12公尺</c:v>
                 </c:pt>
                 <c:pt idx="4">
-                  <c:v>16m</c:v>
+                  <c:v>16公尺</c:v>
                 </c:pt>
                 <c:pt idx="5">
-                  <c:v>24m</c:v>
+                  <c:v>24公尺</c:v>
                 </c:pt>
               </c:strCache>
             </c:strRef>
@@ -5971,7 +5971,7 @@
           <a:lstStyle xmlns:a="http://schemas.openxmlformats.org/drawingml/2006/main"/>
           <a:p xmlns:a="http://schemas.openxmlformats.org/drawingml/2006/main">
             <a:pPr>
-              <a:defRPr sz="2100">
+              <a:defRPr sz="1650">
                 <a:solidFill>
                   <a:srgbClr val="F6E0F5"/>
                 </a:solidFill>
@@ -6016,7 +6016,7 @@
                     <a:ea typeface="Microsoft JhengHei"/>
                     <a:cs typeface="Microsoft JhengHei"/>
                   </a:rPr>
-                  <a:t>Blocked %</a:t>
+                  <a:t>阻塞占比（%）</a:t>
                 </a:r>
               </a:p>
             </c:rich>
@@ -6127,7 +6127,7 @@
           <p:cNvPr id="2" name="Freeform 2">
             <a:extLst xmlns:a="http://schemas.openxmlformats.org/drawingml/2006/main">
               <a:ext uri="{FF2B5EF4-FFF2-40B4-BE49-F238E27FC236}">
-                <a16:creationId xmlns:a16="http://schemas.microsoft.com/office/drawing/2014/main" id="{091A7D91-F9A3-49B7-ADB0-4537D3544FFC}"/>
+                <a16:creationId xmlns:a16="http://schemas.microsoft.com/office/drawing/2014/main" id="{04ECE57F-F9E8-4609-BF51-B64E9900388A}"/>
               </a:ext>
             </a:extLst>
           </p:cNvPr>
@@ -6165,7 +6165,7 @@
             </a:pathLst>
           </a:custGeom>
           <a:blipFill xmlns:a="http://schemas.openxmlformats.org/drawingml/2006/main">
-            <a:blip xmlns:r="http://schemas.openxmlformats.org/officeDocument/2006/relationships" r:embed="Rc0b4347e11b645d5"/>
+            <a:blip xmlns:r="http://schemas.openxmlformats.org/officeDocument/2006/relationships" r:embed="Rfe27aea067ea4bb4"/>
             <a:stretch>
               <a:fillRect l="-4156" t="0" r="-2479" b="-18484"/>
             </a:stretch>
@@ -6177,7 +6177,7 @@
           <p:cNvPr id="3" name="Freeform 3">
             <a:extLst xmlns:a="http://schemas.openxmlformats.org/drawingml/2006/main">
               <a:ext uri="{FF2B5EF4-FFF2-40B4-BE49-F238E27FC236}">
-                <a16:creationId xmlns:a16="http://schemas.microsoft.com/office/drawing/2014/main" id="{09A1750B-6921-44B7-A70B-7AF630FDE21F}"/>
+                <a16:creationId xmlns:a16="http://schemas.microsoft.com/office/drawing/2014/main" id="{B39B4459-E7EA-4F33-A8F2-869E04439373}"/>
               </a:ext>
             </a:extLst>
           </p:cNvPr>
@@ -6225,7 +6225,7 @@
           <p:cNvPr id="5" name="Freeform 5">
             <a:extLst xmlns:a="http://schemas.openxmlformats.org/drawingml/2006/main">
               <a:ext uri="{FF2B5EF4-FFF2-40B4-BE49-F238E27FC236}">
-                <a16:creationId xmlns:a16="http://schemas.microsoft.com/office/drawing/2014/main" id="{64EC17F7-D47D-47FF-A545-F2745EE3BFB6}"/>
+                <a16:creationId xmlns:a16="http://schemas.microsoft.com/office/drawing/2014/main" id="{DA5EFA2C-08F3-4BBA-9FD3-8F005BAE154F}"/>
               </a:ext>
             </a:extLst>
           </p:cNvPr>
@@ -6299,7 +6299,7 @@
           <p:cNvPr id="6" name="TextBox 6">
             <a:extLst xmlns:a="http://schemas.openxmlformats.org/drawingml/2006/main">
               <a:ext uri="{FF2B5EF4-FFF2-40B4-BE49-F238E27FC236}">
-                <a16:creationId xmlns:a16="http://schemas.microsoft.com/office/drawing/2014/main" id="{C27D869A-E813-436B-8C10-F90C310340ED}"/>
+                <a16:creationId xmlns:a16="http://schemas.microsoft.com/office/drawing/2014/main" id="{315A9547-CF70-48D6-8A7A-8096E5FB885E}"/>
               </a:ext>
             </a:extLst>
           </p:cNvPr>
@@ -6335,7 +6335,7 @@
           <p:cNvPr id="7" name="Freeform 7">
             <a:extLst xmlns:a="http://schemas.openxmlformats.org/drawingml/2006/main">
               <a:ext uri="{FF2B5EF4-FFF2-40B4-BE49-F238E27FC236}">
-                <a16:creationId xmlns:a16="http://schemas.microsoft.com/office/drawing/2014/main" id="{08599822-78FE-4FFC-B44C-7CA5EA6544F2}"/>
+                <a16:creationId xmlns:a16="http://schemas.microsoft.com/office/drawing/2014/main" id="{E2A5536F-652A-4566-A8D5-B6C0467EE405}"/>
               </a:ext>
             </a:extLst>
           </p:cNvPr>
@@ -6373,10 +6373,10 @@
             </a:pathLst>
           </a:custGeom>
           <a:blipFill xmlns:a="http://schemas.openxmlformats.org/drawingml/2006/main">
-            <a:blip xmlns:r="http://schemas.openxmlformats.org/officeDocument/2006/relationships" r:embed="Rcf8e86e66d844c1f">
+            <a:blip xmlns:r="http://schemas.openxmlformats.org/officeDocument/2006/relationships" r:embed="Reb83d089010a41fd">
               <a:extLst>
                 <a:ext uri="{96DAC541-7B7A-43D3-8B79-37D633B846F1}">
-                  <asvg:svgBlip xmlns:asvg="http://schemas.microsoft.com/office/drawing/2016/SVG/main" r:embed="R0a17a32c0f35451a"/>
+                  <asvg:svgBlip xmlns:asvg="http://schemas.microsoft.com/office/drawing/2016/SVG/main" r:embed="Rb4a8cc89b8ee4c74"/>
                 </a:ext>
               </a:extLst>
             </a:blip>
@@ -6391,7 +6391,7 @@
           <p:cNvPr id="8" name="Freeform 8">
             <a:extLst xmlns:a="http://schemas.openxmlformats.org/drawingml/2006/main">
               <a:ext uri="{FF2B5EF4-FFF2-40B4-BE49-F238E27FC236}">
-                <a16:creationId xmlns:a16="http://schemas.microsoft.com/office/drawing/2014/main" id="{626B828B-94F8-45DA-BEBD-8358D95E7FAB}"/>
+                <a16:creationId xmlns:a16="http://schemas.microsoft.com/office/drawing/2014/main" id="{8C7665B2-0DAF-45F0-B19B-76F4CC18C532}"/>
               </a:ext>
             </a:extLst>
           </p:cNvPr>
@@ -6429,10 +6429,10 @@
             </a:pathLst>
           </a:custGeom>
           <a:blipFill xmlns:a="http://schemas.openxmlformats.org/drawingml/2006/main">
-            <a:blip xmlns:r="http://schemas.openxmlformats.org/officeDocument/2006/relationships" r:embed="Rcf8e86e66d844c1f">
+            <a:blip xmlns:r="http://schemas.openxmlformats.org/officeDocument/2006/relationships" r:embed="Reb83d089010a41fd">
               <a:extLst>
                 <a:ext uri="{96DAC541-7B7A-43D3-8B79-37D633B846F1}">
-                  <asvg:svgBlip xmlns:asvg="http://schemas.microsoft.com/office/drawing/2016/SVG/main" r:embed="R0a17a32c0f35451a"/>
+                  <asvg:svgBlip xmlns:asvg="http://schemas.microsoft.com/office/drawing/2016/SVG/main" r:embed="Rb4a8cc89b8ee4c74"/>
                 </a:ext>
               </a:extLst>
             </a:blip>
@@ -6447,7 +6447,7 @@
           <p:cNvPr id="9" name="TextBox 9">
             <a:extLst xmlns:a="http://schemas.openxmlformats.org/drawingml/2006/main">
               <a:ext uri="{FF2B5EF4-FFF2-40B4-BE49-F238E27FC236}">
-                <a16:creationId xmlns:a16="http://schemas.microsoft.com/office/drawing/2014/main" id="{4DEBABE3-CF34-456B-A012-BF7AE0579CD2}"/>
+                <a16:creationId xmlns:a16="http://schemas.microsoft.com/office/drawing/2014/main" id="{6B38FD18-B439-4399-9653-8F246FABCE67}"/>
               </a:ext>
             </a:extLst>
           </p:cNvPr>
@@ -6499,7 +6499,7 @@
           <p:cNvPr id="10" name="TextBox 10">
             <a:extLst xmlns:a="http://schemas.openxmlformats.org/drawingml/2006/main">
               <a:ext uri="{FF2B5EF4-FFF2-40B4-BE49-F238E27FC236}">
-                <a16:creationId xmlns:a16="http://schemas.microsoft.com/office/drawing/2014/main" id="{FA689153-4591-42F5-9440-481096D189E4}"/>
+                <a16:creationId xmlns:a16="http://schemas.microsoft.com/office/drawing/2014/main" id="{96E36E80-AFCF-4D09-9E99-10E0B073AE0C}"/>
               </a:ext>
             </a:extLst>
           </p:cNvPr>
@@ -6551,7 +6551,7 @@
           <p:cNvPr id="11" name="TextBox 11">
             <a:extLst xmlns:a="http://schemas.openxmlformats.org/drawingml/2006/main">
               <a:ext uri="{FF2B5EF4-FFF2-40B4-BE49-F238E27FC236}">
-                <a16:creationId xmlns:a16="http://schemas.microsoft.com/office/drawing/2014/main" id="{A74F5CCB-8137-408B-81A6-A8A948B5522C}"/>
+                <a16:creationId xmlns:a16="http://schemas.microsoft.com/office/drawing/2014/main" id="{5957D054-BBBC-4459-B7DA-0F580BD82969}"/>
               </a:ext>
             </a:extLst>
           </p:cNvPr>
@@ -6712,7 +6712,7 @@
           <p:cNvPr id="12" name="TextBox 12">
             <a:extLst xmlns:a="http://schemas.openxmlformats.org/drawingml/2006/main">
               <a:ext uri="{FF2B5EF4-FFF2-40B4-BE49-F238E27FC236}">
-                <a16:creationId xmlns:a16="http://schemas.microsoft.com/office/drawing/2014/main" id="{EFE37ED8-13D4-4771-9EBA-7B826D05969F}"/>
+                <a16:creationId xmlns:a16="http://schemas.microsoft.com/office/drawing/2014/main" id="{5309C0A9-6EDC-48CD-B1CA-568C588F06F0}"/>
               </a:ext>
             </a:extLst>
           </p:cNvPr>
@@ -6764,7 +6764,7 @@
           <p:cNvPr id="13" name="Freeform 13">
             <a:extLst xmlns:a="http://schemas.openxmlformats.org/drawingml/2006/main">
               <a:ext uri="{FF2B5EF4-FFF2-40B4-BE49-F238E27FC236}">
-                <a16:creationId xmlns:a16="http://schemas.microsoft.com/office/drawing/2014/main" id="{A90FD416-762F-4A94-86C8-2BACEA4E8242}"/>
+                <a16:creationId xmlns:a16="http://schemas.microsoft.com/office/drawing/2014/main" id="{07390AD5-AEC2-4258-8680-573659FE1D52}"/>
               </a:ext>
             </a:extLst>
           </p:cNvPr>
@@ -6812,7 +6812,7 @@
           <p:cNvPr id="14" name="TextBox 14">
             <a:extLst xmlns:a="http://schemas.openxmlformats.org/drawingml/2006/main">
               <a:ext uri="{FF2B5EF4-FFF2-40B4-BE49-F238E27FC236}">
-                <a16:creationId xmlns:a16="http://schemas.microsoft.com/office/drawing/2014/main" id="{848DCE91-12FA-444D-AE02-31EAB5B12F00}"/>
+                <a16:creationId xmlns:a16="http://schemas.microsoft.com/office/drawing/2014/main" id="{245F346B-A86C-4BCC-9627-55F2FEE12B2F}"/>
               </a:ext>
             </a:extLst>
           </p:cNvPr>
@@ -6866,7 +6866,7 @@
           <p:cNvPr id="15" name="">
             <a:extLst xmlns:a="http://schemas.openxmlformats.org/drawingml/2006/main">
               <a:ext uri="{FF2B5EF4-FFF2-40B4-BE49-F238E27FC236}">
-                <a16:creationId xmlns:a16="http://schemas.microsoft.com/office/drawing/2014/main" id="{A9AF234E-28C2-448F-8439-11A877911149}"/>
+                <a16:creationId xmlns:a16="http://schemas.microsoft.com/office/drawing/2014/main" id="{68CFB383-7CFD-4BE8-8C0E-D7EE1AC0D162}"/>
               </a:ext>
             </a:extLst>
           </p:cNvPr>
@@ -6876,7 +6876,7 @@
           <p:nvPr/>
         </p:nvPicPr>
         <p:blipFill>
-          <a:blip xmlns:r="http://schemas.openxmlformats.org/officeDocument/2006/relationships" xmlns:a="http://schemas.openxmlformats.org/drawingml/2006/main" r:embed="R058eb70313754106"/>
+          <a:blip xmlns:r="http://schemas.openxmlformats.org/officeDocument/2006/relationships" xmlns:a="http://schemas.openxmlformats.org/drawingml/2006/main" r:embed="Raed7de2da3b44ad6"/>
           <a:srcRect xmlns:a="http://schemas.openxmlformats.org/drawingml/2006/main" l="0" t="15880" r="23187" b="0"/>
           <a:stretch xmlns:a="http://schemas.openxmlformats.org/drawingml/2006/main"/>
         </p:blipFill>
@@ -6895,7 +6895,7 @@
           <p:cNvPr id="16" name="">
             <a:extLst xmlns:a="http://schemas.openxmlformats.org/drawingml/2006/main">
               <a:ext uri="{FF2B5EF4-FFF2-40B4-BE49-F238E27FC236}">
-                <a16:creationId xmlns:a16="http://schemas.microsoft.com/office/drawing/2014/main" id="{454E073D-3AC2-4633-9F20-AA44E2E3EDA1}"/>
+                <a16:creationId xmlns:a16="http://schemas.microsoft.com/office/drawing/2014/main" id="{B6213251-659D-4AA5-ABE4-C7799EDA74CC}"/>
               </a:ext>
             </a:extLst>
           </p:cNvPr>
@@ -6905,7 +6905,7 @@
           <p:nvPr/>
         </p:nvPicPr>
         <p:blipFill>
-          <a:blip xmlns:r="http://schemas.openxmlformats.org/officeDocument/2006/relationships" xmlns:a="http://schemas.openxmlformats.org/drawingml/2006/main" r:embed="R91f1f9afa7164289"/>
+          <a:blip xmlns:r="http://schemas.openxmlformats.org/officeDocument/2006/relationships" xmlns:a="http://schemas.openxmlformats.org/drawingml/2006/main" r:embed="Raf79b6a7549a4316"/>
           <a:srcRect xmlns:a="http://schemas.openxmlformats.org/drawingml/2006/main" l="13490" t="35208" r="0" b="0"/>
           <a:stretch xmlns:a="http://schemas.openxmlformats.org/drawingml/2006/main"/>
         </p:blipFill>
@@ -6924,7 +6924,7 @@
           <p:cNvPr id="17" name="內容_1_循環箱逆向物流">
             <a:extLst xmlns:a="http://schemas.openxmlformats.org/drawingml/2006/main">
               <a:ext uri="{FF2B5EF4-FFF2-40B4-BE49-F238E27FC236}">
-                <a16:creationId xmlns:a16="http://schemas.microsoft.com/office/drawing/2014/main" id="{886518F4-6132-4CC9-AE23-9260E7BA7496}"/>
+                <a16:creationId xmlns:a16="http://schemas.microsoft.com/office/drawing/2014/main" id="{950FA09E-01CB-4583-A363-16D9BEC4770A}"/>
               </a:ext>
             </a:extLst>
           </p:cNvPr>
@@ -7079,10 +7079,10 @@
       </p:sp>
       <p:sp>
         <p:nvSpPr>
-          <p:cNvPr id="18" name="內容_1_原生數位分身與處方實測">
+          <p:cNvPr id="18" name="內容_1_倉庫模擬與改善方案實測">
             <a:extLst xmlns:a="http://schemas.openxmlformats.org/drawingml/2006/main">
               <a:ext uri="{FF2B5EF4-FFF2-40B4-BE49-F238E27FC236}">
-                <a16:creationId xmlns:a16="http://schemas.microsoft.com/office/drawing/2014/main" id="{CC224338-6023-4DD3-BBC9-E12FBE9848D5}"/>
+                <a16:creationId xmlns:a16="http://schemas.microsoft.com/office/drawing/2014/main" id="{B41667CE-8B2B-418C-82E9-F68AE6912160}"/>
               </a:ext>
             </a:extLst>
           </p:cNvPr>
@@ -7230,7 +7230,7 @@
                 <a:ea typeface="Microsoft JhengHei"/>
                 <a:cs typeface="Microsoft JhengHei"/>
               </a:rPr>
-              <a:t>原生數位分身與處方實測</a:t>
+              <a:t>倉庫模擬與改善方案實測</a:t>
             </a:r>
           </a:p>
         </p:txBody>
@@ -7240,7 +7240,7 @@
           <p:cNvPr id="19" name="內容_1_雙層輸送網・五人作業・500">
             <a:extLst xmlns:a="http://schemas.openxmlformats.org/drawingml/2006/main">
               <a:ext uri="{FF2B5EF4-FFF2-40B4-BE49-F238E27FC236}">
-                <a16:creationId xmlns:a16="http://schemas.microsoft.com/office/drawing/2014/main" id="{D762B3AE-8073-4553-92AB-D23585FB65C9}"/>
+                <a16:creationId xmlns:a16="http://schemas.microsoft.com/office/drawing/2014/main" id="{4555EA4B-BDFB-4D53-9635-361EAFE79F1D}"/>
               </a:ext>
             </a:extLst>
           </p:cNvPr>
@@ -7398,7 +7398,7 @@
           <p:cNvPr id="20" name="內容_1_2026.10.29　循環物">
             <a:extLst xmlns:a="http://schemas.openxmlformats.org/drawingml/2006/main">
               <a:ext uri="{FF2B5EF4-FFF2-40B4-BE49-F238E27FC236}">
-                <a16:creationId xmlns:a16="http://schemas.microsoft.com/office/drawing/2014/main" id="{558FAA85-5985-4245-9007-EB46D8CFA628}"/>
+                <a16:creationId xmlns:a16="http://schemas.microsoft.com/office/drawing/2014/main" id="{31E16F55-2E6A-45F0-B7D9-A37B41926CA6}"/>
               </a:ext>
             </a:extLst>
           </p:cNvPr>
@@ -7554,7 +7554,7 @@
     </p:spTree>
     <p:extLst>
       <p:ext uri="{BB962C8B-B14F-4D97-AF65-F5344CB8AC3E}">
-        <p14:creationId xmlns:p14="http://schemas.microsoft.com/office/powerpoint/2010/main" val="1325445223"/>
+        <p14:creationId xmlns:p14="http://schemas.microsoft.com/office/powerpoint/2010/main" val="1648993173"/>
       </p:ext>
     </p:extLst>
   </p:cSld>
@@ -7578,7 +7578,7 @@
           <p:cNvPr id="2" name="Freeform 2">
             <a:extLst xmlns:a="http://schemas.openxmlformats.org/drawingml/2006/main">
               <a:ext uri="{FF2B5EF4-FFF2-40B4-BE49-F238E27FC236}">
-                <a16:creationId xmlns:a16="http://schemas.microsoft.com/office/drawing/2014/main" id="{2E548190-A4CC-475F-94E2-E8EDE0DCB059}"/>
+                <a16:creationId xmlns:a16="http://schemas.microsoft.com/office/drawing/2014/main" id="{B31B2887-690B-4167-A3FD-5B5335A940B7}"/>
               </a:ext>
             </a:extLst>
           </p:cNvPr>
@@ -7616,7 +7616,7 @@
             </a:pathLst>
           </a:custGeom>
           <a:blipFill xmlns:a="http://schemas.openxmlformats.org/drawingml/2006/main">
-            <a:blip xmlns:r="http://schemas.openxmlformats.org/officeDocument/2006/relationships" r:embed="R742070d22aae4e05"/>
+            <a:blip xmlns:r="http://schemas.openxmlformats.org/officeDocument/2006/relationships" r:embed="Rb7c416bf8c564aa0"/>
             <a:stretch>
               <a:fillRect l="-35258" t="-5555" r="-24931" b="-72434"/>
             </a:stretch>
@@ -7628,7 +7628,7 @@
           <p:cNvPr id="4" name="Freeform 4">
             <a:extLst xmlns:a="http://schemas.openxmlformats.org/drawingml/2006/main">
               <a:ext uri="{FF2B5EF4-FFF2-40B4-BE49-F238E27FC236}">
-                <a16:creationId xmlns:a16="http://schemas.microsoft.com/office/drawing/2014/main" id="{11EBE327-3539-4576-B727-009071D6F600}"/>
+                <a16:creationId xmlns:a16="http://schemas.microsoft.com/office/drawing/2014/main" id="{4F94845E-43C2-4D36-B952-7B225F0D1295}"/>
               </a:ext>
             </a:extLst>
           </p:cNvPr>
@@ -7702,7 +7702,7 @@
           <p:cNvPr id="5" name="TextBox 5">
             <a:extLst xmlns:a="http://schemas.openxmlformats.org/drawingml/2006/main">
               <a:ext uri="{FF2B5EF4-FFF2-40B4-BE49-F238E27FC236}">
-                <a16:creationId xmlns:a16="http://schemas.microsoft.com/office/drawing/2014/main" id="{B3F91BB2-A689-4178-8AB4-DC1EAC325819}"/>
+                <a16:creationId xmlns:a16="http://schemas.microsoft.com/office/drawing/2014/main" id="{4E81984A-83BE-4497-A24F-E5EF3AC11411}"/>
               </a:ext>
             </a:extLst>
           </p:cNvPr>
@@ -7738,7 +7738,7 @@
           <p:cNvPr id="6" name="Freeform 6">
             <a:extLst xmlns:a="http://schemas.openxmlformats.org/drawingml/2006/main">
               <a:ext uri="{FF2B5EF4-FFF2-40B4-BE49-F238E27FC236}">
-                <a16:creationId xmlns:a16="http://schemas.microsoft.com/office/drawing/2014/main" id="{22EF5F4C-E975-4877-B333-7A6D65B3E105}"/>
+                <a16:creationId xmlns:a16="http://schemas.microsoft.com/office/drawing/2014/main" id="{492A44A8-C7ED-4383-9375-336194A6F73E}"/>
               </a:ext>
             </a:extLst>
           </p:cNvPr>
@@ -7776,7 +7776,7 @@
             </a:pathLst>
           </a:custGeom>
           <a:blipFill xmlns:a="http://schemas.openxmlformats.org/drawingml/2006/main">
-            <a:blip xmlns:r="http://schemas.openxmlformats.org/officeDocument/2006/relationships" r:embed="R92b408475d954fe7"/>
+            <a:blip xmlns:r="http://schemas.openxmlformats.org/officeDocument/2006/relationships" r:embed="Rb1c8c3ab76ed40a9"/>
             <a:stretch>
               <a:fillRect l="0" t="0" r="0" b="0"/>
             </a:stretch>
@@ -7788,7 +7788,7 @@
           <p:cNvPr id="7" name="Freeform 7">
             <a:extLst xmlns:a="http://schemas.openxmlformats.org/drawingml/2006/main">
               <a:ext uri="{FF2B5EF4-FFF2-40B4-BE49-F238E27FC236}">
-                <a16:creationId xmlns:a16="http://schemas.microsoft.com/office/drawing/2014/main" id="{12941773-E1E9-4F8F-BF14-D2D453608F25}"/>
+                <a16:creationId xmlns:a16="http://schemas.microsoft.com/office/drawing/2014/main" id="{218B341F-BCF2-4BB5-A3A9-14B513D94334}"/>
               </a:ext>
             </a:extLst>
           </p:cNvPr>
@@ -7826,10 +7826,10 @@
             </a:pathLst>
           </a:custGeom>
           <a:blipFill xmlns:a="http://schemas.openxmlformats.org/drawingml/2006/main">
-            <a:blip xmlns:r="http://schemas.openxmlformats.org/officeDocument/2006/relationships" r:embed="R695938e4efe4472c">
+            <a:blip xmlns:r="http://schemas.openxmlformats.org/officeDocument/2006/relationships" r:embed="Rf27ff6fc921a41ba">
               <a:extLst>
                 <a:ext uri="{96DAC541-7B7A-43D3-8B79-37D633B846F1}">
-                  <asvg:svgBlip xmlns:asvg="http://schemas.microsoft.com/office/drawing/2016/SVG/main" r:embed="Ra2acb43b0845469b"/>
+                  <asvg:svgBlip xmlns:asvg="http://schemas.microsoft.com/office/drawing/2016/SVG/main" r:embed="R942c72dd1bd34581"/>
                 </a:ext>
               </a:extLst>
             </a:blip>
@@ -7844,7 +7844,7 @@
           <p:cNvPr id="8" name="Freeform 8">
             <a:extLst xmlns:a="http://schemas.openxmlformats.org/drawingml/2006/main">
               <a:ext uri="{FF2B5EF4-FFF2-40B4-BE49-F238E27FC236}">
-                <a16:creationId xmlns:a16="http://schemas.microsoft.com/office/drawing/2014/main" id="{61A25261-4845-430E-B7AE-CDE75126C656}"/>
+                <a16:creationId xmlns:a16="http://schemas.microsoft.com/office/drawing/2014/main" id="{F60EC4D8-87C6-4BA5-8893-884E2069DE21}"/>
               </a:ext>
             </a:extLst>
           </p:cNvPr>
@@ -7882,10 +7882,10 @@
             </a:pathLst>
           </a:custGeom>
           <a:blipFill xmlns:a="http://schemas.openxmlformats.org/drawingml/2006/main">
-            <a:blip xmlns:r="http://schemas.openxmlformats.org/officeDocument/2006/relationships" r:embed="R695938e4efe4472c">
+            <a:blip xmlns:r="http://schemas.openxmlformats.org/officeDocument/2006/relationships" r:embed="Rf27ff6fc921a41ba">
               <a:extLst>
                 <a:ext uri="{96DAC541-7B7A-43D3-8B79-37D633B846F1}">
-                  <asvg:svgBlip xmlns:asvg="http://schemas.microsoft.com/office/drawing/2016/SVG/main" r:embed="Ra2acb43b0845469b"/>
+                  <asvg:svgBlip xmlns:asvg="http://schemas.microsoft.com/office/drawing/2016/SVG/main" r:embed="R942c72dd1bd34581"/>
                 </a:ext>
               </a:extLst>
             </a:blip>
@@ -7900,7 +7900,7 @@
           <p:cNvPr id="9" name="Freeform 9">
             <a:extLst xmlns:a="http://schemas.openxmlformats.org/drawingml/2006/main">
               <a:ext uri="{FF2B5EF4-FFF2-40B4-BE49-F238E27FC236}">
-                <a16:creationId xmlns:a16="http://schemas.microsoft.com/office/drawing/2014/main" id="{4F651E45-F03E-489A-9581-D85FC8585198}"/>
+                <a16:creationId xmlns:a16="http://schemas.microsoft.com/office/drawing/2014/main" id="{4A61E6FD-F7DE-44AC-A17C-4BDE0445A97D}"/>
               </a:ext>
             </a:extLst>
           </p:cNvPr>
@@ -7948,7 +7948,7 @@
           <p:cNvPr id="10" name="TextBox 10">
             <a:extLst xmlns:a="http://schemas.openxmlformats.org/drawingml/2006/main">
               <a:ext uri="{FF2B5EF4-FFF2-40B4-BE49-F238E27FC236}">
-                <a16:creationId xmlns:a16="http://schemas.microsoft.com/office/drawing/2014/main" id="{7F96A93A-CA43-42DE-B5F9-E5C8AB49E82D}"/>
+                <a16:creationId xmlns:a16="http://schemas.microsoft.com/office/drawing/2014/main" id="{99FC7D0B-5C9B-4317-BB53-112E71EBE1FA}"/>
               </a:ext>
             </a:extLst>
           </p:cNvPr>
@@ -8000,7 +8000,7 @@
           <p:cNvPr id="11" name="TextBox 11">
             <a:extLst xmlns:a="http://schemas.openxmlformats.org/drawingml/2006/main">
               <a:ext uri="{FF2B5EF4-FFF2-40B4-BE49-F238E27FC236}">
-                <a16:creationId xmlns:a16="http://schemas.microsoft.com/office/drawing/2014/main" id="{726EA0AB-A7FE-4A69-898E-9B2FEAA58A1D}"/>
+                <a16:creationId xmlns:a16="http://schemas.microsoft.com/office/drawing/2014/main" id="{CD5AB63D-EA2E-4DA5-93C2-342369E00E00}"/>
               </a:ext>
             </a:extLst>
           </p:cNvPr>
@@ -8052,7 +8052,7 @@
           <p:cNvPr id="12" name="TextBox 12">
             <a:extLst xmlns:a="http://schemas.openxmlformats.org/drawingml/2006/main">
               <a:ext uri="{FF2B5EF4-FFF2-40B4-BE49-F238E27FC236}">
-                <a16:creationId xmlns:a16="http://schemas.microsoft.com/office/drawing/2014/main" id="{3537F47F-7F5C-463A-A7DF-5502116B809B}"/>
+                <a16:creationId xmlns:a16="http://schemas.microsoft.com/office/drawing/2014/main" id="{862065D4-7DC3-4D40-9A99-2D3B9C1C3271}"/>
               </a:ext>
             </a:extLst>
           </p:cNvPr>
@@ -8213,7 +8213,7 @@
           <p:cNvPr id="13" name="TextBox 13">
             <a:extLst xmlns:a="http://schemas.openxmlformats.org/drawingml/2006/main">
               <a:ext uri="{FF2B5EF4-FFF2-40B4-BE49-F238E27FC236}">
-                <a16:creationId xmlns:a16="http://schemas.microsoft.com/office/drawing/2014/main" id="{36CF4A92-9395-4F23-BD4C-2679E11284E2}"/>
+                <a16:creationId xmlns:a16="http://schemas.microsoft.com/office/drawing/2014/main" id="{2905857B-A38A-4408-899A-E5EA9755C1BD}"/>
               </a:ext>
             </a:extLst>
           </p:cNvPr>
@@ -8264,7 +8264,7 @@
           <p:cNvPr id="14" name="TextBox 14">
             <a:extLst xmlns:a="http://schemas.openxmlformats.org/drawingml/2006/main">
               <a:ext uri="{FF2B5EF4-FFF2-40B4-BE49-F238E27FC236}">
-                <a16:creationId xmlns:a16="http://schemas.microsoft.com/office/drawing/2014/main" id="{ACC585F7-C1FB-4635-A1F5-EC2A24439416}"/>
+                <a16:creationId xmlns:a16="http://schemas.microsoft.com/office/drawing/2014/main" id="{B68949A4-ADD8-4225-8107-8001F93078B6}"/>
               </a:ext>
             </a:extLst>
           </p:cNvPr>
@@ -8316,7 +8316,7 @@
           <p:cNvPr id="16" name="Freeform 16">
             <a:extLst xmlns:a="http://schemas.openxmlformats.org/drawingml/2006/main">
               <a:ext uri="{FF2B5EF4-FFF2-40B4-BE49-F238E27FC236}">
-                <a16:creationId xmlns:a16="http://schemas.microsoft.com/office/drawing/2014/main" id="{6D043251-52B5-4559-8AE5-EB72816EB164}"/>
+                <a16:creationId xmlns:a16="http://schemas.microsoft.com/office/drawing/2014/main" id="{1E9192C2-9767-4458-9F7C-6C92466B593C}"/>
               </a:ext>
             </a:extLst>
           </p:cNvPr>
@@ -8361,7 +8361,7 @@
           <p:cNvPr id="17" name="內容_10_關鍵發現">
             <a:extLst xmlns:a="http://schemas.openxmlformats.org/drawingml/2006/main">
               <a:ext uri="{FF2B5EF4-FFF2-40B4-BE49-F238E27FC236}">
-                <a16:creationId xmlns:a16="http://schemas.microsoft.com/office/drawing/2014/main" id="{E378A364-25AA-4678-B482-685A096A2360}"/>
+                <a16:creationId xmlns:a16="http://schemas.microsoft.com/office/drawing/2014/main" id="{589A8567-A3E7-40E2-9B71-429DE767EFC6}"/>
               </a:ext>
             </a:extLst>
           </p:cNvPr>
@@ -8516,10 +8516,10 @@
       </p:sp>
       <p:sp>
         <p:nvSpPr>
-          <p:cNvPr id="18" name="內容_10_只加8m不夠，聯合控制才有效">
+          <p:cNvPr id="18" name="內容_10_只加8公尺不夠，聯合控制才有">
             <a:extLst xmlns:a="http://schemas.openxmlformats.org/drawingml/2006/main">
               <a:ext uri="{FF2B5EF4-FFF2-40B4-BE49-F238E27FC236}">
-                <a16:creationId xmlns:a16="http://schemas.microsoft.com/office/drawing/2014/main" id="{286D884B-B5EA-4092-ADDC-E4EE09F54E2B}"/>
+                <a16:creationId xmlns:a16="http://schemas.microsoft.com/office/drawing/2014/main" id="{03837F55-8F86-4F91-A94D-0C1CA9C6AEE5}"/>
               </a:ext>
             </a:extLst>
           </p:cNvPr>
@@ -8667,7 +8667,7 @@
                 <a:ea typeface="Microsoft JhengHei"/>
                 <a:cs typeface="Microsoft JhengHei"/>
               </a:rPr>
-              <a:t>只加8m不夠，聯合控制才有效</a:t>
+              <a:t>只加8公尺不夠，聯合控制才有效</a:t>
             </a:r>
           </a:p>
         </p:txBody>
@@ -8677,7 +8677,7 @@
           <p:cNvPr id="19" name="Chart">
             <a:extLst xmlns:a="http://schemas.openxmlformats.org/drawingml/2006/main">
               <a:ext uri="{FF2B5EF4-FFF2-40B4-BE49-F238E27FC236}">
-                <a16:creationId xmlns:a16="http://schemas.microsoft.com/office/drawing/2014/main" id="{1005B3A0-D0F6-4E05-96F2-FAB296093E35}"/>
+                <a16:creationId xmlns:a16="http://schemas.microsoft.com/office/drawing/2014/main" id="{FEEEE8CD-EF02-4900-910F-1AB0DEC65554}"/>
               </a:ext>
             </a:extLst>
           </p:cNvPr>
@@ -8690,7 +8690,7 @@
         </p:xfrm>
         <a:graphic xmlns:a="http://schemas.openxmlformats.org/drawingml/2006/main">
           <a:graphicData uri="http://schemas.openxmlformats.org/drawingml/2006/chart">
-            <c:chart xmlns:r="http://schemas.openxmlformats.org/officeDocument/2006/relationships" xmlns:c="http://schemas.openxmlformats.org/drawingml/2006/chart" r:id="R3c803ca83d094453"/>
+            <c:chart xmlns:r="http://schemas.openxmlformats.org/officeDocument/2006/relationships" xmlns:c="http://schemas.openxmlformats.org/drawingml/2006/chart" r:id="Rf5b93fd8da2e489c"/>
           </a:graphicData>
         </a:graphic>
       </p:graphicFrame>
@@ -8699,7 +8699,7 @@
           <p:cNvPr id="20" name="Chart">
             <a:extLst xmlns:a="http://schemas.openxmlformats.org/drawingml/2006/main">
               <a:ext uri="{FF2B5EF4-FFF2-40B4-BE49-F238E27FC236}">
-                <a16:creationId xmlns:a16="http://schemas.microsoft.com/office/drawing/2014/main" id="{08E88F02-2FCC-4CC4-8B80-D55DA6E75B8E}"/>
+                <a16:creationId xmlns:a16="http://schemas.microsoft.com/office/drawing/2014/main" id="{88408CE9-D891-4E47-BE43-5D9CCFA60A1D}"/>
               </a:ext>
             </a:extLst>
           </p:cNvPr>
@@ -8712,16 +8712,16 @@
         </p:xfrm>
         <a:graphic xmlns:a="http://schemas.openxmlformats.org/drawingml/2006/main">
           <a:graphicData uri="http://schemas.openxmlformats.org/drawingml/2006/chart">
-            <c:chart xmlns:r="http://schemas.openxmlformats.org/officeDocument/2006/relationships" xmlns:c="http://schemas.openxmlformats.org/drawingml/2006/chart" r:id="R3830b0c8757249a9"/>
+            <c:chart xmlns:r="http://schemas.openxmlformats.org/officeDocument/2006/relationships" xmlns:c="http://schemas.openxmlformats.org/drawingml/2006/chart" r:id="R6cf185952f324630"/>
           </a:graphicData>
         </a:graphic>
       </p:graphicFrame>
       <p:sp>
         <p:nvSpPr>
-          <p:cNvPr id="21" name="內容_10_P2 8m阻塞7.609% ">
+          <p:cNvPr id="21" name="內容_10_僅加8公尺緩衝的阻塞仍7.6">
             <a:extLst xmlns:a="http://schemas.openxmlformats.org/drawingml/2006/main">
               <a:ext uri="{FF2B5EF4-FFF2-40B4-BE49-F238E27FC236}">
-                <a16:creationId xmlns:a16="http://schemas.microsoft.com/office/drawing/2014/main" id="{E1BFDC62-DD2A-4971-AFB2-11A09BDAF791}"/>
+                <a16:creationId xmlns:a16="http://schemas.microsoft.com/office/drawing/2014/main" id="{B4513D19-B656-4A78-8757-4DF6DF0C6FD5}"/>
               </a:ext>
             </a:extLst>
           </p:cNvPr>
@@ -8869,7 +8869,7 @@
                 <a:ea typeface="Microsoft JhengHei"/>
                 <a:cs typeface="Microsoft JhengHei"/>
               </a:rPr>
-              <a:t>P2 8m阻塞7.609% [6.917,8.301]，未達1%。P4有支援與外包，不能把聯合效果都歸因於人力。</a:t>
+              <a:t>僅加8公尺緩衝的阻塞仍7.609%，未達1%。聯合方案含支援與外包，不能把效果都算成人力。</a:t>
             </a:r>
           </a:p>
         </p:txBody>
@@ -8877,7 +8877,7 @@
     </p:spTree>
     <p:extLst>
       <p:ext uri="{BB962C8B-B14F-4D97-AF65-F5344CB8AC3E}">
-        <p14:creationId xmlns:p14="http://schemas.microsoft.com/office/powerpoint/2010/main" val="512247256"/>
+        <p14:creationId xmlns:p14="http://schemas.microsoft.com/office/powerpoint/2010/main" val="732914813"/>
       </p:ext>
     </p:extLst>
   </p:cSld>
@@ -8901,7 +8901,7 @@
           <p:cNvPr id="2" name="Freeform 2">
             <a:extLst xmlns:a="http://schemas.openxmlformats.org/drawingml/2006/main">
               <a:ext uri="{FF2B5EF4-FFF2-40B4-BE49-F238E27FC236}">
-                <a16:creationId xmlns:a16="http://schemas.microsoft.com/office/drawing/2014/main" id="{BD42B81D-5B7A-4A5A-AED6-DEAA2C6EA595}"/>
+                <a16:creationId xmlns:a16="http://schemas.microsoft.com/office/drawing/2014/main" id="{067CD3AA-CA13-44BE-AB96-78B49AECE230}"/>
               </a:ext>
             </a:extLst>
           </p:cNvPr>
@@ -8939,7 +8939,7 @@
             </a:pathLst>
           </a:custGeom>
           <a:blipFill xmlns:a="http://schemas.openxmlformats.org/drawingml/2006/main">
-            <a:blip xmlns:r="http://schemas.openxmlformats.org/officeDocument/2006/relationships" r:embed="Rfa0a9fef49334536"/>
+            <a:blip xmlns:r="http://schemas.openxmlformats.org/officeDocument/2006/relationships" r:embed="R9a4aa51d6db747e0"/>
             <a:stretch>
               <a:fillRect l="-35258" t="-5555" r="-24931" b="-72434"/>
             </a:stretch>
@@ -8951,7 +8951,7 @@
           <p:cNvPr id="4" name="Freeform 4">
             <a:extLst xmlns:a="http://schemas.openxmlformats.org/drawingml/2006/main">
               <a:ext uri="{FF2B5EF4-FFF2-40B4-BE49-F238E27FC236}">
-                <a16:creationId xmlns:a16="http://schemas.microsoft.com/office/drawing/2014/main" id="{B90F0129-2287-4A73-A397-125AACE6BBF9}"/>
+                <a16:creationId xmlns:a16="http://schemas.microsoft.com/office/drawing/2014/main" id="{2E4ABCDE-D84F-4D48-BF00-3F8EC27CB0C9}"/>
               </a:ext>
             </a:extLst>
           </p:cNvPr>
@@ -9025,7 +9025,7 @@
           <p:cNvPr id="5" name="TextBox 5">
             <a:extLst xmlns:a="http://schemas.openxmlformats.org/drawingml/2006/main">
               <a:ext uri="{FF2B5EF4-FFF2-40B4-BE49-F238E27FC236}">
-                <a16:creationId xmlns:a16="http://schemas.microsoft.com/office/drawing/2014/main" id="{4C27E058-5B79-4B3B-A9B0-DA902F12177F}"/>
+                <a16:creationId xmlns:a16="http://schemas.microsoft.com/office/drawing/2014/main" id="{7C86BB20-4DA7-4A6E-AD36-B92C814C7D23}"/>
               </a:ext>
             </a:extLst>
           </p:cNvPr>
@@ -9061,7 +9061,7 @@
           <p:cNvPr id="6" name="Freeform 6">
             <a:extLst xmlns:a="http://schemas.openxmlformats.org/drawingml/2006/main">
               <a:ext uri="{FF2B5EF4-FFF2-40B4-BE49-F238E27FC236}">
-                <a16:creationId xmlns:a16="http://schemas.microsoft.com/office/drawing/2014/main" id="{2C83FA23-9378-4442-AABE-5684F009F30C}"/>
+                <a16:creationId xmlns:a16="http://schemas.microsoft.com/office/drawing/2014/main" id="{DDCFBCA0-EC09-43CA-A67C-38F34A6F923C}"/>
               </a:ext>
             </a:extLst>
           </p:cNvPr>
@@ -9099,7 +9099,7 @@
             </a:pathLst>
           </a:custGeom>
           <a:blipFill xmlns:a="http://schemas.openxmlformats.org/drawingml/2006/main">
-            <a:blip xmlns:r="http://schemas.openxmlformats.org/officeDocument/2006/relationships" r:embed="R4d0c56c66b2d46b1"/>
+            <a:blip xmlns:r="http://schemas.openxmlformats.org/officeDocument/2006/relationships" r:embed="R92728691a5914c66"/>
             <a:stretch>
               <a:fillRect l="0" t="0" r="0" b="0"/>
             </a:stretch>
@@ -9111,7 +9111,7 @@
           <p:cNvPr id="7" name="Freeform 7">
             <a:extLst xmlns:a="http://schemas.openxmlformats.org/drawingml/2006/main">
               <a:ext uri="{FF2B5EF4-FFF2-40B4-BE49-F238E27FC236}">
-                <a16:creationId xmlns:a16="http://schemas.microsoft.com/office/drawing/2014/main" id="{1CB41A9C-C286-45D0-B95E-46D13185AED5}"/>
+                <a16:creationId xmlns:a16="http://schemas.microsoft.com/office/drawing/2014/main" id="{376F8760-E336-408F-A747-098A2E522296}"/>
               </a:ext>
             </a:extLst>
           </p:cNvPr>
@@ -9149,10 +9149,10 @@
             </a:pathLst>
           </a:custGeom>
           <a:blipFill xmlns:a="http://schemas.openxmlformats.org/drawingml/2006/main">
-            <a:blip xmlns:r="http://schemas.openxmlformats.org/officeDocument/2006/relationships" r:embed="R684172871d3e4d5c">
+            <a:blip xmlns:r="http://schemas.openxmlformats.org/officeDocument/2006/relationships" r:embed="Re3384580e27d4b33">
               <a:extLst>
                 <a:ext uri="{96DAC541-7B7A-43D3-8B79-37D633B846F1}">
-                  <asvg:svgBlip xmlns:asvg="http://schemas.microsoft.com/office/drawing/2016/SVG/main" r:embed="R48fbcb075b4c4228"/>
+                  <asvg:svgBlip xmlns:asvg="http://schemas.microsoft.com/office/drawing/2016/SVG/main" r:embed="R9ec6d6a4a57d498f"/>
                 </a:ext>
               </a:extLst>
             </a:blip>
@@ -9167,7 +9167,7 @@
           <p:cNvPr id="8" name="Freeform 8">
             <a:extLst xmlns:a="http://schemas.openxmlformats.org/drawingml/2006/main">
               <a:ext uri="{FF2B5EF4-FFF2-40B4-BE49-F238E27FC236}">
-                <a16:creationId xmlns:a16="http://schemas.microsoft.com/office/drawing/2014/main" id="{1CAD7C3E-CBC8-4AD1-98E6-B8788E95DEC9}"/>
+                <a16:creationId xmlns:a16="http://schemas.microsoft.com/office/drawing/2014/main" id="{B5E025A3-0F63-48D2-B57F-298AA14AC8EE}"/>
               </a:ext>
             </a:extLst>
           </p:cNvPr>
@@ -9205,10 +9205,10 @@
             </a:pathLst>
           </a:custGeom>
           <a:blipFill xmlns:a="http://schemas.openxmlformats.org/drawingml/2006/main">
-            <a:blip xmlns:r="http://schemas.openxmlformats.org/officeDocument/2006/relationships" r:embed="R684172871d3e4d5c">
+            <a:blip xmlns:r="http://schemas.openxmlformats.org/officeDocument/2006/relationships" r:embed="Re3384580e27d4b33">
               <a:extLst>
                 <a:ext uri="{96DAC541-7B7A-43D3-8B79-37D633B846F1}">
-                  <asvg:svgBlip xmlns:asvg="http://schemas.microsoft.com/office/drawing/2016/SVG/main" r:embed="R48fbcb075b4c4228"/>
+                  <asvg:svgBlip xmlns:asvg="http://schemas.microsoft.com/office/drawing/2016/SVG/main" r:embed="R9ec6d6a4a57d498f"/>
                 </a:ext>
               </a:extLst>
             </a:blip>
@@ -9223,7 +9223,7 @@
           <p:cNvPr id="10" name="Freeform 10">
             <a:extLst xmlns:a="http://schemas.openxmlformats.org/drawingml/2006/main">
               <a:ext uri="{FF2B5EF4-FFF2-40B4-BE49-F238E27FC236}">
-                <a16:creationId xmlns:a16="http://schemas.microsoft.com/office/drawing/2014/main" id="{9828D3F4-24ED-4EF7-B1CA-BA455E2C7648}"/>
+                <a16:creationId xmlns:a16="http://schemas.microsoft.com/office/drawing/2014/main" id="{C3CF0EC4-C002-4F23-8B7B-6789C139EBB2}"/>
               </a:ext>
             </a:extLst>
           </p:cNvPr>
@@ -9289,7 +9289,7 @@
           <p:cNvPr id="11" name="Freeform 11">
             <a:extLst xmlns:a="http://schemas.openxmlformats.org/drawingml/2006/main">
               <a:ext uri="{FF2B5EF4-FFF2-40B4-BE49-F238E27FC236}">
-                <a16:creationId xmlns:a16="http://schemas.microsoft.com/office/drawing/2014/main" id="{CAA90FF9-0828-46CE-BB2D-98B6B7BB4F5A}"/>
+                <a16:creationId xmlns:a16="http://schemas.microsoft.com/office/drawing/2014/main" id="{D566D8A1-C9B6-49A4-8862-EFA63A3B8A1E}"/>
               </a:ext>
             </a:extLst>
           </p:cNvPr>
@@ -9355,7 +9355,7 @@
           <p:cNvPr id="12" name="Freeform 12">
             <a:extLst xmlns:a="http://schemas.openxmlformats.org/drawingml/2006/main">
               <a:ext uri="{FF2B5EF4-FFF2-40B4-BE49-F238E27FC236}">
-                <a16:creationId xmlns:a16="http://schemas.microsoft.com/office/drawing/2014/main" id="{95376EB6-717D-45CE-8B0D-42158219E5B6}"/>
+                <a16:creationId xmlns:a16="http://schemas.microsoft.com/office/drawing/2014/main" id="{5B90552F-8BEF-43A8-91C2-BE234163D233}"/>
               </a:ext>
             </a:extLst>
           </p:cNvPr>
@@ -9421,7 +9421,7 @@
           <p:cNvPr id="14" name="Freeform 14">
             <a:extLst xmlns:a="http://schemas.openxmlformats.org/drawingml/2006/main">
               <a:ext uri="{FF2B5EF4-FFF2-40B4-BE49-F238E27FC236}">
-                <a16:creationId xmlns:a16="http://schemas.microsoft.com/office/drawing/2014/main" id="{9452A874-B366-4FE7-AD23-2D1E8962EE20}"/>
+                <a16:creationId xmlns:a16="http://schemas.microsoft.com/office/drawing/2014/main" id="{5542C6C3-16DF-4060-96CD-65CCC62327F8}"/>
               </a:ext>
             </a:extLst>
           </p:cNvPr>
@@ -9487,7 +9487,7 @@
           <p:cNvPr id="15" name="Freeform 15">
             <a:extLst xmlns:a="http://schemas.openxmlformats.org/drawingml/2006/main">
               <a:ext uri="{FF2B5EF4-FFF2-40B4-BE49-F238E27FC236}">
-                <a16:creationId xmlns:a16="http://schemas.microsoft.com/office/drawing/2014/main" id="{0D50F66F-4FDE-4D38-A3EE-4742587C9849}"/>
+                <a16:creationId xmlns:a16="http://schemas.microsoft.com/office/drawing/2014/main" id="{5D63043E-B8A8-42A1-B12A-BAC4BDD02539}"/>
               </a:ext>
             </a:extLst>
           </p:cNvPr>
@@ -9553,7 +9553,7 @@
           <p:cNvPr id="16" name="Freeform 16">
             <a:extLst xmlns:a="http://schemas.openxmlformats.org/drawingml/2006/main">
               <a:ext uri="{FF2B5EF4-FFF2-40B4-BE49-F238E27FC236}">
-                <a16:creationId xmlns:a16="http://schemas.microsoft.com/office/drawing/2014/main" id="{DC9634BA-6799-4595-B588-725A6015AE0E}"/>
+                <a16:creationId xmlns:a16="http://schemas.microsoft.com/office/drawing/2014/main" id="{78E50DD1-A963-4800-B359-8A4F860A6D06}"/>
               </a:ext>
             </a:extLst>
           </p:cNvPr>
@@ -9619,7 +9619,7 @@
           <p:cNvPr id="18" name="Freeform 18">
             <a:extLst xmlns:a="http://schemas.openxmlformats.org/drawingml/2006/main">
               <a:ext uri="{FF2B5EF4-FFF2-40B4-BE49-F238E27FC236}">
-                <a16:creationId xmlns:a16="http://schemas.microsoft.com/office/drawing/2014/main" id="{81B26996-6B38-48D6-B800-8C8DD742FA13}"/>
+                <a16:creationId xmlns:a16="http://schemas.microsoft.com/office/drawing/2014/main" id="{436CE8BD-5549-437B-9290-10F1F5E60A99}"/>
               </a:ext>
             </a:extLst>
           </p:cNvPr>
@@ -9664,7 +9664,7 @@
           <p:cNvPr id="19" name="TextBox 19">
             <a:extLst xmlns:a="http://schemas.openxmlformats.org/drawingml/2006/main">
               <a:ext uri="{FF2B5EF4-FFF2-40B4-BE49-F238E27FC236}">
-                <a16:creationId xmlns:a16="http://schemas.microsoft.com/office/drawing/2014/main" id="{51DECCA2-5EEE-4BC9-9A49-8A9533DEE68B}"/>
+                <a16:creationId xmlns:a16="http://schemas.microsoft.com/office/drawing/2014/main" id="{89124E28-569B-4D01-9DB3-F6586B77229C}"/>
               </a:ext>
             </a:extLst>
           </p:cNvPr>
@@ -9704,7 +9704,7 @@
           <p:cNvPr id="20" name="TextBox 20">
             <a:extLst xmlns:a="http://schemas.openxmlformats.org/drawingml/2006/main">
               <a:ext uri="{FF2B5EF4-FFF2-40B4-BE49-F238E27FC236}">
-                <a16:creationId xmlns:a16="http://schemas.microsoft.com/office/drawing/2014/main" id="{A2F5E5A2-AF48-4DEB-A76E-A116EBCBEB20}"/>
+                <a16:creationId xmlns:a16="http://schemas.microsoft.com/office/drawing/2014/main" id="{B72E7D01-9180-43B9-B566-9D07FCD658D2}"/>
               </a:ext>
             </a:extLst>
           </p:cNvPr>
@@ -9865,7 +9865,7 @@
           <p:cNvPr id="21" name="TextBox 21">
             <a:extLst xmlns:a="http://schemas.openxmlformats.org/drawingml/2006/main">
               <a:ext uri="{FF2B5EF4-FFF2-40B4-BE49-F238E27FC236}">
-                <a16:creationId xmlns:a16="http://schemas.microsoft.com/office/drawing/2014/main" id="{A2970A48-E311-46D6-A71C-06BD2DC86B82}"/>
+                <a16:creationId xmlns:a16="http://schemas.microsoft.com/office/drawing/2014/main" id="{1BB5ED1B-49DC-412E-B2D8-E1BCD2491C40}"/>
               </a:ext>
             </a:extLst>
           </p:cNvPr>
@@ -9919,7 +9919,7 @@
           <p:cNvPr id="22" name="TextBox 22">
             <a:extLst xmlns:a="http://schemas.openxmlformats.org/drawingml/2006/main">
               <a:ext uri="{FF2B5EF4-FFF2-40B4-BE49-F238E27FC236}">
-                <a16:creationId xmlns:a16="http://schemas.microsoft.com/office/drawing/2014/main" id="{57C4F580-DC9E-4272-B70F-813F9BC1A455}"/>
+                <a16:creationId xmlns:a16="http://schemas.microsoft.com/office/drawing/2014/main" id="{75DC57AA-8871-4E0A-9F2D-E86CF86F6952}"/>
               </a:ext>
             </a:extLst>
           </p:cNvPr>
@@ -9971,7 +9971,7 @@
           <p:cNvPr id="23" name="TextBox 23">
             <a:extLst xmlns:a="http://schemas.openxmlformats.org/drawingml/2006/main">
               <a:ext uri="{FF2B5EF4-FFF2-40B4-BE49-F238E27FC236}">
-                <a16:creationId xmlns:a16="http://schemas.microsoft.com/office/drawing/2014/main" id="{68466173-938B-4DE2-A192-09591F9D9795}"/>
+                <a16:creationId xmlns:a16="http://schemas.microsoft.com/office/drawing/2014/main" id="{D677529C-7AE4-4A83-8216-596E6577F367}"/>
               </a:ext>
             </a:extLst>
           </p:cNvPr>
@@ -10023,7 +10023,7 @@
           <p:cNvPr id="24" name="TextBox 24">
             <a:extLst xmlns:a="http://schemas.openxmlformats.org/drawingml/2006/main">
               <a:ext uri="{FF2B5EF4-FFF2-40B4-BE49-F238E27FC236}">
-                <a16:creationId xmlns:a16="http://schemas.microsoft.com/office/drawing/2014/main" id="{8CEDE8DC-2B7E-4728-9E50-4A71A3C66A5E}"/>
+                <a16:creationId xmlns:a16="http://schemas.microsoft.com/office/drawing/2014/main" id="{D3EBF3A5-5A1F-4A52-BD0F-42748C9FB5AA}"/>
               </a:ext>
             </a:extLst>
           </p:cNvPr>
@@ -10072,7 +10072,7 @@
           <p:cNvPr id="25" name="TextBox 25">
             <a:extLst xmlns:a="http://schemas.openxmlformats.org/drawingml/2006/main">
               <a:ext uri="{FF2B5EF4-FFF2-40B4-BE49-F238E27FC236}">
-                <a16:creationId xmlns:a16="http://schemas.microsoft.com/office/drawing/2014/main" id="{47E2B2AB-5504-49F5-9E9B-293103C1B89B}"/>
+                <a16:creationId xmlns:a16="http://schemas.microsoft.com/office/drawing/2014/main" id="{034DA127-49B7-42F1-AD04-42EC0DC1BCC9}"/>
               </a:ext>
             </a:extLst>
           </p:cNvPr>
@@ -10124,7 +10124,7 @@
           <p:cNvPr id="27" name="Freeform 27">
             <a:extLst xmlns:a="http://schemas.openxmlformats.org/drawingml/2006/main">
               <a:ext uri="{FF2B5EF4-FFF2-40B4-BE49-F238E27FC236}">
-                <a16:creationId xmlns:a16="http://schemas.microsoft.com/office/drawing/2014/main" id="{1649277F-5EA9-4178-AAE1-AE18DD800AE7}"/>
+                <a16:creationId xmlns:a16="http://schemas.microsoft.com/office/drawing/2014/main" id="{BD085A2E-CD16-4916-9710-D93011E5F933}"/>
               </a:ext>
             </a:extLst>
           </p:cNvPr>
@@ -10169,7 +10169,7 @@
           <p:cNvPr id="28" name="TextBox 28">
             <a:extLst xmlns:a="http://schemas.openxmlformats.org/drawingml/2006/main">
               <a:ext uri="{FF2B5EF4-FFF2-40B4-BE49-F238E27FC236}">
-                <a16:creationId xmlns:a16="http://schemas.microsoft.com/office/drawing/2014/main" id="{794F0E2D-1E58-4B5A-A82B-F405BD3D862B}"/>
+                <a16:creationId xmlns:a16="http://schemas.microsoft.com/office/drawing/2014/main" id="{63F4ADCA-A5B2-4F77-A0CE-AA601FE0143A}"/>
               </a:ext>
             </a:extLst>
           </p:cNvPr>
@@ -10209,7 +10209,7 @@
           <p:cNvPr id="29" name="TextBox 29">
             <a:extLst xmlns:a="http://schemas.openxmlformats.org/drawingml/2006/main">
               <a:ext uri="{FF2B5EF4-FFF2-40B4-BE49-F238E27FC236}">
-                <a16:creationId xmlns:a16="http://schemas.microsoft.com/office/drawing/2014/main" id="{4D4D0136-16C9-4705-885F-0E816174D759}"/>
+                <a16:creationId xmlns:a16="http://schemas.microsoft.com/office/drawing/2014/main" id="{3FF30D5C-37F8-45DF-9421-CFFC7EF3D0BB}"/>
               </a:ext>
             </a:extLst>
           </p:cNvPr>
@@ -10258,7 +10258,7 @@
           <p:cNvPr id="30" name="TextBox 30">
             <a:extLst xmlns:a="http://schemas.openxmlformats.org/drawingml/2006/main">
               <a:ext uri="{FF2B5EF4-FFF2-40B4-BE49-F238E27FC236}">
-                <a16:creationId xmlns:a16="http://schemas.microsoft.com/office/drawing/2014/main" id="{75F3A0E4-58FD-471F-AFE8-A27F2931F076}"/>
+                <a16:creationId xmlns:a16="http://schemas.microsoft.com/office/drawing/2014/main" id="{94D8DFBE-DDFD-4864-A3F8-21CD48113FE7}"/>
               </a:ext>
             </a:extLst>
           </p:cNvPr>
@@ -10307,10 +10307,10 @@
       </p:sp>
       <p:sp>
         <p:nvSpPr>
-          <p:cNvPr id="31" name="內容_11_處方 DOE">
+          <p:cNvPr id="31" name="內容_11_改善方案的實驗比較">
             <a:extLst xmlns:a="http://schemas.openxmlformats.org/drawingml/2006/main">
               <a:ext uri="{FF2B5EF4-FFF2-40B4-BE49-F238E27FC236}">
-                <a16:creationId xmlns:a16="http://schemas.microsoft.com/office/drawing/2014/main" id="{10CEB891-7164-470E-8CBF-A970B8CE3C13}"/>
+                <a16:creationId xmlns:a16="http://schemas.microsoft.com/office/drawing/2014/main" id="{D9D9BF9E-6B43-4E39-95D4-9CE0E099A5F5}"/>
               </a:ext>
             </a:extLst>
           </p:cNvPr>
@@ -10458,7 +10458,7 @@
                 <a:ea typeface="Microsoft JhengHei"/>
                 <a:cs typeface="Microsoft JhengHei"/>
               </a:rPr>
-              <a:t>處方 DOE</a:t>
+              <a:t>改善方案的實驗比較</a:t>
             </a:r>
           </a:p>
         </p:txBody>
@@ -10468,7 +10468,7 @@
           <p:cNvPr id="32" name="內容_11_緩衝與調派必須一起評估">
             <a:extLst xmlns:a="http://schemas.openxmlformats.org/drawingml/2006/main">
               <a:ext uri="{FF2B5EF4-FFF2-40B4-BE49-F238E27FC236}">
-                <a16:creationId xmlns:a16="http://schemas.microsoft.com/office/drawing/2014/main" id="{7176B777-02D5-437B-86E9-3D15A5FDA47A}"/>
+                <a16:creationId xmlns:a16="http://schemas.microsoft.com/office/drawing/2014/main" id="{8B38E5F0-262E-472B-A1E9-DB22E1086E77}"/>
               </a:ext>
             </a:extLst>
           </p:cNvPr>
@@ -10626,7 +10626,7 @@
           <p:cNvPr id="33" name="Chart">
             <a:extLst xmlns:a="http://schemas.openxmlformats.org/drawingml/2006/main">
               <a:ext uri="{FF2B5EF4-FFF2-40B4-BE49-F238E27FC236}">
-                <a16:creationId xmlns:a16="http://schemas.microsoft.com/office/drawing/2014/main" id="{13122677-26FA-4659-93B7-13203AF931CC}"/>
+                <a16:creationId xmlns:a16="http://schemas.microsoft.com/office/drawing/2014/main" id="{C83EFFF2-1534-424F-9C92-B969A68DBA4C}"/>
               </a:ext>
             </a:extLst>
           </p:cNvPr>
@@ -10639,7 +10639,7 @@
         </p:xfrm>
         <a:graphic xmlns:a="http://schemas.openxmlformats.org/drawingml/2006/main">
           <a:graphicData uri="http://schemas.openxmlformats.org/drawingml/2006/chart">
-            <c:chart xmlns:r="http://schemas.openxmlformats.org/officeDocument/2006/relationships" xmlns:c="http://schemas.openxmlformats.org/drawingml/2006/chart" r:id="R54e1429518d74837"/>
+            <c:chart xmlns:r="http://schemas.openxmlformats.org/officeDocument/2006/relationships" xmlns:c="http://schemas.openxmlformats.org/drawingml/2006/chart" r:id="R5e1833d6ebaf405f"/>
           </a:graphicData>
         </a:graphic>
       </p:graphicFrame>
@@ -10648,7 +10648,7 @@
           <p:cNvPr id="34" name="內容_11_3種情境 × 15種處方／長">
             <a:extLst xmlns:a="http://schemas.openxmlformats.org/drawingml/2006/main">
               <a:ext uri="{FF2B5EF4-FFF2-40B4-BE49-F238E27FC236}">
-                <a16:creationId xmlns:a16="http://schemas.microsoft.com/office/drawing/2014/main" id="{C0C3DB1B-26F1-420D-B67C-68B18C66B630}"/>
+                <a16:creationId xmlns:a16="http://schemas.microsoft.com/office/drawing/2014/main" id="{225EAE23-D5C8-456E-B577-00B9458D811A}"/>
               </a:ext>
             </a:extLst>
           </p:cNvPr>
@@ -10796,7 +10796,7 @@
                 <a:ea typeface="Microsoft JhengHei"/>
                 <a:cs typeface="Microsoft JhengHei"/>
               </a:rPr>
-              <a:t>3種情境 × 15種處方／長度 × 30次；各跑7日、暖機24h。0m採實際旁路，非隱藏容量。</a:t>
+              <a:t>3種情境 × 15種處方／長度 × 30次；各跑7日、暖機24小時。0公尺採實際旁路，非隱藏容量。</a:t>
             </a:r>
           </a:p>
         </p:txBody>
@@ -10804,7 +10804,7 @@
     </p:spTree>
     <p:extLst>
       <p:ext uri="{BB962C8B-B14F-4D97-AF65-F5344CB8AC3E}">
-        <p14:creationId xmlns:p14="http://schemas.microsoft.com/office/powerpoint/2010/main" val="116706678"/>
+        <p14:creationId xmlns:p14="http://schemas.microsoft.com/office/powerpoint/2010/main" val="771388846"/>
       </p:ext>
     </p:extLst>
   </p:cSld>
@@ -10828,7 +10828,7 @@
           <p:cNvPr id="2" name="Freeform 2">
             <a:extLst xmlns:a="http://schemas.openxmlformats.org/drawingml/2006/main">
               <a:ext uri="{FF2B5EF4-FFF2-40B4-BE49-F238E27FC236}">
-                <a16:creationId xmlns:a16="http://schemas.microsoft.com/office/drawing/2014/main" id="{E6BA5682-B3B5-4574-956C-87E3862B631F}"/>
+                <a16:creationId xmlns:a16="http://schemas.microsoft.com/office/drawing/2014/main" id="{2B9A34E2-E98F-4DD3-95E6-FE8223ECE929}"/>
               </a:ext>
             </a:extLst>
           </p:cNvPr>
@@ -10866,7 +10866,7 @@
             </a:pathLst>
           </a:custGeom>
           <a:blipFill xmlns:a="http://schemas.openxmlformats.org/drawingml/2006/main">
-            <a:blip xmlns:r="http://schemas.openxmlformats.org/officeDocument/2006/relationships" r:embed="Re16fb6c3fe054ef3"/>
+            <a:blip xmlns:r="http://schemas.openxmlformats.org/officeDocument/2006/relationships" r:embed="R596c2b27dc304ef0"/>
             <a:stretch>
               <a:fillRect l="-35258" t="-5555" r="-24931" b="-72434"/>
             </a:stretch>
@@ -10878,7 +10878,7 @@
           <p:cNvPr id="4" name="Freeform 4">
             <a:extLst xmlns:a="http://schemas.openxmlformats.org/drawingml/2006/main">
               <a:ext uri="{FF2B5EF4-FFF2-40B4-BE49-F238E27FC236}">
-                <a16:creationId xmlns:a16="http://schemas.microsoft.com/office/drawing/2014/main" id="{81366FBC-49CE-4C6D-B383-61319C373861}"/>
+                <a16:creationId xmlns:a16="http://schemas.microsoft.com/office/drawing/2014/main" id="{684FEEC4-1B8F-4C3E-9050-1AF39D970468}"/>
               </a:ext>
             </a:extLst>
           </p:cNvPr>
@@ -10952,7 +10952,7 @@
           <p:cNvPr id="5" name="TextBox 5">
             <a:extLst xmlns:a="http://schemas.openxmlformats.org/drawingml/2006/main">
               <a:ext uri="{FF2B5EF4-FFF2-40B4-BE49-F238E27FC236}">
-                <a16:creationId xmlns:a16="http://schemas.microsoft.com/office/drawing/2014/main" id="{95A5BFCE-C166-4119-9AF0-A0B6906304E4}"/>
+                <a16:creationId xmlns:a16="http://schemas.microsoft.com/office/drawing/2014/main" id="{EADA0A1C-9873-422D-A35B-2F90364DC59C}"/>
               </a:ext>
             </a:extLst>
           </p:cNvPr>
@@ -10988,7 +10988,7 @@
           <p:cNvPr id="6" name="Freeform 6">
             <a:extLst xmlns:a="http://schemas.openxmlformats.org/drawingml/2006/main">
               <a:ext uri="{FF2B5EF4-FFF2-40B4-BE49-F238E27FC236}">
-                <a16:creationId xmlns:a16="http://schemas.microsoft.com/office/drawing/2014/main" id="{8D7BBDC2-5661-4B75-9CC5-ED9D80796F83}"/>
+                <a16:creationId xmlns:a16="http://schemas.microsoft.com/office/drawing/2014/main" id="{02A79CD8-4E29-4FFD-B168-7D8A5F7FF4F6}"/>
               </a:ext>
             </a:extLst>
           </p:cNvPr>
@@ -11026,7 +11026,7 @@
             </a:pathLst>
           </a:custGeom>
           <a:blipFill xmlns:a="http://schemas.openxmlformats.org/drawingml/2006/main">
-            <a:blip xmlns:r="http://schemas.openxmlformats.org/officeDocument/2006/relationships" r:embed="R6827dc6de8744abf"/>
+            <a:blip xmlns:r="http://schemas.openxmlformats.org/officeDocument/2006/relationships" r:embed="Rd83dfc26769046e8"/>
             <a:stretch>
               <a:fillRect l="0" t="0" r="0" b="0"/>
             </a:stretch>
@@ -11038,7 +11038,7 @@
           <p:cNvPr id="8" name="Freeform 8">
             <a:extLst xmlns:a="http://schemas.openxmlformats.org/drawingml/2006/main">
               <a:ext uri="{FF2B5EF4-FFF2-40B4-BE49-F238E27FC236}">
-                <a16:creationId xmlns:a16="http://schemas.microsoft.com/office/drawing/2014/main" id="{A3C111F5-2240-432F-96EB-4E899D326CB8}"/>
+                <a16:creationId xmlns:a16="http://schemas.microsoft.com/office/drawing/2014/main" id="{E4952800-DFE8-4E37-A977-83DCA3B236CD}"/>
               </a:ext>
             </a:extLst>
           </p:cNvPr>
@@ -11097,7 +11097,7 @@
           <p:cNvPr id="9" name="TextBox 9">
             <a:extLst xmlns:a="http://schemas.openxmlformats.org/drawingml/2006/main">
               <a:ext uri="{FF2B5EF4-FFF2-40B4-BE49-F238E27FC236}">
-                <a16:creationId xmlns:a16="http://schemas.microsoft.com/office/drawing/2014/main" id="{C3D9C67E-E284-441A-A6E1-797B8FE7FA0F}"/>
+                <a16:creationId xmlns:a16="http://schemas.microsoft.com/office/drawing/2014/main" id="{F3615ACB-F9E0-4AB8-B047-FA2894472A01}"/>
               </a:ext>
             </a:extLst>
           </p:cNvPr>
@@ -11137,7 +11137,7 @@
           <p:cNvPr id="10" name="Freeform 10">
             <a:extLst xmlns:a="http://schemas.openxmlformats.org/drawingml/2006/main">
               <a:ext uri="{FF2B5EF4-FFF2-40B4-BE49-F238E27FC236}">
-                <a16:creationId xmlns:a16="http://schemas.microsoft.com/office/drawing/2014/main" id="{BF11C8A8-3BD6-4C9B-ACD3-F1F8847FD0A3}"/>
+                <a16:creationId xmlns:a16="http://schemas.microsoft.com/office/drawing/2014/main" id="{D6B15FAF-B63D-445A-A801-00658DA2871F}"/>
               </a:ext>
             </a:extLst>
           </p:cNvPr>
@@ -11185,7 +11185,7 @@
           <p:cNvPr id="12" name="Freeform 12">
             <a:extLst xmlns:a="http://schemas.openxmlformats.org/drawingml/2006/main">
               <a:ext uri="{FF2B5EF4-FFF2-40B4-BE49-F238E27FC236}">
-                <a16:creationId xmlns:a16="http://schemas.microsoft.com/office/drawing/2014/main" id="{CE1B6B78-6121-4F37-AA6C-8064B8763060}"/>
+                <a16:creationId xmlns:a16="http://schemas.microsoft.com/office/drawing/2014/main" id="{3360862A-0F93-40A2-961E-FE9BDADE409A}"/>
               </a:ext>
             </a:extLst>
           </p:cNvPr>
@@ -11244,7 +11244,7 @@
           <p:cNvPr id="13" name="TextBox 13">
             <a:extLst xmlns:a="http://schemas.openxmlformats.org/drawingml/2006/main">
               <a:ext uri="{FF2B5EF4-FFF2-40B4-BE49-F238E27FC236}">
-                <a16:creationId xmlns:a16="http://schemas.microsoft.com/office/drawing/2014/main" id="{23485020-6AE8-4D12-B995-5B8AD2282285}"/>
+                <a16:creationId xmlns:a16="http://schemas.microsoft.com/office/drawing/2014/main" id="{42CE6122-343C-4F8C-A2B6-A66C6AE7A8DE}"/>
               </a:ext>
             </a:extLst>
           </p:cNvPr>
@@ -11284,7 +11284,7 @@
           <p:cNvPr id="14" name="Freeform 14">
             <a:extLst xmlns:a="http://schemas.openxmlformats.org/drawingml/2006/main">
               <a:ext uri="{FF2B5EF4-FFF2-40B4-BE49-F238E27FC236}">
-                <a16:creationId xmlns:a16="http://schemas.microsoft.com/office/drawing/2014/main" id="{414F3F4D-E60C-4D10-9168-1F1AD7C99313}"/>
+                <a16:creationId xmlns:a16="http://schemas.microsoft.com/office/drawing/2014/main" id="{CF44FEB9-6801-4D38-A1B6-2F6A0F044D76}"/>
               </a:ext>
             </a:extLst>
           </p:cNvPr>
@@ -11332,7 +11332,7 @@
           <p:cNvPr id="15" name="Freeform 15">
             <a:extLst xmlns:a="http://schemas.openxmlformats.org/drawingml/2006/main">
               <a:ext uri="{FF2B5EF4-FFF2-40B4-BE49-F238E27FC236}">
-                <a16:creationId xmlns:a16="http://schemas.microsoft.com/office/drawing/2014/main" id="{38C40535-D858-4459-9CDB-C78AA122C11C}"/>
+                <a16:creationId xmlns:a16="http://schemas.microsoft.com/office/drawing/2014/main" id="{9F638F20-FF79-4E43-832F-7350BF9E033E}"/>
               </a:ext>
             </a:extLst>
           </p:cNvPr>
@@ -11380,7 +11380,7 @@
           <p:cNvPr id="16" name="TextBox 16">
             <a:extLst xmlns:a="http://schemas.openxmlformats.org/drawingml/2006/main">
               <a:ext uri="{FF2B5EF4-FFF2-40B4-BE49-F238E27FC236}">
-                <a16:creationId xmlns:a16="http://schemas.microsoft.com/office/drawing/2014/main" id="{C12B9F52-0038-47BD-B28B-6B39C54B0E9F}"/>
+                <a16:creationId xmlns:a16="http://schemas.microsoft.com/office/drawing/2014/main" id="{7CA4B91F-D025-451C-A883-3305AED3CE04}"/>
               </a:ext>
             </a:extLst>
           </p:cNvPr>
@@ -11432,7 +11432,7 @@
           <p:cNvPr id="17" name="TextBox 17">
             <a:extLst xmlns:a="http://schemas.openxmlformats.org/drawingml/2006/main">
               <a:ext uri="{FF2B5EF4-FFF2-40B4-BE49-F238E27FC236}">
-                <a16:creationId xmlns:a16="http://schemas.microsoft.com/office/drawing/2014/main" id="{C4D22DAE-987E-4458-9412-8A67512657C0}"/>
+                <a16:creationId xmlns:a16="http://schemas.microsoft.com/office/drawing/2014/main" id="{6ECFE17E-9CC4-4B6E-9C0E-C8041D09A483}"/>
               </a:ext>
             </a:extLst>
           </p:cNvPr>
@@ -11593,7 +11593,7 @@
           <p:cNvPr id="18" name="TextBox 18">
             <a:extLst xmlns:a="http://schemas.openxmlformats.org/drawingml/2006/main">
               <a:ext uri="{FF2B5EF4-FFF2-40B4-BE49-F238E27FC236}">
-                <a16:creationId xmlns:a16="http://schemas.microsoft.com/office/drawing/2014/main" id="{2C78AF1B-BFE0-45B5-9D38-1BD8C13528F3}"/>
+                <a16:creationId xmlns:a16="http://schemas.microsoft.com/office/drawing/2014/main" id="{E8DC47B0-42C6-49DC-B636-C193D3CD14F7}"/>
               </a:ext>
             </a:extLst>
           </p:cNvPr>
@@ -11647,7 +11647,7 @@
           <p:cNvPr id="19" name="TextBox 19">
             <a:extLst xmlns:a="http://schemas.openxmlformats.org/drawingml/2006/main">
               <a:ext uri="{FF2B5EF4-FFF2-40B4-BE49-F238E27FC236}">
-                <a16:creationId xmlns:a16="http://schemas.microsoft.com/office/drawing/2014/main" id="{0C0A2B8C-0208-4D48-8BB1-11151E5B38CA}"/>
+                <a16:creationId xmlns:a16="http://schemas.microsoft.com/office/drawing/2014/main" id="{CB3264EA-8C0D-4ABF-AE84-AE6E0D781EEC}"/>
               </a:ext>
             </a:extLst>
           </p:cNvPr>
@@ -11699,7 +11699,7 @@
           <p:cNvPr id="20" name="TextBox 20">
             <a:extLst xmlns:a="http://schemas.openxmlformats.org/drawingml/2006/main">
               <a:ext uri="{FF2B5EF4-FFF2-40B4-BE49-F238E27FC236}">
-                <a16:creationId xmlns:a16="http://schemas.microsoft.com/office/drawing/2014/main" id="{251768C7-C981-45E1-8EF0-094FCE271773}"/>
+                <a16:creationId xmlns:a16="http://schemas.microsoft.com/office/drawing/2014/main" id="{8F7877DF-7E1F-484A-9965-79809C9DC5C6}"/>
               </a:ext>
             </a:extLst>
           </p:cNvPr>
@@ -11751,7 +11751,7 @@
           <p:cNvPr id="21" name="TextBox 21">
             <a:extLst xmlns:a="http://schemas.openxmlformats.org/drawingml/2006/main">
               <a:ext uri="{FF2B5EF4-FFF2-40B4-BE49-F238E27FC236}">
-                <a16:creationId xmlns:a16="http://schemas.microsoft.com/office/drawing/2014/main" id="{EEFC35F5-EDEC-43A6-8502-46928F5B1B34}"/>
+                <a16:creationId xmlns:a16="http://schemas.microsoft.com/office/drawing/2014/main" id="{F23AEE0C-31E0-499B-AFE2-FA4CA505B002}"/>
               </a:ext>
             </a:extLst>
           </p:cNvPr>
@@ -11803,7 +11803,7 @@
           <p:cNvPr id="22" name="TextBox 22">
             <a:extLst xmlns:a="http://schemas.openxmlformats.org/drawingml/2006/main">
               <a:ext uri="{FF2B5EF4-FFF2-40B4-BE49-F238E27FC236}">
-                <a16:creationId xmlns:a16="http://schemas.microsoft.com/office/drawing/2014/main" id="{5B3A9EB4-5434-4669-A6B8-4C1B2390F220}"/>
+                <a16:creationId xmlns:a16="http://schemas.microsoft.com/office/drawing/2014/main" id="{11B0A4A3-8903-4B69-8D84-6759DDB33D7F}"/>
               </a:ext>
             </a:extLst>
           </p:cNvPr>
@@ -11855,7 +11855,7 @@
           <p:cNvPr id="23" name="TextBox 23">
             <a:extLst xmlns:a="http://schemas.openxmlformats.org/drawingml/2006/main">
               <a:ext uri="{FF2B5EF4-FFF2-40B4-BE49-F238E27FC236}">
-                <a16:creationId xmlns:a16="http://schemas.microsoft.com/office/drawing/2014/main" id="{700897D2-1134-4C12-B009-445F7E1791E5}"/>
+                <a16:creationId xmlns:a16="http://schemas.microsoft.com/office/drawing/2014/main" id="{089CE975-1C8A-498C-A630-B7869EB69B5E}"/>
               </a:ext>
             </a:extLst>
           </p:cNvPr>
@@ -11904,10 +11904,10 @@
       </p:sp>
       <p:sp>
         <p:nvSpPr>
-          <p:cNvPr id="24" name="內容_12_主推方案：P4 12m">
+          <p:cNvPr id="24" name="內容_12_主推：聯合改善＋12公尺緩衝">
             <a:extLst xmlns:a="http://schemas.openxmlformats.org/drawingml/2006/main">
               <a:ext uri="{FF2B5EF4-FFF2-40B4-BE49-F238E27FC236}">
-                <a16:creationId xmlns:a16="http://schemas.microsoft.com/office/drawing/2014/main" id="{4F574373-7AC5-4615-97B8-4F9F4134AD29}"/>
+                <a16:creationId xmlns:a16="http://schemas.microsoft.com/office/drawing/2014/main" id="{5C9DD203-4BA0-4DE7-A1B7-A0B0082E836A}"/>
               </a:ext>
             </a:extLst>
           </p:cNvPr>
@@ -12055,17 +12055,17 @@
                 <a:ea typeface="Microsoft JhengHei"/>
                 <a:cs typeface="Microsoft JhengHei"/>
               </a:rPr>
-              <a:t>主推方案：P4 12m</a:t>
+              <a:t>主推：聯合改善＋12公尺緩衝</a:t>
             </a:r>
           </a:p>
         </p:txBody>
       </p:sp>
       <p:sp>
         <p:nvSpPr>
-          <p:cNvPr id="25" name="內容_12_服務要求下選12m，8m為備">
+          <p:cNvPr id="25" name="內容_12_有服務要求才採用，8公尺為備">
             <a:extLst xmlns:a="http://schemas.openxmlformats.org/drawingml/2006/main">
               <a:ext uri="{FF2B5EF4-FFF2-40B4-BE49-F238E27FC236}">
-                <a16:creationId xmlns:a16="http://schemas.microsoft.com/office/drawing/2014/main" id="{3A96B36E-E9C5-46D9-B329-0E6F5EA3F09E}"/>
+                <a16:creationId xmlns:a16="http://schemas.microsoft.com/office/drawing/2014/main" id="{E9A6C0F2-69AD-43EA-92A8-259094CA838E}"/>
               </a:ext>
             </a:extLst>
           </p:cNvPr>
@@ -12213,7 +12213,7 @@
                 <a:ea typeface="Microsoft JhengHei"/>
                 <a:cs typeface="Microsoft JhengHei"/>
               </a:rPr>
-              <a:t>服務要求下選12m，8m為備選</a:t>
+              <a:t>有服務要求才採用，8公尺為備選</a:t>
             </a:r>
           </a:p>
         </p:txBody>
@@ -12223,7 +12223,7 @@
           <p:cNvPr id="26" name="">
             <a:extLst xmlns:a="http://schemas.openxmlformats.org/drawingml/2006/main">
               <a:ext uri="{FF2B5EF4-FFF2-40B4-BE49-F238E27FC236}">
-                <a16:creationId xmlns:a16="http://schemas.microsoft.com/office/drawing/2014/main" id="{6B72D342-A266-4DD5-B908-2AB47F51FF70}"/>
+                <a16:creationId xmlns:a16="http://schemas.microsoft.com/office/drawing/2014/main" id="{AB19B044-85C9-4CE0-8C0B-460BCBCA7F28}"/>
               </a:ext>
             </a:extLst>
           </p:cNvPr>
@@ -12259,7 +12259,7 @@
                           <a:ea typeface="Microsoft JhengHei"/>
                           <a:cs typeface="Microsoft JhengHei"/>
                         </a:rPr>
-                        <a:t>S1 指標</a:t>
+                        <a:t>短波尖峰指標</a:t>
                       </a:r>
                     </a:p>
                   </a:txBody>
@@ -12307,7 +12307,7 @@
                           <a:ea typeface="Microsoft JhengHei"/>
                           <a:cs typeface="Microsoft JhengHei"/>
                         </a:rPr>
-                        <a:t>Before P0</a:t>
+                        <a:t>改善前：現況</a:t>
                       </a:r>
                     </a:p>
                   </a:txBody>
@@ -12349,7 +12349,7 @@
                           <a:ea typeface="Microsoft JhengHei"/>
                           <a:cs typeface="Microsoft JhengHei"/>
                         </a:rPr>
-                        <a:t>低預算備選：8m</a:t>
+                        <a:t>備選：聯合8公尺</a:t>
                       </a:r>
                     </a:p>
                   </a:txBody>
@@ -12391,7 +12391,7 @@
                           <a:ea typeface="Microsoft JhengHei"/>
                           <a:cs typeface="Microsoft JhengHei"/>
                         </a:rPr>
-                        <a:t>主推：P4 12m</a:t>
+                        <a:t>主推：聯合12公尺</a:t>
                       </a:r>
                     </a:p>
                   </a:txBody>
@@ -12435,7 +12435,7 @@
                           <a:ea typeface="Microsoft JhengHei"/>
                           <a:cs typeface="Microsoft JhengHei"/>
                         </a:rPr>
-                        <a:t>Blocked %</a:t>
+                        <a:t>阻塞占比（%）</a:t>
                       </a:r>
                     </a:p>
                   </a:txBody>
@@ -12587,7 +12587,7 @@
                           <a:ea typeface="Microsoft JhengHei"/>
                           <a:cs typeface="Microsoft JhengHei"/>
                         </a:rPr>
-                        <a:t>平均Q-Time min</a:t>
+                        <a:t>平均檢查前等待（分鐘）</a:t>
                       </a:r>
                     </a:p>
                   </a:txBody>
@@ -12891,7 +12891,7 @@
                           <a:ea typeface="Microsoft JhengHei"/>
                           <a:cs typeface="Microsoft JhengHei"/>
                         </a:rPr>
-                        <a:t>資本支出 NT$</a:t>
+                        <a:t>初始投資（新臺幣元）</a:t>
                       </a:r>
                     </a:p>
                   </a:txBody>
@@ -13034,10 +13034,168 @@
       </p:graphicFrame>
       <p:sp>
         <p:nvSpPr>
-          <p:cNvPr id="27" name="內容_12_主推12m採額外CI上界&lt;1">
+          <p:cNvPr id="27" name="內容_12_本表是短波尖峰情境；各方案3">
             <a:extLst xmlns:a="http://schemas.openxmlformats.org/drawingml/2006/main">
               <a:ext uri="{FF2B5EF4-FFF2-40B4-BE49-F238E27FC236}">
-                <a16:creationId xmlns:a16="http://schemas.microsoft.com/office/drawing/2014/main" id="{17A95301-D130-44F5-BD9C-156E46427D34}"/>
+                <a16:creationId xmlns:a16="http://schemas.microsoft.com/office/drawing/2014/main" id="{47101364-EF7C-45F3-82EF-94A74985540D}"/>
+              </a:ext>
+            </a:extLst>
+          </p:cNvPr>
+          <p:cNvSpPr>
+            <a:spLocks xmlns:a="http://schemas.openxmlformats.org/drawingml/2006/main" noGrp="1"/>
+          </p:cNvSpPr>
+          <p:nvPr/>
+        </p:nvSpPr>
+        <p:spPr>
+          <a:xfrm xmlns:a="http://schemas.openxmlformats.org/drawingml/2006/main">
+            <a:off x="1581150" y="3971925"/>
+            <a:ext cx="14287500" cy="333375"/>
+          </a:xfrm>
+          <a:prstGeom xmlns:a="http://schemas.openxmlformats.org/drawingml/2006/main" prst="rect">
+            <a:avLst/>
+          </a:prstGeom>
+          <a:noFill xmlns:a="http://schemas.openxmlformats.org/drawingml/2006/main"/>
+          <a:ln xmlns:a="http://schemas.openxmlformats.org/drawingml/2006/main" w="0">
+            <a:noFill/>
+          </a:ln>
+        </p:spPr>
+        <p:txBody>
+          <a:bodyPr xmlns:a="http://schemas.openxmlformats.org/drawingml/2006/main" wrap="square" lIns="0" tIns="0" rIns="0" bIns="0">
+            <a:noAutofit/>
+          </a:bodyPr>
+          <a:lstStyle xmlns:a="http://schemas.openxmlformats.org/drawingml/2006/main">
+            <a:defPPr>
+              <a:defRPr sz="1725" b="0">
+                <a:solidFill>
+                  <a:srgbClr val="92A6DD"/>
+                </a:solidFill>
+                <a:latin typeface="Microsoft JhengHei"/>
+                <a:ea typeface="Microsoft JhengHei"/>
+                <a:cs typeface="Microsoft JhengHei"/>
+              </a:defRPr>
+            </a:defPPr>
+            <a:lvl1pPr>
+              <a:defRPr sz="1725" b="0">
+                <a:solidFill>
+                  <a:srgbClr val="92A6DD"/>
+                </a:solidFill>
+                <a:latin typeface="Microsoft JhengHei"/>
+                <a:ea typeface="Microsoft JhengHei"/>
+                <a:cs typeface="Microsoft JhengHei"/>
+              </a:defRPr>
+            </a:lvl1pPr>
+            <a:lvl2pPr>
+              <a:defRPr sz="1725" b="0">
+                <a:solidFill>
+                  <a:srgbClr val="92A6DD"/>
+                </a:solidFill>
+                <a:latin typeface="Microsoft JhengHei"/>
+                <a:ea typeface="Microsoft JhengHei"/>
+                <a:cs typeface="Microsoft JhengHei"/>
+              </a:defRPr>
+            </a:lvl2pPr>
+            <a:lvl3pPr>
+              <a:defRPr sz="1725" b="0">
+                <a:solidFill>
+                  <a:srgbClr val="92A6DD"/>
+                </a:solidFill>
+                <a:latin typeface="Microsoft JhengHei"/>
+                <a:ea typeface="Microsoft JhengHei"/>
+                <a:cs typeface="Microsoft JhengHei"/>
+              </a:defRPr>
+            </a:lvl3pPr>
+            <a:lvl4pPr>
+              <a:defRPr sz="1725" b="0">
+                <a:solidFill>
+                  <a:srgbClr val="92A6DD"/>
+                </a:solidFill>
+                <a:latin typeface="Microsoft JhengHei"/>
+                <a:ea typeface="Microsoft JhengHei"/>
+                <a:cs typeface="Microsoft JhengHei"/>
+              </a:defRPr>
+            </a:lvl4pPr>
+            <a:lvl5pPr>
+              <a:defRPr sz="1725" b="0">
+                <a:solidFill>
+                  <a:srgbClr val="92A6DD"/>
+                </a:solidFill>
+                <a:latin typeface="Microsoft JhengHei"/>
+                <a:ea typeface="Microsoft JhengHei"/>
+                <a:cs typeface="Microsoft JhengHei"/>
+              </a:defRPr>
+            </a:lvl5pPr>
+            <a:lvl6pPr>
+              <a:defRPr sz="1725" b="0">
+                <a:solidFill>
+                  <a:srgbClr val="92A6DD"/>
+                </a:solidFill>
+                <a:latin typeface="Microsoft JhengHei"/>
+                <a:ea typeface="Microsoft JhengHei"/>
+                <a:cs typeface="Microsoft JhengHei"/>
+              </a:defRPr>
+            </a:lvl6pPr>
+            <a:lvl7pPr>
+              <a:defRPr sz="1725" b="0">
+                <a:solidFill>
+                  <a:srgbClr val="92A6DD"/>
+                </a:solidFill>
+                <a:latin typeface="Microsoft JhengHei"/>
+                <a:ea typeface="Microsoft JhengHei"/>
+                <a:cs typeface="Microsoft JhengHei"/>
+              </a:defRPr>
+            </a:lvl7pPr>
+            <a:lvl8pPr>
+              <a:defRPr sz="1725" b="0">
+                <a:solidFill>
+                  <a:srgbClr val="92A6DD"/>
+                </a:solidFill>
+                <a:latin typeface="Microsoft JhengHei"/>
+                <a:ea typeface="Microsoft JhengHei"/>
+                <a:cs typeface="Microsoft JhengHei"/>
+              </a:defRPr>
+            </a:lvl8pPr>
+            <a:lvl9pPr>
+              <a:defRPr sz="1725" b="0">
+                <a:solidFill>
+                  <a:srgbClr val="92A6DD"/>
+                </a:solidFill>
+                <a:latin typeface="Microsoft JhengHei"/>
+                <a:ea typeface="Microsoft JhengHei"/>
+                <a:cs typeface="Microsoft JhengHei"/>
+              </a:defRPr>
+            </a:lvl9pPr>
+          </a:lstStyle>
+          <a:p xmlns:a="http://schemas.openxmlformats.org/drawingml/2006/main">
+            <a:pPr>
+              <a:defRPr sz="1725" b="0">
+                <a:solidFill>
+                  <a:srgbClr val="92A6DD"/>
+                </a:solidFill>
+                <a:latin typeface="Microsoft JhengHei"/>
+                <a:ea typeface="Microsoft JhengHei"/>
+                <a:cs typeface="Microsoft JhengHei"/>
+              </a:defRPr>
+            </a:pPr>
+            <a:r>
+              <a:rPr sz="1725" b="0">
+                <a:solidFill>
+                  <a:srgbClr val="92A6DD"/>
+                </a:solidFill>
+                <a:latin typeface="Microsoft JhengHei"/>
+                <a:ea typeface="Microsoft JhengHei"/>
+                <a:cs typeface="Microsoft JhengHei"/>
+              </a:rPr>
+              <a:t>本表是短波尖峰情境；各方案30次平均 [95%信賴下界, 上界]。</a:t>
+            </a:r>
+          </a:p>
+        </p:txBody>
+      </p:sp>
+      <p:sp>
+        <p:nvSpPr>
+          <p:cNvPr id="28" name="內容_12_主推12公尺採額外信賴區間上">
+            <a:extLst xmlns:a="http://schemas.openxmlformats.org/drawingml/2006/main">
+              <a:ext uri="{FF2B5EF4-FFF2-40B4-BE49-F238E27FC236}">
+                <a16:creationId xmlns:a16="http://schemas.microsoft.com/office/drawing/2014/main" id="{78315E8C-6F93-443B-804F-65BF63BF5228}"/>
               </a:ext>
             </a:extLst>
           </p:cNvPr>
@@ -13185,7 +13343,7 @@
                 <a:ea typeface="Microsoft JhengHei"/>
                 <a:cs typeface="Microsoft JhengHei"/>
               </a:rPr>
-              <a:t>主推12m採額外CI上界&lt;1%的服務風險限制；8m僅符合原均值規則。兩者直接ROI均為負。</a:t>
+              <a:t>主推12公尺採額外信賴區間上界&lt;1%的服務風險限制；8公尺僅符合原均值規則。兩者直接投資報酬率均為負。</a:t>
             </a:r>
           </a:p>
         </p:txBody>
@@ -13193,7 +13351,7 @@
     </p:spTree>
     <p:extLst>
       <p:ext uri="{BB962C8B-B14F-4D97-AF65-F5344CB8AC3E}">
-        <p14:creationId xmlns:p14="http://schemas.microsoft.com/office/powerpoint/2010/main" val="250250541"/>
+        <p14:creationId xmlns:p14="http://schemas.microsoft.com/office/powerpoint/2010/main" val="87870982"/>
       </p:ext>
     </p:extLst>
   </p:cSld>
@@ -13217,7 +13375,7 @@
           <p:cNvPr id="2" name="Freeform 2">
             <a:extLst xmlns:a="http://schemas.openxmlformats.org/drawingml/2006/main">
               <a:ext uri="{FF2B5EF4-FFF2-40B4-BE49-F238E27FC236}">
-                <a16:creationId xmlns:a16="http://schemas.microsoft.com/office/drawing/2014/main" id="{68CDBF9B-8365-462A-A4AB-B4696DE0E0F1}"/>
+                <a16:creationId xmlns:a16="http://schemas.microsoft.com/office/drawing/2014/main" id="{D16E4213-55D5-4D6A-91B1-EF82153DA850}"/>
               </a:ext>
             </a:extLst>
           </p:cNvPr>
@@ -13255,7 +13413,7 @@
             </a:pathLst>
           </a:custGeom>
           <a:blipFill xmlns:a="http://schemas.openxmlformats.org/drawingml/2006/main">
-            <a:blip xmlns:r="http://schemas.openxmlformats.org/officeDocument/2006/relationships" r:embed="Rffd85babd155431c"/>
+            <a:blip xmlns:r="http://schemas.openxmlformats.org/officeDocument/2006/relationships" r:embed="R91ff395e48d148bb"/>
             <a:stretch>
               <a:fillRect l="-35258" t="-5555" r="-24931" b="-72434"/>
             </a:stretch>
@@ -13267,7 +13425,7 @@
           <p:cNvPr id="4" name="Freeform 4">
             <a:extLst xmlns:a="http://schemas.openxmlformats.org/drawingml/2006/main">
               <a:ext uri="{FF2B5EF4-FFF2-40B4-BE49-F238E27FC236}">
-                <a16:creationId xmlns:a16="http://schemas.microsoft.com/office/drawing/2014/main" id="{DF1B8A36-75AB-41B3-90FE-B1397233C60D}"/>
+                <a16:creationId xmlns:a16="http://schemas.microsoft.com/office/drawing/2014/main" id="{77C387DD-8787-4F2F-BBEB-9D3AD4B6B187}"/>
               </a:ext>
             </a:extLst>
           </p:cNvPr>
@@ -13341,7 +13499,7 @@
           <p:cNvPr id="5" name="TextBox 5">
             <a:extLst xmlns:a="http://schemas.openxmlformats.org/drawingml/2006/main">
               <a:ext uri="{FF2B5EF4-FFF2-40B4-BE49-F238E27FC236}">
-                <a16:creationId xmlns:a16="http://schemas.microsoft.com/office/drawing/2014/main" id="{2DA29F13-603A-4AA7-8A71-9B8E70DC9C7F}"/>
+                <a16:creationId xmlns:a16="http://schemas.microsoft.com/office/drawing/2014/main" id="{D95B309F-5BD9-4584-987D-DD135D52E889}"/>
               </a:ext>
             </a:extLst>
           </p:cNvPr>
@@ -13377,7 +13535,7 @@
           <p:cNvPr id="6" name="Freeform 6">
             <a:extLst xmlns:a="http://schemas.openxmlformats.org/drawingml/2006/main">
               <a:ext uri="{FF2B5EF4-FFF2-40B4-BE49-F238E27FC236}">
-                <a16:creationId xmlns:a16="http://schemas.microsoft.com/office/drawing/2014/main" id="{C605EDCD-E6BE-4CE4-8992-591442DD2EAF}"/>
+                <a16:creationId xmlns:a16="http://schemas.microsoft.com/office/drawing/2014/main" id="{26539721-88B2-46F2-9655-E672565D775E}"/>
               </a:ext>
             </a:extLst>
           </p:cNvPr>
@@ -13415,7 +13573,7 @@
             </a:pathLst>
           </a:custGeom>
           <a:blipFill xmlns:a="http://schemas.openxmlformats.org/drawingml/2006/main">
-            <a:blip xmlns:r="http://schemas.openxmlformats.org/officeDocument/2006/relationships" r:embed="R4952a0b851534a24"/>
+            <a:blip xmlns:r="http://schemas.openxmlformats.org/officeDocument/2006/relationships" r:embed="R374163514b3244fb"/>
             <a:stretch>
               <a:fillRect l="0" t="0" r="0" b="0"/>
             </a:stretch>
@@ -13427,7 +13585,7 @@
           <p:cNvPr id="7" name="TextBox 7">
             <a:extLst xmlns:a="http://schemas.openxmlformats.org/drawingml/2006/main">
               <a:ext uri="{FF2B5EF4-FFF2-40B4-BE49-F238E27FC236}">
-                <a16:creationId xmlns:a16="http://schemas.microsoft.com/office/drawing/2014/main" id="{64E2F695-0595-438C-8F35-C3711186DF86}"/>
+                <a16:creationId xmlns:a16="http://schemas.microsoft.com/office/drawing/2014/main" id="{A152ED35-C196-4918-AC0C-188DBE26B235}"/>
               </a:ext>
             </a:extLst>
           </p:cNvPr>
@@ -13588,7 +13746,7 @@
           <p:cNvPr id="8" name="TextBox 8">
             <a:extLst xmlns:a="http://schemas.openxmlformats.org/drawingml/2006/main">
               <a:ext uri="{FF2B5EF4-FFF2-40B4-BE49-F238E27FC236}">
-                <a16:creationId xmlns:a16="http://schemas.microsoft.com/office/drawing/2014/main" id="{8A698D05-7585-454F-84E7-2A89F88E9A1B}"/>
+                <a16:creationId xmlns:a16="http://schemas.microsoft.com/office/drawing/2014/main" id="{C6B82643-BECB-4475-8717-2A356FEEAF5C}"/>
               </a:ext>
             </a:extLst>
           </p:cNvPr>
@@ -13642,7 +13800,7 @@
           <p:cNvPr id="9" name="TextBox 9">
             <a:extLst xmlns:a="http://schemas.openxmlformats.org/drawingml/2006/main">
               <a:ext uri="{FF2B5EF4-FFF2-40B4-BE49-F238E27FC236}">
-                <a16:creationId xmlns:a16="http://schemas.microsoft.com/office/drawing/2014/main" id="{5F41F07C-C3CD-48DA-ABDD-9693F29C315B}"/>
+                <a16:creationId xmlns:a16="http://schemas.microsoft.com/office/drawing/2014/main" id="{3F223F3B-6392-4E63-9D74-9D8D1C21BCCD}"/>
               </a:ext>
             </a:extLst>
           </p:cNvPr>
@@ -13694,7 +13852,7 @@
           <p:cNvPr id="10" name="TextBox 10">
             <a:extLst xmlns:a="http://schemas.openxmlformats.org/drawingml/2006/main">
               <a:ext uri="{FF2B5EF4-FFF2-40B4-BE49-F238E27FC236}">
-                <a16:creationId xmlns:a16="http://schemas.microsoft.com/office/drawing/2014/main" id="{044F83B2-ED29-4ECB-8541-07F4A1BFB724}"/>
+                <a16:creationId xmlns:a16="http://schemas.microsoft.com/office/drawing/2014/main" id="{21529C91-E416-4366-AA1D-5FAC1C539B85}"/>
               </a:ext>
             </a:extLst>
           </p:cNvPr>
@@ -13746,7 +13904,7 @@
           <p:cNvPr id="11" name="TextBox 11">
             <a:extLst xmlns:a="http://schemas.openxmlformats.org/drawingml/2006/main">
               <a:ext uri="{FF2B5EF4-FFF2-40B4-BE49-F238E27FC236}">
-                <a16:creationId xmlns:a16="http://schemas.microsoft.com/office/drawing/2014/main" id="{6C578F5E-D87B-4299-A268-95427D4456A0}"/>
+                <a16:creationId xmlns:a16="http://schemas.microsoft.com/office/drawing/2014/main" id="{D5C87AAB-3CC9-4E2C-961E-55A075DA3B9C}"/>
               </a:ext>
             </a:extLst>
           </p:cNvPr>
@@ -13798,7 +13956,7 @@
           <p:cNvPr id="12" name="Freeform 12">
             <a:extLst xmlns:a="http://schemas.openxmlformats.org/drawingml/2006/main">
               <a:ext uri="{FF2B5EF4-FFF2-40B4-BE49-F238E27FC236}">
-                <a16:creationId xmlns:a16="http://schemas.microsoft.com/office/drawing/2014/main" id="{9C73CABA-17DF-4BDF-B69E-921A386377A8}"/>
+                <a16:creationId xmlns:a16="http://schemas.microsoft.com/office/drawing/2014/main" id="{6AEA3541-E8C1-477E-8C3A-DE1492C5A278}"/>
               </a:ext>
             </a:extLst>
           </p:cNvPr>
@@ -13846,7 +14004,7 @@
           <p:cNvPr id="14" name="Freeform 14">
             <a:extLst xmlns:a="http://schemas.openxmlformats.org/drawingml/2006/main">
               <a:ext uri="{FF2B5EF4-FFF2-40B4-BE49-F238E27FC236}">
-                <a16:creationId xmlns:a16="http://schemas.microsoft.com/office/drawing/2014/main" id="{736FE7F3-AC23-45E5-A3A3-C02C3BC973B8}"/>
+                <a16:creationId xmlns:a16="http://schemas.microsoft.com/office/drawing/2014/main" id="{675E6342-834C-41D8-8522-3285ACB7FE0F}"/>
               </a:ext>
             </a:extLst>
           </p:cNvPr>
@@ -13891,7 +14049,7 @@
           <p:cNvPr id="15" name="Freeform 15">
             <a:extLst xmlns:a="http://schemas.openxmlformats.org/drawingml/2006/main">
               <a:ext uri="{FF2B5EF4-FFF2-40B4-BE49-F238E27FC236}">
-                <a16:creationId xmlns:a16="http://schemas.microsoft.com/office/drawing/2014/main" id="{0B2D9B28-89D1-41CB-8E70-070701F76767}"/>
+                <a16:creationId xmlns:a16="http://schemas.microsoft.com/office/drawing/2014/main" id="{831FE506-F381-438E-96AF-492408B7EABE}"/>
               </a:ext>
             </a:extLst>
           </p:cNvPr>
@@ -13939,7 +14097,7 @@
           <p:cNvPr id="17" name="Freeform 17">
             <a:extLst xmlns:a="http://schemas.openxmlformats.org/drawingml/2006/main">
               <a:ext uri="{FF2B5EF4-FFF2-40B4-BE49-F238E27FC236}">
-                <a16:creationId xmlns:a16="http://schemas.microsoft.com/office/drawing/2014/main" id="{13C3E550-0764-4D81-AA97-E99D5F701555}"/>
+                <a16:creationId xmlns:a16="http://schemas.microsoft.com/office/drawing/2014/main" id="{D661456B-66F8-4FF7-BF81-34CAA4917AF6}"/>
               </a:ext>
             </a:extLst>
           </p:cNvPr>
@@ -13984,7 +14142,7 @@
           <p:cNvPr id="18" name="內容_13_財務：投資與營運分開">
             <a:extLst xmlns:a="http://schemas.openxmlformats.org/drawingml/2006/main">
               <a:ext uri="{FF2B5EF4-FFF2-40B4-BE49-F238E27FC236}">
-                <a16:creationId xmlns:a16="http://schemas.microsoft.com/office/drawing/2014/main" id="{41174807-2412-4ABC-ABE3-4611415109D7}"/>
+                <a16:creationId xmlns:a16="http://schemas.microsoft.com/office/drawing/2014/main" id="{212AD8A8-DDAA-49C5-BB1F-D9588D0200CD}"/>
               </a:ext>
             </a:extLst>
           </p:cNvPr>
@@ -14142,7 +14300,7 @@
           <p:cNvPr id="19" name="內容_13_服務改善，仍無正向回收期">
             <a:extLst xmlns:a="http://schemas.openxmlformats.org/drawingml/2006/main">
               <a:ext uri="{FF2B5EF4-FFF2-40B4-BE49-F238E27FC236}">
-                <a16:creationId xmlns:a16="http://schemas.microsoft.com/office/drawing/2014/main" id="{0A0DC26B-6233-46F4-BF33-9897A7AA228D}"/>
+                <a16:creationId xmlns:a16="http://schemas.microsoft.com/office/drawing/2014/main" id="{5396E7FB-CA78-43FE-AA86-A6518BD09C7F}"/>
               </a:ext>
             </a:extLst>
           </p:cNvPr>
@@ -14300,7 +14458,7 @@
           <p:cNvPr id="20" name="">
             <a:extLst xmlns:a="http://schemas.openxmlformats.org/drawingml/2006/main">
               <a:ext uri="{FF2B5EF4-FFF2-40B4-BE49-F238E27FC236}">
-                <a16:creationId xmlns:a16="http://schemas.microsoft.com/office/drawing/2014/main" id="{57B78F5E-B1EB-4110-A043-1EC03A8E00D6}"/>
+                <a16:creationId xmlns:a16="http://schemas.microsoft.com/office/drawing/2014/main" id="{A6BBABA1-909F-4666-BA68-5DEDF1E0B201}"/>
               </a:ext>
             </a:extLst>
           </p:cNvPr>
@@ -14383,7 +14541,7 @@
                           <a:ea typeface="Microsoft JhengHei"/>
                           <a:cs typeface="Microsoft JhengHei"/>
                         </a:rPr>
-                        <a:t>P4 8m</a:t>
+                        <a:t>備選：聯合8公尺</a:t>
                       </a:r>
                     </a:p>
                   </a:txBody>
@@ -14425,7 +14583,7 @@
                           <a:ea typeface="Microsoft JhengHei"/>
                           <a:cs typeface="Microsoft JhengHei"/>
                         </a:rPr>
-                        <a:t>P4 12m</a:t>
+                        <a:t>主推：聯合12公尺</a:t>
                       </a:r>
                     </a:p>
                   </a:txBody>
@@ -14469,7 +14627,7 @@
                           <a:ea typeface="Microsoft JhengHei"/>
                           <a:cs typeface="Microsoft JhengHei"/>
                         </a:rPr>
-                        <a:t>初始投資 NT$</a:t>
+                        <a:t>初始投資（元）</a:t>
                       </a:r>
                     </a:p>
                   </a:txBody>
@@ -14585,7 +14743,7 @@
                           <a:ea typeface="Microsoft JhengHei"/>
                           <a:cs typeface="Microsoft JhengHei"/>
                         </a:rPr>
-                        <a:t>相較P1少投資 NT$</a:t>
+                        <a:t>比第二台洗機少投資（元）</a:t>
                       </a:r>
                     </a:p>
                   </a:txBody>
@@ -14701,7 +14859,7 @@
                           <a:ea typeface="Microsoft JhengHei"/>
                           <a:cs typeface="Microsoft JhengHei"/>
                         </a:rPr>
-                        <a:t>相較P0年淨效益 NT$</a:t>
+                        <a:t>比現況年淨效益（元）</a:t>
                       </a:r>
                     </a:p>
                   </a:txBody>
@@ -14817,7 +14975,7 @@
                           <a:ea typeface="Microsoft JhengHei"/>
                           <a:cs typeface="Microsoft JhengHei"/>
                         </a:rPr>
-                        <a:t>ROI／正回收期</a:t>
+                        <a:t>投資報酬率／回收年限</a:t>
                       </a:r>
                     </a:p>
                   </a:txBody>
@@ -14924,10 +15082,10 @@
       </p:graphicFrame>
       <p:sp>
         <p:nvSpPr>
-          <p:cNvPr id="21" name="內容_13_主DOE 1350次的24h">
+          <p:cNvPr id="21" name="內容_13_主實驗 1350次的24小時">
             <a:extLst xmlns:a="http://schemas.openxmlformats.org/drawingml/2006/main">
               <a:ext uri="{FF2B5EF4-FFF2-40B4-BE49-F238E27FC236}">
-                <a16:creationId xmlns:a16="http://schemas.microsoft.com/office/drawing/2014/main" id="{DFABB30D-A389-4583-AF15-06F70A07C1BA}"/>
+                <a16:creationId xmlns:a16="http://schemas.microsoft.com/office/drawing/2014/main" id="{EE70BC91-5B8E-476A-813A-C2B599BD6B83}"/>
               </a:ext>
             </a:extLst>
           </p:cNvPr>
@@ -15075,7 +15233,7 @@
                 <a:ea typeface="Microsoft JhengHei"/>
                 <a:cs typeface="Microsoft JhengHei"/>
               </a:rPr>
-              <a:t>主DOE 1350次的24h損失全為0，沒有這項可省收益；12m包材節約39.17%仍未達65%。</a:t>
+              <a:t>主實驗 1350次的24小時損失全為0，沒有這項可省收益；12公尺包材節約39.17%仍未達65%。</a:t>
             </a:r>
           </a:p>
         </p:txBody>
@@ -15083,7 +15241,7 @@
     </p:spTree>
     <p:extLst>
       <p:ext uri="{BB962C8B-B14F-4D97-AF65-F5344CB8AC3E}">
-        <p14:creationId xmlns:p14="http://schemas.microsoft.com/office/powerpoint/2010/main" val="2106599658"/>
+        <p14:creationId xmlns:p14="http://schemas.microsoft.com/office/powerpoint/2010/main" val="277658480"/>
       </p:ext>
     </p:extLst>
   </p:cSld>
@@ -15107,7 +15265,7 @@
           <p:cNvPr id="2" name="Freeform 2">
             <a:extLst xmlns:a="http://schemas.openxmlformats.org/drawingml/2006/main">
               <a:ext uri="{FF2B5EF4-FFF2-40B4-BE49-F238E27FC236}">
-                <a16:creationId xmlns:a16="http://schemas.microsoft.com/office/drawing/2014/main" id="{0A020D21-AD75-4EDE-80E4-FB3BB1729CE1}"/>
+                <a16:creationId xmlns:a16="http://schemas.microsoft.com/office/drawing/2014/main" id="{F286B556-3F8A-4564-A878-0695E56CCD59}"/>
               </a:ext>
             </a:extLst>
           </p:cNvPr>
@@ -15145,7 +15303,7 @@
             </a:pathLst>
           </a:custGeom>
           <a:blipFill xmlns:a="http://schemas.openxmlformats.org/drawingml/2006/main">
-            <a:blip xmlns:r="http://schemas.openxmlformats.org/officeDocument/2006/relationships" r:embed="R23b8073343dc4d4e"/>
+            <a:blip xmlns:r="http://schemas.openxmlformats.org/officeDocument/2006/relationships" r:embed="R184db7cb9690440f"/>
             <a:stretch>
               <a:fillRect l="-35258" t="-5555" r="-24931" b="-72434"/>
             </a:stretch>
@@ -15157,7 +15315,7 @@
           <p:cNvPr id="4" name="Freeform 4">
             <a:extLst xmlns:a="http://schemas.openxmlformats.org/drawingml/2006/main">
               <a:ext uri="{FF2B5EF4-FFF2-40B4-BE49-F238E27FC236}">
-                <a16:creationId xmlns:a16="http://schemas.microsoft.com/office/drawing/2014/main" id="{9D6FE33E-1638-46AC-8698-CCFB95CF7E05}"/>
+                <a16:creationId xmlns:a16="http://schemas.microsoft.com/office/drawing/2014/main" id="{073B9B98-D47F-4F45-AEFF-0B478B039D13}"/>
               </a:ext>
             </a:extLst>
           </p:cNvPr>
@@ -15231,7 +15389,7 @@
           <p:cNvPr id="5" name="TextBox 5">
             <a:extLst xmlns:a="http://schemas.openxmlformats.org/drawingml/2006/main">
               <a:ext uri="{FF2B5EF4-FFF2-40B4-BE49-F238E27FC236}">
-                <a16:creationId xmlns:a16="http://schemas.microsoft.com/office/drawing/2014/main" id="{3BBED81B-CA89-4D29-AD0B-9493BA929BE6}"/>
+                <a16:creationId xmlns:a16="http://schemas.microsoft.com/office/drawing/2014/main" id="{2539E50A-DB16-4A86-AC34-D7AC3C3A97EC}"/>
               </a:ext>
             </a:extLst>
           </p:cNvPr>
@@ -15267,7 +15425,7 @@
           <p:cNvPr id="6" name="Freeform 6">
             <a:extLst xmlns:a="http://schemas.openxmlformats.org/drawingml/2006/main">
               <a:ext uri="{FF2B5EF4-FFF2-40B4-BE49-F238E27FC236}">
-                <a16:creationId xmlns:a16="http://schemas.microsoft.com/office/drawing/2014/main" id="{BCD2E62B-4AD3-4E0B-85F7-7874AA9B6298}"/>
+                <a16:creationId xmlns:a16="http://schemas.microsoft.com/office/drawing/2014/main" id="{5F55F929-1E20-43BB-AEDB-5978B06C4E93}"/>
               </a:ext>
             </a:extLst>
           </p:cNvPr>
@@ -15305,7 +15463,7 @@
             </a:pathLst>
           </a:custGeom>
           <a:blipFill xmlns:a="http://schemas.openxmlformats.org/drawingml/2006/main">
-            <a:blip xmlns:r="http://schemas.openxmlformats.org/officeDocument/2006/relationships" r:embed="Rc54888d5909542ed"/>
+            <a:blip xmlns:r="http://schemas.openxmlformats.org/officeDocument/2006/relationships" r:embed="R8349cc93021648d4"/>
             <a:stretch>
               <a:fillRect l="0" t="0" r="0" b="0"/>
             </a:stretch>
@@ -15317,7 +15475,7 @@
           <p:cNvPr id="7" name="Freeform 7">
             <a:extLst xmlns:a="http://schemas.openxmlformats.org/drawingml/2006/main">
               <a:ext uri="{FF2B5EF4-FFF2-40B4-BE49-F238E27FC236}">
-                <a16:creationId xmlns:a16="http://schemas.microsoft.com/office/drawing/2014/main" id="{4C67DA7B-F5A3-4790-9CD7-53F02C3BB363}"/>
+                <a16:creationId xmlns:a16="http://schemas.microsoft.com/office/drawing/2014/main" id="{91960055-FD3C-491E-8173-1AA8084F3E27}"/>
               </a:ext>
             </a:extLst>
           </p:cNvPr>
@@ -15365,7 +15523,7 @@
           <p:cNvPr id="8" name="TextBox 8">
             <a:extLst xmlns:a="http://schemas.openxmlformats.org/drawingml/2006/main">
               <a:ext uri="{FF2B5EF4-FFF2-40B4-BE49-F238E27FC236}">
-                <a16:creationId xmlns:a16="http://schemas.microsoft.com/office/drawing/2014/main" id="{5568C830-6EB4-4C19-886A-D871E39E2C26}"/>
+                <a16:creationId xmlns:a16="http://schemas.microsoft.com/office/drawing/2014/main" id="{16D12D85-F5CF-4837-B4EA-DFD9C6766D16}"/>
               </a:ext>
             </a:extLst>
           </p:cNvPr>
@@ -15526,7 +15684,7 @@
           <p:cNvPr id="9" name="TextBox 9">
             <a:extLst xmlns:a="http://schemas.openxmlformats.org/drawingml/2006/main">
               <a:ext uri="{FF2B5EF4-FFF2-40B4-BE49-F238E27FC236}">
-                <a16:creationId xmlns:a16="http://schemas.microsoft.com/office/drawing/2014/main" id="{1B611BE2-2B38-4E11-B569-6D9D3D0B7441}"/>
+                <a16:creationId xmlns:a16="http://schemas.microsoft.com/office/drawing/2014/main" id="{BC5F5482-FB0A-49DE-A3A1-01DEB43B5CF5}"/>
               </a:ext>
             </a:extLst>
           </p:cNvPr>
@@ -15580,7 +15738,7 @@
           <p:cNvPr id="10" name="TextBox 10">
             <a:extLst xmlns:a="http://schemas.openxmlformats.org/drawingml/2006/main">
               <a:ext uri="{FF2B5EF4-FFF2-40B4-BE49-F238E27FC236}">
-                <a16:creationId xmlns:a16="http://schemas.microsoft.com/office/drawing/2014/main" id="{C089F927-8849-43EE-9F58-9CBC63723FEE}"/>
+                <a16:creationId xmlns:a16="http://schemas.microsoft.com/office/drawing/2014/main" id="{3A6918FF-828C-4F2E-A699-EF3F28F09CD5}"/>
               </a:ext>
             </a:extLst>
           </p:cNvPr>
@@ -15632,7 +15790,7 @@
           <p:cNvPr id="11" name="TextBox 11">
             <a:extLst xmlns:a="http://schemas.openxmlformats.org/drawingml/2006/main">
               <a:ext uri="{FF2B5EF4-FFF2-40B4-BE49-F238E27FC236}">
-                <a16:creationId xmlns:a16="http://schemas.microsoft.com/office/drawing/2014/main" id="{00C27C7B-56AD-4939-A5EC-EDBB2FAA9E9A}"/>
+                <a16:creationId xmlns:a16="http://schemas.microsoft.com/office/drawing/2014/main" id="{672F772C-C06D-4142-9178-D1FFFB286144}"/>
               </a:ext>
             </a:extLst>
           </p:cNvPr>
@@ -15684,7 +15842,7 @@
           <p:cNvPr id="12" name="TextBox 12">
             <a:extLst xmlns:a="http://schemas.openxmlformats.org/drawingml/2006/main">
               <a:ext uri="{FF2B5EF4-FFF2-40B4-BE49-F238E27FC236}">
-                <a16:creationId xmlns:a16="http://schemas.microsoft.com/office/drawing/2014/main" id="{02D0888C-89A3-4E05-9142-CF788B360A29}"/>
+                <a16:creationId xmlns:a16="http://schemas.microsoft.com/office/drawing/2014/main" id="{2277C1F5-FE36-4FE0-9A46-6FC8EF3EFEC0}"/>
               </a:ext>
             </a:extLst>
           </p:cNvPr>
@@ -15736,7 +15894,7 @@
           <p:cNvPr id="13" name="Freeform 13">
             <a:extLst xmlns:a="http://schemas.openxmlformats.org/drawingml/2006/main">
               <a:ext uri="{FF2B5EF4-FFF2-40B4-BE49-F238E27FC236}">
-                <a16:creationId xmlns:a16="http://schemas.microsoft.com/office/drawing/2014/main" id="{E32E8112-0768-41C7-8EDB-2E893AE31449}"/>
+                <a16:creationId xmlns:a16="http://schemas.microsoft.com/office/drawing/2014/main" id="{B26DE0E6-7375-43C1-A0FC-2CE3DB0C019E}"/>
               </a:ext>
             </a:extLst>
           </p:cNvPr>
@@ -15784,7 +15942,7 @@
           <p:cNvPr id="14" name="內容_14_展示：指標要可比較">
             <a:extLst xmlns:a="http://schemas.openxmlformats.org/drawingml/2006/main">
               <a:ext uri="{FF2B5EF4-FFF2-40B4-BE49-F238E27FC236}">
-                <a16:creationId xmlns:a16="http://schemas.microsoft.com/office/drawing/2014/main" id="{063E9AFE-D049-473C-8CAE-A22AFC9EA1F4}"/>
+                <a16:creationId xmlns:a16="http://schemas.microsoft.com/office/drawing/2014/main" id="{7ABAFD0A-2090-4F26-9957-FE7F5E463D00}"/>
               </a:ext>
             </a:extLst>
           </p:cNvPr>
@@ -15942,7 +16100,7 @@
           <p:cNvPr id="15" name="內容_14_設備占比熱圖，取代含糊著色">
             <a:extLst xmlns:a="http://schemas.openxmlformats.org/drawingml/2006/main">
               <a:ext uri="{FF2B5EF4-FFF2-40B4-BE49-F238E27FC236}">
-                <a16:creationId xmlns:a16="http://schemas.microsoft.com/office/drawing/2014/main" id="{C8937D6A-B940-46BA-84C1-C22DA7411429}"/>
+                <a16:creationId xmlns:a16="http://schemas.microsoft.com/office/drawing/2014/main" id="{2FD07968-1A6C-4579-8BC4-B51025C96847}"/>
               </a:ext>
             </a:extLst>
           </p:cNvPr>
@@ -16095,12 +16253,170 @@
           </a:p>
         </p:txBody>
       </p:sp>
+      <p:sp>
+        <p:nvSpPr>
+          <p:cNvPr id="16" name="內容_14_前＝改善前現況；後＝12公尺">
+            <a:extLst xmlns:a="http://schemas.openxmlformats.org/drawingml/2006/main">
+              <a:ext uri="{FF2B5EF4-FFF2-40B4-BE49-F238E27FC236}">
+                <a16:creationId xmlns:a16="http://schemas.microsoft.com/office/drawing/2014/main" id="{6288EE56-46E6-4F7A-9B3D-E726370C48BB}"/>
+              </a:ext>
+            </a:extLst>
+          </p:cNvPr>
+          <p:cNvSpPr>
+            <a:spLocks xmlns:a="http://schemas.openxmlformats.org/drawingml/2006/main" noGrp="1"/>
+          </p:cNvSpPr>
+          <p:nvPr/>
+        </p:nvSpPr>
+        <p:spPr>
+          <a:xfrm xmlns:a="http://schemas.openxmlformats.org/drawingml/2006/main">
+            <a:off x="1581150" y="4000500"/>
+            <a:ext cx="10001250" cy="333375"/>
+          </a:xfrm>
+          <a:prstGeom xmlns:a="http://schemas.openxmlformats.org/drawingml/2006/main" prst="rect">
+            <a:avLst/>
+          </a:prstGeom>
+          <a:noFill xmlns:a="http://schemas.openxmlformats.org/drawingml/2006/main"/>
+          <a:ln xmlns:a="http://schemas.openxmlformats.org/drawingml/2006/main" w="0">
+            <a:noFill/>
+          </a:ln>
+        </p:spPr>
+        <p:txBody>
+          <a:bodyPr xmlns:a="http://schemas.openxmlformats.org/drawingml/2006/main" wrap="square" lIns="0" tIns="0" rIns="0" bIns="0">
+            <a:noAutofit/>
+          </a:bodyPr>
+          <a:lstStyle xmlns:a="http://schemas.openxmlformats.org/drawingml/2006/main">
+            <a:defPPr>
+              <a:defRPr sz="1500" b="0">
+                <a:solidFill>
+                  <a:srgbClr val="92A6DD"/>
+                </a:solidFill>
+                <a:latin typeface="Microsoft JhengHei"/>
+                <a:ea typeface="Microsoft JhengHei"/>
+                <a:cs typeface="Microsoft JhengHei"/>
+              </a:defRPr>
+            </a:defPPr>
+            <a:lvl1pPr>
+              <a:defRPr sz="1500" b="0">
+                <a:solidFill>
+                  <a:srgbClr val="92A6DD"/>
+                </a:solidFill>
+                <a:latin typeface="Microsoft JhengHei"/>
+                <a:ea typeface="Microsoft JhengHei"/>
+                <a:cs typeface="Microsoft JhengHei"/>
+              </a:defRPr>
+            </a:lvl1pPr>
+            <a:lvl2pPr>
+              <a:defRPr sz="1500" b="0">
+                <a:solidFill>
+                  <a:srgbClr val="92A6DD"/>
+                </a:solidFill>
+                <a:latin typeface="Microsoft JhengHei"/>
+                <a:ea typeface="Microsoft JhengHei"/>
+                <a:cs typeface="Microsoft JhengHei"/>
+              </a:defRPr>
+            </a:lvl2pPr>
+            <a:lvl3pPr>
+              <a:defRPr sz="1500" b="0">
+                <a:solidFill>
+                  <a:srgbClr val="92A6DD"/>
+                </a:solidFill>
+                <a:latin typeface="Microsoft JhengHei"/>
+                <a:ea typeface="Microsoft JhengHei"/>
+                <a:cs typeface="Microsoft JhengHei"/>
+              </a:defRPr>
+            </a:lvl3pPr>
+            <a:lvl4pPr>
+              <a:defRPr sz="1500" b="0">
+                <a:solidFill>
+                  <a:srgbClr val="92A6DD"/>
+                </a:solidFill>
+                <a:latin typeface="Microsoft JhengHei"/>
+                <a:ea typeface="Microsoft JhengHei"/>
+                <a:cs typeface="Microsoft JhengHei"/>
+              </a:defRPr>
+            </a:lvl4pPr>
+            <a:lvl5pPr>
+              <a:defRPr sz="1500" b="0">
+                <a:solidFill>
+                  <a:srgbClr val="92A6DD"/>
+                </a:solidFill>
+                <a:latin typeface="Microsoft JhengHei"/>
+                <a:ea typeface="Microsoft JhengHei"/>
+                <a:cs typeface="Microsoft JhengHei"/>
+              </a:defRPr>
+            </a:lvl5pPr>
+            <a:lvl6pPr>
+              <a:defRPr sz="1500" b="0">
+                <a:solidFill>
+                  <a:srgbClr val="92A6DD"/>
+                </a:solidFill>
+                <a:latin typeface="Microsoft JhengHei"/>
+                <a:ea typeface="Microsoft JhengHei"/>
+                <a:cs typeface="Microsoft JhengHei"/>
+              </a:defRPr>
+            </a:lvl6pPr>
+            <a:lvl7pPr>
+              <a:defRPr sz="1500" b="0">
+                <a:solidFill>
+                  <a:srgbClr val="92A6DD"/>
+                </a:solidFill>
+                <a:latin typeface="Microsoft JhengHei"/>
+                <a:ea typeface="Microsoft JhengHei"/>
+                <a:cs typeface="Microsoft JhengHei"/>
+              </a:defRPr>
+            </a:lvl7pPr>
+            <a:lvl8pPr>
+              <a:defRPr sz="1500" b="0">
+                <a:solidFill>
+                  <a:srgbClr val="92A6DD"/>
+                </a:solidFill>
+                <a:latin typeface="Microsoft JhengHei"/>
+                <a:ea typeface="Microsoft JhengHei"/>
+                <a:cs typeface="Microsoft JhengHei"/>
+              </a:defRPr>
+            </a:lvl8pPr>
+            <a:lvl9pPr>
+              <a:defRPr sz="1500" b="0">
+                <a:solidFill>
+                  <a:srgbClr val="92A6DD"/>
+                </a:solidFill>
+                <a:latin typeface="Microsoft JhengHei"/>
+                <a:ea typeface="Microsoft JhengHei"/>
+                <a:cs typeface="Microsoft JhengHei"/>
+              </a:defRPr>
+            </a:lvl9pPr>
+          </a:lstStyle>
+          <a:p xmlns:a="http://schemas.openxmlformats.org/drawingml/2006/main">
+            <a:pPr>
+              <a:defRPr sz="1500" b="0">
+                <a:solidFill>
+                  <a:srgbClr val="92A6DD"/>
+                </a:solidFill>
+                <a:latin typeface="Microsoft JhengHei"/>
+                <a:ea typeface="Microsoft JhengHei"/>
+                <a:cs typeface="Microsoft JhengHei"/>
+              </a:defRPr>
+            </a:pPr>
+            <a:r>
+              <a:rPr sz="1500" b="0">
+                <a:solidFill>
+                  <a:srgbClr val="92A6DD"/>
+                </a:solidFill>
+                <a:latin typeface="Microsoft JhengHei"/>
+                <a:ea typeface="Microsoft JhengHei"/>
+                <a:cs typeface="Microsoft JhengHei"/>
+              </a:rPr>
+              <a:t>前＝改善前現況；後＝12公尺聯合改善。加工指工作中，阻塞指下游不接收。</a:t>
+            </a:r>
+          </a:p>
+        </p:txBody>
+      </p:sp>
       <p:graphicFrame>
         <p:nvGraphicFramePr>
-          <p:cNvPr id="16" name="">
+          <p:cNvPr id="17" name="">
             <a:extLst xmlns:a="http://schemas.openxmlformats.org/drawingml/2006/main">
               <a:ext uri="{FF2B5EF4-FFF2-40B4-BE49-F238E27FC236}">
-                <a16:creationId xmlns:a16="http://schemas.microsoft.com/office/drawing/2014/main" id="{AFC84ED5-8F4E-40DA-833B-72283423DDE7}"/>
+                <a16:creationId xmlns:a16="http://schemas.microsoft.com/office/drawing/2014/main" id="{60606812-DC57-4D00-A080-F86408A1F7A3}"/>
               </a:ext>
             </a:extLst>
           </p:cNvPr>
@@ -16272,7 +16588,7 @@
                           <a:ea typeface="Microsoft JhengHei"/>
                           <a:cs typeface="Microsoft JhengHei"/>
                         </a:rPr>
-                        <a:t>QA</a:t>
+                        <a:t>品質檢查</a:t>
                       </a:r>
                     </a:p>
                   </a:txBody>
@@ -16314,7 +16630,7 @@
                           <a:ea typeface="Microsoft JhengHei"/>
                           <a:cs typeface="Microsoft JhengHei"/>
                         </a:rPr>
-                        <a:t>B1</a:t>
+                        <a:t>整新一站</a:t>
                       </a:r>
                     </a:p>
                   </a:txBody>
@@ -16356,7 +16672,7 @@
                           <a:ea typeface="Microsoft JhengHei"/>
                           <a:cs typeface="Microsoft JhengHei"/>
                         </a:rPr>
-                        <a:t>B2</a:t>
+                        <a:t>整新二站</a:t>
                       </a:r>
                     </a:p>
                   </a:txBody>
@@ -16398,7 +16714,7 @@
                           <a:ea typeface="Microsoft JhengHei"/>
                           <a:cs typeface="Microsoft JhengHei"/>
                         </a:rPr>
-                        <a:t>A</a:t>
+                        <a:t>A級整理</a:t>
                       </a:r>
                     </a:p>
                   </a:txBody>
@@ -16440,7 +16756,7 @@
                           <a:ea typeface="Microsoft JhengHei"/>
                           <a:cs typeface="Microsoft JhengHei"/>
                         </a:rPr>
-                        <a:t>C</a:t>
+                        <a:t>報廢站</a:t>
                       </a:r>
                     </a:p>
                   </a:txBody>
@@ -17659,10 +17975,10 @@
       </p:graphicFrame>
       <p:sp>
         <p:nvSpPr>
-          <p:cNvPr id="17" name="內容_14_加工色階0–100%；阻塞色">
+          <p:cNvPr id="18" name="內容_14_加工色階0–100%；阻塞色">
             <a:extLst xmlns:a="http://schemas.openxmlformats.org/drawingml/2006/main">
               <a:ext uri="{FF2B5EF4-FFF2-40B4-BE49-F238E27FC236}">
-                <a16:creationId xmlns:a16="http://schemas.microsoft.com/office/drawing/2014/main" id="{95111E9A-9291-40D0-B10C-1D84A3BAD014}"/>
+                <a16:creationId xmlns:a16="http://schemas.microsoft.com/office/drawing/2014/main" id="{80A69E4F-6549-44F5-B674-5DB2C9C85E9F}"/>
               </a:ext>
             </a:extLst>
           </p:cNvPr>
@@ -17833,17 +18149,17 @@
                 <a:ea typeface="Microsoft JhengHei"/>
                 <a:cs typeface="Microsoft JhengHei"/>
               </a:rPr>
-              <a:t>同seed101、同116100秒的累計占比。</a:t>
+              <a:t>同隨機種子101、同116100秒的累計占比。</a:t>
             </a:r>
           </a:p>
         </p:txBody>
       </p:sp>
       <p:sp>
         <p:nvSpPr>
-          <p:cNvPr id="18" name="內容_14_原生WIP／清洗狀態">
+          <p:cNvPr id="19" name="內容_14_在製量趨勢／清洗狀態">
             <a:extLst xmlns:a="http://schemas.openxmlformats.org/drawingml/2006/main">
               <a:ext uri="{FF2B5EF4-FFF2-40B4-BE49-F238E27FC236}">
-                <a16:creationId xmlns:a16="http://schemas.microsoft.com/office/drawing/2014/main" id="{F88768E1-2B6F-436F-B331-142CD8E98C8C}"/>
+                <a16:creationId xmlns:a16="http://schemas.microsoft.com/office/drawing/2014/main" id="{1B8CBFBC-F061-4894-9E38-7303269EBB89}"/>
               </a:ext>
             </a:extLst>
           </p:cNvPr>
@@ -17991,17 +18307,17 @@
                 <a:ea typeface="Microsoft JhengHei"/>
                 <a:cs typeface="Microsoft JhengHei"/>
               </a:rPr>
-              <a:t>原生WIP／清洗狀態</a:t>
+              <a:t>在製量趨勢／清洗狀態</a:t>
             </a:r>
           </a:p>
         </p:txBody>
       </p:sp>
       <p:pic>
         <p:nvPicPr>
-          <p:cNvPr id="19" name="">
+          <p:cNvPr id="20" name="">
             <a:extLst xmlns:a="http://schemas.openxmlformats.org/drawingml/2006/main">
               <a:ext uri="{FF2B5EF4-FFF2-40B4-BE49-F238E27FC236}">
-                <a16:creationId xmlns:a16="http://schemas.microsoft.com/office/drawing/2014/main" id="{240A6412-B0A0-48F9-A9D2-39E67B04A910}"/>
+                <a16:creationId xmlns:a16="http://schemas.microsoft.com/office/drawing/2014/main" id="{ACA38DB3-FE76-458E-9155-92D91A17C55F}"/>
               </a:ext>
             </a:extLst>
           </p:cNvPr>
@@ -18011,7 +18327,7 @@
           <p:nvPr/>
         </p:nvPicPr>
         <p:blipFill>
-          <a:blip xmlns:r="http://schemas.openxmlformats.org/officeDocument/2006/relationships" xmlns:a="http://schemas.openxmlformats.org/drawingml/2006/main" r:embed="Rb8c34b6ed9154941"/>
+          <a:blip xmlns:r="http://schemas.openxmlformats.org/officeDocument/2006/relationships" xmlns:a="http://schemas.openxmlformats.org/drawingml/2006/main" r:embed="R7a6d87b3ac9b414d"/>
           <a:srcRect xmlns:a="http://schemas.openxmlformats.org/drawingml/2006/main" l="0" t="53500" r="10000" b="7000"/>
           <a:stretch xmlns:a="http://schemas.openxmlformats.org/drawingml/2006/main"/>
         </p:blipFill>
@@ -18027,10 +18343,10 @@
       </p:pic>
       <p:sp>
         <p:nvSpPr>
-          <p:cNvPr id="20" name="內容_14_3D圖改稱設備績效著色截圖。">
+          <p:cNvPr id="21" name="內容_14_3D圖改稱設備績效著色截圖。">
             <a:extLst xmlns:a="http://schemas.openxmlformats.org/drawingml/2006/main">
               <a:ext uri="{FF2B5EF4-FFF2-40B4-BE49-F238E27FC236}">
-                <a16:creationId xmlns:a16="http://schemas.microsoft.com/office/drawing/2014/main" id="{156E2E9F-59DE-4083-9C64-A6CFCE2937DC}"/>
+                <a16:creationId xmlns:a16="http://schemas.microsoft.com/office/drawing/2014/main" id="{1577E2E4-55AB-46F2-B3C0-F1C2683EDD32}"/>
               </a:ext>
             </a:extLst>
           </p:cNvPr>
@@ -18186,7 +18502,7 @@
     </p:spTree>
     <p:extLst>
       <p:ext uri="{BB962C8B-B14F-4D97-AF65-F5344CB8AC3E}">
-        <p14:creationId xmlns:p14="http://schemas.microsoft.com/office/powerpoint/2010/main" val="1280494973"/>
+        <p14:creationId xmlns:p14="http://schemas.microsoft.com/office/powerpoint/2010/main" val="442984991"/>
       </p:ext>
     </p:extLst>
   </p:cSld>
@@ -18210,7 +18526,7 @@
           <p:cNvPr id="2" name="Freeform 2">
             <a:extLst xmlns:a="http://schemas.openxmlformats.org/drawingml/2006/main">
               <a:ext uri="{FF2B5EF4-FFF2-40B4-BE49-F238E27FC236}">
-                <a16:creationId xmlns:a16="http://schemas.microsoft.com/office/drawing/2014/main" id="{0A844A29-D955-40AD-B71F-FE7C2F8F216A}"/>
+                <a16:creationId xmlns:a16="http://schemas.microsoft.com/office/drawing/2014/main" id="{2D5FACE5-6670-48F5-B43A-2E23C4BD552F}"/>
               </a:ext>
             </a:extLst>
           </p:cNvPr>
@@ -18248,7 +18564,7 @@
             </a:pathLst>
           </a:custGeom>
           <a:blipFill xmlns:a="http://schemas.openxmlformats.org/drawingml/2006/main">
-            <a:blip xmlns:r="http://schemas.openxmlformats.org/officeDocument/2006/relationships" r:embed="R22a8eff4e05b4003"/>
+            <a:blip xmlns:r="http://schemas.openxmlformats.org/officeDocument/2006/relationships" r:embed="Rc72495e3b99b4fb2"/>
             <a:stretch>
               <a:fillRect l="-4156" t="0" r="-2479" b="-18484"/>
             </a:stretch>
@@ -18260,7 +18576,7 @@
           <p:cNvPr id="3" name="Freeform 3">
             <a:extLst xmlns:a="http://schemas.openxmlformats.org/drawingml/2006/main">
               <a:ext uri="{FF2B5EF4-FFF2-40B4-BE49-F238E27FC236}">
-                <a16:creationId xmlns:a16="http://schemas.microsoft.com/office/drawing/2014/main" id="{F63A7370-06C3-46D7-84F3-3A2C370EC309}"/>
+                <a16:creationId xmlns:a16="http://schemas.microsoft.com/office/drawing/2014/main" id="{0C8077D4-1B1E-4B56-B6D2-0135C89E2482}"/>
               </a:ext>
             </a:extLst>
           </p:cNvPr>
@@ -18298,7 +18614,7 @@
             </a:pathLst>
           </a:custGeom>
           <a:blipFill xmlns:a="http://schemas.openxmlformats.org/drawingml/2006/main">
-            <a:blip xmlns:r="http://schemas.openxmlformats.org/officeDocument/2006/relationships" r:embed="Re2c8dcafdd244e8a"/>
+            <a:blip xmlns:r="http://schemas.openxmlformats.org/officeDocument/2006/relationships" r:embed="R407d394364414af7"/>
             <a:stretch>
               <a:fillRect l="0" t="0" r="0" b="0"/>
             </a:stretch>
@@ -18310,7 +18626,7 @@
           <p:cNvPr id="5" name="Freeform 5">
             <a:extLst xmlns:a="http://schemas.openxmlformats.org/drawingml/2006/main">
               <a:ext uri="{FF2B5EF4-FFF2-40B4-BE49-F238E27FC236}">
-                <a16:creationId xmlns:a16="http://schemas.microsoft.com/office/drawing/2014/main" id="{B0512939-0966-4AB4-A0A4-ACB6A06BEEAC}"/>
+                <a16:creationId xmlns:a16="http://schemas.microsoft.com/office/drawing/2014/main" id="{A60E0CA1-8C2F-41B4-921D-60889A1AD1E5}"/>
               </a:ext>
             </a:extLst>
           </p:cNvPr>
@@ -18384,7 +18700,7 @@
           <p:cNvPr id="6" name="TextBox 6">
             <a:extLst xmlns:a="http://schemas.openxmlformats.org/drawingml/2006/main">
               <a:ext uri="{FF2B5EF4-FFF2-40B4-BE49-F238E27FC236}">
-                <a16:creationId xmlns:a16="http://schemas.microsoft.com/office/drawing/2014/main" id="{A76C60C3-9CE9-4ADE-B523-556D5B437538}"/>
+                <a16:creationId xmlns:a16="http://schemas.microsoft.com/office/drawing/2014/main" id="{8440F016-432A-431C-AC7E-7FEA03F429DB}"/>
               </a:ext>
             </a:extLst>
           </p:cNvPr>
@@ -18420,7 +18736,7 @@
           <p:cNvPr id="7" name="Freeform 7">
             <a:extLst xmlns:a="http://schemas.openxmlformats.org/drawingml/2006/main">
               <a:ext uri="{FF2B5EF4-FFF2-40B4-BE49-F238E27FC236}">
-                <a16:creationId xmlns:a16="http://schemas.microsoft.com/office/drawing/2014/main" id="{F9357378-30BA-42F2-9E80-85B9DB3F7921}"/>
+                <a16:creationId xmlns:a16="http://schemas.microsoft.com/office/drawing/2014/main" id="{A1537AC8-6F1A-4F1E-8A6B-26D8034B734A}"/>
               </a:ext>
             </a:extLst>
           </p:cNvPr>
@@ -18468,7 +18784,7 @@
           <p:cNvPr id="8" name="TextBox 8">
             <a:extLst xmlns:a="http://schemas.openxmlformats.org/drawingml/2006/main">
               <a:ext uri="{FF2B5EF4-FFF2-40B4-BE49-F238E27FC236}">
-                <a16:creationId xmlns:a16="http://schemas.microsoft.com/office/drawing/2014/main" id="{C036746B-AFD6-4AE3-B95A-91108428821F}"/>
+                <a16:creationId xmlns:a16="http://schemas.microsoft.com/office/drawing/2014/main" id="{8399903F-D560-4C06-BAC7-304AB104891E}"/>
               </a:ext>
             </a:extLst>
           </p:cNvPr>
@@ -18522,7 +18838,7 @@
           <p:cNvPr id="9" name="TextBox 9">
             <a:extLst xmlns:a="http://schemas.openxmlformats.org/drawingml/2006/main">
               <a:ext uri="{FF2B5EF4-FFF2-40B4-BE49-F238E27FC236}">
-                <a16:creationId xmlns:a16="http://schemas.microsoft.com/office/drawing/2014/main" id="{FDAA9227-9D69-4ABB-B98D-A93B8281A714}"/>
+                <a16:creationId xmlns:a16="http://schemas.microsoft.com/office/drawing/2014/main" id="{B3E1DBB0-9F2A-40FB-81C6-6ADA6DE37196}"/>
               </a:ext>
             </a:extLst>
           </p:cNvPr>
@@ -18574,7 +18890,7 @@
           <p:cNvPr id="10" name="TextBox 10">
             <a:extLst xmlns:a="http://schemas.openxmlformats.org/drawingml/2006/main">
               <a:ext uri="{FF2B5EF4-FFF2-40B4-BE49-F238E27FC236}">
-                <a16:creationId xmlns:a16="http://schemas.microsoft.com/office/drawing/2014/main" id="{65621708-ADB0-490A-90A6-AAD8E84A2C4C}"/>
+                <a16:creationId xmlns:a16="http://schemas.microsoft.com/office/drawing/2014/main" id="{AC5C9941-9E2D-4CFF-9745-C2A7BE077BB4}"/>
               </a:ext>
             </a:extLst>
           </p:cNvPr>
@@ -18735,7 +19051,7 @@
           <p:cNvPr id="11" name="TextBox 11">
             <a:extLst xmlns:a="http://schemas.openxmlformats.org/drawingml/2006/main">
               <a:ext uri="{FF2B5EF4-FFF2-40B4-BE49-F238E27FC236}">
-                <a16:creationId xmlns:a16="http://schemas.microsoft.com/office/drawing/2014/main" id="{95BEBFF7-684C-4322-867D-43EC92D03A09}"/>
+                <a16:creationId xmlns:a16="http://schemas.microsoft.com/office/drawing/2014/main" id="{109F7638-170A-4277-AFD1-C26F1505D92D}"/>
               </a:ext>
             </a:extLst>
           </p:cNvPr>
@@ -18787,7 +19103,7 @@
           <p:cNvPr id="12" name="Freeform 12">
             <a:extLst xmlns:a="http://schemas.openxmlformats.org/drawingml/2006/main">
               <a:ext uri="{FF2B5EF4-FFF2-40B4-BE49-F238E27FC236}">
-                <a16:creationId xmlns:a16="http://schemas.microsoft.com/office/drawing/2014/main" id="{BCFD8879-E331-4C79-BFA3-9A18C94C8366}"/>
+                <a16:creationId xmlns:a16="http://schemas.microsoft.com/office/drawing/2014/main" id="{39403F6D-45CC-44CF-BAF0-CA7A84980B5B}"/>
               </a:ext>
             </a:extLst>
           </p:cNvPr>
@@ -18835,7 +19151,7 @@
           <p:cNvPr id="13" name="">
             <a:extLst xmlns:a="http://schemas.openxmlformats.org/drawingml/2006/main">
               <a:ext uri="{FF2B5EF4-FFF2-40B4-BE49-F238E27FC236}">
-                <a16:creationId xmlns:a16="http://schemas.microsoft.com/office/drawing/2014/main" id="{1F816827-B8B5-4BF1-893F-9FE94B2D4B39}"/>
+                <a16:creationId xmlns:a16="http://schemas.microsoft.com/office/drawing/2014/main" id="{E23364A6-FF07-4723-B850-F5ED53409CF6}"/>
               </a:ext>
             </a:extLst>
           </p:cNvPr>
@@ -18845,7 +19161,7 @@
           <p:nvPr/>
         </p:nvPicPr>
         <p:blipFill>
-          <a:blip xmlns:r="http://schemas.openxmlformats.org/officeDocument/2006/relationships" xmlns:a="http://schemas.openxmlformats.org/drawingml/2006/main" r:embed="R2fab50d5cb2d4f85"/>
+          <a:blip xmlns:r="http://schemas.openxmlformats.org/officeDocument/2006/relationships" xmlns:a="http://schemas.openxmlformats.org/drawingml/2006/main" r:embed="Rc98cad8c30f94f68"/>
           <a:srcRect xmlns:a="http://schemas.openxmlformats.org/drawingml/2006/main" l="21025" t="21025" r="0" b="0"/>
           <a:stretch xmlns:a="http://schemas.openxmlformats.org/drawingml/2006/main"/>
         </p:blipFill>
@@ -18861,10 +19177,10 @@
       </p:pic>
       <p:sp>
         <p:nvSpPr>
-          <p:cNvPr id="14" name="內容_15_主推P4 12m聯合控制">
+          <p:cNvPr id="14" name="內容_15_主推聯合改善＋12公尺緩衝">
             <a:extLst xmlns:a="http://schemas.openxmlformats.org/drawingml/2006/main">
               <a:ext uri="{FF2B5EF4-FFF2-40B4-BE49-F238E27FC236}">
-                <a16:creationId xmlns:a16="http://schemas.microsoft.com/office/drawing/2014/main" id="{4B72766E-8679-4B77-9398-222D4F40C3D8}"/>
+                <a16:creationId xmlns:a16="http://schemas.microsoft.com/office/drawing/2014/main" id="{3F639895-466F-492E-8568-A758798A35EC}"/>
               </a:ext>
             </a:extLst>
           </p:cNvPr>
@@ -18892,7 +19208,7 @@
           </a:bodyPr>
           <a:lstStyle xmlns:a="http://schemas.openxmlformats.org/drawingml/2006/main">
             <a:defPPr>
-              <a:defRPr sz="8400" b="1">
+              <a:defRPr sz="6600" b="1">
                 <a:solidFill>
                   <a:srgbClr val="F6E0F5"/>
                 </a:solidFill>
@@ -18902,7 +19218,7 @@
               </a:defRPr>
             </a:defPPr>
             <a:lvl1pPr>
-              <a:defRPr sz="8400" b="1">
+              <a:defRPr sz="6600" b="1">
                 <a:solidFill>
                   <a:srgbClr val="F6E0F5"/>
                 </a:solidFill>
@@ -18912,7 +19228,7 @@
               </a:defRPr>
             </a:lvl1pPr>
             <a:lvl2pPr>
-              <a:defRPr sz="8400" b="1">
+              <a:defRPr sz="6600" b="1">
                 <a:solidFill>
                   <a:srgbClr val="F6E0F5"/>
                 </a:solidFill>
@@ -18922,7 +19238,7 @@
               </a:defRPr>
             </a:lvl2pPr>
             <a:lvl3pPr>
-              <a:defRPr sz="8400" b="1">
+              <a:defRPr sz="6600" b="1">
                 <a:solidFill>
                   <a:srgbClr val="F6E0F5"/>
                 </a:solidFill>
@@ -18932,7 +19248,7 @@
               </a:defRPr>
             </a:lvl3pPr>
             <a:lvl4pPr>
-              <a:defRPr sz="8400" b="1">
+              <a:defRPr sz="6600" b="1">
                 <a:solidFill>
                   <a:srgbClr val="F6E0F5"/>
                 </a:solidFill>
@@ -18942,7 +19258,7 @@
               </a:defRPr>
             </a:lvl4pPr>
             <a:lvl5pPr>
-              <a:defRPr sz="8400" b="1">
+              <a:defRPr sz="6600" b="1">
                 <a:solidFill>
                   <a:srgbClr val="F6E0F5"/>
                 </a:solidFill>
@@ -18952,7 +19268,7 @@
               </a:defRPr>
             </a:lvl5pPr>
             <a:lvl6pPr>
-              <a:defRPr sz="8400" b="1">
+              <a:defRPr sz="6600" b="1">
                 <a:solidFill>
                   <a:srgbClr val="F6E0F5"/>
                 </a:solidFill>
@@ -18962,7 +19278,7 @@
               </a:defRPr>
             </a:lvl6pPr>
             <a:lvl7pPr>
-              <a:defRPr sz="8400" b="1">
+              <a:defRPr sz="6600" b="1">
                 <a:solidFill>
                   <a:srgbClr val="F6E0F5"/>
                 </a:solidFill>
@@ -18972,7 +19288,7 @@
               </a:defRPr>
             </a:lvl7pPr>
             <a:lvl8pPr>
-              <a:defRPr sz="8400" b="1">
+              <a:defRPr sz="6600" b="1">
                 <a:solidFill>
                   <a:srgbClr val="F6E0F5"/>
                 </a:solidFill>
@@ -18982,7 +19298,7 @@
               </a:defRPr>
             </a:lvl8pPr>
             <a:lvl9pPr>
-              <a:defRPr sz="8400" b="1">
+              <a:defRPr sz="6600" b="1">
                 <a:solidFill>
                   <a:srgbClr val="F6E0F5"/>
                 </a:solidFill>
@@ -18994,7 +19310,7 @@
           </a:lstStyle>
           <a:p xmlns:a="http://schemas.openxmlformats.org/drawingml/2006/main">
             <a:pPr>
-              <a:defRPr sz="8400" b="1">
+              <a:defRPr sz="6600" b="1">
                 <a:solidFill>
                   <a:srgbClr val="F6E0F5"/>
                 </a:solidFill>
@@ -19004,7 +19320,7 @@
               </a:defRPr>
             </a:pPr>
             <a:r>
-              <a:rPr sz="8400" b="1">
+              <a:rPr sz="6600" b="1">
                 <a:solidFill>
                   <a:srgbClr val="F6E0F5"/>
                 </a:solidFill>
@@ -19012,17 +19328,17 @@
                 <a:ea typeface="Microsoft JhengHei"/>
                 <a:cs typeface="Microsoft JhengHei"/>
               </a:rPr>
-              <a:t>主推P4 12m聯合控制</a:t>
+              <a:t>主推聯合改善＋12公尺緩衝</a:t>
             </a:r>
           </a:p>
         </p:txBody>
       </p:sp>
       <p:sp>
         <p:nvSpPr>
-          <p:cNvPr id="15" name="內容_15_S1有強制服務要求才採用；直">
+          <p:cNvPr id="15" name="內容_15_短波尖峰有服務要求才採用；投">
             <a:extLst xmlns:a="http://schemas.openxmlformats.org/drawingml/2006/main">
               <a:ext uri="{FF2B5EF4-FFF2-40B4-BE49-F238E27FC236}">
-                <a16:creationId xmlns:a16="http://schemas.microsoft.com/office/drawing/2014/main" id="{BB2CF7CB-5E62-43CC-B35A-F94A5AA9C9D6}"/>
+                <a16:creationId xmlns:a16="http://schemas.microsoft.com/office/drawing/2014/main" id="{B500FA03-9579-4C50-9045-9BA9AF5C9B90}"/>
               </a:ext>
             </a:extLst>
           </p:cNvPr>
@@ -19170,17 +19486,17 @@
                 <a:ea typeface="Microsoft JhengHei"/>
                 <a:cs typeface="Microsoft JhengHei"/>
               </a:rPr>
-              <a:t>S1有強制服務要求才採用；直接ROI仍為負</a:t>
+              <a:t>短波尖峰有服務要求才採用；投資報酬仍為負</a:t>
             </a:r>
           </a:p>
         </p:txBody>
       </p:sp>
       <p:sp>
         <p:nvSpPr>
-          <p:cNvPr id="16" name="內容_15_P2單獨8m不足；原均值最低">
+          <p:cNvPr id="16" name="內容_15_只加緩衝不足；8公尺聯合方案">
             <a:extLst xmlns:a="http://schemas.openxmlformats.org/drawingml/2006/main">
               <a:ext uri="{FF2B5EF4-FFF2-40B4-BE49-F238E27FC236}">
-                <a16:creationId xmlns:a16="http://schemas.microsoft.com/office/drawing/2014/main" id="{B977135F-2521-43DF-9214-75EB62DEB7DA}"/>
+                <a16:creationId xmlns:a16="http://schemas.microsoft.com/office/drawing/2014/main" id="{D3ADA446-03A0-49DC-8B4F-60F3DEC4C982}"/>
               </a:ext>
             </a:extLst>
           </p:cNvPr>
@@ -19328,17 +19644,17 @@
                 <a:ea typeface="Microsoft JhengHei"/>
                 <a:cs typeface="Microsoft JhengHei"/>
               </a:rPr>
-              <a:t>P2單獨8m不足；原均值最低8m留作低預算備選</a:t>
+              <a:t>只加緩衝不足；8公尺聯合方案留作低預算備選</a:t>
             </a:r>
           </a:p>
         </p:txBody>
       </p:sp>
       <p:sp>
         <p:nvSpPr>
-          <p:cNvPr id="17" name="內容_15_Q&amp;A　原生模型、資料庫、逐">
+          <p:cNvPr id="17" name="內容_15_答辯問答　原生模型、資料庫、">
             <a:extLst xmlns:a="http://schemas.openxmlformats.org/drawingml/2006/main">
               <a:ext uri="{FF2B5EF4-FFF2-40B4-BE49-F238E27FC236}">
-                <a16:creationId xmlns:a16="http://schemas.microsoft.com/office/drawing/2014/main" id="{5B25850E-18DB-47C6-AEFC-4DAEEA07FD4E}"/>
+                <a16:creationId xmlns:a16="http://schemas.microsoft.com/office/drawing/2014/main" id="{F609F420-E8CA-499A-A674-25C98CE03A5C}"/>
               </a:ext>
             </a:extLst>
           </p:cNvPr>
@@ -19486,7 +19802,7 @@
                 <a:ea typeface="Microsoft JhengHei"/>
                 <a:cs typeface="Microsoft JhengHei"/>
               </a:rPr>
-              <a:t>Q&amp;A　原生模型、資料庫、逐次原始數據與展示素材隨附</a:t>
+              <a:t>答辯問答　原生模型、資料庫、逐次原始數據與展示素材隨附</a:t>
             </a:r>
           </a:p>
         </p:txBody>
@@ -19494,7 +19810,7 @@
     </p:spTree>
     <p:extLst>
       <p:ext uri="{BB962C8B-B14F-4D97-AF65-F5344CB8AC3E}">
-        <p14:creationId xmlns:p14="http://schemas.microsoft.com/office/powerpoint/2010/main" val="1653096613"/>
+        <p14:creationId xmlns:p14="http://schemas.microsoft.com/office/powerpoint/2010/main" val="729423682"/>
       </p:ext>
     </p:extLst>
   </p:cSld>
@@ -19518,7 +19834,7 @@
           <p:cNvPr id="2" name="Freeform 2">
             <a:extLst xmlns:a="http://schemas.openxmlformats.org/drawingml/2006/main">
               <a:ext uri="{FF2B5EF4-FFF2-40B4-BE49-F238E27FC236}">
-                <a16:creationId xmlns:a16="http://schemas.microsoft.com/office/drawing/2014/main" id="{390BCA13-AC99-45A2-8E2E-6790225BDA4F}"/>
+                <a16:creationId xmlns:a16="http://schemas.microsoft.com/office/drawing/2014/main" id="{C4333568-05C8-4E28-A7F5-95EDCEF9E4F8}"/>
               </a:ext>
             </a:extLst>
           </p:cNvPr>
@@ -19556,7 +19872,7 @@
             </a:pathLst>
           </a:custGeom>
           <a:blipFill xmlns:a="http://schemas.openxmlformats.org/drawingml/2006/main">
-            <a:blip xmlns:r="http://schemas.openxmlformats.org/officeDocument/2006/relationships" r:embed="R6d58577e4d8145c7"/>
+            <a:blip xmlns:r="http://schemas.openxmlformats.org/officeDocument/2006/relationships" r:embed="R18d5b0636136425a"/>
             <a:stretch>
               <a:fillRect l="-35258" t="-5555" r="-24931" b="-72434"/>
             </a:stretch>
@@ -19568,7 +19884,7 @@
           <p:cNvPr id="4" name="Freeform 4">
             <a:extLst xmlns:a="http://schemas.openxmlformats.org/drawingml/2006/main">
               <a:ext uri="{FF2B5EF4-FFF2-40B4-BE49-F238E27FC236}">
-                <a16:creationId xmlns:a16="http://schemas.microsoft.com/office/drawing/2014/main" id="{BEBC794A-20A8-40C9-9821-BE3E204148CC}"/>
+                <a16:creationId xmlns:a16="http://schemas.microsoft.com/office/drawing/2014/main" id="{A94D0ED5-FD39-43D0-9BBD-208F4073C9F9}"/>
               </a:ext>
             </a:extLst>
           </p:cNvPr>
@@ -19642,7 +19958,7 @@
           <p:cNvPr id="5" name="TextBox 5">
             <a:extLst xmlns:a="http://schemas.openxmlformats.org/drawingml/2006/main">
               <a:ext uri="{FF2B5EF4-FFF2-40B4-BE49-F238E27FC236}">
-                <a16:creationId xmlns:a16="http://schemas.microsoft.com/office/drawing/2014/main" id="{E1E45F60-35C8-4DA9-8280-7AE045E7F377}"/>
+                <a16:creationId xmlns:a16="http://schemas.microsoft.com/office/drawing/2014/main" id="{39F9FFF6-590B-42AD-B871-782C5000CAD0}"/>
               </a:ext>
             </a:extLst>
           </p:cNvPr>
@@ -19678,7 +19994,7 @@
           <p:cNvPr id="6" name="Freeform 6">
             <a:extLst xmlns:a="http://schemas.openxmlformats.org/drawingml/2006/main">
               <a:ext uri="{FF2B5EF4-FFF2-40B4-BE49-F238E27FC236}">
-                <a16:creationId xmlns:a16="http://schemas.microsoft.com/office/drawing/2014/main" id="{3C05442A-11FF-4F3C-929D-58EC111BB488}"/>
+                <a16:creationId xmlns:a16="http://schemas.microsoft.com/office/drawing/2014/main" id="{43124F56-1AEA-4339-BC72-A3AA20A9F73A}"/>
               </a:ext>
             </a:extLst>
           </p:cNvPr>
@@ -19726,7 +20042,7 @@
           <p:cNvPr id="7" name="Freeform 7">
             <a:extLst xmlns:a="http://schemas.openxmlformats.org/drawingml/2006/main">
               <a:ext uri="{FF2B5EF4-FFF2-40B4-BE49-F238E27FC236}">
-                <a16:creationId xmlns:a16="http://schemas.microsoft.com/office/drawing/2014/main" id="{B04FFC3F-EA66-4EF1-9B1F-1FA59B6AF0DF}"/>
+                <a16:creationId xmlns:a16="http://schemas.microsoft.com/office/drawing/2014/main" id="{0B6720F8-8344-4151-9A1F-93DD80AB0C99}"/>
               </a:ext>
             </a:extLst>
           </p:cNvPr>
@@ -19764,10 +20080,10 @@
             </a:pathLst>
           </a:custGeom>
           <a:blipFill xmlns:a="http://schemas.openxmlformats.org/drawingml/2006/main">
-            <a:blip xmlns:r="http://schemas.openxmlformats.org/officeDocument/2006/relationships" r:embed="Rf4c4938bd930482e">
+            <a:blip xmlns:r="http://schemas.openxmlformats.org/officeDocument/2006/relationships" r:embed="Rb4c94726c68c48d4">
               <a:extLst>
                 <a:ext uri="{96DAC541-7B7A-43D3-8B79-37D633B846F1}">
-                  <asvg:svgBlip xmlns:asvg="http://schemas.microsoft.com/office/drawing/2016/SVG/main" r:embed="Rd950ea4e346d49b3"/>
+                  <asvg:svgBlip xmlns:asvg="http://schemas.microsoft.com/office/drawing/2016/SVG/main" r:embed="R45c99dde17f147de"/>
                 </a:ext>
               </a:extLst>
             </a:blip>
@@ -19782,7 +20098,7 @@
           <p:cNvPr id="8" name="Freeform 8">
             <a:extLst xmlns:a="http://schemas.openxmlformats.org/drawingml/2006/main">
               <a:ext uri="{FF2B5EF4-FFF2-40B4-BE49-F238E27FC236}">
-                <a16:creationId xmlns:a16="http://schemas.microsoft.com/office/drawing/2014/main" id="{7B42A5E4-0788-4531-BC98-5ADF1B084785}"/>
+                <a16:creationId xmlns:a16="http://schemas.microsoft.com/office/drawing/2014/main" id="{A66291FE-8677-4009-8320-A8C7737E5661}"/>
               </a:ext>
             </a:extLst>
           </p:cNvPr>
@@ -19820,10 +20136,10 @@
             </a:pathLst>
           </a:custGeom>
           <a:blipFill xmlns:a="http://schemas.openxmlformats.org/drawingml/2006/main">
-            <a:blip xmlns:r="http://schemas.openxmlformats.org/officeDocument/2006/relationships" r:embed="Rf4c4938bd930482e">
+            <a:blip xmlns:r="http://schemas.openxmlformats.org/officeDocument/2006/relationships" r:embed="Rb4c94726c68c48d4">
               <a:extLst>
                 <a:ext uri="{96DAC541-7B7A-43D3-8B79-37D633B846F1}">
-                  <asvg:svgBlip xmlns:asvg="http://schemas.microsoft.com/office/drawing/2016/SVG/main" r:embed="Rd950ea4e346d49b3"/>
+                  <asvg:svgBlip xmlns:asvg="http://schemas.microsoft.com/office/drawing/2016/SVG/main" r:embed="R45c99dde17f147de"/>
                 </a:ext>
               </a:extLst>
             </a:blip>
@@ -19838,7 +20154,7 @@
           <p:cNvPr id="9" name="Freeform 9">
             <a:extLst xmlns:a="http://schemas.openxmlformats.org/drawingml/2006/main">
               <a:ext uri="{FF2B5EF4-FFF2-40B4-BE49-F238E27FC236}">
-                <a16:creationId xmlns:a16="http://schemas.microsoft.com/office/drawing/2014/main" id="{506EAC32-E610-4E15-862E-9D893EC6FDB5}"/>
+                <a16:creationId xmlns:a16="http://schemas.microsoft.com/office/drawing/2014/main" id="{124A2024-4370-43B1-BBCC-68E2B1EC91D9}"/>
               </a:ext>
             </a:extLst>
           </p:cNvPr>
@@ -19886,7 +20202,7 @@
           <p:cNvPr id="10" name="Freeform 10">
             <a:extLst xmlns:a="http://schemas.openxmlformats.org/drawingml/2006/main">
               <a:ext uri="{FF2B5EF4-FFF2-40B4-BE49-F238E27FC236}">
-                <a16:creationId xmlns:a16="http://schemas.microsoft.com/office/drawing/2014/main" id="{9F27882F-7488-48B8-B679-BAED14E14C6B}"/>
+                <a16:creationId xmlns:a16="http://schemas.microsoft.com/office/drawing/2014/main" id="{0E3D5AE7-1C2E-4ED7-AFE7-C615DFB317A7}"/>
               </a:ext>
             </a:extLst>
           </p:cNvPr>
@@ -19924,7 +20240,7 @@
             </a:pathLst>
           </a:custGeom>
           <a:blipFill xmlns:a="http://schemas.openxmlformats.org/drawingml/2006/main">
-            <a:blip xmlns:r="http://schemas.openxmlformats.org/officeDocument/2006/relationships" r:embed="Ra3c1474046f743e3"/>
+            <a:blip xmlns:r="http://schemas.openxmlformats.org/officeDocument/2006/relationships" r:embed="R59385007c52042e0"/>
             <a:stretch>
               <a:fillRect l="0" t="0" r="0" b="0"/>
             </a:stretch>
@@ -19936,7 +20252,7 @@
           <p:cNvPr id="11" name="TextBox 11">
             <a:extLst xmlns:a="http://schemas.openxmlformats.org/drawingml/2006/main">
               <a:ext uri="{FF2B5EF4-FFF2-40B4-BE49-F238E27FC236}">
-                <a16:creationId xmlns:a16="http://schemas.microsoft.com/office/drawing/2014/main" id="{132DF2EF-051C-4D41-8A8E-ECAC6B6D0213}"/>
+                <a16:creationId xmlns:a16="http://schemas.microsoft.com/office/drawing/2014/main" id="{EDEC774A-5262-4808-8374-C8FB15F42D39}"/>
               </a:ext>
             </a:extLst>
           </p:cNvPr>
@@ -20097,7 +20413,7 @@
           <p:cNvPr id="12" name="TextBox 12">
             <a:extLst xmlns:a="http://schemas.openxmlformats.org/drawingml/2006/main">
               <a:ext uri="{FF2B5EF4-FFF2-40B4-BE49-F238E27FC236}">
-                <a16:creationId xmlns:a16="http://schemas.microsoft.com/office/drawing/2014/main" id="{2A855F12-9D87-449D-8D13-607D9FD0B0D2}"/>
+                <a16:creationId xmlns:a16="http://schemas.microsoft.com/office/drawing/2014/main" id="{2808648A-7CAC-440C-91EC-23122EEA51A0}"/>
               </a:ext>
             </a:extLst>
           </p:cNvPr>
@@ -20149,7 +20465,7 @@
           <p:cNvPr id="13" name="TextBox 13">
             <a:extLst xmlns:a="http://schemas.openxmlformats.org/drawingml/2006/main">
               <a:ext uri="{FF2B5EF4-FFF2-40B4-BE49-F238E27FC236}">
-                <a16:creationId xmlns:a16="http://schemas.microsoft.com/office/drawing/2014/main" id="{22BABCE9-85F3-4676-BA9E-4EBFF68CB794}"/>
+                <a16:creationId xmlns:a16="http://schemas.microsoft.com/office/drawing/2014/main" id="{9EF05600-469B-424C-84E5-B66FED65F4D2}"/>
               </a:ext>
             </a:extLst>
           </p:cNvPr>
@@ -20201,7 +20517,7 @@
           <p:cNvPr id="14" name="TextBox 14">
             <a:extLst xmlns:a="http://schemas.openxmlformats.org/drawingml/2006/main">
               <a:ext uri="{FF2B5EF4-FFF2-40B4-BE49-F238E27FC236}">
-                <a16:creationId xmlns:a16="http://schemas.microsoft.com/office/drawing/2014/main" id="{C236E033-2069-411E-8792-4B8FE6E916F0}"/>
+                <a16:creationId xmlns:a16="http://schemas.microsoft.com/office/drawing/2014/main" id="{725E81B4-BE29-4B55-A86F-56EAA7339EA0}"/>
               </a:ext>
             </a:extLst>
           </p:cNvPr>
@@ -20252,10 +20568,10 @@
       </p:sp>
       <p:sp>
         <p:nvSpPr>
-          <p:cNvPr id="15" name="內容_2_商業洞察">
+          <p:cNvPr id="15" name="內容_2_先讀代號">
             <a:extLst xmlns:a="http://schemas.openxmlformats.org/drawingml/2006/main">
               <a:ext uri="{FF2B5EF4-FFF2-40B4-BE49-F238E27FC236}">
-                <a16:creationId xmlns:a16="http://schemas.microsoft.com/office/drawing/2014/main" id="{60886C27-E957-45B2-AD9F-F605809895F2}"/>
+                <a16:creationId xmlns:a16="http://schemas.microsoft.com/office/drawing/2014/main" id="{B8F32FEA-7208-4CCB-B6B3-8E06669BFCDD}"/>
               </a:ext>
             </a:extLst>
           </p:cNvPr>
@@ -20403,17 +20719,17 @@
                 <a:ea typeface="Microsoft JhengHei"/>
                 <a:cs typeface="Microsoft JhengHei"/>
               </a:rPr>
-              <a:t>商業洞察</a:t>
+              <a:t>先讀代號</a:t>
             </a:r>
           </a:p>
         </p:txBody>
       </p:sp>
       <p:sp>
         <p:nvSpPr>
-          <p:cNvPr id="16" name="內容_2_退貨商品與空箱互相牽制">
+          <p:cNvPr id="16" name="內容_2_需求情境與改善方案是兩件事">
             <a:extLst xmlns:a="http://schemas.openxmlformats.org/drawingml/2006/main">
               <a:ext uri="{FF2B5EF4-FFF2-40B4-BE49-F238E27FC236}">
-                <a16:creationId xmlns:a16="http://schemas.microsoft.com/office/drawing/2014/main" id="{67EBBE65-6116-4B8C-BD92-D20C8A6E0335}"/>
+                <a16:creationId xmlns:a16="http://schemas.microsoft.com/office/drawing/2014/main" id="{8445254C-67C1-4368-840C-7F453BCED8C7}"/>
               </a:ext>
             </a:extLst>
           </p:cNvPr>
@@ -20561,537 +20877,1108 @@
                 <a:ea typeface="Microsoft JhengHei"/>
                 <a:cs typeface="Microsoft JhengHei"/>
               </a:rPr>
-              <a:t>退貨商品與空箱互相牽制</a:t>
+              <a:t>需求情境與改善方案是兩件事</a:t>
             </a:r>
           </a:p>
         </p:txBody>
       </p:sp>
-      <p:sp>
-        <p:nvSpPr>
-          <p:cNvPr id="17" name="內容_2_30%–40%">
+      <p:graphicFrame>
+        <p:nvGraphicFramePr>
+          <p:cNvPr id="17" name="">
             <a:extLst xmlns:a="http://schemas.openxmlformats.org/drawingml/2006/main">
               <a:ext uri="{FF2B5EF4-FFF2-40B4-BE49-F238E27FC236}">
-                <a16:creationId xmlns:a16="http://schemas.microsoft.com/office/drawing/2014/main" id="{43F0ECCA-F7A7-4E34-841E-F0E4822F4961}"/>
+                <a16:creationId xmlns:a16="http://schemas.microsoft.com/office/drawing/2014/main" id="{1534FB80-4BA8-459A-99F2-904004098B17}"/>
               </a:ext>
             </a:extLst>
           </p:cNvPr>
-          <p:cNvSpPr>
-            <a:spLocks xmlns:a="http://schemas.openxmlformats.org/drawingml/2006/main" noGrp="1"/>
-          </p:cNvSpPr>
+          <p:cNvGraphicFramePr/>
           <p:nvPr/>
-        </p:nvSpPr>
-        <p:spPr>
-          <a:xfrm xmlns:a="http://schemas.openxmlformats.org/drawingml/2006/main">
-            <a:off x="1581150" y="4572000"/>
-            <a:ext cx="7143750" cy="1285875"/>
-          </a:xfrm>
-          <a:prstGeom xmlns:a="http://schemas.openxmlformats.org/drawingml/2006/main" prst="rect">
-            <a:avLst/>
-          </a:prstGeom>
-          <a:noFill xmlns:a="http://schemas.openxmlformats.org/drawingml/2006/main"/>
-          <a:ln xmlns:a="http://schemas.openxmlformats.org/drawingml/2006/main" w="0">
-            <a:noFill/>
-          </a:ln>
-        </p:spPr>
-        <p:txBody>
-          <a:bodyPr xmlns:a="http://schemas.openxmlformats.org/drawingml/2006/main" wrap="square" lIns="0" tIns="0" rIns="0" bIns="0">
-            <a:noAutofit/>
-          </a:bodyPr>
-          <a:lstStyle xmlns:a="http://schemas.openxmlformats.org/drawingml/2006/main">
-            <a:defPPr>
-              <a:defRPr sz="8400" b="1">
-                <a:solidFill>
-                  <a:srgbClr val="DF96DA"/>
-                </a:solidFill>
-                <a:latin typeface="Microsoft JhengHei"/>
-                <a:ea typeface="Microsoft JhengHei"/>
-                <a:cs typeface="Microsoft JhengHei"/>
-              </a:defRPr>
-            </a:defPPr>
-            <a:lvl1pPr>
-              <a:defRPr sz="8400" b="1">
-                <a:solidFill>
-                  <a:srgbClr val="DF96DA"/>
-                </a:solidFill>
-                <a:latin typeface="Microsoft JhengHei"/>
-                <a:ea typeface="Microsoft JhengHei"/>
-                <a:cs typeface="Microsoft JhengHei"/>
-              </a:defRPr>
-            </a:lvl1pPr>
-            <a:lvl2pPr>
-              <a:defRPr sz="8400" b="1">
-                <a:solidFill>
-                  <a:srgbClr val="DF96DA"/>
-                </a:solidFill>
-                <a:latin typeface="Microsoft JhengHei"/>
-                <a:ea typeface="Microsoft JhengHei"/>
-                <a:cs typeface="Microsoft JhengHei"/>
-              </a:defRPr>
-            </a:lvl2pPr>
-            <a:lvl3pPr>
-              <a:defRPr sz="8400" b="1">
-                <a:solidFill>
-                  <a:srgbClr val="DF96DA"/>
-                </a:solidFill>
-                <a:latin typeface="Microsoft JhengHei"/>
-                <a:ea typeface="Microsoft JhengHei"/>
-                <a:cs typeface="Microsoft JhengHei"/>
-              </a:defRPr>
-            </a:lvl3pPr>
-            <a:lvl4pPr>
-              <a:defRPr sz="8400" b="1">
-                <a:solidFill>
-                  <a:srgbClr val="DF96DA"/>
-                </a:solidFill>
-                <a:latin typeface="Microsoft JhengHei"/>
-                <a:ea typeface="Microsoft JhengHei"/>
-                <a:cs typeface="Microsoft JhengHei"/>
-              </a:defRPr>
-            </a:lvl4pPr>
-            <a:lvl5pPr>
-              <a:defRPr sz="8400" b="1">
-                <a:solidFill>
-                  <a:srgbClr val="DF96DA"/>
-                </a:solidFill>
-                <a:latin typeface="Microsoft JhengHei"/>
-                <a:ea typeface="Microsoft JhengHei"/>
-                <a:cs typeface="Microsoft JhengHei"/>
-              </a:defRPr>
-            </a:lvl5pPr>
-            <a:lvl6pPr>
-              <a:defRPr sz="8400" b="1">
-                <a:solidFill>
-                  <a:srgbClr val="DF96DA"/>
-                </a:solidFill>
-                <a:latin typeface="Microsoft JhengHei"/>
-                <a:ea typeface="Microsoft JhengHei"/>
-                <a:cs typeface="Microsoft JhengHei"/>
-              </a:defRPr>
-            </a:lvl6pPr>
-            <a:lvl7pPr>
-              <a:defRPr sz="8400" b="1">
-                <a:solidFill>
-                  <a:srgbClr val="DF96DA"/>
-                </a:solidFill>
-                <a:latin typeface="Microsoft JhengHei"/>
-                <a:ea typeface="Microsoft JhengHei"/>
-                <a:cs typeface="Microsoft JhengHei"/>
-              </a:defRPr>
-            </a:lvl7pPr>
-            <a:lvl8pPr>
-              <a:defRPr sz="8400" b="1">
-                <a:solidFill>
-                  <a:srgbClr val="DF96DA"/>
-                </a:solidFill>
-                <a:latin typeface="Microsoft JhengHei"/>
-                <a:ea typeface="Microsoft JhengHei"/>
-                <a:cs typeface="Microsoft JhengHei"/>
-              </a:defRPr>
-            </a:lvl8pPr>
-            <a:lvl9pPr>
-              <a:defRPr sz="8400" b="1">
-                <a:solidFill>
-                  <a:srgbClr val="DF96DA"/>
-                </a:solidFill>
-                <a:latin typeface="Microsoft JhengHei"/>
-                <a:ea typeface="Microsoft JhengHei"/>
-                <a:cs typeface="Microsoft JhengHei"/>
-              </a:defRPr>
-            </a:lvl9pPr>
-          </a:lstStyle>
-          <a:p xmlns:a="http://schemas.openxmlformats.org/drawingml/2006/main">
-            <a:pPr>
-              <a:defRPr sz="8400" b="1">
-                <a:solidFill>
-                  <a:srgbClr val="DF96DA"/>
-                </a:solidFill>
-                <a:latin typeface="Microsoft JhengHei"/>
-                <a:ea typeface="Microsoft JhengHei"/>
-                <a:cs typeface="Microsoft JhengHei"/>
-              </a:defRPr>
-            </a:pPr>
-            <a:r>
-              <a:rPr sz="8400" b="1">
-                <a:solidFill>
-                  <a:srgbClr val="DF96DA"/>
-                </a:solidFill>
-                <a:latin typeface="Microsoft JhengHei"/>
-                <a:ea typeface="Microsoft JhengHei"/>
-                <a:cs typeface="Microsoft JhengHei"/>
-              </a:rPr>
-              <a:t>30%–40%</a:t>
-            </a:r>
-          </a:p>
-        </p:txBody>
-      </p:sp>
-      <p:sp>
-        <p:nvSpPr>
-          <p:cNvPr id="18" name="內容_2_課程設定的退貨率">
+        </p:nvGraphicFramePr>
+        <p:xfrm>
+          <a:off xmlns:a="http://schemas.openxmlformats.org/drawingml/2006/main" x="1581150" y="4143375"/>
+          <a:ext xmlns:a="http://schemas.openxmlformats.org/drawingml/2006/main" cx="14287500" cy="3857625"/>
+        </p:xfrm>
+        <a:graphic xmlns:a="http://schemas.openxmlformats.org/drawingml/2006/main">
+          <a:graphicData uri="http://schemas.openxmlformats.org/drawingml/2006/table">
+            <a:tbl>
+              <a:tblPr/>
+              <a:tblGrid>
+                <a:gridCol w="4762500"/>
+                <a:gridCol w="4762500"/>
+                <a:gridCol w="4762500"/>
+              </a:tblGrid>
+              <a:tr h="428625">
+                <a:tc>
+                  <a:txBody>
+                    <a:bodyPr wrap="square" lIns="152400" tIns="85725" rIns="114300" bIns="76200"/>
+                    <a:lstStyle/>
+                    <a:p>
+                      <a:r>
+                        <a:rPr sz="1650" b="1">
+                          <a:solidFill>
+                            <a:srgbClr val="DF96DA"/>
+                          </a:solidFill>
+                          <a:latin typeface="Microsoft JhengHei"/>
+                          <a:ea typeface="Microsoft JhengHei"/>
+                          <a:cs typeface="Microsoft JhengHei"/>
+                        </a:rPr>
+                        <a:t>代碼</a:t>
+                      </a:r>
+                    </a:p>
+                  </a:txBody>
+                  <a:tcPr marL="91440" marR="91440" marT="45720" marB="45720">
+                    <a:lnL w="6668">
+                      <a:solidFill>
+                        <a:srgbClr val="654A79"/>
+                      </a:solidFill>
+                      <a:prstDash val="solid"/>
+                    </a:lnL>
+                    <a:lnR w="6668">
+                      <a:solidFill>
+                        <a:srgbClr val="654A79"/>
+                      </a:solidFill>
+                      <a:prstDash val="solid"/>
+                    </a:lnR>
+                    <a:lnT w="6668">
+                      <a:solidFill>
+                        <a:srgbClr val="654A79"/>
+                      </a:solidFill>
+                      <a:prstDash val="solid"/>
+                    </a:lnT>
+                    <a:lnB w="6668">
+                      <a:solidFill>
+                        <a:srgbClr val="654A79"/>
+                      </a:solidFill>
+                      <a:prstDash val="solid"/>
+                    </a:lnB>
+                    <a:solidFill>
+                      <a:srgbClr val="352547"/>
+                    </a:solidFill>
+                  </a:tcPr>
+                </a:tc>
+                <a:tc>
+                  <a:txBody>
+                    <a:bodyPr wrap="square" lIns="152400" tIns="85725" rIns="114300" bIns="76200"/>
+                    <a:lstStyle/>
+                    <a:p>
+                      <a:r>
+                        <a:rPr sz="1650" b="1">
+                          <a:solidFill>
+                            <a:srgbClr val="DF96DA"/>
+                          </a:solidFill>
+                          <a:latin typeface="Microsoft JhengHei"/>
+                          <a:ea typeface="Microsoft JhengHei"/>
+                          <a:cs typeface="Microsoft JhengHei"/>
+                        </a:rPr>
+                        <a:t>中文名稱</a:t>
+                      </a:r>
+                    </a:p>
+                  </a:txBody>
+                  <a:tcPr marL="91440" marR="91440" marT="45720" marB="45720">
+                    <a:lnR w="6668">
+                      <a:solidFill>
+                        <a:srgbClr val="654A79"/>
+                      </a:solidFill>
+                      <a:prstDash val="solid"/>
+                    </a:lnR>
+                    <a:lnT w="6668">
+                      <a:solidFill>
+                        <a:srgbClr val="654A79"/>
+                      </a:solidFill>
+                      <a:prstDash val="solid"/>
+                    </a:lnT>
+                    <a:lnB w="6668">
+                      <a:solidFill>
+                        <a:srgbClr val="654A79"/>
+                      </a:solidFill>
+                      <a:prstDash val="solid"/>
+                    </a:lnB>
+                    <a:solidFill>
+                      <a:srgbClr val="352547"/>
+                    </a:solidFill>
+                  </a:tcPr>
+                </a:tc>
+                <a:tc>
+                  <a:txBody>
+                    <a:bodyPr wrap="square" lIns="152400" tIns="85725" rIns="114300" bIns="76200"/>
+                    <a:lstStyle/>
+                    <a:p>
+                      <a:r>
+                        <a:rPr sz="1650" b="1">
+                          <a:solidFill>
+                            <a:srgbClr val="DF96DA"/>
+                          </a:solidFill>
+                          <a:latin typeface="Microsoft JhengHei"/>
+                          <a:ea typeface="Microsoft JhengHei"/>
+                          <a:cs typeface="Microsoft JhengHei"/>
+                        </a:rPr>
+                        <a:t>本案設定</a:t>
+                      </a:r>
+                    </a:p>
+                  </a:txBody>
+                  <a:tcPr marL="91440" marR="91440" marT="45720" marB="45720">
+                    <a:lnR w="6668">
+                      <a:solidFill>
+                        <a:srgbClr val="654A79"/>
+                      </a:solidFill>
+                      <a:prstDash val="solid"/>
+                    </a:lnR>
+                    <a:lnT w="6668">
+                      <a:solidFill>
+                        <a:srgbClr val="654A79"/>
+                      </a:solidFill>
+                      <a:prstDash val="solid"/>
+                    </a:lnT>
+                    <a:lnB w="6668">
+                      <a:solidFill>
+                        <a:srgbClr val="654A79"/>
+                      </a:solidFill>
+                      <a:prstDash val="solid"/>
+                    </a:lnB>
+                    <a:solidFill>
+                      <a:srgbClr val="352547"/>
+                    </a:solidFill>
+                  </a:tcPr>
+                </a:tc>
+              </a:tr>
+              <a:tr h="428625">
+                <a:tc>
+                  <a:txBody>
+                    <a:bodyPr wrap="square" lIns="152400" tIns="85725" rIns="114300" bIns="76200"/>
+                    <a:lstStyle/>
+                    <a:p>
+                      <a:r>
+                        <a:rPr sz="1650" b="0">
+                          <a:solidFill>
+                            <a:srgbClr val="F6E0F5"/>
+                          </a:solidFill>
+                          <a:latin typeface="Microsoft JhengHei"/>
+                          <a:ea typeface="Microsoft JhengHei"/>
+                          <a:cs typeface="Microsoft JhengHei"/>
+                        </a:rPr>
+                        <a:t>S0</a:t>
+                      </a:r>
+                    </a:p>
+                  </a:txBody>
+                  <a:tcPr marL="91440" marR="91440" marT="45720" marB="45720">
+                    <a:lnL w="6668">
+                      <a:solidFill>
+                        <a:srgbClr val="654A79"/>
+                      </a:solidFill>
+                      <a:prstDash val="solid"/>
+                    </a:lnL>
+                    <a:lnR w="6668">
+                      <a:solidFill>
+                        <a:srgbClr val="654A79"/>
+                      </a:solidFill>
+                      <a:prstDash val="solid"/>
+                    </a:lnR>
+                    <a:lnB w="6668">
+                      <a:solidFill>
+                        <a:srgbClr val="654A79"/>
+                      </a:solidFill>
+                      <a:prstDash val="solid"/>
+                    </a:lnB>
+                    <a:solidFill>
+                      <a:srgbClr val="0D0912"/>
+                    </a:solidFill>
+                  </a:tcPr>
+                </a:tc>
+                <a:tc>
+                  <a:txBody>
+                    <a:bodyPr wrap="square" lIns="152400" tIns="85725" rIns="114300" bIns="76200"/>
+                    <a:lstStyle/>
+                    <a:p>
+                      <a:r>
+                        <a:rPr sz="1650" b="0">
+                          <a:solidFill>
+                            <a:srgbClr val="F6E0F5"/>
+                          </a:solidFill>
+                          <a:latin typeface="Microsoft JhengHei"/>
+                          <a:ea typeface="Microsoft JhengHei"/>
+                          <a:cs typeface="Microsoft JhengHei"/>
+                        </a:rPr>
+                        <a:t>平日基準情境</a:t>
+                      </a:r>
+                    </a:p>
+                  </a:txBody>
+                  <a:tcPr marL="91440" marR="91440" marT="45720" marB="45720">
+                    <a:lnR w="6668">
+                      <a:solidFill>
+                        <a:srgbClr val="654A79"/>
+                      </a:solidFill>
+                      <a:prstDash val="solid"/>
+                    </a:lnR>
+                    <a:lnB w="6668">
+                      <a:solidFill>
+                        <a:srgbClr val="654A79"/>
+                      </a:solidFill>
+                      <a:prstDash val="solid"/>
+                    </a:lnB>
+                    <a:solidFill>
+                      <a:srgbClr val="0D0912"/>
+                    </a:solidFill>
+                  </a:tcPr>
+                </a:tc>
+                <a:tc>
+                  <a:txBody>
+                    <a:bodyPr wrap="square" lIns="152400" tIns="85725" rIns="114300" bIns="76200"/>
+                    <a:lstStyle/>
+                    <a:p>
+                      <a:r>
+                        <a:rPr sz="1650" b="0">
+                          <a:solidFill>
+                            <a:srgbClr val="F6E0F5"/>
+                          </a:solidFill>
+                          <a:latin typeface="Microsoft JhengHei"/>
+                          <a:ea typeface="Microsoft JhengHei"/>
+                          <a:cs typeface="Microsoft JhengHei"/>
+                        </a:rPr>
+                        <a:t>平均每小時60件</a:t>
+                      </a:r>
+                    </a:p>
+                  </a:txBody>
+                  <a:tcPr marL="91440" marR="91440" marT="45720" marB="45720">
+                    <a:lnR w="6668">
+                      <a:solidFill>
+                        <a:srgbClr val="654A79"/>
+                      </a:solidFill>
+                      <a:prstDash val="solid"/>
+                    </a:lnR>
+                    <a:lnB w="6668">
+                      <a:solidFill>
+                        <a:srgbClr val="654A79"/>
+                      </a:solidFill>
+                      <a:prstDash val="solid"/>
+                    </a:lnB>
+                    <a:solidFill>
+                      <a:srgbClr val="0D0912"/>
+                    </a:solidFill>
+                  </a:tcPr>
+                </a:tc>
+              </a:tr>
+              <a:tr h="428625">
+                <a:tc>
+                  <a:txBody>
+                    <a:bodyPr wrap="square" lIns="152400" tIns="85725" rIns="114300" bIns="76200"/>
+                    <a:lstStyle/>
+                    <a:p>
+                      <a:r>
+                        <a:rPr sz="1650" b="0">
+                          <a:solidFill>
+                            <a:srgbClr val="F6E0F5"/>
+                          </a:solidFill>
+                          <a:latin typeface="Microsoft JhengHei"/>
+                          <a:ea typeface="Microsoft JhengHei"/>
+                          <a:cs typeface="Microsoft JhengHei"/>
+                        </a:rPr>
+                        <a:t>S1</a:t>
+                      </a:r>
+                    </a:p>
+                  </a:txBody>
+                  <a:tcPr marL="91440" marR="91440" marT="45720" marB="45720">
+                    <a:lnL w="6668">
+                      <a:solidFill>
+                        <a:srgbClr val="654A79"/>
+                      </a:solidFill>
+                      <a:prstDash val="solid"/>
+                    </a:lnL>
+                    <a:lnR w="6668">
+                      <a:solidFill>
+                        <a:srgbClr val="654A79"/>
+                      </a:solidFill>
+                      <a:prstDash val="solid"/>
+                    </a:lnR>
+                    <a:lnB w="6668">
+                      <a:solidFill>
+                        <a:srgbClr val="654A79"/>
+                      </a:solidFill>
+                      <a:prstDash val="solid"/>
+                    </a:lnB>
+                    <a:solidFill>
+                      <a:srgbClr val="0D0912"/>
+                    </a:solidFill>
+                  </a:tcPr>
+                </a:tc>
+                <a:tc>
+                  <a:txBody>
+                    <a:bodyPr wrap="square" lIns="152400" tIns="85725" rIns="114300" bIns="76200"/>
+                    <a:lstStyle/>
+                    <a:p>
+                      <a:r>
+                        <a:rPr sz="1650" b="0">
+                          <a:solidFill>
+                            <a:srgbClr val="F6E0F5"/>
+                          </a:solidFill>
+                          <a:latin typeface="Microsoft JhengHei"/>
+                          <a:ea typeface="Microsoft JhengHei"/>
+                          <a:cs typeface="Microsoft JhengHei"/>
+                        </a:rPr>
+                        <a:t>短波尖峰情境</a:t>
+                      </a:r>
+                    </a:p>
+                  </a:txBody>
+                  <a:tcPr marL="91440" marR="91440" marT="45720" marB="45720">
+                    <a:lnR w="6668">
+                      <a:solidFill>
+                        <a:srgbClr val="654A79"/>
+                      </a:solidFill>
+                      <a:prstDash val="solid"/>
+                    </a:lnR>
+                    <a:lnB w="6668">
+                      <a:solidFill>
+                        <a:srgbClr val="654A79"/>
+                      </a:solidFill>
+                      <a:prstDash val="solid"/>
+                    </a:lnB>
+                    <a:solidFill>
+                      <a:srgbClr val="0D0912"/>
+                    </a:solidFill>
+                  </a:tcPr>
+                </a:tc>
+                <a:tc>
+                  <a:txBody>
+                    <a:bodyPr wrap="square" lIns="152400" tIns="85725" rIns="114300" bIns="76200"/>
+                    <a:lstStyle/>
+                    <a:p>
+                      <a:r>
+                        <a:rPr sz="1650" b="0">
+                          <a:solidFill>
+                            <a:srgbClr val="F6E0F5"/>
+                          </a:solidFill>
+                          <a:latin typeface="Microsoft JhengHei"/>
+                          <a:ea typeface="Microsoft JhengHei"/>
+                          <a:cs typeface="Microsoft JhengHei"/>
+                        </a:rPr>
+                        <a:t>波外80件／小時；三波各20分鐘、210件／小時</a:t>
+                      </a:r>
+                    </a:p>
+                  </a:txBody>
+                  <a:tcPr marL="91440" marR="91440" marT="45720" marB="45720">
+                    <a:lnR w="6668">
+                      <a:solidFill>
+                        <a:srgbClr val="654A79"/>
+                      </a:solidFill>
+                      <a:prstDash val="solid"/>
+                    </a:lnR>
+                    <a:lnB w="6668">
+                      <a:solidFill>
+                        <a:srgbClr val="654A79"/>
+                      </a:solidFill>
+                      <a:prstDash val="solid"/>
+                    </a:lnB>
+                    <a:solidFill>
+                      <a:srgbClr val="0D0912"/>
+                    </a:solidFill>
+                  </a:tcPr>
+                </a:tc>
+              </a:tr>
+              <a:tr h="428625">
+                <a:tc>
+                  <a:txBody>
+                    <a:bodyPr wrap="square" lIns="152400" tIns="85725" rIns="114300" bIns="76200"/>
+                    <a:lstStyle/>
+                    <a:p>
+                      <a:r>
+                        <a:rPr sz="1650" b="0">
+                          <a:solidFill>
+                            <a:srgbClr val="F6E0F5"/>
+                          </a:solidFill>
+                          <a:latin typeface="Microsoft JhengHei"/>
+                          <a:ea typeface="Microsoft JhengHei"/>
+                          <a:cs typeface="Microsoft JhengHei"/>
+                        </a:rPr>
+                        <a:t>S1_4.5</a:t>
+                      </a:r>
+                    </a:p>
+                  </a:txBody>
+                  <a:tcPr marL="91440" marR="91440" marT="45720" marB="45720">
+                    <a:lnL w="6668">
+                      <a:solidFill>
+                        <a:srgbClr val="654A79"/>
+                      </a:solidFill>
+                      <a:prstDash val="solid"/>
+                    </a:lnL>
+                    <a:lnR w="6668">
+                      <a:solidFill>
+                        <a:srgbClr val="654A79"/>
+                      </a:solidFill>
+                      <a:prstDash val="solid"/>
+                    </a:lnR>
+                    <a:lnB w="6668">
+                      <a:solidFill>
+                        <a:srgbClr val="654A79"/>
+                      </a:solidFill>
+                      <a:prstDash val="solid"/>
+                    </a:lnB>
+                    <a:solidFill>
+                      <a:srgbClr val="0D0912"/>
+                    </a:solidFill>
+                  </a:tcPr>
+                </a:tc>
+                <a:tc>
+                  <a:txBody>
+                    <a:bodyPr wrap="square" lIns="152400" tIns="85725" rIns="114300" bIns="76200"/>
+                    <a:lstStyle/>
+                    <a:p>
+                      <a:r>
+                        <a:rPr sz="1650" b="0">
+                          <a:solidFill>
+                            <a:srgbClr val="F6E0F5"/>
+                          </a:solidFill>
+                          <a:latin typeface="Microsoft JhengHei"/>
+                          <a:ea typeface="Microsoft JhengHei"/>
+                          <a:cs typeface="Microsoft JhengHei"/>
+                        </a:rPr>
+                        <a:t>較高短波尖峰情境</a:t>
+                      </a:r>
+                    </a:p>
+                  </a:txBody>
+                  <a:tcPr marL="91440" marR="91440" marT="45720" marB="45720">
+                    <a:lnR w="6668">
+                      <a:solidFill>
+                        <a:srgbClr val="654A79"/>
+                      </a:solidFill>
+                      <a:prstDash val="solid"/>
+                    </a:lnR>
+                    <a:lnB w="6668">
+                      <a:solidFill>
+                        <a:srgbClr val="654A79"/>
+                      </a:solidFill>
+                      <a:prstDash val="solid"/>
+                    </a:lnB>
+                    <a:solidFill>
+                      <a:srgbClr val="0D0912"/>
+                    </a:solidFill>
+                  </a:tcPr>
+                </a:tc>
+                <a:tc>
+                  <a:txBody>
+                    <a:bodyPr wrap="square" lIns="152400" tIns="85725" rIns="114300" bIns="76200"/>
+                    <a:lstStyle/>
+                    <a:p>
+                      <a:r>
+                        <a:rPr sz="1650" b="0">
+                          <a:solidFill>
+                            <a:srgbClr val="F6E0F5"/>
+                          </a:solidFill>
+                          <a:latin typeface="Microsoft JhengHei"/>
+                          <a:ea typeface="Microsoft JhengHei"/>
+                          <a:cs typeface="Microsoft JhengHei"/>
+                        </a:rPr>
+                        <a:t>尖峰270件／小時，是基準的4.5倍</a:t>
+                      </a:r>
+                    </a:p>
+                  </a:txBody>
+                  <a:tcPr marL="91440" marR="91440" marT="45720" marB="45720">
+                    <a:lnR w="6668">
+                      <a:solidFill>
+                        <a:srgbClr val="654A79"/>
+                      </a:solidFill>
+                      <a:prstDash val="solid"/>
+                    </a:lnR>
+                    <a:lnB w="6668">
+                      <a:solidFill>
+                        <a:srgbClr val="654A79"/>
+                      </a:solidFill>
+                      <a:prstDash val="solid"/>
+                    </a:lnB>
+                    <a:solidFill>
+                      <a:srgbClr val="0D0912"/>
+                    </a:solidFill>
+                  </a:tcPr>
+                </a:tc>
+              </a:tr>
+              <a:tr h="428625">
+                <a:tc>
+                  <a:txBody>
+                    <a:bodyPr wrap="square" lIns="152400" tIns="85725" rIns="114300" bIns="76200"/>
+                    <a:lstStyle/>
+                    <a:p>
+                      <a:r>
+                        <a:rPr sz="1650" b="0">
+                          <a:solidFill>
+                            <a:srgbClr val="F6E0F5"/>
+                          </a:solidFill>
+                          <a:latin typeface="Microsoft JhengHei"/>
+                          <a:ea typeface="Microsoft JhengHei"/>
+                          <a:cs typeface="Microsoft JhengHei"/>
+                        </a:rPr>
+                        <a:t>P0（現況）</a:t>
+                      </a:r>
+                    </a:p>
+                  </a:txBody>
+                  <a:tcPr marL="91440" marR="91440" marT="45720" marB="45720">
+                    <a:lnL w="6668">
+                      <a:solidFill>
+                        <a:srgbClr val="654A79"/>
+                      </a:solidFill>
+                      <a:prstDash val="solid"/>
+                    </a:lnL>
+                    <a:lnR w="6668">
+                      <a:solidFill>
+                        <a:srgbClr val="654A79"/>
+                      </a:solidFill>
+                      <a:prstDash val="solid"/>
+                    </a:lnR>
+                    <a:lnB w="6668">
+                      <a:solidFill>
+                        <a:srgbClr val="654A79"/>
+                      </a:solidFill>
+                      <a:prstDash val="solid"/>
+                    </a:lnB>
+                    <a:solidFill>
+                      <a:srgbClr val="0D0912"/>
+                    </a:solidFill>
+                  </a:tcPr>
+                </a:tc>
+                <a:tc>
+                  <a:txBody>
+                    <a:bodyPr wrap="square" lIns="152400" tIns="85725" rIns="114300" bIns="76200"/>
+                    <a:lstStyle/>
+                    <a:p>
+                      <a:r>
+                        <a:rPr sz="1650" b="0">
+                          <a:solidFill>
+                            <a:srgbClr val="F6E0F5"/>
+                          </a:solidFill>
+                          <a:latin typeface="Microsoft JhengHei"/>
+                          <a:ea typeface="Microsoft JhengHei"/>
+                          <a:cs typeface="Microsoft JhengHei"/>
+                        </a:rPr>
+                        <a:t>維持現況</a:t>
+                      </a:r>
+                    </a:p>
+                  </a:txBody>
+                  <a:tcPr marL="91440" marR="91440" marT="45720" marB="45720">
+                    <a:lnR w="6668">
+                      <a:solidFill>
+                        <a:srgbClr val="654A79"/>
+                      </a:solidFill>
+                      <a:prstDash val="solid"/>
+                    </a:lnR>
+                    <a:lnB w="6668">
+                      <a:solidFill>
+                        <a:srgbClr val="654A79"/>
+                      </a:solidFill>
+                      <a:prstDash val="solid"/>
+                    </a:lnB>
+                    <a:solidFill>
+                      <a:srgbClr val="0D0912"/>
+                    </a:solidFill>
+                  </a:tcPr>
+                </a:tc>
+                <a:tc>
+                  <a:txBody>
+                    <a:bodyPr wrap="square" lIns="152400" tIns="85725" rIns="114300" bIns="76200"/>
+                    <a:lstStyle/>
+                    <a:p>
+                      <a:r>
+                        <a:rPr sz="1650" b="0">
+                          <a:solidFill>
+                            <a:srgbClr val="F6E0F5"/>
+                          </a:solidFill>
+                          <a:latin typeface="Microsoft JhengHei"/>
+                          <a:ea typeface="Microsoft JhengHei"/>
+                          <a:cs typeface="Microsoft JhengHei"/>
+                        </a:rPr>
+                        <a:t>改善前的比較基準</a:t>
+                      </a:r>
+                    </a:p>
+                  </a:txBody>
+                  <a:tcPr marL="91440" marR="91440" marT="45720" marB="45720">
+                    <a:lnR w="6668">
+                      <a:solidFill>
+                        <a:srgbClr val="654A79"/>
+                      </a:solidFill>
+                      <a:prstDash val="solid"/>
+                    </a:lnR>
+                    <a:lnB w="6668">
+                      <a:solidFill>
+                        <a:srgbClr val="654A79"/>
+                      </a:solidFill>
+                      <a:prstDash val="solid"/>
+                    </a:lnB>
+                    <a:solidFill>
+                      <a:srgbClr val="0D0912"/>
+                    </a:solidFill>
+                  </a:tcPr>
+                </a:tc>
+              </a:tr>
+              <a:tr h="428625">
+                <a:tc>
+                  <a:txBody>
+                    <a:bodyPr wrap="square" lIns="152400" tIns="85725" rIns="114300" bIns="76200"/>
+                    <a:lstStyle/>
+                    <a:p>
+                      <a:r>
+                        <a:rPr sz="1650" b="0">
+                          <a:solidFill>
+                            <a:srgbClr val="F6E0F5"/>
+                          </a:solidFill>
+                          <a:latin typeface="Microsoft JhengHei"/>
+                          <a:ea typeface="Microsoft JhengHei"/>
+                          <a:cs typeface="Microsoft JhengHei"/>
+                        </a:rPr>
+                        <a:t>P1</a:t>
+                      </a:r>
+                    </a:p>
+                  </a:txBody>
+                  <a:tcPr marL="91440" marR="91440" marT="45720" marB="45720">
+                    <a:lnL w="6668">
+                      <a:solidFill>
+                        <a:srgbClr val="654A79"/>
+                      </a:solidFill>
+                      <a:prstDash val="solid"/>
+                    </a:lnL>
+                    <a:lnR w="6668">
+                      <a:solidFill>
+                        <a:srgbClr val="654A79"/>
+                      </a:solidFill>
+                      <a:prstDash val="solid"/>
+                    </a:lnR>
+                    <a:lnB w="6668">
+                      <a:solidFill>
+                        <a:srgbClr val="654A79"/>
+                      </a:solidFill>
+                      <a:prstDash val="solid"/>
+                    </a:lnB>
+                    <a:solidFill>
+                      <a:srgbClr val="0D0912"/>
+                    </a:solidFill>
+                  </a:tcPr>
+                </a:tc>
+                <a:tc>
+                  <a:txBody>
+                    <a:bodyPr wrap="square" lIns="152400" tIns="85725" rIns="114300" bIns="76200"/>
+                    <a:lstStyle/>
+                    <a:p>
+                      <a:r>
+                        <a:rPr sz="1650" b="0">
+                          <a:solidFill>
+                            <a:srgbClr val="F6E0F5"/>
+                          </a:solidFill>
+                          <a:latin typeface="Microsoft JhengHei"/>
+                          <a:ea typeface="Microsoft JhengHei"/>
+                          <a:cs typeface="Microsoft JhengHei"/>
+                        </a:rPr>
+                        <a:t>增加第二台清洗機</a:t>
+                      </a:r>
+                    </a:p>
+                  </a:txBody>
+                  <a:tcPr marL="91440" marR="91440" marT="45720" marB="45720">
+                    <a:lnR w="6668">
+                      <a:solidFill>
+                        <a:srgbClr val="654A79"/>
+                      </a:solidFill>
+                      <a:prstDash val="solid"/>
+                    </a:lnR>
+                    <a:lnB w="6668">
+                      <a:solidFill>
+                        <a:srgbClr val="654A79"/>
+                      </a:solidFill>
+                      <a:prstDash val="solid"/>
+                    </a:lnB>
+                    <a:solidFill>
+                      <a:srgbClr val="0D0912"/>
+                    </a:solidFill>
+                  </a:tcPr>
+                </a:tc>
+                <a:tc>
+                  <a:txBody>
+                    <a:bodyPr wrap="square" lIns="152400" tIns="85725" rIns="114300" bIns="76200"/>
+                    <a:lstStyle/>
+                    <a:p>
+                      <a:r>
+                        <a:rPr sz="1650" b="0">
+                          <a:solidFill>
+                            <a:srgbClr val="F6E0F5"/>
+                          </a:solidFill>
+                          <a:latin typeface="Microsoft JhengHei"/>
+                          <a:ea typeface="Microsoft JhengHei"/>
+                          <a:cs typeface="Microsoft JhengHei"/>
+                        </a:rPr>
+                        <a:t>擴充設備</a:t>
+                      </a:r>
+                    </a:p>
+                  </a:txBody>
+                  <a:tcPr marL="91440" marR="91440" marT="45720" marB="45720">
+                    <a:lnR w="6668">
+                      <a:solidFill>
+                        <a:srgbClr val="654A79"/>
+                      </a:solidFill>
+                      <a:prstDash val="solid"/>
+                    </a:lnR>
+                    <a:lnB w="6668">
+                      <a:solidFill>
+                        <a:srgbClr val="654A79"/>
+                      </a:solidFill>
+                      <a:prstDash val="solid"/>
+                    </a:lnB>
+                    <a:solidFill>
+                      <a:srgbClr val="0D0912"/>
+                    </a:solidFill>
+                  </a:tcPr>
+                </a:tc>
+              </a:tr>
+              <a:tr h="428625">
+                <a:tc>
+                  <a:txBody>
+                    <a:bodyPr wrap="square" lIns="152400" tIns="85725" rIns="114300" bIns="76200"/>
+                    <a:lstStyle/>
+                    <a:p>
+                      <a:r>
+                        <a:rPr sz="1650" b="0">
+                          <a:solidFill>
+                            <a:srgbClr val="F6E0F5"/>
+                          </a:solidFill>
+                          <a:latin typeface="Microsoft JhengHei"/>
+                          <a:ea typeface="Microsoft JhengHei"/>
+                          <a:cs typeface="Microsoft JhengHei"/>
+                        </a:rPr>
+                        <a:t>P2</a:t>
+                      </a:r>
+                    </a:p>
+                  </a:txBody>
+                  <a:tcPr marL="91440" marR="91440" marT="45720" marB="45720">
+                    <a:lnL w="6668">
+                      <a:solidFill>
+                        <a:srgbClr val="654A79"/>
+                      </a:solidFill>
+                      <a:prstDash val="solid"/>
+                    </a:lnL>
+                    <a:lnR w="6668">
+                      <a:solidFill>
+                        <a:srgbClr val="654A79"/>
+                      </a:solidFill>
+                      <a:prstDash val="solid"/>
+                    </a:lnR>
+                    <a:lnB w="6668">
+                      <a:solidFill>
+                        <a:srgbClr val="654A79"/>
+                      </a:solidFill>
+                      <a:prstDash val="solid"/>
+                    </a:lnB>
+                    <a:solidFill>
+                      <a:srgbClr val="0D0912"/>
+                    </a:solidFill>
+                  </a:tcPr>
+                </a:tc>
+                <a:tc>
+                  <a:txBody>
+                    <a:bodyPr wrap="square" lIns="152400" tIns="85725" rIns="114300" bIns="76200"/>
+                    <a:lstStyle/>
+                    <a:p>
+                      <a:r>
+                        <a:rPr sz="1650" b="0">
+                          <a:solidFill>
+                            <a:srgbClr val="F6E0F5"/>
+                          </a:solidFill>
+                          <a:latin typeface="Microsoft JhengHei"/>
+                          <a:ea typeface="Microsoft JhengHei"/>
+                          <a:cs typeface="Microsoft JhengHei"/>
+                        </a:rPr>
+                        <a:t>僅增加緩衝</a:t>
+                      </a:r>
+                    </a:p>
+                  </a:txBody>
+                  <a:tcPr marL="91440" marR="91440" marT="45720" marB="45720">
+                    <a:lnR w="6668">
+                      <a:solidFill>
+                        <a:srgbClr val="654A79"/>
+                      </a:solidFill>
+                      <a:prstDash val="solid"/>
+                    </a:lnR>
+                    <a:lnB w="6668">
+                      <a:solidFill>
+                        <a:srgbClr val="654A79"/>
+                      </a:solidFill>
+                      <a:prstDash val="solid"/>
+                    </a:lnB>
+                    <a:solidFill>
+                      <a:srgbClr val="0D0912"/>
+                    </a:solidFill>
+                  </a:tcPr>
+                </a:tc>
+                <a:tc>
+                  <a:txBody>
+                    <a:bodyPr wrap="square" lIns="152400" tIns="85725" rIns="114300" bIns="76200"/>
+                    <a:lstStyle/>
+                    <a:p>
+                      <a:r>
+                        <a:rPr sz="1650" b="0">
+                          <a:solidFill>
+                            <a:srgbClr val="F6E0F5"/>
+                          </a:solidFill>
+                          <a:latin typeface="Microsoft JhengHei"/>
+                          <a:ea typeface="Microsoft JhengHei"/>
+                          <a:cs typeface="Microsoft JhengHei"/>
+                        </a:rPr>
+                        <a:t>改緩衝長度</a:t>
+                      </a:r>
+                    </a:p>
+                  </a:txBody>
+                  <a:tcPr marL="91440" marR="91440" marT="45720" marB="45720">
+                    <a:lnR w="6668">
+                      <a:solidFill>
+                        <a:srgbClr val="654A79"/>
+                      </a:solidFill>
+                      <a:prstDash val="solid"/>
+                    </a:lnR>
+                    <a:lnB w="6668">
+                      <a:solidFill>
+                        <a:srgbClr val="654A79"/>
+                      </a:solidFill>
+                      <a:prstDash val="solid"/>
+                    </a:lnB>
+                    <a:solidFill>
+                      <a:srgbClr val="0D0912"/>
+                    </a:solidFill>
+                  </a:tcPr>
+                </a:tc>
+              </a:tr>
+              <a:tr h="428625">
+                <a:tc>
+                  <a:txBody>
+                    <a:bodyPr wrap="square" lIns="152400" tIns="85725" rIns="114300" bIns="76200"/>
+                    <a:lstStyle/>
+                    <a:p>
+                      <a:r>
+                        <a:rPr sz="1650" b="0">
+                          <a:solidFill>
+                            <a:srgbClr val="F6E0F5"/>
+                          </a:solidFill>
+                          <a:latin typeface="Microsoft JhengHei"/>
+                          <a:ea typeface="Microsoft JhengHei"/>
+                          <a:cs typeface="Microsoft JhengHei"/>
+                        </a:rPr>
+                        <a:t>P3</a:t>
+                      </a:r>
+                    </a:p>
+                  </a:txBody>
+                  <a:tcPr marL="91440" marR="91440" marT="45720" marB="45720">
+                    <a:lnL w="6668">
+                      <a:solidFill>
+                        <a:srgbClr val="654A79"/>
+                      </a:solidFill>
+                      <a:prstDash val="solid"/>
+                    </a:lnL>
+                    <a:lnR w="6668">
+                      <a:solidFill>
+                        <a:srgbClr val="654A79"/>
+                      </a:solidFill>
+                      <a:prstDash val="solid"/>
+                    </a:lnR>
+                    <a:lnB w="6668">
+                      <a:solidFill>
+                        <a:srgbClr val="654A79"/>
+                      </a:solidFill>
+                      <a:prstDash val="solid"/>
+                    </a:lnB>
+                    <a:solidFill>
+                      <a:srgbClr val="0D0912"/>
+                    </a:solidFill>
+                  </a:tcPr>
+                </a:tc>
+                <a:tc>
+                  <a:txBody>
+                    <a:bodyPr wrap="square" lIns="152400" tIns="85725" rIns="114300" bIns="76200"/>
+                    <a:lstStyle/>
+                    <a:p>
+                      <a:r>
+                        <a:rPr sz="1650" b="0">
+                          <a:solidFill>
+                            <a:srgbClr val="F6E0F5"/>
+                          </a:solidFill>
+                          <a:latin typeface="Microsoft JhengHei"/>
+                          <a:ea typeface="Microsoft JhengHei"/>
+                          <a:cs typeface="Microsoft JhengHei"/>
+                        </a:rPr>
+                        <a:t>外包清洗</a:t>
+                      </a:r>
+                    </a:p>
+                  </a:txBody>
+                  <a:tcPr marL="91440" marR="91440" marT="45720" marB="45720">
+                    <a:lnR w="6668">
+                      <a:solidFill>
+                        <a:srgbClr val="654A79"/>
+                      </a:solidFill>
+                      <a:prstDash val="solid"/>
+                    </a:lnR>
+                    <a:lnB w="6668">
+                      <a:solidFill>
+                        <a:srgbClr val="654A79"/>
+                      </a:solidFill>
+                      <a:prstDash val="solid"/>
+                    </a:lnB>
+                    <a:solidFill>
+                      <a:srgbClr val="0D0912"/>
+                    </a:solidFill>
+                  </a:tcPr>
+                </a:tc>
+                <a:tc>
+                  <a:txBody>
+                    <a:bodyPr wrap="square" lIns="152400" tIns="85725" rIns="114300" bIns="76200"/>
+                    <a:lstStyle/>
+                    <a:p>
+                      <a:r>
+                        <a:rPr sz="1650" b="0">
+                          <a:solidFill>
+                            <a:srgbClr val="F6E0F5"/>
+                          </a:solidFill>
+                          <a:latin typeface="Microsoft JhengHei"/>
+                          <a:ea typeface="Microsoft JhengHei"/>
+                          <a:cs typeface="Microsoft JhengHei"/>
+                        </a:rPr>
+                        <a:t>送出後等待4小時回流</a:t>
+                      </a:r>
+                    </a:p>
+                  </a:txBody>
+                  <a:tcPr marL="91440" marR="91440" marT="45720" marB="45720">
+                    <a:lnR w="6668">
+                      <a:solidFill>
+                        <a:srgbClr val="654A79"/>
+                      </a:solidFill>
+                      <a:prstDash val="solid"/>
+                    </a:lnR>
+                    <a:lnB w="6668">
+                      <a:solidFill>
+                        <a:srgbClr val="654A79"/>
+                      </a:solidFill>
+                      <a:prstDash val="solid"/>
+                    </a:lnB>
+                    <a:solidFill>
+                      <a:srgbClr val="0D0912"/>
+                    </a:solidFill>
+                  </a:tcPr>
+                </a:tc>
+              </a:tr>
+              <a:tr h="428625">
+                <a:tc>
+                  <a:txBody>
+                    <a:bodyPr wrap="square" lIns="152400" tIns="85725" rIns="114300" bIns="76200"/>
+                    <a:lstStyle/>
+                    <a:p>
+                      <a:r>
+                        <a:rPr sz="1650" b="0">
+                          <a:solidFill>
+                            <a:srgbClr val="F6E0F5"/>
+                          </a:solidFill>
+                          <a:latin typeface="Microsoft JhengHei"/>
+                          <a:ea typeface="Microsoft JhengHei"/>
+                          <a:cs typeface="Microsoft JhengHei"/>
+                        </a:rPr>
+                        <a:t>P4</a:t>
+                      </a:r>
+                    </a:p>
+                  </a:txBody>
+                  <a:tcPr marL="91440" marR="91440" marT="45720" marB="45720">
+                    <a:lnL w="6668">
+                      <a:solidFill>
+                        <a:srgbClr val="654A79"/>
+                      </a:solidFill>
+                      <a:prstDash val="solid"/>
+                    </a:lnL>
+                    <a:lnR w="6668">
+                      <a:solidFill>
+                        <a:srgbClr val="654A79"/>
+                      </a:solidFill>
+                      <a:prstDash val="solid"/>
+                    </a:lnR>
+                    <a:lnB w="6668">
+                      <a:solidFill>
+                        <a:srgbClr val="654A79"/>
+                      </a:solidFill>
+                      <a:prstDash val="solid"/>
+                    </a:lnB>
+                    <a:solidFill>
+                      <a:srgbClr val="0D0912"/>
+                    </a:solidFill>
+                  </a:tcPr>
+                </a:tc>
+                <a:tc>
+                  <a:txBody>
+                    <a:bodyPr wrap="square" lIns="152400" tIns="85725" rIns="114300" bIns="76200"/>
+                    <a:lstStyle/>
+                    <a:p>
+                      <a:r>
+                        <a:rPr sz="1650" b="0">
+                          <a:solidFill>
+                            <a:srgbClr val="F6E0F5"/>
+                          </a:solidFill>
+                          <a:latin typeface="Microsoft JhengHei"/>
+                          <a:ea typeface="Microsoft JhengHei"/>
+                          <a:cs typeface="Microsoft JhengHei"/>
+                        </a:rPr>
+                        <a:t>聯合改善</a:t>
+                      </a:r>
+                    </a:p>
+                  </a:txBody>
+                  <a:tcPr marL="91440" marR="91440" marT="45720" marB="45720">
+                    <a:lnR w="6668">
+                      <a:solidFill>
+                        <a:srgbClr val="654A79"/>
+                      </a:solidFill>
+                      <a:prstDash val="solid"/>
+                    </a:lnR>
+                    <a:lnB w="6668">
+                      <a:solidFill>
+                        <a:srgbClr val="654A79"/>
+                      </a:solidFill>
+                      <a:prstDash val="solid"/>
+                    </a:lnB>
+                    <a:solidFill>
+                      <a:srgbClr val="0D0912"/>
+                    </a:solidFill>
+                  </a:tcPr>
+                </a:tc>
+                <a:tc>
+                  <a:txBody>
+                    <a:bodyPr wrap="square" lIns="152400" tIns="85725" rIns="114300" bIns="76200"/>
+                    <a:lstStyle/>
+                    <a:p>
+                      <a:r>
+                        <a:rPr sz="1650" b="0">
+                          <a:solidFill>
+                            <a:srgbClr val="F6E0F5"/>
+                          </a:solidFill>
+                          <a:latin typeface="Microsoft JhengHei"/>
+                          <a:ea typeface="Microsoft JhengHei"/>
+                          <a:cs typeface="Microsoft JhengHei"/>
+                        </a:rPr>
+                        <a:t>緩衝＋人員支援＋觸發式外包</a:t>
+                      </a:r>
+                    </a:p>
+                  </a:txBody>
+                  <a:tcPr marL="91440" marR="91440" marT="45720" marB="45720">
+                    <a:lnR w="6668">
+                      <a:solidFill>
+                        <a:srgbClr val="654A79"/>
+                      </a:solidFill>
+                      <a:prstDash val="solid"/>
+                    </a:lnR>
+                    <a:lnB w="6668">
+                      <a:solidFill>
+                        <a:srgbClr val="654A79"/>
+                      </a:solidFill>
+                      <a:prstDash val="solid"/>
+                    </a:lnB>
+                    <a:solidFill>
+                      <a:srgbClr val="0D0912"/>
+                    </a:solidFill>
+                  </a:tcPr>
+                </a:tc>
+              </a:tr>
+            </a:tbl>
+          </a:graphicData>
+        </a:graphic>
+      </p:graphicFrame>
+      <p:sp>
+        <p:nvSpPr>
+          <p:cNvPr id="18" name="內容_2_S＝需求情境，P＝改善方案；">
             <a:extLst xmlns:a="http://schemas.openxmlformats.org/drawingml/2006/main">
               <a:ext uri="{FF2B5EF4-FFF2-40B4-BE49-F238E27FC236}">
-                <a16:creationId xmlns:a16="http://schemas.microsoft.com/office/drawing/2014/main" id="{41B3B411-B06D-4A03-9417-F52B8772A178}"/>
-              </a:ext>
-            </a:extLst>
-          </p:cNvPr>
-          <p:cNvSpPr>
-            <a:spLocks xmlns:a="http://schemas.openxmlformats.org/drawingml/2006/main" noGrp="1"/>
-          </p:cNvSpPr>
-          <p:nvPr/>
-        </p:nvSpPr>
-        <p:spPr>
-          <a:xfrm xmlns:a="http://schemas.openxmlformats.org/drawingml/2006/main">
-            <a:off x="1581150" y="5953125"/>
-            <a:ext cx="7143750" cy="619125"/>
-          </a:xfrm>
-          <a:prstGeom xmlns:a="http://schemas.openxmlformats.org/drawingml/2006/main" prst="rect">
-            <a:avLst/>
-          </a:prstGeom>
-          <a:noFill xmlns:a="http://schemas.openxmlformats.org/drawingml/2006/main"/>
-          <a:ln xmlns:a="http://schemas.openxmlformats.org/drawingml/2006/main" w="0">
-            <a:noFill/>
-          </a:ln>
-        </p:spPr>
-        <p:txBody>
-          <a:bodyPr xmlns:a="http://schemas.openxmlformats.org/drawingml/2006/main" wrap="square" lIns="0" tIns="0" rIns="0" bIns="0">
-            <a:noAutofit/>
-          </a:bodyPr>
-          <a:lstStyle xmlns:a="http://schemas.openxmlformats.org/drawingml/2006/main">
-            <a:defPPr>
-              <a:defRPr sz="2700" b="0">
-                <a:solidFill>
-                  <a:srgbClr val="F6E0F5"/>
-                </a:solidFill>
-                <a:latin typeface="Microsoft JhengHei"/>
-                <a:ea typeface="Microsoft JhengHei"/>
-                <a:cs typeface="Microsoft JhengHei"/>
-              </a:defRPr>
-            </a:defPPr>
-            <a:lvl1pPr>
-              <a:defRPr sz="2700" b="0">
-                <a:solidFill>
-                  <a:srgbClr val="F6E0F5"/>
-                </a:solidFill>
-                <a:latin typeface="Microsoft JhengHei"/>
-                <a:ea typeface="Microsoft JhengHei"/>
-                <a:cs typeface="Microsoft JhengHei"/>
-              </a:defRPr>
-            </a:lvl1pPr>
-            <a:lvl2pPr>
-              <a:defRPr sz="2700" b="0">
-                <a:solidFill>
-                  <a:srgbClr val="F6E0F5"/>
-                </a:solidFill>
-                <a:latin typeface="Microsoft JhengHei"/>
-                <a:ea typeface="Microsoft JhengHei"/>
-                <a:cs typeface="Microsoft JhengHei"/>
-              </a:defRPr>
-            </a:lvl2pPr>
-            <a:lvl3pPr>
-              <a:defRPr sz="2700" b="0">
-                <a:solidFill>
-                  <a:srgbClr val="F6E0F5"/>
-                </a:solidFill>
-                <a:latin typeface="Microsoft JhengHei"/>
-                <a:ea typeface="Microsoft JhengHei"/>
-                <a:cs typeface="Microsoft JhengHei"/>
-              </a:defRPr>
-            </a:lvl3pPr>
-            <a:lvl4pPr>
-              <a:defRPr sz="2700" b="0">
-                <a:solidFill>
-                  <a:srgbClr val="F6E0F5"/>
-                </a:solidFill>
-                <a:latin typeface="Microsoft JhengHei"/>
-                <a:ea typeface="Microsoft JhengHei"/>
-                <a:cs typeface="Microsoft JhengHei"/>
-              </a:defRPr>
-            </a:lvl4pPr>
-            <a:lvl5pPr>
-              <a:defRPr sz="2700" b="0">
-                <a:solidFill>
-                  <a:srgbClr val="F6E0F5"/>
-                </a:solidFill>
-                <a:latin typeface="Microsoft JhengHei"/>
-                <a:ea typeface="Microsoft JhengHei"/>
-                <a:cs typeface="Microsoft JhengHei"/>
-              </a:defRPr>
-            </a:lvl5pPr>
-            <a:lvl6pPr>
-              <a:defRPr sz="2700" b="0">
-                <a:solidFill>
-                  <a:srgbClr val="F6E0F5"/>
-                </a:solidFill>
-                <a:latin typeface="Microsoft JhengHei"/>
-                <a:ea typeface="Microsoft JhengHei"/>
-                <a:cs typeface="Microsoft JhengHei"/>
-              </a:defRPr>
-            </a:lvl6pPr>
-            <a:lvl7pPr>
-              <a:defRPr sz="2700" b="0">
-                <a:solidFill>
-                  <a:srgbClr val="F6E0F5"/>
-                </a:solidFill>
-                <a:latin typeface="Microsoft JhengHei"/>
-                <a:ea typeface="Microsoft JhengHei"/>
-                <a:cs typeface="Microsoft JhengHei"/>
-              </a:defRPr>
-            </a:lvl7pPr>
-            <a:lvl8pPr>
-              <a:defRPr sz="2700" b="0">
-                <a:solidFill>
-                  <a:srgbClr val="F6E0F5"/>
-                </a:solidFill>
-                <a:latin typeface="Microsoft JhengHei"/>
-                <a:ea typeface="Microsoft JhengHei"/>
-                <a:cs typeface="Microsoft JhengHei"/>
-              </a:defRPr>
-            </a:lvl8pPr>
-            <a:lvl9pPr>
-              <a:defRPr sz="2700" b="0">
-                <a:solidFill>
-                  <a:srgbClr val="F6E0F5"/>
-                </a:solidFill>
-                <a:latin typeface="Microsoft JhengHei"/>
-                <a:ea typeface="Microsoft JhengHei"/>
-                <a:cs typeface="Microsoft JhengHei"/>
-              </a:defRPr>
-            </a:lvl9pPr>
-          </a:lstStyle>
-          <a:p xmlns:a="http://schemas.openxmlformats.org/drawingml/2006/main">
-            <a:pPr>
-              <a:defRPr sz="2700" b="0">
-                <a:solidFill>
-                  <a:srgbClr val="F6E0F5"/>
-                </a:solidFill>
-                <a:latin typeface="Microsoft JhengHei"/>
-                <a:ea typeface="Microsoft JhengHei"/>
-                <a:cs typeface="Microsoft JhengHei"/>
-              </a:defRPr>
-            </a:pPr>
-            <a:r>
-              <a:rPr sz="2700" b="0">
-                <a:solidFill>
-                  <a:srgbClr val="F6E0F5"/>
-                </a:solidFill>
-                <a:latin typeface="Microsoft JhengHei"/>
-                <a:ea typeface="Microsoft JhengHei"/>
-                <a:cs typeface="Microsoft JhengHei"/>
-              </a:rPr>
-              <a:t>課程設定的退貨率</a:t>
-            </a:r>
-          </a:p>
-        </p:txBody>
-      </p:sp>
-      <p:sp>
-        <p:nvSpPr>
-          <p:cNvPr id="19" name="內容_2_短波尖峰：3波 × 20分鐘">
-            <a:extLst xmlns:a="http://schemas.openxmlformats.org/drawingml/2006/main">
-              <a:ext uri="{FF2B5EF4-FFF2-40B4-BE49-F238E27FC236}">
-                <a16:creationId xmlns:a16="http://schemas.microsoft.com/office/drawing/2014/main" id="{4574CF85-266D-47B4-8075-5EE708E97825}"/>
-              </a:ext>
-            </a:extLst>
-          </p:cNvPr>
-          <p:cNvSpPr>
-            <a:spLocks xmlns:a="http://schemas.openxmlformats.org/drawingml/2006/main" noGrp="1"/>
-          </p:cNvSpPr>
-          <p:nvPr/>
-        </p:nvSpPr>
-        <p:spPr>
-          <a:xfrm xmlns:a="http://schemas.openxmlformats.org/drawingml/2006/main">
-            <a:off x="8382000" y="4524375"/>
-            <a:ext cx="7429500" cy="2762250"/>
-          </a:xfrm>
-          <a:prstGeom xmlns:a="http://schemas.openxmlformats.org/drawingml/2006/main" prst="rect">
-            <a:avLst/>
-          </a:prstGeom>
-          <a:noFill xmlns:a="http://schemas.openxmlformats.org/drawingml/2006/main"/>
-          <a:ln xmlns:a="http://schemas.openxmlformats.org/drawingml/2006/main" w="0">
-            <a:noFill/>
-          </a:ln>
-        </p:spPr>
-        <p:txBody>
-          <a:bodyPr xmlns:a="http://schemas.openxmlformats.org/drawingml/2006/main" wrap="square" lIns="0" tIns="0" rIns="0" bIns="0">
-            <a:noAutofit/>
-          </a:bodyPr>
-          <a:lstStyle xmlns:a="http://schemas.openxmlformats.org/drawingml/2006/main">
-            <a:defPPr>
-              <a:defRPr sz="2700" b="0">
-                <a:solidFill>
-                  <a:srgbClr val="F6E0F5"/>
-                </a:solidFill>
-                <a:latin typeface="Microsoft JhengHei"/>
-                <a:ea typeface="Microsoft JhengHei"/>
-                <a:cs typeface="Microsoft JhengHei"/>
-              </a:defRPr>
-            </a:defPPr>
-            <a:lvl1pPr>
-              <a:defRPr sz="2700" b="0">
-                <a:solidFill>
-                  <a:srgbClr val="F6E0F5"/>
-                </a:solidFill>
-                <a:latin typeface="Microsoft JhengHei"/>
-                <a:ea typeface="Microsoft JhengHei"/>
-                <a:cs typeface="Microsoft JhengHei"/>
-              </a:defRPr>
-            </a:lvl1pPr>
-            <a:lvl2pPr>
-              <a:defRPr sz="2700" b="0">
-                <a:solidFill>
-                  <a:srgbClr val="F6E0F5"/>
-                </a:solidFill>
-                <a:latin typeface="Microsoft JhengHei"/>
-                <a:ea typeface="Microsoft JhengHei"/>
-                <a:cs typeface="Microsoft JhengHei"/>
-              </a:defRPr>
-            </a:lvl2pPr>
-            <a:lvl3pPr>
-              <a:defRPr sz="2700" b="0">
-                <a:solidFill>
-                  <a:srgbClr val="F6E0F5"/>
-                </a:solidFill>
-                <a:latin typeface="Microsoft JhengHei"/>
-                <a:ea typeface="Microsoft JhengHei"/>
-                <a:cs typeface="Microsoft JhengHei"/>
-              </a:defRPr>
-            </a:lvl3pPr>
-            <a:lvl4pPr>
-              <a:defRPr sz="2700" b="0">
-                <a:solidFill>
-                  <a:srgbClr val="F6E0F5"/>
-                </a:solidFill>
-                <a:latin typeface="Microsoft JhengHei"/>
-                <a:ea typeface="Microsoft JhengHei"/>
-                <a:cs typeface="Microsoft JhengHei"/>
-              </a:defRPr>
-            </a:lvl4pPr>
-            <a:lvl5pPr>
-              <a:defRPr sz="2700" b="0">
-                <a:solidFill>
-                  <a:srgbClr val="F6E0F5"/>
-                </a:solidFill>
-                <a:latin typeface="Microsoft JhengHei"/>
-                <a:ea typeface="Microsoft JhengHei"/>
-                <a:cs typeface="Microsoft JhengHei"/>
-              </a:defRPr>
-            </a:lvl5pPr>
-            <a:lvl6pPr>
-              <a:defRPr sz="2700" b="0">
-                <a:solidFill>
-                  <a:srgbClr val="F6E0F5"/>
-                </a:solidFill>
-                <a:latin typeface="Microsoft JhengHei"/>
-                <a:ea typeface="Microsoft JhengHei"/>
-                <a:cs typeface="Microsoft JhengHei"/>
-              </a:defRPr>
-            </a:lvl6pPr>
-            <a:lvl7pPr>
-              <a:defRPr sz="2700" b="0">
-                <a:solidFill>
-                  <a:srgbClr val="F6E0F5"/>
-                </a:solidFill>
-                <a:latin typeface="Microsoft JhengHei"/>
-                <a:ea typeface="Microsoft JhengHei"/>
-                <a:cs typeface="Microsoft JhengHei"/>
-              </a:defRPr>
-            </a:lvl7pPr>
-            <a:lvl8pPr>
-              <a:defRPr sz="2700" b="0">
-                <a:solidFill>
-                  <a:srgbClr val="F6E0F5"/>
-                </a:solidFill>
-                <a:latin typeface="Microsoft JhengHei"/>
-                <a:ea typeface="Microsoft JhengHei"/>
-                <a:cs typeface="Microsoft JhengHei"/>
-              </a:defRPr>
-            </a:lvl8pPr>
-            <a:lvl9pPr>
-              <a:defRPr sz="2700" b="0">
-                <a:solidFill>
-                  <a:srgbClr val="F6E0F5"/>
-                </a:solidFill>
-                <a:latin typeface="Microsoft JhengHei"/>
-                <a:ea typeface="Microsoft JhengHei"/>
-                <a:cs typeface="Microsoft JhengHei"/>
-              </a:defRPr>
-            </a:lvl9pPr>
-          </a:lstStyle>
-          <a:p xmlns:a="http://schemas.openxmlformats.org/drawingml/2006/main">
-            <a:pPr>
-              <a:defRPr sz="2700" b="0">
-                <a:solidFill>
-                  <a:srgbClr val="F6E0F5"/>
-                </a:solidFill>
-                <a:latin typeface="Microsoft JhengHei"/>
-                <a:ea typeface="Microsoft JhengHei"/>
-                <a:cs typeface="Microsoft JhengHei"/>
-              </a:defRPr>
-            </a:pPr>
-            <a:r>
-              <a:rPr sz="2700" b="0">
-                <a:solidFill>
-                  <a:srgbClr val="F6E0F5"/>
-                </a:solidFill>
-                <a:latin typeface="Microsoft JhengHei"/>
-                <a:ea typeface="Microsoft JhengHei"/>
-                <a:cs typeface="Microsoft JhengHei"/>
-              </a:rPr>
-              <a:t>短波尖峰：3波 × 20分鐘。</a:t>
-            </a:r>
-          </a:p>
-          <a:p xmlns:a="http://schemas.openxmlformats.org/drawingml/2006/main">
-            <a:pPr>
-              <a:defRPr sz="2700" b="0">
-                <a:solidFill>
-                  <a:srgbClr val="F6E0F5"/>
-                </a:solidFill>
-                <a:latin typeface="Microsoft JhengHei"/>
-                <a:ea typeface="Microsoft JhengHei"/>
-                <a:cs typeface="Microsoft JhengHei"/>
-              </a:defRPr>
-            </a:pPr>
-            <a:r>
-              <a:rPr sz="2700" b="0">
-                <a:solidFill>
-                  <a:srgbClr val="F6E0F5"/>
-                </a:solidFill>
-                <a:latin typeface="Microsoft JhengHei"/>
-                <a:ea typeface="Microsoft JhengHei"/>
-                <a:cs typeface="Microsoft JhengHei"/>
-              </a:rPr>
-              <a:t>210/h是60/h的3.5倍，增加250%。</a:t>
-            </a:r>
-          </a:p>
-          <a:p xmlns:a="http://schemas.openxmlformats.org/drawingml/2006/main">
-            <a:pPr>
-              <a:defRPr sz="2700" b="0">
-                <a:solidFill>
-                  <a:srgbClr val="F6E0F5"/>
-                </a:solidFill>
-                <a:latin typeface="Microsoft JhengHei"/>
-                <a:ea typeface="Microsoft JhengHei"/>
-                <a:cs typeface="Microsoft JhengHei"/>
-              </a:defRPr>
-            </a:pPr>
-            <a:r>
-              <a:rPr sz="2700" b="0">
-                <a:solidFill>
-                  <a:srgbClr val="F6E0F5"/>
-                </a:solidFill>
-                <a:latin typeface="Microsoft JhengHei"/>
-                <a:ea typeface="Microsoft JhengHei"/>
-                <a:cs typeface="Microsoft JhengHei"/>
-              </a:rPr>
-              <a:t>六日總量約1.43倍，不是全日超載。</a:t>
-            </a:r>
-          </a:p>
-        </p:txBody>
-      </p:sp>
-      <p:sp>
-        <p:nvSpPr>
-          <p:cNvPr id="20" name="內容_2_主DOE超24h及貶值損失皆">
-            <a:extLst xmlns:a="http://schemas.openxmlformats.org/drawingml/2006/main">
-              <a:ext uri="{FF2B5EF4-FFF2-40B4-BE49-F238E27FC236}">
-                <a16:creationId xmlns:a16="http://schemas.microsoft.com/office/drawing/2014/main" id="{01B5CE09-A94E-41BA-A685-245ABFAAE9F9}"/>
+                <a16:creationId xmlns:a16="http://schemas.microsoft.com/office/drawing/2014/main" id="{1560078A-CD04-4B9E-AFF0-F11D39470AA9}"/>
               </a:ext>
             </a:extLst>
           </p:cNvPr>
@@ -21239,7 +22126,7 @@
                 <a:ea typeface="Microsoft JhengHei"/>
                 <a:cs typeface="Microsoft JhengHei"/>
               </a:rPr>
-              <a:t>主DOE超24h及貶值損失皆0；持續300/h七日另有11925件超24h，不混入主DOE收益。</a:t>
+              <a:t>S＝需求情境，P＝改善方案；m代表公尺，8公尺是緩衝長度；min代表分鐘，h代表小時。</a:t>
             </a:r>
           </a:p>
         </p:txBody>
@@ -21247,7 +22134,7 @@
     </p:spTree>
     <p:extLst>
       <p:ext uri="{BB962C8B-B14F-4D97-AF65-F5344CB8AC3E}">
-        <p14:creationId xmlns:p14="http://schemas.microsoft.com/office/powerpoint/2010/main" val="1386835514"/>
+        <p14:creationId xmlns:p14="http://schemas.microsoft.com/office/powerpoint/2010/main" val="1948526633"/>
       </p:ext>
     </p:extLst>
   </p:cSld>
@@ -21271,7 +22158,7 @@
           <p:cNvPr id="2" name="Freeform 2">
             <a:extLst xmlns:a="http://schemas.openxmlformats.org/drawingml/2006/main">
               <a:ext uri="{FF2B5EF4-FFF2-40B4-BE49-F238E27FC236}">
-                <a16:creationId xmlns:a16="http://schemas.microsoft.com/office/drawing/2014/main" id="{AF5F12B7-5CA2-4312-8617-779950F3C551}"/>
+                <a16:creationId xmlns:a16="http://schemas.microsoft.com/office/drawing/2014/main" id="{64830B72-C18E-43E6-BDCE-6164C1187880}"/>
               </a:ext>
             </a:extLst>
           </p:cNvPr>
@@ -21309,7 +22196,7 @@
             </a:pathLst>
           </a:custGeom>
           <a:blipFill xmlns:a="http://schemas.openxmlformats.org/drawingml/2006/main">
-            <a:blip xmlns:r="http://schemas.openxmlformats.org/officeDocument/2006/relationships" r:embed="Rad6290ca0a55487d"/>
+            <a:blip xmlns:r="http://schemas.openxmlformats.org/officeDocument/2006/relationships" r:embed="R05322418d767471d"/>
             <a:stretch>
               <a:fillRect l="-35258" t="-5555" r="-24931" b="-72434"/>
             </a:stretch>
@@ -21321,7 +22208,7 @@
           <p:cNvPr id="4" name="Freeform 4">
             <a:extLst xmlns:a="http://schemas.openxmlformats.org/drawingml/2006/main">
               <a:ext uri="{FF2B5EF4-FFF2-40B4-BE49-F238E27FC236}">
-                <a16:creationId xmlns:a16="http://schemas.microsoft.com/office/drawing/2014/main" id="{F0E53848-7DAE-40A8-BC07-8C7418A31F37}"/>
+                <a16:creationId xmlns:a16="http://schemas.microsoft.com/office/drawing/2014/main" id="{317A2325-BFC3-4327-B78A-A57C8EDFCE42}"/>
               </a:ext>
             </a:extLst>
           </p:cNvPr>
@@ -21395,7 +22282,7 @@
           <p:cNvPr id="5" name="TextBox 5">
             <a:extLst xmlns:a="http://schemas.openxmlformats.org/drawingml/2006/main">
               <a:ext uri="{FF2B5EF4-FFF2-40B4-BE49-F238E27FC236}">
-                <a16:creationId xmlns:a16="http://schemas.microsoft.com/office/drawing/2014/main" id="{152BF0CA-C725-4E0A-AFD1-C33755640203}"/>
+                <a16:creationId xmlns:a16="http://schemas.microsoft.com/office/drawing/2014/main" id="{EB82EAF7-A3E2-49B2-A229-8C5C62252760}"/>
               </a:ext>
             </a:extLst>
           </p:cNvPr>
@@ -21431,7 +22318,7 @@
           <p:cNvPr id="6" name="Freeform 6">
             <a:extLst xmlns:a="http://schemas.openxmlformats.org/drawingml/2006/main">
               <a:ext uri="{FF2B5EF4-FFF2-40B4-BE49-F238E27FC236}">
-                <a16:creationId xmlns:a16="http://schemas.microsoft.com/office/drawing/2014/main" id="{C3660F00-9704-46AF-AE62-C1CDFEC40709}"/>
+                <a16:creationId xmlns:a16="http://schemas.microsoft.com/office/drawing/2014/main" id="{C50331AF-E410-4393-90BD-65EB696EAB1A}"/>
               </a:ext>
             </a:extLst>
           </p:cNvPr>
@@ -21479,7 +22366,7 @@
           <p:cNvPr id="7" name="Freeform 7">
             <a:extLst xmlns:a="http://schemas.openxmlformats.org/drawingml/2006/main">
               <a:ext uri="{FF2B5EF4-FFF2-40B4-BE49-F238E27FC236}">
-                <a16:creationId xmlns:a16="http://schemas.microsoft.com/office/drawing/2014/main" id="{E950E8C4-D71A-4A38-886B-61CEE3A65FBE}"/>
+                <a16:creationId xmlns:a16="http://schemas.microsoft.com/office/drawing/2014/main" id="{A0970212-9BDF-4F0B-AD97-38F4C990111F}"/>
               </a:ext>
             </a:extLst>
           </p:cNvPr>
@@ -21517,10 +22404,10 @@
             </a:pathLst>
           </a:custGeom>
           <a:blipFill xmlns:a="http://schemas.openxmlformats.org/drawingml/2006/main">
-            <a:blip xmlns:r="http://schemas.openxmlformats.org/officeDocument/2006/relationships" r:embed="Ra32740683c1a4ed1">
+            <a:blip xmlns:r="http://schemas.openxmlformats.org/officeDocument/2006/relationships" r:embed="Rb00df977399b4d86">
               <a:extLst>
                 <a:ext uri="{96DAC541-7B7A-43D3-8B79-37D633B846F1}">
-                  <asvg:svgBlip xmlns:asvg="http://schemas.microsoft.com/office/drawing/2016/SVG/main" r:embed="Rc1bb5b7a8b734f65"/>
+                  <asvg:svgBlip xmlns:asvg="http://schemas.microsoft.com/office/drawing/2016/SVG/main" r:embed="Raf5d50fd734e4e00"/>
                 </a:ext>
               </a:extLst>
             </a:blip>
@@ -21535,7 +22422,7 @@
           <p:cNvPr id="8" name="Freeform 8">
             <a:extLst xmlns:a="http://schemas.openxmlformats.org/drawingml/2006/main">
               <a:ext uri="{FF2B5EF4-FFF2-40B4-BE49-F238E27FC236}">
-                <a16:creationId xmlns:a16="http://schemas.microsoft.com/office/drawing/2014/main" id="{50CA9B1B-C715-426E-BCB1-45BEA99790DC}"/>
+                <a16:creationId xmlns:a16="http://schemas.microsoft.com/office/drawing/2014/main" id="{55714828-BFE9-4872-95E6-4D3811E345F3}"/>
               </a:ext>
             </a:extLst>
           </p:cNvPr>
@@ -21573,10 +22460,10 @@
             </a:pathLst>
           </a:custGeom>
           <a:blipFill xmlns:a="http://schemas.openxmlformats.org/drawingml/2006/main">
-            <a:blip xmlns:r="http://schemas.openxmlformats.org/officeDocument/2006/relationships" r:embed="Ra32740683c1a4ed1">
+            <a:blip xmlns:r="http://schemas.openxmlformats.org/officeDocument/2006/relationships" r:embed="Rb00df977399b4d86">
               <a:extLst>
                 <a:ext uri="{96DAC541-7B7A-43D3-8B79-37D633B846F1}">
-                  <asvg:svgBlip xmlns:asvg="http://schemas.microsoft.com/office/drawing/2016/SVG/main" r:embed="Rc1bb5b7a8b734f65"/>
+                  <asvg:svgBlip xmlns:asvg="http://schemas.microsoft.com/office/drawing/2016/SVG/main" r:embed="Raf5d50fd734e4e00"/>
                 </a:ext>
               </a:extLst>
             </a:blip>
@@ -21591,7 +22478,7 @@
           <p:cNvPr id="9" name="TextBox 9">
             <a:extLst xmlns:a="http://schemas.openxmlformats.org/drawingml/2006/main">
               <a:ext uri="{FF2B5EF4-FFF2-40B4-BE49-F238E27FC236}">
-                <a16:creationId xmlns:a16="http://schemas.microsoft.com/office/drawing/2014/main" id="{445650FF-48DA-4E1B-893C-42BCAC9B160B}"/>
+                <a16:creationId xmlns:a16="http://schemas.microsoft.com/office/drawing/2014/main" id="{485A7F35-5A4C-4603-AC79-34B039707C3C}"/>
               </a:ext>
             </a:extLst>
           </p:cNvPr>
@@ -21752,7 +22639,7 @@
           <p:cNvPr id="10" name="TextBox 10">
             <a:extLst xmlns:a="http://schemas.openxmlformats.org/drawingml/2006/main">
               <a:ext uri="{FF2B5EF4-FFF2-40B4-BE49-F238E27FC236}">
-                <a16:creationId xmlns:a16="http://schemas.microsoft.com/office/drawing/2014/main" id="{7C27D11C-61E8-4F0E-AA00-A56A54796A3D}"/>
+                <a16:creationId xmlns:a16="http://schemas.microsoft.com/office/drawing/2014/main" id="{48521113-1CB7-491D-A151-0EBBC4F364E5}"/>
               </a:ext>
             </a:extLst>
           </p:cNvPr>
@@ -21804,7 +22691,7 @@
           <p:cNvPr id="11" name="TextBox 11">
             <a:extLst xmlns:a="http://schemas.openxmlformats.org/drawingml/2006/main">
               <a:ext uri="{FF2B5EF4-FFF2-40B4-BE49-F238E27FC236}">
-                <a16:creationId xmlns:a16="http://schemas.microsoft.com/office/drawing/2014/main" id="{BC64DD17-84A3-4E29-8FE0-74E5BCD9335D}"/>
+                <a16:creationId xmlns:a16="http://schemas.microsoft.com/office/drawing/2014/main" id="{26C0E5D5-F056-4E31-AD40-41F104508234}"/>
               </a:ext>
             </a:extLst>
           </p:cNvPr>
@@ -21856,7 +22743,7 @@
           <p:cNvPr id="12" name="TextBox 12">
             <a:extLst xmlns:a="http://schemas.openxmlformats.org/drawingml/2006/main">
               <a:ext uri="{FF2B5EF4-FFF2-40B4-BE49-F238E27FC236}">
-                <a16:creationId xmlns:a16="http://schemas.microsoft.com/office/drawing/2014/main" id="{9FEB0A02-3229-4417-85DF-24C6D2D9355A}"/>
+                <a16:creationId xmlns:a16="http://schemas.microsoft.com/office/drawing/2014/main" id="{166349A9-2574-41E8-ABE9-E09D4C81DB56}"/>
               </a:ext>
             </a:extLst>
           </p:cNvPr>
@@ -21908,7 +22795,7 @@
           <p:cNvPr id="13" name="Freeform 13">
             <a:extLst xmlns:a="http://schemas.openxmlformats.org/drawingml/2006/main">
               <a:ext uri="{FF2B5EF4-FFF2-40B4-BE49-F238E27FC236}">
-                <a16:creationId xmlns:a16="http://schemas.microsoft.com/office/drawing/2014/main" id="{DE84B3A4-8419-4AD3-B565-F75FD78F666E}"/>
+                <a16:creationId xmlns:a16="http://schemas.microsoft.com/office/drawing/2014/main" id="{5AE00000-B7FF-4033-934E-C0ADD82AC5D1}"/>
               </a:ext>
             </a:extLst>
           </p:cNvPr>
@@ -21946,7 +22833,7 @@
             </a:pathLst>
           </a:custGeom>
           <a:blipFill xmlns:a="http://schemas.openxmlformats.org/drawingml/2006/main">
-            <a:blip xmlns:r="http://schemas.openxmlformats.org/officeDocument/2006/relationships" r:embed="R027e70e057f64ac5"/>
+            <a:blip xmlns:r="http://schemas.openxmlformats.org/officeDocument/2006/relationships" r:embed="R1f7da8c8f7de45c2"/>
             <a:stretch>
               <a:fillRect l="0" t="0" r="0" b="0"/>
             </a:stretch>
@@ -21958,7 +22845,7 @@
           <p:cNvPr id="14" name="TextBox 14">
             <a:extLst xmlns:a="http://schemas.openxmlformats.org/drawingml/2006/main">
               <a:ext uri="{FF2B5EF4-FFF2-40B4-BE49-F238E27FC236}">
-                <a16:creationId xmlns:a16="http://schemas.microsoft.com/office/drawing/2014/main" id="{94921289-DF3E-43DE-B633-DD79A4E5409B}"/>
+                <a16:creationId xmlns:a16="http://schemas.microsoft.com/office/drawing/2014/main" id="{BA0B8662-16F0-429B-8344-FFC4BF1FB62F}"/>
               </a:ext>
             </a:extLst>
           </p:cNvPr>
@@ -22009,10 +22896,10 @@
       </p:sp>
       <p:sp>
         <p:nvSpPr>
-          <p:cNvPr id="15" name="內容_3_目標 KPI">
+          <p:cNvPr id="15" name="內容_3_先讀指標與數字">
             <a:extLst xmlns:a="http://schemas.openxmlformats.org/drawingml/2006/main">
               <a:ext uri="{FF2B5EF4-FFF2-40B4-BE49-F238E27FC236}">
-                <a16:creationId xmlns:a16="http://schemas.microsoft.com/office/drawing/2014/main" id="{C366B6E6-AF7E-4C38-8F49-DC2F909B7E83}"/>
+                <a16:creationId xmlns:a16="http://schemas.microsoft.com/office/drawing/2014/main" id="{9D7817FC-53D4-4FAD-9105-796B585325C5}"/>
               </a:ext>
             </a:extLst>
           </p:cNvPr>
@@ -22160,17 +23047,17 @@
                 <a:ea typeface="Microsoft JhengHei"/>
                 <a:cs typeface="Microsoft JhengHei"/>
               </a:rPr>
-              <a:t>目標 KPI</a:t>
+              <a:t>先讀指標與數字</a:t>
             </a:r>
           </a:p>
         </p:txBody>
       </p:sp>
       <p:sp>
         <p:nvSpPr>
-          <p:cNvPr id="16" name="內容_3_課程目標逐項驗證">
+          <p:cNvPr id="16" name="內容_3_表中的方括號是平均估計的範圍">
             <a:extLst xmlns:a="http://schemas.openxmlformats.org/drawingml/2006/main">
               <a:ext uri="{FF2B5EF4-FFF2-40B4-BE49-F238E27FC236}">
-                <a16:creationId xmlns:a16="http://schemas.microsoft.com/office/drawing/2014/main" id="{6F99BF63-A16C-45A4-A999-6F25CA322328}"/>
+                <a16:creationId xmlns:a16="http://schemas.microsoft.com/office/drawing/2014/main" id="{4EF7125F-294D-40E2-8A38-04BEBA088B62}"/>
               </a:ext>
             </a:extLst>
           </p:cNvPr>
@@ -22318,17 +23205,175 @@
                 <a:ea typeface="Microsoft JhengHei"/>
                 <a:cs typeface="Microsoft JhengHei"/>
               </a:rPr>
-              <a:t>課程目標逐項驗證</a:t>
+              <a:t>表中的方括號是平均估計的範圍</a:t>
             </a:r>
           </a:p>
         </p:txBody>
       </p:sp>
+      <p:sp>
+        <p:nvSpPr>
+          <p:cNvPr id="17" name="內容_3_數字格式：平均值 [95%信">
+            <a:extLst xmlns:a="http://schemas.openxmlformats.org/drawingml/2006/main">
+              <a:ext uri="{FF2B5EF4-FFF2-40B4-BE49-F238E27FC236}">
+                <a16:creationId xmlns:a16="http://schemas.microsoft.com/office/drawing/2014/main" id="{CEFB6093-842F-4471-8E96-19427D708791}"/>
+              </a:ext>
+            </a:extLst>
+          </p:cNvPr>
+          <p:cNvSpPr>
+            <a:spLocks xmlns:a="http://schemas.openxmlformats.org/drawingml/2006/main" noGrp="1"/>
+          </p:cNvSpPr>
+          <p:nvPr/>
+        </p:nvSpPr>
+        <p:spPr>
+          <a:xfrm xmlns:a="http://schemas.openxmlformats.org/drawingml/2006/main">
+            <a:off x="1581150" y="4000500"/>
+            <a:ext cx="14287500" cy="381000"/>
+          </a:xfrm>
+          <a:prstGeom xmlns:a="http://schemas.openxmlformats.org/drawingml/2006/main" prst="rect">
+            <a:avLst/>
+          </a:prstGeom>
+          <a:noFill xmlns:a="http://schemas.openxmlformats.org/drawingml/2006/main"/>
+          <a:ln xmlns:a="http://schemas.openxmlformats.org/drawingml/2006/main" w="0">
+            <a:noFill/>
+          </a:ln>
+        </p:spPr>
+        <p:txBody>
+          <a:bodyPr xmlns:a="http://schemas.openxmlformats.org/drawingml/2006/main" wrap="square" lIns="0" tIns="0" rIns="0" bIns="0">
+            <a:noAutofit/>
+          </a:bodyPr>
+          <a:lstStyle xmlns:a="http://schemas.openxmlformats.org/drawingml/2006/main">
+            <a:defPPr>
+              <a:defRPr sz="1800" b="0">
+                <a:solidFill>
+                  <a:srgbClr val="92A6DD"/>
+                </a:solidFill>
+                <a:latin typeface="Microsoft JhengHei"/>
+                <a:ea typeface="Microsoft JhengHei"/>
+                <a:cs typeface="Microsoft JhengHei"/>
+              </a:defRPr>
+            </a:defPPr>
+            <a:lvl1pPr>
+              <a:defRPr sz="1800" b="0">
+                <a:solidFill>
+                  <a:srgbClr val="92A6DD"/>
+                </a:solidFill>
+                <a:latin typeface="Microsoft JhengHei"/>
+                <a:ea typeface="Microsoft JhengHei"/>
+                <a:cs typeface="Microsoft JhengHei"/>
+              </a:defRPr>
+            </a:lvl1pPr>
+            <a:lvl2pPr>
+              <a:defRPr sz="1800" b="0">
+                <a:solidFill>
+                  <a:srgbClr val="92A6DD"/>
+                </a:solidFill>
+                <a:latin typeface="Microsoft JhengHei"/>
+                <a:ea typeface="Microsoft JhengHei"/>
+                <a:cs typeface="Microsoft JhengHei"/>
+              </a:defRPr>
+            </a:lvl2pPr>
+            <a:lvl3pPr>
+              <a:defRPr sz="1800" b="0">
+                <a:solidFill>
+                  <a:srgbClr val="92A6DD"/>
+                </a:solidFill>
+                <a:latin typeface="Microsoft JhengHei"/>
+                <a:ea typeface="Microsoft JhengHei"/>
+                <a:cs typeface="Microsoft JhengHei"/>
+              </a:defRPr>
+            </a:lvl3pPr>
+            <a:lvl4pPr>
+              <a:defRPr sz="1800" b="0">
+                <a:solidFill>
+                  <a:srgbClr val="92A6DD"/>
+                </a:solidFill>
+                <a:latin typeface="Microsoft JhengHei"/>
+                <a:ea typeface="Microsoft JhengHei"/>
+                <a:cs typeface="Microsoft JhengHei"/>
+              </a:defRPr>
+            </a:lvl4pPr>
+            <a:lvl5pPr>
+              <a:defRPr sz="1800" b="0">
+                <a:solidFill>
+                  <a:srgbClr val="92A6DD"/>
+                </a:solidFill>
+                <a:latin typeface="Microsoft JhengHei"/>
+                <a:ea typeface="Microsoft JhengHei"/>
+                <a:cs typeface="Microsoft JhengHei"/>
+              </a:defRPr>
+            </a:lvl5pPr>
+            <a:lvl6pPr>
+              <a:defRPr sz="1800" b="0">
+                <a:solidFill>
+                  <a:srgbClr val="92A6DD"/>
+                </a:solidFill>
+                <a:latin typeface="Microsoft JhengHei"/>
+                <a:ea typeface="Microsoft JhengHei"/>
+                <a:cs typeface="Microsoft JhengHei"/>
+              </a:defRPr>
+            </a:lvl6pPr>
+            <a:lvl7pPr>
+              <a:defRPr sz="1800" b="0">
+                <a:solidFill>
+                  <a:srgbClr val="92A6DD"/>
+                </a:solidFill>
+                <a:latin typeface="Microsoft JhengHei"/>
+                <a:ea typeface="Microsoft JhengHei"/>
+                <a:cs typeface="Microsoft JhengHei"/>
+              </a:defRPr>
+            </a:lvl7pPr>
+            <a:lvl8pPr>
+              <a:defRPr sz="1800" b="0">
+                <a:solidFill>
+                  <a:srgbClr val="92A6DD"/>
+                </a:solidFill>
+                <a:latin typeface="Microsoft JhengHei"/>
+                <a:ea typeface="Microsoft JhengHei"/>
+                <a:cs typeface="Microsoft JhengHei"/>
+              </a:defRPr>
+            </a:lvl8pPr>
+            <a:lvl9pPr>
+              <a:defRPr sz="1800" b="0">
+                <a:solidFill>
+                  <a:srgbClr val="92A6DD"/>
+                </a:solidFill>
+                <a:latin typeface="Microsoft JhengHei"/>
+                <a:ea typeface="Microsoft JhengHei"/>
+                <a:cs typeface="Microsoft JhengHei"/>
+              </a:defRPr>
+            </a:lvl9pPr>
+          </a:lstStyle>
+          <a:p xmlns:a="http://schemas.openxmlformats.org/drawingml/2006/main">
+            <a:pPr>
+              <a:defRPr sz="1800" b="0">
+                <a:solidFill>
+                  <a:srgbClr val="92A6DD"/>
+                </a:solidFill>
+                <a:latin typeface="Microsoft JhengHei"/>
+                <a:ea typeface="Microsoft JhengHei"/>
+                <a:cs typeface="Microsoft JhengHei"/>
+              </a:defRPr>
+            </a:pPr>
+            <a:r>
+              <a:rPr sz="1800" b="0">
+                <a:solidFill>
+                  <a:srgbClr val="92A6DD"/>
+                </a:solidFill>
+                <a:latin typeface="Microsoft JhengHei"/>
+                <a:ea typeface="Microsoft JhengHei"/>
+                <a:cs typeface="Microsoft JhengHei"/>
+              </a:rPr>
+              <a:t>數字格式：平均值 [95%信賴下界, 上界]；不是95%的單次運行結果所在範圍。</a:t>
+            </a:r>
+          </a:p>
+        </p:txBody>
+      </p:sp>
       <p:graphicFrame>
         <p:nvGraphicFramePr>
-          <p:cNvPr id="17" name="">
+          <p:cNvPr id="18" name="">
             <a:extLst xmlns:a="http://schemas.openxmlformats.org/drawingml/2006/main">
               <a:ext uri="{FF2B5EF4-FFF2-40B4-BE49-F238E27FC236}">
-                <a16:creationId xmlns:a16="http://schemas.microsoft.com/office/drawing/2014/main" id="{6ACA3793-A8B7-4571-8499-0488882AAD68}"/>
+                <a16:creationId xmlns:a16="http://schemas.microsoft.com/office/drawing/2014/main" id="{2958F9DE-8F04-4A5C-87F5-984AF22E3293}"/>
               </a:ext>
             </a:extLst>
           </p:cNvPr>
@@ -22336,8 +23381,8 @@
           <p:nvPr/>
         </p:nvGraphicFramePr>
         <p:xfrm>
-          <a:off xmlns:a="http://schemas.openxmlformats.org/drawingml/2006/main" x="1581150" y="4333875"/>
-          <a:ext xmlns:a="http://schemas.openxmlformats.org/drawingml/2006/main" cx="14287500" cy="3429000"/>
+          <a:off xmlns:a="http://schemas.openxmlformats.org/drawingml/2006/main" x="1581150" y="4524375"/>
+          <a:ext xmlns:a="http://schemas.openxmlformats.org/drawingml/2006/main" cx="14287500" cy="3286125"/>
         </p:xfrm>
         <a:graphic xmlns:a="http://schemas.openxmlformats.org/drawingml/2006/main">
           <a:graphicData uri="http://schemas.openxmlformats.org/drawingml/2006/table">
@@ -22348,14 +23393,14 @@
                 <a:gridCol w="4762500"/>
                 <a:gridCol w="4762500"/>
               </a:tblGrid>
-              <a:tr h="685800">
+              <a:tr h="657225">
                 <a:tc>
                   <a:txBody>
                     <a:bodyPr wrap="square" lIns="152400" tIns="85725" rIns="114300" bIns="76200"/>
                     <a:lstStyle/>
                     <a:p>
                       <a:r>
-                        <a:rPr sz="2250" b="1">
+                        <a:rPr sz="1950" b="1">
                           <a:solidFill>
                             <a:srgbClr val="DF96DA"/>
                           </a:solidFill>
@@ -22363,7 +23408,7 @@
                           <a:ea typeface="Microsoft JhengHei"/>
                           <a:cs typeface="Microsoft JhengHei"/>
                         </a:rPr>
-                        <a:t>指標</a:t>
+                        <a:t>績效指標</a:t>
                       </a:r>
                     </a:p>
                   </a:txBody>
@@ -22403,7 +23448,7 @@
                     <a:lstStyle/>
                     <a:p>
                       <a:r>
-                        <a:rPr sz="2250" b="1">
+                        <a:rPr sz="1950" b="1">
                           <a:solidFill>
                             <a:srgbClr val="DF96DA"/>
                           </a:solidFill>
@@ -22445,7 +23490,7 @@
                     <a:lstStyle/>
                     <a:p>
                       <a:r>
-                        <a:rPr sz="2250" b="1">
+                        <a:rPr sz="1950" b="1">
                           <a:solidFill>
                             <a:srgbClr val="DF96DA"/>
                           </a:solidFill>
@@ -22482,14 +23527,14 @@
                   </a:tcPr>
                 </a:tc>
               </a:tr>
-              <a:tr h="685800">
+              <a:tr h="657225">
                 <a:tc>
                   <a:txBody>
                     <a:bodyPr wrap="square" lIns="152400" tIns="85725" rIns="114300" bIns="76200"/>
                     <a:lstStyle/>
                     <a:p>
                       <a:r>
-                        <a:rPr sz="2250" b="0">
+                        <a:rPr sz="1950" b="0">
                           <a:solidFill>
                             <a:srgbClr val="F6E0F5"/>
                           </a:solidFill>
@@ -22497,7 +23542,7 @@
                           <a:ea typeface="Microsoft JhengHei"/>
                           <a:cs typeface="Microsoft JhengHei"/>
                         </a:rPr>
-                        <a:t>結案率保守下界</a:t>
+                        <a:t>退貨結案率保守下界</a:t>
                       </a:r>
                     </a:p>
                   </a:txBody>
@@ -22531,7 +23576,7 @@
                     <a:lstStyle/>
                     <a:p>
                       <a:r>
-                        <a:rPr sz="2250" b="0">
+                        <a:rPr sz="1950" b="0">
                           <a:solidFill>
                             <a:srgbClr val="F6E0F5"/>
                           </a:solidFill>
@@ -22539,7 +23584,7 @@
                           <a:ea typeface="Microsoft JhengHei"/>
                           <a:cs typeface="Microsoft JhengHei"/>
                         </a:rPr>
-                        <a:t>≥99.5%</a:t>
+                        <a:t>至少99.5%</a:t>
                       </a:r>
                     </a:p>
                   </a:txBody>
@@ -22567,7 +23612,7 @@
                     <a:lstStyle/>
                     <a:p>
                       <a:r>
-                        <a:rPr sz="2250" b="0">
+                        <a:rPr sz="1950" b="0">
                           <a:solidFill>
                             <a:srgbClr val="F6E0F5"/>
                           </a:solidFill>
@@ -22575,7 +23620,7 @@
                           <a:ea typeface="Microsoft JhengHei"/>
                           <a:cs typeface="Microsoft JhengHei"/>
                         </a:rPr>
-                        <a:t>1－期末退貨商品WIP／觀察期退貨量</a:t>
+                        <a:t>1－期末未完成退貨商品／觀察期退貨量</a:t>
                       </a:r>
                     </a:p>
                   </a:txBody>
@@ -22598,14 +23643,14 @@
                   </a:tcPr>
                 </a:tc>
               </a:tr>
-              <a:tr h="685800">
+              <a:tr h="657225">
                 <a:tc>
                   <a:txBody>
                     <a:bodyPr wrap="square" lIns="152400" tIns="85725" rIns="114300" bIns="76200"/>
                     <a:lstStyle/>
                     <a:p>
                       <a:r>
-                        <a:rPr sz="2250" b="0">
+                        <a:rPr sz="1950" b="0">
                           <a:solidFill>
                             <a:srgbClr val="F6E0F5"/>
                           </a:solidFill>
@@ -22613,7 +23658,7 @@
                           <a:ea typeface="Microsoft JhengHei"/>
                           <a:cs typeface="Microsoft JhengHei"/>
                         </a:rPr>
-                        <a:t>Separator Blocked</a:t>
+                        <a:t>拆包設備阻塞占比</a:t>
                       </a:r>
                     </a:p>
                   </a:txBody>
@@ -22647,7 +23692,7 @@
                     <a:lstStyle/>
                     <a:p>
                       <a:r>
-                        <a:rPr sz="2250" b="0">
+                        <a:rPr sz="1950" b="0">
                           <a:solidFill>
                             <a:srgbClr val="F6E0F5"/>
                           </a:solidFill>
@@ -22655,7 +23700,7 @@
                           <a:ea typeface="Microsoft JhengHei"/>
                           <a:cs typeface="Microsoft JhengHei"/>
                         </a:rPr>
-                        <a:t>&lt;1%</a:t>
+                        <a:t>低於1%</a:t>
                       </a:r>
                     </a:p>
                   </a:txBody>
@@ -22683,7 +23728,7 @@
                     <a:lstStyle/>
                     <a:p>
                       <a:r>
-                        <a:rPr sz="2250" b="0">
+                        <a:rPr sz="1950" b="0">
                           <a:solidFill>
                             <a:srgbClr val="F6E0F5"/>
                           </a:solidFill>
@@ -22691,7 +23736,7 @@
                           <a:ea typeface="Microsoft JhengHei"/>
                           <a:cs typeface="Microsoft JhengHei"/>
                         </a:rPr>
-                        <a:t>暖機後狀態時間／觀察時間</a:t>
+                        <a:t>被下游擋住的時間占比</a:t>
                       </a:r>
                     </a:p>
                   </a:txBody>
@@ -22714,14 +23759,14 @@
                   </a:tcPr>
                 </a:tc>
               </a:tr>
-              <a:tr h="685800">
+              <a:tr h="657225">
                 <a:tc>
                   <a:txBody>
                     <a:bodyPr wrap="square" lIns="152400" tIns="85725" rIns="114300" bIns="76200"/>
                     <a:lstStyle/>
                     <a:p>
                       <a:r>
-                        <a:rPr sz="2250" b="0">
+                        <a:rPr sz="1950" b="0">
                           <a:solidFill>
                             <a:srgbClr val="F6E0F5"/>
                           </a:solidFill>
@@ -22729,7 +23774,7 @@
                           <a:ea typeface="Microsoft JhengHei"/>
                           <a:cs typeface="Microsoft JhengHei"/>
                         </a:rPr>
-                        <a:t>Q-Time 超 24 h</a:t>
+                        <a:t>檢查前等待超過24小時</a:t>
                       </a:r>
                     </a:p>
                   </a:txBody>
@@ -22763,7 +23808,7 @@
                     <a:lstStyle/>
                     <a:p>
                       <a:r>
-                        <a:rPr sz="2250" b="0">
+                        <a:rPr sz="1950" b="0">
                           <a:solidFill>
                             <a:srgbClr val="F6E0F5"/>
                           </a:solidFill>
@@ -22771,7 +23816,7 @@
                           <a:ea typeface="Microsoft JhengHei"/>
                           <a:cs typeface="Microsoft JhengHei"/>
                         </a:rPr>
-                        <a:t>0 件</a:t>
+                        <a:t>0件</a:t>
                       </a:r>
                     </a:p>
                   </a:txBody>
@@ -22799,7 +23844,7 @@
                     <a:lstStyle/>
                     <a:p>
                       <a:r>
-                        <a:rPr sz="2250" b="0">
+                        <a:rPr sz="1950" b="0">
                           <a:solidFill>
                             <a:srgbClr val="F6E0F5"/>
                           </a:solidFill>
@@ -22807,7 +23852,7 @@
                           <a:ea typeface="Microsoft JhengHei"/>
                           <a:cs typeface="Microsoft JhengHei"/>
                         </a:rPr>
-                        <a:t>外部到達至開始 QA</a:t>
+                        <a:t>外部到達至開始品質檢查</a:t>
                       </a:r>
                     </a:p>
                   </a:txBody>
@@ -22830,14 +23875,14 @@
                   </a:tcPr>
                 </a:tc>
               </a:tr>
-              <a:tr h="685800">
+              <a:tr h="657225">
                 <a:tc>
                   <a:txBody>
                     <a:bodyPr wrap="square" lIns="152400" tIns="85725" rIns="114300" bIns="76200"/>
                     <a:lstStyle/>
                     <a:p>
                       <a:r>
-                        <a:rPr sz="2250" b="0">
+                        <a:rPr sz="1950" b="0">
                           <a:solidFill>
                             <a:srgbClr val="F6E0F5"/>
                           </a:solidFill>
@@ -22879,7 +23924,7 @@
                     <a:lstStyle/>
                     <a:p>
                       <a:r>
-                        <a:rPr sz="2250" b="0">
+                        <a:rPr sz="1950" b="0">
                           <a:solidFill>
                             <a:srgbClr val="F6E0F5"/>
                           </a:solidFill>
@@ -22915,7 +23960,7 @@
                     <a:lstStyle/>
                     <a:p>
                       <a:r>
-                        <a:rPr sz="2250" b="0">
+                        <a:rPr sz="1950" b="0">
                           <a:solidFill>
                             <a:srgbClr val="F6E0F5"/>
                           </a:solidFill>
@@ -22923,7 +23968,7 @@
                           <a:ea typeface="Microsoft JhengHei"/>
                           <a:cs typeface="Microsoft JhengHei"/>
                         </a:rPr>
-                        <a:t>12m：73.995%／39.173%</a:t>
+                        <a:t>12公尺聯合方案：73.995%／39.173%</a:t>
                       </a:r>
                     </a:p>
                   </a:txBody>
@@ -22952,10 +23997,10 @@
       </p:graphicFrame>
       <p:sp>
         <p:nvSpPr>
-          <p:cNvPr id="18" name="內容_3_原課程通過率混入商品、箱與外">
+          <p:cNvPr id="19" name="內容_3_每方案重複30次，報平均與9">
             <a:extLst xmlns:a="http://schemas.openxmlformats.org/drawingml/2006/main">
               <a:ext uri="{FF2B5EF4-FFF2-40B4-BE49-F238E27FC236}">
-                <a16:creationId xmlns:a16="http://schemas.microsoft.com/office/drawing/2014/main" id="{8D87AA8E-3A50-46AF-91CD-80FCF8B33405}"/>
+                <a16:creationId xmlns:a16="http://schemas.microsoft.com/office/drawing/2014/main" id="{E0758B0A-7413-4573-B5D4-0B37407A4626}"/>
               </a:ext>
             </a:extLst>
           </p:cNvPr>
@@ -23103,7 +24148,7 @@
                 <a:ea typeface="Microsoft JhengHei"/>
                 <a:cs typeface="Microsoft JhengHei"/>
               </a:rPr>
-              <a:t>原課程通過率混入商品、箱與外包事件，會超過100%；本案另列該值並使用商品口徑決策。</a:t>
+              <a:t>每方案重複30次，報平均與95%信賴區間。百分點是兩個百分比相減；金額單位為新臺幣元。</a:t>
             </a:r>
           </a:p>
         </p:txBody>
@@ -23111,7 +24156,7 @@
     </p:spTree>
     <p:extLst>
       <p:ext uri="{BB962C8B-B14F-4D97-AF65-F5344CB8AC3E}">
-        <p14:creationId xmlns:p14="http://schemas.microsoft.com/office/powerpoint/2010/main" val="1958617041"/>
+        <p14:creationId xmlns:p14="http://schemas.microsoft.com/office/powerpoint/2010/main" val="314059529"/>
       </p:ext>
     </p:extLst>
   </p:cSld>
@@ -23135,7 +24180,7 @@
           <p:cNvPr id="2" name="Freeform 2">
             <a:extLst xmlns:a="http://schemas.openxmlformats.org/drawingml/2006/main">
               <a:ext uri="{FF2B5EF4-FFF2-40B4-BE49-F238E27FC236}">
-                <a16:creationId xmlns:a16="http://schemas.microsoft.com/office/drawing/2014/main" id="{D5043220-AA85-4102-8F13-78CC21377678}"/>
+                <a16:creationId xmlns:a16="http://schemas.microsoft.com/office/drawing/2014/main" id="{84316A11-6113-41BD-A4EA-2CAC175E47F5}"/>
               </a:ext>
             </a:extLst>
           </p:cNvPr>
@@ -23173,7 +24218,7 @@
             </a:pathLst>
           </a:custGeom>
           <a:blipFill xmlns:a="http://schemas.openxmlformats.org/drawingml/2006/main">
-            <a:blip xmlns:r="http://schemas.openxmlformats.org/officeDocument/2006/relationships" r:embed="R1ea07762f22a4e94"/>
+            <a:blip xmlns:r="http://schemas.openxmlformats.org/officeDocument/2006/relationships" r:embed="Rcc1dbbdeedbf427e"/>
             <a:stretch>
               <a:fillRect l="-35258" t="-5555" r="-24931" b="-72434"/>
             </a:stretch>
@@ -23185,7 +24230,7 @@
           <p:cNvPr id="4" name="Freeform 4">
             <a:extLst xmlns:a="http://schemas.openxmlformats.org/drawingml/2006/main">
               <a:ext uri="{FF2B5EF4-FFF2-40B4-BE49-F238E27FC236}">
-                <a16:creationId xmlns:a16="http://schemas.microsoft.com/office/drawing/2014/main" id="{BE5D1DF5-C410-439D-8915-1763F763B615}"/>
+                <a16:creationId xmlns:a16="http://schemas.microsoft.com/office/drawing/2014/main" id="{457D2A52-F95E-45D7-882C-D0B6BD652F40}"/>
               </a:ext>
             </a:extLst>
           </p:cNvPr>
@@ -23259,7 +24304,7 @@
           <p:cNvPr id="5" name="TextBox 5">
             <a:extLst xmlns:a="http://schemas.openxmlformats.org/drawingml/2006/main">
               <a:ext uri="{FF2B5EF4-FFF2-40B4-BE49-F238E27FC236}">
-                <a16:creationId xmlns:a16="http://schemas.microsoft.com/office/drawing/2014/main" id="{7D930D7E-2BC1-4BBC-9C67-99A69FAD5E75}"/>
+                <a16:creationId xmlns:a16="http://schemas.microsoft.com/office/drawing/2014/main" id="{7D0A9266-9E5E-4F04-866D-183829C1D651}"/>
               </a:ext>
             </a:extLst>
           </p:cNvPr>
@@ -23295,7 +24340,7 @@
           <p:cNvPr id="6" name="Freeform 6">
             <a:extLst xmlns:a="http://schemas.openxmlformats.org/drawingml/2006/main">
               <a:ext uri="{FF2B5EF4-FFF2-40B4-BE49-F238E27FC236}">
-                <a16:creationId xmlns:a16="http://schemas.microsoft.com/office/drawing/2014/main" id="{5E39D010-BB85-4E90-B056-F5CD5780559D}"/>
+                <a16:creationId xmlns:a16="http://schemas.microsoft.com/office/drawing/2014/main" id="{48D35765-942A-40E7-8644-E26CF37AE47A}"/>
               </a:ext>
             </a:extLst>
           </p:cNvPr>
@@ -23333,7 +24378,7 @@
             </a:pathLst>
           </a:custGeom>
           <a:blipFill xmlns:a="http://schemas.openxmlformats.org/drawingml/2006/main">
-            <a:blip xmlns:r="http://schemas.openxmlformats.org/officeDocument/2006/relationships" r:embed="R59e9d7a92be84e0e"/>
+            <a:blip xmlns:r="http://schemas.openxmlformats.org/officeDocument/2006/relationships" r:embed="Rb103b94aad3e4714"/>
             <a:stretch>
               <a:fillRect l="0" t="0" r="0" b="0"/>
             </a:stretch>
@@ -23345,7 +24390,7 @@
           <p:cNvPr id="7" name="Freeform 7">
             <a:extLst xmlns:a="http://schemas.openxmlformats.org/drawingml/2006/main">
               <a:ext uri="{FF2B5EF4-FFF2-40B4-BE49-F238E27FC236}">
-                <a16:creationId xmlns:a16="http://schemas.microsoft.com/office/drawing/2014/main" id="{3DE4EA0C-06EF-4FBC-91F7-FD93F0B5597E}"/>
+                <a16:creationId xmlns:a16="http://schemas.microsoft.com/office/drawing/2014/main" id="{18A0130D-C320-4BF4-853D-E9AC8C36FD2C}"/>
               </a:ext>
             </a:extLst>
           </p:cNvPr>
@@ -23383,10 +24428,10 @@
             </a:pathLst>
           </a:custGeom>
           <a:blipFill xmlns:a="http://schemas.openxmlformats.org/drawingml/2006/main">
-            <a:blip xmlns:r="http://schemas.openxmlformats.org/officeDocument/2006/relationships" r:embed="R17799136dd164fc2">
+            <a:blip xmlns:r="http://schemas.openxmlformats.org/officeDocument/2006/relationships" r:embed="R08f2abfc398e4ab4">
               <a:extLst>
                 <a:ext uri="{96DAC541-7B7A-43D3-8B79-37D633B846F1}">
-                  <asvg:svgBlip xmlns:asvg="http://schemas.microsoft.com/office/drawing/2016/SVG/main" r:embed="Rca0f15becab249ff"/>
+                  <asvg:svgBlip xmlns:asvg="http://schemas.microsoft.com/office/drawing/2016/SVG/main" r:embed="Re0e342745b224f03"/>
                 </a:ext>
               </a:extLst>
             </a:blip>
@@ -23401,7 +24446,7 @@
           <p:cNvPr id="8" name="Freeform 8">
             <a:extLst xmlns:a="http://schemas.openxmlformats.org/drawingml/2006/main">
               <a:ext uri="{FF2B5EF4-FFF2-40B4-BE49-F238E27FC236}">
-                <a16:creationId xmlns:a16="http://schemas.microsoft.com/office/drawing/2014/main" id="{AF2B09F7-50C7-4A3E-9F16-543B16BE340D}"/>
+                <a16:creationId xmlns:a16="http://schemas.microsoft.com/office/drawing/2014/main" id="{5933915F-352C-49FA-A347-6B43943D67FA}"/>
               </a:ext>
             </a:extLst>
           </p:cNvPr>
@@ -23439,10 +24484,10 @@
             </a:pathLst>
           </a:custGeom>
           <a:blipFill xmlns:a="http://schemas.openxmlformats.org/drawingml/2006/main">
-            <a:blip xmlns:r="http://schemas.openxmlformats.org/officeDocument/2006/relationships" r:embed="R17799136dd164fc2">
+            <a:blip xmlns:r="http://schemas.openxmlformats.org/officeDocument/2006/relationships" r:embed="R08f2abfc398e4ab4">
               <a:extLst>
                 <a:ext uri="{96DAC541-7B7A-43D3-8B79-37D633B846F1}">
-                  <asvg:svgBlip xmlns:asvg="http://schemas.microsoft.com/office/drawing/2016/SVG/main" r:embed="Rca0f15becab249ff"/>
+                  <asvg:svgBlip xmlns:asvg="http://schemas.microsoft.com/office/drawing/2016/SVG/main" r:embed="Re0e342745b224f03"/>
                 </a:ext>
               </a:extLst>
             </a:blip>
@@ -23457,7 +24502,7 @@
           <p:cNvPr id="9" name="Freeform 9">
             <a:extLst xmlns:a="http://schemas.openxmlformats.org/drawingml/2006/main">
               <a:ext uri="{FF2B5EF4-FFF2-40B4-BE49-F238E27FC236}">
-                <a16:creationId xmlns:a16="http://schemas.microsoft.com/office/drawing/2014/main" id="{78AD2BA0-D057-4EFD-A584-E7E78D5522EF}"/>
+                <a16:creationId xmlns:a16="http://schemas.microsoft.com/office/drawing/2014/main" id="{D2899B2B-1CF2-440F-9546-628358CC180A}"/>
               </a:ext>
             </a:extLst>
           </p:cNvPr>
@@ -23505,7 +24550,7 @@
           <p:cNvPr id="10" name="Freeform 10">
             <a:extLst xmlns:a="http://schemas.openxmlformats.org/drawingml/2006/main">
               <a:ext uri="{FF2B5EF4-FFF2-40B4-BE49-F238E27FC236}">
-                <a16:creationId xmlns:a16="http://schemas.microsoft.com/office/drawing/2014/main" id="{516B355F-E4D8-454D-A738-98E7B0DCFA44}"/>
+                <a16:creationId xmlns:a16="http://schemas.microsoft.com/office/drawing/2014/main" id="{5C303221-18C6-47E1-B521-875D41DEC602}"/>
               </a:ext>
             </a:extLst>
           </p:cNvPr>
@@ -23553,7 +24598,7 @@
           <p:cNvPr id="11" name="TextBox 11">
             <a:extLst xmlns:a="http://schemas.openxmlformats.org/drawingml/2006/main">
               <a:ext uri="{FF2B5EF4-FFF2-40B4-BE49-F238E27FC236}">
-                <a16:creationId xmlns:a16="http://schemas.microsoft.com/office/drawing/2014/main" id="{13B6EF13-47C8-4D8B-A7C4-0F5BD5F72E15}"/>
+                <a16:creationId xmlns:a16="http://schemas.microsoft.com/office/drawing/2014/main" id="{4FA4B58A-09B9-49E3-9BF6-C2C27EE330B4}"/>
               </a:ext>
             </a:extLst>
           </p:cNvPr>
@@ -23714,7 +24759,7 @@
           <p:cNvPr id="12" name="TextBox 12">
             <a:extLst xmlns:a="http://schemas.openxmlformats.org/drawingml/2006/main">
               <a:ext uri="{FF2B5EF4-FFF2-40B4-BE49-F238E27FC236}">
-                <a16:creationId xmlns:a16="http://schemas.microsoft.com/office/drawing/2014/main" id="{0E61205E-5458-4263-804F-7FD7780DE6B8}"/>
+                <a16:creationId xmlns:a16="http://schemas.microsoft.com/office/drawing/2014/main" id="{9C5A2443-7873-4F62-82F0-28C68F94D441}"/>
               </a:ext>
             </a:extLst>
           </p:cNvPr>
@@ -23768,7 +24813,7 @@
           <p:cNvPr id="13" name="TextBox 13">
             <a:extLst xmlns:a="http://schemas.openxmlformats.org/drawingml/2006/main">
               <a:ext uri="{FF2B5EF4-FFF2-40B4-BE49-F238E27FC236}">
-                <a16:creationId xmlns:a16="http://schemas.microsoft.com/office/drawing/2014/main" id="{A153A7A3-6D87-45A2-AC58-F9FADF9CE1C1}"/>
+                <a16:creationId xmlns:a16="http://schemas.microsoft.com/office/drawing/2014/main" id="{4B00BFB9-8D5D-4BAC-88E8-286F7160AD8F}"/>
               </a:ext>
             </a:extLst>
           </p:cNvPr>
@@ -23820,7 +24865,7 @@
           <p:cNvPr id="14" name="TextBox 14">
             <a:extLst xmlns:a="http://schemas.openxmlformats.org/drawingml/2006/main">
               <a:ext uri="{FF2B5EF4-FFF2-40B4-BE49-F238E27FC236}">
-                <a16:creationId xmlns:a16="http://schemas.microsoft.com/office/drawing/2014/main" id="{1D6DDB64-F42E-4AA3-AF6F-A11A0C2FC4F4}"/>
+                <a16:creationId xmlns:a16="http://schemas.microsoft.com/office/drawing/2014/main" id="{4F65D5D6-8147-4CFD-BBB2-59124187A6CD}"/>
               </a:ext>
             </a:extLst>
           </p:cNvPr>
@@ -23872,7 +24917,7 @@
           <p:cNvPr id="16" name="Freeform 16">
             <a:extLst xmlns:a="http://schemas.openxmlformats.org/drawingml/2006/main">
               <a:ext uri="{FF2B5EF4-FFF2-40B4-BE49-F238E27FC236}">
-                <a16:creationId xmlns:a16="http://schemas.microsoft.com/office/drawing/2014/main" id="{7E7635F2-A703-4D93-97FE-A577BECF35DD}"/>
+                <a16:creationId xmlns:a16="http://schemas.microsoft.com/office/drawing/2014/main" id="{52E1C491-A989-446F-9018-EF0BA12912E0}"/>
               </a:ext>
             </a:extLst>
           </p:cNvPr>
@@ -23931,7 +24976,7 @@
           <p:cNvPr id="17" name="TextBox 17">
             <a:extLst xmlns:a="http://schemas.openxmlformats.org/drawingml/2006/main">
               <a:ext uri="{FF2B5EF4-FFF2-40B4-BE49-F238E27FC236}">
-                <a16:creationId xmlns:a16="http://schemas.microsoft.com/office/drawing/2014/main" id="{0363177D-C5C4-4274-B206-2D54F3710136}"/>
+                <a16:creationId xmlns:a16="http://schemas.microsoft.com/office/drawing/2014/main" id="{EC08B9E9-27E8-446A-8FE6-49C8DC0AA408}"/>
               </a:ext>
             </a:extLst>
           </p:cNvPr>
@@ -23971,7 +25016,7 @@
           <p:cNvPr id="18" name="TextBox 18">
             <a:extLst xmlns:a="http://schemas.openxmlformats.org/drawingml/2006/main">
               <a:ext uri="{FF2B5EF4-FFF2-40B4-BE49-F238E27FC236}">
-                <a16:creationId xmlns:a16="http://schemas.microsoft.com/office/drawing/2014/main" id="{9160FCEA-1073-41CB-8F28-50E464E0958A}"/>
+                <a16:creationId xmlns:a16="http://schemas.microsoft.com/office/drawing/2014/main" id="{FF53A6F3-B1C0-4F7F-A9D4-4033945993CA}"/>
               </a:ext>
             </a:extLst>
           </p:cNvPr>
@@ -24023,7 +25068,7 @@
           <p:cNvPr id="19" name="TextBox 19">
             <a:extLst xmlns:a="http://schemas.openxmlformats.org/drawingml/2006/main">
               <a:ext uri="{FF2B5EF4-FFF2-40B4-BE49-F238E27FC236}">
-                <a16:creationId xmlns:a16="http://schemas.microsoft.com/office/drawing/2014/main" id="{08C0B020-4CFC-44DC-ACD3-3826333802F0}"/>
+                <a16:creationId xmlns:a16="http://schemas.microsoft.com/office/drawing/2014/main" id="{97424E86-E210-4B25-B9FA-1269BFBDBE18}"/>
               </a:ext>
             </a:extLst>
           </p:cNvPr>
@@ -24075,7 +25120,7 @@
           <p:cNvPr id="21" name="Freeform 21">
             <a:extLst xmlns:a="http://schemas.openxmlformats.org/drawingml/2006/main">
               <a:ext uri="{FF2B5EF4-FFF2-40B4-BE49-F238E27FC236}">
-                <a16:creationId xmlns:a16="http://schemas.microsoft.com/office/drawing/2014/main" id="{C5728493-F66C-460C-BF2D-31734DC52FAC}"/>
+                <a16:creationId xmlns:a16="http://schemas.microsoft.com/office/drawing/2014/main" id="{8F7EE56B-75CB-44BB-BEBB-5AA20B3C83B2}"/>
               </a:ext>
             </a:extLst>
           </p:cNvPr>
@@ -24134,7 +25179,7 @@
           <p:cNvPr id="22" name="TextBox 22">
             <a:extLst xmlns:a="http://schemas.openxmlformats.org/drawingml/2006/main">
               <a:ext uri="{FF2B5EF4-FFF2-40B4-BE49-F238E27FC236}">
-                <a16:creationId xmlns:a16="http://schemas.microsoft.com/office/drawing/2014/main" id="{B81E86D1-05CD-4234-A8E6-F57911A3166F}"/>
+                <a16:creationId xmlns:a16="http://schemas.microsoft.com/office/drawing/2014/main" id="{C0E18678-0677-4880-8EA1-3AB5C479E582}"/>
               </a:ext>
             </a:extLst>
           </p:cNvPr>
@@ -24174,7 +25219,7 @@
           <p:cNvPr id="23" name="TextBox 23">
             <a:extLst xmlns:a="http://schemas.openxmlformats.org/drawingml/2006/main">
               <a:ext uri="{FF2B5EF4-FFF2-40B4-BE49-F238E27FC236}">
-                <a16:creationId xmlns:a16="http://schemas.microsoft.com/office/drawing/2014/main" id="{C4534D92-394B-49E9-AD88-207A041C3E28}"/>
+                <a16:creationId xmlns:a16="http://schemas.microsoft.com/office/drawing/2014/main" id="{6E5E2061-8449-45E8-A925-0871CE016497}"/>
               </a:ext>
             </a:extLst>
           </p:cNvPr>
@@ -24226,7 +25271,7 @@
           <p:cNvPr id="24" name="TextBox 24">
             <a:extLst xmlns:a="http://schemas.openxmlformats.org/drawingml/2006/main">
               <a:ext uri="{FF2B5EF4-FFF2-40B4-BE49-F238E27FC236}">
-                <a16:creationId xmlns:a16="http://schemas.microsoft.com/office/drawing/2014/main" id="{94E9F036-76F3-4360-A021-853A960AD04F}"/>
+                <a16:creationId xmlns:a16="http://schemas.microsoft.com/office/drawing/2014/main" id="{68F7F21E-5686-4D95-94B3-1182E8B777ED}"/>
               </a:ext>
             </a:extLst>
           </p:cNvPr>
@@ -24278,7 +25323,7 @@
           <p:cNvPr id="25" name="">
             <a:extLst xmlns:a="http://schemas.openxmlformats.org/drawingml/2006/main">
               <a:ext uri="{FF2B5EF4-FFF2-40B4-BE49-F238E27FC236}">
-                <a16:creationId xmlns:a16="http://schemas.microsoft.com/office/drawing/2014/main" id="{EB009157-9817-4B7E-8E07-497C2333C351}"/>
+                <a16:creationId xmlns:a16="http://schemas.microsoft.com/office/drawing/2014/main" id="{25BC2096-5958-476F-9E40-B82F450EA331}"/>
               </a:ext>
             </a:extLst>
           </p:cNvPr>
@@ -24288,7 +25333,7 @@
           <p:nvPr/>
         </p:nvPicPr>
         <p:blipFill>
-          <a:blip xmlns:r="http://schemas.openxmlformats.org/officeDocument/2006/relationships" xmlns:a="http://schemas.openxmlformats.org/drawingml/2006/main" r:embed="R073362be0de94284"/>
+          <a:blip xmlns:r="http://schemas.openxmlformats.org/officeDocument/2006/relationships" xmlns:a="http://schemas.openxmlformats.org/drawingml/2006/main" r:embed="R5c618ce79824412f"/>
           <a:srcRect xmlns:a="http://schemas.openxmlformats.org/drawingml/2006/main" l="45370" t="10500" r="0" b="0"/>
           <a:stretch xmlns:a="http://schemas.openxmlformats.org/drawingml/2006/main"/>
         </p:blipFill>
@@ -24307,7 +25352,7 @@
           <p:cNvPr id="26" name="內容_4_雙閉環架構">
             <a:extLst xmlns:a="http://schemas.openxmlformats.org/drawingml/2006/main">
               <a:ext uri="{FF2B5EF4-FFF2-40B4-BE49-F238E27FC236}">
-                <a16:creationId xmlns:a16="http://schemas.microsoft.com/office/drawing/2014/main" id="{977C447E-8544-4706-AE14-604C0C683CC2}"/>
+                <a16:creationId xmlns:a16="http://schemas.microsoft.com/office/drawing/2014/main" id="{F07BA686-2754-45BE-AD5F-BAB7E52EB8E6}"/>
               </a:ext>
             </a:extLst>
           </p:cNvPr>
@@ -24465,7 +25510,7 @@
           <p:cNvPr id="27" name="內容_4_商品與循環箱分離後再配對">
             <a:extLst xmlns:a="http://schemas.openxmlformats.org/drawingml/2006/main">
               <a:ext uri="{FF2B5EF4-FFF2-40B4-BE49-F238E27FC236}">
-                <a16:creationId xmlns:a16="http://schemas.microsoft.com/office/drawing/2014/main" id="{9F033498-8B46-4B85-8556-B89005441D66}"/>
+                <a16:creationId xmlns:a16="http://schemas.microsoft.com/office/drawing/2014/main" id="{436A6468-10E9-4AE3-AFBD-BAD5B92F3F8A}"/>
               </a:ext>
             </a:extLst>
           </p:cNvPr>
@@ -24623,7 +25668,7 @@
           <p:cNvPr id="28" name="">
             <a:extLst xmlns:a="http://schemas.openxmlformats.org/drawingml/2006/main">
               <a:ext uri="{FF2B5EF4-FFF2-40B4-BE49-F238E27FC236}">
-                <a16:creationId xmlns:a16="http://schemas.microsoft.com/office/drawing/2014/main" id="{4100BA9E-AA4F-406C-9E43-BC2111ECF349}"/>
+                <a16:creationId xmlns:a16="http://schemas.microsoft.com/office/drawing/2014/main" id="{32860211-6CAC-46CE-81DC-4B55650917C1}"/>
               </a:ext>
             </a:extLst>
           </p:cNvPr>
@@ -24655,7 +25700,7 @@
           <a:bodyPr xmlns:a="http://schemas.openxmlformats.org/drawingml/2006/main" wrap="square" anchor="ctr"/>
           <a:lstStyle xmlns:a="http://schemas.openxmlformats.org/drawingml/2006/main">
             <a:defPPr algn="ctr">
-              <a:defRPr sz="2025">
+              <a:defRPr sz="1875">
                 <a:solidFill>
                   <a:srgbClr val="F6E0F5"/>
                 </a:solidFill>
@@ -24665,7 +25710,7 @@
               </a:defRPr>
             </a:defPPr>
             <a:lvl1pPr algn="ctr">
-              <a:defRPr sz="2025">
+              <a:defRPr sz="1875">
                 <a:solidFill>
                   <a:srgbClr val="F6E0F5"/>
                 </a:solidFill>
@@ -24675,7 +25720,7 @@
               </a:defRPr>
             </a:lvl1pPr>
             <a:lvl2pPr algn="ctr">
-              <a:defRPr sz="2025">
+              <a:defRPr sz="1875">
                 <a:solidFill>
                   <a:srgbClr val="F6E0F5"/>
                 </a:solidFill>
@@ -24685,7 +25730,7 @@
               </a:defRPr>
             </a:lvl2pPr>
             <a:lvl3pPr algn="ctr">
-              <a:defRPr sz="2025">
+              <a:defRPr sz="1875">
                 <a:solidFill>
                   <a:srgbClr val="F6E0F5"/>
                 </a:solidFill>
@@ -24695,7 +25740,7 @@
               </a:defRPr>
             </a:lvl3pPr>
             <a:lvl4pPr algn="ctr">
-              <a:defRPr sz="2025">
+              <a:defRPr sz="1875">
                 <a:solidFill>
                   <a:srgbClr val="F6E0F5"/>
                 </a:solidFill>
@@ -24705,7 +25750,7 @@
               </a:defRPr>
             </a:lvl4pPr>
             <a:lvl5pPr algn="ctr">
-              <a:defRPr sz="2025">
+              <a:defRPr sz="1875">
                 <a:solidFill>
                   <a:srgbClr val="F6E0F5"/>
                 </a:solidFill>
@@ -24715,7 +25760,7 @@
               </a:defRPr>
             </a:lvl5pPr>
             <a:lvl6pPr algn="ctr">
-              <a:defRPr sz="2025">
+              <a:defRPr sz="1875">
                 <a:solidFill>
                   <a:srgbClr val="F6E0F5"/>
                 </a:solidFill>
@@ -24725,7 +25770,7 @@
               </a:defRPr>
             </a:lvl6pPr>
             <a:lvl7pPr algn="ctr">
-              <a:defRPr sz="2025">
+              <a:defRPr sz="1875">
                 <a:solidFill>
                   <a:srgbClr val="F6E0F5"/>
                 </a:solidFill>
@@ -24735,7 +25780,7 @@
               </a:defRPr>
             </a:lvl7pPr>
             <a:lvl8pPr algn="ctr">
-              <a:defRPr sz="2025">
+              <a:defRPr sz="1875">
                 <a:solidFill>
                   <a:srgbClr val="F6E0F5"/>
                 </a:solidFill>
@@ -24745,7 +25790,7 @@
               </a:defRPr>
             </a:lvl8pPr>
             <a:lvl9pPr algn="ctr">
-              <a:defRPr sz="2025">
+              <a:defRPr sz="1875">
                 <a:solidFill>
                   <a:srgbClr val="F6E0F5"/>
                 </a:solidFill>
@@ -24757,7 +25802,7 @@
           </a:lstStyle>
           <a:p xmlns:a="http://schemas.openxmlformats.org/drawingml/2006/main">
             <a:pPr algn="ctr">
-              <a:defRPr sz="2025">
+              <a:defRPr sz="1875">
                 <a:solidFill>
                   <a:srgbClr val="F6E0F5"/>
                 </a:solidFill>
@@ -24767,7 +25812,7 @@
               </a:defRPr>
             </a:pPr>
             <a:r>
-              <a:rPr sz="2025">
+              <a:rPr sz="1875">
                 <a:solidFill>
                   <a:srgbClr val="F6E0F5"/>
                 </a:solidFill>
@@ -24780,7 +25825,7 @@
           </a:p>
           <a:p xmlns:a="http://schemas.openxmlformats.org/drawingml/2006/main">
             <a:pPr algn="ctr">
-              <a:defRPr sz="2025">
+              <a:defRPr sz="1875">
                 <a:solidFill>
                   <a:srgbClr val="F6E0F5"/>
                 </a:solidFill>
@@ -24790,7 +25835,7 @@
               </a:defRPr>
             </a:pPr>
             <a:r>
-              <a:rPr sz="2025">
+              <a:rPr sz="1875">
                 <a:solidFill>
                   <a:srgbClr val="F6E0F5"/>
                 </a:solidFill>
@@ -24808,7 +25853,7 @@
           <p:cNvPr id="29" name="">
             <a:extLst xmlns:a="http://schemas.openxmlformats.org/drawingml/2006/main">
               <a:ext uri="{FF2B5EF4-FFF2-40B4-BE49-F238E27FC236}">
-                <a16:creationId xmlns:a16="http://schemas.microsoft.com/office/drawing/2014/main" id="{722FFA5B-44EF-4AA0-A3C3-13FC8A8B12C7}"/>
+                <a16:creationId xmlns:a16="http://schemas.microsoft.com/office/drawing/2014/main" id="{6E48385C-D43D-410D-B33A-DFFF38B650F1}"/>
               </a:ext>
             </a:extLst>
           </p:cNvPr>
@@ -24840,7 +25885,7 @@
           <a:bodyPr xmlns:a="http://schemas.openxmlformats.org/drawingml/2006/main" wrap="square" anchor="ctr"/>
           <a:lstStyle xmlns:a="http://schemas.openxmlformats.org/drawingml/2006/main">
             <a:defPPr algn="ctr">
-              <a:defRPr sz="2025">
+              <a:defRPr sz="1875">
                 <a:solidFill>
                   <a:srgbClr val="F6E0F5"/>
                 </a:solidFill>
@@ -24850,7 +25895,7 @@
               </a:defRPr>
             </a:defPPr>
             <a:lvl1pPr algn="ctr">
-              <a:defRPr sz="2025">
+              <a:defRPr sz="1875">
                 <a:solidFill>
                   <a:srgbClr val="F6E0F5"/>
                 </a:solidFill>
@@ -24860,7 +25905,7 @@
               </a:defRPr>
             </a:lvl1pPr>
             <a:lvl2pPr algn="ctr">
-              <a:defRPr sz="2025">
+              <a:defRPr sz="1875">
                 <a:solidFill>
                   <a:srgbClr val="F6E0F5"/>
                 </a:solidFill>
@@ -24870,7 +25915,7 @@
               </a:defRPr>
             </a:lvl2pPr>
             <a:lvl3pPr algn="ctr">
-              <a:defRPr sz="2025">
+              <a:defRPr sz="1875">
                 <a:solidFill>
                   <a:srgbClr val="F6E0F5"/>
                 </a:solidFill>
@@ -24880,7 +25925,7 @@
               </a:defRPr>
             </a:lvl3pPr>
             <a:lvl4pPr algn="ctr">
-              <a:defRPr sz="2025">
+              <a:defRPr sz="1875">
                 <a:solidFill>
                   <a:srgbClr val="F6E0F5"/>
                 </a:solidFill>
@@ -24890,7 +25935,7 @@
               </a:defRPr>
             </a:lvl4pPr>
             <a:lvl5pPr algn="ctr">
-              <a:defRPr sz="2025">
+              <a:defRPr sz="1875">
                 <a:solidFill>
                   <a:srgbClr val="F6E0F5"/>
                 </a:solidFill>
@@ -24900,7 +25945,7 @@
               </a:defRPr>
             </a:lvl5pPr>
             <a:lvl6pPr algn="ctr">
-              <a:defRPr sz="2025">
+              <a:defRPr sz="1875">
                 <a:solidFill>
                   <a:srgbClr val="F6E0F5"/>
                 </a:solidFill>
@@ -24910,7 +25955,7 @@
               </a:defRPr>
             </a:lvl6pPr>
             <a:lvl7pPr algn="ctr">
-              <a:defRPr sz="2025">
+              <a:defRPr sz="1875">
                 <a:solidFill>
                   <a:srgbClr val="F6E0F5"/>
                 </a:solidFill>
@@ -24920,7 +25965,7 @@
               </a:defRPr>
             </a:lvl7pPr>
             <a:lvl8pPr algn="ctr">
-              <a:defRPr sz="2025">
+              <a:defRPr sz="1875">
                 <a:solidFill>
                   <a:srgbClr val="F6E0F5"/>
                 </a:solidFill>
@@ -24930,7 +25975,7 @@
               </a:defRPr>
             </a:lvl8pPr>
             <a:lvl9pPr algn="ctr">
-              <a:defRPr sz="2025">
+              <a:defRPr sz="1875">
                 <a:solidFill>
                   <a:srgbClr val="F6E0F5"/>
                 </a:solidFill>
@@ -24942,7 +25987,7 @@
           </a:lstStyle>
           <a:p xmlns:a="http://schemas.openxmlformats.org/drawingml/2006/main">
             <a:pPr algn="ctr">
-              <a:defRPr sz="2025">
+              <a:defRPr sz="1875">
                 <a:solidFill>
                   <a:srgbClr val="F6E0F5"/>
                 </a:solidFill>
@@ -24952,7 +25997,7 @@
               </a:defRPr>
             </a:pPr>
             <a:r>
-              <a:rPr sz="2025">
+              <a:rPr sz="1875">
                 <a:solidFill>
                   <a:srgbClr val="F6E0F5"/>
                 </a:solidFill>
@@ -24960,12 +26005,12 @@
                 <a:ea typeface="Microsoft JhengHei"/>
                 <a:cs typeface="Microsoft JhengHei"/>
               </a:rPr>
-              <a:t>商品：QA檢驗</a:t>
+              <a:t>商品：品質檢查</a:t>
             </a:r>
           </a:p>
           <a:p xmlns:a="http://schemas.openxmlformats.org/drawingml/2006/main">
             <a:pPr algn="ctr">
-              <a:defRPr sz="2025">
+              <a:defRPr sz="1875">
                 <a:solidFill>
                   <a:srgbClr val="F6E0F5"/>
                 </a:solidFill>
@@ -24975,7 +26020,7 @@
               </a:defRPr>
             </a:pPr>
             <a:r>
-              <a:rPr sz="2025">
+              <a:rPr sz="1875">
                 <a:solidFill>
                   <a:srgbClr val="F6E0F5"/>
                 </a:solidFill>
@@ -24983,7 +26028,7 @@
                 <a:ea typeface="Microsoft JhengHei"/>
                 <a:cs typeface="Microsoft JhengHei"/>
               </a:rPr>
-              <a:t>40s／支援20s</a:t>
+              <a:t>40秒／支援20秒</a:t>
             </a:r>
           </a:p>
         </p:txBody>
@@ -24993,7 +26038,7 @@
           <p:cNvPr id="30" name="">
             <a:extLst xmlns:a="http://schemas.openxmlformats.org/drawingml/2006/main">
               <a:ext uri="{FF2B5EF4-FFF2-40B4-BE49-F238E27FC236}">
-                <a16:creationId xmlns:a16="http://schemas.microsoft.com/office/drawing/2014/main" id="{82444CED-29AA-4FFC-9E3B-3F27B097883A}"/>
+                <a16:creationId xmlns:a16="http://schemas.microsoft.com/office/drawing/2014/main" id="{7C7ABDD4-95FE-4BA8-8A7D-B7CBBD38B983}"/>
               </a:ext>
             </a:extLst>
           </p:cNvPr>
@@ -25025,7 +26070,7 @@
           <a:bodyPr xmlns:a="http://schemas.openxmlformats.org/drawingml/2006/main" wrap="square" anchor="ctr"/>
           <a:lstStyle xmlns:a="http://schemas.openxmlformats.org/drawingml/2006/main">
             <a:defPPr algn="ctr">
-              <a:defRPr sz="2025">
+              <a:defRPr sz="1875">
                 <a:solidFill>
                   <a:srgbClr val="F6E0F5"/>
                 </a:solidFill>
@@ -25035,7 +26080,7 @@
               </a:defRPr>
             </a:defPPr>
             <a:lvl1pPr algn="ctr">
-              <a:defRPr sz="2025">
+              <a:defRPr sz="1875">
                 <a:solidFill>
                   <a:srgbClr val="F6E0F5"/>
                 </a:solidFill>
@@ -25045,7 +26090,7 @@
               </a:defRPr>
             </a:lvl1pPr>
             <a:lvl2pPr algn="ctr">
-              <a:defRPr sz="2025">
+              <a:defRPr sz="1875">
                 <a:solidFill>
                   <a:srgbClr val="F6E0F5"/>
                 </a:solidFill>
@@ -25055,7 +26100,7 @@
               </a:defRPr>
             </a:lvl2pPr>
             <a:lvl3pPr algn="ctr">
-              <a:defRPr sz="2025">
+              <a:defRPr sz="1875">
                 <a:solidFill>
                   <a:srgbClr val="F6E0F5"/>
                 </a:solidFill>
@@ -25065,7 +26110,7 @@
               </a:defRPr>
             </a:lvl3pPr>
             <a:lvl4pPr algn="ctr">
-              <a:defRPr sz="2025">
+              <a:defRPr sz="1875">
                 <a:solidFill>
                   <a:srgbClr val="F6E0F5"/>
                 </a:solidFill>
@@ -25075,7 +26120,7 @@
               </a:defRPr>
             </a:lvl4pPr>
             <a:lvl5pPr algn="ctr">
-              <a:defRPr sz="2025">
+              <a:defRPr sz="1875">
                 <a:solidFill>
                   <a:srgbClr val="F6E0F5"/>
                 </a:solidFill>
@@ -25085,7 +26130,7 @@
               </a:defRPr>
             </a:lvl5pPr>
             <a:lvl6pPr algn="ctr">
-              <a:defRPr sz="2025">
+              <a:defRPr sz="1875">
                 <a:solidFill>
                   <a:srgbClr val="F6E0F5"/>
                 </a:solidFill>
@@ -25095,7 +26140,7 @@
               </a:defRPr>
             </a:lvl6pPr>
             <a:lvl7pPr algn="ctr">
-              <a:defRPr sz="2025">
+              <a:defRPr sz="1875">
                 <a:solidFill>
                   <a:srgbClr val="F6E0F5"/>
                 </a:solidFill>
@@ -25105,7 +26150,7 @@
               </a:defRPr>
             </a:lvl7pPr>
             <a:lvl8pPr algn="ctr">
-              <a:defRPr sz="2025">
+              <a:defRPr sz="1875">
                 <a:solidFill>
                   <a:srgbClr val="F6E0F5"/>
                 </a:solidFill>
@@ -25115,7 +26160,7 @@
               </a:defRPr>
             </a:lvl8pPr>
             <a:lvl9pPr algn="ctr">
-              <a:defRPr sz="2025">
+              <a:defRPr sz="1875">
                 <a:solidFill>
                   <a:srgbClr val="F6E0F5"/>
                 </a:solidFill>
@@ -25127,7 +26172,7 @@
           </a:lstStyle>
           <a:p xmlns:a="http://schemas.openxmlformats.org/drawingml/2006/main">
             <a:pPr algn="ctr">
-              <a:defRPr sz="2025">
+              <a:defRPr sz="1875">
                 <a:solidFill>
                   <a:srgbClr val="F6E0F5"/>
                 </a:solidFill>
@@ -25137,7 +26182,7 @@
               </a:defRPr>
             </a:pPr>
             <a:r>
-              <a:rPr sz="2025">
+              <a:rPr sz="1875">
                 <a:solidFill>
                   <a:srgbClr val="F6E0F5"/>
                 </a:solidFill>
@@ -25145,12 +26190,12 @@
                 <a:ea typeface="Microsoft JhengHei"/>
                 <a:cs typeface="Microsoft JhengHei"/>
               </a:rPr>
-              <a:t>A15s／B120s</a:t>
+              <a:t>A級15秒／B級120秒</a:t>
             </a:r>
           </a:p>
           <a:p xmlns:a="http://schemas.openxmlformats.org/drawingml/2006/main">
             <a:pPr algn="ctr">
-              <a:defRPr sz="2025">
+              <a:defRPr sz="1875">
                 <a:solidFill>
                   <a:srgbClr val="F6E0F5"/>
                 </a:solidFill>
@@ -25160,7 +26205,7 @@
               </a:defRPr>
             </a:pPr>
             <a:r>
-              <a:rPr sz="2025">
+              <a:rPr sz="1875">
                 <a:solidFill>
                   <a:srgbClr val="F6E0F5"/>
                 </a:solidFill>
@@ -25168,7 +26213,7 @@
                 <a:ea typeface="Microsoft JhengHei"/>
                 <a:cs typeface="Microsoft JhengHei"/>
               </a:rPr>
-              <a:t>C60s報廢退出</a:t>
+              <a:t>C級60秒報廢</a:t>
             </a:r>
           </a:p>
         </p:txBody>
@@ -25178,7 +26223,7 @@
           <p:cNvPr id="31" name="">
             <a:extLst xmlns:a="http://schemas.openxmlformats.org/drawingml/2006/main">
               <a:ext uri="{FF2B5EF4-FFF2-40B4-BE49-F238E27FC236}">
-                <a16:creationId xmlns:a16="http://schemas.microsoft.com/office/drawing/2014/main" id="{2883D454-A8BE-4A26-A008-6FF98AF75312}"/>
+                <a16:creationId xmlns:a16="http://schemas.microsoft.com/office/drawing/2014/main" id="{BF3F3F86-BEC5-40A4-980D-644BE3352F1B}"/>
               </a:ext>
             </a:extLst>
           </p:cNvPr>
@@ -25210,7 +26255,7 @@
           <a:bodyPr xmlns:a="http://schemas.openxmlformats.org/drawingml/2006/main" wrap="square" anchor="ctr"/>
           <a:lstStyle xmlns:a="http://schemas.openxmlformats.org/drawingml/2006/main">
             <a:defPPr algn="ctr">
-              <a:defRPr sz="2025">
+              <a:defRPr sz="1875">
                 <a:solidFill>
                   <a:srgbClr val="F6E0F5"/>
                 </a:solidFill>
@@ -25220,7 +26265,7 @@
               </a:defRPr>
             </a:defPPr>
             <a:lvl1pPr algn="ctr">
-              <a:defRPr sz="2025">
+              <a:defRPr sz="1875">
                 <a:solidFill>
                   <a:srgbClr val="F6E0F5"/>
                 </a:solidFill>
@@ -25230,7 +26275,7 @@
               </a:defRPr>
             </a:lvl1pPr>
             <a:lvl2pPr algn="ctr">
-              <a:defRPr sz="2025">
+              <a:defRPr sz="1875">
                 <a:solidFill>
                   <a:srgbClr val="F6E0F5"/>
                 </a:solidFill>
@@ -25240,7 +26285,7 @@
               </a:defRPr>
             </a:lvl2pPr>
             <a:lvl3pPr algn="ctr">
-              <a:defRPr sz="2025">
+              <a:defRPr sz="1875">
                 <a:solidFill>
                   <a:srgbClr val="F6E0F5"/>
                 </a:solidFill>
@@ -25250,7 +26295,7 @@
               </a:defRPr>
             </a:lvl3pPr>
             <a:lvl4pPr algn="ctr">
-              <a:defRPr sz="2025">
+              <a:defRPr sz="1875">
                 <a:solidFill>
                   <a:srgbClr val="F6E0F5"/>
                 </a:solidFill>
@@ -25260,7 +26305,7 @@
               </a:defRPr>
             </a:lvl4pPr>
             <a:lvl5pPr algn="ctr">
-              <a:defRPr sz="2025">
+              <a:defRPr sz="1875">
                 <a:solidFill>
                   <a:srgbClr val="F6E0F5"/>
                 </a:solidFill>
@@ -25270,7 +26315,7 @@
               </a:defRPr>
             </a:lvl5pPr>
             <a:lvl6pPr algn="ctr">
-              <a:defRPr sz="2025">
+              <a:defRPr sz="1875">
                 <a:solidFill>
                   <a:srgbClr val="F6E0F5"/>
                 </a:solidFill>
@@ -25280,7 +26325,7 @@
               </a:defRPr>
             </a:lvl6pPr>
             <a:lvl7pPr algn="ctr">
-              <a:defRPr sz="2025">
+              <a:defRPr sz="1875">
                 <a:solidFill>
                   <a:srgbClr val="F6E0F5"/>
                 </a:solidFill>
@@ -25290,7 +26335,7 @@
               </a:defRPr>
             </a:lvl7pPr>
             <a:lvl8pPr algn="ctr">
-              <a:defRPr sz="2025">
+              <a:defRPr sz="1875">
                 <a:solidFill>
                   <a:srgbClr val="F6E0F5"/>
                 </a:solidFill>
@@ -25300,7 +26345,7 @@
               </a:defRPr>
             </a:lvl8pPr>
             <a:lvl9pPr algn="ctr">
-              <a:defRPr sz="2025">
+              <a:defRPr sz="1875">
                 <a:solidFill>
                   <a:srgbClr val="F6E0F5"/>
                 </a:solidFill>
@@ -25312,7 +26357,7 @@
           </a:lstStyle>
           <a:p xmlns:a="http://schemas.openxmlformats.org/drawingml/2006/main">
             <a:pPr algn="ctr">
-              <a:defRPr sz="2025">
+              <a:defRPr sz="1875">
                 <a:solidFill>
                   <a:srgbClr val="F6E0F5"/>
                 </a:solidFill>
@@ -25322,7 +26367,7 @@
               </a:defRPr>
             </a:pPr>
             <a:r>
-              <a:rPr sz="2025">
+              <a:rPr sz="1875">
                 <a:solidFill>
                   <a:srgbClr val="F6E0F5"/>
                 </a:solidFill>
@@ -25330,12 +26375,12 @@
                 <a:ea typeface="Microsoft JhengHei"/>
                 <a:cs typeface="Microsoft JhengHei"/>
               </a:rPr>
-              <a:t>空箱：4m高程緩衝</a:t>
+              <a:t>空箱：升至4公尺</a:t>
             </a:r>
           </a:p>
           <a:p xmlns:a="http://schemas.openxmlformats.org/drawingml/2006/main">
             <a:pPr algn="ctr">
-              <a:defRPr sz="2025">
+              <a:defRPr sz="1875">
                 <a:solidFill>
                   <a:srgbClr val="F6E0F5"/>
                 </a:solidFill>
@@ -25345,7 +26390,7 @@
               </a:defRPr>
             </a:pPr>
             <a:r>
-              <a:rPr sz="2025">
+              <a:rPr sz="1875">
                 <a:solidFill>
                   <a:srgbClr val="F6E0F5"/>
                 </a:solidFill>
@@ -25353,7 +26398,7 @@
                 <a:ea typeface="Microsoft JhengHei"/>
                 <a:cs typeface="Microsoft JhengHei"/>
               </a:rPr>
-              <a:t>清洗30s</a:t>
+              <a:t>清洗30秒</a:t>
             </a:r>
           </a:p>
         </p:txBody>
@@ -25363,7 +26408,7 @@
           <p:cNvPr id="32" name="">
             <a:extLst xmlns:a="http://schemas.openxmlformats.org/drawingml/2006/main">
               <a:ext uri="{FF2B5EF4-FFF2-40B4-BE49-F238E27FC236}">
-                <a16:creationId xmlns:a16="http://schemas.microsoft.com/office/drawing/2014/main" id="{A182E8A8-FE85-400E-81B9-8172AC292B0F}"/>
+                <a16:creationId xmlns:a16="http://schemas.microsoft.com/office/drawing/2014/main" id="{C54B245C-6DAE-4ED7-9A61-0DE78FA5A0E8}"/>
               </a:ext>
             </a:extLst>
           </p:cNvPr>
@@ -25395,7 +26440,7 @@
           <a:bodyPr xmlns:a="http://schemas.openxmlformats.org/drawingml/2006/main" wrap="square" anchor="ctr"/>
           <a:lstStyle xmlns:a="http://schemas.openxmlformats.org/drawingml/2006/main">
             <a:defPPr algn="ctr">
-              <a:defRPr sz="2025">
+              <a:defRPr sz="1875">
                 <a:solidFill>
                   <a:srgbClr val="F6E0F5"/>
                 </a:solidFill>
@@ -25405,7 +26450,7 @@
               </a:defRPr>
             </a:defPPr>
             <a:lvl1pPr algn="ctr">
-              <a:defRPr sz="2025">
+              <a:defRPr sz="1875">
                 <a:solidFill>
                   <a:srgbClr val="F6E0F5"/>
                 </a:solidFill>
@@ -25415,7 +26460,7 @@
               </a:defRPr>
             </a:lvl1pPr>
             <a:lvl2pPr algn="ctr">
-              <a:defRPr sz="2025">
+              <a:defRPr sz="1875">
                 <a:solidFill>
                   <a:srgbClr val="F6E0F5"/>
                 </a:solidFill>
@@ -25425,7 +26470,7 @@
               </a:defRPr>
             </a:lvl2pPr>
             <a:lvl3pPr algn="ctr">
-              <a:defRPr sz="2025">
+              <a:defRPr sz="1875">
                 <a:solidFill>
                   <a:srgbClr val="F6E0F5"/>
                 </a:solidFill>
@@ -25435,7 +26480,7 @@
               </a:defRPr>
             </a:lvl3pPr>
             <a:lvl4pPr algn="ctr">
-              <a:defRPr sz="2025">
+              <a:defRPr sz="1875">
                 <a:solidFill>
                   <a:srgbClr val="F6E0F5"/>
                 </a:solidFill>
@@ -25445,7 +26490,7 @@
               </a:defRPr>
             </a:lvl4pPr>
             <a:lvl5pPr algn="ctr">
-              <a:defRPr sz="2025">
+              <a:defRPr sz="1875">
                 <a:solidFill>
                   <a:srgbClr val="F6E0F5"/>
                 </a:solidFill>
@@ -25455,7 +26500,7 @@
               </a:defRPr>
             </a:lvl5pPr>
             <a:lvl6pPr algn="ctr">
-              <a:defRPr sz="2025">
+              <a:defRPr sz="1875">
                 <a:solidFill>
                   <a:srgbClr val="F6E0F5"/>
                 </a:solidFill>
@@ -25465,7 +26510,7 @@
               </a:defRPr>
             </a:lvl6pPr>
             <a:lvl7pPr algn="ctr">
-              <a:defRPr sz="2025">
+              <a:defRPr sz="1875">
                 <a:solidFill>
                   <a:srgbClr val="F6E0F5"/>
                 </a:solidFill>
@@ -25475,7 +26520,7 @@
               </a:defRPr>
             </a:lvl7pPr>
             <a:lvl8pPr algn="ctr">
-              <a:defRPr sz="2025">
+              <a:defRPr sz="1875">
                 <a:solidFill>
                   <a:srgbClr val="F6E0F5"/>
                 </a:solidFill>
@@ -25485,7 +26530,7 @@
               </a:defRPr>
             </a:lvl8pPr>
             <a:lvl9pPr algn="ctr">
-              <a:defRPr sz="2025">
+              <a:defRPr sz="1875">
                 <a:solidFill>
                   <a:srgbClr val="F6E0F5"/>
                 </a:solidFill>
@@ -25497,7 +26542,7 @@
           </a:lstStyle>
           <a:p xmlns:a="http://schemas.openxmlformats.org/drawingml/2006/main">
             <a:pPr algn="ctr">
-              <a:defRPr sz="2025">
+              <a:defRPr sz="1875">
                 <a:solidFill>
                   <a:srgbClr val="F6E0F5"/>
                 </a:solidFill>
@@ -25507,7 +26552,7 @@
               </a:defRPr>
             </a:pPr>
             <a:r>
-              <a:rPr sz="2025">
+              <a:rPr sz="1875">
                 <a:solidFill>
                   <a:srgbClr val="F6E0F5"/>
                 </a:solidFill>
@@ -25515,12 +26560,12 @@
                 <a:ea typeface="Microsoft JhengHei"/>
                 <a:cs typeface="Microsoft JhengHei"/>
               </a:rPr>
-              <a:t>風乾6m／檢驗5s</a:t>
+              <a:t>風乾段6公尺</a:t>
             </a:r>
           </a:p>
           <a:p xmlns:a="http://schemas.openxmlformats.org/drawingml/2006/main">
             <a:pPr algn="ctr">
-              <a:defRPr sz="2025">
+              <a:defRPr sz="1875">
                 <a:solidFill>
                   <a:srgbClr val="F6E0F5"/>
                 </a:solidFill>
@@ -25530,7 +26575,7 @@
               </a:defRPr>
             </a:pPr>
             <a:r>
-              <a:rPr sz="2025">
+              <a:rPr sz="1875">
                 <a:solidFill>
                   <a:srgbClr val="F6E0F5"/>
                 </a:solidFill>
@@ -25538,7 +26583,7 @@
                 <a:ea typeface="Microsoft JhengHei"/>
                 <a:cs typeface="Microsoft JhengHei"/>
               </a:rPr>
-              <a:t>2%箱報廢</a:t>
+              <a:t>檢驗5秒，2%報廢</a:t>
             </a:r>
           </a:p>
         </p:txBody>
@@ -25548,7 +26593,7 @@
           <p:cNvPr id="33" name="">
             <a:extLst xmlns:a="http://schemas.openxmlformats.org/drawingml/2006/main">
               <a:ext uri="{FF2B5EF4-FFF2-40B4-BE49-F238E27FC236}">
-                <a16:creationId xmlns:a16="http://schemas.microsoft.com/office/drawing/2014/main" id="{33E7C3B8-07C7-45DC-8AEE-213B0E09E75B}"/>
+                <a16:creationId xmlns:a16="http://schemas.microsoft.com/office/drawing/2014/main" id="{BCD6CA7C-DC57-4158-AF48-73E6A60C9071}"/>
               </a:ext>
             </a:extLst>
           </p:cNvPr>
@@ -25580,7 +26625,7 @@
           <a:bodyPr xmlns:a="http://schemas.openxmlformats.org/drawingml/2006/main" wrap="square" anchor="ctr"/>
           <a:lstStyle xmlns:a="http://schemas.openxmlformats.org/drawingml/2006/main">
             <a:defPPr algn="ctr">
-              <a:defRPr sz="2025">
+              <a:defRPr sz="1875">
                 <a:solidFill>
                   <a:srgbClr val="F6E0F5"/>
                 </a:solidFill>
@@ -25590,7 +26635,7 @@
               </a:defRPr>
             </a:defPPr>
             <a:lvl1pPr algn="ctr">
-              <a:defRPr sz="2025">
+              <a:defRPr sz="1875">
                 <a:solidFill>
                   <a:srgbClr val="F6E0F5"/>
                 </a:solidFill>
@@ -25600,7 +26645,7 @@
               </a:defRPr>
             </a:lvl1pPr>
             <a:lvl2pPr algn="ctr">
-              <a:defRPr sz="2025">
+              <a:defRPr sz="1875">
                 <a:solidFill>
                   <a:srgbClr val="F6E0F5"/>
                 </a:solidFill>
@@ -25610,7 +26655,7 @@
               </a:defRPr>
             </a:lvl2pPr>
             <a:lvl3pPr algn="ctr">
-              <a:defRPr sz="2025">
+              <a:defRPr sz="1875">
                 <a:solidFill>
                   <a:srgbClr val="F6E0F5"/>
                 </a:solidFill>
@@ -25620,7 +26665,7 @@
               </a:defRPr>
             </a:lvl3pPr>
             <a:lvl4pPr algn="ctr">
-              <a:defRPr sz="2025">
+              <a:defRPr sz="1875">
                 <a:solidFill>
                   <a:srgbClr val="F6E0F5"/>
                 </a:solidFill>
@@ -25630,7 +26675,7 @@
               </a:defRPr>
             </a:lvl4pPr>
             <a:lvl5pPr algn="ctr">
-              <a:defRPr sz="2025">
+              <a:defRPr sz="1875">
                 <a:solidFill>
                   <a:srgbClr val="F6E0F5"/>
                 </a:solidFill>
@@ -25640,7 +26685,7 @@
               </a:defRPr>
             </a:lvl5pPr>
             <a:lvl6pPr algn="ctr">
-              <a:defRPr sz="2025">
+              <a:defRPr sz="1875">
                 <a:solidFill>
                   <a:srgbClr val="F6E0F5"/>
                 </a:solidFill>
@@ -25650,7 +26695,7 @@
               </a:defRPr>
             </a:lvl6pPr>
             <a:lvl7pPr algn="ctr">
-              <a:defRPr sz="2025">
+              <a:defRPr sz="1875">
                 <a:solidFill>
                   <a:srgbClr val="F6E0F5"/>
                 </a:solidFill>
@@ -25660,7 +26705,7 @@
               </a:defRPr>
             </a:lvl7pPr>
             <a:lvl8pPr algn="ctr">
-              <a:defRPr sz="2025">
+              <a:defRPr sz="1875">
                 <a:solidFill>
                   <a:srgbClr val="F6E0F5"/>
                 </a:solidFill>
@@ -25670,7 +26715,7 @@
               </a:defRPr>
             </a:lvl8pPr>
             <a:lvl9pPr algn="ctr">
-              <a:defRPr sz="2025">
+              <a:defRPr sz="1875">
                 <a:solidFill>
                   <a:srgbClr val="F6E0F5"/>
                 </a:solidFill>
@@ -25682,7 +26727,7 @@
           </a:lstStyle>
           <a:p xmlns:a="http://schemas.openxmlformats.org/drawingml/2006/main">
             <a:pPr algn="ctr">
-              <a:defRPr sz="2025">
+              <a:defRPr sz="1875">
                 <a:solidFill>
                   <a:srgbClr val="F6E0F5"/>
                 </a:solidFill>
@@ -25692,7 +26737,7 @@
               </a:defRPr>
             </a:pPr>
             <a:r>
-              <a:rPr sz="2025">
+              <a:rPr sz="1875">
                 <a:solidFill>
                   <a:srgbClr val="F6E0F5"/>
                 </a:solidFill>
@@ -25700,12 +26745,12 @@
                 <a:ea typeface="Microsoft JhengHei"/>
                 <a:cs typeface="Microsoft JhengHei"/>
               </a:rPr>
-              <a:t>Combiner</a:t>
+              <a:t>商品與箱配對</a:t>
             </a:r>
           </a:p>
           <a:p xmlns:a="http://schemas.openxmlformats.org/drawingml/2006/main">
             <a:pPr algn="ctr">
-              <a:defRPr sz="2025">
+              <a:defRPr sz="1875">
                 <a:solidFill>
                   <a:srgbClr val="F6E0F5"/>
                 </a:solidFill>
@@ -25715,7 +26760,7 @@
               </a:defRPr>
             </a:pPr>
             <a:r>
-              <a:rPr sz="2025">
+              <a:rPr sz="1875">
                 <a:solidFill>
                   <a:srgbClr val="F6E0F5"/>
                 </a:solidFill>
@@ -25733,7 +26778,7 @@
           <p:cNvPr id="34" name="">
             <a:extLst xmlns:a="http://schemas.openxmlformats.org/drawingml/2006/main">
               <a:ext uri="{FF2B5EF4-FFF2-40B4-BE49-F238E27FC236}">
-                <a16:creationId xmlns:a16="http://schemas.microsoft.com/office/drawing/2014/main" id="{0D490712-EF26-4DD0-ADA9-1A455EA18C35}"/>
+                <a16:creationId xmlns:a16="http://schemas.microsoft.com/office/drawing/2014/main" id="{F855D70A-4188-4DD8-B3BB-B1F543D0BD24}"/>
               </a:ext>
             </a:extLst>
           </p:cNvPr>
@@ -25765,7 +26810,7 @@
           <a:bodyPr xmlns:a="http://schemas.openxmlformats.org/drawingml/2006/main" wrap="square" anchor="ctr"/>
           <a:lstStyle xmlns:a="http://schemas.openxmlformats.org/drawingml/2006/main">
             <a:defPPr algn="ctr">
-              <a:defRPr sz="2025">
+              <a:defRPr sz="1875">
                 <a:solidFill>
                   <a:srgbClr val="F6E0F5"/>
                 </a:solidFill>
@@ -25775,7 +26820,7 @@
               </a:defRPr>
             </a:defPPr>
             <a:lvl1pPr algn="ctr">
-              <a:defRPr sz="2025">
+              <a:defRPr sz="1875">
                 <a:solidFill>
                   <a:srgbClr val="F6E0F5"/>
                 </a:solidFill>
@@ -25785,7 +26830,7 @@
               </a:defRPr>
             </a:lvl1pPr>
             <a:lvl2pPr algn="ctr">
-              <a:defRPr sz="2025">
+              <a:defRPr sz="1875">
                 <a:solidFill>
                   <a:srgbClr val="F6E0F5"/>
                 </a:solidFill>
@@ -25795,7 +26840,7 @@
               </a:defRPr>
             </a:lvl2pPr>
             <a:lvl3pPr algn="ctr">
-              <a:defRPr sz="2025">
+              <a:defRPr sz="1875">
                 <a:solidFill>
                   <a:srgbClr val="F6E0F5"/>
                 </a:solidFill>
@@ -25805,7 +26850,7 @@
               </a:defRPr>
             </a:lvl3pPr>
             <a:lvl4pPr algn="ctr">
-              <a:defRPr sz="2025">
+              <a:defRPr sz="1875">
                 <a:solidFill>
                   <a:srgbClr val="F6E0F5"/>
                 </a:solidFill>
@@ -25815,7 +26860,7 @@
               </a:defRPr>
             </a:lvl4pPr>
             <a:lvl5pPr algn="ctr">
-              <a:defRPr sz="2025">
+              <a:defRPr sz="1875">
                 <a:solidFill>
                   <a:srgbClr val="F6E0F5"/>
                 </a:solidFill>
@@ -25825,7 +26870,7 @@
               </a:defRPr>
             </a:lvl5pPr>
             <a:lvl6pPr algn="ctr">
-              <a:defRPr sz="2025">
+              <a:defRPr sz="1875">
                 <a:solidFill>
                   <a:srgbClr val="F6E0F5"/>
                 </a:solidFill>
@@ -25835,7 +26880,7 @@
               </a:defRPr>
             </a:lvl6pPr>
             <a:lvl7pPr algn="ctr">
-              <a:defRPr sz="2025">
+              <a:defRPr sz="1875">
                 <a:solidFill>
                   <a:srgbClr val="F6E0F5"/>
                 </a:solidFill>
@@ -25845,7 +26890,7 @@
               </a:defRPr>
             </a:lvl7pPr>
             <a:lvl8pPr algn="ctr">
-              <a:defRPr sz="2025">
+              <a:defRPr sz="1875">
                 <a:solidFill>
                   <a:srgbClr val="F6E0F5"/>
                 </a:solidFill>
@@ -25855,7 +26900,7 @@
               </a:defRPr>
             </a:lvl8pPr>
             <a:lvl9pPr algn="ctr">
-              <a:defRPr sz="2025">
+              <a:defRPr sz="1875">
                 <a:solidFill>
                   <a:srgbClr val="F6E0F5"/>
                 </a:solidFill>
@@ -25867,7 +26912,7 @@
           </a:lstStyle>
           <a:p xmlns:a="http://schemas.openxmlformats.org/drawingml/2006/main">
             <a:pPr algn="ctr">
-              <a:defRPr sz="2025">
+              <a:defRPr sz="1875">
                 <a:solidFill>
                   <a:srgbClr val="F6E0F5"/>
                 </a:solidFill>
@@ -25877,7 +26922,7 @@
               </a:defRPr>
             </a:pPr>
             <a:r>
-              <a:rPr sz="2025">
+              <a:rPr sz="1875">
                 <a:solidFill>
                   <a:srgbClr val="F6E0F5"/>
                 </a:solidFill>
@@ -25890,7 +26935,7 @@
           </a:p>
           <a:p xmlns:a="http://schemas.openxmlformats.org/drawingml/2006/main">
             <a:pPr algn="ctr">
-              <a:defRPr sz="2025">
+              <a:defRPr sz="1875">
                 <a:solidFill>
                   <a:srgbClr val="F6E0F5"/>
                 </a:solidFill>
@@ -25900,7 +26945,7 @@
               </a:defRPr>
             </a:pPr>
             <a:r>
-              <a:rPr sz="2025">
+              <a:rPr sz="1875">
                 <a:solidFill>
                   <a:srgbClr val="F6E0F5"/>
                 </a:solidFill>
@@ -25918,7 +26963,7 @@
           <p:cNvPr id="35" name="內容_4_↗">
             <a:extLst xmlns:a="http://schemas.openxmlformats.org/drawingml/2006/main">
               <a:ext uri="{FF2B5EF4-FFF2-40B4-BE49-F238E27FC236}">
-                <a16:creationId xmlns:a16="http://schemas.microsoft.com/office/drawing/2014/main" id="{01CA77D6-D1C0-447C-8574-F586FBDD8341}"/>
+                <a16:creationId xmlns:a16="http://schemas.microsoft.com/office/drawing/2014/main" id="{902B4C31-6504-4301-99B6-A57166A2AF86}"/>
               </a:ext>
             </a:extLst>
           </p:cNvPr>
@@ -26076,7 +27121,7 @@
           <p:cNvPr id="36" name="內容_4_→">
             <a:extLst xmlns:a="http://schemas.openxmlformats.org/drawingml/2006/main">
               <a:ext uri="{FF2B5EF4-FFF2-40B4-BE49-F238E27FC236}">
-                <a16:creationId xmlns:a16="http://schemas.microsoft.com/office/drawing/2014/main" id="{7C8F160C-FCB9-45CA-95EF-BB7E3BF57E86}"/>
+                <a16:creationId xmlns:a16="http://schemas.microsoft.com/office/drawing/2014/main" id="{0288791D-D715-4099-B1A1-A73EBADA7C55}"/>
               </a:ext>
             </a:extLst>
           </p:cNvPr>
@@ -26234,7 +27279,7 @@
           <p:cNvPr id="37" name="內容_4_↘">
             <a:extLst xmlns:a="http://schemas.openxmlformats.org/drawingml/2006/main">
               <a:ext uri="{FF2B5EF4-FFF2-40B4-BE49-F238E27FC236}">
-                <a16:creationId xmlns:a16="http://schemas.microsoft.com/office/drawing/2014/main" id="{18D819DA-D295-4F4F-AECA-25368B50009F}"/>
+                <a16:creationId xmlns:a16="http://schemas.microsoft.com/office/drawing/2014/main" id="{C5E51052-80A8-4F7A-AB44-223D86F6C7DB}"/>
               </a:ext>
             </a:extLst>
           </p:cNvPr>
@@ -26392,7 +27437,7 @@
           <p:cNvPr id="38" name="內容_4_↘">
             <a:extLst xmlns:a="http://schemas.openxmlformats.org/drawingml/2006/main">
               <a:ext uri="{FF2B5EF4-FFF2-40B4-BE49-F238E27FC236}">
-                <a16:creationId xmlns:a16="http://schemas.microsoft.com/office/drawing/2014/main" id="{A37F5345-8EDE-4161-A8E6-D743D92DC9D4}"/>
+                <a16:creationId xmlns:a16="http://schemas.microsoft.com/office/drawing/2014/main" id="{EDD5AC4D-B283-43FE-AA07-AD773359E227}"/>
               </a:ext>
             </a:extLst>
           </p:cNvPr>
@@ -26550,7 +27595,7 @@
           <p:cNvPr id="39" name="內容_4_→">
             <a:extLst xmlns:a="http://schemas.openxmlformats.org/drawingml/2006/main">
               <a:ext uri="{FF2B5EF4-FFF2-40B4-BE49-F238E27FC236}">
-                <a16:creationId xmlns:a16="http://schemas.microsoft.com/office/drawing/2014/main" id="{E33F0C06-84B2-42AD-9774-809B24E23869}"/>
+                <a16:creationId xmlns:a16="http://schemas.microsoft.com/office/drawing/2014/main" id="{EB9B485B-4315-4BE4-8A7D-FD1D8E1D4986}"/>
               </a:ext>
             </a:extLst>
           </p:cNvPr>
@@ -26708,7 +27753,7 @@
           <p:cNvPr id="40" name="內容_4_↗">
             <a:extLst xmlns:a="http://schemas.openxmlformats.org/drawingml/2006/main">
               <a:ext uri="{FF2B5EF4-FFF2-40B4-BE49-F238E27FC236}">
-                <a16:creationId xmlns:a16="http://schemas.microsoft.com/office/drawing/2014/main" id="{2A08BE44-6F9A-4243-8160-10136C568164}"/>
+                <a16:creationId xmlns:a16="http://schemas.microsoft.com/office/drawing/2014/main" id="{B4DA2387-2306-42AA-B18B-CBDB89449989}"/>
               </a:ext>
             </a:extLst>
           </p:cNvPr>
@@ -26866,7 +27911,7 @@
           <p:cNvPr id="41" name="內容_4_→">
             <a:extLst xmlns:a="http://schemas.openxmlformats.org/drawingml/2006/main">
               <a:ext uri="{FF2B5EF4-FFF2-40B4-BE49-F238E27FC236}">
-                <a16:creationId xmlns:a16="http://schemas.microsoft.com/office/drawing/2014/main" id="{F39E5DC0-8F06-443B-9549-C9A22C8BB2EC}"/>
+                <a16:creationId xmlns:a16="http://schemas.microsoft.com/office/drawing/2014/main" id="{6EA951FD-B63C-4B44-95F1-77EF6C8FCE25}"/>
               </a:ext>
             </a:extLst>
           </p:cNvPr>
@@ -27024,7 +28069,7 @@
           <p:cNvPr id="42" name="內容_4_有限500箱資產池，每箱15">
             <a:extLst xmlns:a="http://schemas.openxmlformats.org/drawingml/2006/main">
               <a:ext uri="{FF2B5EF4-FFF2-40B4-BE49-F238E27FC236}">
-                <a16:creationId xmlns:a16="http://schemas.microsoft.com/office/drawing/2014/main" id="{95FCE544-CFBF-470A-B724-AEE2C180E01E}"/>
+                <a16:creationId xmlns:a16="http://schemas.microsoft.com/office/drawing/2014/main" id="{123D6470-C58A-41C6-B607-F37E53300D76}"/>
               </a:ext>
             </a:extLst>
           </p:cNvPr>
@@ -27172,17 +28217,17 @@
                 <a:ea typeface="Microsoft JhengHei"/>
                 <a:cs typeface="Microsoft JhengHei"/>
               </a:rPr>
-              <a:t>有限500箱資產池，每箱150次；外包支線延遲4h並保留系統WIP</a:t>
+              <a:t>有限500箱資產池，每箱150次；外包支線延遲4小時並保留系統在製量</a:t>
             </a:r>
           </a:p>
         </p:txBody>
       </p:sp>
       <p:sp>
         <p:nvSpPr>
-          <p:cNvPr id="43" name="內容_4_0m緩衝採原生真旁路。商品／">
+          <p:cNvPr id="43" name="內容_4_A級做簡單整理，B級需整新，">
             <a:extLst xmlns:a="http://schemas.openxmlformats.org/drawingml/2006/main">
               <a:ext uri="{FF2B5EF4-FFF2-40B4-BE49-F238E27FC236}">
-                <a16:creationId xmlns:a16="http://schemas.microsoft.com/office/drawing/2014/main" id="{647FDEAC-4C85-42C2-A52E-C56E92734A64}"/>
+                <a16:creationId xmlns:a16="http://schemas.microsoft.com/office/drawing/2014/main" id="{4AE20F96-9FB2-40F8-B7E8-A73B2431700A}"/>
               </a:ext>
             </a:extLst>
           </p:cNvPr>
@@ -27330,7 +28375,7 @@
                 <a:ea typeface="Microsoft JhengHei"/>
                 <a:cs typeface="Microsoft JhengHei"/>
               </a:rPr>
-              <a:t>0m緩衝採原生真旁路。商品／空箱各自守恆，回到Combiner才一箱一件。</a:t>
+              <a:t>A級做簡單整理，B級需整新，C級報廢；合格商品與空箱配成一件一箱。0公尺是實際旁路。</a:t>
             </a:r>
           </a:p>
         </p:txBody>
@@ -27338,7 +28383,7 @@
     </p:spTree>
     <p:extLst>
       <p:ext uri="{BB962C8B-B14F-4D97-AF65-F5344CB8AC3E}">
-        <p14:creationId xmlns:p14="http://schemas.microsoft.com/office/powerpoint/2010/main" val="1056178993"/>
+        <p14:creationId xmlns:p14="http://schemas.microsoft.com/office/powerpoint/2010/main" val="765238933"/>
       </p:ext>
     </p:extLst>
   </p:cSld>
@@ -27362,7 +28407,7 @@
           <p:cNvPr id="2" name="Freeform 2">
             <a:extLst xmlns:a="http://schemas.openxmlformats.org/drawingml/2006/main">
               <a:ext uri="{FF2B5EF4-FFF2-40B4-BE49-F238E27FC236}">
-                <a16:creationId xmlns:a16="http://schemas.microsoft.com/office/drawing/2014/main" id="{9376683A-B6EF-4716-B753-3512415EE25A}"/>
+                <a16:creationId xmlns:a16="http://schemas.microsoft.com/office/drawing/2014/main" id="{3F70B8E4-080C-4FEE-BD09-130F09ED3D49}"/>
               </a:ext>
             </a:extLst>
           </p:cNvPr>
@@ -27400,7 +28445,7 @@
             </a:pathLst>
           </a:custGeom>
           <a:blipFill xmlns:a="http://schemas.openxmlformats.org/drawingml/2006/main">
-            <a:blip xmlns:r="http://schemas.openxmlformats.org/officeDocument/2006/relationships" r:embed="R1bacf616a9b248cd"/>
+            <a:blip xmlns:r="http://schemas.openxmlformats.org/officeDocument/2006/relationships" r:embed="Rff56e7321da24d7d"/>
             <a:stretch>
               <a:fillRect l="-35258" t="-5555" r="-24931" b="-72434"/>
             </a:stretch>
@@ -27412,7 +28457,7 @@
           <p:cNvPr id="4" name="Freeform 4">
             <a:extLst xmlns:a="http://schemas.openxmlformats.org/drawingml/2006/main">
               <a:ext uri="{FF2B5EF4-FFF2-40B4-BE49-F238E27FC236}">
-                <a16:creationId xmlns:a16="http://schemas.microsoft.com/office/drawing/2014/main" id="{78B8AB74-4599-4748-A05D-FEEEE638DC1D}"/>
+                <a16:creationId xmlns:a16="http://schemas.microsoft.com/office/drawing/2014/main" id="{FD27ABE3-05A3-4A5C-BB3D-1F8EE84F2DA6}"/>
               </a:ext>
             </a:extLst>
           </p:cNvPr>
@@ -27486,7 +28531,7 @@
           <p:cNvPr id="5" name="TextBox 5">
             <a:extLst xmlns:a="http://schemas.openxmlformats.org/drawingml/2006/main">
               <a:ext uri="{FF2B5EF4-FFF2-40B4-BE49-F238E27FC236}">
-                <a16:creationId xmlns:a16="http://schemas.microsoft.com/office/drawing/2014/main" id="{3904EC0B-214F-4188-8079-6A23A2E94EEC}"/>
+                <a16:creationId xmlns:a16="http://schemas.microsoft.com/office/drawing/2014/main" id="{684B43DA-E321-4DEA-927B-49B735EBA270}"/>
               </a:ext>
             </a:extLst>
           </p:cNvPr>
@@ -27522,7 +28567,7 @@
           <p:cNvPr id="6" name="Freeform 6">
             <a:extLst xmlns:a="http://schemas.openxmlformats.org/drawingml/2006/main">
               <a:ext uri="{FF2B5EF4-FFF2-40B4-BE49-F238E27FC236}">
-                <a16:creationId xmlns:a16="http://schemas.microsoft.com/office/drawing/2014/main" id="{1E8AC249-517D-422E-B4F5-05BB4AA91720}"/>
+                <a16:creationId xmlns:a16="http://schemas.microsoft.com/office/drawing/2014/main" id="{311B51E4-9625-4011-A0F1-DA888BD6FD28}"/>
               </a:ext>
             </a:extLst>
           </p:cNvPr>
@@ -27560,7 +28605,7 @@
             </a:pathLst>
           </a:custGeom>
           <a:blipFill xmlns:a="http://schemas.openxmlformats.org/drawingml/2006/main">
-            <a:blip xmlns:r="http://schemas.openxmlformats.org/officeDocument/2006/relationships" r:embed="R49d6967c24f94eb1"/>
+            <a:blip xmlns:r="http://schemas.openxmlformats.org/officeDocument/2006/relationships" r:embed="R886a694ff6ef4c59"/>
             <a:stretch>
               <a:fillRect l="0" t="0" r="0" b="0"/>
             </a:stretch>
@@ -27572,7 +28617,7 @@
           <p:cNvPr id="7" name="Freeform 7">
             <a:extLst xmlns:a="http://schemas.openxmlformats.org/drawingml/2006/main">
               <a:ext uri="{FF2B5EF4-FFF2-40B4-BE49-F238E27FC236}">
-                <a16:creationId xmlns:a16="http://schemas.microsoft.com/office/drawing/2014/main" id="{3FD622C8-D150-4F46-99EE-F98563612B2D}"/>
+                <a16:creationId xmlns:a16="http://schemas.microsoft.com/office/drawing/2014/main" id="{A1020F76-AF9C-4880-8857-22BAB2911ED4}"/>
               </a:ext>
             </a:extLst>
           </p:cNvPr>
@@ -27610,10 +28655,10 @@
             </a:pathLst>
           </a:custGeom>
           <a:blipFill xmlns:a="http://schemas.openxmlformats.org/drawingml/2006/main">
-            <a:blip xmlns:r="http://schemas.openxmlformats.org/officeDocument/2006/relationships" r:embed="R78c683d8201d4e3d">
+            <a:blip xmlns:r="http://schemas.openxmlformats.org/officeDocument/2006/relationships" r:embed="R654f1d4f1a3746ba">
               <a:extLst>
                 <a:ext uri="{96DAC541-7B7A-43D3-8B79-37D633B846F1}">
-                  <asvg:svgBlip xmlns:asvg="http://schemas.microsoft.com/office/drawing/2016/SVG/main" r:embed="R185b070b6e584900"/>
+                  <asvg:svgBlip xmlns:asvg="http://schemas.microsoft.com/office/drawing/2016/SVG/main" r:embed="Ra215b423f1ff4f97"/>
                 </a:ext>
               </a:extLst>
             </a:blip>
@@ -27628,7 +28673,7 @@
           <p:cNvPr id="8" name="Freeform 8">
             <a:extLst xmlns:a="http://schemas.openxmlformats.org/drawingml/2006/main">
               <a:ext uri="{FF2B5EF4-FFF2-40B4-BE49-F238E27FC236}">
-                <a16:creationId xmlns:a16="http://schemas.microsoft.com/office/drawing/2014/main" id="{ADE74D45-2596-43D1-AAE9-5E4929454B19}"/>
+                <a16:creationId xmlns:a16="http://schemas.microsoft.com/office/drawing/2014/main" id="{2EA81DCC-AF10-4424-9A45-9EDB99B235BA}"/>
               </a:ext>
             </a:extLst>
           </p:cNvPr>
@@ -27666,10 +28711,10 @@
             </a:pathLst>
           </a:custGeom>
           <a:blipFill xmlns:a="http://schemas.openxmlformats.org/drawingml/2006/main">
-            <a:blip xmlns:r="http://schemas.openxmlformats.org/officeDocument/2006/relationships" r:embed="R78c683d8201d4e3d">
+            <a:blip xmlns:r="http://schemas.openxmlformats.org/officeDocument/2006/relationships" r:embed="R654f1d4f1a3746ba">
               <a:extLst>
                 <a:ext uri="{96DAC541-7B7A-43D3-8B79-37D633B846F1}">
-                  <asvg:svgBlip xmlns:asvg="http://schemas.microsoft.com/office/drawing/2016/SVG/main" r:embed="R185b070b6e584900"/>
+                  <asvg:svgBlip xmlns:asvg="http://schemas.microsoft.com/office/drawing/2016/SVG/main" r:embed="Ra215b423f1ff4f97"/>
                 </a:ext>
               </a:extLst>
             </a:blip>
@@ -27684,7 +28729,7 @@
           <p:cNvPr id="9" name="Freeform 9">
             <a:extLst xmlns:a="http://schemas.openxmlformats.org/drawingml/2006/main">
               <a:ext uri="{FF2B5EF4-FFF2-40B4-BE49-F238E27FC236}">
-                <a16:creationId xmlns:a16="http://schemas.microsoft.com/office/drawing/2014/main" id="{8775B44C-C3C6-4CF2-826C-246E19C3D15A}"/>
+                <a16:creationId xmlns:a16="http://schemas.microsoft.com/office/drawing/2014/main" id="{F576D18E-69AA-4E69-A70D-F80B00FC7EA1}"/>
               </a:ext>
             </a:extLst>
           </p:cNvPr>
@@ -27732,7 +28777,7 @@
           <p:cNvPr id="10" name="TextBox 10">
             <a:extLst xmlns:a="http://schemas.openxmlformats.org/drawingml/2006/main">
               <a:ext uri="{FF2B5EF4-FFF2-40B4-BE49-F238E27FC236}">
-                <a16:creationId xmlns:a16="http://schemas.microsoft.com/office/drawing/2014/main" id="{8523EA46-919F-4D11-8213-748C4F01956A}"/>
+                <a16:creationId xmlns:a16="http://schemas.microsoft.com/office/drawing/2014/main" id="{F7519A7D-25C9-409B-BC12-3975219269A4}"/>
               </a:ext>
             </a:extLst>
           </p:cNvPr>
@@ -27893,7 +28938,7 @@
           <p:cNvPr id="11" name="TextBox 11">
             <a:extLst xmlns:a="http://schemas.openxmlformats.org/drawingml/2006/main">
               <a:ext uri="{FF2B5EF4-FFF2-40B4-BE49-F238E27FC236}">
-                <a16:creationId xmlns:a16="http://schemas.microsoft.com/office/drawing/2014/main" id="{9A6034A9-E873-4120-96F6-DF01C732FF36}"/>
+                <a16:creationId xmlns:a16="http://schemas.microsoft.com/office/drawing/2014/main" id="{6E8564D9-E8E1-48F2-A927-A0EB9D3EFC82}"/>
               </a:ext>
             </a:extLst>
           </p:cNvPr>
@@ -27947,7 +28992,7 @@
           <p:cNvPr id="12" name="TextBox 12">
             <a:extLst xmlns:a="http://schemas.openxmlformats.org/drawingml/2006/main">
               <a:ext uri="{FF2B5EF4-FFF2-40B4-BE49-F238E27FC236}">
-                <a16:creationId xmlns:a16="http://schemas.microsoft.com/office/drawing/2014/main" id="{171B05E9-AFF2-449D-98D7-B100F4C7FF91}"/>
+                <a16:creationId xmlns:a16="http://schemas.microsoft.com/office/drawing/2014/main" id="{1ABEADA7-2635-4490-B6C2-0D879CBC730B}"/>
               </a:ext>
             </a:extLst>
           </p:cNvPr>
@@ -27999,7 +29044,7 @@
           <p:cNvPr id="13" name="TextBox 13">
             <a:extLst xmlns:a="http://schemas.openxmlformats.org/drawingml/2006/main">
               <a:ext uri="{FF2B5EF4-FFF2-40B4-BE49-F238E27FC236}">
-                <a16:creationId xmlns:a16="http://schemas.microsoft.com/office/drawing/2014/main" id="{96C80008-4E5E-4B7B-A445-25F3D1548FB8}"/>
+                <a16:creationId xmlns:a16="http://schemas.microsoft.com/office/drawing/2014/main" id="{243354D3-5DDA-45F9-A367-4A923DAAB1A9}"/>
               </a:ext>
             </a:extLst>
           </p:cNvPr>
@@ -28051,7 +29096,7 @@
           <p:cNvPr id="14" name="Freeform 14">
             <a:extLst xmlns:a="http://schemas.openxmlformats.org/drawingml/2006/main">
               <a:ext uri="{FF2B5EF4-FFF2-40B4-BE49-F238E27FC236}">
-                <a16:creationId xmlns:a16="http://schemas.microsoft.com/office/drawing/2014/main" id="{BD5D4BC9-18B1-44CE-B871-06BFDD451F8F}"/>
+                <a16:creationId xmlns:a16="http://schemas.microsoft.com/office/drawing/2014/main" id="{F372BD86-7588-438A-9DD6-D60604B9D526}"/>
               </a:ext>
             </a:extLst>
           </p:cNvPr>
@@ -28099,7 +29144,7 @@
           <p:cNvPr id="15" name="Freeform 15">
             <a:extLst xmlns:a="http://schemas.openxmlformats.org/drawingml/2006/main">
               <a:ext uri="{FF2B5EF4-FFF2-40B4-BE49-F238E27FC236}">
-                <a16:creationId xmlns:a16="http://schemas.microsoft.com/office/drawing/2014/main" id="{66625144-AF51-4801-A354-FD86B5A8391E}"/>
+                <a16:creationId xmlns:a16="http://schemas.microsoft.com/office/drawing/2014/main" id="{C24FC02E-F374-46D0-8B12-9BF645B5A15D}"/>
               </a:ext>
             </a:extLst>
           </p:cNvPr>
@@ -28147,7 +29192,7 @@
           <p:cNvPr id="16" name="TextBox 16">
             <a:extLst xmlns:a="http://schemas.openxmlformats.org/drawingml/2006/main">
               <a:ext uri="{FF2B5EF4-FFF2-40B4-BE49-F238E27FC236}">
-                <a16:creationId xmlns:a16="http://schemas.microsoft.com/office/drawing/2014/main" id="{AD40E350-8C90-4FCB-9262-8744B1C788FE}"/>
+                <a16:creationId xmlns:a16="http://schemas.microsoft.com/office/drawing/2014/main" id="{B1CA8324-0D50-44FD-B000-C3D6D6ABDC54}"/>
               </a:ext>
             </a:extLst>
           </p:cNvPr>
@@ -28196,7 +29241,7 @@
           <p:cNvPr id="17" name="TextBox 17">
             <a:extLst xmlns:a="http://schemas.openxmlformats.org/drawingml/2006/main">
               <a:ext uri="{FF2B5EF4-FFF2-40B4-BE49-F238E27FC236}">
-                <a16:creationId xmlns:a16="http://schemas.microsoft.com/office/drawing/2014/main" id="{F3A3CADB-3E3F-409C-ADB9-2AD3C6494C8D}"/>
+                <a16:creationId xmlns:a16="http://schemas.microsoft.com/office/drawing/2014/main" id="{BA00C6F7-ABC3-4121-BB5A-A534CD70997C}"/>
               </a:ext>
             </a:extLst>
           </p:cNvPr>
@@ -28245,7 +29290,7 @@
           <p:cNvPr id="18" name="TextBox 18">
             <a:extLst xmlns:a="http://schemas.openxmlformats.org/drawingml/2006/main">
               <a:ext uri="{FF2B5EF4-FFF2-40B4-BE49-F238E27FC236}">
-                <a16:creationId xmlns:a16="http://schemas.microsoft.com/office/drawing/2014/main" id="{9A7434BC-6522-4BF2-87C0-C268C094E690}"/>
+                <a16:creationId xmlns:a16="http://schemas.microsoft.com/office/drawing/2014/main" id="{FB684131-2548-4F1C-86B5-1730C00EA5EC}"/>
               </a:ext>
             </a:extLst>
           </p:cNvPr>
@@ -28294,7 +29339,7 @@
           <p:cNvPr id="19" name="TextBox 19">
             <a:extLst xmlns:a="http://schemas.openxmlformats.org/drawingml/2006/main">
               <a:ext uri="{FF2B5EF4-FFF2-40B4-BE49-F238E27FC236}">
-                <a16:creationId xmlns:a16="http://schemas.microsoft.com/office/drawing/2014/main" id="{A7F1691A-D06E-441A-8084-DFCAE7D03B05}"/>
+                <a16:creationId xmlns:a16="http://schemas.microsoft.com/office/drawing/2014/main" id="{2C3DEC86-1F95-4661-86C1-4D7092E01ECA}"/>
               </a:ext>
             </a:extLst>
           </p:cNvPr>
@@ -28346,7 +29391,7 @@
           <p:cNvPr id="20" name="TextBox 20">
             <a:extLst xmlns:a="http://schemas.openxmlformats.org/drawingml/2006/main">
               <a:ext uri="{FF2B5EF4-FFF2-40B4-BE49-F238E27FC236}">
-                <a16:creationId xmlns:a16="http://schemas.microsoft.com/office/drawing/2014/main" id="{76435E91-4F9C-420F-B294-F2A5E3D95E91}"/>
+                <a16:creationId xmlns:a16="http://schemas.microsoft.com/office/drawing/2014/main" id="{47F41C8F-62F2-4918-82BB-B79ACB2EDFF0}"/>
               </a:ext>
             </a:extLst>
           </p:cNvPr>
@@ -28398,7 +29443,7 @@
           <p:cNvPr id="21" name="TextBox 21">
             <a:extLst xmlns:a="http://schemas.openxmlformats.org/drawingml/2006/main">
               <a:ext uri="{FF2B5EF4-FFF2-40B4-BE49-F238E27FC236}">
-                <a16:creationId xmlns:a16="http://schemas.microsoft.com/office/drawing/2014/main" id="{9D49E462-5765-4E04-9BF6-EDC822A5400E}"/>
+                <a16:creationId xmlns:a16="http://schemas.microsoft.com/office/drawing/2014/main" id="{4AC25130-67DC-48B4-AD86-E719BD0D4903}"/>
               </a:ext>
             </a:extLst>
           </p:cNvPr>
@@ -28447,10 +29492,10 @@
       </p:sp>
       <p:sp>
         <p:nvSpPr>
-          <p:cNvPr id="22" name="內容_5_3D 佈局">
+          <p:cNvPr id="22" name="內容_5_三維倉庫佈局">
             <a:extLst xmlns:a="http://schemas.openxmlformats.org/drawingml/2006/main">
               <a:ext uri="{FF2B5EF4-FFF2-40B4-BE49-F238E27FC236}">
-                <a16:creationId xmlns:a16="http://schemas.microsoft.com/office/drawing/2014/main" id="{EB0199B0-2E76-4708-9498-6DC2CE80C605}"/>
+                <a16:creationId xmlns:a16="http://schemas.microsoft.com/office/drawing/2014/main" id="{6926D982-AC07-4798-90B3-EBD46D847C6E}"/>
               </a:ext>
             </a:extLst>
           </p:cNvPr>
@@ -28598,7 +29643,7 @@
                 <a:ea typeface="Microsoft JhengHei"/>
                 <a:cs typeface="Microsoft JhengHei"/>
               </a:rPr>
-              <a:t>3D 佈局</a:t>
+              <a:t>三維倉庫佈局</a:t>
             </a:r>
           </a:p>
         </p:txBody>
@@ -28608,7 +29653,7 @@
           <p:cNvPr id="23" name="內容_5_雙層輸送網的原生運行畫面">
             <a:extLst xmlns:a="http://schemas.openxmlformats.org/drawingml/2006/main">
               <a:ext uri="{FF2B5EF4-FFF2-40B4-BE49-F238E27FC236}">
-                <a16:creationId xmlns:a16="http://schemas.microsoft.com/office/drawing/2014/main" id="{6C6A4C97-3D46-4CEA-A0E0-F110085A154B}"/>
+                <a16:creationId xmlns:a16="http://schemas.microsoft.com/office/drawing/2014/main" id="{2EEBD832-39B3-4604-AC50-DCAAA304AAFF}"/>
               </a:ext>
             </a:extLst>
           </p:cNvPr>
@@ -28766,7 +29811,7 @@
           <p:cNvPr id="24" name="">
             <a:extLst xmlns:a="http://schemas.openxmlformats.org/drawingml/2006/main">
               <a:ext uri="{FF2B5EF4-FFF2-40B4-BE49-F238E27FC236}">
-                <a16:creationId xmlns:a16="http://schemas.microsoft.com/office/drawing/2014/main" id="{1E389275-7A6B-4EB0-86AA-B2391ACC87FA}"/>
+                <a16:creationId xmlns:a16="http://schemas.microsoft.com/office/drawing/2014/main" id="{21721BD8-DAE5-47F3-9E13-1A5F3D004583}"/>
               </a:ext>
             </a:extLst>
           </p:cNvPr>
@@ -28776,7 +29821,7 @@
           <p:nvPr/>
         </p:nvPicPr>
         <p:blipFill>
-          <a:blip xmlns:r="http://schemas.openxmlformats.org/officeDocument/2006/relationships" xmlns:a="http://schemas.openxmlformats.org/drawingml/2006/main" r:embed="R7ad7265d7b5141d9"/>
+          <a:blip xmlns:r="http://schemas.openxmlformats.org/officeDocument/2006/relationships" xmlns:a="http://schemas.openxmlformats.org/drawingml/2006/main" r:embed="R4998c41aa2f848d2"/>
           <a:srcRect xmlns:a="http://schemas.openxmlformats.org/drawingml/2006/main" l="0" t="20000" r="0" b="15000"/>
           <a:stretch xmlns:a="http://schemas.openxmlformats.org/drawingml/2006/main"/>
         </p:blipFill>
@@ -28792,10 +29837,10 @@
       </p:pic>
       <p:sp>
         <p:nvSpPr>
-          <p:cNvPr id="25" name="內容_5_S1、P4、12m、seed">
+          <p:cNvPr id="25" name="內容_5_短波尖峰、聯合改善、12公尺">
             <a:extLst xmlns:a="http://schemas.openxmlformats.org/drawingml/2006/main">
               <a:ext uri="{FF2B5EF4-FFF2-40B4-BE49-F238E27FC236}">
-                <a16:creationId xmlns:a16="http://schemas.microsoft.com/office/drawing/2014/main" id="{F5D5D33A-ADEC-4983-96DD-6E4DB0B6B313}"/>
+                <a16:creationId xmlns:a16="http://schemas.microsoft.com/office/drawing/2014/main" id="{331FC24A-BBA7-44F1-8649-7FE3426020FE}"/>
               </a:ext>
             </a:extLst>
           </p:cNvPr>
@@ -28943,7 +29988,7 @@
                 <a:ea typeface="Microsoft JhengHei"/>
                 <a:cs typeface="Microsoft JhengHei"/>
               </a:rPr>
-              <a:t>S1、P4、12m、seed101；v8原生3D實際運行。正式統計來自原生Experimenter 1,350次。</a:t>
+              <a:t>短波尖峰、聯合改善、12公尺緩衝；隨機種子101。三維畫面另附，正式統計取自1350次批次實驗。</a:t>
             </a:r>
           </a:p>
         </p:txBody>
@@ -28951,7 +29996,7 @@
     </p:spTree>
     <p:extLst>
       <p:ext uri="{BB962C8B-B14F-4D97-AF65-F5344CB8AC3E}">
-        <p14:creationId xmlns:p14="http://schemas.microsoft.com/office/powerpoint/2010/main" val="1954555260"/>
+        <p14:creationId xmlns:p14="http://schemas.microsoft.com/office/powerpoint/2010/main" val="914521362"/>
       </p:ext>
     </p:extLst>
   </p:cSld>
@@ -28975,7 +30020,7 @@
           <p:cNvPr id="2" name="Freeform 2">
             <a:extLst xmlns:a="http://schemas.openxmlformats.org/drawingml/2006/main">
               <a:ext uri="{FF2B5EF4-FFF2-40B4-BE49-F238E27FC236}">
-                <a16:creationId xmlns:a16="http://schemas.microsoft.com/office/drawing/2014/main" id="{6BC6F2CA-121A-4889-85F0-7C569674A226}"/>
+                <a16:creationId xmlns:a16="http://schemas.microsoft.com/office/drawing/2014/main" id="{147E8E21-B0EB-4F83-BAD5-6DEBB682B84E}"/>
               </a:ext>
             </a:extLst>
           </p:cNvPr>
@@ -29013,7 +30058,7 @@
             </a:pathLst>
           </a:custGeom>
           <a:blipFill xmlns:a="http://schemas.openxmlformats.org/drawingml/2006/main">
-            <a:blip xmlns:r="http://schemas.openxmlformats.org/officeDocument/2006/relationships" r:embed="R805aec13e537454f"/>
+            <a:blip xmlns:r="http://schemas.openxmlformats.org/officeDocument/2006/relationships" r:embed="R47c5b041d70a4c3c"/>
             <a:stretch>
               <a:fillRect l="-35258" t="-5555" r="-24931" b="-72434"/>
             </a:stretch>
@@ -29025,7 +30070,7 @@
           <p:cNvPr id="4" name="Freeform 4">
             <a:extLst xmlns:a="http://schemas.openxmlformats.org/drawingml/2006/main">
               <a:ext uri="{FF2B5EF4-FFF2-40B4-BE49-F238E27FC236}">
-                <a16:creationId xmlns:a16="http://schemas.microsoft.com/office/drawing/2014/main" id="{77F85F8D-EA9F-4077-9FDB-B3F15006E111}"/>
+                <a16:creationId xmlns:a16="http://schemas.microsoft.com/office/drawing/2014/main" id="{A6B6CB35-CF56-4A7E-A248-7AA8026DB9D8}"/>
               </a:ext>
             </a:extLst>
           </p:cNvPr>
@@ -29099,7 +30144,7 @@
           <p:cNvPr id="5" name="TextBox 5">
             <a:extLst xmlns:a="http://schemas.openxmlformats.org/drawingml/2006/main">
               <a:ext uri="{FF2B5EF4-FFF2-40B4-BE49-F238E27FC236}">
-                <a16:creationId xmlns:a16="http://schemas.microsoft.com/office/drawing/2014/main" id="{DBC8767C-7F45-4E0C-95D4-266A4B6B4153}"/>
+                <a16:creationId xmlns:a16="http://schemas.microsoft.com/office/drawing/2014/main" id="{85ABF7DB-CEEE-4460-B167-D748C439152C}"/>
               </a:ext>
             </a:extLst>
           </p:cNvPr>
@@ -29135,7 +30180,7 @@
           <p:cNvPr id="6" name="Freeform 6">
             <a:extLst xmlns:a="http://schemas.openxmlformats.org/drawingml/2006/main">
               <a:ext uri="{FF2B5EF4-FFF2-40B4-BE49-F238E27FC236}">
-                <a16:creationId xmlns:a16="http://schemas.microsoft.com/office/drawing/2014/main" id="{4FF9E9B2-2F95-4449-9CA1-D51F72731772}"/>
+                <a16:creationId xmlns:a16="http://schemas.microsoft.com/office/drawing/2014/main" id="{7AF0E679-5A01-40B9-B698-9DB84F510371}"/>
               </a:ext>
             </a:extLst>
           </p:cNvPr>
@@ -29173,7 +30218,7 @@
             </a:pathLst>
           </a:custGeom>
           <a:blipFill xmlns:a="http://schemas.openxmlformats.org/drawingml/2006/main">
-            <a:blip xmlns:r="http://schemas.openxmlformats.org/officeDocument/2006/relationships" r:embed="R88d8c1804b004787"/>
+            <a:blip xmlns:r="http://schemas.openxmlformats.org/officeDocument/2006/relationships" r:embed="R9ddda592e5214dbc"/>
             <a:stretch>
               <a:fillRect l="0" t="0" r="0" b="0"/>
             </a:stretch>
@@ -29185,7 +30230,7 @@
           <p:cNvPr id="7" name="Freeform 7">
             <a:extLst xmlns:a="http://schemas.openxmlformats.org/drawingml/2006/main">
               <a:ext uri="{FF2B5EF4-FFF2-40B4-BE49-F238E27FC236}">
-                <a16:creationId xmlns:a16="http://schemas.microsoft.com/office/drawing/2014/main" id="{538EF938-CD38-4B56-95DE-3C4082D0072E}"/>
+                <a16:creationId xmlns:a16="http://schemas.microsoft.com/office/drawing/2014/main" id="{368AE9C0-6023-48DA-8120-4FDCD9604358}"/>
               </a:ext>
             </a:extLst>
           </p:cNvPr>
@@ -29223,10 +30268,10 @@
             </a:pathLst>
           </a:custGeom>
           <a:blipFill xmlns:a="http://schemas.openxmlformats.org/drawingml/2006/main">
-            <a:blip xmlns:r="http://schemas.openxmlformats.org/officeDocument/2006/relationships" r:embed="Ree65a4b95c1a4df3">
+            <a:blip xmlns:r="http://schemas.openxmlformats.org/officeDocument/2006/relationships" r:embed="R4b3212d8313f4f2d">
               <a:extLst>
                 <a:ext uri="{96DAC541-7B7A-43D3-8B79-37D633B846F1}">
-                  <asvg:svgBlip xmlns:asvg="http://schemas.microsoft.com/office/drawing/2016/SVG/main" r:embed="Rcce568ef5e7a47a4"/>
+                  <asvg:svgBlip xmlns:asvg="http://schemas.microsoft.com/office/drawing/2016/SVG/main" r:embed="Rcc05ea273b8f4564"/>
                 </a:ext>
               </a:extLst>
             </a:blip>
@@ -29241,7 +30286,7 @@
           <p:cNvPr id="8" name="Freeform 8">
             <a:extLst xmlns:a="http://schemas.openxmlformats.org/drawingml/2006/main">
               <a:ext uri="{FF2B5EF4-FFF2-40B4-BE49-F238E27FC236}">
-                <a16:creationId xmlns:a16="http://schemas.microsoft.com/office/drawing/2014/main" id="{22CAC96E-3321-426D-ACBA-FA000CF87E3A}"/>
+                <a16:creationId xmlns:a16="http://schemas.microsoft.com/office/drawing/2014/main" id="{8A0ED8EE-B9A4-48F6-8CD7-CA81E5739063}"/>
               </a:ext>
             </a:extLst>
           </p:cNvPr>
@@ -29279,10 +30324,10 @@
             </a:pathLst>
           </a:custGeom>
           <a:blipFill xmlns:a="http://schemas.openxmlformats.org/drawingml/2006/main">
-            <a:blip xmlns:r="http://schemas.openxmlformats.org/officeDocument/2006/relationships" r:embed="Ree65a4b95c1a4df3">
+            <a:blip xmlns:r="http://schemas.openxmlformats.org/officeDocument/2006/relationships" r:embed="R4b3212d8313f4f2d">
               <a:extLst>
                 <a:ext uri="{96DAC541-7B7A-43D3-8B79-37D633B846F1}">
-                  <asvg:svgBlip xmlns:asvg="http://schemas.microsoft.com/office/drawing/2016/SVG/main" r:embed="Rcce568ef5e7a47a4"/>
+                  <asvg:svgBlip xmlns:asvg="http://schemas.microsoft.com/office/drawing/2016/SVG/main" r:embed="Rcc05ea273b8f4564"/>
                 </a:ext>
               </a:extLst>
             </a:blip>
@@ -29297,7 +30342,7 @@
           <p:cNvPr id="9" name="TextBox 9">
             <a:extLst xmlns:a="http://schemas.openxmlformats.org/drawingml/2006/main">
               <a:ext uri="{FF2B5EF4-FFF2-40B4-BE49-F238E27FC236}">
-                <a16:creationId xmlns:a16="http://schemas.microsoft.com/office/drawing/2014/main" id="{0F445D1A-B459-4401-A4ED-D8F490E2511F}"/>
+                <a16:creationId xmlns:a16="http://schemas.microsoft.com/office/drawing/2014/main" id="{92D3CCFE-694F-4B37-96F0-B8FF21F83B1A}"/>
               </a:ext>
             </a:extLst>
           </p:cNvPr>
@@ -29349,7 +30394,7 @@
           <p:cNvPr id="10" name="Freeform 10">
             <a:extLst xmlns:a="http://schemas.openxmlformats.org/drawingml/2006/main">
               <a:ext uri="{FF2B5EF4-FFF2-40B4-BE49-F238E27FC236}">
-                <a16:creationId xmlns:a16="http://schemas.microsoft.com/office/drawing/2014/main" id="{9F3B1313-8D63-4563-8155-CAD679774B9F}"/>
+                <a16:creationId xmlns:a16="http://schemas.microsoft.com/office/drawing/2014/main" id="{048868FD-82B3-4136-B15A-588F053B0E68}"/>
               </a:ext>
             </a:extLst>
           </p:cNvPr>
@@ -29397,7 +30442,7 @@
           <p:cNvPr id="12" name="Freeform 12">
             <a:extLst xmlns:a="http://schemas.openxmlformats.org/drawingml/2006/main">
               <a:ext uri="{FF2B5EF4-FFF2-40B4-BE49-F238E27FC236}">
-                <a16:creationId xmlns:a16="http://schemas.microsoft.com/office/drawing/2014/main" id="{3C110CD1-4179-448C-B4D7-E59B2AA28402}"/>
+                <a16:creationId xmlns:a16="http://schemas.microsoft.com/office/drawing/2014/main" id="{08B49B50-D071-4BAF-8BCD-1BB40D5D7B5F}"/>
               </a:ext>
             </a:extLst>
           </p:cNvPr>
@@ -29442,7 +30487,7 @@
           <p:cNvPr id="13" name="TextBox 13">
             <a:extLst xmlns:a="http://schemas.openxmlformats.org/drawingml/2006/main">
               <a:ext uri="{FF2B5EF4-FFF2-40B4-BE49-F238E27FC236}">
-                <a16:creationId xmlns:a16="http://schemas.microsoft.com/office/drawing/2014/main" id="{9BDC54C0-422F-47B4-8766-3A0213B0231C}"/>
+                <a16:creationId xmlns:a16="http://schemas.microsoft.com/office/drawing/2014/main" id="{9FEF6C44-D97B-4C33-9EEC-6F9B790A27A3}"/>
               </a:ext>
             </a:extLst>
           </p:cNvPr>
@@ -29603,7 +30648,7 @@
           <p:cNvPr id="14" name="TextBox 14">
             <a:extLst xmlns:a="http://schemas.openxmlformats.org/drawingml/2006/main">
               <a:ext uri="{FF2B5EF4-FFF2-40B4-BE49-F238E27FC236}">
-                <a16:creationId xmlns:a16="http://schemas.microsoft.com/office/drawing/2014/main" id="{57026770-AD0C-4A2A-AEAD-E4245791FDA3}"/>
+                <a16:creationId xmlns:a16="http://schemas.microsoft.com/office/drawing/2014/main" id="{B1298442-07EA-4DB7-9277-BD42799B34C8}"/>
               </a:ext>
             </a:extLst>
           </p:cNvPr>
@@ -29657,7 +30702,7 @@
           <p:cNvPr id="15" name="TextBox 15">
             <a:extLst xmlns:a="http://schemas.openxmlformats.org/drawingml/2006/main">
               <a:ext uri="{FF2B5EF4-FFF2-40B4-BE49-F238E27FC236}">
-                <a16:creationId xmlns:a16="http://schemas.microsoft.com/office/drawing/2014/main" id="{C3857FEA-C71B-4E20-AA06-0F33906F9412}"/>
+                <a16:creationId xmlns:a16="http://schemas.microsoft.com/office/drawing/2014/main" id="{11153EFA-5038-482F-A75B-82B11DC27A19}"/>
               </a:ext>
             </a:extLst>
           </p:cNvPr>
@@ -29709,7 +30754,7 @@
           <p:cNvPr id="16" name="TextBox 16">
             <a:extLst xmlns:a="http://schemas.openxmlformats.org/drawingml/2006/main">
               <a:ext uri="{FF2B5EF4-FFF2-40B4-BE49-F238E27FC236}">
-                <a16:creationId xmlns:a16="http://schemas.microsoft.com/office/drawing/2014/main" id="{B36AC534-0FBD-4035-88FD-37E533B569AD}"/>
+                <a16:creationId xmlns:a16="http://schemas.microsoft.com/office/drawing/2014/main" id="{04D384FE-3D38-4041-A296-E432181A45F7}"/>
               </a:ext>
             </a:extLst>
           </p:cNvPr>
@@ -29761,7 +30806,7 @@
           <p:cNvPr id="17" name="內容_6_多能工與防呆">
             <a:extLst xmlns:a="http://schemas.openxmlformats.org/drawingml/2006/main">
               <a:ext uri="{FF2B5EF4-FFF2-40B4-BE49-F238E27FC236}">
-                <a16:creationId xmlns:a16="http://schemas.microsoft.com/office/drawing/2014/main" id="{270E48F8-E8AD-4807-869E-F8FFB8AB7E87}"/>
+                <a16:creationId xmlns:a16="http://schemas.microsoft.com/office/drawing/2014/main" id="{ED2E9C38-9B0E-40FD-A48C-B2B113254568}"/>
               </a:ext>
             </a:extLst>
           </p:cNvPr>
@@ -29916,10 +30961,10 @@
       </p:sp>
       <p:sp>
         <p:nvSpPr>
-          <p:cNvPr id="18" name="內容_6_五人資源池與 A* 導航">
+          <p:cNvPr id="18" name="內容_6_五位多能工與A星尋路法">
             <a:extLst xmlns:a="http://schemas.openxmlformats.org/drawingml/2006/main">
               <a:ext uri="{FF2B5EF4-FFF2-40B4-BE49-F238E27FC236}">
-                <a16:creationId xmlns:a16="http://schemas.microsoft.com/office/drawing/2014/main" id="{F189CF11-51CF-448B-A8B5-73060BB40640}"/>
+                <a16:creationId xmlns:a16="http://schemas.microsoft.com/office/drawing/2014/main" id="{237685AC-7749-4F76-8F39-5E1BB79253E9}"/>
               </a:ext>
             </a:extLst>
           </p:cNvPr>
@@ -30067,17 +31112,17 @@
                 <a:ea typeface="Microsoft JhengHei"/>
                 <a:cs typeface="Microsoft JhengHei"/>
               </a:rPr>
-              <a:t>五人資源池與 A* 導航</a:t>
+              <a:t>五位多能工與A星尋路法</a:t>
             </a:r>
           </a:p>
         </p:txBody>
       </p:sp>
       <p:sp>
         <p:nvSpPr>
-          <p:cNvPr id="19" name="內容_6_QA 隊列 &gt;15 件">
+          <p:cNvPr id="19" name="內容_6_品質檢查 隊列 &gt;15 件">
             <a:extLst xmlns:a="http://schemas.openxmlformats.org/drawingml/2006/main">
               <a:ext uri="{FF2B5EF4-FFF2-40B4-BE49-F238E27FC236}">
-                <a16:creationId xmlns:a16="http://schemas.microsoft.com/office/drawing/2014/main" id="{216D4537-44F7-49CE-984B-CA30D5BD78EE}"/>
+                <a16:creationId xmlns:a16="http://schemas.microsoft.com/office/drawing/2014/main" id="{6F2F3156-0212-4C58-84FF-A37EDB21989F}"/>
               </a:ext>
             </a:extLst>
           </p:cNvPr>
@@ -30225,7 +31270,7 @@
                 <a:ea typeface="Microsoft JhengHei"/>
                 <a:cs typeface="Microsoft JhengHei"/>
               </a:rPr>
-              <a:t>QA 隊列 &gt;15 件</a:t>
+              <a:t>品質檢查 隊列 &gt;15 件</a:t>
             </a:r>
           </a:p>
         </p:txBody>
@@ -30235,7 +31280,7 @@
           <p:cNvPr id="20" name="內容_6_鎖定支援員，等現有整新任務完">
             <a:extLst xmlns:a="http://schemas.openxmlformats.org/drawingml/2006/main">
               <a:ext uri="{FF2B5EF4-FFF2-40B4-BE49-F238E27FC236}">
-                <a16:creationId xmlns:a16="http://schemas.microsoft.com/office/drawing/2014/main" id="{D8B7CAF4-1D63-4336-BA3F-1FADC5B2134C}"/>
+                <a16:creationId xmlns:a16="http://schemas.microsoft.com/office/drawing/2014/main" id="{D198DB10-4244-42B7-A4BC-06E1866906D4}"/>
               </a:ext>
             </a:extLst>
           </p:cNvPr>
@@ -30406,7 +31451,7 @@
                 <a:ea typeface="Microsoft JhengHei"/>
                 <a:cs typeface="Microsoft JhengHei"/>
               </a:rPr>
-              <a:t>抵達 QA 才將工時從40秒降為20秒。</a:t>
+              <a:t>抵達 品質檢查 才將工時從40秒降為20秒。</a:t>
             </a:r>
           </a:p>
           <a:p xmlns:a="http://schemas.openxmlformats.org/drawingml/2006/main">
@@ -30429,7 +31474,7 @@
                 <a:ea typeface="Microsoft JhengHei"/>
                 <a:cs typeface="Microsoft JhengHei"/>
               </a:rPr>
-              <a:t>QA 隊列 ≤5 件，先完成當前任務再歸建。</a:t>
+              <a:t>品質檢查 隊列 ≤5 件，先完成當前任務再歸建。</a:t>
             </a:r>
           </a:p>
           <a:p xmlns:a="http://schemas.openxmlformats.org/drawingml/2006/main">
@@ -30452,7 +31497,7 @@
                 <a:ea typeface="Microsoft JhengHei"/>
                 <a:cs typeface="Microsoft JhengHei"/>
               </a:rPr>
-              <a:t>支援旗標防止重複調派，B2工位暫停接新件。</a:t>
+              <a:t>支援旗標防止重複調派，整新二站暫停接新件。</a:t>
             </a:r>
           </a:p>
         </p:txBody>
@@ -30462,7 +31507,7 @@
           <p:cNvPr id="21" name="內容_6_5 人">
             <a:extLst xmlns:a="http://schemas.openxmlformats.org/drawingml/2006/main">
               <a:ext uri="{FF2B5EF4-FFF2-40B4-BE49-F238E27FC236}">
-                <a16:creationId xmlns:a16="http://schemas.microsoft.com/office/drawing/2014/main" id="{298B84A3-200A-4149-B218-4240550A22A0}"/>
+                <a16:creationId xmlns:a16="http://schemas.microsoft.com/office/drawing/2014/main" id="{3FC14C9C-388E-4B5E-B178-290AC6CA5A1E}"/>
               </a:ext>
             </a:extLst>
           </p:cNvPr>
@@ -30617,10 +31662,10 @@
       </p:sp>
       <p:sp>
         <p:nvSpPr>
-          <p:cNvPr id="22" name="內容_6_固定人數&#10;1.4 m/s 步">
+          <p:cNvPr id="22" name="內容_6_固定人數&#10;1.4公尺／秒 步">
             <a:extLst xmlns:a="http://schemas.openxmlformats.org/drawingml/2006/main">
               <a:ext uri="{FF2B5EF4-FFF2-40B4-BE49-F238E27FC236}">
-                <a16:creationId xmlns:a16="http://schemas.microsoft.com/office/drawing/2014/main" id="{46A49203-FB15-4AB3-95B8-460D5AE29B1D}"/>
+                <a16:creationId xmlns:a16="http://schemas.microsoft.com/office/drawing/2014/main" id="{AEDD77DF-7481-4D31-B0C9-DF13FA83F5FC}"/>
               </a:ext>
             </a:extLst>
           </p:cNvPr>
@@ -30791,7 +31836,7 @@
                 <a:ea typeface="Microsoft JhengHei"/>
                 <a:cs typeface="Microsoft JhengHei"/>
               </a:rPr>
-              <a:t>1.4 m/s 步速假設</a:t>
+              <a:t>1.4公尺／秒 步速假設</a:t>
             </a:r>
           </a:p>
           <a:p xmlns:a="http://schemas.openxmlformats.org/drawingml/2006/main">
@@ -30814,17 +31859,17 @@
                 <a:ea typeface="Microsoft JhengHei"/>
                 <a:cs typeface="Microsoft JhengHei"/>
               </a:rPr>
-              <a:t>原生 A* 實際移動</a:t>
+              <a:t>A星尋路法規劃實際移動</a:t>
             </a:r>
           </a:p>
         </p:txBody>
       </p:sp>
       <p:sp>
         <p:nvSpPr>
-          <p:cNvPr id="23" name="內容_6_5人×40段往返；86,79">
+          <p:cNvPr id="23" name="內容_6_A星（A*）是尋路方法；5人">
             <a:extLst xmlns:a="http://schemas.openxmlformats.org/drawingml/2006/main">
               <a:ext uri="{FF2B5EF4-FFF2-40B4-BE49-F238E27FC236}">
-                <a16:creationId xmlns:a16="http://schemas.microsoft.com/office/drawing/2014/main" id="{F7C4F44D-2378-4124-80DB-B14A209D4039}"/>
+                <a16:creationId xmlns:a16="http://schemas.microsoft.com/office/drawing/2014/main" id="{1A811295-95CA-4125-B0E5-3251BC964409}"/>
               </a:ext>
             </a:extLst>
           </p:cNvPr>
@@ -30972,7 +32017,7 @@
                 <a:ea typeface="Microsoft JhengHei"/>
                 <a:cs typeface="Microsoft JhengHei"/>
               </a:rPr>
-              <a:t>5人×40段往返；86,797筆活動路格占用、972,625段路徑方向檢查均無違規。</a:t>
+              <a:t>A星（A*）是尋路方法；5人各走40段。活動路格與單行檢查無違規，有限測試不等於普遍證明。</a:t>
             </a:r>
           </a:p>
         </p:txBody>
@@ -30980,7 +32025,7 @@
     </p:spTree>
     <p:extLst>
       <p:ext uri="{BB962C8B-B14F-4D97-AF65-F5344CB8AC3E}">
-        <p14:creationId xmlns:p14="http://schemas.microsoft.com/office/powerpoint/2010/main" val="2070929505"/>
+        <p14:creationId xmlns:p14="http://schemas.microsoft.com/office/powerpoint/2010/main" val="1337350568"/>
       </p:ext>
     </p:extLst>
   </p:cSld>
@@ -31004,7 +32049,7 @@
           <p:cNvPr id="2" name="Freeform 2">
             <a:extLst xmlns:a="http://schemas.openxmlformats.org/drawingml/2006/main">
               <a:ext uri="{FF2B5EF4-FFF2-40B4-BE49-F238E27FC236}">
-                <a16:creationId xmlns:a16="http://schemas.microsoft.com/office/drawing/2014/main" id="{0B07C207-1208-4B18-B811-74729D5BD07F}"/>
+                <a16:creationId xmlns:a16="http://schemas.microsoft.com/office/drawing/2014/main" id="{5E69468B-0E52-4996-B384-B7921F92B4F9}"/>
               </a:ext>
             </a:extLst>
           </p:cNvPr>
@@ -31042,7 +32087,7 @@
             </a:pathLst>
           </a:custGeom>
           <a:blipFill xmlns:a="http://schemas.openxmlformats.org/drawingml/2006/main">
-            <a:blip xmlns:r="http://schemas.openxmlformats.org/officeDocument/2006/relationships" r:embed="Rb6aa8e2430194a7f"/>
+            <a:blip xmlns:r="http://schemas.openxmlformats.org/officeDocument/2006/relationships" r:embed="R1267652d75c44adb"/>
             <a:stretch>
               <a:fillRect l="-35258" t="-5555" r="-24931" b="-72434"/>
             </a:stretch>
@@ -31054,7 +32099,7 @@
           <p:cNvPr id="3" name="TextBox 3">
             <a:extLst xmlns:a="http://schemas.openxmlformats.org/drawingml/2006/main">
               <a:ext uri="{FF2B5EF4-FFF2-40B4-BE49-F238E27FC236}">
-                <a16:creationId xmlns:a16="http://schemas.microsoft.com/office/drawing/2014/main" id="{9ED61450-491F-4F22-9AE5-F952FB016D87}"/>
+                <a16:creationId xmlns:a16="http://schemas.microsoft.com/office/drawing/2014/main" id="{5B179D0F-2CBB-4775-8BF9-74333A9864FD}"/>
               </a:ext>
             </a:extLst>
           </p:cNvPr>
@@ -31106,7 +32151,7 @@
           <p:cNvPr id="4" name="TextBox 4">
             <a:extLst xmlns:a="http://schemas.openxmlformats.org/drawingml/2006/main">
               <a:ext uri="{FF2B5EF4-FFF2-40B4-BE49-F238E27FC236}">
-                <a16:creationId xmlns:a16="http://schemas.microsoft.com/office/drawing/2014/main" id="{2D08625D-0AB8-4097-9F01-6D959FB9725C}"/>
+                <a16:creationId xmlns:a16="http://schemas.microsoft.com/office/drawing/2014/main" id="{BC6803EE-E9B2-4BEA-927B-4F102EB4518B}"/>
               </a:ext>
             </a:extLst>
           </p:cNvPr>
@@ -31158,7 +32203,7 @@
           <p:cNvPr id="6" name="Freeform 6">
             <a:extLst xmlns:a="http://schemas.openxmlformats.org/drawingml/2006/main">
               <a:ext uri="{FF2B5EF4-FFF2-40B4-BE49-F238E27FC236}">
-                <a16:creationId xmlns:a16="http://schemas.microsoft.com/office/drawing/2014/main" id="{EC7C895A-B724-46F3-BD86-D4A530F2BF2D}"/>
+                <a16:creationId xmlns:a16="http://schemas.microsoft.com/office/drawing/2014/main" id="{69D02800-B778-40EF-AF90-98408AC209E0}"/>
               </a:ext>
             </a:extLst>
           </p:cNvPr>
@@ -31232,7 +32277,7 @@
           <p:cNvPr id="7" name="TextBox 7">
             <a:extLst xmlns:a="http://schemas.openxmlformats.org/drawingml/2006/main">
               <a:ext uri="{FF2B5EF4-FFF2-40B4-BE49-F238E27FC236}">
-                <a16:creationId xmlns:a16="http://schemas.microsoft.com/office/drawing/2014/main" id="{43A99C24-7FE0-4998-81FE-3CEE4A1C1EAB}"/>
+                <a16:creationId xmlns:a16="http://schemas.microsoft.com/office/drawing/2014/main" id="{6C3D12A9-4543-4872-A5D3-B8DD3B29FCF2}"/>
               </a:ext>
             </a:extLst>
           </p:cNvPr>
@@ -31268,7 +32313,7 @@
           <p:cNvPr id="8" name="TextBox 8">
             <a:extLst xmlns:a="http://schemas.openxmlformats.org/drawingml/2006/main">
               <a:ext uri="{FF2B5EF4-FFF2-40B4-BE49-F238E27FC236}">
-                <a16:creationId xmlns:a16="http://schemas.microsoft.com/office/drawing/2014/main" id="{86D99507-2340-47F5-8799-041BACA30256}"/>
+                <a16:creationId xmlns:a16="http://schemas.microsoft.com/office/drawing/2014/main" id="{687318FF-DAF8-40DA-8CFC-44ECEBD2D321}"/>
               </a:ext>
             </a:extLst>
           </p:cNvPr>
@@ -31429,7 +32474,7 @@
           <p:cNvPr id="9" name="Freeform 9">
             <a:extLst xmlns:a="http://schemas.openxmlformats.org/drawingml/2006/main">
               <a:ext uri="{FF2B5EF4-FFF2-40B4-BE49-F238E27FC236}">
-                <a16:creationId xmlns:a16="http://schemas.microsoft.com/office/drawing/2014/main" id="{E94308F8-8F86-4AEC-B782-4F7DC4244749}"/>
+                <a16:creationId xmlns:a16="http://schemas.microsoft.com/office/drawing/2014/main" id="{2292E5E7-8B75-4BA1-9D65-63D602469A92}"/>
               </a:ext>
             </a:extLst>
           </p:cNvPr>
@@ -31467,7 +32512,7 @@
             </a:pathLst>
           </a:custGeom>
           <a:blipFill xmlns:a="http://schemas.openxmlformats.org/drawingml/2006/main">
-            <a:blip xmlns:r="http://schemas.openxmlformats.org/officeDocument/2006/relationships" r:embed="Rc2e0ee1c7f144ba9"/>
+            <a:blip xmlns:r="http://schemas.openxmlformats.org/officeDocument/2006/relationships" r:embed="R52ac1ba4dfc145ec"/>
             <a:stretch>
               <a:fillRect l="0" t="0" r="0" b="0"/>
             </a:stretch>
@@ -31479,7 +32524,7 @@
           <p:cNvPr id="10" name="Freeform 10">
             <a:extLst xmlns:a="http://schemas.openxmlformats.org/drawingml/2006/main">
               <a:ext uri="{FF2B5EF4-FFF2-40B4-BE49-F238E27FC236}">
-                <a16:creationId xmlns:a16="http://schemas.microsoft.com/office/drawing/2014/main" id="{FDF7363E-B486-4654-9BE1-F6E48990C763}"/>
+                <a16:creationId xmlns:a16="http://schemas.microsoft.com/office/drawing/2014/main" id="{4EABFB1D-4959-4CA0-A454-C2DEB007AD78}"/>
               </a:ext>
             </a:extLst>
           </p:cNvPr>
@@ -31517,10 +32562,10 @@
             </a:pathLst>
           </a:custGeom>
           <a:blipFill xmlns:a="http://schemas.openxmlformats.org/drawingml/2006/main">
-            <a:blip xmlns:r="http://schemas.openxmlformats.org/officeDocument/2006/relationships" r:embed="R1d6205247c95467c">
+            <a:blip xmlns:r="http://schemas.openxmlformats.org/officeDocument/2006/relationships" r:embed="R169b15a1f3274d33">
               <a:extLst>
                 <a:ext uri="{96DAC541-7B7A-43D3-8B79-37D633B846F1}">
-                  <asvg:svgBlip xmlns:asvg="http://schemas.microsoft.com/office/drawing/2016/SVG/main" r:embed="R6aa3a05f9ff84b4e"/>
+                  <asvg:svgBlip xmlns:asvg="http://schemas.microsoft.com/office/drawing/2016/SVG/main" r:embed="R20cb77a1c271421e"/>
                 </a:ext>
               </a:extLst>
             </a:blip>
@@ -31535,7 +32580,7 @@
           <p:cNvPr id="11" name="Freeform 11">
             <a:extLst xmlns:a="http://schemas.openxmlformats.org/drawingml/2006/main">
               <a:ext uri="{FF2B5EF4-FFF2-40B4-BE49-F238E27FC236}">
-                <a16:creationId xmlns:a16="http://schemas.microsoft.com/office/drawing/2014/main" id="{508CE153-4B20-4D8E-8246-2B5F1CF80165}"/>
+                <a16:creationId xmlns:a16="http://schemas.microsoft.com/office/drawing/2014/main" id="{EF9A4F52-C17B-4722-B0AB-A9EBC60AF82B}"/>
               </a:ext>
             </a:extLst>
           </p:cNvPr>
@@ -31573,10 +32618,10 @@
             </a:pathLst>
           </a:custGeom>
           <a:blipFill xmlns:a="http://schemas.openxmlformats.org/drawingml/2006/main">
-            <a:blip xmlns:r="http://schemas.openxmlformats.org/officeDocument/2006/relationships" r:embed="R1d6205247c95467c">
+            <a:blip xmlns:r="http://schemas.openxmlformats.org/officeDocument/2006/relationships" r:embed="R169b15a1f3274d33">
               <a:extLst>
                 <a:ext uri="{96DAC541-7B7A-43D3-8B79-37D633B846F1}">
-                  <asvg:svgBlip xmlns:asvg="http://schemas.microsoft.com/office/drawing/2016/SVG/main" r:embed="R6aa3a05f9ff84b4e"/>
+                  <asvg:svgBlip xmlns:asvg="http://schemas.microsoft.com/office/drawing/2016/SVG/main" r:embed="R20cb77a1c271421e"/>
                 </a:ext>
               </a:extLst>
             </a:blip>
@@ -31591,7 +32636,7 @@
           <p:cNvPr id="12" name="TextBox 12">
             <a:extLst xmlns:a="http://schemas.openxmlformats.org/drawingml/2006/main">
               <a:ext uri="{FF2B5EF4-FFF2-40B4-BE49-F238E27FC236}">
-                <a16:creationId xmlns:a16="http://schemas.microsoft.com/office/drawing/2014/main" id="{41E16733-AD0F-41C2-BCFA-AA4840DCEC27}"/>
+                <a16:creationId xmlns:a16="http://schemas.microsoft.com/office/drawing/2014/main" id="{E5E11FA6-6D93-489D-81F4-5204655B406B}"/>
               </a:ext>
             </a:extLst>
           </p:cNvPr>
@@ -31645,7 +32690,7 @@
           <p:cNvPr id="14" name="Freeform 14">
             <a:extLst xmlns:a="http://schemas.openxmlformats.org/drawingml/2006/main">
               <a:ext uri="{FF2B5EF4-FFF2-40B4-BE49-F238E27FC236}">
-                <a16:creationId xmlns:a16="http://schemas.microsoft.com/office/drawing/2014/main" id="{5EF71CD0-A4D5-4169-9DE4-674BF1194EAC}"/>
+                <a16:creationId xmlns:a16="http://schemas.microsoft.com/office/drawing/2014/main" id="{6EDFEE28-6B09-495A-ACC1-D55B6E76C6F9}"/>
               </a:ext>
             </a:extLst>
           </p:cNvPr>
@@ -31704,7 +32749,7 @@
           <p:cNvPr id="15" name="TextBox 15">
             <a:extLst xmlns:a="http://schemas.openxmlformats.org/drawingml/2006/main">
               <a:ext uri="{FF2B5EF4-FFF2-40B4-BE49-F238E27FC236}">
-                <a16:creationId xmlns:a16="http://schemas.microsoft.com/office/drawing/2014/main" id="{73A8118B-5E9E-4A42-99A2-78588FC7432B}"/>
+                <a16:creationId xmlns:a16="http://schemas.microsoft.com/office/drawing/2014/main" id="{D8E943DE-ABED-452F-BBBF-69774D00A800}"/>
               </a:ext>
             </a:extLst>
           </p:cNvPr>
@@ -31744,7 +32789,7 @@
           <p:cNvPr id="16" name="TextBox 16">
             <a:extLst xmlns:a="http://schemas.openxmlformats.org/drawingml/2006/main">
               <a:ext uri="{FF2B5EF4-FFF2-40B4-BE49-F238E27FC236}">
-                <a16:creationId xmlns:a16="http://schemas.microsoft.com/office/drawing/2014/main" id="{57D1B828-8128-4D9D-8426-EE401F506D79}"/>
+                <a16:creationId xmlns:a16="http://schemas.microsoft.com/office/drawing/2014/main" id="{606EA2B7-AE0C-4333-AA40-B3F6B40A2C0C}"/>
               </a:ext>
             </a:extLst>
           </p:cNvPr>
@@ -31793,7 +32838,7 @@
           <p:cNvPr id="17" name="TextBox 17">
             <a:extLst xmlns:a="http://schemas.openxmlformats.org/drawingml/2006/main">
               <a:ext uri="{FF2B5EF4-FFF2-40B4-BE49-F238E27FC236}">
-                <a16:creationId xmlns:a16="http://schemas.microsoft.com/office/drawing/2014/main" id="{B5318541-C3CC-472C-86E9-2C5FA82F46EA}"/>
+                <a16:creationId xmlns:a16="http://schemas.microsoft.com/office/drawing/2014/main" id="{3CD9C22D-BCE0-4B45-8EDF-53B562E08EAA}"/>
               </a:ext>
             </a:extLst>
           </p:cNvPr>
@@ -31845,7 +32890,7 @@
           <p:cNvPr id="19" name="Freeform 19">
             <a:extLst xmlns:a="http://schemas.openxmlformats.org/drawingml/2006/main">
               <a:ext uri="{FF2B5EF4-FFF2-40B4-BE49-F238E27FC236}">
-                <a16:creationId xmlns:a16="http://schemas.microsoft.com/office/drawing/2014/main" id="{740841FA-270D-42B4-98EA-CC02F77FB9F0}"/>
+                <a16:creationId xmlns:a16="http://schemas.microsoft.com/office/drawing/2014/main" id="{BA66176D-0EAA-4C01-9C9C-3E8F884D6DF9}"/>
               </a:ext>
             </a:extLst>
           </p:cNvPr>
@@ -31904,7 +32949,7 @@
           <p:cNvPr id="20" name="TextBox 20">
             <a:extLst xmlns:a="http://schemas.openxmlformats.org/drawingml/2006/main">
               <a:ext uri="{FF2B5EF4-FFF2-40B4-BE49-F238E27FC236}">
-                <a16:creationId xmlns:a16="http://schemas.microsoft.com/office/drawing/2014/main" id="{BFDDF85E-4465-49FC-9B08-6DC21AE71517}"/>
+                <a16:creationId xmlns:a16="http://schemas.microsoft.com/office/drawing/2014/main" id="{0D1C9278-980A-4D36-9D0C-EC1228370E8B}"/>
               </a:ext>
             </a:extLst>
           </p:cNvPr>
@@ -31944,7 +32989,7 @@
           <p:cNvPr id="21" name="TextBox 21">
             <a:extLst xmlns:a="http://schemas.openxmlformats.org/drawingml/2006/main">
               <a:ext uri="{FF2B5EF4-FFF2-40B4-BE49-F238E27FC236}">
-                <a16:creationId xmlns:a16="http://schemas.microsoft.com/office/drawing/2014/main" id="{0030A50A-B38B-4FE3-9BFE-09E92091E633}"/>
+                <a16:creationId xmlns:a16="http://schemas.microsoft.com/office/drawing/2014/main" id="{4783CA58-48FB-426B-97D5-C9ABFBBAA67C}"/>
               </a:ext>
             </a:extLst>
           </p:cNvPr>
@@ -31993,7 +33038,7 @@
           <p:cNvPr id="22" name="TextBox 22">
             <a:extLst xmlns:a="http://schemas.openxmlformats.org/drawingml/2006/main">
               <a:ext uri="{FF2B5EF4-FFF2-40B4-BE49-F238E27FC236}">
-                <a16:creationId xmlns:a16="http://schemas.microsoft.com/office/drawing/2014/main" id="{D39C73B8-35EA-40B2-90C9-DBCE7EB8A2C3}"/>
+                <a16:creationId xmlns:a16="http://schemas.microsoft.com/office/drawing/2014/main" id="{D1F4F77E-B108-46F6-B757-B8C6B4303D3A}"/>
               </a:ext>
             </a:extLst>
           </p:cNvPr>
@@ -32045,7 +33090,7 @@
           <p:cNvPr id="23" name="AutoShape 23">
             <a:extLst xmlns:a="http://schemas.openxmlformats.org/drawingml/2006/main">
               <a:ext uri="{FF2B5EF4-FFF2-40B4-BE49-F238E27FC236}">
-                <a16:creationId xmlns:a16="http://schemas.microsoft.com/office/drawing/2014/main" id="{27E1CF09-E747-40EB-8D36-E228D70CF036}"/>
+                <a16:creationId xmlns:a16="http://schemas.microsoft.com/office/drawing/2014/main" id="{70B39103-5C30-4117-A197-1D3CA9B7AFC7}"/>
               </a:ext>
             </a:extLst>
           </p:cNvPr>
@@ -32072,10 +33117,10 @@
       </p:sp>
       <p:sp>
         <p:nvSpPr>
-          <p:cNvPr id="24" name="內容_7_ESG：門檻與增量">
+          <p:cNvPr id="24" name="內容_7_環境指標：門檻與增量">
             <a:extLst xmlns:a="http://schemas.openxmlformats.org/drawingml/2006/main">
               <a:ext uri="{FF2B5EF4-FFF2-40B4-BE49-F238E27FC236}">
-                <a16:creationId xmlns:a16="http://schemas.microsoft.com/office/drawing/2014/main" id="{CFCE8D60-42AA-4CFF-86AA-22F26E507D12}"/>
+                <a16:creationId xmlns:a16="http://schemas.microsoft.com/office/drawing/2014/main" id="{30FD7FC6-1185-4E89-9544-FA86C3EA575F}"/>
               </a:ext>
             </a:extLst>
           </p:cNvPr>
@@ -32223,17 +33268,17 @@
                 <a:ea typeface="Microsoft JhengHei"/>
                 <a:cs typeface="Microsoft JhengHei"/>
               </a:rPr>
-              <a:t>ESG：門檻與增量</a:t>
+              <a:t>環境指標：門檻與增量</a:t>
             </a:r>
           </a:p>
         </p:txBody>
       </p:sp>
       <p:sp>
         <p:nvSpPr>
-          <p:cNvPr id="25" name="內容_7_74%達標，不等於P4再省7">
+          <p:cNvPr id="25" name="內容_7_74%達標，不等於聯合方案再">
             <a:extLst xmlns:a="http://schemas.openxmlformats.org/drawingml/2006/main">
               <a:ext uri="{FF2B5EF4-FFF2-40B4-BE49-F238E27FC236}">
-                <a16:creationId xmlns:a16="http://schemas.microsoft.com/office/drawing/2014/main" id="{3C7DDB05-2768-4D60-8030-93418C4C5E83}"/>
+                <a16:creationId xmlns:a16="http://schemas.microsoft.com/office/drawing/2014/main" id="{E17F1848-7CB6-44C9-AF25-485A89D5CC16}"/>
               </a:ext>
             </a:extLst>
           </p:cNvPr>
@@ -32381,17 +33426,17 @@
                 <a:ea typeface="Microsoft JhengHei"/>
                 <a:cs typeface="Microsoft JhengHei"/>
               </a:rPr>
-              <a:t>74%達標，不等於P4再省74%</a:t>
+              <a:t>74%達標，不等於聯合方案再省74%</a:t>
             </a:r>
           </a:p>
         </p:txBody>
       </p:sp>
       <p:sp>
         <p:nvSpPr>
-          <p:cNvPr id="26" name="內容_7_Before 73.853%">
+          <p:cNvPr id="26" name="內容_7_改善前 73.853%">
             <a:extLst xmlns:a="http://schemas.openxmlformats.org/drawingml/2006/main">
               <a:ext uri="{FF2B5EF4-FFF2-40B4-BE49-F238E27FC236}">
-                <a16:creationId xmlns:a16="http://schemas.microsoft.com/office/drawing/2014/main" id="{EF9A03EB-0271-4122-A4B7-518EAA21FD4C}"/>
+                <a16:creationId xmlns:a16="http://schemas.microsoft.com/office/drawing/2014/main" id="{BC4D5794-3492-48B9-AAA4-D32474B341A3}"/>
               </a:ext>
             </a:extLst>
           </p:cNvPr>
@@ -32539,17 +33584,17 @@
                 <a:ea typeface="Microsoft JhengHei"/>
                 <a:cs typeface="Microsoft JhengHei"/>
               </a:rPr>
-              <a:t>Before 73.853%</a:t>
+              <a:t>改善前 73.853%</a:t>
             </a:r>
           </a:p>
         </p:txBody>
       </p:sp>
       <p:sp>
         <p:nvSpPr>
-          <p:cNvPr id="27" name="內容_7_每件0.184875 kWh">
+          <p:cNvPr id="27" name="內容_7_每件0.184875 度電&#10;">
             <a:extLst xmlns:a="http://schemas.openxmlformats.org/drawingml/2006/main">
               <a:ext uri="{FF2B5EF4-FFF2-40B4-BE49-F238E27FC236}">
-                <a16:creationId xmlns:a16="http://schemas.microsoft.com/office/drawing/2014/main" id="{1D9E0E98-095A-4AA2-8E0C-A8596AB95D70}"/>
+                <a16:creationId xmlns:a16="http://schemas.microsoft.com/office/drawing/2014/main" id="{FE9F89D8-2D7F-4871-A95B-0945560D6E61}"/>
               </a:ext>
             </a:extLst>
           </p:cNvPr>
@@ -32697,7 +33742,7 @@
                 <a:ea typeface="Microsoft JhengHei"/>
                 <a:cs typeface="Microsoft JhengHei"/>
               </a:rPr>
-              <a:t>每件0.184875 kWh</a:t>
+              <a:t>每件0.184875 度電</a:t>
             </a:r>
           </a:p>
           <a:p xmlns:a="http://schemas.openxmlformats.org/drawingml/2006/main">
@@ -32743,17 +33788,17 @@
                 <a:ea typeface="Microsoft JhengHei"/>
                 <a:cs typeface="Microsoft JhengHei"/>
               </a:rPr>
-              <a:t>＝ 73.853%：Before已超過42%</a:t>
+              <a:t>＝ 73.853%：改善前已超過42%</a:t>
             </a:r>
           </a:p>
         </p:txBody>
       </p:sp>
       <p:sp>
         <p:nvSpPr>
-          <p:cNvPr id="28" name="內容_7_主推12m 73.995%">
+          <p:cNvPr id="28" name="內容_7_12公尺聯合：73.995%">
             <a:extLst xmlns:a="http://schemas.openxmlformats.org/drawingml/2006/main">
               <a:ext uri="{FF2B5EF4-FFF2-40B4-BE49-F238E27FC236}">
-                <a16:creationId xmlns:a16="http://schemas.microsoft.com/office/drawing/2014/main" id="{1F892377-6412-4428-8463-F4C68EE0348D}"/>
+                <a16:creationId xmlns:a16="http://schemas.microsoft.com/office/drawing/2014/main" id="{48F64F39-C418-48B8-8242-908EB30B9F15}"/>
               </a:ext>
             </a:extLst>
           </p:cNvPr>
@@ -32901,17 +33946,17 @@
                 <a:ea typeface="Microsoft JhengHei"/>
                 <a:cs typeface="Microsoft JhengHei"/>
               </a:rPr>
-              <a:t>主推12m 73.995%</a:t>
+              <a:t>12公尺聯合：73.995%</a:t>
             </a:r>
           </a:p>
         </p:txBody>
       </p:sp>
       <p:sp>
         <p:nvSpPr>
-          <p:cNvPr id="29" name="內容_7_相較Before僅 +0.1">
+          <p:cNvPr id="29" name="內容_7_相較改善前僅 +0.141百">
             <a:extLst xmlns:a="http://schemas.openxmlformats.org/drawingml/2006/main">
               <a:ext uri="{FF2B5EF4-FFF2-40B4-BE49-F238E27FC236}">
-                <a16:creationId xmlns:a16="http://schemas.microsoft.com/office/drawing/2014/main" id="{D57C8F0F-9AB9-4FFB-9432-A52FC1C042C8}"/>
+                <a16:creationId xmlns:a16="http://schemas.microsoft.com/office/drawing/2014/main" id="{725FD368-D56A-462A-B293-6FCCDBA8040A}"/>
               </a:ext>
             </a:extLst>
           </p:cNvPr>
@@ -33059,7 +34104,7 @@
                 <a:ea typeface="Microsoft JhengHei"/>
                 <a:cs typeface="Microsoft JhengHei"/>
               </a:rPr>
-              <a:t>相較Before僅 +0.141百分點</a:t>
+              <a:t>相較改善前僅 +0.141百分點</a:t>
             </a:r>
           </a:p>
           <a:p xmlns:a="http://schemas.openxmlformats.org/drawingml/2006/main">
@@ -33082,7 +34127,7 @@
                 <a:ea typeface="Microsoft JhengHei"/>
                 <a:cs typeface="Microsoft JhengHei"/>
               </a:rPr>
-              <a:t>P4須再扣外包排放</a:t>
+              <a:t>聯合方案還須扣外包排放</a:t>
             </a:r>
           </a:p>
           <a:p xmlns:a="http://schemas.openxmlformats.org/drawingml/2006/main">
@@ -33115,7 +34160,7 @@
           <p:cNvPr id="30" name="內容_7_42%是目標門檻；原始來源未">
             <a:extLst xmlns:a="http://schemas.openxmlformats.org/drawingml/2006/main">
               <a:ext uri="{FF2B5EF4-FFF2-40B4-BE49-F238E27FC236}">
-                <a16:creationId xmlns:a16="http://schemas.microsoft.com/office/drawing/2014/main" id="{4247497F-0E96-4A20-8679-1A797C3FAD5B}"/>
+                <a16:creationId xmlns:a16="http://schemas.microsoft.com/office/drawing/2014/main" id="{5A167EEF-657B-4A89-964A-97953236D3EF}"/>
               </a:ext>
             </a:extLst>
           </p:cNvPr>
@@ -33271,7 +34316,7 @@
     </p:spTree>
     <p:extLst>
       <p:ext uri="{BB962C8B-B14F-4D97-AF65-F5344CB8AC3E}">
-        <p14:creationId xmlns:p14="http://schemas.microsoft.com/office/powerpoint/2010/main" val="2137234656"/>
+        <p14:creationId xmlns:p14="http://schemas.microsoft.com/office/powerpoint/2010/main" val="1484373825"/>
       </p:ext>
     </p:extLst>
   </p:cSld>
@@ -33295,7 +34340,7 @@
           <p:cNvPr id="2" name="Freeform 2">
             <a:extLst xmlns:a="http://schemas.openxmlformats.org/drawingml/2006/main">
               <a:ext uri="{FF2B5EF4-FFF2-40B4-BE49-F238E27FC236}">
-                <a16:creationId xmlns:a16="http://schemas.microsoft.com/office/drawing/2014/main" id="{379718BF-A37E-43E7-B92D-A3993E882159}"/>
+                <a16:creationId xmlns:a16="http://schemas.microsoft.com/office/drawing/2014/main" id="{E48E83F6-28D3-49C8-A457-E49598C627A3}"/>
               </a:ext>
             </a:extLst>
           </p:cNvPr>
@@ -33333,7 +34378,7 @@
             </a:pathLst>
           </a:custGeom>
           <a:blipFill xmlns:a="http://schemas.openxmlformats.org/drawingml/2006/main">
-            <a:blip xmlns:r="http://schemas.openxmlformats.org/officeDocument/2006/relationships" r:embed="Re73b7a446f6e404b"/>
+            <a:blip xmlns:r="http://schemas.openxmlformats.org/officeDocument/2006/relationships" r:embed="Rc433bf421ed149cc"/>
             <a:stretch>
               <a:fillRect l="-35258" t="-5555" r="-24931" b="-72434"/>
             </a:stretch>
@@ -33345,7 +34390,7 @@
           <p:cNvPr id="4" name="Freeform 4">
             <a:extLst xmlns:a="http://schemas.openxmlformats.org/drawingml/2006/main">
               <a:ext uri="{FF2B5EF4-FFF2-40B4-BE49-F238E27FC236}">
-                <a16:creationId xmlns:a16="http://schemas.microsoft.com/office/drawing/2014/main" id="{F9B99AF6-E167-4E1B-B64A-7FD9502AAB47}"/>
+                <a16:creationId xmlns:a16="http://schemas.microsoft.com/office/drawing/2014/main" id="{BFC28C33-AF89-4C55-B1B5-8BDC9AA83E4B}"/>
               </a:ext>
             </a:extLst>
           </p:cNvPr>
@@ -33419,7 +34464,7 @@
           <p:cNvPr id="5" name="TextBox 5">
             <a:extLst xmlns:a="http://schemas.openxmlformats.org/drawingml/2006/main">
               <a:ext uri="{FF2B5EF4-FFF2-40B4-BE49-F238E27FC236}">
-                <a16:creationId xmlns:a16="http://schemas.microsoft.com/office/drawing/2014/main" id="{28F0F8B2-4004-405F-ADF9-126C0E9239A3}"/>
+                <a16:creationId xmlns:a16="http://schemas.microsoft.com/office/drawing/2014/main" id="{8E82D7BA-238F-49F5-B284-3CEDD54B4F1B}"/>
               </a:ext>
             </a:extLst>
           </p:cNvPr>
@@ -33455,7 +34500,7 @@
           <p:cNvPr id="6" name="Freeform 6">
             <a:extLst xmlns:a="http://schemas.openxmlformats.org/drawingml/2006/main">
               <a:ext uri="{FF2B5EF4-FFF2-40B4-BE49-F238E27FC236}">
-                <a16:creationId xmlns:a16="http://schemas.microsoft.com/office/drawing/2014/main" id="{864E7DEC-F7CB-46A6-8055-E07E08E0C532}"/>
+                <a16:creationId xmlns:a16="http://schemas.microsoft.com/office/drawing/2014/main" id="{A7F7DA1B-5A33-4EB0-B713-AC9340D7CA2D}"/>
               </a:ext>
             </a:extLst>
           </p:cNvPr>
@@ -33493,7 +34538,7 @@
             </a:pathLst>
           </a:custGeom>
           <a:blipFill xmlns:a="http://schemas.openxmlformats.org/drawingml/2006/main">
-            <a:blip xmlns:r="http://schemas.openxmlformats.org/officeDocument/2006/relationships" r:embed="Rc42575de15e846ea"/>
+            <a:blip xmlns:r="http://schemas.openxmlformats.org/officeDocument/2006/relationships" r:embed="R78b8576c3748433d"/>
             <a:stretch>
               <a:fillRect l="0" t="0" r="0" b="0"/>
             </a:stretch>
@@ -33505,7 +34550,7 @@
           <p:cNvPr id="7" name="Freeform 7">
             <a:extLst xmlns:a="http://schemas.openxmlformats.org/drawingml/2006/main">
               <a:ext uri="{FF2B5EF4-FFF2-40B4-BE49-F238E27FC236}">
-                <a16:creationId xmlns:a16="http://schemas.microsoft.com/office/drawing/2014/main" id="{4E26ED79-AB36-4F0D-9F19-32A97E76F1F7}"/>
+                <a16:creationId xmlns:a16="http://schemas.microsoft.com/office/drawing/2014/main" id="{F055E3B0-9BAD-4305-AB90-4FE82B06D8B3}"/>
               </a:ext>
             </a:extLst>
           </p:cNvPr>
@@ -33543,10 +34588,10 @@
             </a:pathLst>
           </a:custGeom>
           <a:blipFill xmlns:a="http://schemas.openxmlformats.org/drawingml/2006/main">
-            <a:blip xmlns:r="http://schemas.openxmlformats.org/officeDocument/2006/relationships" r:embed="Rdb17e9de10a74e32">
+            <a:blip xmlns:r="http://schemas.openxmlformats.org/officeDocument/2006/relationships" r:embed="R7853de9decc540e2">
               <a:extLst>
                 <a:ext uri="{96DAC541-7B7A-43D3-8B79-37D633B846F1}">
-                  <asvg:svgBlip xmlns:asvg="http://schemas.microsoft.com/office/drawing/2016/SVG/main" r:embed="R7be81371430f413a"/>
+                  <asvg:svgBlip xmlns:asvg="http://schemas.microsoft.com/office/drawing/2016/SVG/main" r:embed="R5b481e93b54e46b5"/>
                 </a:ext>
               </a:extLst>
             </a:blip>
@@ -33561,7 +34606,7 @@
           <p:cNvPr id="8" name="Freeform 8">
             <a:extLst xmlns:a="http://schemas.openxmlformats.org/drawingml/2006/main">
               <a:ext uri="{FF2B5EF4-FFF2-40B4-BE49-F238E27FC236}">
-                <a16:creationId xmlns:a16="http://schemas.microsoft.com/office/drawing/2014/main" id="{CC863E45-B80F-4000-B28E-3E8C42FD001B}"/>
+                <a16:creationId xmlns:a16="http://schemas.microsoft.com/office/drawing/2014/main" id="{7E6A03BF-9247-454F-AD6A-8AD4CDB7F90C}"/>
               </a:ext>
             </a:extLst>
           </p:cNvPr>
@@ -33599,10 +34644,10 @@
             </a:pathLst>
           </a:custGeom>
           <a:blipFill xmlns:a="http://schemas.openxmlformats.org/drawingml/2006/main">
-            <a:blip xmlns:r="http://schemas.openxmlformats.org/officeDocument/2006/relationships" r:embed="Rdb17e9de10a74e32">
+            <a:blip xmlns:r="http://schemas.openxmlformats.org/officeDocument/2006/relationships" r:embed="R7853de9decc540e2">
               <a:extLst>
                 <a:ext uri="{96DAC541-7B7A-43D3-8B79-37D633B846F1}">
-                  <asvg:svgBlip xmlns:asvg="http://schemas.microsoft.com/office/drawing/2016/SVG/main" r:embed="R7be81371430f413a"/>
+                  <asvg:svgBlip xmlns:asvg="http://schemas.microsoft.com/office/drawing/2016/SVG/main" r:embed="R5b481e93b54e46b5"/>
                 </a:ext>
               </a:extLst>
             </a:blip>
@@ -33617,7 +34662,7 @@
           <p:cNvPr id="9" name="Freeform 9">
             <a:extLst xmlns:a="http://schemas.openxmlformats.org/drawingml/2006/main">
               <a:ext uri="{FF2B5EF4-FFF2-40B4-BE49-F238E27FC236}">
-                <a16:creationId xmlns:a16="http://schemas.microsoft.com/office/drawing/2014/main" id="{3AEDBC64-8D6A-4F61-9D8A-7DDA9F1B866F}"/>
+                <a16:creationId xmlns:a16="http://schemas.microsoft.com/office/drawing/2014/main" id="{612DD9BD-253C-453E-B3A4-859E5151F3AC}"/>
               </a:ext>
             </a:extLst>
           </p:cNvPr>
@@ -33665,7 +34710,7 @@
           <p:cNvPr id="10" name="TextBox 10">
             <a:extLst xmlns:a="http://schemas.openxmlformats.org/drawingml/2006/main">
               <a:ext uri="{FF2B5EF4-FFF2-40B4-BE49-F238E27FC236}">
-                <a16:creationId xmlns:a16="http://schemas.microsoft.com/office/drawing/2014/main" id="{CEAAF661-24F2-4D84-9406-5B533E3C33C6}"/>
+                <a16:creationId xmlns:a16="http://schemas.microsoft.com/office/drawing/2014/main" id="{DFD60F7A-6337-4B4D-B147-CE1A31E9D44D}"/>
               </a:ext>
             </a:extLst>
           </p:cNvPr>
@@ -33826,7 +34871,7 @@
           <p:cNvPr id="11" name="TextBox 11">
             <a:extLst xmlns:a="http://schemas.openxmlformats.org/drawingml/2006/main">
               <a:ext uri="{FF2B5EF4-FFF2-40B4-BE49-F238E27FC236}">
-                <a16:creationId xmlns:a16="http://schemas.microsoft.com/office/drawing/2014/main" id="{2D577272-4D85-4747-AF5A-6195B6E2004F}"/>
+                <a16:creationId xmlns:a16="http://schemas.microsoft.com/office/drawing/2014/main" id="{B0079C3B-546E-422E-B91C-1A239326AE8A}"/>
               </a:ext>
             </a:extLst>
           </p:cNvPr>
@@ -33880,7 +34925,7 @@
           <p:cNvPr id="12" name="TextBox 12">
             <a:extLst xmlns:a="http://schemas.openxmlformats.org/drawingml/2006/main">
               <a:ext uri="{FF2B5EF4-FFF2-40B4-BE49-F238E27FC236}">
-                <a16:creationId xmlns:a16="http://schemas.microsoft.com/office/drawing/2014/main" id="{1340D6C4-1173-4BC0-A4F9-D0281EF2CFA8}"/>
+                <a16:creationId xmlns:a16="http://schemas.microsoft.com/office/drawing/2014/main" id="{DC49AD96-567F-47AB-8815-B0A7B6350217}"/>
               </a:ext>
             </a:extLst>
           </p:cNvPr>
@@ -33932,7 +34977,7 @@
           <p:cNvPr id="13" name="TextBox 13">
             <a:extLst xmlns:a="http://schemas.openxmlformats.org/drawingml/2006/main">
               <a:ext uri="{FF2B5EF4-FFF2-40B4-BE49-F238E27FC236}">
-                <a16:creationId xmlns:a16="http://schemas.microsoft.com/office/drawing/2014/main" id="{5A0A221D-AC66-464C-BBCB-9B6B0432820B}"/>
+                <a16:creationId xmlns:a16="http://schemas.microsoft.com/office/drawing/2014/main" id="{1BC8F89E-17CD-4B16-842C-E03FF9D47133}"/>
               </a:ext>
             </a:extLst>
           </p:cNvPr>
@@ -33984,7 +35029,7 @@
           <p:cNvPr id="14" name="TextBox 14">
             <a:extLst xmlns:a="http://schemas.openxmlformats.org/drawingml/2006/main">
               <a:ext uri="{FF2B5EF4-FFF2-40B4-BE49-F238E27FC236}">
-                <a16:creationId xmlns:a16="http://schemas.microsoft.com/office/drawing/2014/main" id="{254E945B-D52B-4B93-804E-F224FE2D05F3}"/>
+                <a16:creationId xmlns:a16="http://schemas.microsoft.com/office/drawing/2014/main" id="{DBA78A24-0C43-411A-8DB4-5465C1C4850B}"/>
               </a:ext>
             </a:extLst>
           </p:cNvPr>
@@ -34036,7 +35081,7 @@
           <p:cNvPr id="15" name="Freeform 15">
             <a:extLst xmlns:a="http://schemas.openxmlformats.org/drawingml/2006/main">
               <a:ext uri="{FF2B5EF4-FFF2-40B4-BE49-F238E27FC236}">
-                <a16:creationId xmlns:a16="http://schemas.microsoft.com/office/drawing/2014/main" id="{7550B3AD-7018-4A4C-A466-1E27A2D51B72}"/>
+                <a16:creationId xmlns:a16="http://schemas.microsoft.com/office/drawing/2014/main" id="{08490333-4F31-476B-B4FC-94F7646F9115}"/>
               </a:ext>
             </a:extLst>
           </p:cNvPr>
@@ -34081,10 +35126,10 @@
       </p:sp>
       <p:sp>
         <p:nvSpPr>
-          <p:cNvPr id="16" name="內容_8_信度檢定 V1–V6">
+          <p:cNvPr id="16" name="內容_8_檢查V1–V6：守恆與統計">
             <a:extLst xmlns:a="http://schemas.openxmlformats.org/drawingml/2006/main">
               <a:ext uri="{FF2B5EF4-FFF2-40B4-BE49-F238E27FC236}">
-                <a16:creationId xmlns:a16="http://schemas.microsoft.com/office/drawing/2014/main" id="{7AD408F8-50F4-4691-A439-8739BA6FE59D}"/>
+                <a16:creationId xmlns:a16="http://schemas.microsoft.com/office/drawing/2014/main" id="{2B845F95-1FAD-475A-8A12-EA7E850F8790}"/>
               </a:ext>
             </a:extLst>
           </p:cNvPr>
@@ -34232,7 +35277,7 @@
                 <a:ea typeface="Microsoft JhengHei"/>
                 <a:cs typeface="Microsoft JhengHei"/>
               </a:rPr>
-              <a:t>信度檢定 V1–V6</a:t>
+              <a:t>檢查V1–V6：守恆與統計</a:t>
             </a:r>
           </a:p>
         </p:txBody>
@@ -34242,7 +35287,7 @@
           <p:cNvPr id="17" name="內容_8_驗證必須能攔下錯誤">
             <a:extLst xmlns:a="http://schemas.openxmlformats.org/drawingml/2006/main">
               <a:ext uri="{FF2B5EF4-FFF2-40B4-BE49-F238E27FC236}">
-                <a16:creationId xmlns:a16="http://schemas.microsoft.com/office/drawing/2014/main" id="{EDA03AA2-3290-4546-8B2B-5CBE3B121CB1}"/>
+                <a16:creationId xmlns:a16="http://schemas.microsoft.com/office/drawing/2014/main" id="{1D052379-B821-4860-9C86-45D66DB7FD76}"/>
               </a:ext>
             </a:extLst>
           </p:cNvPr>
@@ -34400,7 +35445,7 @@
           <p:cNvPr id="18" name="">
             <a:extLst xmlns:a="http://schemas.openxmlformats.org/drawingml/2006/main">
               <a:ext uri="{FF2B5EF4-FFF2-40B4-BE49-F238E27FC236}">
-                <a16:creationId xmlns:a16="http://schemas.microsoft.com/office/drawing/2014/main" id="{154453C1-2639-428A-9125-32D9369A5CC6}"/>
+                <a16:creationId xmlns:a16="http://schemas.microsoft.com/office/drawing/2014/main" id="{0340BCE9-7CD0-4177-A8D3-11050AC8523E}"/>
               </a:ext>
             </a:extLst>
           </p:cNvPr>
@@ -34427,7 +35472,7 @@
                     <a:lstStyle/>
                     <a:p>
                       <a:r>
-                        <a:rPr sz="1875" b="1">
+                        <a:rPr sz="1725" b="1">
                           <a:solidFill>
                             <a:srgbClr val="DF96DA"/>
                           </a:solidFill>
@@ -34475,7 +35520,7 @@
                     <a:lstStyle/>
                     <a:p>
                       <a:r>
-                        <a:rPr sz="1875" b="1">
+                        <a:rPr sz="1725" b="1">
                           <a:solidFill>
                             <a:srgbClr val="DF96DA"/>
                           </a:solidFill>
@@ -34517,7 +35562,7 @@
                     <a:lstStyle/>
                     <a:p>
                       <a:r>
-                        <a:rPr sz="1875" b="1">
+                        <a:rPr sz="1725" b="1">
                           <a:solidFill>
                             <a:srgbClr val="DF96DA"/>
                           </a:solidFill>
@@ -34561,7 +35606,7 @@
                     <a:lstStyle/>
                     <a:p>
                       <a:r>
-                        <a:rPr sz="1875" b="0">
+                        <a:rPr sz="1725" b="0">
                           <a:solidFill>
                             <a:srgbClr val="F6E0F5"/>
                           </a:solidFill>
@@ -34603,7 +35648,7 @@
                     <a:lstStyle/>
                     <a:p>
                       <a:r>
-                        <a:rPr sz="1875" b="0">
+                        <a:rPr sz="1725" b="0">
                           <a:solidFill>
                             <a:srgbClr val="F6E0F5"/>
                           </a:solidFill>
@@ -34639,7 +35684,7 @@
                     <a:lstStyle/>
                     <a:p>
                       <a:r>
-                        <a:rPr sz="1875" b="0">
+                        <a:rPr sz="1725" b="0">
                           <a:solidFill>
                             <a:srgbClr val="F6E0F5"/>
                           </a:solidFill>
@@ -34677,7 +35722,7 @@
                     <a:lstStyle/>
                     <a:p>
                       <a:r>
-                        <a:rPr sz="1875" b="0">
+                        <a:rPr sz="1725" b="0">
                           <a:solidFill>
                             <a:srgbClr val="F6E0F5"/>
                           </a:solidFill>
@@ -34719,7 +35764,7 @@
                     <a:lstStyle/>
                     <a:p>
                       <a:r>
-                        <a:rPr sz="1875" b="0">
+                        <a:rPr sz="1725" b="0">
                           <a:solidFill>
                             <a:srgbClr val="F6E0F5"/>
                           </a:solidFill>
@@ -34727,7 +35772,7 @@
                           <a:ea typeface="Microsoft JhengHei"/>
                           <a:cs typeface="Microsoft JhengHei"/>
                         </a:rPr>
-                        <a:t>S0：產投CV≤5%；WIP漂移-0.21%</a:t>
+                        <a:t>平日：流量CV≤5%；在製漂移-0.21%</a:t>
                       </a:r>
                     </a:p>
                   </a:txBody>
@@ -34755,7 +35800,7 @@
                     <a:lstStyle/>
                     <a:p>
                       <a:r>
-                        <a:rPr sz="1875" b="0">
+                        <a:rPr sz="1725" b="0">
                           <a:solidFill>
                             <a:srgbClr val="F6E0F5"/>
                           </a:solidFill>
@@ -34763,7 +35808,7 @@
                           <a:ea typeface="Microsoft JhengHei"/>
                           <a:cs typeface="Microsoft JhengHei"/>
                         </a:rPr>
-                        <a:t>基準整體達標；尖峰Before不穩定</a:t>
+                        <a:t>基準整體達標；尖峰現況不穩定</a:t>
                       </a:r>
                     </a:p>
                   </a:txBody>
@@ -34793,7 +35838,7 @@
                     <a:lstStyle/>
                     <a:p>
                       <a:r>
-                        <a:rPr sz="1875" b="0">
+                        <a:rPr sz="1725" b="0">
                           <a:solidFill>
                             <a:srgbClr val="F6E0F5"/>
                           </a:solidFill>
@@ -34835,7 +35880,7 @@
                     <a:lstStyle/>
                     <a:p>
                       <a:r>
-                        <a:rPr sz="1875" b="0">
+                        <a:rPr sz="1725" b="0">
                           <a:solidFill>
                             <a:srgbClr val="F6E0F5"/>
                           </a:solidFill>
@@ -34871,7 +35916,7 @@
                     <a:lstStyle/>
                     <a:p>
                       <a:r>
-                        <a:rPr sz="1875" b="0">
+                        <a:rPr sz="1725" b="0">
                           <a:solidFill>
                             <a:srgbClr val="F6E0F5"/>
                           </a:solidFill>
@@ -34879,7 +35924,7 @@
                           <a:ea typeface="Microsoft JhengHei"/>
                           <a:cs typeface="Microsoft JhengHei"/>
                         </a:rPr>
-                        <a:t>GUI原始結果亦逐項一致</a:t>
+                        <a:t>視窗介面原始結果亦逐項一致</a:t>
                       </a:r>
                     </a:p>
                   </a:txBody>
@@ -34909,7 +35954,7 @@
                     <a:lstStyle/>
                     <a:p>
                       <a:r>
-                        <a:rPr sz="1875" b="0">
+                        <a:rPr sz="1725" b="0">
                           <a:solidFill>
                             <a:srgbClr val="F6E0F5"/>
                           </a:solidFill>
@@ -34951,7 +35996,7 @@
                     <a:lstStyle/>
                     <a:p>
                       <a:r>
-                        <a:rPr sz="1875" b="0">
+                        <a:rPr sz="1725" b="0">
                           <a:solidFill>
                             <a:srgbClr val="F6E0F5"/>
                           </a:solidFill>
@@ -34987,7 +36032,7 @@
                     <a:lstStyle/>
                     <a:p>
                       <a:r>
-                        <a:rPr sz="1875" b="0">
+                        <a:rPr sz="1725" b="0">
                           <a:solidFill>
                             <a:srgbClr val="F6E0F5"/>
                           </a:solidFill>
@@ -35025,7 +36070,7 @@
                     <a:lstStyle/>
                     <a:p>
                       <a:r>
-                        <a:rPr sz="1875" b="0">
+                        <a:rPr sz="1725" b="0">
                           <a:solidFill>
                             <a:srgbClr val="F6E0F5"/>
                           </a:solidFill>
@@ -35067,7 +36112,7 @@
                     <a:lstStyle/>
                     <a:p>
                       <a:r>
-                        <a:rPr sz="1875" b="0">
+                        <a:rPr sz="1725" b="0">
                           <a:solidFill>
                             <a:srgbClr val="F6E0F5"/>
                           </a:solidFill>
@@ -35075,7 +36120,7 @@
                           <a:ea typeface="Microsoft JhengHei"/>
                           <a:cs typeface="Microsoft JhengHei"/>
                         </a:rPr>
-                        <a:t>S0合併卡方 p=0.1514</a:t>
+                        <a:t>平日分類檢定 p=0.1514</a:t>
                       </a:r>
                     </a:p>
                   </a:txBody>
@@ -35103,7 +36148,7 @@
                     <a:lstStyle/>
                     <a:p>
                       <a:r>
-                        <a:rPr sz="1875" b="0">
+                        <a:rPr sz="1725" b="0">
                           <a:solidFill>
                             <a:srgbClr val="F6E0F5"/>
                           </a:solidFill>
@@ -35140,10 +36185,168 @@
       </p:graphicFrame>
       <p:sp>
         <p:nvSpPr>
-          <p:cNvPr id="19" name="內容_8_600個基準樣本＝主實驗30">
+          <p:cNvPr id="19" name="內容_8_V是檢查編號，不是模型版本。">
             <a:extLst xmlns:a="http://schemas.openxmlformats.org/drawingml/2006/main">
               <a:ext uri="{FF2B5EF4-FFF2-40B4-BE49-F238E27FC236}">
-                <a16:creationId xmlns:a16="http://schemas.microsoft.com/office/drawing/2014/main" id="{930B02AF-5797-47BD-8B3F-802C4CF5A79B}"/>
+                <a16:creationId xmlns:a16="http://schemas.microsoft.com/office/drawing/2014/main" id="{3AD8234C-15BA-465D-AD97-0CF264E1976B}"/>
+              </a:ext>
+            </a:extLst>
+          </p:cNvPr>
+          <p:cNvSpPr>
+            <a:spLocks xmlns:a="http://schemas.openxmlformats.org/drawingml/2006/main" noGrp="1"/>
+          </p:cNvSpPr>
+          <p:nvPr/>
+        </p:nvSpPr>
+        <p:spPr>
+          <a:xfrm xmlns:a="http://schemas.openxmlformats.org/drawingml/2006/main">
+            <a:off x="1581150" y="3971925"/>
+            <a:ext cx="14287500" cy="333375"/>
+          </a:xfrm>
+          <a:prstGeom xmlns:a="http://schemas.openxmlformats.org/drawingml/2006/main" prst="rect">
+            <a:avLst/>
+          </a:prstGeom>
+          <a:noFill xmlns:a="http://schemas.openxmlformats.org/drawingml/2006/main"/>
+          <a:ln xmlns:a="http://schemas.openxmlformats.org/drawingml/2006/main" w="0">
+            <a:noFill/>
+          </a:ln>
+        </p:spPr>
+        <p:txBody>
+          <a:bodyPr xmlns:a="http://schemas.openxmlformats.org/drawingml/2006/main" wrap="square" lIns="0" tIns="0" rIns="0" bIns="0">
+            <a:noAutofit/>
+          </a:bodyPr>
+          <a:lstStyle xmlns:a="http://schemas.openxmlformats.org/drawingml/2006/main">
+            <a:defPPr>
+              <a:defRPr sz="1725" b="0">
+                <a:solidFill>
+                  <a:srgbClr val="92A6DD"/>
+                </a:solidFill>
+                <a:latin typeface="Microsoft JhengHei"/>
+                <a:ea typeface="Microsoft JhengHei"/>
+                <a:cs typeface="Microsoft JhengHei"/>
+              </a:defRPr>
+            </a:defPPr>
+            <a:lvl1pPr>
+              <a:defRPr sz="1725" b="0">
+                <a:solidFill>
+                  <a:srgbClr val="92A6DD"/>
+                </a:solidFill>
+                <a:latin typeface="Microsoft JhengHei"/>
+                <a:ea typeface="Microsoft JhengHei"/>
+                <a:cs typeface="Microsoft JhengHei"/>
+              </a:defRPr>
+            </a:lvl1pPr>
+            <a:lvl2pPr>
+              <a:defRPr sz="1725" b="0">
+                <a:solidFill>
+                  <a:srgbClr val="92A6DD"/>
+                </a:solidFill>
+                <a:latin typeface="Microsoft JhengHei"/>
+                <a:ea typeface="Microsoft JhengHei"/>
+                <a:cs typeface="Microsoft JhengHei"/>
+              </a:defRPr>
+            </a:lvl2pPr>
+            <a:lvl3pPr>
+              <a:defRPr sz="1725" b="0">
+                <a:solidFill>
+                  <a:srgbClr val="92A6DD"/>
+                </a:solidFill>
+                <a:latin typeface="Microsoft JhengHei"/>
+                <a:ea typeface="Microsoft JhengHei"/>
+                <a:cs typeface="Microsoft JhengHei"/>
+              </a:defRPr>
+            </a:lvl3pPr>
+            <a:lvl4pPr>
+              <a:defRPr sz="1725" b="0">
+                <a:solidFill>
+                  <a:srgbClr val="92A6DD"/>
+                </a:solidFill>
+                <a:latin typeface="Microsoft JhengHei"/>
+                <a:ea typeface="Microsoft JhengHei"/>
+                <a:cs typeface="Microsoft JhengHei"/>
+              </a:defRPr>
+            </a:lvl4pPr>
+            <a:lvl5pPr>
+              <a:defRPr sz="1725" b="0">
+                <a:solidFill>
+                  <a:srgbClr val="92A6DD"/>
+                </a:solidFill>
+                <a:latin typeface="Microsoft JhengHei"/>
+                <a:ea typeface="Microsoft JhengHei"/>
+                <a:cs typeface="Microsoft JhengHei"/>
+              </a:defRPr>
+            </a:lvl5pPr>
+            <a:lvl6pPr>
+              <a:defRPr sz="1725" b="0">
+                <a:solidFill>
+                  <a:srgbClr val="92A6DD"/>
+                </a:solidFill>
+                <a:latin typeface="Microsoft JhengHei"/>
+                <a:ea typeface="Microsoft JhengHei"/>
+                <a:cs typeface="Microsoft JhengHei"/>
+              </a:defRPr>
+            </a:lvl6pPr>
+            <a:lvl7pPr>
+              <a:defRPr sz="1725" b="0">
+                <a:solidFill>
+                  <a:srgbClr val="92A6DD"/>
+                </a:solidFill>
+                <a:latin typeface="Microsoft JhengHei"/>
+                <a:ea typeface="Microsoft JhengHei"/>
+                <a:cs typeface="Microsoft JhengHei"/>
+              </a:defRPr>
+            </a:lvl7pPr>
+            <a:lvl8pPr>
+              <a:defRPr sz="1725" b="0">
+                <a:solidFill>
+                  <a:srgbClr val="92A6DD"/>
+                </a:solidFill>
+                <a:latin typeface="Microsoft JhengHei"/>
+                <a:ea typeface="Microsoft JhengHei"/>
+                <a:cs typeface="Microsoft JhengHei"/>
+              </a:defRPr>
+            </a:lvl8pPr>
+            <a:lvl9pPr>
+              <a:defRPr sz="1725" b="0">
+                <a:solidFill>
+                  <a:srgbClr val="92A6DD"/>
+                </a:solidFill>
+                <a:latin typeface="Microsoft JhengHei"/>
+                <a:ea typeface="Microsoft JhengHei"/>
+                <a:cs typeface="Microsoft JhengHei"/>
+              </a:defRPr>
+            </a:lvl9pPr>
+          </a:lstStyle>
+          <a:p xmlns:a="http://schemas.openxmlformats.org/drawingml/2006/main">
+            <a:pPr>
+              <a:defRPr sz="1725" b="0">
+                <a:solidFill>
+                  <a:srgbClr val="92A6DD"/>
+                </a:solidFill>
+                <a:latin typeface="Microsoft JhengHei"/>
+                <a:ea typeface="Microsoft JhengHei"/>
+                <a:cs typeface="Microsoft JhengHei"/>
+              </a:defRPr>
+            </a:pPr>
+            <a:r>
+              <a:rPr sz="1725" b="0">
+                <a:solidFill>
+                  <a:srgbClr val="92A6DD"/>
+                </a:solidFill>
+                <a:latin typeface="Microsoft JhengHei"/>
+                <a:ea typeface="Microsoft JhengHei"/>
+                <a:cs typeface="Microsoft JhengHei"/>
+              </a:rPr>
+              <a:t>V是檢查編號，不是模型版本。CV＝相對波動；p值用來檢查分級比例是否相容。</a:t>
+            </a:r>
+          </a:p>
+        </p:txBody>
+      </p:sp>
+      <p:sp>
+        <p:nvSpPr>
+          <p:cNvPr id="20" name="內容_8_600個基準樣本＝主實驗30">
+            <a:extLst xmlns:a="http://schemas.openxmlformats.org/drawingml/2006/main">
+              <a:ext uri="{FF2B5EF4-FFF2-40B4-BE49-F238E27FC236}">
+                <a16:creationId xmlns:a16="http://schemas.microsoft.com/office/drawing/2014/main" id="{893D8F59-9048-4B04-A1F6-AF0E53BABC1B}"/>
               </a:ext>
             </a:extLst>
           </p:cNvPr>
@@ -35299,7 +36502,7 @@
     </p:spTree>
     <p:extLst>
       <p:ext uri="{BB962C8B-B14F-4D97-AF65-F5344CB8AC3E}">
-        <p14:creationId xmlns:p14="http://schemas.microsoft.com/office/powerpoint/2010/main" val="1359034025"/>
+        <p14:creationId xmlns:p14="http://schemas.microsoft.com/office/powerpoint/2010/main" val="1165577380"/>
       </p:ext>
     </p:extLst>
   </p:cSld>
@@ -35323,7 +36526,7 @@
           <p:cNvPr id="2" name="Freeform 2">
             <a:extLst xmlns:a="http://schemas.openxmlformats.org/drawingml/2006/main">
               <a:ext uri="{FF2B5EF4-FFF2-40B4-BE49-F238E27FC236}">
-                <a16:creationId xmlns:a16="http://schemas.microsoft.com/office/drawing/2014/main" id="{662934E3-8205-4274-8A56-BCDC665BEC7C}"/>
+                <a16:creationId xmlns:a16="http://schemas.microsoft.com/office/drawing/2014/main" id="{F99FE5BC-BE58-4952-B28F-62CAF9B746A8}"/>
               </a:ext>
             </a:extLst>
           </p:cNvPr>
@@ -35361,7 +36564,7 @@
             </a:pathLst>
           </a:custGeom>
           <a:blipFill xmlns:a="http://schemas.openxmlformats.org/drawingml/2006/main">
-            <a:blip xmlns:r="http://schemas.openxmlformats.org/officeDocument/2006/relationships" r:embed="Re28a50d447ad484e"/>
+            <a:blip xmlns:r="http://schemas.openxmlformats.org/officeDocument/2006/relationships" r:embed="R5334ff5f9aae4649"/>
             <a:stretch>
               <a:fillRect l="-35258" t="-5555" r="-24931" b="-72434"/>
             </a:stretch>
@@ -35373,7 +36576,7 @@
           <p:cNvPr id="4" name="Freeform 4">
             <a:extLst xmlns:a="http://schemas.openxmlformats.org/drawingml/2006/main">
               <a:ext uri="{FF2B5EF4-FFF2-40B4-BE49-F238E27FC236}">
-                <a16:creationId xmlns:a16="http://schemas.microsoft.com/office/drawing/2014/main" id="{315923F0-D36D-4796-93F4-E8E0AEE61DE7}"/>
+                <a16:creationId xmlns:a16="http://schemas.microsoft.com/office/drawing/2014/main" id="{F3E65B8D-3A66-40F9-B06C-42C786A928E5}"/>
               </a:ext>
             </a:extLst>
           </p:cNvPr>
@@ -35447,7 +36650,7 @@
           <p:cNvPr id="5" name="TextBox 5">
             <a:extLst xmlns:a="http://schemas.openxmlformats.org/drawingml/2006/main">
               <a:ext uri="{FF2B5EF4-FFF2-40B4-BE49-F238E27FC236}">
-                <a16:creationId xmlns:a16="http://schemas.microsoft.com/office/drawing/2014/main" id="{ACAE7D12-046C-456C-9DB2-13D501FF20AC}"/>
+                <a16:creationId xmlns:a16="http://schemas.microsoft.com/office/drawing/2014/main" id="{22FCC330-EC48-45DF-9A7A-4B7EEEB99CCE}"/>
               </a:ext>
             </a:extLst>
           </p:cNvPr>
@@ -35483,7 +36686,7 @@
           <p:cNvPr id="6" name="Freeform 6">
             <a:extLst xmlns:a="http://schemas.openxmlformats.org/drawingml/2006/main">
               <a:ext uri="{FF2B5EF4-FFF2-40B4-BE49-F238E27FC236}">
-                <a16:creationId xmlns:a16="http://schemas.microsoft.com/office/drawing/2014/main" id="{9CDA5A5D-B84C-430A-8AC5-095C2C5B9015}"/>
+                <a16:creationId xmlns:a16="http://schemas.microsoft.com/office/drawing/2014/main" id="{85D4C207-C3E2-4119-87FD-64B285E314D9}"/>
               </a:ext>
             </a:extLst>
           </p:cNvPr>
@@ -35521,7 +36724,7 @@
             </a:pathLst>
           </a:custGeom>
           <a:blipFill xmlns:a="http://schemas.openxmlformats.org/drawingml/2006/main">
-            <a:blip xmlns:r="http://schemas.openxmlformats.org/officeDocument/2006/relationships" r:embed="R8078f65072d845da"/>
+            <a:blip xmlns:r="http://schemas.openxmlformats.org/officeDocument/2006/relationships" r:embed="R3d864407df184c72"/>
             <a:stretch>
               <a:fillRect l="0" t="0" r="0" b="0"/>
             </a:stretch>
@@ -35533,7 +36736,7 @@
           <p:cNvPr id="7" name="Freeform 7">
             <a:extLst xmlns:a="http://schemas.openxmlformats.org/drawingml/2006/main">
               <a:ext uri="{FF2B5EF4-FFF2-40B4-BE49-F238E27FC236}">
-                <a16:creationId xmlns:a16="http://schemas.microsoft.com/office/drawing/2014/main" id="{3BD826D2-0D29-498A-97DC-9183698DF95E}"/>
+                <a16:creationId xmlns:a16="http://schemas.microsoft.com/office/drawing/2014/main" id="{866AF0D6-E60E-4547-BF20-5E9538E8EB37}"/>
               </a:ext>
             </a:extLst>
           </p:cNvPr>
@@ -35571,10 +36774,10 @@
             </a:pathLst>
           </a:custGeom>
           <a:blipFill xmlns:a="http://schemas.openxmlformats.org/drawingml/2006/main">
-            <a:blip xmlns:r="http://schemas.openxmlformats.org/officeDocument/2006/relationships" r:embed="R7720f264be9f4405">
+            <a:blip xmlns:r="http://schemas.openxmlformats.org/officeDocument/2006/relationships" r:embed="R9a634155974c49ef">
               <a:extLst>
                 <a:ext uri="{96DAC541-7B7A-43D3-8B79-37D633B846F1}">
-                  <asvg:svgBlip xmlns:asvg="http://schemas.microsoft.com/office/drawing/2016/SVG/main" r:embed="Rde916d1cd0d246b0"/>
+                  <asvg:svgBlip xmlns:asvg="http://schemas.microsoft.com/office/drawing/2016/SVG/main" r:embed="R857cf036bf894848"/>
                 </a:ext>
               </a:extLst>
             </a:blip>
@@ -35589,7 +36792,7 @@
           <p:cNvPr id="8" name="Freeform 8">
             <a:extLst xmlns:a="http://schemas.openxmlformats.org/drawingml/2006/main">
               <a:ext uri="{FF2B5EF4-FFF2-40B4-BE49-F238E27FC236}">
-                <a16:creationId xmlns:a16="http://schemas.microsoft.com/office/drawing/2014/main" id="{48D61A06-36C1-4738-AC7E-FFD8706F8A91}"/>
+                <a16:creationId xmlns:a16="http://schemas.microsoft.com/office/drawing/2014/main" id="{3215C087-C1F2-44E8-A3A8-F6E8E7159D6E}"/>
               </a:ext>
             </a:extLst>
           </p:cNvPr>
@@ -35627,10 +36830,10 @@
             </a:pathLst>
           </a:custGeom>
           <a:blipFill xmlns:a="http://schemas.openxmlformats.org/drawingml/2006/main">
-            <a:blip xmlns:r="http://schemas.openxmlformats.org/officeDocument/2006/relationships" r:embed="R7720f264be9f4405">
+            <a:blip xmlns:r="http://schemas.openxmlformats.org/officeDocument/2006/relationships" r:embed="R9a634155974c49ef">
               <a:extLst>
                 <a:ext uri="{96DAC541-7B7A-43D3-8B79-37D633B846F1}">
-                  <asvg:svgBlip xmlns:asvg="http://schemas.microsoft.com/office/drawing/2016/SVG/main" r:embed="Rde916d1cd0d246b0"/>
+                  <asvg:svgBlip xmlns:asvg="http://schemas.microsoft.com/office/drawing/2016/SVG/main" r:embed="R857cf036bf894848"/>
                 </a:ext>
               </a:extLst>
             </a:blip>
@@ -35645,7 +36848,7 @@
           <p:cNvPr id="10" name="Freeform 10">
             <a:extLst xmlns:a="http://schemas.openxmlformats.org/drawingml/2006/main">
               <a:ext uri="{FF2B5EF4-FFF2-40B4-BE49-F238E27FC236}">
-                <a16:creationId xmlns:a16="http://schemas.microsoft.com/office/drawing/2014/main" id="{CE1A0519-21E7-47E4-AE37-942CD92BF43B}"/>
+                <a16:creationId xmlns:a16="http://schemas.microsoft.com/office/drawing/2014/main" id="{47ADDFD4-798A-42D8-A4F9-24CB8A988B4E}"/>
               </a:ext>
             </a:extLst>
           </p:cNvPr>
@@ -35704,7 +36907,7 @@
           <p:cNvPr id="11" name="TextBox 11">
             <a:extLst xmlns:a="http://schemas.openxmlformats.org/drawingml/2006/main">
               <a:ext uri="{FF2B5EF4-FFF2-40B4-BE49-F238E27FC236}">
-                <a16:creationId xmlns:a16="http://schemas.microsoft.com/office/drawing/2014/main" id="{1E50F7E6-3ADE-4961-9A69-D0BF90E6508A}"/>
+                <a16:creationId xmlns:a16="http://schemas.microsoft.com/office/drawing/2014/main" id="{2BC03FF9-0027-4AA2-AF1F-F9E4E94E58EE}"/>
               </a:ext>
             </a:extLst>
           </p:cNvPr>
@@ -35744,7 +36947,7 @@
           <p:cNvPr id="12" name="Freeform 12">
             <a:extLst xmlns:a="http://schemas.openxmlformats.org/drawingml/2006/main">
               <a:ext uri="{FF2B5EF4-FFF2-40B4-BE49-F238E27FC236}">
-                <a16:creationId xmlns:a16="http://schemas.microsoft.com/office/drawing/2014/main" id="{0A768E52-77DF-47F2-A99B-AA158A1B605E}"/>
+                <a16:creationId xmlns:a16="http://schemas.microsoft.com/office/drawing/2014/main" id="{C6801EF2-4827-4C51-BF07-780EEBC59BB8}"/>
               </a:ext>
             </a:extLst>
           </p:cNvPr>
@@ -35792,7 +36995,7 @@
           <p:cNvPr id="13" name="TextBox 13">
             <a:extLst xmlns:a="http://schemas.openxmlformats.org/drawingml/2006/main">
               <a:ext uri="{FF2B5EF4-FFF2-40B4-BE49-F238E27FC236}">
-                <a16:creationId xmlns:a16="http://schemas.microsoft.com/office/drawing/2014/main" id="{579489E3-7FCF-4184-9226-EC7C2BDF1D98}"/>
+                <a16:creationId xmlns:a16="http://schemas.microsoft.com/office/drawing/2014/main" id="{9E7C1D47-9D76-4713-8406-E310BECA5C34}"/>
               </a:ext>
             </a:extLst>
           </p:cNvPr>
@@ -35844,7 +37047,7 @@
           <p:cNvPr id="14" name="TextBox 14">
             <a:extLst xmlns:a="http://schemas.openxmlformats.org/drawingml/2006/main">
               <a:ext uri="{FF2B5EF4-FFF2-40B4-BE49-F238E27FC236}">
-                <a16:creationId xmlns:a16="http://schemas.microsoft.com/office/drawing/2014/main" id="{5B0A0474-7DC1-4419-80D1-C16D911F3901}"/>
+                <a16:creationId xmlns:a16="http://schemas.microsoft.com/office/drawing/2014/main" id="{F6916723-18DA-4188-88AD-0CC7ACBD962A}"/>
               </a:ext>
             </a:extLst>
           </p:cNvPr>
@@ -35896,7 +37099,7 @@
           <p:cNvPr id="15" name="TextBox 15">
             <a:extLst xmlns:a="http://schemas.openxmlformats.org/drawingml/2006/main">
               <a:ext uri="{FF2B5EF4-FFF2-40B4-BE49-F238E27FC236}">
-                <a16:creationId xmlns:a16="http://schemas.microsoft.com/office/drawing/2014/main" id="{F4A93BA7-57BC-4116-8224-4D8208DF6ED3}"/>
+                <a16:creationId xmlns:a16="http://schemas.microsoft.com/office/drawing/2014/main" id="{28577912-9902-462E-BC60-D4C1C409F993}"/>
               </a:ext>
             </a:extLst>
           </p:cNvPr>
@@ -36057,7 +37260,7 @@
           <p:cNvPr id="16" name="TextBox 16">
             <a:extLst xmlns:a="http://schemas.openxmlformats.org/drawingml/2006/main">
               <a:ext uri="{FF2B5EF4-FFF2-40B4-BE49-F238E27FC236}">
-                <a16:creationId xmlns:a16="http://schemas.microsoft.com/office/drawing/2014/main" id="{FECBCD47-690D-4ED5-BEDD-14E1EA1DEC0A}"/>
+                <a16:creationId xmlns:a16="http://schemas.microsoft.com/office/drawing/2014/main" id="{D0114DFC-003F-48B8-8DF5-0FBA13A77A7B}"/>
               </a:ext>
             </a:extLst>
           </p:cNvPr>
@@ -36111,7 +37314,7 @@
           <p:cNvPr id="17" name="TextBox 17">
             <a:extLst xmlns:a="http://schemas.openxmlformats.org/drawingml/2006/main">
               <a:ext uri="{FF2B5EF4-FFF2-40B4-BE49-F238E27FC236}">
-                <a16:creationId xmlns:a16="http://schemas.microsoft.com/office/drawing/2014/main" id="{6BDBB9EF-EB62-4760-B586-BFDE04481723}"/>
+                <a16:creationId xmlns:a16="http://schemas.microsoft.com/office/drawing/2014/main" id="{29084B8D-54DB-4DB4-92CF-87BA95DC86C1}"/>
               </a:ext>
             </a:extLst>
           </p:cNvPr>
@@ -36163,7 +37366,7 @@
           <p:cNvPr id="18" name="TextBox 18">
             <a:extLst xmlns:a="http://schemas.openxmlformats.org/drawingml/2006/main">
               <a:ext uri="{FF2B5EF4-FFF2-40B4-BE49-F238E27FC236}">
-                <a16:creationId xmlns:a16="http://schemas.microsoft.com/office/drawing/2014/main" id="{E8DB9BFA-8350-403C-BC97-50C6B2E211F1}"/>
+                <a16:creationId xmlns:a16="http://schemas.microsoft.com/office/drawing/2014/main" id="{C988A1CF-2910-4E79-8034-1F6B67159F02}"/>
               </a:ext>
             </a:extLst>
           </p:cNvPr>
@@ -36215,7 +37418,7 @@
           <p:cNvPr id="20" name="Freeform 20">
             <a:extLst xmlns:a="http://schemas.openxmlformats.org/drawingml/2006/main">
               <a:ext uri="{FF2B5EF4-FFF2-40B4-BE49-F238E27FC236}">
-                <a16:creationId xmlns:a16="http://schemas.microsoft.com/office/drawing/2014/main" id="{2F81123C-B654-4CE0-9B3B-54DED1FF1646}"/>
+                <a16:creationId xmlns:a16="http://schemas.microsoft.com/office/drawing/2014/main" id="{9E100D11-5138-4D4E-8481-D00CCD46B5E3}"/>
               </a:ext>
             </a:extLst>
           </p:cNvPr>
@@ -36274,7 +37477,7 @@
           <p:cNvPr id="21" name="TextBox 21">
             <a:extLst xmlns:a="http://schemas.openxmlformats.org/drawingml/2006/main">
               <a:ext uri="{FF2B5EF4-FFF2-40B4-BE49-F238E27FC236}">
-                <a16:creationId xmlns:a16="http://schemas.microsoft.com/office/drawing/2014/main" id="{B99737CD-4D82-4A6F-B7B6-E9F4CC57CC26}"/>
+                <a16:creationId xmlns:a16="http://schemas.microsoft.com/office/drawing/2014/main" id="{F82C7D64-C48E-4BA9-82D0-A08E6E63BD62}"/>
               </a:ext>
             </a:extLst>
           </p:cNvPr>
@@ -36314,7 +37517,7 @@
           <p:cNvPr id="22" name="Freeform 22">
             <a:extLst xmlns:a="http://schemas.openxmlformats.org/drawingml/2006/main">
               <a:ext uri="{FF2B5EF4-FFF2-40B4-BE49-F238E27FC236}">
-                <a16:creationId xmlns:a16="http://schemas.microsoft.com/office/drawing/2014/main" id="{FA795DEA-7A83-45A9-AD2A-3AC5466E94A9}"/>
+                <a16:creationId xmlns:a16="http://schemas.microsoft.com/office/drawing/2014/main" id="{4D66FC4C-65E8-4048-A199-B690B187D4C4}"/>
               </a:ext>
             </a:extLst>
           </p:cNvPr>
@@ -36362,7 +37565,7 @@
           <p:cNvPr id="23" name="TextBox 23">
             <a:extLst xmlns:a="http://schemas.openxmlformats.org/drawingml/2006/main">
               <a:ext uri="{FF2B5EF4-FFF2-40B4-BE49-F238E27FC236}">
-                <a16:creationId xmlns:a16="http://schemas.microsoft.com/office/drawing/2014/main" id="{A62DE703-107C-482A-8E85-6F92F05505CB}"/>
+                <a16:creationId xmlns:a16="http://schemas.microsoft.com/office/drawing/2014/main" id="{723084BD-37B0-4755-AFC7-F1FC68C4DA45}"/>
               </a:ext>
             </a:extLst>
           </p:cNvPr>
@@ -36414,7 +37617,7 @@
           <p:cNvPr id="24" name="TextBox 24">
             <a:extLst xmlns:a="http://schemas.openxmlformats.org/drawingml/2006/main">
               <a:ext uri="{FF2B5EF4-FFF2-40B4-BE49-F238E27FC236}">
-                <a16:creationId xmlns:a16="http://schemas.microsoft.com/office/drawing/2014/main" id="{085F8959-6E40-40D9-937F-F39FA610CAA5}"/>
+                <a16:creationId xmlns:a16="http://schemas.microsoft.com/office/drawing/2014/main" id="{7E34437A-3390-4FA4-97F1-26BEE2FC738F}"/>
               </a:ext>
             </a:extLst>
           </p:cNvPr>
@@ -36466,7 +37669,7 @@
           <p:cNvPr id="25" name="Freeform 25">
             <a:extLst xmlns:a="http://schemas.openxmlformats.org/drawingml/2006/main">
               <a:ext uri="{FF2B5EF4-FFF2-40B4-BE49-F238E27FC236}">
-                <a16:creationId xmlns:a16="http://schemas.microsoft.com/office/drawing/2014/main" id="{A93B1EEA-7C09-42E0-A8E5-F9637A4CCBEA}"/>
+                <a16:creationId xmlns:a16="http://schemas.microsoft.com/office/drawing/2014/main" id="{C8CCB0F5-D8EE-4B7E-A1E4-CF63CB24D1F8}"/>
               </a:ext>
             </a:extLst>
           </p:cNvPr>
@@ -36514,7 +37717,7 @@
           <p:cNvPr id="26" name="Freeform 26">
             <a:extLst xmlns:a="http://schemas.openxmlformats.org/drawingml/2006/main">
               <a:ext uri="{FF2B5EF4-FFF2-40B4-BE49-F238E27FC236}">
-                <a16:creationId xmlns:a16="http://schemas.microsoft.com/office/drawing/2014/main" id="{1646FE64-ACC7-46A7-A824-4F1CCD9FDDE9}"/>
+                <a16:creationId xmlns:a16="http://schemas.microsoft.com/office/drawing/2014/main" id="{6C304718-B852-4FB8-B077-1DDD81569A1B}"/>
               </a:ext>
             </a:extLst>
           </p:cNvPr>
@@ -36559,10 +37762,10 @@
       </p:sp>
       <p:sp>
         <p:nvSpPr>
-          <p:cNvPr id="27" name="內容_9_效度檢定 V7–V11">
+          <p:cNvPr id="27" name="內容_9_檢查V7–V11：物理與排隊">
             <a:extLst xmlns:a="http://schemas.openxmlformats.org/drawingml/2006/main">
               <a:ext uri="{FF2B5EF4-FFF2-40B4-BE49-F238E27FC236}">
-                <a16:creationId xmlns:a16="http://schemas.microsoft.com/office/drawing/2014/main" id="{0397F75F-7BC0-4758-AD40-9C639BC9FADB}"/>
+                <a16:creationId xmlns:a16="http://schemas.microsoft.com/office/drawing/2014/main" id="{DD4AFBEA-4F5E-4FDC-A78B-FC5507C28516}"/>
               </a:ext>
             </a:extLst>
           </p:cNvPr>
@@ -36710,7 +37913,7 @@
                 <a:ea typeface="Microsoft JhengHei"/>
                 <a:cs typeface="Microsoft JhengHei"/>
               </a:rPr>
-              <a:t>效度檢定 V7–V11</a:t>
+              <a:t>檢查V7–V11：物理與排隊</a:t>
             </a:r>
           </a:p>
         </p:txBody>
@@ -36720,7 +37923,7 @@
           <p:cNvPr id="28" name="內容_9_將模型對回物理與排隊">
             <a:extLst xmlns:a="http://schemas.openxmlformats.org/drawingml/2006/main">
               <a:ext uri="{FF2B5EF4-FFF2-40B4-BE49-F238E27FC236}">
-                <a16:creationId xmlns:a16="http://schemas.microsoft.com/office/drawing/2014/main" id="{097CC093-E365-4BAF-B144-BA6C73EA69F8}"/>
+                <a16:creationId xmlns:a16="http://schemas.microsoft.com/office/drawing/2014/main" id="{22A2781B-4B68-42D8-9611-20F5865A1532}"/>
               </a:ext>
             </a:extLst>
           </p:cNvPr>
@@ -36878,7 +38081,7 @@
           <p:cNvPr id="29" name="">
             <a:extLst xmlns:a="http://schemas.openxmlformats.org/drawingml/2006/main">
               <a:ext uri="{FF2B5EF4-FFF2-40B4-BE49-F238E27FC236}">
-                <a16:creationId xmlns:a16="http://schemas.microsoft.com/office/drawing/2014/main" id="{A6EB6363-4ED0-47F6-BE4B-26E9E08BBC11}"/>
+                <a16:creationId xmlns:a16="http://schemas.microsoft.com/office/drawing/2014/main" id="{AD31A027-BB66-4FB3-8150-341D1474A357}"/>
               </a:ext>
             </a:extLst>
           </p:cNvPr>
@@ -36905,7 +38108,7 @@
                     <a:lstStyle/>
                     <a:p>
                       <a:r>
-                        <a:rPr sz="1875" b="1">
+                        <a:rPr sz="1725" b="1">
                           <a:solidFill>
                             <a:srgbClr val="DF96DA"/>
                           </a:solidFill>
@@ -36953,7 +38156,7 @@
                     <a:lstStyle/>
                     <a:p>
                       <a:r>
-                        <a:rPr sz="1875" b="1">
+                        <a:rPr sz="1725" b="1">
                           <a:solidFill>
                             <a:srgbClr val="DF96DA"/>
                           </a:solidFill>
@@ -36995,7 +38198,7 @@
                     <a:lstStyle/>
                     <a:p>
                       <a:r>
-                        <a:rPr sz="1875" b="1">
+                        <a:rPr sz="1725" b="1">
                           <a:solidFill>
                             <a:srgbClr val="DF96DA"/>
                           </a:solidFill>
@@ -37039,7 +38242,7 @@
                     <a:lstStyle/>
                     <a:p>
                       <a:r>
-                        <a:rPr sz="1875" b="0">
+                        <a:rPr sz="1725" b="0">
                           <a:solidFill>
                             <a:srgbClr val="F6E0F5"/>
                           </a:solidFill>
@@ -37081,7 +38284,7 @@
                     <a:lstStyle/>
                     <a:p>
                       <a:r>
-                        <a:rPr sz="1875" b="0">
+                        <a:rPr sz="1725" b="0">
                           <a:solidFill>
                             <a:srgbClr val="F6E0F5"/>
                           </a:solidFill>
@@ -37089,7 +38292,7 @@
                           <a:ea typeface="Microsoft JhengHei"/>
                           <a:cs typeface="Microsoft JhengHei"/>
                         </a:rPr>
-                        <a:t>30s／箱；未超過實現可用產能</a:t>
+                        <a:t>30秒／箱；未超過實現可用產能</a:t>
                       </a:r>
                     </a:p>
                   </a:txBody>
@@ -37117,7 +38320,7 @@
                     <a:lstStyle/>
                     <a:p>
                       <a:r>
-                        <a:rPr sz="1875" b="0">
+                        <a:rPr sz="1725" b="0">
                           <a:solidFill>
                             <a:srgbClr val="F6E0F5"/>
                           </a:solidFill>
@@ -37125,7 +38328,7 @@
                           <a:ea typeface="Microsoft JhengHei"/>
                           <a:cs typeface="Microsoft JhengHei"/>
                         </a:rPr>
-                        <a:t>條件利用率與ρ差≤1.37pp</a:t>
+                        <a:t>加工占比與負載差≤1.37百分點</a:t>
                       </a:r>
                     </a:p>
                   </a:txBody>
@@ -37155,7 +38358,7 @@
                     <a:lstStyle/>
                     <a:p>
                       <a:r>
-                        <a:rPr sz="1875" b="0">
+                        <a:rPr sz="1725" b="0">
                           <a:solidFill>
                             <a:srgbClr val="F6E0F5"/>
                           </a:solidFill>
@@ -37197,7 +38400,7 @@
                     <a:lstStyle/>
                     <a:p>
                       <a:r>
-                        <a:rPr sz="1875" b="0">
+                        <a:rPr sz="1725" b="0">
                           <a:solidFill>
                             <a:srgbClr val="F6E0F5"/>
                           </a:solidFill>
@@ -37233,7 +38436,7 @@
                     <a:lstStyle/>
                     <a:p>
                       <a:r>
-                        <a:rPr sz="1875" b="0">
+                        <a:rPr sz="1725" b="0">
                           <a:solidFill>
                             <a:srgbClr val="F6E0F5"/>
                           </a:solidFill>
@@ -37241,7 +38444,7 @@
                           <a:ea typeface="Microsoft JhengHei"/>
                           <a:cs typeface="Microsoft JhengHei"/>
                         </a:rPr>
-                        <a:t>整體差0.20pp，個別診斷另列</a:t>
+                        <a:t>整體差0.20百分點，個別診斷另列</a:t>
                       </a:r>
                     </a:p>
                   </a:txBody>
@@ -37271,7 +38474,7 @@
                     <a:lstStyle/>
                     <a:p>
                       <a:r>
-                        <a:rPr sz="1875" b="0">
+                        <a:rPr sz="1725" b="0">
                           <a:solidFill>
                             <a:srgbClr val="F6E0F5"/>
                           </a:solidFill>
@@ -37279,7 +38482,7 @@
                           <a:ea typeface="Microsoft JhengHei"/>
                           <a:cs typeface="Microsoft JhengHei"/>
                         </a:rPr>
-                        <a:t>V9 Little’s Law</a:t>
+                        <a:t>V9 利特爾定律</a:t>
                       </a:r>
                     </a:p>
                   </a:txBody>
@@ -37313,7 +38516,7 @@
                     <a:lstStyle/>
                     <a:p>
                       <a:r>
-                        <a:rPr sz="1875" b="0">
+                        <a:rPr sz="1725" b="0">
                           <a:solidFill>
                             <a:srgbClr val="F6E0F5"/>
                           </a:solidFill>
@@ -37349,7 +38552,7 @@
                     <a:lstStyle/>
                     <a:p>
                       <a:r>
-                        <a:rPr sz="1875" b="0">
+                        <a:rPr sz="1725" b="0">
                           <a:solidFill>
                             <a:srgbClr val="F6E0F5"/>
                           </a:solidFill>
@@ -37387,7 +38590,7 @@
                     <a:lstStyle/>
                     <a:p>
                       <a:r>
-                        <a:rPr sz="1875" b="0">
+                        <a:rPr sz="1725" b="0">
                           <a:solidFill>
                             <a:srgbClr val="F6E0F5"/>
                           </a:solidFill>
@@ -37429,7 +38632,7 @@
                     <a:lstStyle/>
                     <a:p>
                       <a:r>
-                        <a:rPr sz="1875" b="0">
+                        <a:rPr sz="1725" b="0">
                           <a:solidFill>
                             <a:srgbClr val="F6E0F5"/>
                           </a:solidFill>
@@ -37437,7 +38640,7 @@
                           <a:ea typeface="Microsoft JhengHei"/>
                           <a:cs typeface="Microsoft JhengHei"/>
                         </a:rPr>
-                        <a:t>300件/h ×7日；保留外部積壓</a:t>
+                        <a:t>300件／小時 ×7日；保留外部積壓</a:t>
                       </a:r>
                     </a:p>
                   </a:txBody>
@@ -37465,7 +38668,7 @@
                     <a:lstStyle/>
                     <a:p>
                       <a:r>
-                        <a:rPr sz="1875" b="0">
+                        <a:rPr sz="1725" b="0">
                           <a:solidFill>
                             <a:srgbClr val="F6E0F5"/>
                           </a:solidFill>
@@ -37473,7 +38676,7 @@
                           <a:ea typeface="Microsoft JhengHei"/>
                           <a:cs typeface="Microsoft JhengHei"/>
                         </a:rPr>
-                        <a:t>QA先超載，清洗近飽和</a:t>
+                        <a:t>品質檢查先超載，清洗近飽和</a:t>
                       </a:r>
                     </a:p>
                   </a:txBody>
@@ -37503,7 +38706,7 @@
                     <a:lstStyle/>
                     <a:p>
                       <a:r>
-                        <a:rPr sz="1875" b="0">
+                        <a:rPr sz="1725" b="0">
                           <a:solidFill>
                             <a:srgbClr val="F6E0F5"/>
                           </a:solidFill>
@@ -37545,7 +38748,7 @@
                     <a:lstStyle/>
                     <a:p>
                       <a:r>
-                        <a:rPr sz="1875" b="0">
+                        <a:rPr sz="1725" b="0">
                           <a:solidFill>
                             <a:srgbClr val="F6E0F5"/>
                           </a:solidFill>
@@ -37553,7 +38756,7 @@
                           <a:ea typeface="Microsoft JhengHei"/>
                           <a:cs typeface="Microsoft JhengHei"/>
                         </a:rPr>
-                        <a:t>1350次最長零出庫1h</a:t>
+                        <a:t>1350次最長零出庫1小時</a:t>
                       </a:r>
                     </a:p>
                   </a:txBody>
@@ -37581,7 +38784,7 @@
                     <a:lstStyle/>
                     <a:p>
                       <a:r>
-                        <a:rPr sz="1875" b="0">
+                        <a:rPr sz="1725" b="0">
                           <a:solidFill>
                             <a:srgbClr val="F6E0F5"/>
                           </a:solidFill>
@@ -37589,7 +38792,7 @@
                           <a:ea typeface="Microsoft JhengHei"/>
                           <a:cs typeface="Microsoft JhengHei"/>
                         </a:rPr>
-                        <a:t>未出現連續4h零出庫</a:t>
+                        <a:t>未出現連續4小時零出庫</a:t>
                       </a:r>
                     </a:p>
                   </a:txBody>
@@ -37618,10 +38821,168 @@
       </p:graphicFrame>
       <p:sp>
         <p:nvSpPr>
-          <p:cNvPr id="30" name="內容_9_1920次不重複原生運行；1">
+          <p:cNvPr id="30" name="內容_9_負載比例＝到達率÷處理能力；">
             <a:extLst xmlns:a="http://schemas.openxmlformats.org/drawingml/2006/main">
               <a:ext uri="{FF2B5EF4-FFF2-40B4-BE49-F238E27FC236}">
-                <a16:creationId xmlns:a16="http://schemas.microsoft.com/office/drawing/2014/main" id="{D30967CE-660B-43E9-A686-5BD125018F7D}"/>
+                <a16:creationId xmlns:a16="http://schemas.microsoft.com/office/drawing/2014/main" id="{FC8C63BC-333A-4C50-9BE1-DA3201A6FB87}"/>
+              </a:ext>
+            </a:extLst>
+          </p:cNvPr>
+          <p:cNvSpPr>
+            <a:spLocks xmlns:a="http://schemas.openxmlformats.org/drawingml/2006/main" noGrp="1"/>
+          </p:cNvSpPr>
+          <p:nvPr/>
+        </p:nvSpPr>
+        <p:spPr>
+          <a:xfrm xmlns:a="http://schemas.openxmlformats.org/drawingml/2006/main">
+            <a:off x="1581150" y="3971925"/>
+            <a:ext cx="14287500" cy="333375"/>
+          </a:xfrm>
+          <a:prstGeom xmlns:a="http://schemas.openxmlformats.org/drawingml/2006/main" prst="rect">
+            <a:avLst/>
+          </a:prstGeom>
+          <a:noFill xmlns:a="http://schemas.openxmlformats.org/drawingml/2006/main"/>
+          <a:ln xmlns:a="http://schemas.openxmlformats.org/drawingml/2006/main" w="0">
+            <a:noFill/>
+          </a:ln>
+        </p:spPr>
+        <p:txBody>
+          <a:bodyPr xmlns:a="http://schemas.openxmlformats.org/drawingml/2006/main" wrap="square" lIns="0" tIns="0" rIns="0" bIns="0">
+            <a:noAutofit/>
+          </a:bodyPr>
+          <a:lstStyle xmlns:a="http://schemas.openxmlformats.org/drawingml/2006/main">
+            <a:defPPr>
+              <a:defRPr sz="1725" b="0">
+                <a:solidFill>
+                  <a:srgbClr val="92A6DD"/>
+                </a:solidFill>
+                <a:latin typeface="Microsoft JhengHei"/>
+                <a:ea typeface="Microsoft JhengHei"/>
+                <a:cs typeface="Microsoft JhengHei"/>
+              </a:defRPr>
+            </a:defPPr>
+            <a:lvl1pPr>
+              <a:defRPr sz="1725" b="0">
+                <a:solidFill>
+                  <a:srgbClr val="92A6DD"/>
+                </a:solidFill>
+                <a:latin typeface="Microsoft JhengHei"/>
+                <a:ea typeface="Microsoft JhengHei"/>
+                <a:cs typeface="Microsoft JhengHei"/>
+              </a:defRPr>
+            </a:lvl1pPr>
+            <a:lvl2pPr>
+              <a:defRPr sz="1725" b="0">
+                <a:solidFill>
+                  <a:srgbClr val="92A6DD"/>
+                </a:solidFill>
+                <a:latin typeface="Microsoft JhengHei"/>
+                <a:ea typeface="Microsoft JhengHei"/>
+                <a:cs typeface="Microsoft JhengHei"/>
+              </a:defRPr>
+            </a:lvl2pPr>
+            <a:lvl3pPr>
+              <a:defRPr sz="1725" b="0">
+                <a:solidFill>
+                  <a:srgbClr val="92A6DD"/>
+                </a:solidFill>
+                <a:latin typeface="Microsoft JhengHei"/>
+                <a:ea typeface="Microsoft JhengHei"/>
+                <a:cs typeface="Microsoft JhengHei"/>
+              </a:defRPr>
+            </a:lvl3pPr>
+            <a:lvl4pPr>
+              <a:defRPr sz="1725" b="0">
+                <a:solidFill>
+                  <a:srgbClr val="92A6DD"/>
+                </a:solidFill>
+                <a:latin typeface="Microsoft JhengHei"/>
+                <a:ea typeface="Microsoft JhengHei"/>
+                <a:cs typeface="Microsoft JhengHei"/>
+              </a:defRPr>
+            </a:lvl4pPr>
+            <a:lvl5pPr>
+              <a:defRPr sz="1725" b="0">
+                <a:solidFill>
+                  <a:srgbClr val="92A6DD"/>
+                </a:solidFill>
+                <a:latin typeface="Microsoft JhengHei"/>
+                <a:ea typeface="Microsoft JhengHei"/>
+                <a:cs typeface="Microsoft JhengHei"/>
+              </a:defRPr>
+            </a:lvl5pPr>
+            <a:lvl6pPr>
+              <a:defRPr sz="1725" b="0">
+                <a:solidFill>
+                  <a:srgbClr val="92A6DD"/>
+                </a:solidFill>
+                <a:latin typeface="Microsoft JhengHei"/>
+                <a:ea typeface="Microsoft JhengHei"/>
+                <a:cs typeface="Microsoft JhengHei"/>
+              </a:defRPr>
+            </a:lvl6pPr>
+            <a:lvl7pPr>
+              <a:defRPr sz="1725" b="0">
+                <a:solidFill>
+                  <a:srgbClr val="92A6DD"/>
+                </a:solidFill>
+                <a:latin typeface="Microsoft JhengHei"/>
+                <a:ea typeface="Microsoft JhengHei"/>
+                <a:cs typeface="Microsoft JhengHei"/>
+              </a:defRPr>
+            </a:lvl7pPr>
+            <a:lvl8pPr>
+              <a:defRPr sz="1725" b="0">
+                <a:solidFill>
+                  <a:srgbClr val="92A6DD"/>
+                </a:solidFill>
+                <a:latin typeface="Microsoft JhengHei"/>
+                <a:ea typeface="Microsoft JhengHei"/>
+                <a:cs typeface="Microsoft JhengHei"/>
+              </a:defRPr>
+            </a:lvl8pPr>
+            <a:lvl9pPr>
+              <a:defRPr sz="1725" b="0">
+                <a:solidFill>
+                  <a:srgbClr val="92A6DD"/>
+                </a:solidFill>
+                <a:latin typeface="Microsoft JhengHei"/>
+                <a:ea typeface="Microsoft JhengHei"/>
+                <a:cs typeface="Microsoft JhengHei"/>
+              </a:defRPr>
+            </a:lvl9pPr>
+          </a:lstStyle>
+          <a:p xmlns:a="http://schemas.openxmlformats.org/drawingml/2006/main">
+            <a:pPr>
+              <a:defRPr sz="1725" b="0">
+                <a:solidFill>
+                  <a:srgbClr val="92A6DD"/>
+                </a:solidFill>
+                <a:latin typeface="Microsoft JhengHei"/>
+                <a:ea typeface="Microsoft JhengHei"/>
+                <a:cs typeface="Microsoft JhengHei"/>
+              </a:defRPr>
+            </a:pPr>
+            <a:r>
+              <a:rPr sz="1725" b="0">
+                <a:solidFill>
+                  <a:srgbClr val="92A6DD"/>
+                </a:solidFill>
+                <a:latin typeface="Microsoft JhengHei"/>
+                <a:ea typeface="Microsoft JhengHei"/>
+                <a:cs typeface="Microsoft JhengHei"/>
+              </a:rPr>
+              <a:t>負載比例＝到達率÷處理能力；利特爾定律用流量與等待時間核對平均在製量。</a:t>
+            </a:r>
+          </a:p>
+        </p:txBody>
+      </p:sp>
+      <p:sp>
+        <p:nvSpPr>
+          <p:cNvPr id="31" name="內容_9_1920次不重複原生運行；1">
+            <a:extLst xmlns:a="http://schemas.openxmlformats.org/drawingml/2006/main">
+              <a:ext uri="{FF2B5EF4-FFF2-40B4-BE49-F238E27FC236}">
+                <a16:creationId xmlns:a16="http://schemas.microsoft.com/office/drawing/2014/main" id="{5454E7FF-B754-4DA6-979E-61D07E1BAB58}"/>
               </a:ext>
             </a:extLst>
           </p:cNvPr>
@@ -37769,7 +39130,7 @@
                 <a:ea typeface="Microsoft JhengHei"/>
                 <a:cs typeface="Microsoft JhengHei"/>
               </a:rPr>
-              <a:t>1920次不重複原生運行；15,360筆功能性KPI響應與原始計數重算差異為0。</a:t>
+              <a:t>1920次不重複原生運行；15,360筆功能性績效指標響應與原始計數重算差異為0。</a:t>
             </a:r>
           </a:p>
         </p:txBody>
@@ -37777,7 +39138,7 @@
     </p:spTree>
     <p:extLst>
       <p:ext uri="{BB962C8B-B14F-4D97-AF65-F5344CB8AC3E}">
-        <p14:creationId xmlns:p14="http://schemas.microsoft.com/office/powerpoint/2010/main" val="603878938"/>
+        <p14:creationId xmlns:p14="http://schemas.microsoft.com/office/powerpoint/2010/main" val="1375023001"/>
       </p:ext>
     </p:extLst>
   </p:cSld>

--- a/重點檔案/01_成果簡報.pptx
+++ b/重點檔案/01_成果簡報.pptx
@@ -2,42 +2,42 @@
 <file path=ppt/presentation.xml><?xml version="1.0" encoding="utf-8"?>
 <p:presentation xmlns:p="http://schemas.openxmlformats.org/presentationml/2006/main" embedTrueTypeFonts="1" saveSubsetFonts="0">
   <p:sldMasterIdLst>
-    <p:sldMasterId xmlns:r="http://schemas.openxmlformats.org/officeDocument/2006/relationships" id="2147483648" r:id="R18579d5630a74d69"/>
+    <p:sldMasterId xmlns:r="http://schemas.openxmlformats.org/officeDocument/2006/relationships" id="2147483648" r:id="R81922336bfae47f2"/>
   </p:sldMasterIdLst>
   <p:notesMasterIdLst>
-    <p:notesMasterId xmlns:r="http://schemas.openxmlformats.org/officeDocument/2006/relationships" r:id="Rf475f33c754447c2"/>
+    <p:notesMasterId xmlns:r="http://schemas.openxmlformats.org/officeDocument/2006/relationships" r:id="Rbbeb863bf31d4ffb"/>
   </p:notesMasterIdLst>
   <p:sldIdLst>
-    <p:sldId xmlns:r="http://schemas.openxmlformats.org/officeDocument/2006/relationships" id="256" r:id="Rc7f94b4e688d4f7c"/>
-    <p:sldId xmlns:r="http://schemas.openxmlformats.org/officeDocument/2006/relationships" id="257" r:id="R219732119e634ab6"/>
-    <p:sldId xmlns:r="http://schemas.openxmlformats.org/officeDocument/2006/relationships" id="258" r:id="R1af259136fd6480b"/>
-    <p:sldId xmlns:r="http://schemas.openxmlformats.org/officeDocument/2006/relationships" id="259" r:id="R453aed756d4b42a4"/>
-    <p:sldId xmlns:r="http://schemas.openxmlformats.org/officeDocument/2006/relationships" id="260" r:id="Ra1cb325cf01748b7"/>
-    <p:sldId xmlns:r="http://schemas.openxmlformats.org/officeDocument/2006/relationships" id="261" r:id="Rbcb00b8689c54e23"/>
-    <p:sldId xmlns:r="http://schemas.openxmlformats.org/officeDocument/2006/relationships" id="262" r:id="R0ba58f01f54043c4"/>
-    <p:sldId xmlns:r="http://schemas.openxmlformats.org/officeDocument/2006/relationships" id="263" r:id="Rd86cdc9744274e11"/>
-    <p:sldId xmlns:r="http://schemas.openxmlformats.org/officeDocument/2006/relationships" id="264" r:id="R1651043e0b74485d"/>
-    <p:sldId xmlns:r="http://schemas.openxmlformats.org/officeDocument/2006/relationships" id="265" r:id="Ra1be592f4ff04f2f"/>
-    <p:sldId xmlns:r="http://schemas.openxmlformats.org/officeDocument/2006/relationships" id="266" r:id="R80310bc39b4d4afa"/>
-    <p:sldId xmlns:r="http://schemas.openxmlformats.org/officeDocument/2006/relationships" id="267" r:id="R974da358a60d4aa2"/>
-    <p:sldId xmlns:r="http://schemas.openxmlformats.org/officeDocument/2006/relationships" id="268" r:id="R0875ab855c594c37"/>
-    <p:sldId xmlns:r="http://schemas.openxmlformats.org/officeDocument/2006/relationships" id="269" r:id="Rf6f539424202482c"/>
-    <p:sldId xmlns:r="http://schemas.openxmlformats.org/officeDocument/2006/relationships" id="270" r:id="Rd9c234f7c8ad4e07"/>
+    <p:sldId xmlns:r="http://schemas.openxmlformats.org/officeDocument/2006/relationships" id="256" r:id="R39b30d7673554fb0"/>
+    <p:sldId xmlns:r="http://schemas.openxmlformats.org/officeDocument/2006/relationships" id="257" r:id="R65d449fd8110474b"/>
+    <p:sldId xmlns:r="http://schemas.openxmlformats.org/officeDocument/2006/relationships" id="258" r:id="R2c24e6d2d03b4f72"/>
+    <p:sldId xmlns:r="http://schemas.openxmlformats.org/officeDocument/2006/relationships" id="259" r:id="R9a5b4ab625e84dca"/>
+    <p:sldId xmlns:r="http://schemas.openxmlformats.org/officeDocument/2006/relationships" id="260" r:id="R2d845fd5588c45c1"/>
+    <p:sldId xmlns:r="http://schemas.openxmlformats.org/officeDocument/2006/relationships" id="261" r:id="R294c191c0ffc41f4"/>
+    <p:sldId xmlns:r="http://schemas.openxmlformats.org/officeDocument/2006/relationships" id="262" r:id="Ra98335886c6f437a"/>
+    <p:sldId xmlns:r="http://schemas.openxmlformats.org/officeDocument/2006/relationships" id="263" r:id="R628c12c193b04e84"/>
+    <p:sldId xmlns:r="http://schemas.openxmlformats.org/officeDocument/2006/relationships" id="264" r:id="R56ba6732e25f4f39"/>
+    <p:sldId xmlns:r="http://schemas.openxmlformats.org/officeDocument/2006/relationships" id="265" r:id="Rcf45832590e14010"/>
+    <p:sldId xmlns:r="http://schemas.openxmlformats.org/officeDocument/2006/relationships" id="266" r:id="Rbc29604d5c194e9d"/>
+    <p:sldId xmlns:r="http://schemas.openxmlformats.org/officeDocument/2006/relationships" id="267" r:id="R90ab647fb0e84a09"/>
+    <p:sldId xmlns:r="http://schemas.openxmlformats.org/officeDocument/2006/relationships" id="268" r:id="Rc807a673ba0c4915"/>
+    <p:sldId xmlns:r="http://schemas.openxmlformats.org/officeDocument/2006/relationships" id="269" r:id="Ra22468954b6d4b74"/>
+    <p:sldId xmlns:r="http://schemas.openxmlformats.org/officeDocument/2006/relationships" id="270" r:id="Rd20ef3684ee747c5"/>
   </p:sldIdLst>
   <p:sldSz cx="18288000" cy="10287000"/>
   <p:notesSz cx="6858000" cy="9144000"/>
   <p:embeddedFontLst>
     <p:embeddedFont>
       <p:font typeface="Garet Bold"/>
-      <p:regular xmlns:r="http://schemas.openxmlformats.org/officeDocument/2006/relationships" r:id="R533b04373fe9473e"/>
+      <p:regular xmlns:r="http://schemas.openxmlformats.org/officeDocument/2006/relationships" r:id="Reb313f523b4b4faf"/>
     </p:embeddedFont>
     <p:embeddedFont>
       <p:font typeface="Garet"/>
-      <p:regular xmlns:r="http://schemas.openxmlformats.org/officeDocument/2006/relationships" r:id="R39b39ebb40e44600"/>
+      <p:regular xmlns:r="http://schemas.openxmlformats.org/officeDocument/2006/relationships" r:id="R2015ec024c674691"/>
     </p:embeddedFont>
     <p:embeddedFont>
       <p:font typeface="Poppins"/>
-      <p:regular xmlns:r="http://schemas.openxmlformats.org/officeDocument/2006/relationships" r:id="R40a9e10f629a4f3c"/>
+      <p:regular xmlns:r="http://schemas.openxmlformats.org/officeDocument/2006/relationships" r:id="Rc6bbcb77d0b245aa"/>
     </p:embeddedFont>
   </p:embeddedFontLst>
   <p:defaultTextStyle>
@@ -679,7 +679,7 @@
           <a:lstStyle xmlns:a="http://schemas.openxmlformats.org/drawingml/2006/main"/>
           <a:p xmlns:a="http://schemas.openxmlformats.org/drawingml/2006/main">
             <a:r>
-              <a:t>S1、各30次。P4 8公尺平均外包110.8箱，12m84.7箱，現有實驗不是支援/外包的獨立消融。P4 8公尺阻塞0.951% [0.783,1.118]；12m0.711% [0.565,0.856]。品質檢查單人40秒能力90/h，低於清洗期望115.2/h，單加第二台清洗P1仍阻塞3.944%。</a:t>
+              <a:t>短波尖峰情境（S1）、各30次。聯合改善（P4） 8公尺平均外包110.8箱，12m84.7箱，現有實驗不是支援/外包的獨立消融。聯合改善（P4） 8公尺阻塞0.951% [0.783,1.118]；12m0.711% [0.565,0.856]。品質檢查單人40秒能力90/h，低於清洗期望115.2/h，單加第二台清洗增設第二台清洗機（P1）仍阻塞3.944%。</a:t>
             </a:r>
           </a:p>
           <a:p xmlns:a="http://schemas.openxmlformats.org/drawingml/2006/main">
@@ -919,7 +919,7 @@
           <a:lstStyle xmlns:a="http://schemas.openxmlformats.org/drawingml/2006/main"/>
           <a:p xmlns:a="http://schemas.openxmlformats.org/drawingml/2006/main">
             <a:r>
-              <a:t>成本含箱攤提、剩餘帳面價值沖銷、清洗耗材、電力、外包與檢查前等待損失。365日年化以6日觀察推估，另列250日敏感度；不是實際年度帳務。12公尺五年8%NPV為-323,376元。若必須改善SLA，P4比P1少投資且營運成本較低，但與維持P0相比，直接財務效益不足以支持回收。</a:t>
+              <a:t>成本含箱攤提、剩餘帳面價值沖銷、清洗耗材、電力、外包與檢查前等待損失。365日年化以6日觀察推估，另列250日敏感度；不是實際年度帳務。12公尺五年8%NPV為-323,376元。若必須改善SLA，聯合改善（P4）比增設第二台清洗機（P1）少投資且營運成本較低，但與維持維持現況（P0）相比，直接財務效益不足以支持回收。</a:t>
             </a:r>
           </a:p>
           <a:p xmlns:a="http://schemas.openxmlformats.org/drawingml/2006/main">
@@ -1159,7 +1159,7 @@
           <a:lstStyle xmlns:a="http://schemas.openxmlformats.org/drawingml/2006/main"/>
           <a:p xmlns:a="http://schemas.openxmlformats.org/drawingml/2006/main">
             <a:r>
-              <a:t>所有方案使用同一模型的原生實驗比較。P4的效果不可全部歸因於人員支援，因為它也包含外包。三波各20分鐘，六日觀察需求量約為平日1.43倍；不是整週3.5倍。</a:t>
+              <a:t>所有方案使用同一模型的原生實驗比較。聯合改善（P4）含緩衝、人員支援與觸發式外包，效果不能全部歸因於人員。短波尖峰情境（S1）每天三波、每波20分鐘；不是整週需求都增加3.5倍。</a:t>
             </a:r>
           </a:p>
           <a:p xmlns:a="http://schemas.openxmlformats.org/drawingml/2006/main">
@@ -1559,7 +1559,7 @@
           <a:lstStyle xmlns:a="http://schemas.openxmlformats.org/drawingml/2006/main"/>
           <a:p xmlns:a="http://schemas.openxmlformats.org/drawingml/2006/main">
             <a:r>
-              <a:t>S1/P0無外包，按每次能耗/退貨量計算再取平均，0.184875145度電/件。1−E×0.495/0.35=73.853%。同口徑若剛好42%，E約0.410101度電/件；差異來自給定係數、能耗與基準。P4 12公尺的完整減碳信賴區間[73.966,74.023]%，下界亦大於42%；包含平均84.7箱外包及相應排放，不能只套電力公式。0.35與0.495為課程係數，未涵蓋完整箱製造與逆物流LCA。</a:t>
+              <a:t>短波尖峰情境（S1）/維持現況（P0）無外包，按每次能耗/退貨量計算再取平均，0.184875145度電/件。1−E×0.495/0.35=73.853%。同口徑若剛好42%，E約0.410101度電/件；差異來自給定係數、能耗與基準。聯合改善（P4） 12公尺的完整減碳信賴區間[73.966,74.023]%，下界亦大於42%；包含平均84.7箱外包及相應排放，不能只套電力公式。0.35與0.495為課程係數，未涵蓋完整箱製造與逆物流LCA。</a:t>
             </a:r>
           </a:p>
           <a:p xmlns:a="http://schemas.openxmlformats.org/drawingml/2006/main">
@@ -1639,7 +1639,7 @@
           <a:lstStyle xmlns:a="http://schemas.openxmlformats.org/drawingml/2006/main"/>
           <a:p xmlns:a="http://schemas.openxmlformats.org/drawingml/2006/main">
             <a:r>
-              <a:t>V3依批次前固定計畫，使用30次平均在製量時間剖面的迴歸，並完整保留個別重複的絕對漂移。S0 pooled漂移−0.20755%，S1 改善前為9.84335%，P4 12公尺為1.86592%。V5包含12項主要作業與財務績效指標；原始30次的精度不足仍是正式發現。</a:t>
+              <a:t>V3依批次前固定計畫，使用30次平均在製量時間剖面的迴歸，並完整保留個別重複的絕對漂移。平日基準情境（S0） pooled漂移−0.20755%，短波尖峰情境（S1） 改善前為9.84335%，聯合改善（P4） 12公尺為1.86592%。V5包含12項主要作業與財務績效指標；原始30次的精度不足仍是正式發現。</a:t>
             </a:r>
           </a:p>
           <a:p xmlns:a="http://schemas.openxmlformats.org/drawingml/2006/main">
@@ -1776,7 +1776,7 @@
           <p:cNvPr id="2" name="Title 1">
             <a:extLst xmlns:a="http://schemas.openxmlformats.org/drawingml/2006/main">
               <a:ext uri="{FF2B5EF4-FFF2-40B4-BE49-F238E27FC236}">
-                <a16:creationId xmlns:a16="http://schemas.microsoft.com/office/drawing/2014/main" id="{60AAF07D-6364-4DBB-849C-D3D6E7FB2AEE}"/>
+                <a16:creationId xmlns:a16="http://schemas.microsoft.com/office/drawing/2014/main" id="{75611A03-6432-4CF4-A33D-3C8C01767B57}"/>
               </a:ext>
             </a:extLst>
           </p:cNvPr>
@@ -1809,7 +1809,7 @@
           <p:cNvPr id="3" name="Subtitle 2">
             <a:extLst xmlns:a="http://schemas.openxmlformats.org/drawingml/2006/main">
               <a:ext uri="{FF2B5EF4-FFF2-40B4-BE49-F238E27FC236}">
-                <a16:creationId xmlns:a16="http://schemas.microsoft.com/office/drawing/2014/main" id="{BB96BAB8-8DF6-4363-B7EB-6357AC0755AE}"/>
+                <a16:creationId xmlns:a16="http://schemas.microsoft.com/office/drawing/2014/main" id="{E2320E25-4023-4028-934B-4090F3B433CB}"/>
               </a:ext>
             </a:extLst>
           </p:cNvPr>
@@ -1933,7 +1933,7 @@
           <p:cNvPr id="4" name="Date Placeholder 3">
             <a:extLst xmlns:a="http://schemas.openxmlformats.org/drawingml/2006/main">
               <a:ext uri="{FF2B5EF4-FFF2-40B4-BE49-F238E27FC236}">
-                <a16:creationId xmlns:a16="http://schemas.microsoft.com/office/drawing/2014/main" id="{ED1DFAB8-B381-4365-8BA9-AADDB5BCAC69}"/>
+                <a16:creationId xmlns:a16="http://schemas.microsoft.com/office/drawing/2014/main" id="{920FCB2A-051C-4AAF-A364-579AAC4A5F89}"/>
               </a:ext>
             </a:extLst>
           </p:cNvPr>
@@ -1961,7 +1961,7 @@
           <p:cNvPr id="5" name="Footer Placeholder 4">
             <a:extLst xmlns:a="http://schemas.openxmlformats.org/drawingml/2006/main">
               <a:ext uri="{FF2B5EF4-FFF2-40B4-BE49-F238E27FC236}">
-                <a16:creationId xmlns:a16="http://schemas.microsoft.com/office/drawing/2014/main" id="{EDCFE6B8-D071-42C0-B3DA-51E3AB0D2F0B}"/>
+                <a16:creationId xmlns:a16="http://schemas.microsoft.com/office/drawing/2014/main" id="{05E7525D-9480-4064-90EF-34016703EE36}"/>
               </a:ext>
             </a:extLst>
           </p:cNvPr>
@@ -1986,7 +1986,7 @@
           <p:cNvPr id="6" name="Slide Number Placeholder 5">
             <a:extLst xmlns:a="http://schemas.openxmlformats.org/drawingml/2006/main">
               <a:ext uri="{FF2B5EF4-FFF2-40B4-BE49-F238E27FC236}">
-                <a16:creationId xmlns:a16="http://schemas.microsoft.com/office/drawing/2014/main" id="{7AEE314B-925E-46C3-BFFE-5D17713F49C6}"/>
+                <a16:creationId xmlns:a16="http://schemas.microsoft.com/office/drawing/2014/main" id="{71550E44-7BBA-4740-B054-0668BF9005E6}"/>
               </a:ext>
             </a:extLst>
           </p:cNvPr>
@@ -2031,7 +2031,7 @@
           <p:cNvPr id="2" name="Title 1">
             <a:extLst xmlns:a="http://schemas.openxmlformats.org/drawingml/2006/main">
               <a:ext uri="{FF2B5EF4-FFF2-40B4-BE49-F238E27FC236}">
-                <a16:creationId xmlns:a16="http://schemas.microsoft.com/office/drawing/2014/main" id="{32AEE945-C4F4-429A-BB77-8E9F444CCCC7}"/>
+                <a16:creationId xmlns:a16="http://schemas.microsoft.com/office/drawing/2014/main" id="{47F13565-6321-4A6C-A12B-DABBBBD65882}"/>
               </a:ext>
             </a:extLst>
           </p:cNvPr>
@@ -2059,7 +2059,7 @@
           <p:cNvPr id="3" name="Vertical Text Placeholder 2">
             <a:extLst xmlns:a="http://schemas.openxmlformats.org/drawingml/2006/main">
               <a:ext uri="{FF2B5EF4-FFF2-40B4-BE49-F238E27FC236}">
-                <a16:creationId xmlns:a16="http://schemas.microsoft.com/office/drawing/2014/main" id="{8B9FB5EF-2779-449A-92A6-C26F06A61F54}"/>
+                <a16:creationId xmlns:a16="http://schemas.microsoft.com/office/drawing/2014/main" id="{E40B18B2-998D-4938-88F3-78980833ADE0}"/>
               </a:ext>
             </a:extLst>
           </p:cNvPr>
@@ -2122,7 +2122,7 @@
           <p:cNvPr id="4" name="Date Placeholder 3">
             <a:extLst xmlns:a="http://schemas.openxmlformats.org/drawingml/2006/main">
               <a:ext uri="{FF2B5EF4-FFF2-40B4-BE49-F238E27FC236}">
-                <a16:creationId xmlns:a16="http://schemas.microsoft.com/office/drawing/2014/main" id="{0D26E671-CDE6-4284-B2AD-4C4A45A0BF58}"/>
+                <a16:creationId xmlns:a16="http://schemas.microsoft.com/office/drawing/2014/main" id="{C311B3BE-DBE5-4775-B968-C1708A06831F}"/>
               </a:ext>
             </a:extLst>
           </p:cNvPr>
@@ -2150,7 +2150,7 @@
           <p:cNvPr id="5" name="Footer Placeholder 4">
             <a:extLst xmlns:a="http://schemas.openxmlformats.org/drawingml/2006/main">
               <a:ext uri="{FF2B5EF4-FFF2-40B4-BE49-F238E27FC236}">
-                <a16:creationId xmlns:a16="http://schemas.microsoft.com/office/drawing/2014/main" id="{F9FA5C33-375F-406F-B194-93D4A5125279}"/>
+                <a16:creationId xmlns:a16="http://schemas.microsoft.com/office/drawing/2014/main" id="{7416F8C2-9EA5-4F3E-B7A2-1FCC58062CD0}"/>
               </a:ext>
             </a:extLst>
           </p:cNvPr>
@@ -2175,7 +2175,7 @@
           <p:cNvPr id="6" name="Slide Number Placeholder 5">
             <a:extLst xmlns:a="http://schemas.openxmlformats.org/drawingml/2006/main">
               <a:ext uri="{FF2B5EF4-FFF2-40B4-BE49-F238E27FC236}">
-                <a16:creationId xmlns:a16="http://schemas.microsoft.com/office/drawing/2014/main" id="{D729844A-CB12-436B-ABF2-945E28186938}"/>
+                <a16:creationId xmlns:a16="http://schemas.microsoft.com/office/drawing/2014/main" id="{7DDD1C29-A33F-4682-9E40-11FE8A070AC0}"/>
               </a:ext>
             </a:extLst>
           </p:cNvPr>
@@ -2220,7 +2220,7 @@
           <p:cNvPr id="2" name="Vertical Title 1">
             <a:extLst xmlns:a="http://schemas.openxmlformats.org/drawingml/2006/main">
               <a:ext uri="{FF2B5EF4-FFF2-40B4-BE49-F238E27FC236}">
-                <a16:creationId xmlns:a16="http://schemas.microsoft.com/office/drawing/2014/main" id="{5DED8826-D2D4-4561-85CD-8DB8E16E9444}"/>
+                <a16:creationId xmlns:a16="http://schemas.microsoft.com/office/drawing/2014/main" id="{AA443A5A-84E5-4692-815D-514F943EE25B}"/>
               </a:ext>
             </a:extLst>
           </p:cNvPr>
@@ -2253,7 +2253,7 @@
           <p:cNvPr id="3" name="Vertical Text Placeholder 2">
             <a:extLst xmlns:a="http://schemas.openxmlformats.org/drawingml/2006/main">
               <a:ext uri="{FF2B5EF4-FFF2-40B4-BE49-F238E27FC236}">
-                <a16:creationId xmlns:a16="http://schemas.microsoft.com/office/drawing/2014/main" id="{A097CD4E-49FC-47DD-8AFD-84FD08565A3C}"/>
+                <a16:creationId xmlns:a16="http://schemas.microsoft.com/office/drawing/2014/main" id="{F696EA01-DAA3-492B-BD20-01C42ACA9256}"/>
               </a:ext>
             </a:extLst>
           </p:cNvPr>
@@ -2321,7 +2321,7 @@
           <p:cNvPr id="4" name="Date Placeholder 3">
             <a:extLst xmlns:a="http://schemas.openxmlformats.org/drawingml/2006/main">
               <a:ext uri="{FF2B5EF4-FFF2-40B4-BE49-F238E27FC236}">
-                <a16:creationId xmlns:a16="http://schemas.microsoft.com/office/drawing/2014/main" id="{707040ED-AD0F-4299-8F57-2F45AF0AC390}"/>
+                <a16:creationId xmlns:a16="http://schemas.microsoft.com/office/drawing/2014/main" id="{339AEBBC-34CD-44C7-9FD3-E6E5B74509B5}"/>
               </a:ext>
             </a:extLst>
           </p:cNvPr>
@@ -2349,7 +2349,7 @@
           <p:cNvPr id="5" name="Footer Placeholder 4">
             <a:extLst xmlns:a="http://schemas.openxmlformats.org/drawingml/2006/main">
               <a:ext uri="{FF2B5EF4-FFF2-40B4-BE49-F238E27FC236}">
-                <a16:creationId xmlns:a16="http://schemas.microsoft.com/office/drawing/2014/main" id="{3BBBB6DE-D8BD-4029-B1C9-AA6128C1D938}"/>
+                <a16:creationId xmlns:a16="http://schemas.microsoft.com/office/drawing/2014/main" id="{FA124AE0-9AB9-4CFC-86FA-F426A031C33A}"/>
               </a:ext>
             </a:extLst>
           </p:cNvPr>
@@ -2374,7 +2374,7 @@
           <p:cNvPr id="6" name="Slide Number Placeholder 5">
             <a:extLst xmlns:a="http://schemas.openxmlformats.org/drawingml/2006/main">
               <a:ext uri="{FF2B5EF4-FFF2-40B4-BE49-F238E27FC236}">
-                <a16:creationId xmlns:a16="http://schemas.microsoft.com/office/drawing/2014/main" id="{9834859B-E781-41B0-8498-7B1306E3784D}"/>
+                <a16:creationId xmlns:a16="http://schemas.microsoft.com/office/drawing/2014/main" id="{E1F4B61A-5B2A-4DC0-A0B3-592B1B599F57}"/>
               </a:ext>
             </a:extLst>
           </p:cNvPr>
@@ -2419,7 +2419,7 @@
           <p:cNvPr id="2" name="Title 1">
             <a:extLst xmlns:a="http://schemas.openxmlformats.org/drawingml/2006/main">
               <a:ext uri="{FF2B5EF4-FFF2-40B4-BE49-F238E27FC236}">
-                <a16:creationId xmlns:a16="http://schemas.microsoft.com/office/drawing/2014/main" id="{D828A8B1-B652-43B3-AA1D-A0621EB9F5F4}"/>
+                <a16:creationId xmlns:a16="http://schemas.microsoft.com/office/drawing/2014/main" id="{081FDFEA-1D76-4898-BAB4-12AC97B36692}"/>
               </a:ext>
             </a:extLst>
           </p:cNvPr>
@@ -2447,7 +2447,7 @@
           <p:cNvPr id="3" name="Content Placeholder 2">
             <a:extLst xmlns:a="http://schemas.openxmlformats.org/drawingml/2006/main">
               <a:ext uri="{FF2B5EF4-FFF2-40B4-BE49-F238E27FC236}">
-                <a16:creationId xmlns:a16="http://schemas.microsoft.com/office/drawing/2014/main" id="{9356AFC3-E8D0-4603-AD83-3FE3EFE7639E}"/>
+                <a16:creationId xmlns:a16="http://schemas.microsoft.com/office/drawing/2014/main" id="{F4AC1F04-3542-473D-88D8-6E439CDADBE9}"/>
               </a:ext>
             </a:extLst>
           </p:cNvPr>
@@ -2510,7 +2510,7 @@
           <p:cNvPr id="4" name="Date Placeholder 3">
             <a:extLst xmlns:a="http://schemas.openxmlformats.org/drawingml/2006/main">
               <a:ext uri="{FF2B5EF4-FFF2-40B4-BE49-F238E27FC236}">
-                <a16:creationId xmlns:a16="http://schemas.microsoft.com/office/drawing/2014/main" id="{4DB1F090-2363-4E5B-8CC8-1988C718928F}"/>
+                <a16:creationId xmlns:a16="http://schemas.microsoft.com/office/drawing/2014/main" id="{B8422028-17D8-4B9C-BB4A-CECA86C04FFA}"/>
               </a:ext>
             </a:extLst>
           </p:cNvPr>
@@ -2538,7 +2538,7 @@
           <p:cNvPr id="5" name="Footer Placeholder 4">
             <a:extLst xmlns:a="http://schemas.openxmlformats.org/drawingml/2006/main">
               <a:ext uri="{FF2B5EF4-FFF2-40B4-BE49-F238E27FC236}">
-                <a16:creationId xmlns:a16="http://schemas.microsoft.com/office/drawing/2014/main" id="{A618B71B-A2BB-41C6-828C-CD44E0424B9B}"/>
+                <a16:creationId xmlns:a16="http://schemas.microsoft.com/office/drawing/2014/main" id="{162C013A-ADD2-42B6-B32F-5EF2A6B53194}"/>
               </a:ext>
             </a:extLst>
           </p:cNvPr>
@@ -2563,7 +2563,7 @@
           <p:cNvPr id="6" name="Slide Number Placeholder 5">
             <a:extLst xmlns:a="http://schemas.openxmlformats.org/drawingml/2006/main">
               <a:ext uri="{FF2B5EF4-FFF2-40B4-BE49-F238E27FC236}">
-                <a16:creationId xmlns:a16="http://schemas.microsoft.com/office/drawing/2014/main" id="{4D229217-2BE8-4969-83DF-91BDA058BA0B}"/>
+                <a16:creationId xmlns:a16="http://schemas.microsoft.com/office/drawing/2014/main" id="{E2B04C45-F606-48C3-A1EA-56D626C62EED}"/>
               </a:ext>
             </a:extLst>
           </p:cNvPr>
@@ -2608,7 +2608,7 @@
           <p:cNvPr id="2" name="Title 1">
             <a:extLst xmlns:a="http://schemas.openxmlformats.org/drawingml/2006/main">
               <a:ext uri="{FF2B5EF4-FFF2-40B4-BE49-F238E27FC236}">
-                <a16:creationId xmlns:a16="http://schemas.microsoft.com/office/drawing/2014/main" id="{B301247E-6265-46EB-B042-D7DF871124FB}"/>
+                <a16:creationId xmlns:a16="http://schemas.microsoft.com/office/drawing/2014/main" id="{C5B09E22-298E-49E6-B662-2A985773939D}"/>
               </a:ext>
             </a:extLst>
           </p:cNvPr>
@@ -2646,7 +2646,7 @@
           <p:cNvPr id="3" name="Text Placeholder 2">
             <a:extLst xmlns:a="http://schemas.openxmlformats.org/drawingml/2006/main">
               <a:ext uri="{FF2B5EF4-FFF2-40B4-BE49-F238E27FC236}">
-                <a16:creationId xmlns:a16="http://schemas.microsoft.com/office/drawing/2014/main" id="{82B9AEF6-9C03-40C5-A2EE-4197EEB4FCAB}"/>
+                <a16:creationId xmlns:a16="http://schemas.microsoft.com/office/drawing/2014/main" id="{BDD508BF-1086-464A-9133-408A4849E229}"/>
               </a:ext>
             </a:extLst>
           </p:cNvPr>
@@ -2772,7 +2772,7 @@
           <p:cNvPr id="4" name="Date Placeholder 3">
             <a:extLst xmlns:a="http://schemas.openxmlformats.org/drawingml/2006/main">
               <a:ext uri="{FF2B5EF4-FFF2-40B4-BE49-F238E27FC236}">
-                <a16:creationId xmlns:a16="http://schemas.microsoft.com/office/drawing/2014/main" id="{00D16052-FC48-4A04-8568-57416ECBC64A}"/>
+                <a16:creationId xmlns:a16="http://schemas.microsoft.com/office/drawing/2014/main" id="{9DF35C86-CBED-462D-BDCE-B900B54746FB}"/>
               </a:ext>
             </a:extLst>
           </p:cNvPr>
@@ -2800,7 +2800,7 @@
           <p:cNvPr id="5" name="Footer Placeholder 4">
             <a:extLst xmlns:a="http://schemas.openxmlformats.org/drawingml/2006/main">
               <a:ext uri="{FF2B5EF4-FFF2-40B4-BE49-F238E27FC236}">
-                <a16:creationId xmlns:a16="http://schemas.microsoft.com/office/drawing/2014/main" id="{D9435F90-D516-4918-8DA1-456727A4C60C}"/>
+                <a16:creationId xmlns:a16="http://schemas.microsoft.com/office/drawing/2014/main" id="{8534D2D2-F0B8-4444-A445-5D935331D93B}"/>
               </a:ext>
             </a:extLst>
           </p:cNvPr>
@@ -2825,7 +2825,7 @@
           <p:cNvPr id="6" name="Slide Number Placeholder 5">
             <a:extLst xmlns:a="http://schemas.openxmlformats.org/drawingml/2006/main">
               <a:ext uri="{FF2B5EF4-FFF2-40B4-BE49-F238E27FC236}">
-                <a16:creationId xmlns:a16="http://schemas.microsoft.com/office/drawing/2014/main" id="{4C6E7816-B282-450F-AD26-2C74920E189F}"/>
+                <a16:creationId xmlns:a16="http://schemas.microsoft.com/office/drawing/2014/main" id="{E97AF52B-1CDE-4EFB-9505-798E5E0E2FDF}"/>
               </a:ext>
             </a:extLst>
           </p:cNvPr>
@@ -2870,7 +2870,7 @@
           <p:cNvPr id="2" name="Title 1">
             <a:extLst xmlns:a="http://schemas.openxmlformats.org/drawingml/2006/main">
               <a:ext uri="{FF2B5EF4-FFF2-40B4-BE49-F238E27FC236}">
-                <a16:creationId xmlns:a16="http://schemas.microsoft.com/office/drawing/2014/main" id="{AE626077-D5E5-410C-8707-A82256304791}"/>
+                <a16:creationId xmlns:a16="http://schemas.microsoft.com/office/drawing/2014/main" id="{54F35E30-4A82-4002-8AE9-C310537CEC56}"/>
               </a:ext>
             </a:extLst>
           </p:cNvPr>
@@ -2898,7 +2898,7 @@
           <p:cNvPr id="3" name="Content Placeholder 2">
             <a:extLst xmlns:a="http://schemas.openxmlformats.org/drawingml/2006/main">
               <a:ext uri="{FF2B5EF4-FFF2-40B4-BE49-F238E27FC236}">
-                <a16:creationId xmlns:a16="http://schemas.microsoft.com/office/drawing/2014/main" id="{E9A06E95-659D-4C50-A044-5617BBCEA644}"/>
+                <a16:creationId xmlns:a16="http://schemas.microsoft.com/office/drawing/2014/main" id="{1E877585-40E9-4D94-B2FE-1127F2B812DB}"/>
               </a:ext>
             </a:extLst>
           </p:cNvPr>
@@ -3003,7 +3003,7 @@
           <p:cNvPr id="4" name="Content Placeholder 3">
             <a:extLst xmlns:a="http://schemas.openxmlformats.org/drawingml/2006/main">
               <a:ext uri="{FF2B5EF4-FFF2-40B4-BE49-F238E27FC236}">
-                <a16:creationId xmlns:a16="http://schemas.microsoft.com/office/drawing/2014/main" id="{171639AA-00D3-49DA-BB35-D47DF77BBF9A}"/>
+                <a16:creationId xmlns:a16="http://schemas.microsoft.com/office/drawing/2014/main" id="{645EF75E-9F3B-4178-80B0-6E972C3A6B40}"/>
               </a:ext>
             </a:extLst>
           </p:cNvPr>
@@ -3108,7 +3108,7 @@
           <p:cNvPr id="5" name="Date Placeholder 4">
             <a:extLst xmlns:a="http://schemas.openxmlformats.org/drawingml/2006/main">
               <a:ext uri="{FF2B5EF4-FFF2-40B4-BE49-F238E27FC236}">
-                <a16:creationId xmlns:a16="http://schemas.microsoft.com/office/drawing/2014/main" id="{F8DFB4E3-D13A-44F5-997C-31AE3785E0ED}"/>
+                <a16:creationId xmlns:a16="http://schemas.microsoft.com/office/drawing/2014/main" id="{EC9898E4-C359-4CBB-A478-E67106D4C1AE}"/>
               </a:ext>
             </a:extLst>
           </p:cNvPr>
@@ -3136,7 +3136,7 @@
           <p:cNvPr id="6" name="Footer Placeholder 5">
             <a:extLst xmlns:a="http://schemas.openxmlformats.org/drawingml/2006/main">
               <a:ext uri="{FF2B5EF4-FFF2-40B4-BE49-F238E27FC236}">
-                <a16:creationId xmlns:a16="http://schemas.microsoft.com/office/drawing/2014/main" id="{54A70DE5-AF91-4859-981B-98C7641BE966}"/>
+                <a16:creationId xmlns:a16="http://schemas.microsoft.com/office/drawing/2014/main" id="{CF0E325F-2FFC-492E-92ED-4E70130CFFD1}"/>
               </a:ext>
             </a:extLst>
           </p:cNvPr>
@@ -3161,7 +3161,7 @@
           <p:cNvPr id="7" name="Slide Number Placeholder 6">
             <a:extLst xmlns:a="http://schemas.openxmlformats.org/drawingml/2006/main">
               <a:ext uri="{FF2B5EF4-FFF2-40B4-BE49-F238E27FC236}">
-                <a16:creationId xmlns:a16="http://schemas.microsoft.com/office/drawing/2014/main" id="{F1EA5517-7091-4147-A924-8D7722E2B203}"/>
+                <a16:creationId xmlns:a16="http://schemas.microsoft.com/office/drawing/2014/main" id="{7377E1FE-094B-458C-AD19-103F049E5758}"/>
               </a:ext>
             </a:extLst>
           </p:cNvPr>
@@ -3206,7 +3206,7 @@
           <p:cNvPr id="2" name="Title 1">
             <a:extLst xmlns:a="http://schemas.openxmlformats.org/drawingml/2006/main">
               <a:ext uri="{FF2B5EF4-FFF2-40B4-BE49-F238E27FC236}">
-                <a16:creationId xmlns:a16="http://schemas.microsoft.com/office/drawing/2014/main" id="{C1E42FEF-8782-407E-A41E-DE7F66A67025}"/>
+                <a16:creationId xmlns:a16="http://schemas.microsoft.com/office/drawing/2014/main" id="{774EB2D8-F5AC-4C0D-A3DB-EB4A4D66826E}"/>
               </a:ext>
             </a:extLst>
           </p:cNvPr>
@@ -3239,7 +3239,7 @@
           <p:cNvPr id="3" name="Text Placeholder 2">
             <a:extLst xmlns:a="http://schemas.openxmlformats.org/drawingml/2006/main">
               <a:ext uri="{FF2B5EF4-FFF2-40B4-BE49-F238E27FC236}">
-                <a16:creationId xmlns:a16="http://schemas.microsoft.com/office/drawing/2014/main" id="{F59AA7F3-E402-44AC-A604-D63C4E1AF92B}"/>
+                <a16:creationId xmlns:a16="http://schemas.microsoft.com/office/drawing/2014/main" id="{FA7634D2-C4B2-4742-A5D2-B9856DFFF4B4}"/>
               </a:ext>
             </a:extLst>
           </p:cNvPr>
@@ -3311,7 +3311,7 @@
           <p:cNvPr id="4" name="Content Placeholder 3">
             <a:extLst xmlns:a="http://schemas.openxmlformats.org/drawingml/2006/main">
               <a:ext uri="{FF2B5EF4-FFF2-40B4-BE49-F238E27FC236}">
-                <a16:creationId xmlns:a16="http://schemas.microsoft.com/office/drawing/2014/main" id="{EDEFD273-B834-42E3-894E-5AB626C693F5}"/>
+                <a16:creationId xmlns:a16="http://schemas.microsoft.com/office/drawing/2014/main" id="{0AE24FA5-EE45-4082-89C0-BE628BDC05EB}"/>
               </a:ext>
             </a:extLst>
           </p:cNvPr>
@@ -3416,7 +3416,7 @@
           <p:cNvPr id="5" name="Text Placeholder 4">
             <a:extLst xmlns:a="http://schemas.openxmlformats.org/drawingml/2006/main">
               <a:ext uri="{FF2B5EF4-FFF2-40B4-BE49-F238E27FC236}">
-                <a16:creationId xmlns:a16="http://schemas.microsoft.com/office/drawing/2014/main" id="{E64744B3-EDE8-4677-9194-01ABA99F207A}"/>
+                <a16:creationId xmlns:a16="http://schemas.microsoft.com/office/drawing/2014/main" id="{C188824F-3C9A-46EC-B442-DA32174BF835}"/>
               </a:ext>
             </a:extLst>
           </p:cNvPr>
@@ -3488,7 +3488,7 @@
           <p:cNvPr id="6" name="Content Placeholder 5">
             <a:extLst xmlns:a="http://schemas.openxmlformats.org/drawingml/2006/main">
               <a:ext uri="{FF2B5EF4-FFF2-40B4-BE49-F238E27FC236}">
-                <a16:creationId xmlns:a16="http://schemas.microsoft.com/office/drawing/2014/main" id="{77A14389-6008-44CC-ADFA-77E7C8B950C6}"/>
+                <a16:creationId xmlns:a16="http://schemas.microsoft.com/office/drawing/2014/main" id="{D12DEC92-54F2-4379-9E1E-AAB3EE7E2604}"/>
               </a:ext>
             </a:extLst>
           </p:cNvPr>
@@ -3593,7 +3593,7 @@
           <p:cNvPr id="7" name="Date Placeholder 6">
             <a:extLst xmlns:a="http://schemas.openxmlformats.org/drawingml/2006/main">
               <a:ext uri="{FF2B5EF4-FFF2-40B4-BE49-F238E27FC236}">
-                <a16:creationId xmlns:a16="http://schemas.microsoft.com/office/drawing/2014/main" id="{1BFCDD00-E976-4CA3-BFE2-C6D534FF030E}"/>
+                <a16:creationId xmlns:a16="http://schemas.microsoft.com/office/drawing/2014/main" id="{25784E6C-47DA-4925-AF79-1AB9C2EC0456}"/>
               </a:ext>
             </a:extLst>
           </p:cNvPr>
@@ -3621,7 +3621,7 @@
           <p:cNvPr id="8" name="Footer Placeholder 7">
             <a:extLst xmlns:a="http://schemas.openxmlformats.org/drawingml/2006/main">
               <a:ext uri="{FF2B5EF4-FFF2-40B4-BE49-F238E27FC236}">
-                <a16:creationId xmlns:a16="http://schemas.microsoft.com/office/drawing/2014/main" id="{E6B1B905-033A-498A-AB50-19C7B99A2CBD}"/>
+                <a16:creationId xmlns:a16="http://schemas.microsoft.com/office/drawing/2014/main" id="{34FD361F-CBD9-492C-9874-DACC61873261}"/>
               </a:ext>
             </a:extLst>
           </p:cNvPr>
@@ -3646,7 +3646,7 @@
           <p:cNvPr id="9" name="Slide Number Placeholder 8">
             <a:extLst xmlns:a="http://schemas.openxmlformats.org/drawingml/2006/main">
               <a:ext uri="{FF2B5EF4-FFF2-40B4-BE49-F238E27FC236}">
-                <a16:creationId xmlns:a16="http://schemas.microsoft.com/office/drawing/2014/main" id="{1918A968-4724-42BB-B78A-EAA98F669780}"/>
+                <a16:creationId xmlns:a16="http://schemas.microsoft.com/office/drawing/2014/main" id="{CD8D8422-71EA-4318-B2B5-E41A6D5D8F7B}"/>
               </a:ext>
             </a:extLst>
           </p:cNvPr>
@@ -3691,7 +3691,7 @@
           <p:cNvPr id="2" name="Title 1">
             <a:extLst xmlns:a="http://schemas.openxmlformats.org/drawingml/2006/main">
               <a:ext uri="{FF2B5EF4-FFF2-40B4-BE49-F238E27FC236}">
-                <a16:creationId xmlns:a16="http://schemas.microsoft.com/office/drawing/2014/main" id="{4E382995-18B2-4930-A43E-E48DBDF6461F}"/>
+                <a16:creationId xmlns:a16="http://schemas.microsoft.com/office/drawing/2014/main" id="{D8CC1A17-E5F3-4F53-BEA1-18A43D73C364}"/>
               </a:ext>
             </a:extLst>
           </p:cNvPr>
@@ -3719,7 +3719,7 @@
           <p:cNvPr id="3" name="Date Placeholder 2">
             <a:extLst xmlns:a="http://schemas.openxmlformats.org/drawingml/2006/main">
               <a:ext uri="{FF2B5EF4-FFF2-40B4-BE49-F238E27FC236}">
-                <a16:creationId xmlns:a16="http://schemas.microsoft.com/office/drawing/2014/main" id="{CED2F28E-2D96-44BE-AF71-892C45C91BC8}"/>
+                <a16:creationId xmlns:a16="http://schemas.microsoft.com/office/drawing/2014/main" id="{47C4C53B-2B1D-45F2-86C5-7A00624FBCDA}"/>
               </a:ext>
             </a:extLst>
           </p:cNvPr>
@@ -3747,7 +3747,7 @@
           <p:cNvPr id="4" name="Footer Placeholder 3">
             <a:extLst xmlns:a="http://schemas.openxmlformats.org/drawingml/2006/main">
               <a:ext uri="{FF2B5EF4-FFF2-40B4-BE49-F238E27FC236}">
-                <a16:creationId xmlns:a16="http://schemas.microsoft.com/office/drawing/2014/main" id="{47A273F3-350F-4CA7-9802-A4B0AC1342F3}"/>
+                <a16:creationId xmlns:a16="http://schemas.microsoft.com/office/drawing/2014/main" id="{C866B801-A57C-4E46-BA2A-C44900AF1A92}"/>
               </a:ext>
             </a:extLst>
           </p:cNvPr>
@@ -3772,7 +3772,7 @@
           <p:cNvPr id="5" name="Slide Number Placeholder 4">
             <a:extLst xmlns:a="http://schemas.openxmlformats.org/drawingml/2006/main">
               <a:ext uri="{FF2B5EF4-FFF2-40B4-BE49-F238E27FC236}">
-                <a16:creationId xmlns:a16="http://schemas.microsoft.com/office/drawing/2014/main" id="{FFF307C5-96D7-4D26-8815-F0F8FDD0C425}"/>
+                <a16:creationId xmlns:a16="http://schemas.microsoft.com/office/drawing/2014/main" id="{5A0670E0-0F2D-4F59-A9F0-82CFBBEAF1A6}"/>
               </a:ext>
             </a:extLst>
           </p:cNvPr>
@@ -3817,7 +3817,7 @@
           <p:cNvPr id="2" name="Date Placeholder 1">
             <a:extLst xmlns:a="http://schemas.openxmlformats.org/drawingml/2006/main">
               <a:ext uri="{FF2B5EF4-FFF2-40B4-BE49-F238E27FC236}">
-                <a16:creationId xmlns:a16="http://schemas.microsoft.com/office/drawing/2014/main" id="{B499E12C-9480-4A90-8A35-FD88ED29E9D9}"/>
+                <a16:creationId xmlns:a16="http://schemas.microsoft.com/office/drawing/2014/main" id="{1B72F6A2-DC5E-4870-8D5A-A5ACF666A072}"/>
               </a:ext>
             </a:extLst>
           </p:cNvPr>
@@ -3845,7 +3845,7 @@
           <p:cNvPr id="3" name="Footer Placeholder 2">
             <a:extLst xmlns:a="http://schemas.openxmlformats.org/drawingml/2006/main">
               <a:ext uri="{FF2B5EF4-FFF2-40B4-BE49-F238E27FC236}">
-                <a16:creationId xmlns:a16="http://schemas.microsoft.com/office/drawing/2014/main" id="{641E59A9-02D9-49C5-A850-BF5DE06459E7}"/>
+                <a16:creationId xmlns:a16="http://schemas.microsoft.com/office/drawing/2014/main" id="{41389574-CD78-4995-8DA5-1A16CDCED958}"/>
               </a:ext>
             </a:extLst>
           </p:cNvPr>
@@ -3870,7 +3870,7 @@
           <p:cNvPr id="4" name="Slide Number Placeholder 3">
             <a:extLst xmlns:a="http://schemas.openxmlformats.org/drawingml/2006/main">
               <a:ext uri="{FF2B5EF4-FFF2-40B4-BE49-F238E27FC236}">
-                <a16:creationId xmlns:a16="http://schemas.microsoft.com/office/drawing/2014/main" id="{B76A17DF-7A42-460F-ACB4-60813DA8E5BA}"/>
+                <a16:creationId xmlns:a16="http://schemas.microsoft.com/office/drawing/2014/main" id="{47EB52AF-E945-40CA-BC97-1C1AED0BFBE3}"/>
               </a:ext>
             </a:extLst>
           </p:cNvPr>
@@ -3915,7 +3915,7 @@
           <p:cNvPr id="2" name="Title 1">
             <a:extLst xmlns:a="http://schemas.openxmlformats.org/drawingml/2006/main">
               <a:ext uri="{FF2B5EF4-FFF2-40B4-BE49-F238E27FC236}">
-                <a16:creationId xmlns:a16="http://schemas.microsoft.com/office/drawing/2014/main" id="{3C0DFFD5-5685-43C7-A397-4B82920847E5}"/>
+                <a16:creationId xmlns:a16="http://schemas.microsoft.com/office/drawing/2014/main" id="{82FCEADD-D66E-423D-9B91-4174C6E9F363}"/>
               </a:ext>
             </a:extLst>
           </p:cNvPr>
@@ -3953,7 +3953,7 @@
           <p:cNvPr id="3" name="Content Placeholder 2">
             <a:extLst xmlns:a="http://schemas.openxmlformats.org/drawingml/2006/main">
               <a:ext uri="{FF2B5EF4-FFF2-40B4-BE49-F238E27FC236}">
-                <a16:creationId xmlns:a16="http://schemas.microsoft.com/office/drawing/2014/main" id="{B0896747-69B8-490F-AE06-568E978B8601}"/>
+                <a16:creationId xmlns:a16="http://schemas.microsoft.com/office/drawing/2014/main" id="{38493421-6C60-454B-B75B-3675109556A7}"/>
               </a:ext>
             </a:extLst>
           </p:cNvPr>
@@ -4058,7 +4058,7 @@
           <p:cNvPr id="4" name="Text Placeholder 3">
             <a:extLst xmlns:a="http://schemas.openxmlformats.org/drawingml/2006/main">
               <a:ext uri="{FF2B5EF4-FFF2-40B4-BE49-F238E27FC236}">
-                <a16:creationId xmlns:a16="http://schemas.microsoft.com/office/drawing/2014/main" id="{4E35F372-2BFC-4007-9C66-DC142A3784F7}"/>
+                <a16:creationId xmlns:a16="http://schemas.microsoft.com/office/drawing/2014/main" id="{0621BF76-3C79-4EB9-8549-7758CF59B179}"/>
               </a:ext>
             </a:extLst>
           </p:cNvPr>
@@ -4130,7 +4130,7 @@
           <p:cNvPr id="5" name="Date Placeholder 4">
             <a:extLst xmlns:a="http://schemas.openxmlformats.org/drawingml/2006/main">
               <a:ext uri="{FF2B5EF4-FFF2-40B4-BE49-F238E27FC236}">
-                <a16:creationId xmlns:a16="http://schemas.microsoft.com/office/drawing/2014/main" id="{05B080BD-7DD9-43A7-81C0-D8FF6DAFE8A9}"/>
+                <a16:creationId xmlns:a16="http://schemas.microsoft.com/office/drawing/2014/main" id="{9729EEB0-FB44-4209-ADBC-A7E868AD4535}"/>
               </a:ext>
             </a:extLst>
           </p:cNvPr>
@@ -4158,7 +4158,7 @@
           <p:cNvPr id="6" name="Footer Placeholder 5">
             <a:extLst xmlns:a="http://schemas.openxmlformats.org/drawingml/2006/main">
               <a:ext uri="{FF2B5EF4-FFF2-40B4-BE49-F238E27FC236}">
-                <a16:creationId xmlns:a16="http://schemas.microsoft.com/office/drawing/2014/main" id="{09052CD8-E69C-462E-9426-43E5906E917D}"/>
+                <a16:creationId xmlns:a16="http://schemas.microsoft.com/office/drawing/2014/main" id="{362D16D3-5020-43FA-ABAA-74DC1011A525}"/>
               </a:ext>
             </a:extLst>
           </p:cNvPr>
@@ -4183,7 +4183,7 @@
           <p:cNvPr id="7" name="Slide Number Placeholder 6">
             <a:extLst xmlns:a="http://schemas.openxmlformats.org/drawingml/2006/main">
               <a:ext uri="{FF2B5EF4-FFF2-40B4-BE49-F238E27FC236}">
-                <a16:creationId xmlns:a16="http://schemas.microsoft.com/office/drawing/2014/main" id="{6DAC0015-F48F-4708-8960-7D36EC74514C}"/>
+                <a16:creationId xmlns:a16="http://schemas.microsoft.com/office/drawing/2014/main" id="{074CC201-E333-4AC8-B32F-71C89A17C7B3}"/>
               </a:ext>
             </a:extLst>
           </p:cNvPr>
@@ -4228,7 +4228,7 @@
           <p:cNvPr id="2" name="Title 1">
             <a:extLst xmlns:a="http://schemas.openxmlformats.org/drawingml/2006/main">
               <a:ext uri="{FF2B5EF4-FFF2-40B4-BE49-F238E27FC236}">
-                <a16:creationId xmlns:a16="http://schemas.microsoft.com/office/drawing/2014/main" id="{7B5CF778-DE2E-40E4-8FCE-4BA5554DC450}"/>
+                <a16:creationId xmlns:a16="http://schemas.microsoft.com/office/drawing/2014/main" id="{E568D38A-7864-46FF-848C-476B65806278}"/>
               </a:ext>
             </a:extLst>
           </p:cNvPr>
@@ -4266,7 +4266,7 @@
           <p:cNvPr id="3" name="Picture Placeholder 2">
             <a:extLst xmlns:a="http://schemas.openxmlformats.org/drawingml/2006/main">
               <a:ext uri="{FF2B5EF4-FFF2-40B4-BE49-F238E27FC236}">
-                <a16:creationId xmlns:a16="http://schemas.microsoft.com/office/drawing/2014/main" id="{3716F194-B4CD-40FA-B689-53AC6A6C358D}"/>
+                <a16:creationId xmlns:a16="http://schemas.microsoft.com/office/drawing/2014/main" id="{C1A0EA41-341C-4CC6-BCF9-92324802193B}"/>
               </a:ext>
             </a:extLst>
           </p:cNvPr>
@@ -4333,7 +4333,7 @@
           <p:cNvPr id="4" name="Text Placeholder 3">
             <a:extLst xmlns:a="http://schemas.openxmlformats.org/drawingml/2006/main">
               <a:ext uri="{FF2B5EF4-FFF2-40B4-BE49-F238E27FC236}">
-                <a16:creationId xmlns:a16="http://schemas.microsoft.com/office/drawing/2014/main" id="{BD425812-31AD-4815-A3F0-1205F69DEE1B}"/>
+                <a16:creationId xmlns:a16="http://schemas.microsoft.com/office/drawing/2014/main" id="{677424CC-BF97-42BB-A30B-C26A11D36C2D}"/>
               </a:ext>
             </a:extLst>
           </p:cNvPr>
@@ -4405,7 +4405,7 @@
           <p:cNvPr id="5" name="Date Placeholder 4">
             <a:extLst xmlns:a="http://schemas.openxmlformats.org/drawingml/2006/main">
               <a:ext uri="{FF2B5EF4-FFF2-40B4-BE49-F238E27FC236}">
-                <a16:creationId xmlns:a16="http://schemas.microsoft.com/office/drawing/2014/main" id="{58D318DA-A50C-4E60-9249-13C0848DB623}"/>
+                <a16:creationId xmlns:a16="http://schemas.microsoft.com/office/drawing/2014/main" id="{AD61D148-47A8-4CA1-9C30-1924B3BFA78B}"/>
               </a:ext>
             </a:extLst>
           </p:cNvPr>
@@ -4433,7 +4433,7 @@
           <p:cNvPr id="6" name="Footer Placeholder 5">
             <a:extLst xmlns:a="http://schemas.openxmlformats.org/drawingml/2006/main">
               <a:ext uri="{FF2B5EF4-FFF2-40B4-BE49-F238E27FC236}">
-                <a16:creationId xmlns:a16="http://schemas.microsoft.com/office/drawing/2014/main" id="{F3D2EB50-363D-467D-9ACB-F168CD038366}"/>
+                <a16:creationId xmlns:a16="http://schemas.microsoft.com/office/drawing/2014/main" id="{ADC443DF-E923-45EB-9755-84F35DF9122C}"/>
               </a:ext>
             </a:extLst>
           </p:cNvPr>
@@ -4458,7 +4458,7 @@
           <p:cNvPr id="7" name="Slide Number Placeholder 6">
             <a:extLst xmlns:a="http://schemas.openxmlformats.org/drawingml/2006/main">
               <a:ext uri="{FF2B5EF4-FFF2-40B4-BE49-F238E27FC236}">
-                <a16:creationId xmlns:a16="http://schemas.microsoft.com/office/drawing/2014/main" id="{73BE029D-B684-4013-8721-2043B0CE28B9}"/>
+                <a16:creationId xmlns:a16="http://schemas.microsoft.com/office/drawing/2014/main" id="{E6C9115D-B885-4405-8385-FFDAA6B0EC97}"/>
               </a:ext>
             </a:extLst>
           </p:cNvPr>
@@ -4508,7 +4508,7 @@
           <p:cNvPr id="2" name="Title Placeholder 1">
             <a:extLst xmlns:a="http://schemas.openxmlformats.org/drawingml/2006/main">
               <a:ext uri="{FF2B5EF4-FFF2-40B4-BE49-F238E27FC236}">
-                <a16:creationId xmlns:a16="http://schemas.microsoft.com/office/drawing/2014/main" id="{E0EEEC88-DBAE-449B-9002-4B4C91875C30}"/>
+                <a16:creationId xmlns:a16="http://schemas.microsoft.com/office/drawing/2014/main" id="{CCC52AA2-CC93-4590-AFFF-97D99B6E16D7}"/>
               </a:ext>
             </a:extLst>
           </p:cNvPr>
@@ -4546,7 +4546,7 @@
           <p:cNvPr id="3" name="Text Placeholder 2">
             <a:extLst xmlns:a="http://schemas.openxmlformats.org/drawingml/2006/main">
               <a:ext uri="{FF2B5EF4-FFF2-40B4-BE49-F238E27FC236}">
-                <a16:creationId xmlns:a16="http://schemas.microsoft.com/office/drawing/2014/main" id="{A8F47AD5-4482-4BD2-A519-DC1075F317E5}"/>
+                <a16:creationId xmlns:a16="http://schemas.microsoft.com/office/drawing/2014/main" id="{7BD14768-B128-4B7C-A25C-64A805443697}"/>
               </a:ext>
             </a:extLst>
           </p:cNvPr>
@@ -4619,7 +4619,7 @@
           <p:cNvPr id="4" name="Date Placeholder 3">
             <a:extLst xmlns:a="http://schemas.openxmlformats.org/drawingml/2006/main">
               <a:ext uri="{FF2B5EF4-FFF2-40B4-BE49-F238E27FC236}">
-                <a16:creationId xmlns:a16="http://schemas.microsoft.com/office/drawing/2014/main" id="{50C5D670-763E-4153-8469-01D9A4D6E91A}"/>
+                <a16:creationId xmlns:a16="http://schemas.microsoft.com/office/drawing/2014/main" id="{FED28B17-D846-489C-8282-1D2FF8AFA289}"/>
               </a:ext>
             </a:extLst>
           </p:cNvPr>
@@ -4666,7 +4666,7 @@
           <p:cNvPr id="5" name="Footer Placeholder 4">
             <a:extLst xmlns:a="http://schemas.openxmlformats.org/drawingml/2006/main">
               <a:ext uri="{FF2B5EF4-FFF2-40B4-BE49-F238E27FC236}">
-                <a16:creationId xmlns:a16="http://schemas.microsoft.com/office/drawing/2014/main" id="{B04C9047-3EE5-49A4-A542-D07CCC356427}"/>
+                <a16:creationId xmlns:a16="http://schemas.microsoft.com/office/drawing/2014/main" id="{D809E257-664E-42B0-81FA-56248D5905B4}"/>
               </a:ext>
             </a:extLst>
           </p:cNvPr>
@@ -4710,7 +4710,7 @@
           <p:cNvPr id="6" name="Slide Number Placeholder 5">
             <a:extLst xmlns:a="http://schemas.openxmlformats.org/drawingml/2006/main">
               <a:ext uri="{FF2B5EF4-FFF2-40B4-BE49-F238E27FC236}">
-                <a16:creationId xmlns:a16="http://schemas.microsoft.com/office/drawing/2014/main" id="{AA21E6D0-0FC2-4B20-ABD5-07AD60CEFCAD}"/>
+                <a16:creationId xmlns:a16="http://schemas.microsoft.com/office/drawing/2014/main" id="{8952303B-2948-4EB5-9A99-8E46DAE69043}"/>
               </a:ext>
             </a:extLst>
           </p:cNvPr>
@@ -4756,17 +4756,17 @@
   </p:cSld>
   <p:clrMap bg1="lt1" tx1="dk1" bg2="lt2" tx2="dk2" accent1="accent1" accent2="accent2" accent3="accent3" accent4="accent4" accent5="accent5" accent6="accent6" hlink="hlink" folHlink="folHlink"/>
   <p:sldLayoutIdLst>
-    <p:sldLayoutId xmlns:r="http://schemas.openxmlformats.org/officeDocument/2006/relationships" id="2147483649" r:id="R0f228906f2274515"/>
-    <p:sldLayoutId xmlns:r="http://schemas.openxmlformats.org/officeDocument/2006/relationships" id="2147483650" r:id="R81d44deb74d94a16"/>
-    <p:sldLayoutId xmlns:r="http://schemas.openxmlformats.org/officeDocument/2006/relationships" id="2147483651" r:id="R693338acdb9d432c"/>
-    <p:sldLayoutId xmlns:r="http://schemas.openxmlformats.org/officeDocument/2006/relationships" id="2147483652" r:id="R011bd35c68f444e8"/>
-    <p:sldLayoutId xmlns:r="http://schemas.openxmlformats.org/officeDocument/2006/relationships" id="2147483653" r:id="R17defdd7eed1420b"/>
-    <p:sldLayoutId xmlns:r="http://schemas.openxmlformats.org/officeDocument/2006/relationships" id="2147483654" r:id="R7328ba6ebebb49a1"/>
-    <p:sldLayoutId xmlns:r="http://schemas.openxmlformats.org/officeDocument/2006/relationships" id="2147483655" r:id="Re5463081fb97497d"/>
-    <p:sldLayoutId xmlns:r="http://schemas.openxmlformats.org/officeDocument/2006/relationships" id="2147483656" r:id="Rebe586ffc6914a4e"/>
-    <p:sldLayoutId xmlns:r="http://schemas.openxmlformats.org/officeDocument/2006/relationships" id="2147483657" r:id="Rc7018df7736c4e7c"/>
-    <p:sldLayoutId xmlns:r="http://schemas.openxmlformats.org/officeDocument/2006/relationships" id="2147483658" r:id="R76395670f4af437f"/>
-    <p:sldLayoutId xmlns:r="http://schemas.openxmlformats.org/officeDocument/2006/relationships" id="2147483659" r:id="R9d4259d793824e1d"/>
+    <p:sldLayoutId xmlns:r="http://schemas.openxmlformats.org/officeDocument/2006/relationships" id="2147483649" r:id="Rf160aadebd8b48c9"/>
+    <p:sldLayoutId xmlns:r="http://schemas.openxmlformats.org/officeDocument/2006/relationships" id="2147483650" r:id="R5306861126404cc4"/>
+    <p:sldLayoutId xmlns:r="http://schemas.openxmlformats.org/officeDocument/2006/relationships" id="2147483651" r:id="R4ddcdede915846dd"/>
+    <p:sldLayoutId xmlns:r="http://schemas.openxmlformats.org/officeDocument/2006/relationships" id="2147483652" r:id="Re06c5e2f4e504e5a"/>
+    <p:sldLayoutId xmlns:r="http://schemas.openxmlformats.org/officeDocument/2006/relationships" id="2147483653" r:id="R86184ba5b04f4d76"/>
+    <p:sldLayoutId xmlns:r="http://schemas.openxmlformats.org/officeDocument/2006/relationships" id="2147483654" r:id="R0f778510db694e91"/>
+    <p:sldLayoutId xmlns:r="http://schemas.openxmlformats.org/officeDocument/2006/relationships" id="2147483655" r:id="R6e3136ccfd424d95"/>
+    <p:sldLayoutId xmlns:r="http://schemas.openxmlformats.org/officeDocument/2006/relationships" id="2147483656" r:id="R76c5bc4d3cc64a91"/>
+    <p:sldLayoutId xmlns:r="http://schemas.openxmlformats.org/officeDocument/2006/relationships" id="2147483657" r:id="R7954eaaa1f124c7e"/>
+    <p:sldLayoutId xmlns:r="http://schemas.openxmlformats.org/officeDocument/2006/relationships" id="2147483658" r:id="R7075f032f0c148eb"/>
+    <p:sldLayoutId xmlns:r="http://schemas.openxmlformats.org/officeDocument/2006/relationships" id="2147483659" r:id="R5c62bf705a0c49f4"/>
   </p:sldLayoutIdLst>
   <p:txStyles>
     <p:titleStyle>
@@ -5779,7 +5779,7 @@
           <c:idx val="0"/>
           <c:order val="0"/>
           <c:tx>
-            <c:v>僅加緩衝（方案P2）</c:v>
+            <c:v>僅加緩衝（P2）</c:v>
           </c:tx>
           <c:spPr>
             <a:ln xmlns:a="http://schemas.openxmlformats.org/drawingml/2006/main" w="38100">
@@ -5851,7 +5851,7 @@
           <c:idx val="1"/>
           <c:order val="1"/>
           <c:tx>
-            <c:v>聯合改善（方案P4）</c:v>
+            <c:v>聯合改善（P4）</c:v>
           </c:tx>
           <c:spPr>
             <a:ln xmlns:a="http://schemas.openxmlformats.org/drawingml/2006/main" w="38100">
@@ -6127,7 +6127,7 @@
           <p:cNvPr id="2" name="Freeform 2">
             <a:extLst xmlns:a="http://schemas.openxmlformats.org/drawingml/2006/main">
               <a:ext uri="{FF2B5EF4-FFF2-40B4-BE49-F238E27FC236}">
-                <a16:creationId xmlns:a16="http://schemas.microsoft.com/office/drawing/2014/main" id="{04ECE57F-F9E8-4609-BF51-B64E9900388A}"/>
+                <a16:creationId xmlns:a16="http://schemas.microsoft.com/office/drawing/2014/main" id="{1038CC73-0A7C-4D39-A11B-C4B9B3DF90BC}"/>
               </a:ext>
             </a:extLst>
           </p:cNvPr>
@@ -6165,7 +6165,7 @@
             </a:pathLst>
           </a:custGeom>
           <a:blipFill xmlns:a="http://schemas.openxmlformats.org/drawingml/2006/main">
-            <a:blip xmlns:r="http://schemas.openxmlformats.org/officeDocument/2006/relationships" r:embed="Rfe27aea067ea4bb4"/>
+            <a:blip xmlns:r="http://schemas.openxmlformats.org/officeDocument/2006/relationships" r:embed="R115375dfa9c24c5b"/>
             <a:stretch>
               <a:fillRect l="-4156" t="0" r="-2479" b="-18484"/>
             </a:stretch>
@@ -6177,7 +6177,7 @@
           <p:cNvPr id="3" name="Freeform 3">
             <a:extLst xmlns:a="http://schemas.openxmlformats.org/drawingml/2006/main">
               <a:ext uri="{FF2B5EF4-FFF2-40B4-BE49-F238E27FC236}">
-                <a16:creationId xmlns:a16="http://schemas.microsoft.com/office/drawing/2014/main" id="{B39B4459-E7EA-4F33-A8F2-869E04439373}"/>
+                <a16:creationId xmlns:a16="http://schemas.microsoft.com/office/drawing/2014/main" id="{2168D3BD-4BF3-48CF-B32A-07E50B754A7B}"/>
               </a:ext>
             </a:extLst>
           </p:cNvPr>
@@ -6225,7 +6225,7 @@
           <p:cNvPr id="5" name="Freeform 5">
             <a:extLst xmlns:a="http://schemas.openxmlformats.org/drawingml/2006/main">
               <a:ext uri="{FF2B5EF4-FFF2-40B4-BE49-F238E27FC236}">
-                <a16:creationId xmlns:a16="http://schemas.microsoft.com/office/drawing/2014/main" id="{DA5EFA2C-08F3-4BBA-9FD3-8F005BAE154F}"/>
+                <a16:creationId xmlns:a16="http://schemas.microsoft.com/office/drawing/2014/main" id="{A344B12F-E7E3-4F4F-B39A-D5994A5ED75E}"/>
               </a:ext>
             </a:extLst>
           </p:cNvPr>
@@ -6299,7 +6299,7 @@
           <p:cNvPr id="6" name="TextBox 6">
             <a:extLst xmlns:a="http://schemas.openxmlformats.org/drawingml/2006/main">
               <a:ext uri="{FF2B5EF4-FFF2-40B4-BE49-F238E27FC236}">
-                <a16:creationId xmlns:a16="http://schemas.microsoft.com/office/drawing/2014/main" id="{315A9547-CF70-48D6-8A7A-8096E5FB885E}"/>
+                <a16:creationId xmlns:a16="http://schemas.microsoft.com/office/drawing/2014/main" id="{6E645BBB-B5EC-4C1B-97DD-15170F49529C}"/>
               </a:ext>
             </a:extLst>
           </p:cNvPr>
@@ -6335,7 +6335,7 @@
           <p:cNvPr id="7" name="Freeform 7">
             <a:extLst xmlns:a="http://schemas.openxmlformats.org/drawingml/2006/main">
               <a:ext uri="{FF2B5EF4-FFF2-40B4-BE49-F238E27FC236}">
-                <a16:creationId xmlns:a16="http://schemas.microsoft.com/office/drawing/2014/main" id="{E2A5536F-652A-4566-A8D5-B6C0467EE405}"/>
+                <a16:creationId xmlns:a16="http://schemas.microsoft.com/office/drawing/2014/main" id="{4DC7E806-81E0-452D-A3FC-33E1C6DC8D0F}"/>
               </a:ext>
             </a:extLst>
           </p:cNvPr>
@@ -6373,10 +6373,10 @@
             </a:pathLst>
           </a:custGeom>
           <a:blipFill xmlns:a="http://schemas.openxmlformats.org/drawingml/2006/main">
-            <a:blip xmlns:r="http://schemas.openxmlformats.org/officeDocument/2006/relationships" r:embed="Reb83d089010a41fd">
+            <a:blip xmlns:r="http://schemas.openxmlformats.org/officeDocument/2006/relationships" r:embed="Re21162ad9ccb413a">
               <a:extLst>
                 <a:ext uri="{96DAC541-7B7A-43D3-8B79-37D633B846F1}">
-                  <asvg:svgBlip xmlns:asvg="http://schemas.microsoft.com/office/drawing/2016/SVG/main" r:embed="Rb4a8cc89b8ee4c74"/>
+                  <asvg:svgBlip xmlns:asvg="http://schemas.microsoft.com/office/drawing/2016/SVG/main" r:embed="R45457e3aed4247ff"/>
                 </a:ext>
               </a:extLst>
             </a:blip>
@@ -6391,7 +6391,7 @@
           <p:cNvPr id="8" name="Freeform 8">
             <a:extLst xmlns:a="http://schemas.openxmlformats.org/drawingml/2006/main">
               <a:ext uri="{FF2B5EF4-FFF2-40B4-BE49-F238E27FC236}">
-                <a16:creationId xmlns:a16="http://schemas.microsoft.com/office/drawing/2014/main" id="{8C7665B2-0DAF-45F0-B19B-76F4CC18C532}"/>
+                <a16:creationId xmlns:a16="http://schemas.microsoft.com/office/drawing/2014/main" id="{AFFC8262-5E01-4B46-99EF-E37EBF333C2F}"/>
               </a:ext>
             </a:extLst>
           </p:cNvPr>
@@ -6429,10 +6429,10 @@
             </a:pathLst>
           </a:custGeom>
           <a:blipFill xmlns:a="http://schemas.openxmlformats.org/drawingml/2006/main">
-            <a:blip xmlns:r="http://schemas.openxmlformats.org/officeDocument/2006/relationships" r:embed="Reb83d089010a41fd">
+            <a:blip xmlns:r="http://schemas.openxmlformats.org/officeDocument/2006/relationships" r:embed="Re21162ad9ccb413a">
               <a:extLst>
                 <a:ext uri="{96DAC541-7B7A-43D3-8B79-37D633B846F1}">
-                  <asvg:svgBlip xmlns:asvg="http://schemas.microsoft.com/office/drawing/2016/SVG/main" r:embed="Rb4a8cc89b8ee4c74"/>
+                  <asvg:svgBlip xmlns:asvg="http://schemas.microsoft.com/office/drawing/2016/SVG/main" r:embed="R45457e3aed4247ff"/>
                 </a:ext>
               </a:extLst>
             </a:blip>
@@ -6447,7 +6447,7 @@
           <p:cNvPr id="9" name="TextBox 9">
             <a:extLst xmlns:a="http://schemas.openxmlformats.org/drawingml/2006/main">
               <a:ext uri="{FF2B5EF4-FFF2-40B4-BE49-F238E27FC236}">
-                <a16:creationId xmlns:a16="http://schemas.microsoft.com/office/drawing/2014/main" id="{6B38FD18-B439-4399-9653-8F246FABCE67}"/>
+                <a16:creationId xmlns:a16="http://schemas.microsoft.com/office/drawing/2014/main" id="{6614D20D-8AC5-47B6-86A3-23527964CE4C}"/>
               </a:ext>
             </a:extLst>
           </p:cNvPr>
@@ -6499,7 +6499,7 @@
           <p:cNvPr id="10" name="TextBox 10">
             <a:extLst xmlns:a="http://schemas.openxmlformats.org/drawingml/2006/main">
               <a:ext uri="{FF2B5EF4-FFF2-40B4-BE49-F238E27FC236}">
-                <a16:creationId xmlns:a16="http://schemas.microsoft.com/office/drawing/2014/main" id="{96E36E80-AFCF-4D09-9E99-10E0B073AE0C}"/>
+                <a16:creationId xmlns:a16="http://schemas.microsoft.com/office/drawing/2014/main" id="{B3D2A060-B787-4CA7-A523-CFFD97E7E6A1}"/>
               </a:ext>
             </a:extLst>
           </p:cNvPr>
@@ -6551,7 +6551,7 @@
           <p:cNvPr id="11" name="TextBox 11">
             <a:extLst xmlns:a="http://schemas.openxmlformats.org/drawingml/2006/main">
               <a:ext uri="{FF2B5EF4-FFF2-40B4-BE49-F238E27FC236}">
-                <a16:creationId xmlns:a16="http://schemas.microsoft.com/office/drawing/2014/main" id="{5957D054-BBBC-4459-B7DA-0F580BD82969}"/>
+                <a16:creationId xmlns:a16="http://schemas.microsoft.com/office/drawing/2014/main" id="{27482CA7-4299-4538-97B4-E70D6719F40C}"/>
               </a:ext>
             </a:extLst>
           </p:cNvPr>
@@ -6712,7 +6712,7 @@
           <p:cNvPr id="12" name="TextBox 12">
             <a:extLst xmlns:a="http://schemas.openxmlformats.org/drawingml/2006/main">
               <a:ext uri="{FF2B5EF4-FFF2-40B4-BE49-F238E27FC236}">
-                <a16:creationId xmlns:a16="http://schemas.microsoft.com/office/drawing/2014/main" id="{5309C0A9-6EDC-48CD-B1CA-568C588F06F0}"/>
+                <a16:creationId xmlns:a16="http://schemas.microsoft.com/office/drawing/2014/main" id="{0E74FFB3-FD8F-4981-AEC4-1390D0D974E1}"/>
               </a:ext>
             </a:extLst>
           </p:cNvPr>
@@ -6764,7 +6764,7 @@
           <p:cNvPr id="13" name="Freeform 13">
             <a:extLst xmlns:a="http://schemas.openxmlformats.org/drawingml/2006/main">
               <a:ext uri="{FF2B5EF4-FFF2-40B4-BE49-F238E27FC236}">
-                <a16:creationId xmlns:a16="http://schemas.microsoft.com/office/drawing/2014/main" id="{07390AD5-AEC2-4258-8680-573659FE1D52}"/>
+                <a16:creationId xmlns:a16="http://schemas.microsoft.com/office/drawing/2014/main" id="{49C603D9-8C8F-4D07-BB0E-F6D7B12DF4C8}"/>
               </a:ext>
             </a:extLst>
           </p:cNvPr>
@@ -6812,7 +6812,7 @@
           <p:cNvPr id="14" name="TextBox 14">
             <a:extLst xmlns:a="http://schemas.openxmlformats.org/drawingml/2006/main">
               <a:ext uri="{FF2B5EF4-FFF2-40B4-BE49-F238E27FC236}">
-                <a16:creationId xmlns:a16="http://schemas.microsoft.com/office/drawing/2014/main" id="{245F346B-A86C-4BCC-9627-55F2FEE12B2F}"/>
+                <a16:creationId xmlns:a16="http://schemas.microsoft.com/office/drawing/2014/main" id="{EF25FDE3-C9AB-4CEF-86E6-5AB29F850565}"/>
               </a:ext>
             </a:extLst>
           </p:cNvPr>
@@ -6866,7 +6866,7 @@
           <p:cNvPr id="15" name="">
             <a:extLst xmlns:a="http://schemas.openxmlformats.org/drawingml/2006/main">
               <a:ext uri="{FF2B5EF4-FFF2-40B4-BE49-F238E27FC236}">
-                <a16:creationId xmlns:a16="http://schemas.microsoft.com/office/drawing/2014/main" id="{68CFB383-7CFD-4BE8-8C0E-D7EE1AC0D162}"/>
+                <a16:creationId xmlns:a16="http://schemas.microsoft.com/office/drawing/2014/main" id="{7C1AEF01-7794-423D-A2AF-7FA94A156BD8}"/>
               </a:ext>
             </a:extLst>
           </p:cNvPr>
@@ -6876,7 +6876,7 @@
           <p:nvPr/>
         </p:nvPicPr>
         <p:blipFill>
-          <a:blip xmlns:r="http://schemas.openxmlformats.org/officeDocument/2006/relationships" xmlns:a="http://schemas.openxmlformats.org/drawingml/2006/main" r:embed="Raed7de2da3b44ad6"/>
+          <a:blip xmlns:r="http://schemas.openxmlformats.org/officeDocument/2006/relationships" xmlns:a="http://schemas.openxmlformats.org/drawingml/2006/main" r:embed="R11cce451b26244a4"/>
           <a:srcRect xmlns:a="http://schemas.openxmlformats.org/drawingml/2006/main" l="0" t="15880" r="23187" b="0"/>
           <a:stretch xmlns:a="http://schemas.openxmlformats.org/drawingml/2006/main"/>
         </p:blipFill>
@@ -6895,7 +6895,7 @@
           <p:cNvPr id="16" name="">
             <a:extLst xmlns:a="http://schemas.openxmlformats.org/drawingml/2006/main">
               <a:ext uri="{FF2B5EF4-FFF2-40B4-BE49-F238E27FC236}">
-                <a16:creationId xmlns:a16="http://schemas.microsoft.com/office/drawing/2014/main" id="{B6213251-659D-4AA5-ABE4-C7799EDA74CC}"/>
+                <a16:creationId xmlns:a16="http://schemas.microsoft.com/office/drawing/2014/main" id="{93A1FF6C-57A7-4C9D-955B-049F41AAFDE1}"/>
               </a:ext>
             </a:extLst>
           </p:cNvPr>
@@ -6905,7 +6905,7 @@
           <p:nvPr/>
         </p:nvPicPr>
         <p:blipFill>
-          <a:blip xmlns:r="http://schemas.openxmlformats.org/officeDocument/2006/relationships" xmlns:a="http://schemas.openxmlformats.org/drawingml/2006/main" r:embed="Raf79b6a7549a4316"/>
+          <a:blip xmlns:r="http://schemas.openxmlformats.org/officeDocument/2006/relationships" xmlns:a="http://schemas.openxmlformats.org/drawingml/2006/main" r:embed="R377477db3ba54649"/>
           <a:srcRect xmlns:a="http://schemas.openxmlformats.org/drawingml/2006/main" l="13490" t="35208" r="0" b="0"/>
           <a:stretch xmlns:a="http://schemas.openxmlformats.org/drawingml/2006/main"/>
         </p:blipFill>
@@ -6924,7 +6924,7 @@
           <p:cNvPr id="17" name="內容_1_循環箱逆向物流">
             <a:extLst xmlns:a="http://schemas.openxmlformats.org/drawingml/2006/main">
               <a:ext uri="{FF2B5EF4-FFF2-40B4-BE49-F238E27FC236}">
-                <a16:creationId xmlns:a16="http://schemas.microsoft.com/office/drawing/2014/main" id="{950FA09E-01CB-4583-A363-16D9BEC4770A}"/>
+                <a16:creationId xmlns:a16="http://schemas.microsoft.com/office/drawing/2014/main" id="{68F044DE-58D7-4C6E-912F-2FC89F57A5E1}"/>
               </a:ext>
             </a:extLst>
           </p:cNvPr>
@@ -7082,7 +7082,7 @@
           <p:cNvPr id="18" name="內容_1_倉庫模擬與改善方案實測">
             <a:extLst xmlns:a="http://schemas.openxmlformats.org/drawingml/2006/main">
               <a:ext uri="{FF2B5EF4-FFF2-40B4-BE49-F238E27FC236}">
-                <a16:creationId xmlns:a16="http://schemas.microsoft.com/office/drawing/2014/main" id="{B41667CE-8B2B-418C-82E9-F68AE6912160}"/>
+                <a16:creationId xmlns:a16="http://schemas.microsoft.com/office/drawing/2014/main" id="{D6EF1B7D-E1F7-4CCE-A74A-3949979A705F}"/>
               </a:ext>
             </a:extLst>
           </p:cNvPr>
@@ -7240,7 +7240,7 @@
           <p:cNvPr id="19" name="內容_1_雙層輸送網・五人作業・500">
             <a:extLst xmlns:a="http://schemas.openxmlformats.org/drawingml/2006/main">
               <a:ext uri="{FF2B5EF4-FFF2-40B4-BE49-F238E27FC236}">
-                <a16:creationId xmlns:a16="http://schemas.microsoft.com/office/drawing/2014/main" id="{4555EA4B-BDFB-4D53-9635-361EAFE79F1D}"/>
+                <a16:creationId xmlns:a16="http://schemas.microsoft.com/office/drawing/2014/main" id="{BADAF019-13DC-4E2C-A64F-898AA3785332}"/>
               </a:ext>
             </a:extLst>
           </p:cNvPr>
@@ -7398,7 +7398,7 @@
           <p:cNvPr id="20" name="內容_1_2026.10.29　循環物">
             <a:extLst xmlns:a="http://schemas.openxmlformats.org/drawingml/2006/main">
               <a:ext uri="{FF2B5EF4-FFF2-40B4-BE49-F238E27FC236}">
-                <a16:creationId xmlns:a16="http://schemas.microsoft.com/office/drawing/2014/main" id="{31E16F55-2E6A-45F0-B7D9-A37B41926CA6}"/>
+                <a16:creationId xmlns:a16="http://schemas.microsoft.com/office/drawing/2014/main" id="{845962A8-B760-41F5-B02E-C4738EF9BCC5}"/>
               </a:ext>
             </a:extLst>
           </p:cNvPr>
@@ -7554,7 +7554,7 @@
     </p:spTree>
     <p:extLst>
       <p:ext uri="{BB962C8B-B14F-4D97-AF65-F5344CB8AC3E}">
-        <p14:creationId xmlns:p14="http://schemas.microsoft.com/office/powerpoint/2010/main" val="1648993173"/>
+        <p14:creationId xmlns:p14="http://schemas.microsoft.com/office/powerpoint/2010/main" val="367939481"/>
       </p:ext>
     </p:extLst>
   </p:cSld>
@@ -7578,7 +7578,7 @@
           <p:cNvPr id="2" name="Freeform 2">
             <a:extLst xmlns:a="http://schemas.openxmlformats.org/drawingml/2006/main">
               <a:ext uri="{FF2B5EF4-FFF2-40B4-BE49-F238E27FC236}">
-                <a16:creationId xmlns:a16="http://schemas.microsoft.com/office/drawing/2014/main" id="{B31B2887-690B-4167-A3FD-5B5335A940B7}"/>
+                <a16:creationId xmlns:a16="http://schemas.microsoft.com/office/drawing/2014/main" id="{866781D3-707A-48D8-B08E-0CFC5C086C9F}"/>
               </a:ext>
             </a:extLst>
           </p:cNvPr>
@@ -7616,7 +7616,7 @@
             </a:pathLst>
           </a:custGeom>
           <a:blipFill xmlns:a="http://schemas.openxmlformats.org/drawingml/2006/main">
-            <a:blip xmlns:r="http://schemas.openxmlformats.org/officeDocument/2006/relationships" r:embed="Rb7c416bf8c564aa0"/>
+            <a:blip xmlns:r="http://schemas.openxmlformats.org/officeDocument/2006/relationships" r:embed="R359b0fb1d56f4ae8"/>
             <a:stretch>
               <a:fillRect l="-35258" t="-5555" r="-24931" b="-72434"/>
             </a:stretch>
@@ -7628,7 +7628,7 @@
           <p:cNvPr id="4" name="Freeform 4">
             <a:extLst xmlns:a="http://schemas.openxmlformats.org/drawingml/2006/main">
               <a:ext uri="{FF2B5EF4-FFF2-40B4-BE49-F238E27FC236}">
-                <a16:creationId xmlns:a16="http://schemas.microsoft.com/office/drawing/2014/main" id="{4F94845E-43C2-4D36-B952-7B225F0D1295}"/>
+                <a16:creationId xmlns:a16="http://schemas.microsoft.com/office/drawing/2014/main" id="{8CEEA448-28E3-4F4B-BC4D-7C7329D2B7A1}"/>
               </a:ext>
             </a:extLst>
           </p:cNvPr>
@@ -7702,7 +7702,7 @@
           <p:cNvPr id="5" name="TextBox 5">
             <a:extLst xmlns:a="http://schemas.openxmlformats.org/drawingml/2006/main">
               <a:ext uri="{FF2B5EF4-FFF2-40B4-BE49-F238E27FC236}">
-                <a16:creationId xmlns:a16="http://schemas.microsoft.com/office/drawing/2014/main" id="{4E81984A-83BE-4497-A24F-E5EF3AC11411}"/>
+                <a16:creationId xmlns:a16="http://schemas.microsoft.com/office/drawing/2014/main" id="{72E976D6-A34F-404D-A091-7E04AC49AC4D}"/>
               </a:ext>
             </a:extLst>
           </p:cNvPr>
@@ -7738,7 +7738,7 @@
           <p:cNvPr id="6" name="Freeform 6">
             <a:extLst xmlns:a="http://schemas.openxmlformats.org/drawingml/2006/main">
               <a:ext uri="{FF2B5EF4-FFF2-40B4-BE49-F238E27FC236}">
-                <a16:creationId xmlns:a16="http://schemas.microsoft.com/office/drawing/2014/main" id="{492A44A8-C7ED-4383-9375-336194A6F73E}"/>
+                <a16:creationId xmlns:a16="http://schemas.microsoft.com/office/drawing/2014/main" id="{64E820B2-C23A-4D14-8775-7C1A3211035F}"/>
               </a:ext>
             </a:extLst>
           </p:cNvPr>
@@ -7776,7 +7776,7 @@
             </a:pathLst>
           </a:custGeom>
           <a:blipFill xmlns:a="http://schemas.openxmlformats.org/drawingml/2006/main">
-            <a:blip xmlns:r="http://schemas.openxmlformats.org/officeDocument/2006/relationships" r:embed="Rb1c8c3ab76ed40a9"/>
+            <a:blip xmlns:r="http://schemas.openxmlformats.org/officeDocument/2006/relationships" r:embed="Rad4278638f994fac"/>
             <a:stretch>
               <a:fillRect l="0" t="0" r="0" b="0"/>
             </a:stretch>
@@ -7788,7 +7788,7 @@
           <p:cNvPr id="7" name="Freeform 7">
             <a:extLst xmlns:a="http://schemas.openxmlformats.org/drawingml/2006/main">
               <a:ext uri="{FF2B5EF4-FFF2-40B4-BE49-F238E27FC236}">
-                <a16:creationId xmlns:a16="http://schemas.microsoft.com/office/drawing/2014/main" id="{218B341F-BCF2-4BB5-A3A9-14B513D94334}"/>
+                <a16:creationId xmlns:a16="http://schemas.microsoft.com/office/drawing/2014/main" id="{B277E06E-0F3D-43D7-949D-2E06A6CCE5C4}"/>
               </a:ext>
             </a:extLst>
           </p:cNvPr>
@@ -7826,10 +7826,10 @@
             </a:pathLst>
           </a:custGeom>
           <a:blipFill xmlns:a="http://schemas.openxmlformats.org/drawingml/2006/main">
-            <a:blip xmlns:r="http://schemas.openxmlformats.org/officeDocument/2006/relationships" r:embed="Rf27ff6fc921a41ba">
+            <a:blip xmlns:r="http://schemas.openxmlformats.org/officeDocument/2006/relationships" r:embed="R558b3305dc4f445f">
               <a:extLst>
                 <a:ext uri="{96DAC541-7B7A-43D3-8B79-37D633B846F1}">
-                  <asvg:svgBlip xmlns:asvg="http://schemas.microsoft.com/office/drawing/2016/SVG/main" r:embed="R942c72dd1bd34581"/>
+                  <asvg:svgBlip xmlns:asvg="http://schemas.microsoft.com/office/drawing/2016/SVG/main" r:embed="R1cba6b6b071d4ae0"/>
                 </a:ext>
               </a:extLst>
             </a:blip>
@@ -7844,7 +7844,7 @@
           <p:cNvPr id="8" name="Freeform 8">
             <a:extLst xmlns:a="http://schemas.openxmlformats.org/drawingml/2006/main">
               <a:ext uri="{FF2B5EF4-FFF2-40B4-BE49-F238E27FC236}">
-                <a16:creationId xmlns:a16="http://schemas.microsoft.com/office/drawing/2014/main" id="{F60EC4D8-87C6-4BA5-8893-884E2069DE21}"/>
+                <a16:creationId xmlns:a16="http://schemas.microsoft.com/office/drawing/2014/main" id="{C3BA6FD7-8358-41AF-9CB7-368B3771CB0C}"/>
               </a:ext>
             </a:extLst>
           </p:cNvPr>
@@ -7882,10 +7882,10 @@
             </a:pathLst>
           </a:custGeom>
           <a:blipFill xmlns:a="http://schemas.openxmlformats.org/drawingml/2006/main">
-            <a:blip xmlns:r="http://schemas.openxmlformats.org/officeDocument/2006/relationships" r:embed="Rf27ff6fc921a41ba">
+            <a:blip xmlns:r="http://schemas.openxmlformats.org/officeDocument/2006/relationships" r:embed="R558b3305dc4f445f">
               <a:extLst>
                 <a:ext uri="{96DAC541-7B7A-43D3-8B79-37D633B846F1}">
-                  <asvg:svgBlip xmlns:asvg="http://schemas.microsoft.com/office/drawing/2016/SVG/main" r:embed="R942c72dd1bd34581"/>
+                  <asvg:svgBlip xmlns:asvg="http://schemas.microsoft.com/office/drawing/2016/SVG/main" r:embed="R1cba6b6b071d4ae0"/>
                 </a:ext>
               </a:extLst>
             </a:blip>
@@ -7900,7 +7900,7 @@
           <p:cNvPr id="9" name="Freeform 9">
             <a:extLst xmlns:a="http://schemas.openxmlformats.org/drawingml/2006/main">
               <a:ext uri="{FF2B5EF4-FFF2-40B4-BE49-F238E27FC236}">
-                <a16:creationId xmlns:a16="http://schemas.microsoft.com/office/drawing/2014/main" id="{4A61E6FD-F7DE-44AC-A17C-4BDE0445A97D}"/>
+                <a16:creationId xmlns:a16="http://schemas.microsoft.com/office/drawing/2014/main" id="{1ED269A7-9DFE-41F4-9836-6EC682F974CB}"/>
               </a:ext>
             </a:extLst>
           </p:cNvPr>
@@ -7948,7 +7948,7 @@
           <p:cNvPr id="10" name="TextBox 10">
             <a:extLst xmlns:a="http://schemas.openxmlformats.org/drawingml/2006/main">
               <a:ext uri="{FF2B5EF4-FFF2-40B4-BE49-F238E27FC236}">
-                <a16:creationId xmlns:a16="http://schemas.microsoft.com/office/drawing/2014/main" id="{99FC7D0B-5C9B-4317-BB53-112E71EBE1FA}"/>
+                <a16:creationId xmlns:a16="http://schemas.microsoft.com/office/drawing/2014/main" id="{1A72E459-1E5D-46CB-8AA4-8928B825432C}"/>
               </a:ext>
             </a:extLst>
           </p:cNvPr>
@@ -8000,7 +8000,7 @@
           <p:cNvPr id="11" name="TextBox 11">
             <a:extLst xmlns:a="http://schemas.openxmlformats.org/drawingml/2006/main">
               <a:ext uri="{FF2B5EF4-FFF2-40B4-BE49-F238E27FC236}">
-                <a16:creationId xmlns:a16="http://schemas.microsoft.com/office/drawing/2014/main" id="{CD5AB63D-EA2E-4DA5-93C2-342369E00E00}"/>
+                <a16:creationId xmlns:a16="http://schemas.microsoft.com/office/drawing/2014/main" id="{BAF262D9-C084-4734-831B-39C50FCA404A}"/>
               </a:ext>
             </a:extLst>
           </p:cNvPr>
@@ -8052,7 +8052,7 @@
           <p:cNvPr id="12" name="TextBox 12">
             <a:extLst xmlns:a="http://schemas.openxmlformats.org/drawingml/2006/main">
               <a:ext uri="{FF2B5EF4-FFF2-40B4-BE49-F238E27FC236}">
-                <a16:creationId xmlns:a16="http://schemas.microsoft.com/office/drawing/2014/main" id="{862065D4-7DC3-4D40-9A99-2D3B9C1C3271}"/>
+                <a16:creationId xmlns:a16="http://schemas.microsoft.com/office/drawing/2014/main" id="{AA36B807-E42B-4B01-A0F7-55E25FFA9664}"/>
               </a:ext>
             </a:extLst>
           </p:cNvPr>
@@ -8213,7 +8213,7 @@
           <p:cNvPr id="13" name="TextBox 13">
             <a:extLst xmlns:a="http://schemas.openxmlformats.org/drawingml/2006/main">
               <a:ext uri="{FF2B5EF4-FFF2-40B4-BE49-F238E27FC236}">
-                <a16:creationId xmlns:a16="http://schemas.microsoft.com/office/drawing/2014/main" id="{2905857B-A38A-4408-899A-E5EA9755C1BD}"/>
+                <a16:creationId xmlns:a16="http://schemas.microsoft.com/office/drawing/2014/main" id="{14482A6B-6066-4534-837A-002A9484FFE8}"/>
               </a:ext>
             </a:extLst>
           </p:cNvPr>
@@ -8264,7 +8264,7 @@
           <p:cNvPr id="14" name="TextBox 14">
             <a:extLst xmlns:a="http://schemas.openxmlformats.org/drawingml/2006/main">
               <a:ext uri="{FF2B5EF4-FFF2-40B4-BE49-F238E27FC236}">
-                <a16:creationId xmlns:a16="http://schemas.microsoft.com/office/drawing/2014/main" id="{B68949A4-ADD8-4225-8107-8001F93078B6}"/>
+                <a16:creationId xmlns:a16="http://schemas.microsoft.com/office/drawing/2014/main" id="{ED35B51D-55A2-413A-B439-899A35935D2A}"/>
               </a:ext>
             </a:extLst>
           </p:cNvPr>
@@ -8316,7 +8316,7 @@
           <p:cNvPr id="16" name="Freeform 16">
             <a:extLst xmlns:a="http://schemas.openxmlformats.org/drawingml/2006/main">
               <a:ext uri="{FF2B5EF4-FFF2-40B4-BE49-F238E27FC236}">
-                <a16:creationId xmlns:a16="http://schemas.microsoft.com/office/drawing/2014/main" id="{1E9192C2-9767-4458-9F7C-6C92466B593C}"/>
+                <a16:creationId xmlns:a16="http://schemas.microsoft.com/office/drawing/2014/main" id="{AD27B265-C94C-41BF-93CB-B851B2772DBC}"/>
               </a:ext>
             </a:extLst>
           </p:cNvPr>
@@ -8361,7 +8361,7 @@
           <p:cNvPr id="17" name="內容_10_關鍵發現">
             <a:extLst xmlns:a="http://schemas.openxmlformats.org/drawingml/2006/main">
               <a:ext uri="{FF2B5EF4-FFF2-40B4-BE49-F238E27FC236}">
-                <a16:creationId xmlns:a16="http://schemas.microsoft.com/office/drawing/2014/main" id="{589A8567-A3E7-40E2-9B71-429DE767EFC6}"/>
+                <a16:creationId xmlns:a16="http://schemas.microsoft.com/office/drawing/2014/main" id="{ED28A3B8-CC71-4BF8-90BE-AF1F4930FE47}"/>
               </a:ext>
             </a:extLst>
           </p:cNvPr>
@@ -8519,7 +8519,7 @@
           <p:cNvPr id="18" name="內容_10_只加8公尺不夠，聯合控制才有">
             <a:extLst xmlns:a="http://schemas.openxmlformats.org/drawingml/2006/main">
               <a:ext uri="{FF2B5EF4-FFF2-40B4-BE49-F238E27FC236}">
-                <a16:creationId xmlns:a16="http://schemas.microsoft.com/office/drawing/2014/main" id="{03837F55-8F86-4F91-A94D-0C1CA9C6AEE5}"/>
+                <a16:creationId xmlns:a16="http://schemas.microsoft.com/office/drawing/2014/main" id="{A1770B33-E149-4BEA-AF4B-7DA80D868ACD}"/>
               </a:ext>
             </a:extLst>
           </p:cNvPr>
@@ -8677,7 +8677,7 @@
           <p:cNvPr id="19" name="Chart">
             <a:extLst xmlns:a="http://schemas.openxmlformats.org/drawingml/2006/main">
               <a:ext uri="{FF2B5EF4-FFF2-40B4-BE49-F238E27FC236}">
-                <a16:creationId xmlns:a16="http://schemas.microsoft.com/office/drawing/2014/main" id="{FEEEE8CD-EF02-4900-910F-1AB0DEC65554}"/>
+                <a16:creationId xmlns:a16="http://schemas.microsoft.com/office/drawing/2014/main" id="{DF3ED47B-2A78-406C-B5B7-439175DBAAF7}"/>
               </a:ext>
             </a:extLst>
           </p:cNvPr>
@@ -8690,7 +8690,7 @@
         </p:xfrm>
         <a:graphic xmlns:a="http://schemas.openxmlformats.org/drawingml/2006/main">
           <a:graphicData uri="http://schemas.openxmlformats.org/drawingml/2006/chart">
-            <c:chart xmlns:r="http://schemas.openxmlformats.org/officeDocument/2006/relationships" xmlns:c="http://schemas.openxmlformats.org/drawingml/2006/chart" r:id="Rf5b93fd8da2e489c"/>
+            <c:chart xmlns:r="http://schemas.openxmlformats.org/officeDocument/2006/relationships" xmlns:c="http://schemas.openxmlformats.org/drawingml/2006/chart" r:id="R3b4652f0c67847fd"/>
           </a:graphicData>
         </a:graphic>
       </p:graphicFrame>
@@ -8699,7 +8699,7 @@
           <p:cNvPr id="20" name="Chart">
             <a:extLst xmlns:a="http://schemas.openxmlformats.org/drawingml/2006/main">
               <a:ext uri="{FF2B5EF4-FFF2-40B4-BE49-F238E27FC236}">
-                <a16:creationId xmlns:a16="http://schemas.microsoft.com/office/drawing/2014/main" id="{88408CE9-D891-4E47-BE43-5D9CCFA60A1D}"/>
+                <a16:creationId xmlns:a16="http://schemas.microsoft.com/office/drawing/2014/main" id="{2E6AC4FB-BC3D-45C1-BE76-7B7D5E379FDC}"/>
               </a:ext>
             </a:extLst>
           </p:cNvPr>
@@ -8712,16 +8712,16 @@
         </p:xfrm>
         <a:graphic xmlns:a="http://schemas.openxmlformats.org/drawingml/2006/main">
           <a:graphicData uri="http://schemas.openxmlformats.org/drawingml/2006/chart">
-            <c:chart xmlns:r="http://schemas.openxmlformats.org/officeDocument/2006/relationships" xmlns:c="http://schemas.openxmlformats.org/drawingml/2006/chart" r:id="R6cf185952f324630"/>
+            <c:chart xmlns:r="http://schemas.openxmlformats.org/officeDocument/2006/relationships" xmlns:c="http://schemas.openxmlformats.org/drawingml/2006/chart" r:id="R157ea65d73cb44ea"/>
           </a:graphicData>
         </a:graphic>
       </p:graphicFrame>
       <p:sp>
         <p:nvSpPr>
-          <p:cNvPr id="21" name="內容_10_僅加8公尺緩衝的阻塞仍7.6">
+          <p:cNvPr id="21" name="內容_10_短波尖峰情境（S1）；現況（">
             <a:extLst xmlns:a="http://schemas.openxmlformats.org/drawingml/2006/main">
               <a:ext uri="{FF2B5EF4-FFF2-40B4-BE49-F238E27FC236}">
-                <a16:creationId xmlns:a16="http://schemas.microsoft.com/office/drawing/2014/main" id="{B4513D19-B656-4A78-8757-4DF6DF0C6FD5}"/>
+                <a16:creationId xmlns:a16="http://schemas.microsoft.com/office/drawing/2014/main" id="{8AC9BDFF-5EF1-415F-9E57-DE99875CB58A}"/>
               </a:ext>
             </a:extLst>
           </p:cNvPr>
@@ -8869,7 +8869,7 @@
                 <a:ea typeface="Microsoft JhengHei"/>
                 <a:cs typeface="Microsoft JhengHei"/>
               </a:rPr>
-              <a:t>僅加8公尺緩衝的阻塞仍7.609%，未達1%。聯合方案含支援與外包，不能把效果都算成人力。</a:t>
+              <a:t>短波尖峰情境（S1）；現況（P0）、僅加緩衝（P2）、聯合改善（P4）。僅加8公尺仍未達標。</a:t>
             </a:r>
           </a:p>
         </p:txBody>
@@ -8877,7 +8877,7 @@
     </p:spTree>
     <p:extLst>
       <p:ext uri="{BB962C8B-B14F-4D97-AF65-F5344CB8AC3E}">
-        <p14:creationId xmlns:p14="http://schemas.microsoft.com/office/powerpoint/2010/main" val="732914813"/>
+        <p14:creationId xmlns:p14="http://schemas.microsoft.com/office/powerpoint/2010/main" val="2105048793"/>
       </p:ext>
     </p:extLst>
   </p:cSld>
@@ -8901,7 +8901,7 @@
           <p:cNvPr id="2" name="Freeform 2">
             <a:extLst xmlns:a="http://schemas.openxmlformats.org/drawingml/2006/main">
               <a:ext uri="{FF2B5EF4-FFF2-40B4-BE49-F238E27FC236}">
-                <a16:creationId xmlns:a16="http://schemas.microsoft.com/office/drawing/2014/main" id="{067CD3AA-CA13-44BE-AB96-78B49AECE230}"/>
+                <a16:creationId xmlns:a16="http://schemas.microsoft.com/office/drawing/2014/main" id="{634ADACA-BC0C-40A6-875B-0020F541D394}"/>
               </a:ext>
             </a:extLst>
           </p:cNvPr>
@@ -8939,7 +8939,7 @@
             </a:pathLst>
           </a:custGeom>
           <a:blipFill xmlns:a="http://schemas.openxmlformats.org/drawingml/2006/main">
-            <a:blip xmlns:r="http://schemas.openxmlformats.org/officeDocument/2006/relationships" r:embed="R9a4aa51d6db747e0"/>
+            <a:blip xmlns:r="http://schemas.openxmlformats.org/officeDocument/2006/relationships" r:embed="R51e4930a0ae54fc7"/>
             <a:stretch>
               <a:fillRect l="-35258" t="-5555" r="-24931" b="-72434"/>
             </a:stretch>
@@ -8951,7 +8951,7 @@
           <p:cNvPr id="4" name="Freeform 4">
             <a:extLst xmlns:a="http://schemas.openxmlformats.org/drawingml/2006/main">
               <a:ext uri="{FF2B5EF4-FFF2-40B4-BE49-F238E27FC236}">
-                <a16:creationId xmlns:a16="http://schemas.microsoft.com/office/drawing/2014/main" id="{2E4ABCDE-D84F-4D48-BF00-3F8EC27CB0C9}"/>
+                <a16:creationId xmlns:a16="http://schemas.microsoft.com/office/drawing/2014/main" id="{3C82EFFD-EE96-4EC8-AC57-A56C15F38641}"/>
               </a:ext>
             </a:extLst>
           </p:cNvPr>
@@ -9025,7 +9025,7 @@
           <p:cNvPr id="5" name="TextBox 5">
             <a:extLst xmlns:a="http://schemas.openxmlformats.org/drawingml/2006/main">
               <a:ext uri="{FF2B5EF4-FFF2-40B4-BE49-F238E27FC236}">
-                <a16:creationId xmlns:a16="http://schemas.microsoft.com/office/drawing/2014/main" id="{7C86BB20-4DA7-4A6E-AD36-B92C814C7D23}"/>
+                <a16:creationId xmlns:a16="http://schemas.microsoft.com/office/drawing/2014/main" id="{2AD50E75-50D0-4E3F-8584-545AD59C9697}"/>
               </a:ext>
             </a:extLst>
           </p:cNvPr>
@@ -9061,7 +9061,7 @@
           <p:cNvPr id="6" name="Freeform 6">
             <a:extLst xmlns:a="http://schemas.openxmlformats.org/drawingml/2006/main">
               <a:ext uri="{FF2B5EF4-FFF2-40B4-BE49-F238E27FC236}">
-                <a16:creationId xmlns:a16="http://schemas.microsoft.com/office/drawing/2014/main" id="{DDCFBCA0-EC09-43CA-A67C-38F34A6F923C}"/>
+                <a16:creationId xmlns:a16="http://schemas.microsoft.com/office/drawing/2014/main" id="{DDC7E139-F618-464A-B6AB-F9BCA02A561D}"/>
               </a:ext>
             </a:extLst>
           </p:cNvPr>
@@ -9099,7 +9099,7 @@
             </a:pathLst>
           </a:custGeom>
           <a:blipFill xmlns:a="http://schemas.openxmlformats.org/drawingml/2006/main">
-            <a:blip xmlns:r="http://schemas.openxmlformats.org/officeDocument/2006/relationships" r:embed="R92728691a5914c66"/>
+            <a:blip xmlns:r="http://schemas.openxmlformats.org/officeDocument/2006/relationships" r:embed="R752cb0d77f33468b"/>
             <a:stretch>
               <a:fillRect l="0" t="0" r="0" b="0"/>
             </a:stretch>
@@ -9111,7 +9111,7 @@
           <p:cNvPr id="7" name="Freeform 7">
             <a:extLst xmlns:a="http://schemas.openxmlformats.org/drawingml/2006/main">
               <a:ext uri="{FF2B5EF4-FFF2-40B4-BE49-F238E27FC236}">
-                <a16:creationId xmlns:a16="http://schemas.microsoft.com/office/drawing/2014/main" id="{376F8760-E336-408F-A747-098A2E522296}"/>
+                <a16:creationId xmlns:a16="http://schemas.microsoft.com/office/drawing/2014/main" id="{EF47C1AC-F5CC-4AF6-AF16-861D64B9308E}"/>
               </a:ext>
             </a:extLst>
           </p:cNvPr>
@@ -9149,10 +9149,10 @@
             </a:pathLst>
           </a:custGeom>
           <a:blipFill xmlns:a="http://schemas.openxmlformats.org/drawingml/2006/main">
-            <a:blip xmlns:r="http://schemas.openxmlformats.org/officeDocument/2006/relationships" r:embed="Re3384580e27d4b33">
+            <a:blip xmlns:r="http://schemas.openxmlformats.org/officeDocument/2006/relationships" r:embed="R8bdf5283835944bc">
               <a:extLst>
                 <a:ext uri="{96DAC541-7B7A-43D3-8B79-37D633B846F1}">
-                  <asvg:svgBlip xmlns:asvg="http://schemas.microsoft.com/office/drawing/2016/SVG/main" r:embed="R9ec6d6a4a57d498f"/>
+                  <asvg:svgBlip xmlns:asvg="http://schemas.microsoft.com/office/drawing/2016/SVG/main" r:embed="R10e4827af7f24897"/>
                 </a:ext>
               </a:extLst>
             </a:blip>
@@ -9167,7 +9167,7 @@
           <p:cNvPr id="8" name="Freeform 8">
             <a:extLst xmlns:a="http://schemas.openxmlformats.org/drawingml/2006/main">
               <a:ext uri="{FF2B5EF4-FFF2-40B4-BE49-F238E27FC236}">
-                <a16:creationId xmlns:a16="http://schemas.microsoft.com/office/drawing/2014/main" id="{B5E025A3-0F63-48D2-B57F-298AA14AC8EE}"/>
+                <a16:creationId xmlns:a16="http://schemas.microsoft.com/office/drawing/2014/main" id="{A41A37C4-2E6C-49BA-B20E-929EFB642C2D}"/>
               </a:ext>
             </a:extLst>
           </p:cNvPr>
@@ -9205,10 +9205,10 @@
             </a:pathLst>
           </a:custGeom>
           <a:blipFill xmlns:a="http://schemas.openxmlformats.org/drawingml/2006/main">
-            <a:blip xmlns:r="http://schemas.openxmlformats.org/officeDocument/2006/relationships" r:embed="Re3384580e27d4b33">
+            <a:blip xmlns:r="http://schemas.openxmlformats.org/officeDocument/2006/relationships" r:embed="R8bdf5283835944bc">
               <a:extLst>
                 <a:ext uri="{96DAC541-7B7A-43D3-8B79-37D633B846F1}">
-                  <asvg:svgBlip xmlns:asvg="http://schemas.microsoft.com/office/drawing/2016/SVG/main" r:embed="R9ec6d6a4a57d498f"/>
+                  <asvg:svgBlip xmlns:asvg="http://schemas.microsoft.com/office/drawing/2016/SVG/main" r:embed="R10e4827af7f24897"/>
                 </a:ext>
               </a:extLst>
             </a:blip>
@@ -9223,7 +9223,7 @@
           <p:cNvPr id="10" name="Freeform 10">
             <a:extLst xmlns:a="http://schemas.openxmlformats.org/drawingml/2006/main">
               <a:ext uri="{FF2B5EF4-FFF2-40B4-BE49-F238E27FC236}">
-                <a16:creationId xmlns:a16="http://schemas.microsoft.com/office/drawing/2014/main" id="{C3CF0EC4-C002-4F23-8B7B-6789C139EBB2}"/>
+                <a16:creationId xmlns:a16="http://schemas.microsoft.com/office/drawing/2014/main" id="{0268D963-39CB-4757-8AB4-66F988432C8C}"/>
               </a:ext>
             </a:extLst>
           </p:cNvPr>
@@ -9289,7 +9289,7 @@
           <p:cNvPr id="11" name="Freeform 11">
             <a:extLst xmlns:a="http://schemas.openxmlformats.org/drawingml/2006/main">
               <a:ext uri="{FF2B5EF4-FFF2-40B4-BE49-F238E27FC236}">
-                <a16:creationId xmlns:a16="http://schemas.microsoft.com/office/drawing/2014/main" id="{D566D8A1-C9B6-49A4-8862-EFA63A3B8A1E}"/>
+                <a16:creationId xmlns:a16="http://schemas.microsoft.com/office/drawing/2014/main" id="{16CE1BD5-0360-4567-8084-CA62596187FC}"/>
               </a:ext>
             </a:extLst>
           </p:cNvPr>
@@ -9355,7 +9355,7 @@
           <p:cNvPr id="12" name="Freeform 12">
             <a:extLst xmlns:a="http://schemas.openxmlformats.org/drawingml/2006/main">
               <a:ext uri="{FF2B5EF4-FFF2-40B4-BE49-F238E27FC236}">
-                <a16:creationId xmlns:a16="http://schemas.microsoft.com/office/drawing/2014/main" id="{5B90552F-8BEF-43A8-91C2-BE234163D233}"/>
+                <a16:creationId xmlns:a16="http://schemas.microsoft.com/office/drawing/2014/main" id="{CADE7767-BBCF-498B-99CF-C01444560C53}"/>
               </a:ext>
             </a:extLst>
           </p:cNvPr>
@@ -9421,7 +9421,7 @@
           <p:cNvPr id="14" name="Freeform 14">
             <a:extLst xmlns:a="http://schemas.openxmlformats.org/drawingml/2006/main">
               <a:ext uri="{FF2B5EF4-FFF2-40B4-BE49-F238E27FC236}">
-                <a16:creationId xmlns:a16="http://schemas.microsoft.com/office/drawing/2014/main" id="{5542C6C3-16DF-4060-96CD-65CCC62327F8}"/>
+                <a16:creationId xmlns:a16="http://schemas.microsoft.com/office/drawing/2014/main" id="{636A647E-C913-4432-B696-3AC51226A9D5}"/>
               </a:ext>
             </a:extLst>
           </p:cNvPr>
@@ -9487,7 +9487,7 @@
           <p:cNvPr id="15" name="Freeform 15">
             <a:extLst xmlns:a="http://schemas.openxmlformats.org/drawingml/2006/main">
               <a:ext uri="{FF2B5EF4-FFF2-40B4-BE49-F238E27FC236}">
-                <a16:creationId xmlns:a16="http://schemas.microsoft.com/office/drawing/2014/main" id="{5D63043E-B8A8-42A1-B12A-BAC4BDD02539}"/>
+                <a16:creationId xmlns:a16="http://schemas.microsoft.com/office/drawing/2014/main" id="{F110EB8E-04AA-4F7A-9AC1-F1AD2347D312}"/>
               </a:ext>
             </a:extLst>
           </p:cNvPr>
@@ -9553,7 +9553,7 @@
           <p:cNvPr id="16" name="Freeform 16">
             <a:extLst xmlns:a="http://schemas.openxmlformats.org/drawingml/2006/main">
               <a:ext uri="{FF2B5EF4-FFF2-40B4-BE49-F238E27FC236}">
-                <a16:creationId xmlns:a16="http://schemas.microsoft.com/office/drawing/2014/main" id="{78E50DD1-A963-4800-B359-8A4F860A6D06}"/>
+                <a16:creationId xmlns:a16="http://schemas.microsoft.com/office/drawing/2014/main" id="{84D4DF41-D759-49DF-8817-D67046F836B1}"/>
               </a:ext>
             </a:extLst>
           </p:cNvPr>
@@ -9619,7 +9619,7 @@
           <p:cNvPr id="18" name="Freeform 18">
             <a:extLst xmlns:a="http://schemas.openxmlformats.org/drawingml/2006/main">
               <a:ext uri="{FF2B5EF4-FFF2-40B4-BE49-F238E27FC236}">
-                <a16:creationId xmlns:a16="http://schemas.microsoft.com/office/drawing/2014/main" id="{436CE8BD-5549-437B-9290-10F1F5E60A99}"/>
+                <a16:creationId xmlns:a16="http://schemas.microsoft.com/office/drawing/2014/main" id="{5286E870-C520-4DF0-98E6-1BDD7CF1DFD5}"/>
               </a:ext>
             </a:extLst>
           </p:cNvPr>
@@ -9664,7 +9664,7 @@
           <p:cNvPr id="19" name="TextBox 19">
             <a:extLst xmlns:a="http://schemas.openxmlformats.org/drawingml/2006/main">
               <a:ext uri="{FF2B5EF4-FFF2-40B4-BE49-F238E27FC236}">
-                <a16:creationId xmlns:a16="http://schemas.microsoft.com/office/drawing/2014/main" id="{89124E28-569B-4D01-9DB3-F6586B77229C}"/>
+                <a16:creationId xmlns:a16="http://schemas.microsoft.com/office/drawing/2014/main" id="{0E7B3F4D-C138-4883-9355-E902083020A4}"/>
               </a:ext>
             </a:extLst>
           </p:cNvPr>
@@ -9704,7 +9704,7 @@
           <p:cNvPr id="20" name="TextBox 20">
             <a:extLst xmlns:a="http://schemas.openxmlformats.org/drawingml/2006/main">
               <a:ext uri="{FF2B5EF4-FFF2-40B4-BE49-F238E27FC236}">
-                <a16:creationId xmlns:a16="http://schemas.microsoft.com/office/drawing/2014/main" id="{B72E7D01-9180-43B9-B566-9D07FCD658D2}"/>
+                <a16:creationId xmlns:a16="http://schemas.microsoft.com/office/drawing/2014/main" id="{6DF1B052-27BD-405E-A365-429D298CF536}"/>
               </a:ext>
             </a:extLst>
           </p:cNvPr>
@@ -9865,7 +9865,7 @@
           <p:cNvPr id="21" name="TextBox 21">
             <a:extLst xmlns:a="http://schemas.openxmlformats.org/drawingml/2006/main">
               <a:ext uri="{FF2B5EF4-FFF2-40B4-BE49-F238E27FC236}">
-                <a16:creationId xmlns:a16="http://schemas.microsoft.com/office/drawing/2014/main" id="{1BB5ED1B-49DC-412E-B2D8-E1BCD2491C40}"/>
+                <a16:creationId xmlns:a16="http://schemas.microsoft.com/office/drawing/2014/main" id="{301E0083-C78B-40C2-A0C6-5F08DFAE2C4A}"/>
               </a:ext>
             </a:extLst>
           </p:cNvPr>
@@ -9919,7 +9919,7 @@
           <p:cNvPr id="22" name="TextBox 22">
             <a:extLst xmlns:a="http://schemas.openxmlformats.org/drawingml/2006/main">
               <a:ext uri="{FF2B5EF4-FFF2-40B4-BE49-F238E27FC236}">
-                <a16:creationId xmlns:a16="http://schemas.microsoft.com/office/drawing/2014/main" id="{75DC57AA-8871-4E0A-9F2D-E86CF86F6952}"/>
+                <a16:creationId xmlns:a16="http://schemas.microsoft.com/office/drawing/2014/main" id="{EFF7BFF4-1C02-4A14-85A0-7B628FC61C53}"/>
               </a:ext>
             </a:extLst>
           </p:cNvPr>
@@ -9971,7 +9971,7 @@
           <p:cNvPr id="23" name="TextBox 23">
             <a:extLst xmlns:a="http://schemas.openxmlformats.org/drawingml/2006/main">
               <a:ext uri="{FF2B5EF4-FFF2-40B4-BE49-F238E27FC236}">
-                <a16:creationId xmlns:a16="http://schemas.microsoft.com/office/drawing/2014/main" id="{D677529C-7AE4-4A83-8216-596E6577F367}"/>
+                <a16:creationId xmlns:a16="http://schemas.microsoft.com/office/drawing/2014/main" id="{847F8F48-D724-479C-9390-AD32BE96B148}"/>
               </a:ext>
             </a:extLst>
           </p:cNvPr>
@@ -10023,7 +10023,7 @@
           <p:cNvPr id="24" name="TextBox 24">
             <a:extLst xmlns:a="http://schemas.openxmlformats.org/drawingml/2006/main">
               <a:ext uri="{FF2B5EF4-FFF2-40B4-BE49-F238E27FC236}">
-                <a16:creationId xmlns:a16="http://schemas.microsoft.com/office/drawing/2014/main" id="{D3EBF3A5-5A1F-4A52-BD0F-42748C9FB5AA}"/>
+                <a16:creationId xmlns:a16="http://schemas.microsoft.com/office/drawing/2014/main" id="{AEE81234-F17E-4329-9253-E68B8C8C236C}"/>
               </a:ext>
             </a:extLst>
           </p:cNvPr>
@@ -10072,7 +10072,7 @@
           <p:cNvPr id="25" name="TextBox 25">
             <a:extLst xmlns:a="http://schemas.openxmlformats.org/drawingml/2006/main">
               <a:ext uri="{FF2B5EF4-FFF2-40B4-BE49-F238E27FC236}">
-                <a16:creationId xmlns:a16="http://schemas.microsoft.com/office/drawing/2014/main" id="{034DA127-49B7-42F1-AD04-42EC0DC1BCC9}"/>
+                <a16:creationId xmlns:a16="http://schemas.microsoft.com/office/drawing/2014/main" id="{3C0CB8E7-D299-4849-B7FD-75713D6D8A6E}"/>
               </a:ext>
             </a:extLst>
           </p:cNvPr>
@@ -10124,7 +10124,7 @@
           <p:cNvPr id="27" name="Freeform 27">
             <a:extLst xmlns:a="http://schemas.openxmlformats.org/drawingml/2006/main">
               <a:ext uri="{FF2B5EF4-FFF2-40B4-BE49-F238E27FC236}">
-                <a16:creationId xmlns:a16="http://schemas.microsoft.com/office/drawing/2014/main" id="{BD085A2E-CD16-4916-9710-D93011E5F933}"/>
+                <a16:creationId xmlns:a16="http://schemas.microsoft.com/office/drawing/2014/main" id="{09D518D5-B8DC-4C27-B98A-D32DDF67495C}"/>
               </a:ext>
             </a:extLst>
           </p:cNvPr>
@@ -10169,7 +10169,7 @@
           <p:cNvPr id="28" name="TextBox 28">
             <a:extLst xmlns:a="http://schemas.openxmlformats.org/drawingml/2006/main">
               <a:ext uri="{FF2B5EF4-FFF2-40B4-BE49-F238E27FC236}">
-                <a16:creationId xmlns:a16="http://schemas.microsoft.com/office/drawing/2014/main" id="{63F4ADCA-A5B2-4F77-A0CE-AA601FE0143A}"/>
+                <a16:creationId xmlns:a16="http://schemas.microsoft.com/office/drawing/2014/main" id="{102CECA3-7A9B-4521-9E2E-A4636BAB0B5C}"/>
               </a:ext>
             </a:extLst>
           </p:cNvPr>
@@ -10209,7 +10209,7 @@
           <p:cNvPr id="29" name="TextBox 29">
             <a:extLst xmlns:a="http://schemas.openxmlformats.org/drawingml/2006/main">
               <a:ext uri="{FF2B5EF4-FFF2-40B4-BE49-F238E27FC236}">
-                <a16:creationId xmlns:a16="http://schemas.microsoft.com/office/drawing/2014/main" id="{3FF30D5C-37F8-45DF-9421-CFFC7EF3D0BB}"/>
+                <a16:creationId xmlns:a16="http://schemas.microsoft.com/office/drawing/2014/main" id="{8C76406D-6194-4BE5-8B2F-65EE0BF4C04F}"/>
               </a:ext>
             </a:extLst>
           </p:cNvPr>
@@ -10258,7 +10258,7 @@
           <p:cNvPr id="30" name="TextBox 30">
             <a:extLst xmlns:a="http://schemas.openxmlformats.org/drawingml/2006/main">
               <a:ext uri="{FF2B5EF4-FFF2-40B4-BE49-F238E27FC236}">
-                <a16:creationId xmlns:a16="http://schemas.microsoft.com/office/drawing/2014/main" id="{94D8DFBE-DDFD-4864-A3F8-21CD48113FE7}"/>
+                <a16:creationId xmlns:a16="http://schemas.microsoft.com/office/drawing/2014/main" id="{91B98A1A-A9B5-429C-AF29-04ED10055695}"/>
               </a:ext>
             </a:extLst>
           </p:cNvPr>
@@ -10310,7 +10310,7 @@
           <p:cNvPr id="31" name="內容_11_改善方案的實驗比較">
             <a:extLst xmlns:a="http://schemas.openxmlformats.org/drawingml/2006/main">
               <a:ext uri="{FF2B5EF4-FFF2-40B4-BE49-F238E27FC236}">
-                <a16:creationId xmlns:a16="http://schemas.microsoft.com/office/drawing/2014/main" id="{D9D9BF9E-6B43-4E39-95D4-9CE0E099A5F5}"/>
+                <a16:creationId xmlns:a16="http://schemas.microsoft.com/office/drawing/2014/main" id="{96019FC4-6853-4445-8EDC-45766785CFCF}"/>
               </a:ext>
             </a:extLst>
           </p:cNvPr>
@@ -10468,7 +10468,7 @@
           <p:cNvPr id="32" name="內容_11_緩衝與調派必須一起評估">
             <a:extLst xmlns:a="http://schemas.openxmlformats.org/drawingml/2006/main">
               <a:ext uri="{FF2B5EF4-FFF2-40B4-BE49-F238E27FC236}">
-                <a16:creationId xmlns:a16="http://schemas.microsoft.com/office/drawing/2014/main" id="{8B38E5F0-262E-472B-A1E9-DB22E1086E77}"/>
+                <a16:creationId xmlns:a16="http://schemas.microsoft.com/office/drawing/2014/main" id="{D57123C4-FDB6-4CF2-BBA3-9865BE89FAA5}"/>
               </a:ext>
             </a:extLst>
           </p:cNvPr>
@@ -10626,7 +10626,7 @@
           <p:cNvPr id="33" name="Chart">
             <a:extLst xmlns:a="http://schemas.openxmlformats.org/drawingml/2006/main">
               <a:ext uri="{FF2B5EF4-FFF2-40B4-BE49-F238E27FC236}">
-                <a16:creationId xmlns:a16="http://schemas.microsoft.com/office/drawing/2014/main" id="{C83EFFF2-1534-424F-9C92-B969A68DBA4C}"/>
+                <a16:creationId xmlns:a16="http://schemas.microsoft.com/office/drawing/2014/main" id="{0007E567-096A-4407-A980-2D1B008D07F2}"/>
               </a:ext>
             </a:extLst>
           </p:cNvPr>
@@ -10639,7 +10639,7 @@
         </p:xfrm>
         <a:graphic xmlns:a="http://schemas.openxmlformats.org/drawingml/2006/main">
           <a:graphicData uri="http://schemas.openxmlformats.org/drawingml/2006/chart">
-            <c:chart xmlns:r="http://schemas.openxmlformats.org/officeDocument/2006/relationships" xmlns:c="http://schemas.openxmlformats.org/drawingml/2006/chart" r:id="R5e1833d6ebaf405f"/>
+            <c:chart xmlns:r="http://schemas.openxmlformats.org/officeDocument/2006/relationships" xmlns:c="http://schemas.openxmlformats.org/drawingml/2006/chart" r:id="R47b70b3d5f474e26"/>
           </a:graphicData>
         </a:graphic>
       </p:graphicFrame>
@@ -10648,7 +10648,7 @@
           <p:cNvPr id="34" name="內容_11_3種情境 × 15種處方／長">
             <a:extLst xmlns:a="http://schemas.openxmlformats.org/drawingml/2006/main">
               <a:ext uri="{FF2B5EF4-FFF2-40B4-BE49-F238E27FC236}">
-                <a16:creationId xmlns:a16="http://schemas.microsoft.com/office/drawing/2014/main" id="{225EAE23-D5C8-456E-B577-00B9458D811A}"/>
+                <a16:creationId xmlns:a16="http://schemas.microsoft.com/office/drawing/2014/main" id="{E301F862-5F90-4655-AB3E-ADA4CB5F8395}"/>
               </a:ext>
             </a:extLst>
           </p:cNvPr>
@@ -10804,7 +10804,7 @@
     </p:spTree>
     <p:extLst>
       <p:ext uri="{BB962C8B-B14F-4D97-AF65-F5344CB8AC3E}">
-        <p14:creationId xmlns:p14="http://schemas.microsoft.com/office/powerpoint/2010/main" val="771388846"/>
+        <p14:creationId xmlns:p14="http://schemas.microsoft.com/office/powerpoint/2010/main" val="925478205"/>
       </p:ext>
     </p:extLst>
   </p:cSld>
@@ -10828,7 +10828,7 @@
           <p:cNvPr id="2" name="Freeform 2">
             <a:extLst xmlns:a="http://schemas.openxmlformats.org/drawingml/2006/main">
               <a:ext uri="{FF2B5EF4-FFF2-40B4-BE49-F238E27FC236}">
-                <a16:creationId xmlns:a16="http://schemas.microsoft.com/office/drawing/2014/main" id="{2B9A34E2-E98F-4DD3-95E6-FE8223ECE929}"/>
+                <a16:creationId xmlns:a16="http://schemas.microsoft.com/office/drawing/2014/main" id="{5567F26E-B2F6-48DE-B6FC-84E7E5FC02B1}"/>
               </a:ext>
             </a:extLst>
           </p:cNvPr>
@@ -10866,7 +10866,7 @@
             </a:pathLst>
           </a:custGeom>
           <a:blipFill xmlns:a="http://schemas.openxmlformats.org/drawingml/2006/main">
-            <a:blip xmlns:r="http://schemas.openxmlformats.org/officeDocument/2006/relationships" r:embed="R596c2b27dc304ef0"/>
+            <a:blip xmlns:r="http://schemas.openxmlformats.org/officeDocument/2006/relationships" r:embed="R1720538b893d4c4d"/>
             <a:stretch>
               <a:fillRect l="-35258" t="-5555" r="-24931" b="-72434"/>
             </a:stretch>
@@ -10878,7 +10878,7 @@
           <p:cNvPr id="4" name="Freeform 4">
             <a:extLst xmlns:a="http://schemas.openxmlformats.org/drawingml/2006/main">
               <a:ext uri="{FF2B5EF4-FFF2-40B4-BE49-F238E27FC236}">
-                <a16:creationId xmlns:a16="http://schemas.microsoft.com/office/drawing/2014/main" id="{684FEEC4-1B8F-4C3E-9050-1AF39D970468}"/>
+                <a16:creationId xmlns:a16="http://schemas.microsoft.com/office/drawing/2014/main" id="{30058F0E-5F7D-4BA1-A681-728CD298FE69}"/>
               </a:ext>
             </a:extLst>
           </p:cNvPr>
@@ -10952,7 +10952,7 @@
           <p:cNvPr id="5" name="TextBox 5">
             <a:extLst xmlns:a="http://schemas.openxmlformats.org/drawingml/2006/main">
               <a:ext uri="{FF2B5EF4-FFF2-40B4-BE49-F238E27FC236}">
-                <a16:creationId xmlns:a16="http://schemas.microsoft.com/office/drawing/2014/main" id="{EADA0A1C-9873-422D-A35B-2F90364DC59C}"/>
+                <a16:creationId xmlns:a16="http://schemas.microsoft.com/office/drawing/2014/main" id="{96A85D41-5A7B-4E6F-8498-BD49771933BC}"/>
               </a:ext>
             </a:extLst>
           </p:cNvPr>
@@ -10988,7 +10988,7 @@
           <p:cNvPr id="6" name="Freeform 6">
             <a:extLst xmlns:a="http://schemas.openxmlformats.org/drawingml/2006/main">
               <a:ext uri="{FF2B5EF4-FFF2-40B4-BE49-F238E27FC236}">
-                <a16:creationId xmlns:a16="http://schemas.microsoft.com/office/drawing/2014/main" id="{02A79CD8-4E29-4FFD-B168-7D8A5F7FF4F6}"/>
+                <a16:creationId xmlns:a16="http://schemas.microsoft.com/office/drawing/2014/main" id="{E0525A6F-C852-4D2F-AF8F-C7ACCB4813A1}"/>
               </a:ext>
             </a:extLst>
           </p:cNvPr>
@@ -11026,7 +11026,7 @@
             </a:pathLst>
           </a:custGeom>
           <a:blipFill xmlns:a="http://schemas.openxmlformats.org/drawingml/2006/main">
-            <a:blip xmlns:r="http://schemas.openxmlformats.org/officeDocument/2006/relationships" r:embed="Rd83dfc26769046e8"/>
+            <a:blip xmlns:r="http://schemas.openxmlformats.org/officeDocument/2006/relationships" r:embed="Rdb4389401a784ae9"/>
             <a:stretch>
               <a:fillRect l="0" t="0" r="0" b="0"/>
             </a:stretch>
@@ -11038,7 +11038,7 @@
           <p:cNvPr id="8" name="Freeform 8">
             <a:extLst xmlns:a="http://schemas.openxmlformats.org/drawingml/2006/main">
               <a:ext uri="{FF2B5EF4-FFF2-40B4-BE49-F238E27FC236}">
-                <a16:creationId xmlns:a16="http://schemas.microsoft.com/office/drawing/2014/main" id="{E4952800-DFE8-4E37-A977-83DCA3B236CD}"/>
+                <a16:creationId xmlns:a16="http://schemas.microsoft.com/office/drawing/2014/main" id="{A6B43337-207D-403A-BDBC-3D5DB12422FE}"/>
               </a:ext>
             </a:extLst>
           </p:cNvPr>
@@ -11097,7 +11097,7 @@
           <p:cNvPr id="9" name="TextBox 9">
             <a:extLst xmlns:a="http://schemas.openxmlformats.org/drawingml/2006/main">
               <a:ext uri="{FF2B5EF4-FFF2-40B4-BE49-F238E27FC236}">
-                <a16:creationId xmlns:a16="http://schemas.microsoft.com/office/drawing/2014/main" id="{F3615ACB-F9E0-4AB8-B047-FA2894472A01}"/>
+                <a16:creationId xmlns:a16="http://schemas.microsoft.com/office/drawing/2014/main" id="{3878D39F-8E89-4C31-B4F1-DA509B13CDF8}"/>
               </a:ext>
             </a:extLst>
           </p:cNvPr>
@@ -11137,7 +11137,7 @@
           <p:cNvPr id="10" name="Freeform 10">
             <a:extLst xmlns:a="http://schemas.openxmlformats.org/drawingml/2006/main">
               <a:ext uri="{FF2B5EF4-FFF2-40B4-BE49-F238E27FC236}">
-                <a16:creationId xmlns:a16="http://schemas.microsoft.com/office/drawing/2014/main" id="{D6B15FAF-B63D-445A-A801-00658DA2871F}"/>
+                <a16:creationId xmlns:a16="http://schemas.microsoft.com/office/drawing/2014/main" id="{C4331467-BDF3-4CC5-A5CA-2EA07A5985D9}"/>
               </a:ext>
             </a:extLst>
           </p:cNvPr>
@@ -11185,7 +11185,7 @@
           <p:cNvPr id="12" name="Freeform 12">
             <a:extLst xmlns:a="http://schemas.openxmlformats.org/drawingml/2006/main">
               <a:ext uri="{FF2B5EF4-FFF2-40B4-BE49-F238E27FC236}">
-                <a16:creationId xmlns:a16="http://schemas.microsoft.com/office/drawing/2014/main" id="{3360862A-0F93-40A2-961E-FE9BDADE409A}"/>
+                <a16:creationId xmlns:a16="http://schemas.microsoft.com/office/drawing/2014/main" id="{A2429DCE-F6F1-4B5C-9FD5-8E7F6D81CE66}"/>
               </a:ext>
             </a:extLst>
           </p:cNvPr>
@@ -11244,7 +11244,7 @@
           <p:cNvPr id="13" name="TextBox 13">
             <a:extLst xmlns:a="http://schemas.openxmlformats.org/drawingml/2006/main">
               <a:ext uri="{FF2B5EF4-FFF2-40B4-BE49-F238E27FC236}">
-                <a16:creationId xmlns:a16="http://schemas.microsoft.com/office/drawing/2014/main" id="{42CE6122-343C-4F8C-A2B6-A66C6AE7A8DE}"/>
+                <a16:creationId xmlns:a16="http://schemas.microsoft.com/office/drawing/2014/main" id="{58E3C7B9-167A-4333-B579-DBAB3ED4530B}"/>
               </a:ext>
             </a:extLst>
           </p:cNvPr>
@@ -11284,7 +11284,7 @@
           <p:cNvPr id="14" name="Freeform 14">
             <a:extLst xmlns:a="http://schemas.openxmlformats.org/drawingml/2006/main">
               <a:ext uri="{FF2B5EF4-FFF2-40B4-BE49-F238E27FC236}">
-                <a16:creationId xmlns:a16="http://schemas.microsoft.com/office/drawing/2014/main" id="{CF44FEB9-6801-4D38-A1B6-2F6A0F044D76}"/>
+                <a16:creationId xmlns:a16="http://schemas.microsoft.com/office/drawing/2014/main" id="{8D78BCF3-A4AA-4DA6-B892-A6FE974B8903}"/>
               </a:ext>
             </a:extLst>
           </p:cNvPr>
@@ -11332,7 +11332,7 @@
           <p:cNvPr id="15" name="Freeform 15">
             <a:extLst xmlns:a="http://schemas.openxmlformats.org/drawingml/2006/main">
               <a:ext uri="{FF2B5EF4-FFF2-40B4-BE49-F238E27FC236}">
-                <a16:creationId xmlns:a16="http://schemas.microsoft.com/office/drawing/2014/main" id="{9F638F20-FF79-4E43-832F-7350BF9E033E}"/>
+                <a16:creationId xmlns:a16="http://schemas.microsoft.com/office/drawing/2014/main" id="{88DE9B9F-9373-4E68-BF15-1B689EFA21D1}"/>
               </a:ext>
             </a:extLst>
           </p:cNvPr>
@@ -11380,7 +11380,7 @@
           <p:cNvPr id="16" name="TextBox 16">
             <a:extLst xmlns:a="http://schemas.openxmlformats.org/drawingml/2006/main">
               <a:ext uri="{FF2B5EF4-FFF2-40B4-BE49-F238E27FC236}">
-                <a16:creationId xmlns:a16="http://schemas.microsoft.com/office/drawing/2014/main" id="{7CA4B91F-D025-451C-A883-3305AED3CE04}"/>
+                <a16:creationId xmlns:a16="http://schemas.microsoft.com/office/drawing/2014/main" id="{9DF9D66C-41DA-4A97-9BBE-FCB9FC837BE3}"/>
               </a:ext>
             </a:extLst>
           </p:cNvPr>
@@ -11432,7 +11432,7 @@
           <p:cNvPr id="17" name="TextBox 17">
             <a:extLst xmlns:a="http://schemas.openxmlformats.org/drawingml/2006/main">
               <a:ext uri="{FF2B5EF4-FFF2-40B4-BE49-F238E27FC236}">
-                <a16:creationId xmlns:a16="http://schemas.microsoft.com/office/drawing/2014/main" id="{6ECFE17E-9CC4-4B6E-9C0E-C8041D09A483}"/>
+                <a16:creationId xmlns:a16="http://schemas.microsoft.com/office/drawing/2014/main" id="{28CBBE2E-B993-46FD-AB4F-FB84E14ACC8B}"/>
               </a:ext>
             </a:extLst>
           </p:cNvPr>
@@ -11593,7 +11593,7 @@
           <p:cNvPr id="18" name="TextBox 18">
             <a:extLst xmlns:a="http://schemas.openxmlformats.org/drawingml/2006/main">
               <a:ext uri="{FF2B5EF4-FFF2-40B4-BE49-F238E27FC236}">
-                <a16:creationId xmlns:a16="http://schemas.microsoft.com/office/drawing/2014/main" id="{E8DC47B0-42C6-49DC-B636-C193D3CD14F7}"/>
+                <a16:creationId xmlns:a16="http://schemas.microsoft.com/office/drawing/2014/main" id="{21927A1B-B4E0-49E9-9FF0-6040FEA304DC}"/>
               </a:ext>
             </a:extLst>
           </p:cNvPr>
@@ -11647,7 +11647,7 @@
           <p:cNvPr id="19" name="TextBox 19">
             <a:extLst xmlns:a="http://schemas.openxmlformats.org/drawingml/2006/main">
               <a:ext uri="{FF2B5EF4-FFF2-40B4-BE49-F238E27FC236}">
-                <a16:creationId xmlns:a16="http://schemas.microsoft.com/office/drawing/2014/main" id="{CB3264EA-8C0D-4ABF-AE84-AE6E0D781EEC}"/>
+                <a16:creationId xmlns:a16="http://schemas.microsoft.com/office/drawing/2014/main" id="{4A147D38-718C-4400-8AE0-AB4959067481}"/>
               </a:ext>
             </a:extLst>
           </p:cNvPr>
@@ -11699,7 +11699,7 @@
           <p:cNvPr id="20" name="TextBox 20">
             <a:extLst xmlns:a="http://schemas.openxmlformats.org/drawingml/2006/main">
               <a:ext uri="{FF2B5EF4-FFF2-40B4-BE49-F238E27FC236}">
-                <a16:creationId xmlns:a16="http://schemas.microsoft.com/office/drawing/2014/main" id="{8F7877DF-7E1F-484A-9965-79809C9DC5C6}"/>
+                <a16:creationId xmlns:a16="http://schemas.microsoft.com/office/drawing/2014/main" id="{931AEB59-EC1D-4946-A051-5DF7D8A338D0}"/>
               </a:ext>
             </a:extLst>
           </p:cNvPr>
@@ -11751,7 +11751,7 @@
           <p:cNvPr id="21" name="TextBox 21">
             <a:extLst xmlns:a="http://schemas.openxmlformats.org/drawingml/2006/main">
               <a:ext uri="{FF2B5EF4-FFF2-40B4-BE49-F238E27FC236}">
-                <a16:creationId xmlns:a16="http://schemas.microsoft.com/office/drawing/2014/main" id="{F23AEE0C-31E0-499B-AFE2-FA4CA505B002}"/>
+                <a16:creationId xmlns:a16="http://schemas.microsoft.com/office/drawing/2014/main" id="{E59BB929-BF35-401D-A790-2D126B23CDEA}"/>
               </a:ext>
             </a:extLst>
           </p:cNvPr>
@@ -11803,7 +11803,7 @@
           <p:cNvPr id="22" name="TextBox 22">
             <a:extLst xmlns:a="http://schemas.openxmlformats.org/drawingml/2006/main">
               <a:ext uri="{FF2B5EF4-FFF2-40B4-BE49-F238E27FC236}">
-                <a16:creationId xmlns:a16="http://schemas.microsoft.com/office/drawing/2014/main" id="{11B0A4A3-8903-4B69-8D84-6759DDB33D7F}"/>
+                <a16:creationId xmlns:a16="http://schemas.microsoft.com/office/drawing/2014/main" id="{F4F6C722-42E7-46C5-BA94-567D0B2E6658}"/>
               </a:ext>
             </a:extLst>
           </p:cNvPr>
@@ -11855,7 +11855,7 @@
           <p:cNvPr id="23" name="TextBox 23">
             <a:extLst xmlns:a="http://schemas.openxmlformats.org/drawingml/2006/main">
               <a:ext uri="{FF2B5EF4-FFF2-40B4-BE49-F238E27FC236}">
-                <a16:creationId xmlns:a16="http://schemas.microsoft.com/office/drawing/2014/main" id="{089CE975-1C8A-498C-A630-B7869EB69B5E}"/>
+                <a16:creationId xmlns:a16="http://schemas.microsoft.com/office/drawing/2014/main" id="{B392AF73-E5B9-4F04-A4FE-3D9DE6C77DB8}"/>
               </a:ext>
             </a:extLst>
           </p:cNvPr>
@@ -11907,7 +11907,7 @@
           <p:cNvPr id="24" name="內容_12_主推：聯合改善＋12公尺緩衝">
             <a:extLst xmlns:a="http://schemas.openxmlformats.org/drawingml/2006/main">
               <a:ext uri="{FF2B5EF4-FFF2-40B4-BE49-F238E27FC236}">
-                <a16:creationId xmlns:a16="http://schemas.microsoft.com/office/drawing/2014/main" id="{5C9DD203-4BA0-4DE7-A1B7-A0B0082E836A}"/>
+                <a16:creationId xmlns:a16="http://schemas.microsoft.com/office/drawing/2014/main" id="{230A7A05-4493-4B05-87F4-70A2E4ED767F}"/>
               </a:ext>
             </a:extLst>
           </p:cNvPr>
@@ -12065,7 +12065,7 @@
           <p:cNvPr id="25" name="內容_12_有服務要求才採用，8公尺為備">
             <a:extLst xmlns:a="http://schemas.openxmlformats.org/drawingml/2006/main">
               <a:ext uri="{FF2B5EF4-FFF2-40B4-BE49-F238E27FC236}">
-                <a16:creationId xmlns:a16="http://schemas.microsoft.com/office/drawing/2014/main" id="{E9A6C0F2-69AD-43EA-92A8-259094CA838E}"/>
+                <a16:creationId xmlns:a16="http://schemas.microsoft.com/office/drawing/2014/main" id="{A5FEAB65-2526-4376-B57C-EF781A70BC74}"/>
               </a:ext>
             </a:extLst>
           </p:cNvPr>
@@ -12223,7 +12223,7 @@
           <p:cNvPr id="26" name="">
             <a:extLst xmlns:a="http://schemas.openxmlformats.org/drawingml/2006/main">
               <a:ext uri="{FF2B5EF4-FFF2-40B4-BE49-F238E27FC236}">
-                <a16:creationId xmlns:a16="http://schemas.microsoft.com/office/drawing/2014/main" id="{AB19B044-85C9-4CE0-8C0B-460BCBCA7F28}"/>
+                <a16:creationId xmlns:a16="http://schemas.microsoft.com/office/drawing/2014/main" id="{68F5C192-F1BD-4A33-8676-09B76ECAA20B}"/>
               </a:ext>
             </a:extLst>
           </p:cNvPr>
@@ -13037,7 +13037,7 @@
           <p:cNvPr id="27" name="內容_12_本表是短波尖峰情境；各方案3">
             <a:extLst xmlns:a="http://schemas.openxmlformats.org/drawingml/2006/main">
               <a:ext uri="{FF2B5EF4-FFF2-40B4-BE49-F238E27FC236}">
-                <a16:creationId xmlns:a16="http://schemas.microsoft.com/office/drawing/2014/main" id="{47101364-EF7C-45F3-82EF-94A74985540D}"/>
+                <a16:creationId xmlns:a16="http://schemas.microsoft.com/office/drawing/2014/main" id="{38DDEFC2-CDCF-4DF6-8C80-60ABE471EBD6}"/>
               </a:ext>
             </a:extLst>
           </p:cNvPr>
@@ -13195,7 +13195,7 @@
           <p:cNvPr id="28" name="內容_12_主推12公尺採額外信賴區間上">
             <a:extLst xmlns:a="http://schemas.openxmlformats.org/drawingml/2006/main">
               <a:ext uri="{FF2B5EF4-FFF2-40B4-BE49-F238E27FC236}">
-                <a16:creationId xmlns:a16="http://schemas.microsoft.com/office/drawing/2014/main" id="{78315E8C-6F93-443B-804F-65BF63BF5228}"/>
+                <a16:creationId xmlns:a16="http://schemas.microsoft.com/office/drawing/2014/main" id="{EF4DEDA7-9410-4E39-9793-EE2213A14248}"/>
               </a:ext>
             </a:extLst>
           </p:cNvPr>
@@ -13351,7 +13351,7 @@
     </p:spTree>
     <p:extLst>
       <p:ext uri="{BB962C8B-B14F-4D97-AF65-F5344CB8AC3E}">
-        <p14:creationId xmlns:p14="http://schemas.microsoft.com/office/powerpoint/2010/main" val="87870982"/>
+        <p14:creationId xmlns:p14="http://schemas.microsoft.com/office/powerpoint/2010/main" val="2070118241"/>
       </p:ext>
     </p:extLst>
   </p:cSld>
@@ -13375,7 +13375,7 @@
           <p:cNvPr id="2" name="Freeform 2">
             <a:extLst xmlns:a="http://schemas.openxmlformats.org/drawingml/2006/main">
               <a:ext uri="{FF2B5EF4-FFF2-40B4-BE49-F238E27FC236}">
-                <a16:creationId xmlns:a16="http://schemas.microsoft.com/office/drawing/2014/main" id="{D16E4213-55D5-4D6A-91B1-EF82153DA850}"/>
+                <a16:creationId xmlns:a16="http://schemas.microsoft.com/office/drawing/2014/main" id="{F2F480D8-15F0-4D7C-9490-73F364B54AA5}"/>
               </a:ext>
             </a:extLst>
           </p:cNvPr>
@@ -13413,7 +13413,7 @@
             </a:pathLst>
           </a:custGeom>
           <a:blipFill xmlns:a="http://schemas.openxmlformats.org/drawingml/2006/main">
-            <a:blip xmlns:r="http://schemas.openxmlformats.org/officeDocument/2006/relationships" r:embed="R91ff395e48d148bb"/>
+            <a:blip xmlns:r="http://schemas.openxmlformats.org/officeDocument/2006/relationships" r:embed="R2cd8c87b54d94920"/>
             <a:stretch>
               <a:fillRect l="-35258" t="-5555" r="-24931" b="-72434"/>
             </a:stretch>
@@ -13425,7 +13425,7 @@
           <p:cNvPr id="4" name="Freeform 4">
             <a:extLst xmlns:a="http://schemas.openxmlformats.org/drawingml/2006/main">
               <a:ext uri="{FF2B5EF4-FFF2-40B4-BE49-F238E27FC236}">
-                <a16:creationId xmlns:a16="http://schemas.microsoft.com/office/drawing/2014/main" id="{77C387DD-8787-4F2F-BBEB-9D3AD4B6B187}"/>
+                <a16:creationId xmlns:a16="http://schemas.microsoft.com/office/drawing/2014/main" id="{48061CFB-CE20-4464-972B-A3AE113AB5E7}"/>
               </a:ext>
             </a:extLst>
           </p:cNvPr>
@@ -13499,7 +13499,7 @@
           <p:cNvPr id="5" name="TextBox 5">
             <a:extLst xmlns:a="http://schemas.openxmlformats.org/drawingml/2006/main">
               <a:ext uri="{FF2B5EF4-FFF2-40B4-BE49-F238E27FC236}">
-                <a16:creationId xmlns:a16="http://schemas.microsoft.com/office/drawing/2014/main" id="{D95B309F-5BD9-4584-987D-DD135D52E889}"/>
+                <a16:creationId xmlns:a16="http://schemas.microsoft.com/office/drawing/2014/main" id="{88BA951C-7482-4932-A188-116A959ACCE1}"/>
               </a:ext>
             </a:extLst>
           </p:cNvPr>
@@ -13535,7 +13535,7 @@
           <p:cNvPr id="6" name="Freeform 6">
             <a:extLst xmlns:a="http://schemas.openxmlformats.org/drawingml/2006/main">
               <a:ext uri="{FF2B5EF4-FFF2-40B4-BE49-F238E27FC236}">
-                <a16:creationId xmlns:a16="http://schemas.microsoft.com/office/drawing/2014/main" id="{26539721-88B2-46F2-9655-E672565D775E}"/>
+                <a16:creationId xmlns:a16="http://schemas.microsoft.com/office/drawing/2014/main" id="{BBCD2865-3592-4F8B-B4D0-055081BA4599}"/>
               </a:ext>
             </a:extLst>
           </p:cNvPr>
@@ -13573,7 +13573,7 @@
             </a:pathLst>
           </a:custGeom>
           <a:blipFill xmlns:a="http://schemas.openxmlformats.org/drawingml/2006/main">
-            <a:blip xmlns:r="http://schemas.openxmlformats.org/officeDocument/2006/relationships" r:embed="R374163514b3244fb"/>
+            <a:blip xmlns:r="http://schemas.openxmlformats.org/officeDocument/2006/relationships" r:embed="R0aed0ec5a49b4f1f"/>
             <a:stretch>
               <a:fillRect l="0" t="0" r="0" b="0"/>
             </a:stretch>
@@ -13585,7 +13585,7 @@
           <p:cNvPr id="7" name="TextBox 7">
             <a:extLst xmlns:a="http://schemas.openxmlformats.org/drawingml/2006/main">
               <a:ext uri="{FF2B5EF4-FFF2-40B4-BE49-F238E27FC236}">
-                <a16:creationId xmlns:a16="http://schemas.microsoft.com/office/drawing/2014/main" id="{A152ED35-C196-4918-AC0C-188DBE26B235}"/>
+                <a16:creationId xmlns:a16="http://schemas.microsoft.com/office/drawing/2014/main" id="{796FC870-D1A1-4FE4-B7E8-678B42721C58}"/>
               </a:ext>
             </a:extLst>
           </p:cNvPr>
@@ -13746,7 +13746,7 @@
           <p:cNvPr id="8" name="TextBox 8">
             <a:extLst xmlns:a="http://schemas.openxmlformats.org/drawingml/2006/main">
               <a:ext uri="{FF2B5EF4-FFF2-40B4-BE49-F238E27FC236}">
-                <a16:creationId xmlns:a16="http://schemas.microsoft.com/office/drawing/2014/main" id="{C6B82643-BECB-4475-8717-2A356FEEAF5C}"/>
+                <a16:creationId xmlns:a16="http://schemas.microsoft.com/office/drawing/2014/main" id="{B2179683-B33E-48ED-AFED-84730EDF1284}"/>
               </a:ext>
             </a:extLst>
           </p:cNvPr>
@@ -13800,7 +13800,7 @@
           <p:cNvPr id="9" name="TextBox 9">
             <a:extLst xmlns:a="http://schemas.openxmlformats.org/drawingml/2006/main">
               <a:ext uri="{FF2B5EF4-FFF2-40B4-BE49-F238E27FC236}">
-                <a16:creationId xmlns:a16="http://schemas.microsoft.com/office/drawing/2014/main" id="{3F223F3B-6392-4E63-9D74-9D8D1C21BCCD}"/>
+                <a16:creationId xmlns:a16="http://schemas.microsoft.com/office/drawing/2014/main" id="{33864A15-0227-46AE-B76A-8D34788F6C6F}"/>
               </a:ext>
             </a:extLst>
           </p:cNvPr>
@@ -13852,7 +13852,7 @@
           <p:cNvPr id="10" name="TextBox 10">
             <a:extLst xmlns:a="http://schemas.openxmlformats.org/drawingml/2006/main">
               <a:ext uri="{FF2B5EF4-FFF2-40B4-BE49-F238E27FC236}">
-                <a16:creationId xmlns:a16="http://schemas.microsoft.com/office/drawing/2014/main" id="{21529C91-E416-4366-AA1D-5FAC1C539B85}"/>
+                <a16:creationId xmlns:a16="http://schemas.microsoft.com/office/drawing/2014/main" id="{9F1BCBFE-5FBA-4895-B7A0-87E9729EF8D0}"/>
               </a:ext>
             </a:extLst>
           </p:cNvPr>
@@ -13904,7 +13904,7 @@
           <p:cNvPr id="11" name="TextBox 11">
             <a:extLst xmlns:a="http://schemas.openxmlformats.org/drawingml/2006/main">
               <a:ext uri="{FF2B5EF4-FFF2-40B4-BE49-F238E27FC236}">
-                <a16:creationId xmlns:a16="http://schemas.microsoft.com/office/drawing/2014/main" id="{D5C87AAB-3CC9-4E2C-961E-55A075DA3B9C}"/>
+                <a16:creationId xmlns:a16="http://schemas.microsoft.com/office/drawing/2014/main" id="{3501A4EC-3643-4B9A-9678-38348BBB0AF0}"/>
               </a:ext>
             </a:extLst>
           </p:cNvPr>
@@ -13956,7 +13956,7 @@
           <p:cNvPr id="12" name="Freeform 12">
             <a:extLst xmlns:a="http://schemas.openxmlformats.org/drawingml/2006/main">
               <a:ext uri="{FF2B5EF4-FFF2-40B4-BE49-F238E27FC236}">
-                <a16:creationId xmlns:a16="http://schemas.microsoft.com/office/drawing/2014/main" id="{6AEA3541-E8C1-477E-8C3A-DE1492C5A278}"/>
+                <a16:creationId xmlns:a16="http://schemas.microsoft.com/office/drawing/2014/main" id="{0F3344E4-0B3B-4533-854F-D7960523CA8D}"/>
               </a:ext>
             </a:extLst>
           </p:cNvPr>
@@ -14004,7 +14004,7 @@
           <p:cNvPr id="14" name="Freeform 14">
             <a:extLst xmlns:a="http://schemas.openxmlformats.org/drawingml/2006/main">
               <a:ext uri="{FF2B5EF4-FFF2-40B4-BE49-F238E27FC236}">
-                <a16:creationId xmlns:a16="http://schemas.microsoft.com/office/drawing/2014/main" id="{675E6342-834C-41D8-8522-3285ACB7FE0F}"/>
+                <a16:creationId xmlns:a16="http://schemas.microsoft.com/office/drawing/2014/main" id="{D872FBC6-018C-47F2-9D7B-3D7978C6DB56}"/>
               </a:ext>
             </a:extLst>
           </p:cNvPr>
@@ -14049,7 +14049,7 @@
           <p:cNvPr id="15" name="Freeform 15">
             <a:extLst xmlns:a="http://schemas.openxmlformats.org/drawingml/2006/main">
               <a:ext uri="{FF2B5EF4-FFF2-40B4-BE49-F238E27FC236}">
-                <a16:creationId xmlns:a16="http://schemas.microsoft.com/office/drawing/2014/main" id="{831FE506-F381-438E-96AF-492408B7EABE}"/>
+                <a16:creationId xmlns:a16="http://schemas.microsoft.com/office/drawing/2014/main" id="{92598141-94E4-48F2-BDE9-13BE90EFF5B4}"/>
               </a:ext>
             </a:extLst>
           </p:cNvPr>
@@ -14097,7 +14097,7 @@
           <p:cNvPr id="17" name="Freeform 17">
             <a:extLst xmlns:a="http://schemas.openxmlformats.org/drawingml/2006/main">
               <a:ext uri="{FF2B5EF4-FFF2-40B4-BE49-F238E27FC236}">
-                <a16:creationId xmlns:a16="http://schemas.microsoft.com/office/drawing/2014/main" id="{D661456B-66F8-4FF7-BF81-34CAA4917AF6}"/>
+                <a16:creationId xmlns:a16="http://schemas.microsoft.com/office/drawing/2014/main" id="{E4B4D9FE-D2B1-4D5F-AB5F-84BBF1AD691D}"/>
               </a:ext>
             </a:extLst>
           </p:cNvPr>
@@ -14142,7 +14142,7 @@
           <p:cNvPr id="18" name="內容_13_財務：投資與營運分開">
             <a:extLst xmlns:a="http://schemas.openxmlformats.org/drawingml/2006/main">
               <a:ext uri="{FF2B5EF4-FFF2-40B4-BE49-F238E27FC236}">
-                <a16:creationId xmlns:a16="http://schemas.microsoft.com/office/drawing/2014/main" id="{212AD8A8-DDAA-49C5-BB1F-D9588D0200CD}"/>
+                <a16:creationId xmlns:a16="http://schemas.microsoft.com/office/drawing/2014/main" id="{62D4E8F8-8F46-4F5A-AD2B-B02123CB8BB1}"/>
               </a:ext>
             </a:extLst>
           </p:cNvPr>
@@ -14300,7 +14300,7 @@
           <p:cNvPr id="19" name="內容_13_服務改善，仍無正向回收期">
             <a:extLst xmlns:a="http://schemas.openxmlformats.org/drawingml/2006/main">
               <a:ext uri="{FF2B5EF4-FFF2-40B4-BE49-F238E27FC236}">
-                <a16:creationId xmlns:a16="http://schemas.microsoft.com/office/drawing/2014/main" id="{5396E7FB-CA78-43FE-AA86-A6518BD09C7F}"/>
+                <a16:creationId xmlns:a16="http://schemas.microsoft.com/office/drawing/2014/main" id="{80F35FFC-3835-48D6-826D-D503C07D5681}"/>
               </a:ext>
             </a:extLst>
           </p:cNvPr>
@@ -14458,7 +14458,7 @@
           <p:cNvPr id="20" name="">
             <a:extLst xmlns:a="http://schemas.openxmlformats.org/drawingml/2006/main">
               <a:ext uri="{FF2B5EF4-FFF2-40B4-BE49-F238E27FC236}">
-                <a16:creationId xmlns:a16="http://schemas.microsoft.com/office/drawing/2014/main" id="{A6BBABA1-909F-4666-BA68-5DEDF1E0B201}"/>
+                <a16:creationId xmlns:a16="http://schemas.microsoft.com/office/drawing/2014/main" id="{7F2D627E-B926-42E4-B570-85915CB383B8}"/>
               </a:ext>
             </a:extLst>
           </p:cNvPr>
@@ -15085,7 +15085,7 @@
           <p:cNvPr id="21" name="內容_13_主實驗 1350次的24小時">
             <a:extLst xmlns:a="http://schemas.openxmlformats.org/drawingml/2006/main">
               <a:ext uri="{FF2B5EF4-FFF2-40B4-BE49-F238E27FC236}">
-                <a16:creationId xmlns:a16="http://schemas.microsoft.com/office/drawing/2014/main" id="{EE70BC91-5B8E-476A-813A-C2B599BD6B83}"/>
+                <a16:creationId xmlns:a16="http://schemas.microsoft.com/office/drawing/2014/main" id="{C3576F85-5782-49A4-8BF0-27A1B16594FE}"/>
               </a:ext>
             </a:extLst>
           </p:cNvPr>
@@ -15241,7 +15241,7 @@
     </p:spTree>
     <p:extLst>
       <p:ext uri="{BB962C8B-B14F-4D97-AF65-F5344CB8AC3E}">
-        <p14:creationId xmlns:p14="http://schemas.microsoft.com/office/powerpoint/2010/main" val="277658480"/>
+        <p14:creationId xmlns:p14="http://schemas.microsoft.com/office/powerpoint/2010/main" val="505162148"/>
       </p:ext>
     </p:extLst>
   </p:cSld>
@@ -15265,7 +15265,7 @@
           <p:cNvPr id="2" name="Freeform 2">
             <a:extLst xmlns:a="http://schemas.openxmlformats.org/drawingml/2006/main">
               <a:ext uri="{FF2B5EF4-FFF2-40B4-BE49-F238E27FC236}">
-                <a16:creationId xmlns:a16="http://schemas.microsoft.com/office/drawing/2014/main" id="{F286B556-3F8A-4564-A878-0695E56CCD59}"/>
+                <a16:creationId xmlns:a16="http://schemas.microsoft.com/office/drawing/2014/main" id="{8D6DB995-EB65-47C7-8DF8-88470F4EE164}"/>
               </a:ext>
             </a:extLst>
           </p:cNvPr>
@@ -15303,7 +15303,7 @@
             </a:pathLst>
           </a:custGeom>
           <a:blipFill xmlns:a="http://schemas.openxmlformats.org/drawingml/2006/main">
-            <a:blip xmlns:r="http://schemas.openxmlformats.org/officeDocument/2006/relationships" r:embed="R184db7cb9690440f"/>
+            <a:blip xmlns:r="http://schemas.openxmlformats.org/officeDocument/2006/relationships" r:embed="R2f9474f771fc4cc2"/>
             <a:stretch>
               <a:fillRect l="-35258" t="-5555" r="-24931" b="-72434"/>
             </a:stretch>
@@ -15315,7 +15315,7 @@
           <p:cNvPr id="4" name="Freeform 4">
             <a:extLst xmlns:a="http://schemas.openxmlformats.org/drawingml/2006/main">
               <a:ext uri="{FF2B5EF4-FFF2-40B4-BE49-F238E27FC236}">
-                <a16:creationId xmlns:a16="http://schemas.microsoft.com/office/drawing/2014/main" id="{073B9B98-D47F-4F45-AEFF-0B478B039D13}"/>
+                <a16:creationId xmlns:a16="http://schemas.microsoft.com/office/drawing/2014/main" id="{6E543763-9501-4D5D-B573-E49A4BA8E17D}"/>
               </a:ext>
             </a:extLst>
           </p:cNvPr>
@@ -15389,7 +15389,7 @@
           <p:cNvPr id="5" name="TextBox 5">
             <a:extLst xmlns:a="http://schemas.openxmlformats.org/drawingml/2006/main">
               <a:ext uri="{FF2B5EF4-FFF2-40B4-BE49-F238E27FC236}">
-                <a16:creationId xmlns:a16="http://schemas.microsoft.com/office/drawing/2014/main" id="{2539E50A-DB16-4A86-AC34-D7AC3C3A97EC}"/>
+                <a16:creationId xmlns:a16="http://schemas.microsoft.com/office/drawing/2014/main" id="{8C2CE558-5BBD-4B02-A951-D676162A94D5}"/>
               </a:ext>
             </a:extLst>
           </p:cNvPr>
@@ -15425,7 +15425,7 @@
           <p:cNvPr id="6" name="Freeform 6">
             <a:extLst xmlns:a="http://schemas.openxmlformats.org/drawingml/2006/main">
               <a:ext uri="{FF2B5EF4-FFF2-40B4-BE49-F238E27FC236}">
-                <a16:creationId xmlns:a16="http://schemas.microsoft.com/office/drawing/2014/main" id="{5F55F929-1E20-43BB-AEDB-5978B06C4E93}"/>
+                <a16:creationId xmlns:a16="http://schemas.microsoft.com/office/drawing/2014/main" id="{2526EC2C-EE7A-44D7-B005-E9942C381AAF}"/>
               </a:ext>
             </a:extLst>
           </p:cNvPr>
@@ -15463,7 +15463,7 @@
             </a:pathLst>
           </a:custGeom>
           <a:blipFill xmlns:a="http://schemas.openxmlformats.org/drawingml/2006/main">
-            <a:blip xmlns:r="http://schemas.openxmlformats.org/officeDocument/2006/relationships" r:embed="R8349cc93021648d4"/>
+            <a:blip xmlns:r="http://schemas.openxmlformats.org/officeDocument/2006/relationships" r:embed="Re8827a7bdd5c4962"/>
             <a:stretch>
               <a:fillRect l="0" t="0" r="0" b="0"/>
             </a:stretch>
@@ -15475,7 +15475,7 @@
           <p:cNvPr id="7" name="Freeform 7">
             <a:extLst xmlns:a="http://schemas.openxmlformats.org/drawingml/2006/main">
               <a:ext uri="{FF2B5EF4-FFF2-40B4-BE49-F238E27FC236}">
-                <a16:creationId xmlns:a16="http://schemas.microsoft.com/office/drawing/2014/main" id="{91960055-FD3C-491E-8173-1AA8084F3E27}"/>
+                <a16:creationId xmlns:a16="http://schemas.microsoft.com/office/drawing/2014/main" id="{0B82C4C2-0B38-46A0-BDA3-A9ACC6AFF310}"/>
               </a:ext>
             </a:extLst>
           </p:cNvPr>
@@ -15523,7 +15523,7 @@
           <p:cNvPr id="8" name="TextBox 8">
             <a:extLst xmlns:a="http://schemas.openxmlformats.org/drawingml/2006/main">
               <a:ext uri="{FF2B5EF4-FFF2-40B4-BE49-F238E27FC236}">
-                <a16:creationId xmlns:a16="http://schemas.microsoft.com/office/drawing/2014/main" id="{16D12D85-F5CF-4837-B4EA-DFD9C6766D16}"/>
+                <a16:creationId xmlns:a16="http://schemas.microsoft.com/office/drawing/2014/main" id="{AA0282DC-0AB0-4628-A9D9-3D9EF4F68BF6}"/>
               </a:ext>
             </a:extLst>
           </p:cNvPr>
@@ -15684,7 +15684,7 @@
           <p:cNvPr id="9" name="TextBox 9">
             <a:extLst xmlns:a="http://schemas.openxmlformats.org/drawingml/2006/main">
               <a:ext uri="{FF2B5EF4-FFF2-40B4-BE49-F238E27FC236}">
-                <a16:creationId xmlns:a16="http://schemas.microsoft.com/office/drawing/2014/main" id="{BC5F5482-FB0A-49DE-A3A1-01DEB43B5CF5}"/>
+                <a16:creationId xmlns:a16="http://schemas.microsoft.com/office/drawing/2014/main" id="{A2ECCAB4-C87A-4039-84B0-12205D05124B}"/>
               </a:ext>
             </a:extLst>
           </p:cNvPr>
@@ -15738,7 +15738,7 @@
           <p:cNvPr id="10" name="TextBox 10">
             <a:extLst xmlns:a="http://schemas.openxmlformats.org/drawingml/2006/main">
               <a:ext uri="{FF2B5EF4-FFF2-40B4-BE49-F238E27FC236}">
-                <a16:creationId xmlns:a16="http://schemas.microsoft.com/office/drawing/2014/main" id="{3A6918FF-828C-4F2E-A699-EF3F28F09CD5}"/>
+                <a16:creationId xmlns:a16="http://schemas.microsoft.com/office/drawing/2014/main" id="{3FB23778-980B-4E59-96F2-EA802896F2B1}"/>
               </a:ext>
             </a:extLst>
           </p:cNvPr>
@@ -15790,7 +15790,7 @@
           <p:cNvPr id="11" name="TextBox 11">
             <a:extLst xmlns:a="http://schemas.openxmlformats.org/drawingml/2006/main">
               <a:ext uri="{FF2B5EF4-FFF2-40B4-BE49-F238E27FC236}">
-                <a16:creationId xmlns:a16="http://schemas.microsoft.com/office/drawing/2014/main" id="{672F772C-C06D-4142-9178-D1FFFB286144}"/>
+                <a16:creationId xmlns:a16="http://schemas.microsoft.com/office/drawing/2014/main" id="{384F8092-3AA9-4358-A9C1-CBFBE1180441}"/>
               </a:ext>
             </a:extLst>
           </p:cNvPr>
@@ -15842,7 +15842,7 @@
           <p:cNvPr id="12" name="TextBox 12">
             <a:extLst xmlns:a="http://schemas.openxmlformats.org/drawingml/2006/main">
               <a:ext uri="{FF2B5EF4-FFF2-40B4-BE49-F238E27FC236}">
-                <a16:creationId xmlns:a16="http://schemas.microsoft.com/office/drawing/2014/main" id="{2277C1F5-FE36-4FE0-9A46-6FC8EF3EFEC0}"/>
+                <a16:creationId xmlns:a16="http://schemas.microsoft.com/office/drawing/2014/main" id="{7384B6DC-1605-4529-941A-5F4F871801FA}"/>
               </a:ext>
             </a:extLst>
           </p:cNvPr>
@@ -15894,7 +15894,7 @@
           <p:cNvPr id="13" name="Freeform 13">
             <a:extLst xmlns:a="http://schemas.openxmlformats.org/drawingml/2006/main">
               <a:ext uri="{FF2B5EF4-FFF2-40B4-BE49-F238E27FC236}">
-                <a16:creationId xmlns:a16="http://schemas.microsoft.com/office/drawing/2014/main" id="{B26DE0E6-7375-43C1-A0FC-2CE3DB0C019E}"/>
+                <a16:creationId xmlns:a16="http://schemas.microsoft.com/office/drawing/2014/main" id="{A2B0DEF3-1782-4B4A-82A3-4F697C621410}"/>
               </a:ext>
             </a:extLst>
           </p:cNvPr>
@@ -15942,7 +15942,7 @@
           <p:cNvPr id="14" name="內容_14_展示：指標要可比較">
             <a:extLst xmlns:a="http://schemas.openxmlformats.org/drawingml/2006/main">
               <a:ext uri="{FF2B5EF4-FFF2-40B4-BE49-F238E27FC236}">
-                <a16:creationId xmlns:a16="http://schemas.microsoft.com/office/drawing/2014/main" id="{7ABAFD0A-2090-4F26-9957-FE7F5E463D00}"/>
+                <a16:creationId xmlns:a16="http://schemas.microsoft.com/office/drawing/2014/main" id="{D78BD11C-CA9C-4EB3-A3FC-4F396D6E1432}"/>
               </a:ext>
             </a:extLst>
           </p:cNvPr>
@@ -16100,7 +16100,7 @@
           <p:cNvPr id="15" name="內容_14_設備占比熱圖，取代含糊著色">
             <a:extLst xmlns:a="http://schemas.openxmlformats.org/drawingml/2006/main">
               <a:ext uri="{FF2B5EF4-FFF2-40B4-BE49-F238E27FC236}">
-                <a16:creationId xmlns:a16="http://schemas.microsoft.com/office/drawing/2014/main" id="{2FD07968-1A6C-4579-8BC4-B51025C96847}"/>
+                <a16:creationId xmlns:a16="http://schemas.microsoft.com/office/drawing/2014/main" id="{0DB22683-5414-46F0-B28F-1234C80C4033}"/>
               </a:ext>
             </a:extLst>
           </p:cNvPr>
@@ -16258,7 +16258,7 @@
           <p:cNvPr id="16" name="內容_14_前＝改善前現況；後＝12公尺">
             <a:extLst xmlns:a="http://schemas.openxmlformats.org/drawingml/2006/main">
               <a:ext uri="{FF2B5EF4-FFF2-40B4-BE49-F238E27FC236}">
-                <a16:creationId xmlns:a16="http://schemas.microsoft.com/office/drawing/2014/main" id="{6288EE56-46E6-4F7A-9B3D-E726370C48BB}"/>
+                <a16:creationId xmlns:a16="http://schemas.microsoft.com/office/drawing/2014/main" id="{B91D2C83-7A45-4DFA-8EDA-57C432CEF592}"/>
               </a:ext>
             </a:extLst>
           </p:cNvPr>
@@ -16416,7 +16416,7 @@
           <p:cNvPr id="17" name="">
             <a:extLst xmlns:a="http://schemas.openxmlformats.org/drawingml/2006/main">
               <a:ext uri="{FF2B5EF4-FFF2-40B4-BE49-F238E27FC236}">
-                <a16:creationId xmlns:a16="http://schemas.microsoft.com/office/drawing/2014/main" id="{60606812-DC57-4D00-A080-F86408A1F7A3}"/>
+                <a16:creationId xmlns:a16="http://schemas.microsoft.com/office/drawing/2014/main" id="{D0A35A7F-74D1-4BEF-B5AE-B006FD3B90A8}"/>
               </a:ext>
             </a:extLst>
           </p:cNvPr>
@@ -17978,7 +17978,7 @@
           <p:cNvPr id="18" name="內容_14_加工色階0–100%；阻塞色">
             <a:extLst xmlns:a="http://schemas.openxmlformats.org/drawingml/2006/main">
               <a:ext uri="{FF2B5EF4-FFF2-40B4-BE49-F238E27FC236}">
-                <a16:creationId xmlns:a16="http://schemas.microsoft.com/office/drawing/2014/main" id="{80A69E4F-6549-44F5-B674-5DB2C9C85E9F}"/>
+                <a16:creationId xmlns:a16="http://schemas.microsoft.com/office/drawing/2014/main" id="{07C710AB-5B78-48BE-990A-05BA50FE6E6B}"/>
               </a:ext>
             </a:extLst>
           </p:cNvPr>
@@ -18159,7 +18159,7 @@
           <p:cNvPr id="19" name="內容_14_在製量趨勢／清洗狀態">
             <a:extLst xmlns:a="http://schemas.openxmlformats.org/drawingml/2006/main">
               <a:ext uri="{FF2B5EF4-FFF2-40B4-BE49-F238E27FC236}">
-                <a16:creationId xmlns:a16="http://schemas.microsoft.com/office/drawing/2014/main" id="{1B8CBFBC-F061-4894-9E38-7303269EBB89}"/>
+                <a16:creationId xmlns:a16="http://schemas.microsoft.com/office/drawing/2014/main" id="{EA939E67-684E-47A0-B829-CA97C8338A5D}"/>
               </a:ext>
             </a:extLst>
           </p:cNvPr>
@@ -18317,7 +18317,7 @@
           <p:cNvPr id="20" name="">
             <a:extLst xmlns:a="http://schemas.openxmlformats.org/drawingml/2006/main">
               <a:ext uri="{FF2B5EF4-FFF2-40B4-BE49-F238E27FC236}">
-                <a16:creationId xmlns:a16="http://schemas.microsoft.com/office/drawing/2014/main" id="{ACA38DB3-FE76-458E-9155-92D91A17C55F}"/>
+                <a16:creationId xmlns:a16="http://schemas.microsoft.com/office/drawing/2014/main" id="{F141449D-0E43-48CE-B79A-50DB82BCFE63}"/>
               </a:ext>
             </a:extLst>
           </p:cNvPr>
@@ -18327,7 +18327,7 @@
           <p:nvPr/>
         </p:nvPicPr>
         <p:blipFill>
-          <a:blip xmlns:r="http://schemas.openxmlformats.org/officeDocument/2006/relationships" xmlns:a="http://schemas.openxmlformats.org/drawingml/2006/main" r:embed="R7a6d87b3ac9b414d"/>
+          <a:blip xmlns:r="http://schemas.openxmlformats.org/officeDocument/2006/relationships" xmlns:a="http://schemas.openxmlformats.org/drawingml/2006/main" r:embed="Rd82029037ac44ae3"/>
           <a:srcRect xmlns:a="http://schemas.openxmlformats.org/drawingml/2006/main" l="0" t="53500" r="10000" b="7000"/>
           <a:stretch xmlns:a="http://schemas.openxmlformats.org/drawingml/2006/main"/>
         </p:blipFill>
@@ -18346,7 +18346,7 @@
           <p:cNvPr id="21" name="內容_14_3D圖改稱設備績效著色截圖。">
             <a:extLst xmlns:a="http://schemas.openxmlformats.org/drawingml/2006/main">
               <a:ext uri="{FF2B5EF4-FFF2-40B4-BE49-F238E27FC236}">
-                <a16:creationId xmlns:a16="http://schemas.microsoft.com/office/drawing/2014/main" id="{1577E2E4-55AB-46F2-B3C0-F1C2683EDD32}"/>
+                <a16:creationId xmlns:a16="http://schemas.microsoft.com/office/drawing/2014/main" id="{44565EE0-CBCF-44C6-AA04-16B56FEA0B41}"/>
               </a:ext>
             </a:extLst>
           </p:cNvPr>
@@ -18502,7 +18502,7 @@
     </p:spTree>
     <p:extLst>
       <p:ext uri="{BB962C8B-B14F-4D97-AF65-F5344CB8AC3E}">
-        <p14:creationId xmlns:p14="http://schemas.microsoft.com/office/powerpoint/2010/main" val="442984991"/>
+        <p14:creationId xmlns:p14="http://schemas.microsoft.com/office/powerpoint/2010/main" val="802695828"/>
       </p:ext>
     </p:extLst>
   </p:cSld>
@@ -18526,7 +18526,7 @@
           <p:cNvPr id="2" name="Freeform 2">
             <a:extLst xmlns:a="http://schemas.openxmlformats.org/drawingml/2006/main">
               <a:ext uri="{FF2B5EF4-FFF2-40B4-BE49-F238E27FC236}">
-                <a16:creationId xmlns:a16="http://schemas.microsoft.com/office/drawing/2014/main" id="{2D5FACE5-6670-48F5-B43A-2E23C4BD552F}"/>
+                <a16:creationId xmlns:a16="http://schemas.microsoft.com/office/drawing/2014/main" id="{FD26DB9C-D3E6-42C1-8B25-AC4ED9DA1023}"/>
               </a:ext>
             </a:extLst>
           </p:cNvPr>
@@ -18564,7 +18564,7 @@
             </a:pathLst>
           </a:custGeom>
           <a:blipFill xmlns:a="http://schemas.openxmlformats.org/drawingml/2006/main">
-            <a:blip xmlns:r="http://schemas.openxmlformats.org/officeDocument/2006/relationships" r:embed="Rc72495e3b99b4fb2"/>
+            <a:blip xmlns:r="http://schemas.openxmlformats.org/officeDocument/2006/relationships" r:embed="Rdcb8938edb0149fc"/>
             <a:stretch>
               <a:fillRect l="-4156" t="0" r="-2479" b="-18484"/>
             </a:stretch>
@@ -18576,7 +18576,7 @@
           <p:cNvPr id="3" name="Freeform 3">
             <a:extLst xmlns:a="http://schemas.openxmlformats.org/drawingml/2006/main">
               <a:ext uri="{FF2B5EF4-FFF2-40B4-BE49-F238E27FC236}">
-                <a16:creationId xmlns:a16="http://schemas.microsoft.com/office/drawing/2014/main" id="{0C8077D4-1B1E-4B56-B6D2-0135C89E2482}"/>
+                <a16:creationId xmlns:a16="http://schemas.microsoft.com/office/drawing/2014/main" id="{C89B82AD-DAD0-4B6B-B380-7C8148DC9383}"/>
               </a:ext>
             </a:extLst>
           </p:cNvPr>
@@ -18614,7 +18614,7 @@
             </a:pathLst>
           </a:custGeom>
           <a:blipFill xmlns:a="http://schemas.openxmlformats.org/drawingml/2006/main">
-            <a:blip xmlns:r="http://schemas.openxmlformats.org/officeDocument/2006/relationships" r:embed="R407d394364414af7"/>
+            <a:blip xmlns:r="http://schemas.openxmlformats.org/officeDocument/2006/relationships" r:embed="R5237223522f24bcb"/>
             <a:stretch>
               <a:fillRect l="0" t="0" r="0" b="0"/>
             </a:stretch>
@@ -18626,7 +18626,7 @@
           <p:cNvPr id="5" name="Freeform 5">
             <a:extLst xmlns:a="http://schemas.openxmlformats.org/drawingml/2006/main">
               <a:ext uri="{FF2B5EF4-FFF2-40B4-BE49-F238E27FC236}">
-                <a16:creationId xmlns:a16="http://schemas.microsoft.com/office/drawing/2014/main" id="{A60E0CA1-8C2F-41B4-921D-60889A1AD1E5}"/>
+                <a16:creationId xmlns:a16="http://schemas.microsoft.com/office/drawing/2014/main" id="{78437739-B6D1-48AC-9C0E-4088339AA318}"/>
               </a:ext>
             </a:extLst>
           </p:cNvPr>
@@ -18700,7 +18700,7 @@
           <p:cNvPr id="6" name="TextBox 6">
             <a:extLst xmlns:a="http://schemas.openxmlformats.org/drawingml/2006/main">
               <a:ext uri="{FF2B5EF4-FFF2-40B4-BE49-F238E27FC236}">
-                <a16:creationId xmlns:a16="http://schemas.microsoft.com/office/drawing/2014/main" id="{8440F016-432A-431C-AC7E-7FEA03F429DB}"/>
+                <a16:creationId xmlns:a16="http://schemas.microsoft.com/office/drawing/2014/main" id="{5D5E747B-35CA-4A03-A9F6-3144F26C2C1D}"/>
               </a:ext>
             </a:extLst>
           </p:cNvPr>
@@ -18736,7 +18736,7 @@
           <p:cNvPr id="7" name="Freeform 7">
             <a:extLst xmlns:a="http://schemas.openxmlformats.org/drawingml/2006/main">
               <a:ext uri="{FF2B5EF4-FFF2-40B4-BE49-F238E27FC236}">
-                <a16:creationId xmlns:a16="http://schemas.microsoft.com/office/drawing/2014/main" id="{A1537AC8-6F1A-4F1E-8A6B-26D8034B734A}"/>
+                <a16:creationId xmlns:a16="http://schemas.microsoft.com/office/drawing/2014/main" id="{BA066395-FA35-4E38-B661-C54DBDE79A3B}"/>
               </a:ext>
             </a:extLst>
           </p:cNvPr>
@@ -18784,7 +18784,7 @@
           <p:cNvPr id="8" name="TextBox 8">
             <a:extLst xmlns:a="http://schemas.openxmlformats.org/drawingml/2006/main">
               <a:ext uri="{FF2B5EF4-FFF2-40B4-BE49-F238E27FC236}">
-                <a16:creationId xmlns:a16="http://schemas.microsoft.com/office/drawing/2014/main" id="{8399903F-D560-4C06-BAC7-304AB104891E}"/>
+                <a16:creationId xmlns:a16="http://schemas.microsoft.com/office/drawing/2014/main" id="{CAA118C0-2710-466A-905C-CA94F43024C7}"/>
               </a:ext>
             </a:extLst>
           </p:cNvPr>
@@ -18838,7 +18838,7 @@
           <p:cNvPr id="9" name="TextBox 9">
             <a:extLst xmlns:a="http://schemas.openxmlformats.org/drawingml/2006/main">
               <a:ext uri="{FF2B5EF4-FFF2-40B4-BE49-F238E27FC236}">
-                <a16:creationId xmlns:a16="http://schemas.microsoft.com/office/drawing/2014/main" id="{B3E1DBB0-9F2A-40FB-81C6-6ADA6DE37196}"/>
+                <a16:creationId xmlns:a16="http://schemas.microsoft.com/office/drawing/2014/main" id="{B9AAA9BD-40FB-4CD0-B8E9-49B021CF2936}"/>
               </a:ext>
             </a:extLst>
           </p:cNvPr>
@@ -18890,7 +18890,7 @@
           <p:cNvPr id="10" name="TextBox 10">
             <a:extLst xmlns:a="http://schemas.openxmlformats.org/drawingml/2006/main">
               <a:ext uri="{FF2B5EF4-FFF2-40B4-BE49-F238E27FC236}">
-                <a16:creationId xmlns:a16="http://schemas.microsoft.com/office/drawing/2014/main" id="{AC5C9941-9E2D-4CFF-9745-C2A7BE077BB4}"/>
+                <a16:creationId xmlns:a16="http://schemas.microsoft.com/office/drawing/2014/main" id="{936B2AF8-E9AF-4151-9A02-0E102E2BF327}"/>
               </a:ext>
             </a:extLst>
           </p:cNvPr>
@@ -19051,7 +19051,7 @@
           <p:cNvPr id="11" name="TextBox 11">
             <a:extLst xmlns:a="http://schemas.openxmlformats.org/drawingml/2006/main">
               <a:ext uri="{FF2B5EF4-FFF2-40B4-BE49-F238E27FC236}">
-                <a16:creationId xmlns:a16="http://schemas.microsoft.com/office/drawing/2014/main" id="{109F7638-170A-4277-AFD1-C26F1505D92D}"/>
+                <a16:creationId xmlns:a16="http://schemas.microsoft.com/office/drawing/2014/main" id="{4DFA9A72-19F3-4EF7-B725-1B1E1D14AD42}"/>
               </a:ext>
             </a:extLst>
           </p:cNvPr>
@@ -19103,7 +19103,7 @@
           <p:cNvPr id="12" name="Freeform 12">
             <a:extLst xmlns:a="http://schemas.openxmlformats.org/drawingml/2006/main">
               <a:ext uri="{FF2B5EF4-FFF2-40B4-BE49-F238E27FC236}">
-                <a16:creationId xmlns:a16="http://schemas.microsoft.com/office/drawing/2014/main" id="{39403F6D-45CC-44CF-BAF0-CA7A84980B5B}"/>
+                <a16:creationId xmlns:a16="http://schemas.microsoft.com/office/drawing/2014/main" id="{624FF258-588D-4A50-9D80-33D8771BCB4A}"/>
               </a:ext>
             </a:extLst>
           </p:cNvPr>
@@ -19151,7 +19151,7 @@
           <p:cNvPr id="13" name="">
             <a:extLst xmlns:a="http://schemas.openxmlformats.org/drawingml/2006/main">
               <a:ext uri="{FF2B5EF4-FFF2-40B4-BE49-F238E27FC236}">
-                <a16:creationId xmlns:a16="http://schemas.microsoft.com/office/drawing/2014/main" id="{E23364A6-FF07-4723-B850-F5ED53409CF6}"/>
+                <a16:creationId xmlns:a16="http://schemas.microsoft.com/office/drawing/2014/main" id="{087CBCB9-DAC4-4A26-9A1E-2FB266A10227}"/>
               </a:ext>
             </a:extLst>
           </p:cNvPr>
@@ -19161,7 +19161,7 @@
           <p:nvPr/>
         </p:nvPicPr>
         <p:blipFill>
-          <a:blip xmlns:r="http://schemas.openxmlformats.org/officeDocument/2006/relationships" xmlns:a="http://schemas.openxmlformats.org/drawingml/2006/main" r:embed="Rc98cad8c30f94f68"/>
+          <a:blip xmlns:r="http://schemas.openxmlformats.org/officeDocument/2006/relationships" xmlns:a="http://schemas.openxmlformats.org/drawingml/2006/main" r:embed="Rb1ecefd1573344cd"/>
           <a:srcRect xmlns:a="http://schemas.openxmlformats.org/drawingml/2006/main" l="21025" t="21025" r="0" b="0"/>
           <a:stretch xmlns:a="http://schemas.openxmlformats.org/drawingml/2006/main"/>
         </p:blipFill>
@@ -19180,7 +19180,7 @@
           <p:cNvPr id="14" name="內容_15_主推聯合改善＋12公尺緩衝">
             <a:extLst xmlns:a="http://schemas.openxmlformats.org/drawingml/2006/main">
               <a:ext uri="{FF2B5EF4-FFF2-40B4-BE49-F238E27FC236}">
-                <a16:creationId xmlns:a16="http://schemas.microsoft.com/office/drawing/2014/main" id="{3F639895-466F-492E-8568-A758798A35EC}"/>
+                <a16:creationId xmlns:a16="http://schemas.microsoft.com/office/drawing/2014/main" id="{410E93CE-113B-4975-994C-819A7C4F1DE9}"/>
               </a:ext>
             </a:extLst>
           </p:cNvPr>
@@ -19338,7 +19338,7 @@
           <p:cNvPr id="15" name="內容_15_短波尖峰有服務要求才採用；投">
             <a:extLst xmlns:a="http://schemas.openxmlformats.org/drawingml/2006/main">
               <a:ext uri="{FF2B5EF4-FFF2-40B4-BE49-F238E27FC236}">
-                <a16:creationId xmlns:a16="http://schemas.microsoft.com/office/drawing/2014/main" id="{B500FA03-9579-4C50-9045-9BA9AF5C9B90}"/>
+                <a16:creationId xmlns:a16="http://schemas.microsoft.com/office/drawing/2014/main" id="{28D9F380-0DB0-4142-A724-A69B66FAB7FF}"/>
               </a:ext>
             </a:extLst>
           </p:cNvPr>
@@ -19496,7 +19496,7 @@
           <p:cNvPr id="16" name="內容_15_只加緩衝不足；8公尺聯合方案">
             <a:extLst xmlns:a="http://schemas.openxmlformats.org/drawingml/2006/main">
               <a:ext uri="{FF2B5EF4-FFF2-40B4-BE49-F238E27FC236}">
-                <a16:creationId xmlns:a16="http://schemas.microsoft.com/office/drawing/2014/main" id="{D3ADA446-03A0-49DC-8B4F-60F3DEC4C982}"/>
+                <a16:creationId xmlns:a16="http://schemas.microsoft.com/office/drawing/2014/main" id="{0451B994-209C-4EEC-B6E9-7754CC4C86FD}"/>
               </a:ext>
             </a:extLst>
           </p:cNvPr>
@@ -19654,7 +19654,7 @@
           <p:cNvPr id="17" name="內容_15_答辯問答　原生模型、資料庫、">
             <a:extLst xmlns:a="http://schemas.openxmlformats.org/drawingml/2006/main">
               <a:ext uri="{FF2B5EF4-FFF2-40B4-BE49-F238E27FC236}">
-                <a16:creationId xmlns:a16="http://schemas.microsoft.com/office/drawing/2014/main" id="{F609F420-E8CA-499A-A674-25C98CE03A5C}"/>
+                <a16:creationId xmlns:a16="http://schemas.microsoft.com/office/drawing/2014/main" id="{BECD7887-091C-432D-A9B4-9BB15BAEAF11}"/>
               </a:ext>
             </a:extLst>
           </p:cNvPr>
@@ -19810,7 +19810,7 @@
     </p:spTree>
     <p:extLst>
       <p:ext uri="{BB962C8B-B14F-4D97-AF65-F5344CB8AC3E}">
-        <p14:creationId xmlns:p14="http://schemas.microsoft.com/office/powerpoint/2010/main" val="729423682"/>
+        <p14:creationId xmlns:p14="http://schemas.microsoft.com/office/powerpoint/2010/main" val="1646975911"/>
       </p:ext>
     </p:extLst>
   </p:cSld>
@@ -19834,7 +19834,7 @@
           <p:cNvPr id="2" name="Freeform 2">
             <a:extLst xmlns:a="http://schemas.openxmlformats.org/drawingml/2006/main">
               <a:ext uri="{FF2B5EF4-FFF2-40B4-BE49-F238E27FC236}">
-                <a16:creationId xmlns:a16="http://schemas.microsoft.com/office/drawing/2014/main" id="{C4333568-05C8-4E28-A7F5-95EDCEF9E4F8}"/>
+                <a16:creationId xmlns:a16="http://schemas.microsoft.com/office/drawing/2014/main" id="{E6640D45-AC17-4761-8326-C7D49ADBAF26}"/>
               </a:ext>
             </a:extLst>
           </p:cNvPr>
@@ -19872,7 +19872,7 @@
             </a:pathLst>
           </a:custGeom>
           <a:blipFill xmlns:a="http://schemas.openxmlformats.org/drawingml/2006/main">
-            <a:blip xmlns:r="http://schemas.openxmlformats.org/officeDocument/2006/relationships" r:embed="R18d5b0636136425a"/>
+            <a:blip xmlns:r="http://schemas.openxmlformats.org/officeDocument/2006/relationships" r:embed="R03fd43b154bd49f0"/>
             <a:stretch>
               <a:fillRect l="-35258" t="-5555" r="-24931" b="-72434"/>
             </a:stretch>
@@ -19884,7 +19884,7 @@
           <p:cNvPr id="4" name="Freeform 4">
             <a:extLst xmlns:a="http://schemas.openxmlformats.org/drawingml/2006/main">
               <a:ext uri="{FF2B5EF4-FFF2-40B4-BE49-F238E27FC236}">
-                <a16:creationId xmlns:a16="http://schemas.microsoft.com/office/drawing/2014/main" id="{A94D0ED5-FD39-43D0-9BBD-208F4073C9F9}"/>
+                <a16:creationId xmlns:a16="http://schemas.microsoft.com/office/drawing/2014/main" id="{9153196C-9214-4773-A28E-1F513EACDA2F}"/>
               </a:ext>
             </a:extLst>
           </p:cNvPr>
@@ -19958,7 +19958,7 @@
           <p:cNvPr id="5" name="TextBox 5">
             <a:extLst xmlns:a="http://schemas.openxmlformats.org/drawingml/2006/main">
               <a:ext uri="{FF2B5EF4-FFF2-40B4-BE49-F238E27FC236}">
-                <a16:creationId xmlns:a16="http://schemas.microsoft.com/office/drawing/2014/main" id="{39F9FFF6-590B-42AD-B871-782C5000CAD0}"/>
+                <a16:creationId xmlns:a16="http://schemas.microsoft.com/office/drawing/2014/main" id="{C48DEA3C-1992-456A-833A-069E5F08A993}"/>
               </a:ext>
             </a:extLst>
           </p:cNvPr>
@@ -19994,7 +19994,7 @@
           <p:cNvPr id="6" name="Freeform 6">
             <a:extLst xmlns:a="http://schemas.openxmlformats.org/drawingml/2006/main">
               <a:ext uri="{FF2B5EF4-FFF2-40B4-BE49-F238E27FC236}">
-                <a16:creationId xmlns:a16="http://schemas.microsoft.com/office/drawing/2014/main" id="{43124F56-1AEA-4339-BC72-A3AA20A9F73A}"/>
+                <a16:creationId xmlns:a16="http://schemas.microsoft.com/office/drawing/2014/main" id="{D4ACAC53-44DD-4BC8-A1D8-426AA926BBF8}"/>
               </a:ext>
             </a:extLst>
           </p:cNvPr>
@@ -20042,7 +20042,7 @@
           <p:cNvPr id="7" name="Freeform 7">
             <a:extLst xmlns:a="http://schemas.openxmlformats.org/drawingml/2006/main">
               <a:ext uri="{FF2B5EF4-FFF2-40B4-BE49-F238E27FC236}">
-                <a16:creationId xmlns:a16="http://schemas.microsoft.com/office/drawing/2014/main" id="{0B6720F8-8344-4151-9A1F-93DD80AB0C99}"/>
+                <a16:creationId xmlns:a16="http://schemas.microsoft.com/office/drawing/2014/main" id="{11073B9C-145D-4F58-AA04-F5BAC83CA8F2}"/>
               </a:ext>
             </a:extLst>
           </p:cNvPr>
@@ -20080,10 +20080,10 @@
             </a:pathLst>
           </a:custGeom>
           <a:blipFill xmlns:a="http://schemas.openxmlformats.org/drawingml/2006/main">
-            <a:blip xmlns:r="http://schemas.openxmlformats.org/officeDocument/2006/relationships" r:embed="Rb4c94726c68c48d4">
+            <a:blip xmlns:r="http://schemas.openxmlformats.org/officeDocument/2006/relationships" r:embed="Ra5f83fbc15ce4a89">
               <a:extLst>
                 <a:ext uri="{96DAC541-7B7A-43D3-8B79-37D633B846F1}">
-                  <asvg:svgBlip xmlns:asvg="http://schemas.microsoft.com/office/drawing/2016/SVG/main" r:embed="R45c99dde17f147de"/>
+                  <asvg:svgBlip xmlns:asvg="http://schemas.microsoft.com/office/drawing/2016/SVG/main" r:embed="Re04de250419b4a27"/>
                 </a:ext>
               </a:extLst>
             </a:blip>
@@ -20098,7 +20098,7 @@
           <p:cNvPr id="8" name="Freeform 8">
             <a:extLst xmlns:a="http://schemas.openxmlformats.org/drawingml/2006/main">
               <a:ext uri="{FF2B5EF4-FFF2-40B4-BE49-F238E27FC236}">
-                <a16:creationId xmlns:a16="http://schemas.microsoft.com/office/drawing/2014/main" id="{A66291FE-8677-4009-8320-A8C7737E5661}"/>
+                <a16:creationId xmlns:a16="http://schemas.microsoft.com/office/drawing/2014/main" id="{AD99454C-B275-40C7-9B9A-E93718976BD9}"/>
               </a:ext>
             </a:extLst>
           </p:cNvPr>
@@ -20136,10 +20136,10 @@
             </a:pathLst>
           </a:custGeom>
           <a:blipFill xmlns:a="http://schemas.openxmlformats.org/drawingml/2006/main">
-            <a:blip xmlns:r="http://schemas.openxmlformats.org/officeDocument/2006/relationships" r:embed="Rb4c94726c68c48d4">
+            <a:blip xmlns:r="http://schemas.openxmlformats.org/officeDocument/2006/relationships" r:embed="Ra5f83fbc15ce4a89">
               <a:extLst>
                 <a:ext uri="{96DAC541-7B7A-43D3-8B79-37D633B846F1}">
-                  <asvg:svgBlip xmlns:asvg="http://schemas.microsoft.com/office/drawing/2016/SVG/main" r:embed="R45c99dde17f147de"/>
+                  <asvg:svgBlip xmlns:asvg="http://schemas.microsoft.com/office/drawing/2016/SVG/main" r:embed="Re04de250419b4a27"/>
                 </a:ext>
               </a:extLst>
             </a:blip>
@@ -20154,7 +20154,7 @@
           <p:cNvPr id="9" name="Freeform 9">
             <a:extLst xmlns:a="http://schemas.openxmlformats.org/drawingml/2006/main">
               <a:ext uri="{FF2B5EF4-FFF2-40B4-BE49-F238E27FC236}">
-                <a16:creationId xmlns:a16="http://schemas.microsoft.com/office/drawing/2014/main" id="{124A2024-4370-43B1-BBCC-68E2B1EC91D9}"/>
+                <a16:creationId xmlns:a16="http://schemas.microsoft.com/office/drawing/2014/main" id="{FFB3B20B-C44F-43B6-AAE6-515E6A1CDBE3}"/>
               </a:ext>
             </a:extLst>
           </p:cNvPr>
@@ -20202,7 +20202,7 @@
           <p:cNvPr id="10" name="Freeform 10">
             <a:extLst xmlns:a="http://schemas.openxmlformats.org/drawingml/2006/main">
               <a:ext uri="{FF2B5EF4-FFF2-40B4-BE49-F238E27FC236}">
-                <a16:creationId xmlns:a16="http://schemas.microsoft.com/office/drawing/2014/main" id="{0E3D5AE7-1C2E-4ED7-AFE7-C615DFB317A7}"/>
+                <a16:creationId xmlns:a16="http://schemas.microsoft.com/office/drawing/2014/main" id="{061D7791-4B83-44EC-B314-8C160BE7609B}"/>
               </a:ext>
             </a:extLst>
           </p:cNvPr>
@@ -20240,7 +20240,7 @@
             </a:pathLst>
           </a:custGeom>
           <a:blipFill xmlns:a="http://schemas.openxmlformats.org/drawingml/2006/main">
-            <a:blip xmlns:r="http://schemas.openxmlformats.org/officeDocument/2006/relationships" r:embed="R59385007c52042e0"/>
+            <a:blip xmlns:r="http://schemas.openxmlformats.org/officeDocument/2006/relationships" r:embed="R57661d670b774e6a"/>
             <a:stretch>
               <a:fillRect l="0" t="0" r="0" b="0"/>
             </a:stretch>
@@ -20252,7 +20252,7 @@
           <p:cNvPr id="11" name="TextBox 11">
             <a:extLst xmlns:a="http://schemas.openxmlformats.org/drawingml/2006/main">
               <a:ext uri="{FF2B5EF4-FFF2-40B4-BE49-F238E27FC236}">
-                <a16:creationId xmlns:a16="http://schemas.microsoft.com/office/drawing/2014/main" id="{EDEC774A-5262-4808-8374-C8FB15F42D39}"/>
+                <a16:creationId xmlns:a16="http://schemas.microsoft.com/office/drawing/2014/main" id="{C148E808-4559-4806-8C99-3DD29A1405DC}"/>
               </a:ext>
             </a:extLst>
           </p:cNvPr>
@@ -20413,7 +20413,7 @@
           <p:cNvPr id="12" name="TextBox 12">
             <a:extLst xmlns:a="http://schemas.openxmlformats.org/drawingml/2006/main">
               <a:ext uri="{FF2B5EF4-FFF2-40B4-BE49-F238E27FC236}">
-                <a16:creationId xmlns:a16="http://schemas.microsoft.com/office/drawing/2014/main" id="{2808648A-7CAC-440C-91EC-23122EEA51A0}"/>
+                <a16:creationId xmlns:a16="http://schemas.microsoft.com/office/drawing/2014/main" id="{469C22E0-0C7F-4072-A20B-F26D2F22EAD7}"/>
               </a:ext>
             </a:extLst>
           </p:cNvPr>
@@ -20465,7 +20465,7 @@
           <p:cNvPr id="13" name="TextBox 13">
             <a:extLst xmlns:a="http://schemas.openxmlformats.org/drawingml/2006/main">
               <a:ext uri="{FF2B5EF4-FFF2-40B4-BE49-F238E27FC236}">
-                <a16:creationId xmlns:a16="http://schemas.microsoft.com/office/drawing/2014/main" id="{9EF05600-469B-424C-84E5-B66FED65F4D2}"/>
+                <a16:creationId xmlns:a16="http://schemas.microsoft.com/office/drawing/2014/main" id="{66B00542-DAED-4502-8A8D-05FFDA42787E}"/>
               </a:ext>
             </a:extLst>
           </p:cNvPr>
@@ -20517,7 +20517,7 @@
           <p:cNvPr id="14" name="TextBox 14">
             <a:extLst xmlns:a="http://schemas.openxmlformats.org/drawingml/2006/main">
               <a:ext uri="{FF2B5EF4-FFF2-40B4-BE49-F238E27FC236}">
-                <a16:creationId xmlns:a16="http://schemas.microsoft.com/office/drawing/2014/main" id="{725E81B4-BE29-4B55-A86F-56EAA7339EA0}"/>
+                <a16:creationId xmlns:a16="http://schemas.microsoft.com/office/drawing/2014/main" id="{8F55669B-4B5F-47D2-B84B-677EF895DF6B}"/>
               </a:ext>
             </a:extLst>
           </p:cNvPr>
@@ -20568,10 +20568,10 @@
       </p:sp>
       <p:sp>
         <p:nvSpPr>
-          <p:cNvPr id="15" name="內容_2_先讀代號">
+          <p:cNvPr id="15" name="內容_2_情境與方案設定">
             <a:extLst xmlns:a="http://schemas.openxmlformats.org/drawingml/2006/main">
               <a:ext uri="{FF2B5EF4-FFF2-40B4-BE49-F238E27FC236}">
-                <a16:creationId xmlns:a16="http://schemas.microsoft.com/office/drawing/2014/main" id="{B8F32FEA-7208-4CCB-B6B3-8E06669BFCDD}"/>
+                <a16:creationId xmlns:a16="http://schemas.microsoft.com/office/drawing/2014/main" id="{91E8E052-5873-499D-94FA-A843DDB3B036}"/>
               </a:ext>
             </a:extLst>
           </p:cNvPr>
@@ -20719,17 +20719,17 @@
                 <a:ea typeface="Microsoft JhengHei"/>
                 <a:cs typeface="Microsoft JhengHei"/>
               </a:rPr>
-              <a:t>先讀代號</a:t>
+              <a:t>情境與方案設定</a:t>
             </a:r>
           </a:p>
         </p:txBody>
       </p:sp>
       <p:sp>
         <p:nvSpPr>
-          <p:cNvPr id="16" name="內容_2_需求情境與改善方案是兩件事">
+          <p:cNvPr id="16" name="內容_2_三種需求情境與五種改善方案">
             <a:extLst xmlns:a="http://schemas.openxmlformats.org/drawingml/2006/main">
               <a:ext uri="{FF2B5EF4-FFF2-40B4-BE49-F238E27FC236}">
-                <a16:creationId xmlns:a16="http://schemas.microsoft.com/office/drawing/2014/main" id="{8445254C-67C1-4368-840C-7F453BCED8C7}"/>
+                <a16:creationId xmlns:a16="http://schemas.microsoft.com/office/drawing/2014/main" id="{A0F0CF37-5FB8-40C6-A6AA-3E4555A967AD}"/>
               </a:ext>
             </a:extLst>
           </p:cNvPr>
@@ -20877,7 +20877,7 @@
                 <a:ea typeface="Microsoft JhengHei"/>
                 <a:cs typeface="Microsoft JhengHei"/>
               </a:rPr>
-              <a:t>需求情境與改善方案是兩件事</a:t>
+              <a:t>三種需求情境與五種改善方案</a:t>
             </a:r>
           </a:p>
         </p:txBody>
@@ -20887,7 +20887,7 @@
           <p:cNvPr id="17" name="">
             <a:extLst xmlns:a="http://schemas.openxmlformats.org/drawingml/2006/main">
               <a:ext uri="{FF2B5EF4-FFF2-40B4-BE49-F238E27FC236}">
-                <a16:creationId xmlns:a16="http://schemas.microsoft.com/office/drawing/2014/main" id="{1534FB80-4BA8-459A-99F2-904004098B17}"/>
+                <a16:creationId xmlns:a16="http://schemas.microsoft.com/office/drawing/2014/main" id="{5B7F7AF0-3ED3-48BB-97E7-BC7499621BF5}"/>
               </a:ext>
             </a:extLst>
           </p:cNvPr>
@@ -20914,7 +20914,7 @@
                     <a:lstStyle/>
                     <a:p>
                       <a:r>
-                        <a:rPr sz="1650" b="1">
+                        <a:rPr sz="1575" b="1">
                           <a:solidFill>
                             <a:srgbClr val="DF96DA"/>
                           </a:solidFill>
@@ -20922,7 +20922,7 @@
                           <a:ea typeface="Microsoft JhengHei"/>
                           <a:cs typeface="Microsoft JhengHei"/>
                         </a:rPr>
-                        <a:t>代碼</a:t>
+                        <a:t>名稱（代號）</a:t>
                       </a:r>
                     </a:p>
                   </a:txBody>
@@ -20962,7 +20962,7 @@
                     <a:lstStyle/>
                     <a:p>
                       <a:r>
-                        <a:rPr sz="1650" b="1">
+                        <a:rPr sz="1575" b="1">
                           <a:solidFill>
                             <a:srgbClr val="DF96DA"/>
                           </a:solidFill>
@@ -20970,7 +20970,7 @@
                           <a:ea typeface="Microsoft JhengHei"/>
                           <a:cs typeface="Microsoft JhengHei"/>
                         </a:rPr>
-                        <a:t>中文名稱</a:t>
+                        <a:t>類別</a:t>
                       </a:r>
                     </a:p>
                   </a:txBody>
@@ -21004,7 +21004,7 @@
                     <a:lstStyle/>
                     <a:p>
                       <a:r>
-                        <a:rPr sz="1650" b="1">
+                        <a:rPr sz="1575" b="1">
                           <a:solidFill>
                             <a:srgbClr val="DF96DA"/>
                           </a:solidFill>
@@ -21048,7 +21048,7 @@
                     <a:lstStyle/>
                     <a:p>
                       <a:r>
-                        <a:rPr sz="1650" b="0">
+                        <a:rPr sz="1575" b="0">
                           <a:solidFill>
                             <a:srgbClr val="F6E0F5"/>
                           </a:solidFill>
@@ -21056,7 +21056,7 @@
                           <a:ea typeface="Microsoft JhengHei"/>
                           <a:cs typeface="Microsoft JhengHei"/>
                         </a:rPr>
-                        <a:t>S0</a:t>
+                        <a:t>平日基準情境（S0）</a:t>
                       </a:r>
                     </a:p>
                   </a:txBody>
@@ -21090,7 +21090,7 @@
                     <a:lstStyle/>
                     <a:p>
                       <a:r>
-                        <a:rPr sz="1650" b="0">
+                        <a:rPr sz="1575" b="0">
                           <a:solidFill>
                             <a:srgbClr val="F6E0F5"/>
                           </a:solidFill>
@@ -21098,7 +21098,7 @@
                           <a:ea typeface="Microsoft JhengHei"/>
                           <a:cs typeface="Microsoft JhengHei"/>
                         </a:rPr>
-                        <a:t>平日基準情境</a:t>
+                        <a:t>需求情境</a:t>
                       </a:r>
                     </a:p>
                   </a:txBody>
@@ -21126,7 +21126,7 @@
                     <a:lstStyle/>
                     <a:p>
                       <a:r>
-                        <a:rPr sz="1650" b="0">
+                        <a:rPr sz="1575" b="0">
                           <a:solidFill>
                             <a:srgbClr val="F6E0F5"/>
                           </a:solidFill>
@@ -21164,7 +21164,7 @@
                     <a:lstStyle/>
                     <a:p>
                       <a:r>
-                        <a:rPr sz="1650" b="0">
+                        <a:rPr sz="1575" b="0">
                           <a:solidFill>
                             <a:srgbClr val="F6E0F5"/>
                           </a:solidFill>
@@ -21172,7 +21172,7 @@
                           <a:ea typeface="Microsoft JhengHei"/>
                           <a:cs typeface="Microsoft JhengHei"/>
                         </a:rPr>
-                        <a:t>S1</a:t>
+                        <a:t>短波尖峰情境（S1）</a:t>
                       </a:r>
                     </a:p>
                   </a:txBody>
@@ -21206,7 +21206,7 @@
                     <a:lstStyle/>
                     <a:p>
                       <a:r>
-                        <a:rPr sz="1650" b="0">
+                        <a:rPr sz="1575" b="0">
                           <a:solidFill>
                             <a:srgbClr val="F6E0F5"/>
                           </a:solidFill>
@@ -21214,7 +21214,7 @@
                           <a:ea typeface="Microsoft JhengHei"/>
                           <a:cs typeface="Microsoft JhengHei"/>
                         </a:rPr>
-                        <a:t>短波尖峰情境</a:t>
+                        <a:t>需求情境</a:t>
                       </a:r>
                     </a:p>
                   </a:txBody>
@@ -21242,7 +21242,7 @@
                     <a:lstStyle/>
                     <a:p>
                       <a:r>
-                        <a:rPr sz="1650" b="0">
+                        <a:rPr sz="1575" b="0">
                           <a:solidFill>
                             <a:srgbClr val="F6E0F5"/>
                           </a:solidFill>
@@ -21280,7 +21280,7 @@
                     <a:lstStyle/>
                     <a:p>
                       <a:r>
-                        <a:rPr sz="1650" b="0">
+                        <a:rPr sz="1575" b="0">
                           <a:solidFill>
                             <a:srgbClr val="F6E0F5"/>
                           </a:solidFill>
@@ -21288,7 +21288,7 @@
                           <a:ea typeface="Microsoft JhengHei"/>
                           <a:cs typeface="Microsoft JhengHei"/>
                         </a:rPr>
-                        <a:t>S1_4.5</a:t>
+                        <a:t>較高短波尖峰情境（S1_4.5）</a:t>
                       </a:r>
                     </a:p>
                   </a:txBody>
@@ -21322,7 +21322,7 @@
                     <a:lstStyle/>
                     <a:p>
                       <a:r>
-                        <a:rPr sz="1650" b="0">
+                        <a:rPr sz="1575" b="0">
                           <a:solidFill>
                             <a:srgbClr val="F6E0F5"/>
                           </a:solidFill>
@@ -21330,7 +21330,7 @@
                           <a:ea typeface="Microsoft JhengHei"/>
                           <a:cs typeface="Microsoft JhengHei"/>
                         </a:rPr>
-                        <a:t>較高短波尖峰情境</a:t>
+                        <a:t>需求情境</a:t>
                       </a:r>
                     </a:p>
                   </a:txBody>
@@ -21358,7 +21358,7 @@
                     <a:lstStyle/>
                     <a:p>
                       <a:r>
-                        <a:rPr sz="1650" b="0">
+                        <a:rPr sz="1575" b="0">
                           <a:solidFill>
                             <a:srgbClr val="F6E0F5"/>
                           </a:solidFill>
@@ -21396,7 +21396,7 @@
                     <a:lstStyle/>
                     <a:p>
                       <a:r>
-                        <a:rPr sz="1650" b="0">
+                        <a:rPr sz="1575" b="0">
                           <a:solidFill>
                             <a:srgbClr val="F6E0F5"/>
                           </a:solidFill>
@@ -21404,7 +21404,7 @@
                           <a:ea typeface="Microsoft JhengHei"/>
                           <a:cs typeface="Microsoft JhengHei"/>
                         </a:rPr>
-                        <a:t>P0（現況）</a:t>
+                        <a:t>維持現況（P0）</a:t>
                       </a:r>
                     </a:p>
                   </a:txBody>
@@ -21438,7 +21438,7 @@
                     <a:lstStyle/>
                     <a:p>
                       <a:r>
-                        <a:rPr sz="1650" b="0">
+                        <a:rPr sz="1575" b="0">
                           <a:solidFill>
                             <a:srgbClr val="F6E0F5"/>
                           </a:solidFill>
@@ -21446,7 +21446,7 @@
                           <a:ea typeface="Microsoft JhengHei"/>
                           <a:cs typeface="Microsoft JhengHei"/>
                         </a:rPr>
-                        <a:t>維持現況</a:t>
+                        <a:t>改善方案</a:t>
                       </a:r>
                     </a:p>
                   </a:txBody>
@@ -21474,7 +21474,7 @@
                     <a:lstStyle/>
                     <a:p>
                       <a:r>
-                        <a:rPr sz="1650" b="0">
+                        <a:rPr sz="1575" b="0">
                           <a:solidFill>
                             <a:srgbClr val="F6E0F5"/>
                           </a:solidFill>
@@ -21512,7 +21512,7 @@
                     <a:lstStyle/>
                     <a:p>
                       <a:r>
-                        <a:rPr sz="1650" b="0">
+                        <a:rPr sz="1575" b="0">
                           <a:solidFill>
                             <a:srgbClr val="F6E0F5"/>
                           </a:solidFill>
@@ -21520,7 +21520,7 @@
                           <a:ea typeface="Microsoft JhengHei"/>
                           <a:cs typeface="Microsoft JhengHei"/>
                         </a:rPr>
-                        <a:t>P1</a:t>
+                        <a:t>增設第二台清洗機（P1）</a:t>
                       </a:r>
                     </a:p>
                   </a:txBody>
@@ -21554,7 +21554,7 @@
                     <a:lstStyle/>
                     <a:p>
                       <a:r>
-                        <a:rPr sz="1650" b="0">
+                        <a:rPr sz="1575" b="0">
                           <a:solidFill>
                             <a:srgbClr val="F6E0F5"/>
                           </a:solidFill>
@@ -21562,7 +21562,7 @@
                           <a:ea typeface="Microsoft JhengHei"/>
                           <a:cs typeface="Microsoft JhengHei"/>
                         </a:rPr>
-                        <a:t>增加第二台清洗機</a:t>
+                        <a:t>改善方案</a:t>
                       </a:r>
                     </a:p>
                   </a:txBody>
@@ -21590,7 +21590,7 @@
                     <a:lstStyle/>
                     <a:p>
                       <a:r>
-                        <a:rPr sz="1650" b="0">
+                        <a:rPr sz="1575" b="0">
                           <a:solidFill>
                             <a:srgbClr val="F6E0F5"/>
                           </a:solidFill>
@@ -21628,7 +21628,7 @@
                     <a:lstStyle/>
                     <a:p>
                       <a:r>
-                        <a:rPr sz="1650" b="0">
+                        <a:rPr sz="1575" b="0">
                           <a:solidFill>
                             <a:srgbClr val="F6E0F5"/>
                           </a:solidFill>
@@ -21636,7 +21636,7 @@
                           <a:ea typeface="Microsoft JhengHei"/>
                           <a:cs typeface="Microsoft JhengHei"/>
                         </a:rPr>
-                        <a:t>P2</a:t>
+                        <a:t>僅加緩衝（P2）</a:t>
                       </a:r>
                     </a:p>
                   </a:txBody>
@@ -21670,7 +21670,7 @@
                     <a:lstStyle/>
                     <a:p>
                       <a:r>
-                        <a:rPr sz="1650" b="0">
+                        <a:rPr sz="1575" b="0">
                           <a:solidFill>
                             <a:srgbClr val="F6E0F5"/>
                           </a:solidFill>
@@ -21678,7 +21678,7 @@
                           <a:ea typeface="Microsoft JhengHei"/>
                           <a:cs typeface="Microsoft JhengHei"/>
                         </a:rPr>
-                        <a:t>僅增加緩衝</a:t>
+                        <a:t>改善方案</a:t>
                       </a:r>
                     </a:p>
                   </a:txBody>
@@ -21706,7 +21706,7 @@
                     <a:lstStyle/>
                     <a:p>
                       <a:r>
-                        <a:rPr sz="1650" b="0">
+                        <a:rPr sz="1575" b="0">
                           <a:solidFill>
                             <a:srgbClr val="F6E0F5"/>
                           </a:solidFill>
@@ -21744,7 +21744,7 @@
                     <a:lstStyle/>
                     <a:p>
                       <a:r>
-                        <a:rPr sz="1650" b="0">
+                        <a:rPr sz="1575" b="0">
                           <a:solidFill>
                             <a:srgbClr val="F6E0F5"/>
                           </a:solidFill>
@@ -21752,7 +21752,7 @@
                           <a:ea typeface="Microsoft JhengHei"/>
                           <a:cs typeface="Microsoft JhengHei"/>
                         </a:rPr>
-                        <a:t>P3</a:t>
+                        <a:t>外包清洗（P3）</a:t>
                       </a:r>
                     </a:p>
                   </a:txBody>
@@ -21786,7 +21786,7 @@
                     <a:lstStyle/>
                     <a:p>
                       <a:r>
-                        <a:rPr sz="1650" b="0">
+                        <a:rPr sz="1575" b="0">
                           <a:solidFill>
                             <a:srgbClr val="F6E0F5"/>
                           </a:solidFill>
@@ -21794,7 +21794,7 @@
                           <a:ea typeface="Microsoft JhengHei"/>
                           <a:cs typeface="Microsoft JhengHei"/>
                         </a:rPr>
-                        <a:t>外包清洗</a:t>
+                        <a:t>改善方案</a:t>
                       </a:r>
                     </a:p>
                   </a:txBody>
@@ -21822,7 +21822,7 @@
                     <a:lstStyle/>
                     <a:p>
                       <a:r>
-                        <a:rPr sz="1650" b="0">
+                        <a:rPr sz="1575" b="0">
                           <a:solidFill>
                             <a:srgbClr val="F6E0F5"/>
                           </a:solidFill>
@@ -21860,7 +21860,7 @@
                     <a:lstStyle/>
                     <a:p>
                       <a:r>
-                        <a:rPr sz="1650" b="0">
+                        <a:rPr sz="1575" b="0">
                           <a:solidFill>
                             <a:srgbClr val="F6E0F5"/>
                           </a:solidFill>
@@ -21868,7 +21868,7 @@
                           <a:ea typeface="Microsoft JhengHei"/>
                           <a:cs typeface="Microsoft JhengHei"/>
                         </a:rPr>
-                        <a:t>P4</a:t>
+                        <a:t>聯合改善（P4）</a:t>
                       </a:r>
                     </a:p>
                   </a:txBody>
@@ -21902,7 +21902,7 @@
                     <a:lstStyle/>
                     <a:p>
                       <a:r>
-                        <a:rPr sz="1650" b="0">
+                        <a:rPr sz="1575" b="0">
                           <a:solidFill>
                             <a:srgbClr val="F6E0F5"/>
                           </a:solidFill>
@@ -21910,7 +21910,7 @@
                           <a:ea typeface="Microsoft JhengHei"/>
                           <a:cs typeface="Microsoft JhengHei"/>
                         </a:rPr>
-                        <a:t>聯合改善</a:t>
+                        <a:t>改善方案</a:t>
                       </a:r>
                     </a:p>
                   </a:txBody>
@@ -21938,7 +21938,7 @@
                     <a:lstStyle/>
                     <a:p>
                       <a:r>
-                        <a:rPr sz="1650" b="0">
+                        <a:rPr sz="1575" b="0">
                           <a:solidFill>
                             <a:srgbClr val="F6E0F5"/>
                           </a:solidFill>
@@ -21975,10 +21975,10 @@
       </p:graphicFrame>
       <p:sp>
         <p:nvSpPr>
-          <p:cNvPr id="18" name="內容_2_S＝需求情境，P＝改善方案；">
+          <p:cNvPr id="18" name="內容_2_需求情境決定到達量，改善方案">
             <a:extLst xmlns:a="http://schemas.openxmlformats.org/drawingml/2006/main">
               <a:ext uri="{FF2B5EF4-FFF2-40B4-BE49-F238E27FC236}">
-                <a16:creationId xmlns:a16="http://schemas.microsoft.com/office/drawing/2014/main" id="{1560078A-CD04-4B9E-AFF0-F11D39470AA9}"/>
+                <a16:creationId xmlns:a16="http://schemas.microsoft.com/office/drawing/2014/main" id="{875F6862-BA9C-4295-8168-D6D0808D2311}"/>
               </a:ext>
             </a:extLst>
           </p:cNvPr>
@@ -22126,7 +22126,7 @@
                 <a:ea typeface="Microsoft JhengHei"/>
                 <a:cs typeface="Microsoft JhengHei"/>
               </a:rPr>
-              <a:t>S＝需求情境，P＝改善方案；m代表公尺，8公尺是緩衝長度；min代表分鐘，h代表小時。</a:t>
+              <a:t>需求情境決定到達量，改善方案決定設備與調度。緩衝長度用公尺，等待時間用分鐘。</a:t>
             </a:r>
           </a:p>
         </p:txBody>
@@ -22134,7 +22134,7 @@
     </p:spTree>
     <p:extLst>
       <p:ext uri="{BB962C8B-B14F-4D97-AF65-F5344CB8AC3E}">
-        <p14:creationId xmlns:p14="http://schemas.microsoft.com/office/powerpoint/2010/main" val="1948526633"/>
+        <p14:creationId xmlns:p14="http://schemas.microsoft.com/office/powerpoint/2010/main" val="149190272"/>
       </p:ext>
     </p:extLst>
   </p:cSld>
@@ -22158,7 +22158,7 @@
           <p:cNvPr id="2" name="Freeform 2">
             <a:extLst xmlns:a="http://schemas.openxmlformats.org/drawingml/2006/main">
               <a:ext uri="{FF2B5EF4-FFF2-40B4-BE49-F238E27FC236}">
-                <a16:creationId xmlns:a16="http://schemas.microsoft.com/office/drawing/2014/main" id="{64830B72-C18E-43E6-BDCE-6164C1187880}"/>
+                <a16:creationId xmlns:a16="http://schemas.microsoft.com/office/drawing/2014/main" id="{78985B8B-A6B5-49EF-80E0-E4799D620A4A}"/>
               </a:ext>
             </a:extLst>
           </p:cNvPr>
@@ -22196,7 +22196,7 @@
             </a:pathLst>
           </a:custGeom>
           <a:blipFill xmlns:a="http://schemas.openxmlformats.org/drawingml/2006/main">
-            <a:blip xmlns:r="http://schemas.openxmlformats.org/officeDocument/2006/relationships" r:embed="R05322418d767471d"/>
+            <a:blip xmlns:r="http://schemas.openxmlformats.org/officeDocument/2006/relationships" r:embed="Ra61bf1f7bcce4054"/>
             <a:stretch>
               <a:fillRect l="-35258" t="-5555" r="-24931" b="-72434"/>
             </a:stretch>
@@ -22208,7 +22208,7 @@
           <p:cNvPr id="4" name="Freeform 4">
             <a:extLst xmlns:a="http://schemas.openxmlformats.org/drawingml/2006/main">
               <a:ext uri="{FF2B5EF4-FFF2-40B4-BE49-F238E27FC236}">
-                <a16:creationId xmlns:a16="http://schemas.microsoft.com/office/drawing/2014/main" id="{317A2325-BFC3-4327-B78A-A57C8EDFCE42}"/>
+                <a16:creationId xmlns:a16="http://schemas.microsoft.com/office/drawing/2014/main" id="{72A452A2-53BD-447B-94FD-C7EEF9589B8B}"/>
               </a:ext>
             </a:extLst>
           </p:cNvPr>
@@ -22282,7 +22282,7 @@
           <p:cNvPr id="5" name="TextBox 5">
             <a:extLst xmlns:a="http://schemas.openxmlformats.org/drawingml/2006/main">
               <a:ext uri="{FF2B5EF4-FFF2-40B4-BE49-F238E27FC236}">
-                <a16:creationId xmlns:a16="http://schemas.microsoft.com/office/drawing/2014/main" id="{EB82EAF7-A3E2-49B2-A229-8C5C62252760}"/>
+                <a16:creationId xmlns:a16="http://schemas.microsoft.com/office/drawing/2014/main" id="{45836DC1-4E58-45B7-922B-D078B0AA265F}"/>
               </a:ext>
             </a:extLst>
           </p:cNvPr>
@@ -22318,7 +22318,7 @@
           <p:cNvPr id="6" name="Freeform 6">
             <a:extLst xmlns:a="http://schemas.openxmlformats.org/drawingml/2006/main">
               <a:ext uri="{FF2B5EF4-FFF2-40B4-BE49-F238E27FC236}">
-                <a16:creationId xmlns:a16="http://schemas.microsoft.com/office/drawing/2014/main" id="{C50331AF-E410-4393-90BD-65EB696EAB1A}"/>
+                <a16:creationId xmlns:a16="http://schemas.microsoft.com/office/drawing/2014/main" id="{08CCB521-23F3-46C1-8891-98B2FDA2E4F8}"/>
               </a:ext>
             </a:extLst>
           </p:cNvPr>
@@ -22366,7 +22366,7 @@
           <p:cNvPr id="7" name="Freeform 7">
             <a:extLst xmlns:a="http://schemas.openxmlformats.org/drawingml/2006/main">
               <a:ext uri="{FF2B5EF4-FFF2-40B4-BE49-F238E27FC236}">
-                <a16:creationId xmlns:a16="http://schemas.microsoft.com/office/drawing/2014/main" id="{A0970212-9BDF-4F0B-AD97-38F4C990111F}"/>
+                <a16:creationId xmlns:a16="http://schemas.microsoft.com/office/drawing/2014/main" id="{BED38AB1-C7E3-4FE1-B079-1438AD12FC59}"/>
               </a:ext>
             </a:extLst>
           </p:cNvPr>
@@ -22404,10 +22404,10 @@
             </a:pathLst>
           </a:custGeom>
           <a:blipFill xmlns:a="http://schemas.openxmlformats.org/drawingml/2006/main">
-            <a:blip xmlns:r="http://schemas.openxmlformats.org/officeDocument/2006/relationships" r:embed="Rb00df977399b4d86">
+            <a:blip xmlns:r="http://schemas.openxmlformats.org/officeDocument/2006/relationships" r:embed="Rd18d9229f6414c4b">
               <a:extLst>
                 <a:ext uri="{96DAC541-7B7A-43D3-8B79-37D633B846F1}">
-                  <asvg:svgBlip xmlns:asvg="http://schemas.microsoft.com/office/drawing/2016/SVG/main" r:embed="Raf5d50fd734e4e00"/>
+                  <asvg:svgBlip xmlns:asvg="http://schemas.microsoft.com/office/drawing/2016/SVG/main" r:embed="Rb695a796b954485f"/>
                 </a:ext>
               </a:extLst>
             </a:blip>
@@ -22422,7 +22422,7 @@
           <p:cNvPr id="8" name="Freeform 8">
             <a:extLst xmlns:a="http://schemas.openxmlformats.org/drawingml/2006/main">
               <a:ext uri="{FF2B5EF4-FFF2-40B4-BE49-F238E27FC236}">
-                <a16:creationId xmlns:a16="http://schemas.microsoft.com/office/drawing/2014/main" id="{55714828-BFE9-4872-95E6-4D3811E345F3}"/>
+                <a16:creationId xmlns:a16="http://schemas.microsoft.com/office/drawing/2014/main" id="{8092908E-094A-4C79-A744-BC13EC5799C2}"/>
               </a:ext>
             </a:extLst>
           </p:cNvPr>
@@ -22460,10 +22460,10 @@
             </a:pathLst>
           </a:custGeom>
           <a:blipFill xmlns:a="http://schemas.openxmlformats.org/drawingml/2006/main">
-            <a:blip xmlns:r="http://schemas.openxmlformats.org/officeDocument/2006/relationships" r:embed="Rb00df977399b4d86">
+            <a:blip xmlns:r="http://schemas.openxmlformats.org/officeDocument/2006/relationships" r:embed="Rd18d9229f6414c4b">
               <a:extLst>
                 <a:ext uri="{96DAC541-7B7A-43D3-8B79-37D633B846F1}">
-                  <asvg:svgBlip xmlns:asvg="http://schemas.microsoft.com/office/drawing/2016/SVG/main" r:embed="Raf5d50fd734e4e00"/>
+                  <asvg:svgBlip xmlns:asvg="http://schemas.microsoft.com/office/drawing/2016/SVG/main" r:embed="Rb695a796b954485f"/>
                 </a:ext>
               </a:extLst>
             </a:blip>
@@ -22478,7 +22478,7 @@
           <p:cNvPr id="9" name="TextBox 9">
             <a:extLst xmlns:a="http://schemas.openxmlformats.org/drawingml/2006/main">
               <a:ext uri="{FF2B5EF4-FFF2-40B4-BE49-F238E27FC236}">
-                <a16:creationId xmlns:a16="http://schemas.microsoft.com/office/drawing/2014/main" id="{485A7F35-5A4C-4603-AC79-34B039707C3C}"/>
+                <a16:creationId xmlns:a16="http://schemas.microsoft.com/office/drawing/2014/main" id="{59D95409-1DFF-41EE-9F89-1A3F9D2D9FB0}"/>
               </a:ext>
             </a:extLst>
           </p:cNvPr>
@@ -22639,7 +22639,7 @@
           <p:cNvPr id="10" name="TextBox 10">
             <a:extLst xmlns:a="http://schemas.openxmlformats.org/drawingml/2006/main">
               <a:ext uri="{FF2B5EF4-FFF2-40B4-BE49-F238E27FC236}">
-                <a16:creationId xmlns:a16="http://schemas.microsoft.com/office/drawing/2014/main" id="{48521113-1CB7-491D-A151-0EBBC4F364E5}"/>
+                <a16:creationId xmlns:a16="http://schemas.microsoft.com/office/drawing/2014/main" id="{D699EBCD-5882-4FF2-B85F-42F3C384809F}"/>
               </a:ext>
             </a:extLst>
           </p:cNvPr>
@@ -22691,7 +22691,7 @@
           <p:cNvPr id="11" name="TextBox 11">
             <a:extLst xmlns:a="http://schemas.openxmlformats.org/drawingml/2006/main">
               <a:ext uri="{FF2B5EF4-FFF2-40B4-BE49-F238E27FC236}">
-                <a16:creationId xmlns:a16="http://schemas.microsoft.com/office/drawing/2014/main" id="{26C0E5D5-F056-4E31-AD40-41F104508234}"/>
+                <a16:creationId xmlns:a16="http://schemas.microsoft.com/office/drawing/2014/main" id="{CAAD0B5A-79F4-4CB1-B2FF-C824638B1A20}"/>
               </a:ext>
             </a:extLst>
           </p:cNvPr>
@@ -22743,7 +22743,7 @@
           <p:cNvPr id="12" name="TextBox 12">
             <a:extLst xmlns:a="http://schemas.openxmlformats.org/drawingml/2006/main">
               <a:ext uri="{FF2B5EF4-FFF2-40B4-BE49-F238E27FC236}">
-                <a16:creationId xmlns:a16="http://schemas.microsoft.com/office/drawing/2014/main" id="{166349A9-2574-41E8-ABE9-E09D4C81DB56}"/>
+                <a16:creationId xmlns:a16="http://schemas.microsoft.com/office/drawing/2014/main" id="{8C14F4B7-EBE1-4DF8-94F6-91F6FB9D7C79}"/>
               </a:ext>
             </a:extLst>
           </p:cNvPr>
@@ -22795,7 +22795,7 @@
           <p:cNvPr id="13" name="Freeform 13">
             <a:extLst xmlns:a="http://schemas.openxmlformats.org/drawingml/2006/main">
               <a:ext uri="{FF2B5EF4-FFF2-40B4-BE49-F238E27FC236}">
-                <a16:creationId xmlns:a16="http://schemas.microsoft.com/office/drawing/2014/main" id="{5AE00000-B7FF-4033-934E-C0ADD82AC5D1}"/>
+                <a16:creationId xmlns:a16="http://schemas.microsoft.com/office/drawing/2014/main" id="{02A3E847-04B2-4901-AE57-A794923FB2F5}"/>
               </a:ext>
             </a:extLst>
           </p:cNvPr>
@@ -22833,7 +22833,7 @@
             </a:pathLst>
           </a:custGeom>
           <a:blipFill xmlns:a="http://schemas.openxmlformats.org/drawingml/2006/main">
-            <a:blip xmlns:r="http://schemas.openxmlformats.org/officeDocument/2006/relationships" r:embed="R1f7da8c8f7de45c2"/>
+            <a:blip xmlns:r="http://schemas.openxmlformats.org/officeDocument/2006/relationships" r:embed="Rb5defca6221a4e15"/>
             <a:stretch>
               <a:fillRect l="0" t="0" r="0" b="0"/>
             </a:stretch>
@@ -22845,7 +22845,7 @@
           <p:cNvPr id="14" name="TextBox 14">
             <a:extLst xmlns:a="http://schemas.openxmlformats.org/drawingml/2006/main">
               <a:ext uri="{FF2B5EF4-FFF2-40B4-BE49-F238E27FC236}">
-                <a16:creationId xmlns:a16="http://schemas.microsoft.com/office/drawing/2014/main" id="{BA0B8662-16F0-429B-8344-FFC4BF1FB62F}"/>
+                <a16:creationId xmlns:a16="http://schemas.microsoft.com/office/drawing/2014/main" id="{E206FCF6-BE8D-402E-A98C-06F5894B4C9D}"/>
               </a:ext>
             </a:extLst>
           </p:cNvPr>
@@ -22899,7 +22899,7 @@
           <p:cNvPr id="15" name="內容_3_先讀指標與數字">
             <a:extLst xmlns:a="http://schemas.openxmlformats.org/drawingml/2006/main">
               <a:ext uri="{FF2B5EF4-FFF2-40B4-BE49-F238E27FC236}">
-                <a16:creationId xmlns:a16="http://schemas.microsoft.com/office/drawing/2014/main" id="{9D7817FC-53D4-4FAD-9105-796B585325C5}"/>
+                <a16:creationId xmlns:a16="http://schemas.microsoft.com/office/drawing/2014/main" id="{0EF2848A-58C5-4FA5-ABE7-43BE354D4B9F}"/>
               </a:ext>
             </a:extLst>
           </p:cNvPr>
@@ -23057,7 +23057,7 @@
           <p:cNvPr id="16" name="內容_3_表中的方括號是平均估計的範圍">
             <a:extLst xmlns:a="http://schemas.openxmlformats.org/drawingml/2006/main">
               <a:ext uri="{FF2B5EF4-FFF2-40B4-BE49-F238E27FC236}">
-                <a16:creationId xmlns:a16="http://schemas.microsoft.com/office/drawing/2014/main" id="{4EF7125F-294D-40E2-8A38-04BEBA088B62}"/>
+                <a16:creationId xmlns:a16="http://schemas.microsoft.com/office/drawing/2014/main" id="{1F5A69DD-0C18-4586-A143-539471994CC0}"/>
               </a:ext>
             </a:extLst>
           </p:cNvPr>
@@ -23215,7 +23215,7 @@
           <p:cNvPr id="17" name="內容_3_數字格式：平均值 [95%信">
             <a:extLst xmlns:a="http://schemas.openxmlformats.org/drawingml/2006/main">
               <a:ext uri="{FF2B5EF4-FFF2-40B4-BE49-F238E27FC236}">
-                <a16:creationId xmlns:a16="http://schemas.microsoft.com/office/drawing/2014/main" id="{CEFB6093-842F-4471-8E96-19427D708791}"/>
+                <a16:creationId xmlns:a16="http://schemas.microsoft.com/office/drawing/2014/main" id="{C62B019C-4AC4-43D9-B9F3-14AD494D982D}"/>
               </a:ext>
             </a:extLst>
           </p:cNvPr>
@@ -23373,7 +23373,7 @@
           <p:cNvPr id="18" name="">
             <a:extLst xmlns:a="http://schemas.openxmlformats.org/drawingml/2006/main">
               <a:ext uri="{FF2B5EF4-FFF2-40B4-BE49-F238E27FC236}">
-                <a16:creationId xmlns:a16="http://schemas.microsoft.com/office/drawing/2014/main" id="{2958F9DE-8F04-4A5C-87F5-984AF22E3293}"/>
+                <a16:creationId xmlns:a16="http://schemas.microsoft.com/office/drawing/2014/main" id="{366BDFAE-DAAE-4040-82A1-3858DB571B52}"/>
               </a:ext>
             </a:extLst>
           </p:cNvPr>
@@ -24000,7 +24000,7 @@
           <p:cNvPr id="19" name="內容_3_每方案重複30次，報平均與9">
             <a:extLst xmlns:a="http://schemas.openxmlformats.org/drawingml/2006/main">
               <a:ext uri="{FF2B5EF4-FFF2-40B4-BE49-F238E27FC236}">
-                <a16:creationId xmlns:a16="http://schemas.microsoft.com/office/drawing/2014/main" id="{E0758B0A-7413-4573-B5D4-0B37407A4626}"/>
+                <a16:creationId xmlns:a16="http://schemas.microsoft.com/office/drawing/2014/main" id="{2D2FC233-3C25-4310-AC21-84AF4505205C}"/>
               </a:ext>
             </a:extLst>
           </p:cNvPr>
@@ -24156,7 +24156,7 @@
     </p:spTree>
     <p:extLst>
       <p:ext uri="{BB962C8B-B14F-4D97-AF65-F5344CB8AC3E}">
-        <p14:creationId xmlns:p14="http://schemas.microsoft.com/office/powerpoint/2010/main" val="314059529"/>
+        <p14:creationId xmlns:p14="http://schemas.microsoft.com/office/powerpoint/2010/main" val="457860364"/>
       </p:ext>
     </p:extLst>
   </p:cSld>
@@ -24180,7 +24180,7 @@
           <p:cNvPr id="2" name="Freeform 2">
             <a:extLst xmlns:a="http://schemas.openxmlformats.org/drawingml/2006/main">
               <a:ext uri="{FF2B5EF4-FFF2-40B4-BE49-F238E27FC236}">
-                <a16:creationId xmlns:a16="http://schemas.microsoft.com/office/drawing/2014/main" id="{84316A11-6113-41BD-A4EA-2CAC175E47F5}"/>
+                <a16:creationId xmlns:a16="http://schemas.microsoft.com/office/drawing/2014/main" id="{7B265A35-ADB3-4B2B-A0BA-B570E6E1D97E}"/>
               </a:ext>
             </a:extLst>
           </p:cNvPr>
@@ -24218,7 +24218,7 @@
             </a:pathLst>
           </a:custGeom>
           <a:blipFill xmlns:a="http://schemas.openxmlformats.org/drawingml/2006/main">
-            <a:blip xmlns:r="http://schemas.openxmlformats.org/officeDocument/2006/relationships" r:embed="Rcc1dbbdeedbf427e"/>
+            <a:blip xmlns:r="http://schemas.openxmlformats.org/officeDocument/2006/relationships" r:embed="R08e5b485363c4696"/>
             <a:stretch>
               <a:fillRect l="-35258" t="-5555" r="-24931" b="-72434"/>
             </a:stretch>
@@ -24230,7 +24230,7 @@
           <p:cNvPr id="4" name="Freeform 4">
             <a:extLst xmlns:a="http://schemas.openxmlformats.org/drawingml/2006/main">
               <a:ext uri="{FF2B5EF4-FFF2-40B4-BE49-F238E27FC236}">
-                <a16:creationId xmlns:a16="http://schemas.microsoft.com/office/drawing/2014/main" id="{457D2A52-F95E-45D7-882C-D0B6BD652F40}"/>
+                <a16:creationId xmlns:a16="http://schemas.microsoft.com/office/drawing/2014/main" id="{546B5B49-FE7E-48E8-8897-28B7486293D5}"/>
               </a:ext>
             </a:extLst>
           </p:cNvPr>
@@ -24304,7 +24304,7 @@
           <p:cNvPr id="5" name="TextBox 5">
             <a:extLst xmlns:a="http://schemas.openxmlformats.org/drawingml/2006/main">
               <a:ext uri="{FF2B5EF4-FFF2-40B4-BE49-F238E27FC236}">
-                <a16:creationId xmlns:a16="http://schemas.microsoft.com/office/drawing/2014/main" id="{7D0A9266-9E5E-4F04-866D-183829C1D651}"/>
+                <a16:creationId xmlns:a16="http://schemas.microsoft.com/office/drawing/2014/main" id="{2AD6863A-5153-4140-BAA7-71327D045B62}"/>
               </a:ext>
             </a:extLst>
           </p:cNvPr>
@@ -24340,7 +24340,7 @@
           <p:cNvPr id="6" name="Freeform 6">
             <a:extLst xmlns:a="http://schemas.openxmlformats.org/drawingml/2006/main">
               <a:ext uri="{FF2B5EF4-FFF2-40B4-BE49-F238E27FC236}">
-                <a16:creationId xmlns:a16="http://schemas.microsoft.com/office/drawing/2014/main" id="{48D35765-942A-40E7-8644-E26CF37AE47A}"/>
+                <a16:creationId xmlns:a16="http://schemas.microsoft.com/office/drawing/2014/main" id="{F1CB3193-9D6F-450F-9AD9-0381493F793B}"/>
               </a:ext>
             </a:extLst>
           </p:cNvPr>
@@ -24378,7 +24378,7 @@
             </a:pathLst>
           </a:custGeom>
           <a:blipFill xmlns:a="http://schemas.openxmlformats.org/drawingml/2006/main">
-            <a:blip xmlns:r="http://schemas.openxmlformats.org/officeDocument/2006/relationships" r:embed="Rb103b94aad3e4714"/>
+            <a:blip xmlns:r="http://schemas.openxmlformats.org/officeDocument/2006/relationships" r:embed="R2b68495f806142d7"/>
             <a:stretch>
               <a:fillRect l="0" t="0" r="0" b="0"/>
             </a:stretch>
@@ -24390,7 +24390,7 @@
           <p:cNvPr id="7" name="Freeform 7">
             <a:extLst xmlns:a="http://schemas.openxmlformats.org/drawingml/2006/main">
               <a:ext uri="{FF2B5EF4-FFF2-40B4-BE49-F238E27FC236}">
-                <a16:creationId xmlns:a16="http://schemas.microsoft.com/office/drawing/2014/main" id="{18A0130D-C320-4BF4-853D-E9AC8C36FD2C}"/>
+                <a16:creationId xmlns:a16="http://schemas.microsoft.com/office/drawing/2014/main" id="{A957D529-2587-4BF9-A2C4-348677B69058}"/>
               </a:ext>
             </a:extLst>
           </p:cNvPr>
@@ -24428,10 +24428,10 @@
             </a:pathLst>
           </a:custGeom>
           <a:blipFill xmlns:a="http://schemas.openxmlformats.org/drawingml/2006/main">
-            <a:blip xmlns:r="http://schemas.openxmlformats.org/officeDocument/2006/relationships" r:embed="R08f2abfc398e4ab4">
+            <a:blip xmlns:r="http://schemas.openxmlformats.org/officeDocument/2006/relationships" r:embed="R8e3f5ed1065345f2">
               <a:extLst>
                 <a:ext uri="{96DAC541-7B7A-43D3-8B79-37D633B846F1}">
-                  <asvg:svgBlip xmlns:asvg="http://schemas.microsoft.com/office/drawing/2016/SVG/main" r:embed="Re0e342745b224f03"/>
+                  <asvg:svgBlip xmlns:asvg="http://schemas.microsoft.com/office/drawing/2016/SVG/main" r:embed="R6a7c1a27b83d4dd3"/>
                 </a:ext>
               </a:extLst>
             </a:blip>
@@ -24446,7 +24446,7 @@
           <p:cNvPr id="8" name="Freeform 8">
             <a:extLst xmlns:a="http://schemas.openxmlformats.org/drawingml/2006/main">
               <a:ext uri="{FF2B5EF4-FFF2-40B4-BE49-F238E27FC236}">
-                <a16:creationId xmlns:a16="http://schemas.microsoft.com/office/drawing/2014/main" id="{5933915F-352C-49FA-A347-6B43943D67FA}"/>
+                <a16:creationId xmlns:a16="http://schemas.microsoft.com/office/drawing/2014/main" id="{FC35061B-C50E-4572-8E05-2D0579A4A56F}"/>
               </a:ext>
             </a:extLst>
           </p:cNvPr>
@@ -24484,10 +24484,10 @@
             </a:pathLst>
           </a:custGeom>
           <a:blipFill xmlns:a="http://schemas.openxmlformats.org/drawingml/2006/main">
-            <a:blip xmlns:r="http://schemas.openxmlformats.org/officeDocument/2006/relationships" r:embed="R08f2abfc398e4ab4">
+            <a:blip xmlns:r="http://schemas.openxmlformats.org/officeDocument/2006/relationships" r:embed="R8e3f5ed1065345f2">
               <a:extLst>
                 <a:ext uri="{96DAC541-7B7A-43D3-8B79-37D633B846F1}">
-                  <asvg:svgBlip xmlns:asvg="http://schemas.microsoft.com/office/drawing/2016/SVG/main" r:embed="Re0e342745b224f03"/>
+                  <asvg:svgBlip xmlns:asvg="http://schemas.microsoft.com/office/drawing/2016/SVG/main" r:embed="R6a7c1a27b83d4dd3"/>
                 </a:ext>
               </a:extLst>
             </a:blip>
@@ -24502,7 +24502,7 @@
           <p:cNvPr id="9" name="Freeform 9">
             <a:extLst xmlns:a="http://schemas.openxmlformats.org/drawingml/2006/main">
               <a:ext uri="{FF2B5EF4-FFF2-40B4-BE49-F238E27FC236}">
-                <a16:creationId xmlns:a16="http://schemas.microsoft.com/office/drawing/2014/main" id="{D2899B2B-1CF2-440F-9546-628358CC180A}"/>
+                <a16:creationId xmlns:a16="http://schemas.microsoft.com/office/drawing/2014/main" id="{8446ED29-0AE7-4989-A4AD-3D1C21167F6C}"/>
               </a:ext>
             </a:extLst>
           </p:cNvPr>
@@ -24550,7 +24550,7 @@
           <p:cNvPr id="10" name="Freeform 10">
             <a:extLst xmlns:a="http://schemas.openxmlformats.org/drawingml/2006/main">
               <a:ext uri="{FF2B5EF4-FFF2-40B4-BE49-F238E27FC236}">
-                <a16:creationId xmlns:a16="http://schemas.microsoft.com/office/drawing/2014/main" id="{5C303221-18C6-47E1-B521-875D41DEC602}"/>
+                <a16:creationId xmlns:a16="http://schemas.microsoft.com/office/drawing/2014/main" id="{63AD508A-1CE3-4CDC-B858-59F2C1F59627}"/>
               </a:ext>
             </a:extLst>
           </p:cNvPr>
@@ -24598,7 +24598,7 @@
           <p:cNvPr id="11" name="TextBox 11">
             <a:extLst xmlns:a="http://schemas.openxmlformats.org/drawingml/2006/main">
               <a:ext uri="{FF2B5EF4-FFF2-40B4-BE49-F238E27FC236}">
-                <a16:creationId xmlns:a16="http://schemas.microsoft.com/office/drawing/2014/main" id="{4FA4B58A-09B9-49E3-9BF6-C2C27EE330B4}"/>
+                <a16:creationId xmlns:a16="http://schemas.microsoft.com/office/drawing/2014/main" id="{1CC23A62-84A1-47C9-BF0E-DE9F57C2C4EF}"/>
               </a:ext>
             </a:extLst>
           </p:cNvPr>
@@ -24759,7 +24759,7 @@
           <p:cNvPr id="12" name="TextBox 12">
             <a:extLst xmlns:a="http://schemas.openxmlformats.org/drawingml/2006/main">
               <a:ext uri="{FF2B5EF4-FFF2-40B4-BE49-F238E27FC236}">
-                <a16:creationId xmlns:a16="http://schemas.microsoft.com/office/drawing/2014/main" id="{9C5A2443-7873-4F62-82F0-28C68F94D441}"/>
+                <a16:creationId xmlns:a16="http://schemas.microsoft.com/office/drawing/2014/main" id="{CA6B788A-8A4E-49EE-9F61-FF0E02A35668}"/>
               </a:ext>
             </a:extLst>
           </p:cNvPr>
@@ -24813,7 +24813,7 @@
           <p:cNvPr id="13" name="TextBox 13">
             <a:extLst xmlns:a="http://schemas.openxmlformats.org/drawingml/2006/main">
               <a:ext uri="{FF2B5EF4-FFF2-40B4-BE49-F238E27FC236}">
-                <a16:creationId xmlns:a16="http://schemas.microsoft.com/office/drawing/2014/main" id="{4B00BFB9-8D5D-4BAC-88E8-286F7160AD8F}"/>
+                <a16:creationId xmlns:a16="http://schemas.microsoft.com/office/drawing/2014/main" id="{FC8177F8-1A2E-448E-9AD9-66FACB69D4C4}"/>
               </a:ext>
             </a:extLst>
           </p:cNvPr>
@@ -24865,7 +24865,7 @@
           <p:cNvPr id="14" name="TextBox 14">
             <a:extLst xmlns:a="http://schemas.openxmlformats.org/drawingml/2006/main">
               <a:ext uri="{FF2B5EF4-FFF2-40B4-BE49-F238E27FC236}">
-                <a16:creationId xmlns:a16="http://schemas.microsoft.com/office/drawing/2014/main" id="{4F65D5D6-8147-4CFD-BBB2-59124187A6CD}"/>
+                <a16:creationId xmlns:a16="http://schemas.microsoft.com/office/drawing/2014/main" id="{B7533ED7-DA82-43AE-9CD2-1D8D15390984}"/>
               </a:ext>
             </a:extLst>
           </p:cNvPr>
@@ -24917,7 +24917,7 @@
           <p:cNvPr id="16" name="Freeform 16">
             <a:extLst xmlns:a="http://schemas.openxmlformats.org/drawingml/2006/main">
               <a:ext uri="{FF2B5EF4-FFF2-40B4-BE49-F238E27FC236}">
-                <a16:creationId xmlns:a16="http://schemas.microsoft.com/office/drawing/2014/main" id="{52E1C491-A989-446F-9018-EF0BA12912E0}"/>
+                <a16:creationId xmlns:a16="http://schemas.microsoft.com/office/drawing/2014/main" id="{004AB030-1B63-4356-B70B-84BB822AADF3}"/>
               </a:ext>
             </a:extLst>
           </p:cNvPr>
@@ -24976,7 +24976,7 @@
           <p:cNvPr id="17" name="TextBox 17">
             <a:extLst xmlns:a="http://schemas.openxmlformats.org/drawingml/2006/main">
               <a:ext uri="{FF2B5EF4-FFF2-40B4-BE49-F238E27FC236}">
-                <a16:creationId xmlns:a16="http://schemas.microsoft.com/office/drawing/2014/main" id="{EC08B9E9-27E8-446A-8FE6-49C8DC0AA408}"/>
+                <a16:creationId xmlns:a16="http://schemas.microsoft.com/office/drawing/2014/main" id="{5D8A6507-C1F1-437D-880D-4A83501C6BEF}"/>
               </a:ext>
             </a:extLst>
           </p:cNvPr>
@@ -25016,7 +25016,7 @@
           <p:cNvPr id="18" name="TextBox 18">
             <a:extLst xmlns:a="http://schemas.openxmlformats.org/drawingml/2006/main">
               <a:ext uri="{FF2B5EF4-FFF2-40B4-BE49-F238E27FC236}">
-                <a16:creationId xmlns:a16="http://schemas.microsoft.com/office/drawing/2014/main" id="{FF53A6F3-B1C0-4F7F-A9D4-4033945993CA}"/>
+                <a16:creationId xmlns:a16="http://schemas.microsoft.com/office/drawing/2014/main" id="{A939D5CF-D5F9-4129-AA0C-F6931B4664EF}"/>
               </a:ext>
             </a:extLst>
           </p:cNvPr>
@@ -25068,7 +25068,7 @@
           <p:cNvPr id="19" name="TextBox 19">
             <a:extLst xmlns:a="http://schemas.openxmlformats.org/drawingml/2006/main">
               <a:ext uri="{FF2B5EF4-FFF2-40B4-BE49-F238E27FC236}">
-                <a16:creationId xmlns:a16="http://schemas.microsoft.com/office/drawing/2014/main" id="{97424E86-E210-4B25-B9FA-1269BFBDBE18}"/>
+                <a16:creationId xmlns:a16="http://schemas.microsoft.com/office/drawing/2014/main" id="{D9C11750-0692-4CAC-84E7-43A6308010C3}"/>
               </a:ext>
             </a:extLst>
           </p:cNvPr>
@@ -25120,7 +25120,7 @@
           <p:cNvPr id="21" name="Freeform 21">
             <a:extLst xmlns:a="http://schemas.openxmlformats.org/drawingml/2006/main">
               <a:ext uri="{FF2B5EF4-FFF2-40B4-BE49-F238E27FC236}">
-                <a16:creationId xmlns:a16="http://schemas.microsoft.com/office/drawing/2014/main" id="{8F7EE56B-75CB-44BB-BEBB-5AA20B3C83B2}"/>
+                <a16:creationId xmlns:a16="http://schemas.microsoft.com/office/drawing/2014/main" id="{3EFB824A-7D09-4EFD-9CBD-26B93FDB4860}"/>
               </a:ext>
             </a:extLst>
           </p:cNvPr>
@@ -25179,7 +25179,7 @@
           <p:cNvPr id="22" name="TextBox 22">
             <a:extLst xmlns:a="http://schemas.openxmlformats.org/drawingml/2006/main">
               <a:ext uri="{FF2B5EF4-FFF2-40B4-BE49-F238E27FC236}">
-                <a16:creationId xmlns:a16="http://schemas.microsoft.com/office/drawing/2014/main" id="{C0E18678-0677-4880-8EA1-3AB5C479E582}"/>
+                <a16:creationId xmlns:a16="http://schemas.microsoft.com/office/drawing/2014/main" id="{E9CE38D6-A604-47D3-910A-2A36829797CC}"/>
               </a:ext>
             </a:extLst>
           </p:cNvPr>
@@ -25219,7 +25219,7 @@
           <p:cNvPr id="23" name="TextBox 23">
             <a:extLst xmlns:a="http://schemas.openxmlformats.org/drawingml/2006/main">
               <a:ext uri="{FF2B5EF4-FFF2-40B4-BE49-F238E27FC236}">
-                <a16:creationId xmlns:a16="http://schemas.microsoft.com/office/drawing/2014/main" id="{6E5E2061-8449-45E8-A925-0871CE016497}"/>
+                <a16:creationId xmlns:a16="http://schemas.microsoft.com/office/drawing/2014/main" id="{1FADBAC5-379C-4394-8B90-11D0299ECDE4}"/>
               </a:ext>
             </a:extLst>
           </p:cNvPr>
@@ -25271,7 +25271,7 @@
           <p:cNvPr id="24" name="TextBox 24">
             <a:extLst xmlns:a="http://schemas.openxmlformats.org/drawingml/2006/main">
               <a:ext uri="{FF2B5EF4-FFF2-40B4-BE49-F238E27FC236}">
-                <a16:creationId xmlns:a16="http://schemas.microsoft.com/office/drawing/2014/main" id="{68F7F21E-5686-4D95-94B3-1182E8B777ED}"/>
+                <a16:creationId xmlns:a16="http://schemas.microsoft.com/office/drawing/2014/main" id="{CC22EFA5-4F84-4C98-8A50-DC55EDC9EAFD}"/>
               </a:ext>
             </a:extLst>
           </p:cNvPr>
@@ -25323,7 +25323,7 @@
           <p:cNvPr id="25" name="">
             <a:extLst xmlns:a="http://schemas.openxmlformats.org/drawingml/2006/main">
               <a:ext uri="{FF2B5EF4-FFF2-40B4-BE49-F238E27FC236}">
-                <a16:creationId xmlns:a16="http://schemas.microsoft.com/office/drawing/2014/main" id="{25BC2096-5958-476F-9E40-B82F450EA331}"/>
+                <a16:creationId xmlns:a16="http://schemas.microsoft.com/office/drawing/2014/main" id="{08F33A00-BDD1-4214-AB00-614D6352C140}"/>
               </a:ext>
             </a:extLst>
           </p:cNvPr>
@@ -25333,7 +25333,7 @@
           <p:nvPr/>
         </p:nvPicPr>
         <p:blipFill>
-          <a:blip xmlns:r="http://schemas.openxmlformats.org/officeDocument/2006/relationships" xmlns:a="http://schemas.openxmlformats.org/drawingml/2006/main" r:embed="R5c618ce79824412f"/>
+          <a:blip xmlns:r="http://schemas.openxmlformats.org/officeDocument/2006/relationships" xmlns:a="http://schemas.openxmlformats.org/drawingml/2006/main" r:embed="R698ceadd78ed45c3"/>
           <a:srcRect xmlns:a="http://schemas.openxmlformats.org/drawingml/2006/main" l="45370" t="10500" r="0" b="0"/>
           <a:stretch xmlns:a="http://schemas.openxmlformats.org/drawingml/2006/main"/>
         </p:blipFill>
@@ -25352,7 +25352,7 @@
           <p:cNvPr id="26" name="內容_4_雙閉環架構">
             <a:extLst xmlns:a="http://schemas.openxmlformats.org/drawingml/2006/main">
               <a:ext uri="{FF2B5EF4-FFF2-40B4-BE49-F238E27FC236}">
-                <a16:creationId xmlns:a16="http://schemas.microsoft.com/office/drawing/2014/main" id="{F07BA686-2754-45BE-AD5F-BAB7E52EB8E6}"/>
+                <a16:creationId xmlns:a16="http://schemas.microsoft.com/office/drawing/2014/main" id="{FD30DDFF-9D69-4A2B-9006-C7AF92821002}"/>
               </a:ext>
             </a:extLst>
           </p:cNvPr>
@@ -25510,7 +25510,7 @@
           <p:cNvPr id="27" name="內容_4_商品與循環箱分離後再配對">
             <a:extLst xmlns:a="http://schemas.openxmlformats.org/drawingml/2006/main">
               <a:ext uri="{FF2B5EF4-FFF2-40B4-BE49-F238E27FC236}">
-                <a16:creationId xmlns:a16="http://schemas.microsoft.com/office/drawing/2014/main" id="{436A6468-10E9-4AE3-AFBD-BAD5B92F3F8A}"/>
+                <a16:creationId xmlns:a16="http://schemas.microsoft.com/office/drawing/2014/main" id="{37048AD3-9A24-4F63-99F3-098327ABC6D5}"/>
               </a:ext>
             </a:extLst>
           </p:cNvPr>
@@ -25668,7 +25668,7 @@
           <p:cNvPr id="28" name="">
             <a:extLst xmlns:a="http://schemas.openxmlformats.org/drawingml/2006/main">
               <a:ext uri="{FF2B5EF4-FFF2-40B4-BE49-F238E27FC236}">
-                <a16:creationId xmlns:a16="http://schemas.microsoft.com/office/drawing/2014/main" id="{32860211-6CAC-46CE-81DC-4B55650917C1}"/>
+                <a16:creationId xmlns:a16="http://schemas.microsoft.com/office/drawing/2014/main" id="{FF7D96AB-83FE-4CFD-B18F-456F16852129}"/>
               </a:ext>
             </a:extLst>
           </p:cNvPr>
@@ -25853,7 +25853,7 @@
           <p:cNvPr id="29" name="">
             <a:extLst xmlns:a="http://schemas.openxmlformats.org/drawingml/2006/main">
               <a:ext uri="{FF2B5EF4-FFF2-40B4-BE49-F238E27FC236}">
-                <a16:creationId xmlns:a16="http://schemas.microsoft.com/office/drawing/2014/main" id="{6E48385C-D43D-410D-B33A-DFFF38B650F1}"/>
+                <a16:creationId xmlns:a16="http://schemas.microsoft.com/office/drawing/2014/main" id="{E939DDC4-A3E3-420C-BFCB-0647C802DA7F}"/>
               </a:ext>
             </a:extLst>
           </p:cNvPr>
@@ -26038,7 +26038,7 @@
           <p:cNvPr id="30" name="">
             <a:extLst xmlns:a="http://schemas.openxmlformats.org/drawingml/2006/main">
               <a:ext uri="{FF2B5EF4-FFF2-40B4-BE49-F238E27FC236}">
-                <a16:creationId xmlns:a16="http://schemas.microsoft.com/office/drawing/2014/main" id="{7C7ABDD4-95FE-4BA8-8A7D-B7CBBD38B983}"/>
+                <a16:creationId xmlns:a16="http://schemas.microsoft.com/office/drawing/2014/main" id="{8C40BBAE-5FB5-4AB0-8F62-08664383F1CF}"/>
               </a:ext>
             </a:extLst>
           </p:cNvPr>
@@ -26223,7 +26223,7 @@
           <p:cNvPr id="31" name="">
             <a:extLst xmlns:a="http://schemas.openxmlformats.org/drawingml/2006/main">
               <a:ext uri="{FF2B5EF4-FFF2-40B4-BE49-F238E27FC236}">
-                <a16:creationId xmlns:a16="http://schemas.microsoft.com/office/drawing/2014/main" id="{BF3F3F86-BEC5-40A4-980D-644BE3352F1B}"/>
+                <a16:creationId xmlns:a16="http://schemas.microsoft.com/office/drawing/2014/main" id="{65F0CEF4-651B-487E-8960-BE38A4CF92DE}"/>
               </a:ext>
             </a:extLst>
           </p:cNvPr>
@@ -26408,7 +26408,7 @@
           <p:cNvPr id="32" name="">
             <a:extLst xmlns:a="http://schemas.openxmlformats.org/drawingml/2006/main">
               <a:ext uri="{FF2B5EF4-FFF2-40B4-BE49-F238E27FC236}">
-                <a16:creationId xmlns:a16="http://schemas.microsoft.com/office/drawing/2014/main" id="{C54B245C-6DAE-4ED7-9A61-0DE78FA5A0E8}"/>
+                <a16:creationId xmlns:a16="http://schemas.microsoft.com/office/drawing/2014/main" id="{BF6E3E6E-C5FA-4CCB-8807-E48B4E2D987C}"/>
               </a:ext>
             </a:extLst>
           </p:cNvPr>
@@ -26593,7 +26593,7 @@
           <p:cNvPr id="33" name="">
             <a:extLst xmlns:a="http://schemas.openxmlformats.org/drawingml/2006/main">
               <a:ext uri="{FF2B5EF4-FFF2-40B4-BE49-F238E27FC236}">
-                <a16:creationId xmlns:a16="http://schemas.microsoft.com/office/drawing/2014/main" id="{BCD6CA7C-DC57-4158-AF48-73E6A60C9071}"/>
+                <a16:creationId xmlns:a16="http://schemas.microsoft.com/office/drawing/2014/main" id="{697C8F7F-338E-4FAB-8365-BB447795A08D}"/>
               </a:ext>
             </a:extLst>
           </p:cNvPr>
@@ -26778,7 +26778,7 @@
           <p:cNvPr id="34" name="">
             <a:extLst xmlns:a="http://schemas.openxmlformats.org/drawingml/2006/main">
               <a:ext uri="{FF2B5EF4-FFF2-40B4-BE49-F238E27FC236}">
-                <a16:creationId xmlns:a16="http://schemas.microsoft.com/office/drawing/2014/main" id="{F855D70A-4188-4DD8-B3BB-B1F543D0BD24}"/>
+                <a16:creationId xmlns:a16="http://schemas.microsoft.com/office/drawing/2014/main" id="{28A95589-FE5F-4DBF-941B-44EE1D32CF31}"/>
               </a:ext>
             </a:extLst>
           </p:cNvPr>
@@ -26963,7 +26963,7 @@
           <p:cNvPr id="35" name="內容_4_↗">
             <a:extLst xmlns:a="http://schemas.openxmlformats.org/drawingml/2006/main">
               <a:ext uri="{FF2B5EF4-FFF2-40B4-BE49-F238E27FC236}">
-                <a16:creationId xmlns:a16="http://schemas.microsoft.com/office/drawing/2014/main" id="{902B4C31-6504-4301-99B6-A57166A2AF86}"/>
+                <a16:creationId xmlns:a16="http://schemas.microsoft.com/office/drawing/2014/main" id="{C795830A-3E58-43C8-AE29-AFA03E4DA5B8}"/>
               </a:ext>
             </a:extLst>
           </p:cNvPr>
@@ -27121,7 +27121,7 @@
           <p:cNvPr id="36" name="內容_4_→">
             <a:extLst xmlns:a="http://schemas.openxmlformats.org/drawingml/2006/main">
               <a:ext uri="{FF2B5EF4-FFF2-40B4-BE49-F238E27FC236}">
-                <a16:creationId xmlns:a16="http://schemas.microsoft.com/office/drawing/2014/main" id="{0288791D-D715-4099-B1A1-A73EBADA7C55}"/>
+                <a16:creationId xmlns:a16="http://schemas.microsoft.com/office/drawing/2014/main" id="{9EC27487-2AD2-47E5-A84E-D3081AA5C3ED}"/>
               </a:ext>
             </a:extLst>
           </p:cNvPr>
@@ -27279,7 +27279,7 @@
           <p:cNvPr id="37" name="內容_4_↘">
             <a:extLst xmlns:a="http://schemas.openxmlformats.org/drawingml/2006/main">
               <a:ext uri="{FF2B5EF4-FFF2-40B4-BE49-F238E27FC236}">
-                <a16:creationId xmlns:a16="http://schemas.microsoft.com/office/drawing/2014/main" id="{C5E51052-80A8-4F7A-AB44-223D86F6C7DB}"/>
+                <a16:creationId xmlns:a16="http://schemas.microsoft.com/office/drawing/2014/main" id="{5B32DEF0-A97A-4630-9614-03D34B499399}"/>
               </a:ext>
             </a:extLst>
           </p:cNvPr>
@@ -27437,7 +27437,7 @@
           <p:cNvPr id="38" name="內容_4_↘">
             <a:extLst xmlns:a="http://schemas.openxmlformats.org/drawingml/2006/main">
               <a:ext uri="{FF2B5EF4-FFF2-40B4-BE49-F238E27FC236}">
-                <a16:creationId xmlns:a16="http://schemas.microsoft.com/office/drawing/2014/main" id="{EDD5AC4D-B283-43FE-AA07-AD773359E227}"/>
+                <a16:creationId xmlns:a16="http://schemas.microsoft.com/office/drawing/2014/main" id="{E133F623-E5A3-4E25-A605-444CCFB84520}"/>
               </a:ext>
             </a:extLst>
           </p:cNvPr>
@@ -27595,7 +27595,7 @@
           <p:cNvPr id="39" name="內容_4_→">
             <a:extLst xmlns:a="http://schemas.openxmlformats.org/drawingml/2006/main">
               <a:ext uri="{FF2B5EF4-FFF2-40B4-BE49-F238E27FC236}">
-                <a16:creationId xmlns:a16="http://schemas.microsoft.com/office/drawing/2014/main" id="{EB9B485B-4315-4BE4-8A7D-FD1D8E1D4986}"/>
+                <a16:creationId xmlns:a16="http://schemas.microsoft.com/office/drawing/2014/main" id="{727FF3C7-4A4E-4B84-941A-B567EA0D4C97}"/>
               </a:ext>
             </a:extLst>
           </p:cNvPr>
@@ -27753,7 +27753,7 @@
           <p:cNvPr id="40" name="內容_4_↗">
             <a:extLst xmlns:a="http://schemas.openxmlformats.org/drawingml/2006/main">
               <a:ext uri="{FF2B5EF4-FFF2-40B4-BE49-F238E27FC236}">
-                <a16:creationId xmlns:a16="http://schemas.microsoft.com/office/drawing/2014/main" id="{B4DA2387-2306-42AA-B18B-CBDB89449989}"/>
+                <a16:creationId xmlns:a16="http://schemas.microsoft.com/office/drawing/2014/main" id="{5FCC1047-599F-402A-B986-9DBC1232A703}"/>
               </a:ext>
             </a:extLst>
           </p:cNvPr>
@@ -27911,7 +27911,7 @@
           <p:cNvPr id="41" name="內容_4_→">
             <a:extLst xmlns:a="http://schemas.openxmlformats.org/drawingml/2006/main">
               <a:ext uri="{FF2B5EF4-FFF2-40B4-BE49-F238E27FC236}">
-                <a16:creationId xmlns:a16="http://schemas.microsoft.com/office/drawing/2014/main" id="{6EA951FD-B63C-4B44-95F1-77EF6C8FCE25}"/>
+                <a16:creationId xmlns:a16="http://schemas.microsoft.com/office/drawing/2014/main" id="{81202FAE-B5AD-4410-A736-D05785F29056}"/>
               </a:ext>
             </a:extLst>
           </p:cNvPr>
@@ -28069,7 +28069,7 @@
           <p:cNvPr id="42" name="內容_4_有限500箱資產池，每箱15">
             <a:extLst xmlns:a="http://schemas.openxmlformats.org/drawingml/2006/main">
               <a:ext uri="{FF2B5EF4-FFF2-40B4-BE49-F238E27FC236}">
-                <a16:creationId xmlns:a16="http://schemas.microsoft.com/office/drawing/2014/main" id="{123D6470-C58A-41C6-B607-F37E53300D76}"/>
+                <a16:creationId xmlns:a16="http://schemas.microsoft.com/office/drawing/2014/main" id="{121D58D1-590E-4D7F-B4A8-20B412463C44}"/>
               </a:ext>
             </a:extLst>
           </p:cNvPr>
@@ -28227,7 +28227,7 @@
           <p:cNvPr id="43" name="內容_4_A級做簡單整理，B級需整新，">
             <a:extLst xmlns:a="http://schemas.openxmlformats.org/drawingml/2006/main">
               <a:ext uri="{FF2B5EF4-FFF2-40B4-BE49-F238E27FC236}">
-                <a16:creationId xmlns:a16="http://schemas.microsoft.com/office/drawing/2014/main" id="{4AE20F96-9FB2-40F8-B7E8-A73B2431700A}"/>
+                <a16:creationId xmlns:a16="http://schemas.microsoft.com/office/drawing/2014/main" id="{C15FC290-4F08-4FEE-A42B-FDFEDD7B581A}"/>
               </a:ext>
             </a:extLst>
           </p:cNvPr>
@@ -28383,7 +28383,7 @@
     </p:spTree>
     <p:extLst>
       <p:ext uri="{BB962C8B-B14F-4D97-AF65-F5344CB8AC3E}">
-        <p14:creationId xmlns:p14="http://schemas.microsoft.com/office/powerpoint/2010/main" val="765238933"/>
+        <p14:creationId xmlns:p14="http://schemas.microsoft.com/office/powerpoint/2010/main" val="2033662932"/>
       </p:ext>
     </p:extLst>
   </p:cSld>
@@ -28407,7 +28407,7 @@
           <p:cNvPr id="2" name="Freeform 2">
             <a:extLst xmlns:a="http://schemas.openxmlformats.org/drawingml/2006/main">
               <a:ext uri="{FF2B5EF4-FFF2-40B4-BE49-F238E27FC236}">
-                <a16:creationId xmlns:a16="http://schemas.microsoft.com/office/drawing/2014/main" id="{3F70B8E4-080C-4FEE-BD09-130F09ED3D49}"/>
+                <a16:creationId xmlns:a16="http://schemas.microsoft.com/office/drawing/2014/main" id="{80B069E8-5190-477E-803C-58B0EB527DEB}"/>
               </a:ext>
             </a:extLst>
           </p:cNvPr>
@@ -28445,7 +28445,7 @@
             </a:pathLst>
           </a:custGeom>
           <a:blipFill xmlns:a="http://schemas.openxmlformats.org/drawingml/2006/main">
-            <a:blip xmlns:r="http://schemas.openxmlformats.org/officeDocument/2006/relationships" r:embed="Rff56e7321da24d7d"/>
+            <a:blip xmlns:r="http://schemas.openxmlformats.org/officeDocument/2006/relationships" r:embed="R8102c6ea40584920"/>
             <a:stretch>
               <a:fillRect l="-35258" t="-5555" r="-24931" b="-72434"/>
             </a:stretch>
@@ -28457,7 +28457,7 @@
           <p:cNvPr id="4" name="Freeform 4">
             <a:extLst xmlns:a="http://schemas.openxmlformats.org/drawingml/2006/main">
               <a:ext uri="{FF2B5EF4-FFF2-40B4-BE49-F238E27FC236}">
-                <a16:creationId xmlns:a16="http://schemas.microsoft.com/office/drawing/2014/main" id="{FD27ABE3-05A3-4A5C-BB3D-1F8EE84F2DA6}"/>
+                <a16:creationId xmlns:a16="http://schemas.microsoft.com/office/drawing/2014/main" id="{BBC6E666-2BBC-415A-A72C-226A9E578445}"/>
               </a:ext>
             </a:extLst>
           </p:cNvPr>
@@ -28531,7 +28531,7 @@
           <p:cNvPr id="5" name="TextBox 5">
             <a:extLst xmlns:a="http://schemas.openxmlformats.org/drawingml/2006/main">
               <a:ext uri="{FF2B5EF4-FFF2-40B4-BE49-F238E27FC236}">
-                <a16:creationId xmlns:a16="http://schemas.microsoft.com/office/drawing/2014/main" id="{684B43DA-E321-4DEA-927B-49B735EBA270}"/>
+                <a16:creationId xmlns:a16="http://schemas.microsoft.com/office/drawing/2014/main" id="{D3376BAB-6EC8-46E9-B186-6564C82097CC}"/>
               </a:ext>
             </a:extLst>
           </p:cNvPr>
@@ -28567,7 +28567,7 @@
           <p:cNvPr id="6" name="Freeform 6">
             <a:extLst xmlns:a="http://schemas.openxmlformats.org/drawingml/2006/main">
               <a:ext uri="{FF2B5EF4-FFF2-40B4-BE49-F238E27FC236}">
-                <a16:creationId xmlns:a16="http://schemas.microsoft.com/office/drawing/2014/main" id="{311B51E4-9625-4011-A0F1-DA888BD6FD28}"/>
+                <a16:creationId xmlns:a16="http://schemas.microsoft.com/office/drawing/2014/main" id="{3EC7A356-98E8-4101-A337-1ED72E316E4E}"/>
               </a:ext>
             </a:extLst>
           </p:cNvPr>
@@ -28605,7 +28605,7 @@
             </a:pathLst>
           </a:custGeom>
           <a:blipFill xmlns:a="http://schemas.openxmlformats.org/drawingml/2006/main">
-            <a:blip xmlns:r="http://schemas.openxmlformats.org/officeDocument/2006/relationships" r:embed="R886a694ff6ef4c59"/>
+            <a:blip xmlns:r="http://schemas.openxmlformats.org/officeDocument/2006/relationships" r:embed="Rfb61269ab61d4075"/>
             <a:stretch>
               <a:fillRect l="0" t="0" r="0" b="0"/>
             </a:stretch>
@@ -28617,7 +28617,7 @@
           <p:cNvPr id="7" name="Freeform 7">
             <a:extLst xmlns:a="http://schemas.openxmlformats.org/drawingml/2006/main">
               <a:ext uri="{FF2B5EF4-FFF2-40B4-BE49-F238E27FC236}">
-                <a16:creationId xmlns:a16="http://schemas.microsoft.com/office/drawing/2014/main" id="{A1020F76-AF9C-4880-8857-22BAB2911ED4}"/>
+                <a16:creationId xmlns:a16="http://schemas.microsoft.com/office/drawing/2014/main" id="{B56F1602-11CF-48A9-8780-922B811629A9}"/>
               </a:ext>
             </a:extLst>
           </p:cNvPr>
@@ -28655,10 +28655,10 @@
             </a:pathLst>
           </a:custGeom>
           <a:blipFill xmlns:a="http://schemas.openxmlformats.org/drawingml/2006/main">
-            <a:blip xmlns:r="http://schemas.openxmlformats.org/officeDocument/2006/relationships" r:embed="R654f1d4f1a3746ba">
+            <a:blip xmlns:r="http://schemas.openxmlformats.org/officeDocument/2006/relationships" r:embed="R713b25976bfb44f2">
               <a:extLst>
                 <a:ext uri="{96DAC541-7B7A-43D3-8B79-37D633B846F1}">
-                  <asvg:svgBlip xmlns:asvg="http://schemas.microsoft.com/office/drawing/2016/SVG/main" r:embed="Ra215b423f1ff4f97"/>
+                  <asvg:svgBlip xmlns:asvg="http://schemas.microsoft.com/office/drawing/2016/SVG/main" r:embed="R3fda6af6a7404ab0"/>
                 </a:ext>
               </a:extLst>
             </a:blip>
@@ -28673,7 +28673,7 @@
           <p:cNvPr id="8" name="Freeform 8">
             <a:extLst xmlns:a="http://schemas.openxmlformats.org/drawingml/2006/main">
               <a:ext uri="{FF2B5EF4-FFF2-40B4-BE49-F238E27FC236}">
-                <a16:creationId xmlns:a16="http://schemas.microsoft.com/office/drawing/2014/main" id="{2EA81DCC-AF10-4424-9A45-9EDB99B235BA}"/>
+                <a16:creationId xmlns:a16="http://schemas.microsoft.com/office/drawing/2014/main" id="{6D84E7C3-F07B-40CD-9F71-827C2C8562A4}"/>
               </a:ext>
             </a:extLst>
           </p:cNvPr>
@@ -28711,10 +28711,10 @@
             </a:pathLst>
           </a:custGeom>
           <a:blipFill xmlns:a="http://schemas.openxmlformats.org/drawingml/2006/main">
-            <a:blip xmlns:r="http://schemas.openxmlformats.org/officeDocument/2006/relationships" r:embed="R654f1d4f1a3746ba">
+            <a:blip xmlns:r="http://schemas.openxmlformats.org/officeDocument/2006/relationships" r:embed="R713b25976bfb44f2">
               <a:extLst>
                 <a:ext uri="{96DAC541-7B7A-43D3-8B79-37D633B846F1}">
-                  <asvg:svgBlip xmlns:asvg="http://schemas.microsoft.com/office/drawing/2016/SVG/main" r:embed="Ra215b423f1ff4f97"/>
+                  <asvg:svgBlip xmlns:asvg="http://schemas.microsoft.com/office/drawing/2016/SVG/main" r:embed="R3fda6af6a7404ab0"/>
                 </a:ext>
               </a:extLst>
             </a:blip>
@@ -28729,7 +28729,7 @@
           <p:cNvPr id="9" name="Freeform 9">
             <a:extLst xmlns:a="http://schemas.openxmlformats.org/drawingml/2006/main">
               <a:ext uri="{FF2B5EF4-FFF2-40B4-BE49-F238E27FC236}">
-                <a16:creationId xmlns:a16="http://schemas.microsoft.com/office/drawing/2014/main" id="{F576D18E-69AA-4E69-A70D-F80B00FC7EA1}"/>
+                <a16:creationId xmlns:a16="http://schemas.microsoft.com/office/drawing/2014/main" id="{FF418079-2F9A-439E-B135-FEB17FBF2992}"/>
               </a:ext>
             </a:extLst>
           </p:cNvPr>
@@ -28777,7 +28777,7 @@
           <p:cNvPr id="10" name="TextBox 10">
             <a:extLst xmlns:a="http://schemas.openxmlformats.org/drawingml/2006/main">
               <a:ext uri="{FF2B5EF4-FFF2-40B4-BE49-F238E27FC236}">
-                <a16:creationId xmlns:a16="http://schemas.microsoft.com/office/drawing/2014/main" id="{F7519A7D-25C9-409B-BC12-3975219269A4}"/>
+                <a16:creationId xmlns:a16="http://schemas.microsoft.com/office/drawing/2014/main" id="{CF183161-AD02-4A1C-91CD-314806B21753}"/>
               </a:ext>
             </a:extLst>
           </p:cNvPr>
@@ -28938,7 +28938,7 @@
           <p:cNvPr id="11" name="TextBox 11">
             <a:extLst xmlns:a="http://schemas.openxmlformats.org/drawingml/2006/main">
               <a:ext uri="{FF2B5EF4-FFF2-40B4-BE49-F238E27FC236}">
-                <a16:creationId xmlns:a16="http://schemas.microsoft.com/office/drawing/2014/main" id="{6E8564D9-E8E1-48F2-A927-A0EB9D3EFC82}"/>
+                <a16:creationId xmlns:a16="http://schemas.microsoft.com/office/drawing/2014/main" id="{75E4290E-71B5-41A8-A8A3-83BE7888E401}"/>
               </a:ext>
             </a:extLst>
           </p:cNvPr>
@@ -28992,7 +28992,7 @@
           <p:cNvPr id="12" name="TextBox 12">
             <a:extLst xmlns:a="http://schemas.openxmlformats.org/drawingml/2006/main">
               <a:ext uri="{FF2B5EF4-FFF2-40B4-BE49-F238E27FC236}">
-                <a16:creationId xmlns:a16="http://schemas.microsoft.com/office/drawing/2014/main" id="{1ABEADA7-2635-4490-B6C2-0D879CBC730B}"/>
+                <a16:creationId xmlns:a16="http://schemas.microsoft.com/office/drawing/2014/main" id="{F98A6BFC-2DE8-4C16-9383-C1B10CC574B9}"/>
               </a:ext>
             </a:extLst>
           </p:cNvPr>
@@ -29044,7 +29044,7 @@
           <p:cNvPr id="13" name="TextBox 13">
             <a:extLst xmlns:a="http://schemas.openxmlformats.org/drawingml/2006/main">
               <a:ext uri="{FF2B5EF4-FFF2-40B4-BE49-F238E27FC236}">
-                <a16:creationId xmlns:a16="http://schemas.microsoft.com/office/drawing/2014/main" id="{243354D3-5DDA-45F9-A367-4A923DAAB1A9}"/>
+                <a16:creationId xmlns:a16="http://schemas.microsoft.com/office/drawing/2014/main" id="{80204B22-B7B0-4765-95AB-90294EF0B774}"/>
               </a:ext>
             </a:extLst>
           </p:cNvPr>
@@ -29096,7 +29096,7 @@
           <p:cNvPr id="14" name="Freeform 14">
             <a:extLst xmlns:a="http://schemas.openxmlformats.org/drawingml/2006/main">
               <a:ext uri="{FF2B5EF4-FFF2-40B4-BE49-F238E27FC236}">
-                <a16:creationId xmlns:a16="http://schemas.microsoft.com/office/drawing/2014/main" id="{F372BD86-7588-438A-9DD6-D60604B9D526}"/>
+                <a16:creationId xmlns:a16="http://schemas.microsoft.com/office/drawing/2014/main" id="{A662ED12-2260-4195-A222-C98216C78420}"/>
               </a:ext>
             </a:extLst>
           </p:cNvPr>
@@ -29144,7 +29144,7 @@
           <p:cNvPr id="15" name="Freeform 15">
             <a:extLst xmlns:a="http://schemas.openxmlformats.org/drawingml/2006/main">
               <a:ext uri="{FF2B5EF4-FFF2-40B4-BE49-F238E27FC236}">
-                <a16:creationId xmlns:a16="http://schemas.microsoft.com/office/drawing/2014/main" id="{C24FC02E-F374-46D0-8B12-9BF645B5A15D}"/>
+                <a16:creationId xmlns:a16="http://schemas.microsoft.com/office/drawing/2014/main" id="{68F751B0-C4F9-406E-8933-5BC00909B4D5}"/>
               </a:ext>
             </a:extLst>
           </p:cNvPr>
@@ -29192,7 +29192,7 @@
           <p:cNvPr id="16" name="TextBox 16">
             <a:extLst xmlns:a="http://schemas.openxmlformats.org/drawingml/2006/main">
               <a:ext uri="{FF2B5EF4-FFF2-40B4-BE49-F238E27FC236}">
-                <a16:creationId xmlns:a16="http://schemas.microsoft.com/office/drawing/2014/main" id="{B1CA8324-0D50-44FD-B000-C3D6D6ABDC54}"/>
+                <a16:creationId xmlns:a16="http://schemas.microsoft.com/office/drawing/2014/main" id="{04BF0326-39DF-4879-BCA4-0B70E767C9B1}"/>
               </a:ext>
             </a:extLst>
           </p:cNvPr>
@@ -29241,7 +29241,7 @@
           <p:cNvPr id="17" name="TextBox 17">
             <a:extLst xmlns:a="http://schemas.openxmlformats.org/drawingml/2006/main">
               <a:ext uri="{FF2B5EF4-FFF2-40B4-BE49-F238E27FC236}">
-                <a16:creationId xmlns:a16="http://schemas.microsoft.com/office/drawing/2014/main" id="{BA00C6F7-ABC3-4121-BB5A-A534CD70997C}"/>
+                <a16:creationId xmlns:a16="http://schemas.microsoft.com/office/drawing/2014/main" id="{67B17FC6-2058-4E5F-B290-C1624E454B70}"/>
               </a:ext>
             </a:extLst>
           </p:cNvPr>
@@ -29290,7 +29290,7 @@
           <p:cNvPr id="18" name="TextBox 18">
             <a:extLst xmlns:a="http://schemas.openxmlformats.org/drawingml/2006/main">
               <a:ext uri="{FF2B5EF4-FFF2-40B4-BE49-F238E27FC236}">
-                <a16:creationId xmlns:a16="http://schemas.microsoft.com/office/drawing/2014/main" id="{FB684131-2548-4F1C-86B5-1730C00EA5EC}"/>
+                <a16:creationId xmlns:a16="http://schemas.microsoft.com/office/drawing/2014/main" id="{20818FD8-56C5-4707-95B1-22504B601A8A}"/>
               </a:ext>
             </a:extLst>
           </p:cNvPr>
@@ -29339,7 +29339,7 @@
           <p:cNvPr id="19" name="TextBox 19">
             <a:extLst xmlns:a="http://schemas.openxmlformats.org/drawingml/2006/main">
               <a:ext uri="{FF2B5EF4-FFF2-40B4-BE49-F238E27FC236}">
-                <a16:creationId xmlns:a16="http://schemas.microsoft.com/office/drawing/2014/main" id="{2C3DEC86-1F95-4661-86C1-4D7092E01ECA}"/>
+                <a16:creationId xmlns:a16="http://schemas.microsoft.com/office/drawing/2014/main" id="{0D2CDDD4-F717-493E-80A0-CFBA9CDE79E7}"/>
               </a:ext>
             </a:extLst>
           </p:cNvPr>
@@ -29391,7 +29391,7 @@
           <p:cNvPr id="20" name="TextBox 20">
             <a:extLst xmlns:a="http://schemas.openxmlformats.org/drawingml/2006/main">
               <a:ext uri="{FF2B5EF4-FFF2-40B4-BE49-F238E27FC236}">
-                <a16:creationId xmlns:a16="http://schemas.microsoft.com/office/drawing/2014/main" id="{47F41C8F-62F2-4918-82BB-B79ACB2EDFF0}"/>
+                <a16:creationId xmlns:a16="http://schemas.microsoft.com/office/drawing/2014/main" id="{164E9B70-FC79-49B5-84B8-070013965F4A}"/>
               </a:ext>
             </a:extLst>
           </p:cNvPr>
@@ -29443,7 +29443,7 @@
           <p:cNvPr id="21" name="TextBox 21">
             <a:extLst xmlns:a="http://schemas.openxmlformats.org/drawingml/2006/main">
               <a:ext uri="{FF2B5EF4-FFF2-40B4-BE49-F238E27FC236}">
-                <a16:creationId xmlns:a16="http://schemas.microsoft.com/office/drawing/2014/main" id="{4AC25130-67DC-48B4-AD86-E719BD0D4903}"/>
+                <a16:creationId xmlns:a16="http://schemas.microsoft.com/office/drawing/2014/main" id="{13ACD4AC-09D5-4E33-BA28-55B56F5DCFC7}"/>
               </a:ext>
             </a:extLst>
           </p:cNvPr>
@@ -29495,7 +29495,7 @@
           <p:cNvPr id="22" name="內容_5_三維倉庫佈局">
             <a:extLst xmlns:a="http://schemas.openxmlformats.org/drawingml/2006/main">
               <a:ext uri="{FF2B5EF4-FFF2-40B4-BE49-F238E27FC236}">
-                <a16:creationId xmlns:a16="http://schemas.microsoft.com/office/drawing/2014/main" id="{6926D982-AC07-4798-90B3-EBD46D847C6E}"/>
+                <a16:creationId xmlns:a16="http://schemas.microsoft.com/office/drawing/2014/main" id="{2E9BB2E3-5A89-4E62-8A30-5F0AAB226696}"/>
               </a:ext>
             </a:extLst>
           </p:cNvPr>
@@ -29653,7 +29653,7 @@
           <p:cNvPr id="23" name="內容_5_雙層輸送網的原生運行畫面">
             <a:extLst xmlns:a="http://schemas.openxmlformats.org/drawingml/2006/main">
               <a:ext uri="{FF2B5EF4-FFF2-40B4-BE49-F238E27FC236}">
-                <a16:creationId xmlns:a16="http://schemas.microsoft.com/office/drawing/2014/main" id="{2EEBD832-39B3-4604-AC50-DCAAA304AAFF}"/>
+                <a16:creationId xmlns:a16="http://schemas.microsoft.com/office/drawing/2014/main" id="{76C0AE6B-6558-4C56-BD8F-1FAEE669574F}"/>
               </a:ext>
             </a:extLst>
           </p:cNvPr>
@@ -29811,7 +29811,7 @@
           <p:cNvPr id="24" name="">
             <a:extLst xmlns:a="http://schemas.openxmlformats.org/drawingml/2006/main">
               <a:ext uri="{FF2B5EF4-FFF2-40B4-BE49-F238E27FC236}">
-                <a16:creationId xmlns:a16="http://schemas.microsoft.com/office/drawing/2014/main" id="{21721BD8-DAE5-47F3-9E13-1A5F3D004583}"/>
+                <a16:creationId xmlns:a16="http://schemas.microsoft.com/office/drawing/2014/main" id="{22D7A6A1-55C3-47C0-B373-C76A6D7B8FE6}"/>
               </a:ext>
             </a:extLst>
           </p:cNvPr>
@@ -29821,7 +29821,7 @@
           <p:nvPr/>
         </p:nvPicPr>
         <p:blipFill>
-          <a:blip xmlns:r="http://schemas.openxmlformats.org/officeDocument/2006/relationships" xmlns:a="http://schemas.openxmlformats.org/drawingml/2006/main" r:embed="R4998c41aa2f848d2"/>
+          <a:blip xmlns:r="http://schemas.openxmlformats.org/officeDocument/2006/relationships" xmlns:a="http://schemas.openxmlformats.org/drawingml/2006/main" r:embed="R7df5e654fb2e496d"/>
           <a:srcRect xmlns:a="http://schemas.openxmlformats.org/drawingml/2006/main" l="0" t="20000" r="0" b="15000"/>
           <a:stretch xmlns:a="http://schemas.openxmlformats.org/drawingml/2006/main"/>
         </p:blipFill>
@@ -29840,7 +29840,7 @@
           <p:cNvPr id="25" name="內容_5_短波尖峰、聯合改善、12公尺">
             <a:extLst xmlns:a="http://schemas.openxmlformats.org/drawingml/2006/main">
               <a:ext uri="{FF2B5EF4-FFF2-40B4-BE49-F238E27FC236}">
-                <a16:creationId xmlns:a16="http://schemas.microsoft.com/office/drawing/2014/main" id="{331FC24A-BBA7-44F1-8649-7FE3426020FE}"/>
+                <a16:creationId xmlns:a16="http://schemas.microsoft.com/office/drawing/2014/main" id="{A52515EE-60CF-4EA5-9CDE-D0B95EAD39AE}"/>
               </a:ext>
             </a:extLst>
           </p:cNvPr>
@@ -29996,7 +29996,7 @@
     </p:spTree>
     <p:extLst>
       <p:ext uri="{BB962C8B-B14F-4D97-AF65-F5344CB8AC3E}">
-        <p14:creationId xmlns:p14="http://schemas.microsoft.com/office/powerpoint/2010/main" val="914521362"/>
+        <p14:creationId xmlns:p14="http://schemas.microsoft.com/office/powerpoint/2010/main" val="131057099"/>
       </p:ext>
     </p:extLst>
   </p:cSld>
@@ -30020,7 +30020,7 @@
           <p:cNvPr id="2" name="Freeform 2">
             <a:extLst xmlns:a="http://schemas.openxmlformats.org/drawingml/2006/main">
               <a:ext uri="{FF2B5EF4-FFF2-40B4-BE49-F238E27FC236}">
-                <a16:creationId xmlns:a16="http://schemas.microsoft.com/office/drawing/2014/main" id="{147E8E21-B0EB-4F83-BAD5-6DEBB682B84E}"/>
+                <a16:creationId xmlns:a16="http://schemas.microsoft.com/office/drawing/2014/main" id="{9708C226-69B0-4064-B223-7509D061CA49}"/>
               </a:ext>
             </a:extLst>
           </p:cNvPr>
@@ -30058,7 +30058,7 @@
             </a:pathLst>
           </a:custGeom>
           <a:blipFill xmlns:a="http://schemas.openxmlformats.org/drawingml/2006/main">
-            <a:blip xmlns:r="http://schemas.openxmlformats.org/officeDocument/2006/relationships" r:embed="R47c5b041d70a4c3c"/>
+            <a:blip xmlns:r="http://schemas.openxmlformats.org/officeDocument/2006/relationships" r:embed="R34bbabaa496a4c31"/>
             <a:stretch>
               <a:fillRect l="-35258" t="-5555" r="-24931" b="-72434"/>
             </a:stretch>
@@ -30070,7 +30070,7 @@
           <p:cNvPr id="4" name="Freeform 4">
             <a:extLst xmlns:a="http://schemas.openxmlformats.org/drawingml/2006/main">
               <a:ext uri="{FF2B5EF4-FFF2-40B4-BE49-F238E27FC236}">
-                <a16:creationId xmlns:a16="http://schemas.microsoft.com/office/drawing/2014/main" id="{A6B6CB35-CF56-4A7E-A248-7AA8026DB9D8}"/>
+                <a16:creationId xmlns:a16="http://schemas.microsoft.com/office/drawing/2014/main" id="{4B07EBAF-62D6-40A6-993E-ADA4842FF2F6}"/>
               </a:ext>
             </a:extLst>
           </p:cNvPr>
@@ -30144,7 +30144,7 @@
           <p:cNvPr id="5" name="TextBox 5">
             <a:extLst xmlns:a="http://schemas.openxmlformats.org/drawingml/2006/main">
               <a:ext uri="{FF2B5EF4-FFF2-40B4-BE49-F238E27FC236}">
-                <a16:creationId xmlns:a16="http://schemas.microsoft.com/office/drawing/2014/main" id="{85ABF7DB-CEEE-4460-B167-D748C439152C}"/>
+                <a16:creationId xmlns:a16="http://schemas.microsoft.com/office/drawing/2014/main" id="{79E4A9F0-F57E-4E02-B27F-8AACFE79C9F3}"/>
               </a:ext>
             </a:extLst>
           </p:cNvPr>
@@ -30180,7 +30180,7 @@
           <p:cNvPr id="6" name="Freeform 6">
             <a:extLst xmlns:a="http://schemas.openxmlformats.org/drawingml/2006/main">
               <a:ext uri="{FF2B5EF4-FFF2-40B4-BE49-F238E27FC236}">
-                <a16:creationId xmlns:a16="http://schemas.microsoft.com/office/drawing/2014/main" id="{7AF0E679-5A01-40B9-B698-9DB84F510371}"/>
+                <a16:creationId xmlns:a16="http://schemas.microsoft.com/office/drawing/2014/main" id="{5F900804-6B48-4FCA-BE23-8577BB7EB9A9}"/>
               </a:ext>
             </a:extLst>
           </p:cNvPr>
@@ -30218,7 +30218,7 @@
             </a:pathLst>
           </a:custGeom>
           <a:blipFill xmlns:a="http://schemas.openxmlformats.org/drawingml/2006/main">
-            <a:blip xmlns:r="http://schemas.openxmlformats.org/officeDocument/2006/relationships" r:embed="R9ddda592e5214dbc"/>
+            <a:blip xmlns:r="http://schemas.openxmlformats.org/officeDocument/2006/relationships" r:embed="R4d422bed1d7846dd"/>
             <a:stretch>
               <a:fillRect l="0" t="0" r="0" b="0"/>
             </a:stretch>
@@ -30230,7 +30230,7 @@
           <p:cNvPr id="7" name="Freeform 7">
             <a:extLst xmlns:a="http://schemas.openxmlformats.org/drawingml/2006/main">
               <a:ext uri="{FF2B5EF4-FFF2-40B4-BE49-F238E27FC236}">
-                <a16:creationId xmlns:a16="http://schemas.microsoft.com/office/drawing/2014/main" id="{368AE9C0-6023-48DA-8120-4FDCD9604358}"/>
+                <a16:creationId xmlns:a16="http://schemas.microsoft.com/office/drawing/2014/main" id="{3DB85F58-6467-4C5E-B92E-4658DB3983E1}"/>
               </a:ext>
             </a:extLst>
           </p:cNvPr>
@@ -30268,10 +30268,10 @@
             </a:pathLst>
           </a:custGeom>
           <a:blipFill xmlns:a="http://schemas.openxmlformats.org/drawingml/2006/main">
-            <a:blip xmlns:r="http://schemas.openxmlformats.org/officeDocument/2006/relationships" r:embed="R4b3212d8313f4f2d">
+            <a:blip xmlns:r="http://schemas.openxmlformats.org/officeDocument/2006/relationships" r:embed="R6eb7065a21894392">
               <a:extLst>
                 <a:ext uri="{96DAC541-7B7A-43D3-8B79-37D633B846F1}">
-                  <asvg:svgBlip xmlns:asvg="http://schemas.microsoft.com/office/drawing/2016/SVG/main" r:embed="Rcc05ea273b8f4564"/>
+                  <asvg:svgBlip xmlns:asvg="http://schemas.microsoft.com/office/drawing/2016/SVG/main" r:embed="R15e26f9bf8b64dd8"/>
                 </a:ext>
               </a:extLst>
             </a:blip>
@@ -30286,7 +30286,7 @@
           <p:cNvPr id="8" name="Freeform 8">
             <a:extLst xmlns:a="http://schemas.openxmlformats.org/drawingml/2006/main">
               <a:ext uri="{FF2B5EF4-FFF2-40B4-BE49-F238E27FC236}">
-                <a16:creationId xmlns:a16="http://schemas.microsoft.com/office/drawing/2014/main" id="{8A0ED8EE-B9A4-48F6-8CD7-CA81E5739063}"/>
+                <a16:creationId xmlns:a16="http://schemas.microsoft.com/office/drawing/2014/main" id="{30BEACCE-458C-4DB2-BC29-6764F624592C}"/>
               </a:ext>
             </a:extLst>
           </p:cNvPr>
@@ -30324,10 +30324,10 @@
             </a:pathLst>
           </a:custGeom>
           <a:blipFill xmlns:a="http://schemas.openxmlformats.org/drawingml/2006/main">
-            <a:blip xmlns:r="http://schemas.openxmlformats.org/officeDocument/2006/relationships" r:embed="R4b3212d8313f4f2d">
+            <a:blip xmlns:r="http://schemas.openxmlformats.org/officeDocument/2006/relationships" r:embed="R6eb7065a21894392">
               <a:extLst>
                 <a:ext uri="{96DAC541-7B7A-43D3-8B79-37D633B846F1}">
-                  <asvg:svgBlip xmlns:asvg="http://schemas.microsoft.com/office/drawing/2016/SVG/main" r:embed="Rcc05ea273b8f4564"/>
+                  <asvg:svgBlip xmlns:asvg="http://schemas.microsoft.com/office/drawing/2016/SVG/main" r:embed="R15e26f9bf8b64dd8"/>
                 </a:ext>
               </a:extLst>
             </a:blip>
@@ -30342,7 +30342,7 @@
           <p:cNvPr id="9" name="TextBox 9">
             <a:extLst xmlns:a="http://schemas.openxmlformats.org/drawingml/2006/main">
               <a:ext uri="{FF2B5EF4-FFF2-40B4-BE49-F238E27FC236}">
-                <a16:creationId xmlns:a16="http://schemas.microsoft.com/office/drawing/2014/main" id="{92D3CCFE-694F-4B37-96F0-B8FF21F83B1A}"/>
+                <a16:creationId xmlns:a16="http://schemas.microsoft.com/office/drawing/2014/main" id="{301F0B8E-5785-4ED5-98F8-73B38B3B25CB}"/>
               </a:ext>
             </a:extLst>
           </p:cNvPr>
@@ -30394,7 +30394,7 @@
           <p:cNvPr id="10" name="Freeform 10">
             <a:extLst xmlns:a="http://schemas.openxmlformats.org/drawingml/2006/main">
               <a:ext uri="{FF2B5EF4-FFF2-40B4-BE49-F238E27FC236}">
-                <a16:creationId xmlns:a16="http://schemas.microsoft.com/office/drawing/2014/main" id="{048868FD-82B3-4136-B15A-588F053B0E68}"/>
+                <a16:creationId xmlns:a16="http://schemas.microsoft.com/office/drawing/2014/main" id="{EF8F7AE4-7E49-4001-938F-C26660C58593}"/>
               </a:ext>
             </a:extLst>
           </p:cNvPr>
@@ -30442,7 +30442,7 @@
           <p:cNvPr id="12" name="Freeform 12">
             <a:extLst xmlns:a="http://schemas.openxmlformats.org/drawingml/2006/main">
               <a:ext uri="{FF2B5EF4-FFF2-40B4-BE49-F238E27FC236}">
-                <a16:creationId xmlns:a16="http://schemas.microsoft.com/office/drawing/2014/main" id="{08B49B50-D071-4BAF-8BCD-1BB40D5D7B5F}"/>
+                <a16:creationId xmlns:a16="http://schemas.microsoft.com/office/drawing/2014/main" id="{3C212073-4821-49AD-A39E-60066A01CAF7}"/>
               </a:ext>
             </a:extLst>
           </p:cNvPr>
@@ -30487,7 +30487,7 @@
           <p:cNvPr id="13" name="TextBox 13">
             <a:extLst xmlns:a="http://schemas.openxmlformats.org/drawingml/2006/main">
               <a:ext uri="{FF2B5EF4-FFF2-40B4-BE49-F238E27FC236}">
-                <a16:creationId xmlns:a16="http://schemas.microsoft.com/office/drawing/2014/main" id="{9FEF6C44-D97B-4C33-9EEC-6F9B790A27A3}"/>
+                <a16:creationId xmlns:a16="http://schemas.microsoft.com/office/drawing/2014/main" id="{04C1FE21-3774-45C9-A65D-B2140B604C7F}"/>
               </a:ext>
             </a:extLst>
           </p:cNvPr>
@@ -30648,7 +30648,7 @@
           <p:cNvPr id="14" name="TextBox 14">
             <a:extLst xmlns:a="http://schemas.openxmlformats.org/drawingml/2006/main">
               <a:ext uri="{FF2B5EF4-FFF2-40B4-BE49-F238E27FC236}">
-                <a16:creationId xmlns:a16="http://schemas.microsoft.com/office/drawing/2014/main" id="{B1298442-07EA-4DB7-9277-BD42799B34C8}"/>
+                <a16:creationId xmlns:a16="http://schemas.microsoft.com/office/drawing/2014/main" id="{6B70BF81-6493-4D24-97F0-7461C41BDE63}"/>
               </a:ext>
             </a:extLst>
           </p:cNvPr>
@@ -30702,7 +30702,7 @@
           <p:cNvPr id="15" name="TextBox 15">
             <a:extLst xmlns:a="http://schemas.openxmlformats.org/drawingml/2006/main">
               <a:ext uri="{FF2B5EF4-FFF2-40B4-BE49-F238E27FC236}">
-                <a16:creationId xmlns:a16="http://schemas.microsoft.com/office/drawing/2014/main" id="{11153EFA-5038-482F-A75B-82B11DC27A19}"/>
+                <a16:creationId xmlns:a16="http://schemas.microsoft.com/office/drawing/2014/main" id="{D9301335-A2B0-48EA-877C-A91C97D0C2F6}"/>
               </a:ext>
             </a:extLst>
           </p:cNvPr>
@@ -30754,7 +30754,7 @@
           <p:cNvPr id="16" name="TextBox 16">
             <a:extLst xmlns:a="http://schemas.openxmlformats.org/drawingml/2006/main">
               <a:ext uri="{FF2B5EF4-FFF2-40B4-BE49-F238E27FC236}">
-                <a16:creationId xmlns:a16="http://schemas.microsoft.com/office/drawing/2014/main" id="{04D384FE-3D38-4041-A296-E432181A45F7}"/>
+                <a16:creationId xmlns:a16="http://schemas.microsoft.com/office/drawing/2014/main" id="{D529C73B-08AE-47B0-8DB3-A73BEAFBACE6}"/>
               </a:ext>
             </a:extLst>
           </p:cNvPr>
@@ -30806,7 +30806,7 @@
           <p:cNvPr id="17" name="內容_6_多能工與防呆">
             <a:extLst xmlns:a="http://schemas.openxmlformats.org/drawingml/2006/main">
               <a:ext uri="{FF2B5EF4-FFF2-40B4-BE49-F238E27FC236}">
-                <a16:creationId xmlns:a16="http://schemas.microsoft.com/office/drawing/2014/main" id="{ED2E9C38-9B0E-40FD-A48C-B2B113254568}"/>
+                <a16:creationId xmlns:a16="http://schemas.microsoft.com/office/drawing/2014/main" id="{F7A9B5A2-7C2C-47B6-96F4-1D1368A33D70}"/>
               </a:ext>
             </a:extLst>
           </p:cNvPr>
@@ -30964,7 +30964,7 @@
           <p:cNvPr id="18" name="內容_6_五位多能工與A星尋路法">
             <a:extLst xmlns:a="http://schemas.openxmlformats.org/drawingml/2006/main">
               <a:ext uri="{FF2B5EF4-FFF2-40B4-BE49-F238E27FC236}">
-                <a16:creationId xmlns:a16="http://schemas.microsoft.com/office/drawing/2014/main" id="{237685AC-7749-4F76-8F39-5E1BB79253E9}"/>
+                <a16:creationId xmlns:a16="http://schemas.microsoft.com/office/drawing/2014/main" id="{78BF930E-71A4-4393-8A42-C20A6A7E115B}"/>
               </a:ext>
             </a:extLst>
           </p:cNvPr>
@@ -31122,7 +31122,7 @@
           <p:cNvPr id="19" name="內容_6_品質檢查 隊列 &gt;15 件">
             <a:extLst xmlns:a="http://schemas.openxmlformats.org/drawingml/2006/main">
               <a:ext uri="{FF2B5EF4-FFF2-40B4-BE49-F238E27FC236}">
-                <a16:creationId xmlns:a16="http://schemas.microsoft.com/office/drawing/2014/main" id="{6F2F3156-0212-4C58-84FF-A37EDB21989F}"/>
+                <a16:creationId xmlns:a16="http://schemas.microsoft.com/office/drawing/2014/main" id="{E4E89565-4008-42E4-A2F1-A7FF0FB82CD4}"/>
               </a:ext>
             </a:extLst>
           </p:cNvPr>
@@ -31280,7 +31280,7 @@
           <p:cNvPr id="20" name="內容_6_鎖定支援員，等現有整新任務完">
             <a:extLst xmlns:a="http://schemas.openxmlformats.org/drawingml/2006/main">
               <a:ext uri="{FF2B5EF4-FFF2-40B4-BE49-F238E27FC236}">
-                <a16:creationId xmlns:a16="http://schemas.microsoft.com/office/drawing/2014/main" id="{D198DB10-4244-42B7-A4BC-06E1866906D4}"/>
+                <a16:creationId xmlns:a16="http://schemas.microsoft.com/office/drawing/2014/main" id="{34AEE992-BF4D-49A0-BE05-16AD94AB5628}"/>
               </a:ext>
             </a:extLst>
           </p:cNvPr>
@@ -31507,7 +31507,7 @@
           <p:cNvPr id="21" name="內容_6_5 人">
             <a:extLst xmlns:a="http://schemas.openxmlformats.org/drawingml/2006/main">
               <a:ext uri="{FF2B5EF4-FFF2-40B4-BE49-F238E27FC236}">
-                <a16:creationId xmlns:a16="http://schemas.microsoft.com/office/drawing/2014/main" id="{3FC14C9C-388E-4B5E-B178-290AC6CA5A1E}"/>
+                <a16:creationId xmlns:a16="http://schemas.microsoft.com/office/drawing/2014/main" id="{C1F7392A-754C-4CF7-BA0B-D701CA0BA777}"/>
               </a:ext>
             </a:extLst>
           </p:cNvPr>
@@ -31665,7 +31665,7 @@
           <p:cNvPr id="22" name="內容_6_固定人數&#10;1.4公尺／秒 步">
             <a:extLst xmlns:a="http://schemas.openxmlformats.org/drawingml/2006/main">
               <a:ext uri="{FF2B5EF4-FFF2-40B4-BE49-F238E27FC236}">
-                <a16:creationId xmlns:a16="http://schemas.microsoft.com/office/drawing/2014/main" id="{AEDD77DF-7481-4D31-B0C9-DF13FA83F5FC}"/>
+                <a16:creationId xmlns:a16="http://schemas.microsoft.com/office/drawing/2014/main" id="{FC44F03B-9D0F-4EB9-B348-B07F565312DA}"/>
               </a:ext>
             </a:extLst>
           </p:cNvPr>
@@ -31869,7 +31869,7 @@
           <p:cNvPr id="23" name="內容_6_A星（A*）是尋路方法；5人">
             <a:extLst xmlns:a="http://schemas.openxmlformats.org/drawingml/2006/main">
               <a:ext uri="{FF2B5EF4-FFF2-40B4-BE49-F238E27FC236}">
-                <a16:creationId xmlns:a16="http://schemas.microsoft.com/office/drawing/2014/main" id="{1A811295-95CA-4125-B0E5-3251BC964409}"/>
+                <a16:creationId xmlns:a16="http://schemas.microsoft.com/office/drawing/2014/main" id="{A524399E-4204-4553-98C6-346CA004A1B4}"/>
               </a:ext>
             </a:extLst>
           </p:cNvPr>
@@ -32025,7 +32025,7 @@
     </p:spTree>
     <p:extLst>
       <p:ext uri="{BB962C8B-B14F-4D97-AF65-F5344CB8AC3E}">
-        <p14:creationId xmlns:p14="http://schemas.microsoft.com/office/powerpoint/2010/main" val="1337350568"/>
+        <p14:creationId xmlns:p14="http://schemas.microsoft.com/office/powerpoint/2010/main" val="913722000"/>
       </p:ext>
     </p:extLst>
   </p:cSld>
@@ -32049,7 +32049,7 @@
           <p:cNvPr id="2" name="Freeform 2">
             <a:extLst xmlns:a="http://schemas.openxmlformats.org/drawingml/2006/main">
               <a:ext uri="{FF2B5EF4-FFF2-40B4-BE49-F238E27FC236}">
-                <a16:creationId xmlns:a16="http://schemas.microsoft.com/office/drawing/2014/main" id="{5E69468B-0E52-4996-B384-B7921F92B4F9}"/>
+                <a16:creationId xmlns:a16="http://schemas.microsoft.com/office/drawing/2014/main" id="{22305848-88C9-448C-B1B0-9F703A792618}"/>
               </a:ext>
             </a:extLst>
           </p:cNvPr>
@@ -32087,7 +32087,7 @@
             </a:pathLst>
           </a:custGeom>
           <a:blipFill xmlns:a="http://schemas.openxmlformats.org/drawingml/2006/main">
-            <a:blip xmlns:r="http://schemas.openxmlformats.org/officeDocument/2006/relationships" r:embed="R1267652d75c44adb"/>
+            <a:blip xmlns:r="http://schemas.openxmlformats.org/officeDocument/2006/relationships" r:embed="R4b51157794d64a30"/>
             <a:stretch>
               <a:fillRect l="-35258" t="-5555" r="-24931" b="-72434"/>
             </a:stretch>
@@ -32099,7 +32099,7 @@
           <p:cNvPr id="3" name="TextBox 3">
             <a:extLst xmlns:a="http://schemas.openxmlformats.org/drawingml/2006/main">
               <a:ext uri="{FF2B5EF4-FFF2-40B4-BE49-F238E27FC236}">
-                <a16:creationId xmlns:a16="http://schemas.microsoft.com/office/drawing/2014/main" id="{5B179D0F-2CBB-4775-8BF9-74333A9864FD}"/>
+                <a16:creationId xmlns:a16="http://schemas.microsoft.com/office/drawing/2014/main" id="{68F53DCC-D607-4448-A296-17C94770052B}"/>
               </a:ext>
             </a:extLst>
           </p:cNvPr>
@@ -32151,7 +32151,7 @@
           <p:cNvPr id="4" name="TextBox 4">
             <a:extLst xmlns:a="http://schemas.openxmlformats.org/drawingml/2006/main">
               <a:ext uri="{FF2B5EF4-FFF2-40B4-BE49-F238E27FC236}">
-                <a16:creationId xmlns:a16="http://schemas.microsoft.com/office/drawing/2014/main" id="{BC6803EE-E9B2-4BEA-927B-4F102EB4518B}"/>
+                <a16:creationId xmlns:a16="http://schemas.microsoft.com/office/drawing/2014/main" id="{CF0E1EFA-49A9-46CC-B955-B5C1A4122792}"/>
               </a:ext>
             </a:extLst>
           </p:cNvPr>
@@ -32203,7 +32203,7 @@
           <p:cNvPr id="6" name="Freeform 6">
             <a:extLst xmlns:a="http://schemas.openxmlformats.org/drawingml/2006/main">
               <a:ext uri="{FF2B5EF4-FFF2-40B4-BE49-F238E27FC236}">
-                <a16:creationId xmlns:a16="http://schemas.microsoft.com/office/drawing/2014/main" id="{69D02800-B778-40EF-AF90-98408AC209E0}"/>
+                <a16:creationId xmlns:a16="http://schemas.microsoft.com/office/drawing/2014/main" id="{C06E8091-842C-418B-B1CE-B9E18C806AE1}"/>
               </a:ext>
             </a:extLst>
           </p:cNvPr>
@@ -32277,7 +32277,7 @@
           <p:cNvPr id="7" name="TextBox 7">
             <a:extLst xmlns:a="http://schemas.openxmlformats.org/drawingml/2006/main">
               <a:ext uri="{FF2B5EF4-FFF2-40B4-BE49-F238E27FC236}">
-                <a16:creationId xmlns:a16="http://schemas.microsoft.com/office/drawing/2014/main" id="{6C3D12A9-4543-4872-A5D3-B8DD3B29FCF2}"/>
+                <a16:creationId xmlns:a16="http://schemas.microsoft.com/office/drawing/2014/main" id="{6E355584-F6AE-4A59-A0CB-66D40DDBAB08}"/>
               </a:ext>
             </a:extLst>
           </p:cNvPr>
@@ -32313,7 +32313,7 @@
           <p:cNvPr id="8" name="TextBox 8">
             <a:extLst xmlns:a="http://schemas.openxmlformats.org/drawingml/2006/main">
               <a:ext uri="{FF2B5EF4-FFF2-40B4-BE49-F238E27FC236}">
-                <a16:creationId xmlns:a16="http://schemas.microsoft.com/office/drawing/2014/main" id="{687318FF-DAF8-40DA-8CFC-44ECEBD2D321}"/>
+                <a16:creationId xmlns:a16="http://schemas.microsoft.com/office/drawing/2014/main" id="{6C99C17F-499D-4698-972F-F187D3AD1B9A}"/>
               </a:ext>
             </a:extLst>
           </p:cNvPr>
@@ -32474,7 +32474,7 @@
           <p:cNvPr id="9" name="Freeform 9">
             <a:extLst xmlns:a="http://schemas.openxmlformats.org/drawingml/2006/main">
               <a:ext uri="{FF2B5EF4-FFF2-40B4-BE49-F238E27FC236}">
-                <a16:creationId xmlns:a16="http://schemas.microsoft.com/office/drawing/2014/main" id="{2292E5E7-8B75-4BA1-9D65-63D602469A92}"/>
+                <a16:creationId xmlns:a16="http://schemas.microsoft.com/office/drawing/2014/main" id="{9448575F-00B3-455B-A362-C415B91B47E6}"/>
               </a:ext>
             </a:extLst>
           </p:cNvPr>
@@ -32512,7 +32512,7 @@
             </a:pathLst>
           </a:custGeom>
           <a:blipFill xmlns:a="http://schemas.openxmlformats.org/drawingml/2006/main">
-            <a:blip xmlns:r="http://schemas.openxmlformats.org/officeDocument/2006/relationships" r:embed="R52ac1ba4dfc145ec"/>
+            <a:blip xmlns:r="http://schemas.openxmlformats.org/officeDocument/2006/relationships" r:embed="R8301b25f3cc14a0c"/>
             <a:stretch>
               <a:fillRect l="0" t="0" r="0" b="0"/>
             </a:stretch>
@@ -32524,7 +32524,7 @@
           <p:cNvPr id="10" name="Freeform 10">
             <a:extLst xmlns:a="http://schemas.openxmlformats.org/drawingml/2006/main">
               <a:ext uri="{FF2B5EF4-FFF2-40B4-BE49-F238E27FC236}">
-                <a16:creationId xmlns:a16="http://schemas.microsoft.com/office/drawing/2014/main" id="{4EABFB1D-4959-4CA0-A454-C2DEB007AD78}"/>
+                <a16:creationId xmlns:a16="http://schemas.microsoft.com/office/drawing/2014/main" id="{98E97CC8-727F-4BB8-9702-DE1F3592B326}"/>
               </a:ext>
             </a:extLst>
           </p:cNvPr>
@@ -32562,10 +32562,10 @@
             </a:pathLst>
           </a:custGeom>
           <a:blipFill xmlns:a="http://schemas.openxmlformats.org/drawingml/2006/main">
-            <a:blip xmlns:r="http://schemas.openxmlformats.org/officeDocument/2006/relationships" r:embed="R169b15a1f3274d33">
+            <a:blip xmlns:r="http://schemas.openxmlformats.org/officeDocument/2006/relationships" r:embed="R0ec0a4b66ae64f17">
               <a:extLst>
                 <a:ext uri="{96DAC541-7B7A-43D3-8B79-37D633B846F1}">
-                  <asvg:svgBlip xmlns:asvg="http://schemas.microsoft.com/office/drawing/2016/SVG/main" r:embed="R20cb77a1c271421e"/>
+                  <asvg:svgBlip xmlns:asvg="http://schemas.microsoft.com/office/drawing/2016/SVG/main" r:embed="Rf4389e4d7a114a54"/>
                 </a:ext>
               </a:extLst>
             </a:blip>
@@ -32580,7 +32580,7 @@
           <p:cNvPr id="11" name="Freeform 11">
             <a:extLst xmlns:a="http://schemas.openxmlformats.org/drawingml/2006/main">
               <a:ext uri="{FF2B5EF4-FFF2-40B4-BE49-F238E27FC236}">
-                <a16:creationId xmlns:a16="http://schemas.microsoft.com/office/drawing/2014/main" id="{EF9A4F52-C17B-4722-B0AB-A9EBC60AF82B}"/>
+                <a16:creationId xmlns:a16="http://schemas.microsoft.com/office/drawing/2014/main" id="{B728D628-9E22-4BDE-A8A8-6A428C0C4F4C}"/>
               </a:ext>
             </a:extLst>
           </p:cNvPr>
@@ -32618,10 +32618,10 @@
             </a:pathLst>
           </a:custGeom>
           <a:blipFill xmlns:a="http://schemas.openxmlformats.org/drawingml/2006/main">
-            <a:blip xmlns:r="http://schemas.openxmlformats.org/officeDocument/2006/relationships" r:embed="R169b15a1f3274d33">
+            <a:blip xmlns:r="http://schemas.openxmlformats.org/officeDocument/2006/relationships" r:embed="R0ec0a4b66ae64f17">
               <a:extLst>
                 <a:ext uri="{96DAC541-7B7A-43D3-8B79-37D633B846F1}">
-                  <asvg:svgBlip xmlns:asvg="http://schemas.microsoft.com/office/drawing/2016/SVG/main" r:embed="R20cb77a1c271421e"/>
+                  <asvg:svgBlip xmlns:asvg="http://schemas.microsoft.com/office/drawing/2016/SVG/main" r:embed="Rf4389e4d7a114a54"/>
                 </a:ext>
               </a:extLst>
             </a:blip>
@@ -32636,7 +32636,7 @@
           <p:cNvPr id="12" name="TextBox 12">
             <a:extLst xmlns:a="http://schemas.openxmlformats.org/drawingml/2006/main">
               <a:ext uri="{FF2B5EF4-FFF2-40B4-BE49-F238E27FC236}">
-                <a16:creationId xmlns:a16="http://schemas.microsoft.com/office/drawing/2014/main" id="{E5E11FA6-6D93-489D-81F4-5204655B406B}"/>
+                <a16:creationId xmlns:a16="http://schemas.microsoft.com/office/drawing/2014/main" id="{E593B93A-3DAB-4EC1-A15C-5349954652B5}"/>
               </a:ext>
             </a:extLst>
           </p:cNvPr>
@@ -32690,7 +32690,7 @@
           <p:cNvPr id="14" name="Freeform 14">
             <a:extLst xmlns:a="http://schemas.openxmlformats.org/drawingml/2006/main">
               <a:ext uri="{FF2B5EF4-FFF2-40B4-BE49-F238E27FC236}">
-                <a16:creationId xmlns:a16="http://schemas.microsoft.com/office/drawing/2014/main" id="{6EDFEE28-6B09-495A-ACC1-D55B6E76C6F9}"/>
+                <a16:creationId xmlns:a16="http://schemas.microsoft.com/office/drawing/2014/main" id="{6393FC13-F7DE-4876-A748-D70C732205FF}"/>
               </a:ext>
             </a:extLst>
           </p:cNvPr>
@@ -32749,7 +32749,7 @@
           <p:cNvPr id="15" name="TextBox 15">
             <a:extLst xmlns:a="http://schemas.openxmlformats.org/drawingml/2006/main">
               <a:ext uri="{FF2B5EF4-FFF2-40B4-BE49-F238E27FC236}">
-                <a16:creationId xmlns:a16="http://schemas.microsoft.com/office/drawing/2014/main" id="{D8E943DE-ABED-452F-BBBF-69774D00A800}"/>
+                <a16:creationId xmlns:a16="http://schemas.microsoft.com/office/drawing/2014/main" id="{815CA26A-C7F9-4723-8041-778127DB67BE}"/>
               </a:ext>
             </a:extLst>
           </p:cNvPr>
@@ -32789,7 +32789,7 @@
           <p:cNvPr id="16" name="TextBox 16">
             <a:extLst xmlns:a="http://schemas.openxmlformats.org/drawingml/2006/main">
               <a:ext uri="{FF2B5EF4-FFF2-40B4-BE49-F238E27FC236}">
-                <a16:creationId xmlns:a16="http://schemas.microsoft.com/office/drawing/2014/main" id="{606EA2B7-AE0C-4333-AA40-B3F6B40A2C0C}"/>
+                <a16:creationId xmlns:a16="http://schemas.microsoft.com/office/drawing/2014/main" id="{647779C5-53C4-4D46-B5DD-F520909CC8CA}"/>
               </a:ext>
             </a:extLst>
           </p:cNvPr>
@@ -32838,7 +32838,7 @@
           <p:cNvPr id="17" name="TextBox 17">
             <a:extLst xmlns:a="http://schemas.openxmlformats.org/drawingml/2006/main">
               <a:ext uri="{FF2B5EF4-FFF2-40B4-BE49-F238E27FC236}">
-                <a16:creationId xmlns:a16="http://schemas.microsoft.com/office/drawing/2014/main" id="{3CD9C22D-BCE0-4B45-8EDF-53B562E08EAA}"/>
+                <a16:creationId xmlns:a16="http://schemas.microsoft.com/office/drawing/2014/main" id="{E574FF55-042D-4861-836E-0C66BD167246}"/>
               </a:ext>
             </a:extLst>
           </p:cNvPr>
@@ -32890,7 +32890,7 @@
           <p:cNvPr id="19" name="Freeform 19">
             <a:extLst xmlns:a="http://schemas.openxmlformats.org/drawingml/2006/main">
               <a:ext uri="{FF2B5EF4-FFF2-40B4-BE49-F238E27FC236}">
-                <a16:creationId xmlns:a16="http://schemas.microsoft.com/office/drawing/2014/main" id="{BA66176D-0EAA-4C01-9C9C-3E8F884D6DF9}"/>
+                <a16:creationId xmlns:a16="http://schemas.microsoft.com/office/drawing/2014/main" id="{04578CF9-54D1-445B-9DFA-B00E478F1383}"/>
               </a:ext>
             </a:extLst>
           </p:cNvPr>
@@ -32949,7 +32949,7 @@
           <p:cNvPr id="20" name="TextBox 20">
             <a:extLst xmlns:a="http://schemas.openxmlformats.org/drawingml/2006/main">
               <a:ext uri="{FF2B5EF4-FFF2-40B4-BE49-F238E27FC236}">
-                <a16:creationId xmlns:a16="http://schemas.microsoft.com/office/drawing/2014/main" id="{0D1C9278-980A-4D36-9D0C-EC1228370E8B}"/>
+                <a16:creationId xmlns:a16="http://schemas.microsoft.com/office/drawing/2014/main" id="{CAAECA05-D13E-46F8-A839-B38F2EE942EA}"/>
               </a:ext>
             </a:extLst>
           </p:cNvPr>
@@ -32989,7 +32989,7 @@
           <p:cNvPr id="21" name="TextBox 21">
             <a:extLst xmlns:a="http://schemas.openxmlformats.org/drawingml/2006/main">
               <a:ext uri="{FF2B5EF4-FFF2-40B4-BE49-F238E27FC236}">
-                <a16:creationId xmlns:a16="http://schemas.microsoft.com/office/drawing/2014/main" id="{4783CA58-48FB-426B-97D5-C9ABFBBAA67C}"/>
+                <a16:creationId xmlns:a16="http://schemas.microsoft.com/office/drawing/2014/main" id="{6839E21F-17F9-4513-A138-5B0E277A4D2C}"/>
               </a:ext>
             </a:extLst>
           </p:cNvPr>
@@ -33038,7 +33038,7 @@
           <p:cNvPr id="22" name="TextBox 22">
             <a:extLst xmlns:a="http://schemas.openxmlformats.org/drawingml/2006/main">
               <a:ext uri="{FF2B5EF4-FFF2-40B4-BE49-F238E27FC236}">
-                <a16:creationId xmlns:a16="http://schemas.microsoft.com/office/drawing/2014/main" id="{D1F4F77E-B108-46F6-B757-B8C6B4303D3A}"/>
+                <a16:creationId xmlns:a16="http://schemas.microsoft.com/office/drawing/2014/main" id="{582C3109-3497-45CB-AFC1-770D4BAE35D6}"/>
               </a:ext>
             </a:extLst>
           </p:cNvPr>
@@ -33090,7 +33090,7 @@
           <p:cNvPr id="23" name="AutoShape 23">
             <a:extLst xmlns:a="http://schemas.openxmlformats.org/drawingml/2006/main">
               <a:ext uri="{FF2B5EF4-FFF2-40B4-BE49-F238E27FC236}">
-                <a16:creationId xmlns:a16="http://schemas.microsoft.com/office/drawing/2014/main" id="{70B39103-5C30-4117-A197-1D3CA9B7AFC7}"/>
+                <a16:creationId xmlns:a16="http://schemas.microsoft.com/office/drawing/2014/main" id="{E4C3DE07-CBEA-41E3-9C63-FF6D2BF49E28}"/>
               </a:ext>
             </a:extLst>
           </p:cNvPr>
@@ -33120,7 +33120,7 @@
           <p:cNvPr id="24" name="內容_7_環境指標：門檻與增量">
             <a:extLst xmlns:a="http://schemas.openxmlformats.org/drawingml/2006/main">
               <a:ext uri="{FF2B5EF4-FFF2-40B4-BE49-F238E27FC236}">
-                <a16:creationId xmlns:a16="http://schemas.microsoft.com/office/drawing/2014/main" id="{30FD7FC6-1185-4E89-9544-FA86C3EA575F}"/>
+                <a16:creationId xmlns:a16="http://schemas.microsoft.com/office/drawing/2014/main" id="{B03125EF-2C5E-45CE-BFFC-B2CD4291FB74}"/>
               </a:ext>
             </a:extLst>
           </p:cNvPr>
@@ -33278,7 +33278,7 @@
           <p:cNvPr id="25" name="內容_7_74%達標，不等於聯合方案再">
             <a:extLst xmlns:a="http://schemas.openxmlformats.org/drawingml/2006/main">
               <a:ext uri="{FF2B5EF4-FFF2-40B4-BE49-F238E27FC236}">
-                <a16:creationId xmlns:a16="http://schemas.microsoft.com/office/drawing/2014/main" id="{E17F1848-7CB6-44C9-AF25-485A89D5CC16}"/>
+                <a16:creationId xmlns:a16="http://schemas.microsoft.com/office/drawing/2014/main" id="{5F522578-C20E-4C30-9B9E-BDDF0639F883}"/>
               </a:ext>
             </a:extLst>
           </p:cNvPr>
@@ -33436,7 +33436,7 @@
           <p:cNvPr id="26" name="內容_7_改善前 73.853%">
             <a:extLst xmlns:a="http://schemas.openxmlformats.org/drawingml/2006/main">
               <a:ext uri="{FF2B5EF4-FFF2-40B4-BE49-F238E27FC236}">
-                <a16:creationId xmlns:a16="http://schemas.microsoft.com/office/drawing/2014/main" id="{BC4D5794-3492-48B9-AAA4-D32474B341A3}"/>
+                <a16:creationId xmlns:a16="http://schemas.microsoft.com/office/drawing/2014/main" id="{FDA76BB8-96FE-4FEE-94D1-D36AA4DCA7C7}"/>
               </a:ext>
             </a:extLst>
           </p:cNvPr>
@@ -33594,7 +33594,7 @@
           <p:cNvPr id="27" name="內容_7_每件0.184875 度電&#10;">
             <a:extLst xmlns:a="http://schemas.openxmlformats.org/drawingml/2006/main">
               <a:ext uri="{FF2B5EF4-FFF2-40B4-BE49-F238E27FC236}">
-                <a16:creationId xmlns:a16="http://schemas.microsoft.com/office/drawing/2014/main" id="{FE9F89D8-2D7F-4871-A95B-0945560D6E61}"/>
+                <a16:creationId xmlns:a16="http://schemas.microsoft.com/office/drawing/2014/main" id="{13447319-099C-45CE-B708-57B64F74FF0C}"/>
               </a:ext>
             </a:extLst>
           </p:cNvPr>
@@ -33798,7 +33798,7 @@
           <p:cNvPr id="28" name="內容_7_12公尺聯合：73.995%">
             <a:extLst xmlns:a="http://schemas.openxmlformats.org/drawingml/2006/main">
               <a:ext uri="{FF2B5EF4-FFF2-40B4-BE49-F238E27FC236}">
-                <a16:creationId xmlns:a16="http://schemas.microsoft.com/office/drawing/2014/main" id="{48F64F39-C418-48B8-8242-908EB30B9F15}"/>
+                <a16:creationId xmlns:a16="http://schemas.microsoft.com/office/drawing/2014/main" id="{7D27F06A-559D-429F-94C6-80FFD252F12E}"/>
               </a:ext>
             </a:extLst>
           </p:cNvPr>
@@ -33956,7 +33956,7 @@
           <p:cNvPr id="29" name="內容_7_相較改善前僅 +0.141百">
             <a:extLst xmlns:a="http://schemas.openxmlformats.org/drawingml/2006/main">
               <a:ext uri="{FF2B5EF4-FFF2-40B4-BE49-F238E27FC236}">
-                <a16:creationId xmlns:a16="http://schemas.microsoft.com/office/drawing/2014/main" id="{725FD368-D56A-462A-B293-6FCCDBA8040A}"/>
+                <a16:creationId xmlns:a16="http://schemas.microsoft.com/office/drawing/2014/main" id="{277D9D79-11A3-4260-BEF5-A0D913163DA6}"/>
               </a:ext>
             </a:extLst>
           </p:cNvPr>
@@ -34160,7 +34160,7 @@
           <p:cNvPr id="30" name="內容_7_42%是目標門檻；原始來源未">
             <a:extLst xmlns:a="http://schemas.openxmlformats.org/drawingml/2006/main">
               <a:ext uri="{FF2B5EF4-FFF2-40B4-BE49-F238E27FC236}">
-                <a16:creationId xmlns:a16="http://schemas.microsoft.com/office/drawing/2014/main" id="{5A167EEF-657B-4A89-964A-97953236D3EF}"/>
+                <a16:creationId xmlns:a16="http://schemas.microsoft.com/office/drawing/2014/main" id="{9B82C2CB-0468-402D-913F-3D3C97502A33}"/>
               </a:ext>
             </a:extLst>
           </p:cNvPr>
@@ -34316,7 +34316,7 @@
     </p:spTree>
     <p:extLst>
       <p:ext uri="{BB962C8B-B14F-4D97-AF65-F5344CB8AC3E}">
-        <p14:creationId xmlns:p14="http://schemas.microsoft.com/office/powerpoint/2010/main" val="1484373825"/>
+        <p14:creationId xmlns:p14="http://schemas.microsoft.com/office/powerpoint/2010/main" val="1485290961"/>
       </p:ext>
     </p:extLst>
   </p:cSld>
@@ -34340,7 +34340,7 @@
           <p:cNvPr id="2" name="Freeform 2">
             <a:extLst xmlns:a="http://schemas.openxmlformats.org/drawingml/2006/main">
               <a:ext uri="{FF2B5EF4-FFF2-40B4-BE49-F238E27FC236}">
-                <a16:creationId xmlns:a16="http://schemas.microsoft.com/office/drawing/2014/main" id="{E48E83F6-28D3-49C8-A457-E49598C627A3}"/>
+                <a16:creationId xmlns:a16="http://schemas.microsoft.com/office/drawing/2014/main" id="{47DB7B52-3BF8-4AD5-8B6A-6688A65D8800}"/>
               </a:ext>
             </a:extLst>
           </p:cNvPr>
@@ -34378,7 +34378,7 @@
             </a:pathLst>
           </a:custGeom>
           <a:blipFill xmlns:a="http://schemas.openxmlformats.org/drawingml/2006/main">
-            <a:blip xmlns:r="http://schemas.openxmlformats.org/officeDocument/2006/relationships" r:embed="Rc433bf421ed149cc"/>
+            <a:blip xmlns:r="http://schemas.openxmlformats.org/officeDocument/2006/relationships" r:embed="R5506bb103bb04799"/>
             <a:stretch>
               <a:fillRect l="-35258" t="-5555" r="-24931" b="-72434"/>
             </a:stretch>
@@ -34390,7 +34390,7 @@
           <p:cNvPr id="4" name="Freeform 4">
             <a:extLst xmlns:a="http://schemas.openxmlformats.org/drawingml/2006/main">
               <a:ext uri="{FF2B5EF4-FFF2-40B4-BE49-F238E27FC236}">
-                <a16:creationId xmlns:a16="http://schemas.microsoft.com/office/drawing/2014/main" id="{BFC28C33-AF89-4C55-B1B5-8BDC9AA83E4B}"/>
+                <a16:creationId xmlns:a16="http://schemas.microsoft.com/office/drawing/2014/main" id="{EA94946B-61F2-4728-B45E-96A7DE68B93A}"/>
               </a:ext>
             </a:extLst>
           </p:cNvPr>
@@ -34464,7 +34464,7 @@
           <p:cNvPr id="5" name="TextBox 5">
             <a:extLst xmlns:a="http://schemas.openxmlformats.org/drawingml/2006/main">
               <a:ext uri="{FF2B5EF4-FFF2-40B4-BE49-F238E27FC236}">
-                <a16:creationId xmlns:a16="http://schemas.microsoft.com/office/drawing/2014/main" id="{8E82D7BA-238F-49F5-B284-3CEDD54B4F1B}"/>
+                <a16:creationId xmlns:a16="http://schemas.microsoft.com/office/drawing/2014/main" id="{832350E7-7A06-4CB3-9D4E-1BE829B7218F}"/>
               </a:ext>
             </a:extLst>
           </p:cNvPr>
@@ -34500,7 +34500,7 @@
           <p:cNvPr id="6" name="Freeform 6">
             <a:extLst xmlns:a="http://schemas.openxmlformats.org/drawingml/2006/main">
               <a:ext uri="{FF2B5EF4-FFF2-40B4-BE49-F238E27FC236}">
-                <a16:creationId xmlns:a16="http://schemas.microsoft.com/office/drawing/2014/main" id="{A7F7DA1B-5A33-4EB0-B713-AC9340D7CA2D}"/>
+                <a16:creationId xmlns:a16="http://schemas.microsoft.com/office/drawing/2014/main" id="{6F5D708B-2A58-43EA-B64F-A65582B28E39}"/>
               </a:ext>
             </a:extLst>
           </p:cNvPr>
@@ -34538,7 +34538,7 @@
             </a:pathLst>
           </a:custGeom>
           <a:blipFill xmlns:a="http://schemas.openxmlformats.org/drawingml/2006/main">
-            <a:blip xmlns:r="http://schemas.openxmlformats.org/officeDocument/2006/relationships" r:embed="R78b8576c3748433d"/>
+            <a:blip xmlns:r="http://schemas.openxmlformats.org/officeDocument/2006/relationships" r:embed="R6760dcf447d449cd"/>
             <a:stretch>
               <a:fillRect l="0" t="0" r="0" b="0"/>
             </a:stretch>
@@ -34550,7 +34550,7 @@
           <p:cNvPr id="7" name="Freeform 7">
             <a:extLst xmlns:a="http://schemas.openxmlformats.org/drawingml/2006/main">
               <a:ext uri="{FF2B5EF4-FFF2-40B4-BE49-F238E27FC236}">
-                <a16:creationId xmlns:a16="http://schemas.microsoft.com/office/drawing/2014/main" id="{F055E3B0-9BAD-4305-AB90-4FE82B06D8B3}"/>
+                <a16:creationId xmlns:a16="http://schemas.microsoft.com/office/drawing/2014/main" id="{EA6BDD97-CBA3-4EA2-98B3-F0839CD75EB1}"/>
               </a:ext>
             </a:extLst>
           </p:cNvPr>
@@ -34588,10 +34588,10 @@
             </a:pathLst>
           </a:custGeom>
           <a:blipFill xmlns:a="http://schemas.openxmlformats.org/drawingml/2006/main">
-            <a:blip xmlns:r="http://schemas.openxmlformats.org/officeDocument/2006/relationships" r:embed="R7853de9decc540e2">
+            <a:blip xmlns:r="http://schemas.openxmlformats.org/officeDocument/2006/relationships" r:embed="Rd80f9fc243c14116">
               <a:extLst>
                 <a:ext uri="{96DAC541-7B7A-43D3-8B79-37D633B846F1}">
-                  <asvg:svgBlip xmlns:asvg="http://schemas.microsoft.com/office/drawing/2016/SVG/main" r:embed="R5b481e93b54e46b5"/>
+                  <asvg:svgBlip xmlns:asvg="http://schemas.microsoft.com/office/drawing/2016/SVG/main" r:embed="Rfdc05d7a88944ace"/>
                 </a:ext>
               </a:extLst>
             </a:blip>
@@ -34606,7 +34606,7 @@
           <p:cNvPr id="8" name="Freeform 8">
             <a:extLst xmlns:a="http://schemas.openxmlformats.org/drawingml/2006/main">
               <a:ext uri="{FF2B5EF4-FFF2-40B4-BE49-F238E27FC236}">
-                <a16:creationId xmlns:a16="http://schemas.microsoft.com/office/drawing/2014/main" id="{7E6A03BF-9247-454F-AD6A-8AD4CDB7F90C}"/>
+                <a16:creationId xmlns:a16="http://schemas.microsoft.com/office/drawing/2014/main" id="{2EEA60DD-F96F-4516-8D5A-7DC1DA392E73}"/>
               </a:ext>
             </a:extLst>
           </p:cNvPr>
@@ -34644,10 +34644,10 @@
             </a:pathLst>
           </a:custGeom>
           <a:blipFill xmlns:a="http://schemas.openxmlformats.org/drawingml/2006/main">
-            <a:blip xmlns:r="http://schemas.openxmlformats.org/officeDocument/2006/relationships" r:embed="R7853de9decc540e2">
+            <a:blip xmlns:r="http://schemas.openxmlformats.org/officeDocument/2006/relationships" r:embed="Rd80f9fc243c14116">
               <a:extLst>
                 <a:ext uri="{96DAC541-7B7A-43D3-8B79-37D633B846F1}">
-                  <asvg:svgBlip xmlns:asvg="http://schemas.microsoft.com/office/drawing/2016/SVG/main" r:embed="R5b481e93b54e46b5"/>
+                  <asvg:svgBlip xmlns:asvg="http://schemas.microsoft.com/office/drawing/2016/SVG/main" r:embed="Rfdc05d7a88944ace"/>
                 </a:ext>
               </a:extLst>
             </a:blip>
@@ -34662,7 +34662,7 @@
           <p:cNvPr id="9" name="Freeform 9">
             <a:extLst xmlns:a="http://schemas.openxmlformats.org/drawingml/2006/main">
               <a:ext uri="{FF2B5EF4-FFF2-40B4-BE49-F238E27FC236}">
-                <a16:creationId xmlns:a16="http://schemas.microsoft.com/office/drawing/2014/main" id="{612DD9BD-253C-453E-B3A4-859E5151F3AC}"/>
+                <a16:creationId xmlns:a16="http://schemas.microsoft.com/office/drawing/2014/main" id="{1BDA29C4-16FC-40C9-B611-B325946B80B9}"/>
               </a:ext>
             </a:extLst>
           </p:cNvPr>
@@ -34710,7 +34710,7 @@
           <p:cNvPr id="10" name="TextBox 10">
             <a:extLst xmlns:a="http://schemas.openxmlformats.org/drawingml/2006/main">
               <a:ext uri="{FF2B5EF4-FFF2-40B4-BE49-F238E27FC236}">
-                <a16:creationId xmlns:a16="http://schemas.microsoft.com/office/drawing/2014/main" id="{DFD60F7A-6337-4B4D-B147-CE1A31E9D44D}"/>
+                <a16:creationId xmlns:a16="http://schemas.microsoft.com/office/drawing/2014/main" id="{54926248-D066-476B-AA53-A9F19071F8DF}"/>
               </a:ext>
             </a:extLst>
           </p:cNvPr>
@@ -34871,7 +34871,7 @@
           <p:cNvPr id="11" name="TextBox 11">
             <a:extLst xmlns:a="http://schemas.openxmlformats.org/drawingml/2006/main">
               <a:ext uri="{FF2B5EF4-FFF2-40B4-BE49-F238E27FC236}">
-                <a16:creationId xmlns:a16="http://schemas.microsoft.com/office/drawing/2014/main" id="{B0079C3B-546E-422E-B91C-1A239326AE8A}"/>
+                <a16:creationId xmlns:a16="http://schemas.microsoft.com/office/drawing/2014/main" id="{1EB88EB9-6C59-4633-A686-F1A7065356AF}"/>
               </a:ext>
             </a:extLst>
           </p:cNvPr>
@@ -34925,7 +34925,7 @@
           <p:cNvPr id="12" name="TextBox 12">
             <a:extLst xmlns:a="http://schemas.openxmlformats.org/drawingml/2006/main">
               <a:ext uri="{FF2B5EF4-FFF2-40B4-BE49-F238E27FC236}">
-                <a16:creationId xmlns:a16="http://schemas.microsoft.com/office/drawing/2014/main" id="{DC49AD96-567F-47AB-8815-B0A7B6350217}"/>
+                <a16:creationId xmlns:a16="http://schemas.microsoft.com/office/drawing/2014/main" id="{594687A3-B8D3-40F3-9348-8309BAFEDE44}"/>
               </a:ext>
             </a:extLst>
           </p:cNvPr>
@@ -34977,7 +34977,7 @@
           <p:cNvPr id="13" name="TextBox 13">
             <a:extLst xmlns:a="http://schemas.openxmlformats.org/drawingml/2006/main">
               <a:ext uri="{FF2B5EF4-FFF2-40B4-BE49-F238E27FC236}">
-                <a16:creationId xmlns:a16="http://schemas.microsoft.com/office/drawing/2014/main" id="{1BC8F89E-17CD-4B16-842C-E03FF9D47133}"/>
+                <a16:creationId xmlns:a16="http://schemas.microsoft.com/office/drawing/2014/main" id="{5A16601C-68EF-4D1E-B712-16AB32F00ACD}"/>
               </a:ext>
             </a:extLst>
           </p:cNvPr>
@@ -35029,7 +35029,7 @@
           <p:cNvPr id="14" name="TextBox 14">
             <a:extLst xmlns:a="http://schemas.openxmlformats.org/drawingml/2006/main">
               <a:ext uri="{FF2B5EF4-FFF2-40B4-BE49-F238E27FC236}">
-                <a16:creationId xmlns:a16="http://schemas.microsoft.com/office/drawing/2014/main" id="{DBA78A24-0C43-411A-8DB4-5465C1C4850B}"/>
+                <a16:creationId xmlns:a16="http://schemas.microsoft.com/office/drawing/2014/main" id="{751CE905-A203-4D36-BBAF-754752CA9CF3}"/>
               </a:ext>
             </a:extLst>
           </p:cNvPr>
@@ -35081,7 +35081,7 @@
           <p:cNvPr id="15" name="Freeform 15">
             <a:extLst xmlns:a="http://schemas.openxmlformats.org/drawingml/2006/main">
               <a:ext uri="{FF2B5EF4-FFF2-40B4-BE49-F238E27FC236}">
-                <a16:creationId xmlns:a16="http://schemas.microsoft.com/office/drawing/2014/main" id="{08490333-4F31-476B-B4FC-94F7646F9115}"/>
+                <a16:creationId xmlns:a16="http://schemas.microsoft.com/office/drawing/2014/main" id="{F42C2A44-2BBA-4C8D-A847-875A73929B79}"/>
               </a:ext>
             </a:extLst>
           </p:cNvPr>
@@ -35129,7 +35129,7 @@
           <p:cNvPr id="16" name="內容_8_檢查V1–V6：守恆與統計">
             <a:extLst xmlns:a="http://schemas.openxmlformats.org/drawingml/2006/main">
               <a:ext uri="{FF2B5EF4-FFF2-40B4-BE49-F238E27FC236}">
-                <a16:creationId xmlns:a16="http://schemas.microsoft.com/office/drawing/2014/main" id="{2B845F95-1FAD-475A-8A12-EA7E850F8790}"/>
+                <a16:creationId xmlns:a16="http://schemas.microsoft.com/office/drawing/2014/main" id="{652EA46A-1045-4617-96F1-CE9A9883BD55}"/>
               </a:ext>
             </a:extLst>
           </p:cNvPr>
@@ -35287,7 +35287,7 @@
           <p:cNvPr id="17" name="內容_8_驗證必須能攔下錯誤">
             <a:extLst xmlns:a="http://schemas.openxmlformats.org/drawingml/2006/main">
               <a:ext uri="{FF2B5EF4-FFF2-40B4-BE49-F238E27FC236}">
-                <a16:creationId xmlns:a16="http://schemas.microsoft.com/office/drawing/2014/main" id="{1D052379-B821-4860-9C86-45D66DB7FD76}"/>
+                <a16:creationId xmlns:a16="http://schemas.microsoft.com/office/drawing/2014/main" id="{3E135BF8-CE50-4F4F-A592-4BEE059077D8}"/>
               </a:ext>
             </a:extLst>
           </p:cNvPr>
@@ -35445,7 +35445,7 @@
           <p:cNvPr id="18" name="">
             <a:extLst xmlns:a="http://schemas.openxmlformats.org/drawingml/2006/main">
               <a:ext uri="{FF2B5EF4-FFF2-40B4-BE49-F238E27FC236}">
-                <a16:creationId xmlns:a16="http://schemas.microsoft.com/office/drawing/2014/main" id="{0340BCE9-7CD0-4177-A8D3-11050AC8523E}"/>
+                <a16:creationId xmlns:a16="http://schemas.microsoft.com/office/drawing/2014/main" id="{E179A2DF-EC05-4C6B-9E1B-5647358B66A1}"/>
               </a:ext>
             </a:extLst>
           </p:cNvPr>
@@ -35614,7 +35614,7 @@
                           <a:ea typeface="Microsoft JhengHei"/>
                           <a:cs typeface="Microsoft JhengHei"/>
                         </a:rPr>
-                        <a:t>V1 守恆</a:t>
+                        <a:t>守恆檢查（V1）</a:t>
                       </a:r>
                     </a:p>
                   </a:txBody>
@@ -35730,7 +35730,7 @@
                           <a:ea typeface="Microsoft JhengHei"/>
                           <a:cs typeface="Microsoft JhengHei"/>
                         </a:rPr>
-                        <a:t>V2／V3 穩定</a:t>
+                        <a:t>穩定檢查（V2／V3）</a:t>
                       </a:r>
                     </a:p>
                   </a:txBody>
@@ -35772,7 +35772,7 @@
                           <a:ea typeface="Microsoft JhengHei"/>
                           <a:cs typeface="Microsoft JhengHei"/>
                         </a:rPr>
-                        <a:t>平日：流量CV≤5%；在製漂移-0.21%</a:t>
+                        <a:t>平日變異係數≤5%；在製漂移-0.21%</a:t>
                       </a:r>
                     </a:p>
                   </a:txBody>
@@ -35846,7 +35846,7 @@
                           <a:ea typeface="Microsoft JhengHei"/>
                           <a:cs typeface="Microsoft JhengHei"/>
                         </a:rPr>
-                        <a:t>V4 同種子</a:t>
+                        <a:t>同種子檢查（V4）</a:t>
                       </a:r>
                     </a:p>
                   </a:txBody>
@@ -35962,7 +35962,7 @@
                           <a:ea typeface="Microsoft JhengHei"/>
                           <a:cs typeface="Microsoft JhengHei"/>
                         </a:rPr>
-                        <a:t>V5 估計精度</a:t>
+                        <a:t>估計精度檢查（V5）</a:t>
                       </a:r>
                     </a:p>
                   </a:txBody>
@@ -36078,7 +36078,7 @@
                           <a:ea typeface="Microsoft JhengHei"/>
                           <a:cs typeface="Microsoft JhengHei"/>
                         </a:rPr>
-                        <a:t>V6 分級比例</a:t>
+                        <a:t>分級比例檢查（V6）</a:t>
                       </a:r>
                     </a:p>
                   </a:txBody>
@@ -36188,7 +36188,7 @@
           <p:cNvPr id="19" name="內容_8_V是檢查編號，不是模型版本。">
             <a:extLst xmlns:a="http://schemas.openxmlformats.org/drawingml/2006/main">
               <a:ext uri="{FF2B5EF4-FFF2-40B4-BE49-F238E27FC236}">
-                <a16:creationId xmlns:a16="http://schemas.microsoft.com/office/drawing/2014/main" id="{3AD8234C-15BA-465D-AD97-0CF264E1976B}"/>
+                <a16:creationId xmlns:a16="http://schemas.microsoft.com/office/drawing/2014/main" id="{A2571063-2FBB-4EBD-935C-29A1DB835FC5}"/>
               </a:ext>
             </a:extLst>
           </p:cNvPr>
@@ -36336,7 +36336,7 @@
                 <a:ea typeface="Microsoft JhengHei"/>
                 <a:cs typeface="Microsoft JhengHei"/>
               </a:rPr>
-              <a:t>V是檢查編號，不是模型版本。CV＝相對波動；p值用來檢查分級比例是否相容。</a:t>
+              <a:t>V是檢查編號，不是模型版本。變異係數（CV）表示相對波動；p值用來檢查分級比例是否相容。</a:t>
             </a:r>
           </a:p>
         </p:txBody>
@@ -36346,7 +36346,7 @@
           <p:cNvPr id="20" name="內容_8_600個基準樣本＝主實驗30">
             <a:extLst xmlns:a="http://schemas.openxmlformats.org/drawingml/2006/main">
               <a:ext uri="{FF2B5EF4-FFF2-40B4-BE49-F238E27FC236}">
-                <a16:creationId xmlns:a16="http://schemas.microsoft.com/office/drawing/2014/main" id="{893D8F59-9048-4B04-A1F6-AF0E53BABC1B}"/>
+                <a16:creationId xmlns:a16="http://schemas.microsoft.com/office/drawing/2014/main" id="{EF37D15C-D6FD-44F8-8076-B7A29A0262C1}"/>
               </a:ext>
             </a:extLst>
           </p:cNvPr>
@@ -36502,7 +36502,7 @@
     </p:spTree>
     <p:extLst>
       <p:ext uri="{BB962C8B-B14F-4D97-AF65-F5344CB8AC3E}">
-        <p14:creationId xmlns:p14="http://schemas.microsoft.com/office/powerpoint/2010/main" val="1165577380"/>
+        <p14:creationId xmlns:p14="http://schemas.microsoft.com/office/powerpoint/2010/main" val="1154784595"/>
       </p:ext>
     </p:extLst>
   </p:cSld>
@@ -36526,7 +36526,7 @@
           <p:cNvPr id="2" name="Freeform 2">
             <a:extLst xmlns:a="http://schemas.openxmlformats.org/drawingml/2006/main">
               <a:ext uri="{FF2B5EF4-FFF2-40B4-BE49-F238E27FC236}">
-                <a16:creationId xmlns:a16="http://schemas.microsoft.com/office/drawing/2014/main" id="{F99FE5BC-BE58-4952-B28F-62CAF9B746A8}"/>
+                <a16:creationId xmlns:a16="http://schemas.microsoft.com/office/drawing/2014/main" id="{E2731B3A-0047-4CE8-9698-CC4E4EEE6066}"/>
               </a:ext>
             </a:extLst>
           </p:cNvPr>
@@ -36564,7 +36564,7 @@
             </a:pathLst>
           </a:custGeom>
           <a:blipFill xmlns:a="http://schemas.openxmlformats.org/drawingml/2006/main">
-            <a:blip xmlns:r="http://schemas.openxmlformats.org/officeDocument/2006/relationships" r:embed="R5334ff5f9aae4649"/>
+            <a:blip xmlns:r="http://schemas.openxmlformats.org/officeDocument/2006/relationships" r:embed="Red7a344e41314736"/>
             <a:stretch>
               <a:fillRect l="-35258" t="-5555" r="-24931" b="-72434"/>
             </a:stretch>
@@ -36576,7 +36576,7 @@
           <p:cNvPr id="4" name="Freeform 4">
             <a:extLst xmlns:a="http://schemas.openxmlformats.org/drawingml/2006/main">
               <a:ext uri="{FF2B5EF4-FFF2-40B4-BE49-F238E27FC236}">
-                <a16:creationId xmlns:a16="http://schemas.microsoft.com/office/drawing/2014/main" id="{F3E65B8D-3A66-40F9-B06C-42C786A928E5}"/>
+                <a16:creationId xmlns:a16="http://schemas.microsoft.com/office/drawing/2014/main" id="{BF204474-599A-48C3-BA3A-46C3EEA3E4BE}"/>
               </a:ext>
             </a:extLst>
           </p:cNvPr>
@@ -36650,7 +36650,7 @@
           <p:cNvPr id="5" name="TextBox 5">
             <a:extLst xmlns:a="http://schemas.openxmlformats.org/drawingml/2006/main">
               <a:ext uri="{FF2B5EF4-FFF2-40B4-BE49-F238E27FC236}">
-                <a16:creationId xmlns:a16="http://schemas.microsoft.com/office/drawing/2014/main" id="{22FCC330-EC48-45DF-9A7A-4B7EEEB99CCE}"/>
+                <a16:creationId xmlns:a16="http://schemas.microsoft.com/office/drawing/2014/main" id="{E50D0010-0774-4577-8C70-B332E131D847}"/>
               </a:ext>
             </a:extLst>
           </p:cNvPr>
@@ -36686,7 +36686,7 @@
           <p:cNvPr id="6" name="Freeform 6">
             <a:extLst xmlns:a="http://schemas.openxmlformats.org/drawingml/2006/main">
               <a:ext uri="{FF2B5EF4-FFF2-40B4-BE49-F238E27FC236}">
-                <a16:creationId xmlns:a16="http://schemas.microsoft.com/office/drawing/2014/main" id="{85D4C207-C3E2-4119-87FD-64B285E314D9}"/>
+                <a16:creationId xmlns:a16="http://schemas.microsoft.com/office/drawing/2014/main" id="{D76CA9EC-1DBF-4907-B068-95AB71649EAC}"/>
               </a:ext>
             </a:extLst>
           </p:cNvPr>
@@ -36724,7 +36724,7 @@
             </a:pathLst>
           </a:custGeom>
           <a:blipFill xmlns:a="http://schemas.openxmlformats.org/drawingml/2006/main">
-            <a:blip xmlns:r="http://schemas.openxmlformats.org/officeDocument/2006/relationships" r:embed="R3d864407df184c72"/>
+            <a:blip xmlns:r="http://schemas.openxmlformats.org/officeDocument/2006/relationships" r:embed="Rb56a6fafb1ac45b8"/>
             <a:stretch>
               <a:fillRect l="0" t="0" r="0" b="0"/>
             </a:stretch>
@@ -36736,7 +36736,7 @@
           <p:cNvPr id="7" name="Freeform 7">
             <a:extLst xmlns:a="http://schemas.openxmlformats.org/drawingml/2006/main">
               <a:ext uri="{FF2B5EF4-FFF2-40B4-BE49-F238E27FC236}">
-                <a16:creationId xmlns:a16="http://schemas.microsoft.com/office/drawing/2014/main" id="{866AF0D6-E60E-4547-BF20-5E9538E8EB37}"/>
+                <a16:creationId xmlns:a16="http://schemas.microsoft.com/office/drawing/2014/main" id="{D331004C-845B-4F36-9336-D201C46A39DF}"/>
               </a:ext>
             </a:extLst>
           </p:cNvPr>
@@ -36774,10 +36774,10 @@
             </a:pathLst>
           </a:custGeom>
           <a:blipFill xmlns:a="http://schemas.openxmlformats.org/drawingml/2006/main">
-            <a:blip xmlns:r="http://schemas.openxmlformats.org/officeDocument/2006/relationships" r:embed="R9a634155974c49ef">
+            <a:blip xmlns:r="http://schemas.openxmlformats.org/officeDocument/2006/relationships" r:embed="Rc71ce6855213436f">
               <a:extLst>
                 <a:ext uri="{96DAC541-7B7A-43D3-8B79-37D633B846F1}">
-                  <asvg:svgBlip xmlns:asvg="http://schemas.microsoft.com/office/drawing/2016/SVG/main" r:embed="R857cf036bf894848"/>
+                  <asvg:svgBlip xmlns:asvg="http://schemas.microsoft.com/office/drawing/2016/SVG/main" r:embed="R207c0be9f82e4d56"/>
                 </a:ext>
               </a:extLst>
             </a:blip>
@@ -36792,7 +36792,7 @@
           <p:cNvPr id="8" name="Freeform 8">
             <a:extLst xmlns:a="http://schemas.openxmlformats.org/drawingml/2006/main">
               <a:ext uri="{FF2B5EF4-FFF2-40B4-BE49-F238E27FC236}">
-                <a16:creationId xmlns:a16="http://schemas.microsoft.com/office/drawing/2014/main" id="{3215C087-C1F2-44E8-A3A8-F6E8E7159D6E}"/>
+                <a16:creationId xmlns:a16="http://schemas.microsoft.com/office/drawing/2014/main" id="{19455DD3-676A-4510-924C-1F029652E72E}"/>
               </a:ext>
             </a:extLst>
           </p:cNvPr>
@@ -36830,10 +36830,10 @@
             </a:pathLst>
           </a:custGeom>
           <a:blipFill xmlns:a="http://schemas.openxmlformats.org/drawingml/2006/main">
-            <a:blip xmlns:r="http://schemas.openxmlformats.org/officeDocument/2006/relationships" r:embed="R9a634155974c49ef">
+            <a:blip xmlns:r="http://schemas.openxmlformats.org/officeDocument/2006/relationships" r:embed="Rc71ce6855213436f">
               <a:extLst>
                 <a:ext uri="{96DAC541-7B7A-43D3-8B79-37D633B846F1}">
-                  <asvg:svgBlip xmlns:asvg="http://schemas.microsoft.com/office/drawing/2016/SVG/main" r:embed="R857cf036bf894848"/>
+                  <asvg:svgBlip xmlns:asvg="http://schemas.microsoft.com/office/drawing/2016/SVG/main" r:embed="R207c0be9f82e4d56"/>
                 </a:ext>
               </a:extLst>
             </a:blip>
@@ -36848,7 +36848,7 @@
           <p:cNvPr id="10" name="Freeform 10">
             <a:extLst xmlns:a="http://schemas.openxmlformats.org/drawingml/2006/main">
               <a:ext uri="{FF2B5EF4-FFF2-40B4-BE49-F238E27FC236}">
-                <a16:creationId xmlns:a16="http://schemas.microsoft.com/office/drawing/2014/main" id="{47ADDFD4-798A-42D8-A4F9-24CB8A988B4E}"/>
+                <a16:creationId xmlns:a16="http://schemas.microsoft.com/office/drawing/2014/main" id="{ECDE063D-F80C-47BB-A75C-6007080941F1}"/>
               </a:ext>
             </a:extLst>
           </p:cNvPr>
@@ -36907,7 +36907,7 @@
           <p:cNvPr id="11" name="TextBox 11">
             <a:extLst xmlns:a="http://schemas.openxmlformats.org/drawingml/2006/main">
               <a:ext uri="{FF2B5EF4-FFF2-40B4-BE49-F238E27FC236}">
-                <a16:creationId xmlns:a16="http://schemas.microsoft.com/office/drawing/2014/main" id="{2BC03FF9-0027-4AA2-AF1F-F9E4E94E58EE}"/>
+                <a16:creationId xmlns:a16="http://schemas.microsoft.com/office/drawing/2014/main" id="{87334B8A-5718-4AD9-8C27-664161493CBE}"/>
               </a:ext>
             </a:extLst>
           </p:cNvPr>
@@ -36947,7 +36947,7 @@
           <p:cNvPr id="12" name="Freeform 12">
             <a:extLst xmlns:a="http://schemas.openxmlformats.org/drawingml/2006/main">
               <a:ext uri="{FF2B5EF4-FFF2-40B4-BE49-F238E27FC236}">
-                <a16:creationId xmlns:a16="http://schemas.microsoft.com/office/drawing/2014/main" id="{C6801EF2-4827-4C51-BF07-780EEBC59BB8}"/>
+                <a16:creationId xmlns:a16="http://schemas.microsoft.com/office/drawing/2014/main" id="{1A513757-3B2B-40CA-A1CB-F0DD83349622}"/>
               </a:ext>
             </a:extLst>
           </p:cNvPr>
@@ -36995,7 +36995,7 @@
           <p:cNvPr id="13" name="TextBox 13">
             <a:extLst xmlns:a="http://schemas.openxmlformats.org/drawingml/2006/main">
               <a:ext uri="{FF2B5EF4-FFF2-40B4-BE49-F238E27FC236}">
-                <a16:creationId xmlns:a16="http://schemas.microsoft.com/office/drawing/2014/main" id="{9E7C1D47-9D76-4713-8406-E310BECA5C34}"/>
+                <a16:creationId xmlns:a16="http://schemas.microsoft.com/office/drawing/2014/main" id="{F74DA85D-3C7C-4149-B273-DF4FEF2B9976}"/>
               </a:ext>
             </a:extLst>
           </p:cNvPr>
@@ -37047,7 +37047,7 @@
           <p:cNvPr id="14" name="TextBox 14">
             <a:extLst xmlns:a="http://schemas.openxmlformats.org/drawingml/2006/main">
               <a:ext uri="{FF2B5EF4-FFF2-40B4-BE49-F238E27FC236}">
-                <a16:creationId xmlns:a16="http://schemas.microsoft.com/office/drawing/2014/main" id="{F6916723-18DA-4188-88AD-0CC7ACBD962A}"/>
+                <a16:creationId xmlns:a16="http://schemas.microsoft.com/office/drawing/2014/main" id="{7749389F-73AE-495D-B2DD-5637ACEBF694}"/>
               </a:ext>
             </a:extLst>
           </p:cNvPr>
@@ -37099,7 +37099,7 @@
           <p:cNvPr id="15" name="TextBox 15">
             <a:extLst xmlns:a="http://schemas.openxmlformats.org/drawingml/2006/main">
               <a:ext uri="{FF2B5EF4-FFF2-40B4-BE49-F238E27FC236}">
-                <a16:creationId xmlns:a16="http://schemas.microsoft.com/office/drawing/2014/main" id="{28577912-9902-462E-BC60-D4C1C409F993}"/>
+                <a16:creationId xmlns:a16="http://schemas.microsoft.com/office/drawing/2014/main" id="{1D65F3CE-3A72-4AEA-96E4-642FB2AE7F9B}"/>
               </a:ext>
             </a:extLst>
           </p:cNvPr>
@@ -37260,7 +37260,7 @@
           <p:cNvPr id="16" name="TextBox 16">
             <a:extLst xmlns:a="http://schemas.openxmlformats.org/drawingml/2006/main">
               <a:ext uri="{FF2B5EF4-FFF2-40B4-BE49-F238E27FC236}">
-                <a16:creationId xmlns:a16="http://schemas.microsoft.com/office/drawing/2014/main" id="{D0114DFC-003F-48B8-8DF5-0FBA13A77A7B}"/>
+                <a16:creationId xmlns:a16="http://schemas.microsoft.com/office/drawing/2014/main" id="{6494AE3F-DB18-4915-8E60-86D941F74AC5}"/>
               </a:ext>
             </a:extLst>
           </p:cNvPr>
@@ -37314,7 +37314,7 @@
           <p:cNvPr id="17" name="TextBox 17">
             <a:extLst xmlns:a="http://schemas.openxmlformats.org/drawingml/2006/main">
               <a:ext uri="{FF2B5EF4-FFF2-40B4-BE49-F238E27FC236}">
-                <a16:creationId xmlns:a16="http://schemas.microsoft.com/office/drawing/2014/main" id="{29084B8D-54DB-4DB4-92CF-87BA95DC86C1}"/>
+                <a16:creationId xmlns:a16="http://schemas.microsoft.com/office/drawing/2014/main" id="{8C4DAE6C-DD8A-44BF-B649-987B2153B974}"/>
               </a:ext>
             </a:extLst>
           </p:cNvPr>
@@ -37366,7 +37366,7 @@
           <p:cNvPr id="18" name="TextBox 18">
             <a:extLst xmlns:a="http://schemas.openxmlformats.org/drawingml/2006/main">
               <a:ext uri="{FF2B5EF4-FFF2-40B4-BE49-F238E27FC236}">
-                <a16:creationId xmlns:a16="http://schemas.microsoft.com/office/drawing/2014/main" id="{C988A1CF-2910-4E79-8034-1F6B67159F02}"/>
+                <a16:creationId xmlns:a16="http://schemas.microsoft.com/office/drawing/2014/main" id="{BA53E170-8D4C-4180-B72E-4816E5553D93}"/>
               </a:ext>
             </a:extLst>
           </p:cNvPr>
@@ -37418,7 +37418,7 @@
           <p:cNvPr id="20" name="Freeform 20">
             <a:extLst xmlns:a="http://schemas.openxmlformats.org/drawingml/2006/main">
               <a:ext uri="{FF2B5EF4-FFF2-40B4-BE49-F238E27FC236}">
-                <a16:creationId xmlns:a16="http://schemas.microsoft.com/office/drawing/2014/main" id="{9E100D11-5138-4D4E-8481-D00CCD46B5E3}"/>
+                <a16:creationId xmlns:a16="http://schemas.microsoft.com/office/drawing/2014/main" id="{3C175612-76B4-4DA1-A70C-7EA93F2749E6}"/>
               </a:ext>
             </a:extLst>
           </p:cNvPr>
@@ -37477,7 +37477,7 @@
           <p:cNvPr id="21" name="TextBox 21">
             <a:extLst xmlns:a="http://schemas.openxmlformats.org/drawingml/2006/main">
               <a:ext uri="{FF2B5EF4-FFF2-40B4-BE49-F238E27FC236}">
-                <a16:creationId xmlns:a16="http://schemas.microsoft.com/office/drawing/2014/main" id="{F82C7D64-C48E-4BA9-82D0-A08E6E63BD62}"/>
+                <a16:creationId xmlns:a16="http://schemas.microsoft.com/office/drawing/2014/main" id="{7398A68A-6B44-4A9A-ACD0-CD6EE771A4D8}"/>
               </a:ext>
             </a:extLst>
           </p:cNvPr>
@@ -37517,7 +37517,7 @@
           <p:cNvPr id="22" name="Freeform 22">
             <a:extLst xmlns:a="http://schemas.openxmlformats.org/drawingml/2006/main">
               <a:ext uri="{FF2B5EF4-FFF2-40B4-BE49-F238E27FC236}">
-                <a16:creationId xmlns:a16="http://schemas.microsoft.com/office/drawing/2014/main" id="{4D66FC4C-65E8-4048-A199-B690B187D4C4}"/>
+                <a16:creationId xmlns:a16="http://schemas.microsoft.com/office/drawing/2014/main" id="{8D2BF20E-56A6-4144-8711-7B2410C9C336}"/>
               </a:ext>
             </a:extLst>
           </p:cNvPr>
@@ -37565,7 +37565,7 @@
           <p:cNvPr id="23" name="TextBox 23">
             <a:extLst xmlns:a="http://schemas.openxmlformats.org/drawingml/2006/main">
               <a:ext uri="{FF2B5EF4-FFF2-40B4-BE49-F238E27FC236}">
-                <a16:creationId xmlns:a16="http://schemas.microsoft.com/office/drawing/2014/main" id="{723084BD-37B0-4755-AFC7-F1FC68C4DA45}"/>
+                <a16:creationId xmlns:a16="http://schemas.microsoft.com/office/drawing/2014/main" id="{EED12B3B-FB4C-4063-8AFC-9CAB0D4418BD}"/>
               </a:ext>
             </a:extLst>
           </p:cNvPr>
@@ -37617,7 +37617,7 @@
           <p:cNvPr id="24" name="TextBox 24">
             <a:extLst xmlns:a="http://schemas.openxmlformats.org/drawingml/2006/main">
               <a:ext uri="{FF2B5EF4-FFF2-40B4-BE49-F238E27FC236}">
-                <a16:creationId xmlns:a16="http://schemas.microsoft.com/office/drawing/2014/main" id="{7E34437A-3390-4FA4-97F1-26BEE2FC738F}"/>
+                <a16:creationId xmlns:a16="http://schemas.microsoft.com/office/drawing/2014/main" id="{76F8E23B-003C-4B28-9068-5D78B8D7F960}"/>
               </a:ext>
             </a:extLst>
           </p:cNvPr>
@@ -37669,7 +37669,7 @@
           <p:cNvPr id="25" name="Freeform 25">
             <a:extLst xmlns:a="http://schemas.openxmlformats.org/drawingml/2006/main">
               <a:ext uri="{FF2B5EF4-FFF2-40B4-BE49-F238E27FC236}">
-                <a16:creationId xmlns:a16="http://schemas.microsoft.com/office/drawing/2014/main" id="{C8CCB0F5-D8EE-4B7E-A1E4-CF63CB24D1F8}"/>
+                <a16:creationId xmlns:a16="http://schemas.microsoft.com/office/drawing/2014/main" id="{E226617A-E614-41E2-BE13-43B1C7B051CE}"/>
               </a:ext>
             </a:extLst>
           </p:cNvPr>
@@ -37717,7 +37717,7 @@
           <p:cNvPr id="26" name="Freeform 26">
             <a:extLst xmlns:a="http://schemas.openxmlformats.org/drawingml/2006/main">
               <a:ext uri="{FF2B5EF4-FFF2-40B4-BE49-F238E27FC236}">
-                <a16:creationId xmlns:a16="http://schemas.microsoft.com/office/drawing/2014/main" id="{6C304718-B852-4FB8-B077-1DDD81569A1B}"/>
+                <a16:creationId xmlns:a16="http://schemas.microsoft.com/office/drawing/2014/main" id="{1273C16E-D9B4-4989-B0C4-E868E9D8E2D3}"/>
               </a:ext>
             </a:extLst>
           </p:cNvPr>
@@ -37765,7 +37765,7 @@
           <p:cNvPr id="27" name="內容_9_檢查V7–V11：物理與排隊">
             <a:extLst xmlns:a="http://schemas.openxmlformats.org/drawingml/2006/main">
               <a:ext uri="{FF2B5EF4-FFF2-40B4-BE49-F238E27FC236}">
-                <a16:creationId xmlns:a16="http://schemas.microsoft.com/office/drawing/2014/main" id="{DD4AFBEA-4F5E-4FDC-A78B-FC5507C28516}"/>
+                <a16:creationId xmlns:a16="http://schemas.microsoft.com/office/drawing/2014/main" id="{51DE7E38-52BD-43A6-A37D-CC82041E6644}"/>
               </a:ext>
             </a:extLst>
           </p:cNvPr>
@@ -37923,7 +37923,7 @@
           <p:cNvPr id="28" name="內容_9_將模型對回物理與排隊">
             <a:extLst xmlns:a="http://schemas.openxmlformats.org/drawingml/2006/main">
               <a:ext uri="{FF2B5EF4-FFF2-40B4-BE49-F238E27FC236}">
-                <a16:creationId xmlns:a16="http://schemas.microsoft.com/office/drawing/2014/main" id="{22A2781B-4B68-42D8-9611-20F5865A1532}"/>
+                <a16:creationId xmlns:a16="http://schemas.microsoft.com/office/drawing/2014/main" id="{18422F5E-4934-4025-97DE-E5894ABE3FD4}"/>
               </a:ext>
             </a:extLst>
           </p:cNvPr>
@@ -38081,7 +38081,7 @@
           <p:cNvPr id="29" name="">
             <a:extLst xmlns:a="http://schemas.openxmlformats.org/drawingml/2006/main">
               <a:ext uri="{FF2B5EF4-FFF2-40B4-BE49-F238E27FC236}">
-                <a16:creationId xmlns:a16="http://schemas.microsoft.com/office/drawing/2014/main" id="{AD31A027-BB66-4FB3-8150-341D1474A357}"/>
+                <a16:creationId xmlns:a16="http://schemas.microsoft.com/office/drawing/2014/main" id="{4D03F7AA-BFB2-4903-85CD-78C92720A3B3}"/>
               </a:ext>
             </a:extLst>
           </p:cNvPr>
@@ -38250,7 +38250,7 @@
                           <a:ea typeface="Microsoft JhengHei"/>
                           <a:cs typeface="Microsoft JhengHei"/>
                         </a:rPr>
-                        <a:t>V7 清洗產能</a:t>
+                        <a:t>清洗產能檢查（V7）</a:t>
                       </a:r>
                     </a:p>
                   </a:txBody>
@@ -38366,7 +38366,7 @@
                           <a:ea typeface="Microsoft JhengHei"/>
                           <a:cs typeface="Microsoft JhengHei"/>
                         </a:rPr>
-                        <a:t>V8 停機占比</a:t>
+                        <a:t>停機占比檢查（V8）</a:t>
                       </a:r>
                     </a:p>
                   </a:txBody>
@@ -38408,7 +38408,7 @@
                           <a:ea typeface="Microsoft JhengHei"/>
                           <a:cs typeface="Microsoft JhengHei"/>
                         </a:rPr>
-                        <a:t>S0均值3.80%；理論4%</a:t>
+                        <a:t>平日基準情境（S0）均值3.80%；理論4%</a:t>
                       </a:r>
                     </a:p>
                   </a:txBody>
@@ -38482,7 +38482,7 @@
                           <a:ea typeface="Microsoft JhengHei"/>
                           <a:cs typeface="Microsoft JhengHei"/>
                         </a:rPr>
-                        <a:t>V9 利特爾定律</a:t>
+                        <a:t>利特爾定律檢查（V9）</a:t>
                       </a:r>
                     </a:p>
                   </a:txBody>
@@ -38598,7 +38598,7 @@
                           <a:ea typeface="Microsoft JhengHei"/>
                           <a:cs typeface="Microsoft JhengHei"/>
                         </a:rPr>
-                        <a:t>V10 五倍壓力</a:t>
+                        <a:t>五倍壓力檢查（V10）</a:t>
                       </a:r>
                     </a:p>
                   </a:txBody>
@@ -38714,7 +38714,7 @@
                           <a:ea typeface="Microsoft JhengHei"/>
                           <a:cs typeface="Microsoft JhengHei"/>
                         </a:rPr>
-                        <a:t>V11 無長時停滯</a:t>
+                        <a:t>無長時停滯檢查（V11）</a:t>
                       </a:r>
                     </a:p>
                   </a:txBody>
@@ -38824,7 +38824,7 @@
           <p:cNvPr id="30" name="內容_9_負載比例＝到達率÷處理能力；">
             <a:extLst xmlns:a="http://schemas.openxmlformats.org/drawingml/2006/main">
               <a:ext uri="{FF2B5EF4-FFF2-40B4-BE49-F238E27FC236}">
-                <a16:creationId xmlns:a16="http://schemas.microsoft.com/office/drawing/2014/main" id="{FC8C63BC-333A-4C50-9BE1-DA3201A6FB87}"/>
+                <a16:creationId xmlns:a16="http://schemas.microsoft.com/office/drawing/2014/main" id="{E2F09C10-1542-4DF4-A85B-FA783791A3C9}"/>
               </a:ext>
             </a:extLst>
           </p:cNvPr>
@@ -38982,7 +38982,7 @@
           <p:cNvPr id="31" name="內容_9_1920次不重複原生運行；1">
             <a:extLst xmlns:a="http://schemas.openxmlformats.org/drawingml/2006/main">
               <a:ext uri="{FF2B5EF4-FFF2-40B4-BE49-F238E27FC236}">
-                <a16:creationId xmlns:a16="http://schemas.microsoft.com/office/drawing/2014/main" id="{5454E7FF-B754-4DA6-979E-61D07E1BAB58}"/>
+                <a16:creationId xmlns:a16="http://schemas.microsoft.com/office/drawing/2014/main" id="{485505A5-367B-413B-8F70-BCFBE90A4C60}"/>
               </a:ext>
             </a:extLst>
           </p:cNvPr>
@@ -39138,7 +39138,7 @@
     </p:spTree>
     <p:extLst>
       <p:ext uri="{BB962C8B-B14F-4D97-AF65-F5344CB8AC3E}">
-        <p14:creationId xmlns:p14="http://schemas.microsoft.com/office/powerpoint/2010/main" val="1375023001"/>
+        <p14:creationId xmlns:p14="http://schemas.microsoft.com/office/powerpoint/2010/main" val="1418929552"/>
       </p:ext>
     </p:extLst>
   </p:cSld>
